--- a/Paper/Liver_Disease_Paper/Iteration_0/Paper figures.pptx
+++ b/Paper/Liver_Disease_Paper/Iteration_0/Paper figures.pptx
@@ -2,13 +2,14 @@
 <file path=ppt/presentation.xml><?xml version="1.0" encoding="utf-8"?>
 <p:presentation xmlns:a="http://schemas.openxmlformats.org/drawingml/2006/main" xmlns:r="http://schemas.openxmlformats.org/officeDocument/2006/relationships" xmlns:p="http://schemas.openxmlformats.org/presentationml/2006/main" saveSubsetFonts="1">
   <p:sldMasterIdLst>
-    <p:sldMasterId id="2147483660" r:id="rId1"/>
+    <p:sldMasterId id="2147483672" r:id="rId1"/>
   </p:sldMasterIdLst>
   <p:sldIdLst>
     <p:sldId id="257" r:id="rId2"/>
     <p:sldId id="259" r:id="rId3"/>
+    <p:sldId id="260" r:id="rId4"/>
   </p:sldIdLst>
-  <p:sldSz cx="36576000" cy="36576000"/>
+  <p:sldSz cx="18288000" cy="18288000"/>
   <p:notesSz cx="6858000" cy="9144000"/>
   <p:defaultTextStyle>
     <a:defPPr>
@@ -105,6 +106,11 @@
       </a:defRPr>
     </a:lvl9pPr>
   </p:defaultTextStyle>
+  <p:extLst>
+    <p:ext uri="{EFAFB233-063F-42B5-8137-9DF3F51BA10A}">
+      <p15:sldGuideLst xmlns:p15="http://schemas.microsoft.com/office/powerpoint/2012/main"/>
+    </p:ext>
+  </p:extLst>
 </p:presentation>
 </file>
 
@@ -137,15 +143,15 @@
         </p:nvSpPr>
         <p:spPr>
           <a:xfrm>
-            <a:off x="2743200" y="5985936"/>
-            <a:ext cx="31089600" cy="12733867"/>
+            <a:off x="1371600" y="2992968"/>
+            <a:ext cx="15544800" cy="6366933"/>
           </a:xfrm>
         </p:spPr>
         <p:txBody>
           <a:bodyPr anchor="b"/>
           <a:lstStyle>
             <a:lvl1pPr algn="ctr">
-              <a:defRPr sz="24000"/>
+              <a:defRPr sz="12000"/>
             </a:lvl1pPr>
           </a:lstStyle>
           <a:p>
@@ -169,8 +175,8 @@
         </p:nvSpPr>
         <p:spPr>
           <a:xfrm>
-            <a:off x="4572000" y="19210869"/>
-            <a:ext cx="27432000" cy="8830731"/>
+            <a:off x="2286000" y="9605435"/>
+            <a:ext cx="13716000" cy="4415365"/>
           </a:xfrm>
         </p:spPr>
         <p:txBody>
@@ -178,39 +184,39 @@
           <a:lstStyle>
             <a:lvl1pPr marL="0" indent="0" algn="ctr">
               <a:buNone/>
-              <a:defRPr sz="9600"/>
+              <a:defRPr sz="4800"/>
             </a:lvl1pPr>
-            <a:lvl2pPr marL="1828800" indent="0" algn="ctr">
+            <a:lvl2pPr marL="914400" indent="0" algn="ctr">
               <a:buNone/>
-              <a:defRPr sz="8000"/>
+              <a:defRPr sz="4000"/>
             </a:lvl2pPr>
-            <a:lvl3pPr marL="3657600" indent="0" algn="ctr">
+            <a:lvl3pPr marL="1828800" indent="0" algn="ctr">
               <a:buNone/>
-              <a:defRPr sz="7200"/>
+              <a:defRPr sz="3600"/>
             </a:lvl3pPr>
-            <a:lvl4pPr marL="5486400" indent="0" algn="ctr">
+            <a:lvl4pPr marL="2743200" indent="0" algn="ctr">
               <a:buNone/>
-              <a:defRPr sz="6400"/>
+              <a:defRPr sz="3200"/>
             </a:lvl4pPr>
-            <a:lvl5pPr marL="7315200" indent="0" algn="ctr">
+            <a:lvl5pPr marL="3657600" indent="0" algn="ctr">
               <a:buNone/>
-              <a:defRPr sz="6400"/>
+              <a:defRPr sz="3200"/>
             </a:lvl5pPr>
-            <a:lvl6pPr marL="9144000" indent="0" algn="ctr">
+            <a:lvl6pPr marL="4572000" indent="0" algn="ctr">
               <a:buNone/>
-              <a:defRPr sz="6400"/>
+              <a:defRPr sz="3200"/>
             </a:lvl6pPr>
-            <a:lvl7pPr marL="10972800" indent="0" algn="ctr">
+            <a:lvl7pPr marL="5486400" indent="0" algn="ctr">
               <a:buNone/>
-              <a:defRPr sz="6400"/>
+              <a:defRPr sz="3200"/>
             </a:lvl7pPr>
-            <a:lvl8pPr marL="12801600" indent="0" algn="ctr">
+            <a:lvl8pPr marL="6400800" indent="0" algn="ctr">
               <a:buNone/>
-              <a:defRPr sz="6400"/>
+              <a:defRPr sz="3200"/>
             </a:lvl8pPr>
-            <a:lvl9pPr marL="14630400" indent="0" algn="ctr">
+            <a:lvl9pPr marL="7315200" indent="0" algn="ctr">
               <a:buNone/>
-              <a:defRPr sz="6400"/>
+              <a:defRPr sz="3200"/>
             </a:lvl9pPr>
           </a:lstStyle>
           <a:p>
@@ -239,7 +245,7 @@
           <a:p>
             <a:fld id="{1F57380E-2143-4096-B547-DE8B390321C5}" type="datetimeFigureOut">
               <a:rPr lang="en-US" smtClean="0"/>
-              <a:t>7/27/2020</a:t>
+              <a:t>7/28/2020</a:t>
             </a:fld>
             <a:endParaRPr lang="en-US"/>
           </a:p>
@@ -290,7 +296,7 @@
     </p:spTree>
     <p:extLst>
       <p:ext uri="{BB962C8B-B14F-4D97-AF65-F5344CB8AC3E}">
-        <p14:creationId xmlns:p14="http://schemas.microsoft.com/office/powerpoint/2010/main" val="548248561"/>
+        <p14:creationId xmlns:p14="http://schemas.microsoft.com/office/powerpoint/2010/main" val="1962880955"/>
       </p:ext>
     </p:extLst>
   </p:cSld>
@@ -409,7 +415,7 @@
           <a:p>
             <a:fld id="{1F57380E-2143-4096-B547-DE8B390321C5}" type="datetimeFigureOut">
               <a:rPr lang="en-US" smtClean="0"/>
-              <a:t>7/27/2020</a:t>
+              <a:t>7/28/2020</a:t>
             </a:fld>
             <a:endParaRPr lang="en-US"/>
           </a:p>
@@ -460,7 +466,7 @@
     </p:spTree>
     <p:extLst>
       <p:ext uri="{BB962C8B-B14F-4D97-AF65-F5344CB8AC3E}">
-        <p14:creationId xmlns:p14="http://schemas.microsoft.com/office/powerpoint/2010/main" val="181400759"/>
+        <p14:creationId xmlns:p14="http://schemas.microsoft.com/office/powerpoint/2010/main" val="1748969603"/>
       </p:ext>
     </p:extLst>
   </p:cSld>
@@ -499,8 +505,8 @@
         </p:nvSpPr>
         <p:spPr>
           <a:xfrm>
-            <a:off x="26174702" y="1947334"/>
-            <a:ext cx="7886700" cy="30996469"/>
+            <a:off x="13087351" y="973667"/>
+            <a:ext cx="3943350" cy="15498235"/>
           </a:xfrm>
         </p:spPr>
         <p:txBody>
@@ -527,8 +533,8 @@
         </p:nvSpPr>
         <p:spPr>
           <a:xfrm>
-            <a:off x="2514602" y="1947334"/>
-            <a:ext cx="23202900" cy="30996469"/>
+            <a:off x="1257301" y="973667"/>
+            <a:ext cx="11601450" cy="15498235"/>
           </a:xfrm>
         </p:spPr>
         <p:txBody>
@@ -589,7 +595,7 @@
           <a:p>
             <a:fld id="{1F57380E-2143-4096-B547-DE8B390321C5}" type="datetimeFigureOut">
               <a:rPr lang="en-US" smtClean="0"/>
-              <a:t>7/27/2020</a:t>
+              <a:t>7/28/2020</a:t>
             </a:fld>
             <a:endParaRPr lang="en-US"/>
           </a:p>
@@ -640,7 +646,7 @@
     </p:spTree>
     <p:extLst>
       <p:ext uri="{BB962C8B-B14F-4D97-AF65-F5344CB8AC3E}">
-        <p14:creationId xmlns:p14="http://schemas.microsoft.com/office/powerpoint/2010/main" val="1713243080"/>
+        <p14:creationId xmlns:p14="http://schemas.microsoft.com/office/powerpoint/2010/main" val="1671480217"/>
       </p:ext>
     </p:extLst>
   </p:cSld>
@@ -759,7 +765,7 @@
           <a:p>
             <a:fld id="{1F57380E-2143-4096-B547-DE8B390321C5}" type="datetimeFigureOut">
               <a:rPr lang="en-US" smtClean="0"/>
-              <a:t>7/27/2020</a:t>
+              <a:t>7/28/2020</a:t>
             </a:fld>
             <a:endParaRPr lang="en-US"/>
           </a:p>
@@ -810,7 +816,7 @@
     </p:spTree>
     <p:extLst>
       <p:ext uri="{BB962C8B-B14F-4D97-AF65-F5344CB8AC3E}">
-        <p14:creationId xmlns:p14="http://schemas.microsoft.com/office/powerpoint/2010/main" val="2747224977"/>
+        <p14:creationId xmlns:p14="http://schemas.microsoft.com/office/powerpoint/2010/main" val="3790976357"/>
       </p:ext>
     </p:extLst>
   </p:cSld>
@@ -849,15 +855,15 @@
         </p:nvSpPr>
         <p:spPr>
           <a:xfrm>
-            <a:off x="2495552" y="9118611"/>
-            <a:ext cx="31546800" cy="15214597"/>
+            <a:off x="1247776" y="4559305"/>
+            <a:ext cx="15773400" cy="7607299"/>
           </a:xfrm>
         </p:spPr>
         <p:txBody>
           <a:bodyPr anchor="b"/>
           <a:lstStyle>
             <a:lvl1pPr>
-              <a:defRPr sz="24000"/>
+              <a:defRPr sz="12000"/>
             </a:lvl1pPr>
           </a:lstStyle>
           <a:p>
@@ -881,8 +887,8 @@
         </p:nvSpPr>
         <p:spPr>
           <a:xfrm>
-            <a:off x="2495552" y="24477144"/>
-            <a:ext cx="31546800" cy="8000997"/>
+            <a:off x="1247776" y="12238572"/>
+            <a:ext cx="15773400" cy="4000499"/>
           </a:xfrm>
         </p:spPr>
         <p:txBody>
@@ -890,15 +896,15 @@
           <a:lstStyle>
             <a:lvl1pPr marL="0" indent="0">
               <a:buNone/>
-              <a:defRPr sz="9600">
+              <a:defRPr sz="4800">
                 <a:solidFill>
                   <a:schemeClr val="tx1"/>
                 </a:solidFill>
               </a:defRPr>
             </a:lvl1pPr>
-            <a:lvl2pPr marL="1828800" indent="0">
+            <a:lvl2pPr marL="914400" indent="0">
               <a:buNone/>
-              <a:defRPr sz="8000">
+              <a:defRPr sz="4000">
                 <a:solidFill>
                   <a:schemeClr val="tx1">
                     <a:tint val="75000"/>
@@ -906,9 +912,9 @@
                 </a:solidFill>
               </a:defRPr>
             </a:lvl2pPr>
-            <a:lvl3pPr marL="3657600" indent="0">
+            <a:lvl3pPr marL="1828800" indent="0">
               <a:buNone/>
-              <a:defRPr sz="7200">
+              <a:defRPr sz="3600">
                 <a:solidFill>
                   <a:schemeClr val="tx1">
                     <a:tint val="75000"/>
@@ -916,9 +922,9 @@
                 </a:solidFill>
               </a:defRPr>
             </a:lvl3pPr>
-            <a:lvl4pPr marL="5486400" indent="0">
+            <a:lvl4pPr marL="2743200" indent="0">
               <a:buNone/>
-              <a:defRPr sz="6400">
+              <a:defRPr sz="3200">
                 <a:solidFill>
                   <a:schemeClr val="tx1">
                     <a:tint val="75000"/>
@@ -926,9 +932,9 @@
                 </a:solidFill>
               </a:defRPr>
             </a:lvl4pPr>
-            <a:lvl5pPr marL="7315200" indent="0">
+            <a:lvl5pPr marL="3657600" indent="0">
               <a:buNone/>
-              <a:defRPr sz="6400">
+              <a:defRPr sz="3200">
                 <a:solidFill>
                   <a:schemeClr val="tx1">
                     <a:tint val="75000"/>
@@ -936,9 +942,9 @@
                 </a:solidFill>
               </a:defRPr>
             </a:lvl5pPr>
-            <a:lvl6pPr marL="9144000" indent="0">
+            <a:lvl6pPr marL="4572000" indent="0">
               <a:buNone/>
-              <a:defRPr sz="6400">
+              <a:defRPr sz="3200">
                 <a:solidFill>
                   <a:schemeClr val="tx1">
                     <a:tint val="75000"/>
@@ -946,9 +952,9 @@
                 </a:solidFill>
               </a:defRPr>
             </a:lvl6pPr>
-            <a:lvl7pPr marL="10972800" indent="0">
+            <a:lvl7pPr marL="5486400" indent="0">
               <a:buNone/>
-              <a:defRPr sz="6400">
+              <a:defRPr sz="3200">
                 <a:solidFill>
                   <a:schemeClr val="tx1">
                     <a:tint val="75000"/>
@@ -956,9 +962,9 @@
                 </a:solidFill>
               </a:defRPr>
             </a:lvl7pPr>
-            <a:lvl8pPr marL="12801600" indent="0">
+            <a:lvl8pPr marL="6400800" indent="0">
               <a:buNone/>
-              <a:defRPr sz="6400">
+              <a:defRPr sz="3200">
                 <a:solidFill>
                   <a:schemeClr val="tx1">
                     <a:tint val="75000"/>
@@ -966,9 +972,9 @@
                 </a:solidFill>
               </a:defRPr>
             </a:lvl8pPr>
-            <a:lvl9pPr marL="14630400" indent="0">
+            <a:lvl9pPr marL="7315200" indent="0">
               <a:buNone/>
-              <a:defRPr sz="6400">
+              <a:defRPr sz="3200">
                 <a:solidFill>
                   <a:schemeClr val="tx1">
                     <a:tint val="75000"/>
@@ -1003,7 +1009,7 @@
           <a:p>
             <a:fld id="{1F57380E-2143-4096-B547-DE8B390321C5}" type="datetimeFigureOut">
               <a:rPr lang="en-US" smtClean="0"/>
-              <a:t>7/27/2020</a:t>
+              <a:t>7/28/2020</a:t>
             </a:fld>
             <a:endParaRPr lang="en-US"/>
           </a:p>
@@ -1054,7 +1060,7 @@
     </p:spTree>
     <p:extLst>
       <p:ext uri="{BB962C8B-B14F-4D97-AF65-F5344CB8AC3E}">
-        <p14:creationId xmlns:p14="http://schemas.microsoft.com/office/powerpoint/2010/main" val="3049250107"/>
+        <p14:creationId xmlns:p14="http://schemas.microsoft.com/office/powerpoint/2010/main" val="772341631"/>
       </p:ext>
     </p:extLst>
   </p:cSld>
@@ -1116,8 +1122,8 @@
         </p:nvSpPr>
         <p:spPr>
           <a:xfrm>
-            <a:off x="2514600" y="9736667"/>
-            <a:ext cx="15544800" cy="23207136"/>
+            <a:off x="1257300" y="4868333"/>
+            <a:ext cx="7772400" cy="11603568"/>
           </a:xfrm>
         </p:spPr>
         <p:txBody>
@@ -1173,8 +1179,8 @@
         </p:nvSpPr>
         <p:spPr>
           <a:xfrm>
-            <a:off x="18516600" y="9736667"/>
-            <a:ext cx="15544800" cy="23207136"/>
+            <a:off x="9258300" y="4868333"/>
+            <a:ext cx="7772400" cy="11603568"/>
           </a:xfrm>
         </p:spPr>
         <p:txBody>
@@ -1235,7 +1241,7 @@
           <a:p>
             <a:fld id="{1F57380E-2143-4096-B547-DE8B390321C5}" type="datetimeFigureOut">
               <a:rPr lang="en-US" smtClean="0"/>
-              <a:t>7/27/2020</a:t>
+              <a:t>7/28/2020</a:t>
             </a:fld>
             <a:endParaRPr lang="en-US"/>
           </a:p>
@@ -1286,7 +1292,7 @@
     </p:spTree>
     <p:extLst>
       <p:ext uri="{BB962C8B-B14F-4D97-AF65-F5344CB8AC3E}">
-        <p14:creationId xmlns:p14="http://schemas.microsoft.com/office/powerpoint/2010/main" val="3483095303"/>
+        <p14:creationId xmlns:p14="http://schemas.microsoft.com/office/powerpoint/2010/main" val="4074588043"/>
       </p:ext>
     </p:extLst>
   </p:cSld>
@@ -1325,8 +1331,8 @@
         </p:nvSpPr>
         <p:spPr>
           <a:xfrm>
-            <a:off x="2519364" y="1947342"/>
-            <a:ext cx="31546800" cy="7069669"/>
+            <a:off x="1259682" y="973671"/>
+            <a:ext cx="15773400" cy="3534835"/>
           </a:xfrm>
         </p:spPr>
         <p:txBody>
@@ -1353,8 +1359,8 @@
         </p:nvSpPr>
         <p:spPr>
           <a:xfrm>
-            <a:off x="2519368" y="8966203"/>
-            <a:ext cx="15473360" cy="4394197"/>
+            <a:off x="1259684" y="4483101"/>
+            <a:ext cx="7736680" cy="2197099"/>
           </a:xfrm>
         </p:spPr>
         <p:txBody>
@@ -1362,39 +1368,39 @@
           <a:lstStyle>
             <a:lvl1pPr marL="0" indent="0">
               <a:buNone/>
-              <a:defRPr sz="9600" b="1"/>
+              <a:defRPr sz="4800" b="1"/>
             </a:lvl1pPr>
-            <a:lvl2pPr marL="1828800" indent="0">
+            <a:lvl2pPr marL="914400" indent="0">
               <a:buNone/>
-              <a:defRPr sz="8000" b="1"/>
+              <a:defRPr sz="4000" b="1"/>
             </a:lvl2pPr>
-            <a:lvl3pPr marL="3657600" indent="0">
+            <a:lvl3pPr marL="1828800" indent="0">
               <a:buNone/>
-              <a:defRPr sz="7200" b="1"/>
+              <a:defRPr sz="3600" b="1"/>
             </a:lvl3pPr>
-            <a:lvl4pPr marL="5486400" indent="0">
+            <a:lvl4pPr marL="2743200" indent="0">
               <a:buNone/>
-              <a:defRPr sz="6400" b="1"/>
+              <a:defRPr sz="3200" b="1"/>
             </a:lvl4pPr>
-            <a:lvl5pPr marL="7315200" indent="0">
+            <a:lvl5pPr marL="3657600" indent="0">
               <a:buNone/>
-              <a:defRPr sz="6400" b="1"/>
+              <a:defRPr sz="3200" b="1"/>
             </a:lvl5pPr>
-            <a:lvl6pPr marL="9144000" indent="0">
+            <a:lvl6pPr marL="4572000" indent="0">
               <a:buNone/>
-              <a:defRPr sz="6400" b="1"/>
+              <a:defRPr sz="3200" b="1"/>
             </a:lvl6pPr>
-            <a:lvl7pPr marL="10972800" indent="0">
+            <a:lvl7pPr marL="5486400" indent="0">
               <a:buNone/>
-              <a:defRPr sz="6400" b="1"/>
+              <a:defRPr sz="3200" b="1"/>
             </a:lvl7pPr>
-            <a:lvl8pPr marL="12801600" indent="0">
+            <a:lvl8pPr marL="6400800" indent="0">
               <a:buNone/>
-              <a:defRPr sz="6400" b="1"/>
+              <a:defRPr sz="3200" b="1"/>
             </a:lvl8pPr>
-            <a:lvl9pPr marL="14630400" indent="0">
+            <a:lvl9pPr marL="7315200" indent="0">
               <a:buNone/>
-              <a:defRPr sz="6400" b="1"/>
+              <a:defRPr sz="3200" b="1"/>
             </a:lvl9pPr>
           </a:lstStyle>
           <a:p>
@@ -1418,8 +1424,8 @@
         </p:nvSpPr>
         <p:spPr>
           <a:xfrm>
-            <a:off x="2519368" y="13360400"/>
-            <a:ext cx="15473360" cy="19651136"/>
+            <a:off x="1259684" y="6680200"/>
+            <a:ext cx="7736680" cy="9825568"/>
           </a:xfrm>
         </p:spPr>
         <p:txBody>
@@ -1475,8 +1481,8 @@
         </p:nvSpPr>
         <p:spPr>
           <a:xfrm>
-            <a:off x="18516602" y="8966203"/>
-            <a:ext cx="15549564" cy="4394197"/>
+            <a:off x="9258301" y="4483101"/>
+            <a:ext cx="7774782" cy="2197099"/>
           </a:xfrm>
         </p:spPr>
         <p:txBody>
@@ -1484,39 +1490,39 @@
           <a:lstStyle>
             <a:lvl1pPr marL="0" indent="0">
               <a:buNone/>
-              <a:defRPr sz="9600" b="1"/>
+              <a:defRPr sz="4800" b="1"/>
             </a:lvl1pPr>
-            <a:lvl2pPr marL="1828800" indent="0">
+            <a:lvl2pPr marL="914400" indent="0">
               <a:buNone/>
-              <a:defRPr sz="8000" b="1"/>
+              <a:defRPr sz="4000" b="1"/>
             </a:lvl2pPr>
-            <a:lvl3pPr marL="3657600" indent="0">
+            <a:lvl3pPr marL="1828800" indent="0">
               <a:buNone/>
-              <a:defRPr sz="7200" b="1"/>
+              <a:defRPr sz="3600" b="1"/>
             </a:lvl3pPr>
-            <a:lvl4pPr marL="5486400" indent="0">
+            <a:lvl4pPr marL="2743200" indent="0">
               <a:buNone/>
-              <a:defRPr sz="6400" b="1"/>
+              <a:defRPr sz="3200" b="1"/>
             </a:lvl4pPr>
-            <a:lvl5pPr marL="7315200" indent="0">
+            <a:lvl5pPr marL="3657600" indent="0">
               <a:buNone/>
-              <a:defRPr sz="6400" b="1"/>
+              <a:defRPr sz="3200" b="1"/>
             </a:lvl5pPr>
-            <a:lvl6pPr marL="9144000" indent="0">
+            <a:lvl6pPr marL="4572000" indent="0">
               <a:buNone/>
-              <a:defRPr sz="6400" b="1"/>
+              <a:defRPr sz="3200" b="1"/>
             </a:lvl6pPr>
-            <a:lvl7pPr marL="10972800" indent="0">
+            <a:lvl7pPr marL="5486400" indent="0">
               <a:buNone/>
-              <a:defRPr sz="6400" b="1"/>
+              <a:defRPr sz="3200" b="1"/>
             </a:lvl7pPr>
-            <a:lvl8pPr marL="12801600" indent="0">
+            <a:lvl8pPr marL="6400800" indent="0">
               <a:buNone/>
-              <a:defRPr sz="6400" b="1"/>
+              <a:defRPr sz="3200" b="1"/>
             </a:lvl8pPr>
-            <a:lvl9pPr marL="14630400" indent="0">
+            <a:lvl9pPr marL="7315200" indent="0">
               <a:buNone/>
-              <a:defRPr sz="6400" b="1"/>
+              <a:defRPr sz="3200" b="1"/>
             </a:lvl9pPr>
           </a:lstStyle>
           <a:p>
@@ -1540,8 +1546,8 @@
         </p:nvSpPr>
         <p:spPr>
           <a:xfrm>
-            <a:off x="18516602" y="13360400"/>
-            <a:ext cx="15549564" cy="19651136"/>
+            <a:off x="9258301" y="6680200"/>
+            <a:ext cx="7774782" cy="9825568"/>
           </a:xfrm>
         </p:spPr>
         <p:txBody>
@@ -1602,7 +1608,7 @@
           <a:p>
             <a:fld id="{1F57380E-2143-4096-B547-DE8B390321C5}" type="datetimeFigureOut">
               <a:rPr lang="en-US" smtClean="0"/>
-              <a:t>7/27/2020</a:t>
+              <a:t>7/28/2020</a:t>
             </a:fld>
             <a:endParaRPr lang="en-US"/>
           </a:p>
@@ -1653,7 +1659,7 @@
     </p:spTree>
     <p:extLst>
       <p:ext uri="{BB962C8B-B14F-4D97-AF65-F5344CB8AC3E}">
-        <p14:creationId xmlns:p14="http://schemas.microsoft.com/office/powerpoint/2010/main" val="1078402939"/>
+        <p14:creationId xmlns:p14="http://schemas.microsoft.com/office/powerpoint/2010/main" val="2603981967"/>
       </p:ext>
     </p:extLst>
   </p:cSld>
@@ -1720,7 +1726,7 @@
           <a:p>
             <a:fld id="{1F57380E-2143-4096-B547-DE8B390321C5}" type="datetimeFigureOut">
               <a:rPr lang="en-US" smtClean="0"/>
-              <a:t>7/27/2020</a:t>
+              <a:t>7/28/2020</a:t>
             </a:fld>
             <a:endParaRPr lang="en-US"/>
           </a:p>
@@ -1771,7 +1777,7 @@
     </p:spTree>
     <p:extLst>
       <p:ext uri="{BB962C8B-B14F-4D97-AF65-F5344CB8AC3E}">
-        <p14:creationId xmlns:p14="http://schemas.microsoft.com/office/powerpoint/2010/main" val="681845988"/>
+        <p14:creationId xmlns:p14="http://schemas.microsoft.com/office/powerpoint/2010/main" val="890459204"/>
       </p:ext>
     </p:extLst>
   </p:cSld>
@@ -1815,7 +1821,7 @@
           <a:p>
             <a:fld id="{1F57380E-2143-4096-B547-DE8B390321C5}" type="datetimeFigureOut">
               <a:rPr lang="en-US" smtClean="0"/>
-              <a:t>7/27/2020</a:t>
+              <a:t>7/28/2020</a:t>
             </a:fld>
             <a:endParaRPr lang="en-US"/>
           </a:p>
@@ -1866,7 +1872,7 @@
     </p:spTree>
     <p:extLst>
       <p:ext uri="{BB962C8B-B14F-4D97-AF65-F5344CB8AC3E}">
-        <p14:creationId xmlns:p14="http://schemas.microsoft.com/office/powerpoint/2010/main" val="3188130115"/>
+        <p14:creationId xmlns:p14="http://schemas.microsoft.com/office/powerpoint/2010/main" val="3307056141"/>
       </p:ext>
     </p:extLst>
   </p:cSld>
@@ -1905,15 +1911,15 @@
         </p:nvSpPr>
         <p:spPr>
           <a:xfrm>
-            <a:off x="2519364" y="2438400"/>
-            <a:ext cx="11796712" cy="8534400"/>
+            <a:off x="1259682" y="1219200"/>
+            <a:ext cx="5898356" cy="4267200"/>
           </a:xfrm>
         </p:spPr>
         <p:txBody>
           <a:bodyPr anchor="b"/>
           <a:lstStyle>
             <a:lvl1pPr>
-              <a:defRPr sz="12800"/>
+              <a:defRPr sz="6400"/>
             </a:lvl1pPr>
           </a:lstStyle>
           <a:p>
@@ -1937,39 +1943,39 @@
         </p:nvSpPr>
         <p:spPr>
           <a:xfrm>
-            <a:off x="15549564" y="5266275"/>
-            <a:ext cx="18516600" cy="25992667"/>
+            <a:off x="7774782" y="2633138"/>
+            <a:ext cx="9258300" cy="12996333"/>
           </a:xfrm>
         </p:spPr>
         <p:txBody>
           <a:bodyPr/>
           <a:lstStyle>
             <a:lvl1pPr>
-              <a:defRPr sz="12800"/>
+              <a:defRPr sz="6400"/>
             </a:lvl1pPr>
             <a:lvl2pPr>
-              <a:defRPr sz="11200"/>
+              <a:defRPr sz="5600"/>
             </a:lvl2pPr>
             <a:lvl3pPr>
-              <a:defRPr sz="9600"/>
+              <a:defRPr sz="4800"/>
             </a:lvl3pPr>
             <a:lvl4pPr>
-              <a:defRPr sz="8000"/>
+              <a:defRPr sz="4000"/>
             </a:lvl4pPr>
             <a:lvl5pPr>
-              <a:defRPr sz="8000"/>
+              <a:defRPr sz="4000"/>
             </a:lvl5pPr>
             <a:lvl6pPr>
-              <a:defRPr sz="8000"/>
+              <a:defRPr sz="4000"/>
             </a:lvl6pPr>
             <a:lvl7pPr>
-              <a:defRPr sz="8000"/>
+              <a:defRPr sz="4000"/>
             </a:lvl7pPr>
             <a:lvl8pPr>
-              <a:defRPr sz="8000"/>
+              <a:defRPr sz="4000"/>
             </a:lvl8pPr>
             <a:lvl9pPr>
-              <a:defRPr sz="8000"/>
+              <a:defRPr sz="4000"/>
             </a:lvl9pPr>
           </a:lstStyle>
           <a:p>
@@ -2022,8 +2028,8 @@
         </p:nvSpPr>
         <p:spPr>
           <a:xfrm>
-            <a:off x="2519364" y="10972800"/>
-            <a:ext cx="11796712" cy="20328469"/>
+            <a:off x="1259682" y="5486400"/>
+            <a:ext cx="5898356" cy="10164235"/>
           </a:xfrm>
         </p:spPr>
         <p:txBody>
@@ -2031,39 +2037,39 @@
           <a:lstStyle>
             <a:lvl1pPr marL="0" indent="0">
               <a:buNone/>
-              <a:defRPr sz="6400"/>
+              <a:defRPr sz="3200"/>
             </a:lvl1pPr>
-            <a:lvl2pPr marL="1828800" indent="0">
+            <a:lvl2pPr marL="914400" indent="0">
               <a:buNone/>
-              <a:defRPr sz="5600"/>
+              <a:defRPr sz="2800"/>
             </a:lvl2pPr>
-            <a:lvl3pPr marL="3657600" indent="0">
+            <a:lvl3pPr marL="1828800" indent="0">
               <a:buNone/>
-              <a:defRPr sz="4800"/>
+              <a:defRPr sz="2400"/>
             </a:lvl3pPr>
-            <a:lvl4pPr marL="5486400" indent="0">
+            <a:lvl4pPr marL="2743200" indent="0">
               <a:buNone/>
-              <a:defRPr sz="4000"/>
+              <a:defRPr sz="2000"/>
             </a:lvl4pPr>
-            <a:lvl5pPr marL="7315200" indent="0">
+            <a:lvl5pPr marL="3657600" indent="0">
               <a:buNone/>
-              <a:defRPr sz="4000"/>
+              <a:defRPr sz="2000"/>
             </a:lvl5pPr>
-            <a:lvl6pPr marL="9144000" indent="0">
+            <a:lvl6pPr marL="4572000" indent="0">
               <a:buNone/>
-              <a:defRPr sz="4000"/>
+              <a:defRPr sz="2000"/>
             </a:lvl6pPr>
-            <a:lvl7pPr marL="10972800" indent="0">
+            <a:lvl7pPr marL="5486400" indent="0">
               <a:buNone/>
-              <a:defRPr sz="4000"/>
+              <a:defRPr sz="2000"/>
             </a:lvl7pPr>
-            <a:lvl8pPr marL="12801600" indent="0">
+            <a:lvl8pPr marL="6400800" indent="0">
               <a:buNone/>
-              <a:defRPr sz="4000"/>
+              <a:defRPr sz="2000"/>
             </a:lvl8pPr>
-            <a:lvl9pPr marL="14630400" indent="0">
+            <a:lvl9pPr marL="7315200" indent="0">
               <a:buNone/>
-              <a:defRPr sz="4000"/>
+              <a:defRPr sz="2000"/>
             </a:lvl9pPr>
           </a:lstStyle>
           <a:p>
@@ -2092,7 +2098,7 @@
           <a:p>
             <a:fld id="{1F57380E-2143-4096-B547-DE8B390321C5}" type="datetimeFigureOut">
               <a:rPr lang="en-US" smtClean="0"/>
-              <a:t>7/27/2020</a:t>
+              <a:t>7/28/2020</a:t>
             </a:fld>
             <a:endParaRPr lang="en-US"/>
           </a:p>
@@ -2143,7 +2149,7 @@
     </p:spTree>
     <p:extLst>
       <p:ext uri="{BB962C8B-B14F-4D97-AF65-F5344CB8AC3E}">
-        <p14:creationId xmlns:p14="http://schemas.microsoft.com/office/powerpoint/2010/main" val="4106644373"/>
+        <p14:creationId xmlns:p14="http://schemas.microsoft.com/office/powerpoint/2010/main" val="1994106556"/>
       </p:ext>
     </p:extLst>
   </p:cSld>
@@ -2182,15 +2188,15 @@
         </p:nvSpPr>
         <p:spPr>
           <a:xfrm>
-            <a:off x="2519364" y="2438400"/>
-            <a:ext cx="11796712" cy="8534400"/>
+            <a:off x="1259682" y="1219200"/>
+            <a:ext cx="5898356" cy="4267200"/>
           </a:xfrm>
         </p:spPr>
         <p:txBody>
           <a:bodyPr anchor="b"/>
           <a:lstStyle>
             <a:lvl1pPr>
-              <a:defRPr sz="12800"/>
+              <a:defRPr sz="6400"/>
             </a:lvl1pPr>
           </a:lstStyle>
           <a:p>
@@ -2214,8 +2220,8 @@
         </p:nvSpPr>
         <p:spPr>
           <a:xfrm>
-            <a:off x="15549564" y="5266275"/>
-            <a:ext cx="18516600" cy="25992667"/>
+            <a:off x="7774782" y="2633138"/>
+            <a:ext cx="9258300" cy="12996333"/>
           </a:xfrm>
         </p:spPr>
         <p:txBody>
@@ -2223,39 +2229,39 @@
           <a:lstStyle>
             <a:lvl1pPr marL="0" indent="0">
               <a:buNone/>
-              <a:defRPr sz="12800"/>
+              <a:defRPr sz="6400"/>
             </a:lvl1pPr>
-            <a:lvl2pPr marL="1828800" indent="0">
+            <a:lvl2pPr marL="914400" indent="0">
               <a:buNone/>
-              <a:defRPr sz="11200"/>
+              <a:defRPr sz="5600"/>
             </a:lvl2pPr>
-            <a:lvl3pPr marL="3657600" indent="0">
+            <a:lvl3pPr marL="1828800" indent="0">
               <a:buNone/>
-              <a:defRPr sz="9600"/>
+              <a:defRPr sz="4800"/>
             </a:lvl3pPr>
-            <a:lvl4pPr marL="5486400" indent="0">
+            <a:lvl4pPr marL="2743200" indent="0">
               <a:buNone/>
-              <a:defRPr sz="8000"/>
+              <a:defRPr sz="4000"/>
             </a:lvl4pPr>
-            <a:lvl5pPr marL="7315200" indent="0">
+            <a:lvl5pPr marL="3657600" indent="0">
               <a:buNone/>
-              <a:defRPr sz="8000"/>
+              <a:defRPr sz="4000"/>
             </a:lvl5pPr>
-            <a:lvl6pPr marL="9144000" indent="0">
+            <a:lvl6pPr marL="4572000" indent="0">
               <a:buNone/>
-              <a:defRPr sz="8000"/>
+              <a:defRPr sz="4000"/>
             </a:lvl6pPr>
-            <a:lvl7pPr marL="10972800" indent="0">
+            <a:lvl7pPr marL="5486400" indent="0">
               <a:buNone/>
-              <a:defRPr sz="8000"/>
+              <a:defRPr sz="4000"/>
             </a:lvl7pPr>
-            <a:lvl8pPr marL="12801600" indent="0">
+            <a:lvl8pPr marL="6400800" indent="0">
               <a:buNone/>
-              <a:defRPr sz="8000"/>
+              <a:defRPr sz="4000"/>
             </a:lvl8pPr>
-            <a:lvl9pPr marL="14630400" indent="0">
+            <a:lvl9pPr marL="7315200" indent="0">
               <a:buNone/>
-              <a:defRPr sz="8000"/>
+              <a:defRPr sz="4000"/>
             </a:lvl9pPr>
           </a:lstStyle>
           <a:p>
@@ -2279,8 +2285,8 @@
         </p:nvSpPr>
         <p:spPr>
           <a:xfrm>
-            <a:off x="2519364" y="10972800"/>
-            <a:ext cx="11796712" cy="20328469"/>
+            <a:off x="1259682" y="5486400"/>
+            <a:ext cx="5898356" cy="10164235"/>
           </a:xfrm>
         </p:spPr>
         <p:txBody>
@@ -2288,39 +2294,39 @@
           <a:lstStyle>
             <a:lvl1pPr marL="0" indent="0">
               <a:buNone/>
-              <a:defRPr sz="6400"/>
+              <a:defRPr sz="3200"/>
             </a:lvl1pPr>
-            <a:lvl2pPr marL="1828800" indent="0">
+            <a:lvl2pPr marL="914400" indent="0">
               <a:buNone/>
-              <a:defRPr sz="5600"/>
+              <a:defRPr sz="2800"/>
             </a:lvl2pPr>
-            <a:lvl3pPr marL="3657600" indent="0">
+            <a:lvl3pPr marL="1828800" indent="0">
               <a:buNone/>
-              <a:defRPr sz="4800"/>
+              <a:defRPr sz="2400"/>
             </a:lvl3pPr>
-            <a:lvl4pPr marL="5486400" indent="0">
+            <a:lvl4pPr marL="2743200" indent="0">
               <a:buNone/>
-              <a:defRPr sz="4000"/>
+              <a:defRPr sz="2000"/>
             </a:lvl4pPr>
-            <a:lvl5pPr marL="7315200" indent="0">
+            <a:lvl5pPr marL="3657600" indent="0">
               <a:buNone/>
-              <a:defRPr sz="4000"/>
+              <a:defRPr sz="2000"/>
             </a:lvl5pPr>
-            <a:lvl6pPr marL="9144000" indent="0">
+            <a:lvl6pPr marL="4572000" indent="0">
               <a:buNone/>
-              <a:defRPr sz="4000"/>
+              <a:defRPr sz="2000"/>
             </a:lvl6pPr>
-            <a:lvl7pPr marL="10972800" indent="0">
+            <a:lvl7pPr marL="5486400" indent="0">
               <a:buNone/>
-              <a:defRPr sz="4000"/>
+              <a:defRPr sz="2000"/>
             </a:lvl7pPr>
-            <a:lvl8pPr marL="12801600" indent="0">
+            <a:lvl8pPr marL="6400800" indent="0">
               <a:buNone/>
-              <a:defRPr sz="4000"/>
+              <a:defRPr sz="2000"/>
             </a:lvl8pPr>
-            <a:lvl9pPr marL="14630400" indent="0">
+            <a:lvl9pPr marL="7315200" indent="0">
               <a:buNone/>
-              <a:defRPr sz="4000"/>
+              <a:defRPr sz="2000"/>
             </a:lvl9pPr>
           </a:lstStyle>
           <a:p>
@@ -2349,7 +2355,7 @@
           <a:p>
             <a:fld id="{1F57380E-2143-4096-B547-DE8B390321C5}" type="datetimeFigureOut">
               <a:rPr lang="en-US" smtClean="0"/>
-              <a:t>7/27/2020</a:t>
+              <a:t>7/28/2020</a:t>
             </a:fld>
             <a:endParaRPr lang="en-US"/>
           </a:p>
@@ -2400,7 +2406,7 @@
     </p:spTree>
     <p:extLst>
       <p:ext uri="{BB962C8B-B14F-4D97-AF65-F5344CB8AC3E}">
-        <p14:creationId xmlns:p14="http://schemas.microsoft.com/office/powerpoint/2010/main" val="251380311"/>
+        <p14:creationId xmlns:p14="http://schemas.microsoft.com/office/powerpoint/2010/main" val="2033884860"/>
       </p:ext>
     </p:extLst>
   </p:cSld>
@@ -2444,8 +2450,8 @@
         </p:nvSpPr>
         <p:spPr>
           <a:xfrm>
-            <a:off x="2514600" y="1947342"/>
-            <a:ext cx="31546800" cy="7069669"/>
+            <a:off x="1257300" y="973671"/>
+            <a:ext cx="15773400" cy="3534835"/>
           </a:xfrm>
           <a:prstGeom prst="rect">
             <a:avLst/>
@@ -2477,8 +2483,8 @@
         </p:nvSpPr>
         <p:spPr>
           <a:xfrm>
-            <a:off x="2514600" y="9736667"/>
-            <a:ext cx="31546800" cy="23207136"/>
+            <a:off x="1257300" y="4868333"/>
+            <a:ext cx="15773400" cy="11603568"/>
           </a:xfrm>
           <a:prstGeom prst="rect">
             <a:avLst/>
@@ -2539,8 +2545,8 @@
         </p:nvSpPr>
         <p:spPr>
           <a:xfrm>
-            <a:off x="2514600" y="33900542"/>
-            <a:ext cx="8229600" cy="1947333"/>
+            <a:off x="1257300" y="16950271"/>
+            <a:ext cx="4114800" cy="973667"/>
           </a:xfrm>
           <a:prstGeom prst="rect">
             <a:avLst/>
@@ -2550,7 +2556,7 @@
           <a:bodyPr vert="horz" lIns="91440" tIns="45720" rIns="91440" bIns="45720" rtlCol="0" anchor="ctr"/>
           <a:lstStyle>
             <a:lvl1pPr algn="l">
-              <a:defRPr sz="4800">
+              <a:defRPr sz="2400">
                 <a:solidFill>
                   <a:schemeClr val="tx1">
                     <a:tint val="75000"/>
@@ -2562,7 +2568,7 @@
           <a:p>
             <a:fld id="{1F57380E-2143-4096-B547-DE8B390321C5}" type="datetimeFigureOut">
               <a:rPr lang="en-US" smtClean="0"/>
-              <a:t>7/27/2020</a:t>
+              <a:t>7/28/2020</a:t>
             </a:fld>
             <a:endParaRPr lang="en-US"/>
           </a:p>
@@ -2580,8 +2586,8 @@
         </p:nvSpPr>
         <p:spPr>
           <a:xfrm>
-            <a:off x="12115800" y="33900542"/>
-            <a:ext cx="12344400" cy="1947333"/>
+            <a:off x="6057900" y="16950271"/>
+            <a:ext cx="6172200" cy="973667"/>
           </a:xfrm>
           <a:prstGeom prst="rect">
             <a:avLst/>
@@ -2591,7 +2597,7 @@
           <a:bodyPr vert="horz" lIns="91440" tIns="45720" rIns="91440" bIns="45720" rtlCol="0" anchor="ctr"/>
           <a:lstStyle>
             <a:lvl1pPr algn="ctr">
-              <a:defRPr sz="4800">
+              <a:defRPr sz="2400">
                 <a:solidFill>
                   <a:schemeClr val="tx1">
                     <a:tint val="75000"/>
@@ -2617,8 +2623,8 @@
         </p:nvSpPr>
         <p:spPr>
           <a:xfrm>
-            <a:off x="25831800" y="33900542"/>
-            <a:ext cx="8229600" cy="1947333"/>
+            <a:off x="12915900" y="16950271"/>
+            <a:ext cx="4114800" cy="973667"/>
           </a:xfrm>
           <a:prstGeom prst="rect">
             <a:avLst/>
@@ -2628,7 +2634,7 @@
           <a:bodyPr vert="horz" lIns="91440" tIns="45720" rIns="91440" bIns="45720" rtlCol="0" anchor="ctr"/>
           <a:lstStyle>
             <a:lvl1pPr algn="r">
-              <a:defRPr sz="4800">
+              <a:defRPr sz="2400">
                 <a:solidFill>
                   <a:schemeClr val="tx1">
                     <a:tint val="75000"/>
@@ -2649,27 +2655,27 @@
     </p:spTree>
     <p:extLst>
       <p:ext uri="{BB962C8B-B14F-4D97-AF65-F5344CB8AC3E}">
-        <p14:creationId xmlns:p14="http://schemas.microsoft.com/office/powerpoint/2010/main" val="2495603213"/>
+        <p14:creationId xmlns:p14="http://schemas.microsoft.com/office/powerpoint/2010/main" val="2151629976"/>
       </p:ext>
     </p:extLst>
   </p:cSld>
   <p:clrMap bg1="lt1" tx1="dk1" bg2="lt2" tx2="dk2" accent1="accent1" accent2="accent2" accent3="accent3" accent4="accent4" accent5="accent5" accent6="accent6" hlink="hlink" folHlink="folHlink"/>
   <p:sldLayoutIdLst>
-    <p:sldLayoutId id="2147483661" r:id="rId1"/>
-    <p:sldLayoutId id="2147483662" r:id="rId2"/>
-    <p:sldLayoutId id="2147483663" r:id="rId3"/>
-    <p:sldLayoutId id="2147483664" r:id="rId4"/>
-    <p:sldLayoutId id="2147483665" r:id="rId5"/>
-    <p:sldLayoutId id="2147483666" r:id="rId6"/>
-    <p:sldLayoutId id="2147483667" r:id="rId7"/>
-    <p:sldLayoutId id="2147483668" r:id="rId8"/>
-    <p:sldLayoutId id="2147483669" r:id="rId9"/>
-    <p:sldLayoutId id="2147483670" r:id="rId10"/>
-    <p:sldLayoutId id="2147483671" r:id="rId11"/>
+    <p:sldLayoutId id="2147483673" r:id="rId1"/>
+    <p:sldLayoutId id="2147483674" r:id="rId2"/>
+    <p:sldLayoutId id="2147483675" r:id="rId3"/>
+    <p:sldLayoutId id="2147483676" r:id="rId4"/>
+    <p:sldLayoutId id="2147483677" r:id="rId5"/>
+    <p:sldLayoutId id="2147483678" r:id="rId6"/>
+    <p:sldLayoutId id="2147483679" r:id="rId7"/>
+    <p:sldLayoutId id="2147483680" r:id="rId8"/>
+    <p:sldLayoutId id="2147483681" r:id="rId9"/>
+    <p:sldLayoutId id="2147483682" r:id="rId10"/>
+    <p:sldLayoutId id="2147483683" r:id="rId11"/>
   </p:sldLayoutIdLst>
   <p:txStyles>
     <p:titleStyle>
-      <a:lvl1pPr algn="l" defTabSz="3657600" rtl="0" eaLnBrk="1" latinLnBrk="0" hangingPunct="1">
+      <a:lvl1pPr algn="l" defTabSz="1828800" rtl="0" eaLnBrk="1" latinLnBrk="0" hangingPunct="1">
         <a:lnSpc>
           <a:spcPct val="90000"/>
         </a:lnSpc>
@@ -2677,7 +2683,7 @@
           <a:spcPct val="0"/>
         </a:spcBef>
         <a:buNone/>
-        <a:defRPr sz="17600" kern="1200">
+        <a:defRPr sz="8800" kern="1200">
           <a:solidFill>
             <a:schemeClr val="tx1"/>
           </a:solidFill>
@@ -2688,16 +2694,16 @@
       </a:lvl1pPr>
     </p:titleStyle>
     <p:bodyStyle>
-      <a:lvl1pPr marL="914400" indent="-914400" algn="l" defTabSz="3657600" rtl="0" eaLnBrk="1" latinLnBrk="0" hangingPunct="1">
+      <a:lvl1pPr marL="457200" indent="-457200" algn="l" defTabSz="1828800" rtl="0" eaLnBrk="1" latinLnBrk="0" hangingPunct="1">
         <a:lnSpc>
           <a:spcPct val="90000"/>
         </a:lnSpc>
         <a:spcBef>
-          <a:spcPts val="4000"/>
+          <a:spcPts val="2000"/>
         </a:spcBef>
         <a:buFont typeface="Arial" panose="020B0604020202020204" pitchFamily="34" charset="0"/>
         <a:buChar char="•"/>
-        <a:defRPr sz="11200" kern="1200">
+        <a:defRPr sz="5600" kern="1200">
           <a:solidFill>
             <a:schemeClr val="tx1"/>
           </a:solidFill>
@@ -2706,16 +2712,16 @@
           <a:cs typeface="+mn-cs"/>
         </a:defRPr>
       </a:lvl1pPr>
-      <a:lvl2pPr marL="2743200" indent="-914400" algn="l" defTabSz="3657600" rtl="0" eaLnBrk="1" latinLnBrk="0" hangingPunct="1">
+      <a:lvl2pPr marL="1371600" indent="-457200" algn="l" defTabSz="1828800" rtl="0" eaLnBrk="1" latinLnBrk="0" hangingPunct="1">
         <a:lnSpc>
           <a:spcPct val="90000"/>
         </a:lnSpc>
         <a:spcBef>
-          <a:spcPts val="2000"/>
+          <a:spcPts val="1000"/>
         </a:spcBef>
         <a:buFont typeface="Arial" panose="020B0604020202020204" pitchFamily="34" charset="0"/>
         <a:buChar char="•"/>
-        <a:defRPr sz="9600" kern="1200">
+        <a:defRPr sz="4800" kern="1200">
           <a:solidFill>
             <a:schemeClr val="tx1"/>
           </a:solidFill>
@@ -2724,16 +2730,16 @@
           <a:cs typeface="+mn-cs"/>
         </a:defRPr>
       </a:lvl2pPr>
-      <a:lvl3pPr marL="4572000" indent="-914400" algn="l" defTabSz="3657600" rtl="0" eaLnBrk="1" latinLnBrk="0" hangingPunct="1">
+      <a:lvl3pPr marL="2286000" indent="-457200" algn="l" defTabSz="1828800" rtl="0" eaLnBrk="1" latinLnBrk="0" hangingPunct="1">
         <a:lnSpc>
           <a:spcPct val="90000"/>
         </a:lnSpc>
         <a:spcBef>
-          <a:spcPts val="2000"/>
+          <a:spcPts val="1000"/>
         </a:spcBef>
         <a:buFont typeface="Arial" panose="020B0604020202020204" pitchFamily="34" charset="0"/>
         <a:buChar char="•"/>
-        <a:defRPr sz="8000" kern="1200">
+        <a:defRPr sz="4000" kern="1200">
           <a:solidFill>
             <a:schemeClr val="tx1"/>
           </a:solidFill>
@@ -2742,16 +2748,16 @@
           <a:cs typeface="+mn-cs"/>
         </a:defRPr>
       </a:lvl3pPr>
-      <a:lvl4pPr marL="6400800" indent="-914400" algn="l" defTabSz="3657600" rtl="0" eaLnBrk="1" latinLnBrk="0" hangingPunct="1">
+      <a:lvl4pPr marL="3200400" indent="-457200" algn="l" defTabSz="1828800" rtl="0" eaLnBrk="1" latinLnBrk="0" hangingPunct="1">
         <a:lnSpc>
           <a:spcPct val="90000"/>
         </a:lnSpc>
         <a:spcBef>
-          <a:spcPts val="2000"/>
+          <a:spcPts val="1000"/>
         </a:spcBef>
         <a:buFont typeface="Arial" panose="020B0604020202020204" pitchFamily="34" charset="0"/>
         <a:buChar char="•"/>
-        <a:defRPr sz="7200" kern="1200">
+        <a:defRPr sz="3600" kern="1200">
           <a:solidFill>
             <a:schemeClr val="tx1"/>
           </a:solidFill>
@@ -2760,16 +2766,16 @@
           <a:cs typeface="+mn-cs"/>
         </a:defRPr>
       </a:lvl4pPr>
-      <a:lvl5pPr marL="8229600" indent="-914400" algn="l" defTabSz="3657600" rtl="0" eaLnBrk="1" latinLnBrk="0" hangingPunct="1">
+      <a:lvl5pPr marL="4114800" indent="-457200" algn="l" defTabSz="1828800" rtl="0" eaLnBrk="1" latinLnBrk="0" hangingPunct="1">
         <a:lnSpc>
           <a:spcPct val="90000"/>
         </a:lnSpc>
         <a:spcBef>
-          <a:spcPts val="2000"/>
+          <a:spcPts val="1000"/>
         </a:spcBef>
         <a:buFont typeface="Arial" panose="020B0604020202020204" pitchFamily="34" charset="0"/>
         <a:buChar char="•"/>
-        <a:defRPr sz="7200" kern="1200">
+        <a:defRPr sz="3600" kern="1200">
           <a:solidFill>
             <a:schemeClr val="tx1"/>
           </a:solidFill>
@@ -2778,16 +2784,16 @@
           <a:cs typeface="+mn-cs"/>
         </a:defRPr>
       </a:lvl5pPr>
-      <a:lvl6pPr marL="10058400" indent="-914400" algn="l" defTabSz="3657600" rtl="0" eaLnBrk="1" latinLnBrk="0" hangingPunct="1">
+      <a:lvl6pPr marL="5029200" indent="-457200" algn="l" defTabSz="1828800" rtl="0" eaLnBrk="1" latinLnBrk="0" hangingPunct="1">
         <a:lnSpc>
           <a:spcPct val="90000"/>
         </a:lnSpc>
         <a:spcBef>
-          <a:spcPts val="2000"/>
+          <a:spcPts val="1000"/>
         </a:spcBef>
         <a:buFont typeface="Arial" panose="020B0604020202020204" pitchFamily="34" charset="0"/>
         <a:buChar char="•"/>
-        <a:defRPr sz="7200" kern="1200">
+        <a:defRPr sz="3600" kern="1200">
           <a:solidFill>
             <a:schemeClr val="tx1"/>
           </a:solidFill>
@@ -2796,16 +2802,16 @@
           <a:cs typeface="+mn-cs"/>
         </a:defRPr>
       </a:lvl6pPr>
-      <a:lvl7pPr marL="11887200" indent="-914400" algn="l" defTabSz="3657600" rtl="0" eaLnBrk="1" latinLnBrk="0" hangingPunct="1">
+      <a:lvl7pPr marL="5943600" indent="-457200" algn="l" defTabSz="1828800" rtl="0" eaLnBrk="1" latinLnBrk="0" hangingPunct="1">
         <a:lnSpc>
           <a:spcPct val="90000"/>
         </a:lnSpc>
         <a:spcBef>
-          <a:spcPts val="2000"/>
+          <a:spcPts val="1000"/>
         </a:spcBef>
         <a:buFont typeface="Arial" panose="020B0604020202020204" pitchFamily="34" charset="0"/>
         <a:buChar char="•"/>
-        <a:defRPr sz="7200" kern="1200">
+        <a:defRPr sz="3600" kern="1200">
           <a:solidFill>
             <a:schemeClr val="tx1"/>
           </a:solidFill>
@@ -2814,16 +2820,16 @@
           <a:cs typeface="+mn-cs"/>
         </a:defRPr>
       </a:lvl7pPr>
-      <a:lvl8pPr marL="13716000" indent="-914400" algn="l" defTabSz="3657600" rtl="0" eaLnBrk="1" latinLnBrk="0" hangingPunct="1">
+      <a:lvl8pPr marL="6858000" indent="-457200" algn="l" defTabSz="1828800" rtl="0" eaLnBrk="1" latinLnBrk="0" hangingPunct="1">
         <a:lnSpc>
           <a:spcPct val="90000"/>
         </a:lnSpc>
         <a:spcBef>
-          <a:spcPts val="2000"/>
+          <a:spcPts val="1000"/>
         </a:spcBef>
         <a:buFont typeface="Arial" panose="020B0604020202020204" pitchFamily="34" charset="0"/>
         <a:buChar char="•"/>
-        <a:defRPr sz="7200" kern="1200">
+        <a:defRPr sz="3600" kern="1200">
           <a:solidFill>
             <a:schemeClr val="tx1"/>
           </a:solidFill>
@@ -2832,16 +2838,16 @@
           <a:cs typeface="+mn-cs"/>
         </a:defRPr>
       </a:lvl8pPr>
-      <a:lvl9pPr marL="15544800" indent="-914400" algn="l" defTabSz="3657600" rtl="0" eaLnBrk="1" latinLnBrk="0" hangingPunct="1">
+      <a:lvl9pPr marL="7772400" indent="-457200" algn="l" defTabSz="1828800" rtl="0" eaLnBrk="1" latinLnBrk="0" hangingPunct="1">
         <a:lnSpc>
           <a:spcPct val="90000"/>
         </a:lnSpc>
         <a:spcBef>
-          <a:spcPts val="2000"/>
+          <a:spcPts val="1000"/>
         </a:spcBef>
         <a:buFont typeface="Arial" panose="020B0604020202020204" pitchFamily="34" charset="0"/>
         <a:buChar char="•"/>
-        <a:defRPr sz="7200" kern="1200">
+        <a:defRPr sz="3600" kern="1200">
           <a:solidFill>
             <a:schemeClr val="tx1"/>
           </a:solidFill>
@@ -2855,8 +2861,8 @@
       <a:defPPr>
         <a:defRPr lang="en-US"/>
       </a:defPPr>
-      <a:lvl1pPr marL="0" algn="l" defTabSz="3657600" rtl="0" eaLnBrk="1" latinLnBrk="0" hangingPunct="1">
-        <a:defRPr sz="7200" kern="1200">
+      <a:lvl1pPr marL="0" algn="l" defTabSz="1828800" rtl="0" eaLnBrk="1" latinLnBrk="0" hangingPunct="1">
+        <a:defRPr sz="3600" kern="1200">
           <a:solidFill>
             <a:schemeClr val="tx1"/>
           </a:solidFill>
@@ -2865,8 +2871,8 @@
           <a:cs typeface="+mn-cs"/>
         </a:defRPr>
       </a:lvl1pPr>
-      <a:lvl2pPr marL="1828800" algn="l" defTabSz="3657600" rtl="0" eaLnBrk="1" latinLnBrk="0" hangingPunct="1">
-        <a:defRPr sz="7200" kern="1200">
+      <a:lvl2pPr marL="914400" algn="l" defTabSz="1828800" rtl="0" eaLnBrk="1" latinLnBrk="0" hangingPunct="1">
+        <a:defRPr sz="3600" kern="1200">
           <a:solidFill>
             <a:schemeClr val="tx1"/>
           </a:solidFill>
@@ -2875,8 +2881,8 @@
           <a:cs typeface="+mn-cs"/>
         </a:defRPr>
       </a:lvl2pPr>
-      <a:lvl3pPr marL="3657600" algn="l" defTabSz="3657600" rtl="0" eaLnBrk="1" latinLnBrk="0" hangingPunct="1">
-        <a:defRPr sz="7200" kern="1200">
+      <a:lvl3pPr marL="1828800" algn="l" defTabSz="1828800" rtl="0" eaLnBrk="1" latinLnBrk="0" hangingPunct="1">
+        <a:defRPr sz="3600" kern="1200">
           <a:solidFill>
             <a:schemeClr val="tx1"/>
           </a:solidFill>
@@ -2885,8 +2891,8 @@
           <a:cs typeface="+mn-cs"/>
         </a:defRPr>
       </a:lvl3pPr>
-      <a:lvl4pPr marL="5486400" algn="l" defTabSz="3657600" rtl="0" eaLnBrk="1" latinLnBrk="0" hangingPunct="1">
-        <a:defRPr sz="7200" kern="1200">
+      <a:lvl4pPr marL="2743200" algn="l" defTabSz="1828800" rtl="0" eaLnBrk="1" latinLnBrk="0" hangingPunct="1">
+        <a:defRPr sz="3600" kern="1200">
           <a:solidFill>
             <a:schemeClr val="tx1"/>
           </a:solidFill>
@@ -2895,8 +2901,8 @@
           <a:cs typeface="+mn-cs"/>
         </a:defRPr>
       </a:lvl4pPr>
-      <a:lvl5pPr marL="7315200" algn="l" defTabSz="3657600" rtl="0" eaLnBrk="1" latinLnBrk="0" hangingPunct="1">
-        <a:defRPr sz="7200" kern="1200">
+      <a:lvl5pPr marL="3657600" algn="l" defTabSz="1828800" rtl="0" eaLnBrk="1" latinLnBrk="0" hangingPunct="1">
+        <a:defRPr sz="3600" kern="1200">
           <a:solidFill>
             <a:schemeClr val="tx1"/>
           </a:solidFill>
@@ -2905,8 +2911,8 @@
           <a:cs typeface="+mn-cs"/>
         </a:defRPr>
       </a:lvl5pPr>
-      <a:lvl6pPr marL="9144000" algn="l" defTabSz="3657600" rtl="0" eaLnBrk="1" latinLnBrk="0" hangingPunct="1">
-        <a:defRPr sz="7200" kern="1200">
+      <a:lvl6pPr marL="4572000" algn="l" defTabSz="1828800" rtl="0" eaLnBrk="1" latinLnBrk="0" hangingPunct="1">
+        <a:defRPr sz="3600" kern="1200">
           <a:solidFill>
             <a:schemeClr val="tx1"/>
           </a:solidFill>
@@ -2915,8 +2921,8 @@
           <a:cs typeface="+mn-cs"/>
         </a:defRPr>
       </a:lvl6pPr>
-      <a:lvl7pPr marL="10972800" algn="l" defTabSz="3657600" rtl="0" eaLnBrk="1" latinLnBrk="0" hangingPunct="1">
-        <a:defRPr sz="7200" kern="1200">
+      <a:lvl7pPr marL="5486400" algn="l" defTabSz="1828800" rtl="0" eaLnBrk="1" latinLnBrk="0" hangingPunct="1">
+        <a:defRPr sz="3600" kern="1200">
           <a:solidFill>
             <a:schemeClr val="tx1"/>
           </a:solidFill>
@@ -2925,8 +2931,8 @@
           <a:cs typeface="+mn-cs"/>
         </a:defRPr>
       </a:lvl7pPr>
-      <a:lvl8pPr marL="12801600" algn="l" defTabSz="3657600" rtl="0" eaLnBrk="1" latinLnBrk="0" hangingPunct="1">
-        <a:defRPr sz="7200" kern="1200">
+      <a:lvl8pPr marL="6400800" algn="l" defTabSz="1828800" rtl="0" eaLnBrk="1" latinLnBrk="0" hangingPunct="1">
+        <a:defRPr sz="3600" kern="1200">
           <a:solidFill>
             <a:schemeClr val="tx1"/>
           </a:solidFill>
@@ -2935,8 +2941,8 @@
           <a:cs typeface="+mn-cs"/>
         </a:defRPr>
       </a:lvl8pPr>
-      <a:lvl9pPr marL="14630400" algn="l" defTabSz="3657600" rtl="0" eaLnBrk="1" latinLnBrk="0" hangingPunct="1">
-        <a:defRPr sz="7200" kern="1200">
+      <a:lvl9pPr marL="7315200" algn="l" defTabSz="1828800" rtl="0" eaLnBrk="1" latinLnBrk="0" hangingPunct="1">
+        <a:defRPr sz="3600" kern="1200">
           <a:solidFill>
             <a:schemeClr val="tx1"/>
           </a:solidFill>
@@ -2975,8 +2981,8 @@
         </p:nvGrpSpPr>
         <p:grpSpPr>
           <a:xfrm>
-            <a:off x="15799344" y="9142889"/>
-            <a:ext cx="6729413" cy="2876550"/>
+            <a:off x="7899672" y="4571445"/>
+            <a:ext cx="3364707" cy="1438275"/>
             <a:chOff x="1683067" y="2631599"/>
             <a:chExt cx="6729413" cy="2876550"/>
           </a:xfrm>
@@ -3038,8 +3044,8 @@
         </p:nvGrpSpPr>
         <p:grpSpPr>
           <a:xfrm>
-            <a:off x="2042024" y="1851751"/>
-            <a:ext cx="7896089" cy="4444628"/>
+            <a:off x="1021012" y="925876"/>
+            <a:ext cx="3948045" cy="2222314"/>
             <a:chOff x="2042024" y="1851751"/>
             <a:chExt cx="7896089" cy="4444628"/>
           </a:xfrm>
@@ -3101,8 +3107,8 @@
         </p:nvGrpSpPr>
         <p:grpSpPr>
           <a:xfrm>
-            <a:off x="4672328" y="14960601"/>
-            <a:ext cx="11127016" cy="4417906"/>
+            <a:off x="2336164" y="7480301"/>
+            <a:ext cx="5563508" cy="2208953"/>
             <a:chOff x="12678173" y="17056101"/>
             <a:chExt cx="11127016" cy="4417906"/>
           </a:xfrm>
@@ -3151,7 +3157,7 @@
             <a:lstStyle/>
             <a:p>
               <a:pPr algn="ctr"/>
-              <a:endParaRPr lang="en-US"/>
+              <a:endParaRPr lang="en-US" sz="450"/>
             </a:p>
           </p:txBody>
         </p:sp>
@@ -3232,10 +3238,9 @@
             <a:p>
               <a:pPr algn="ctr"/>
               <a:r>
-                <a:rPr lang="en-US" dirty="0"/>
+                <a:rPr lang="en-US" sz="450" dirty="0"/>
                 <a:t>Convolution</a:t>
               </a:r>
-              <a:endParaRPr lang="en-US" dirty="0"/>
             </a:p>
           </p:txBody>
         </p:sp>
@@ -3281,10 +3286,9 @@
             <a:p>
               <a:pPr algn="ctr"/>
               <a:r>
-                <a:rPr lang="en-US" dirty="0"/>
+                <a:rPr lang="en-US" sz="450" dirty="0"/>
                 <a:t>Convolution</a:t>
               </a:r>
-              <a:endParaRPr lang="en-US" dirty="0"/>
             </a:p>
           </p:txBody>
         </p:sp>
@@ -3403,8 +3407,8 @@
           </p:nvSpPr>
           <p:spPr>
             <a:xfrm>
-              <a:off x="17995845" y="19152314"/>
-              <a:ext cx="1105687" cy="369332"/>
+              <a:off x="18134793" y="19152315"/>
+              <a:ext cx="827792" cy="323166"/>
             </a:xfrm>
             <a:prstGeom prst="rect">
               <a:avLst/>
@@ -3419,10 +3423,9 @@
             <a:p>
               <a:pPr algn="ctr"/>
               <a:r>
-                <a:rPr lang="en-US" dirty="0"/>
+                <a:rPr lang="en-US" sz="450" dirty="0"/>
                 <a:t>activation</a:t>
               </a:r>
-              <a:endParaRPr lang="en-US" dirty="0"/>
             </a:p>
           </p:txBody>
         </p:sp>
@@ -3434,8 +3437,8 @@
           </p:nvSpPr>
           <p:spPr>
             <a:xfrm>
-              <a:off x="18123428" y="21072084"/>
-              <a:ext cx="1105687" cy="369332"/>
+              <a:off x="18262377" y="21072085"/>
+              <a:ext cx="827792" cy="323166"/>
             </a:xfrm>
             <a:prstGeom prst="rect">
               <a:avLst/>
@@ -3450,10 +3453,9 @@
             <a:p>
               <a:pPr algn="ctr"/>
               <a:r>
-                <a:rPr lang="en-US" dirty="0"/>
+                <a:rPr lang="en-US" sz="450" dirty="0"/>
                 <a:t>activation</a:t>
               </a:r>
-              <a:endParaRPr lang="en-US" dirty="0"/>
             </a:p>
           </p:txBody>
         </p:sp>
@@ -3465,8 +3467,8 @@
           </p:nvSpPr>
           <p:spPr>
             <a:xfrm>
-              <a:off x="17660786" y="17622118"/>
-              <a:ext cx="1819729" cy="1156021"/>
+              <a:off x="17660787" y="17622119"/>
+              <a:ext cx="580928" cy="323166"/>
             </a:xfrm>
             <a:prstGeom prst="rect">
               <a:avLst/>
@@ -3480,10 +3482,9 @@
             <a:lstStyle/>
             <a:p>
               <a:r>
-                <a:rPr lang="en-US" dirty="0"/>
+                <a:rPr lang="en-US" sz="450" dirty="0"/>
                 <a:t>64-d</a:t>
               </a:r>
-              <a:endParaRPr lang="en-US" dirty="0"/>
             </a:p>
           </p:txBody>
         </p:sp>
@@ -3527,7 +3528,7 @@
             <a:lstStyle/>
             <a:p>
               <a:pPr algn="ctr"/>
-              <a:endParaRPr lang="en-US">
+              <a:endParaRPr lang="en-US" sz="450">
                 <a:solidFill>
                   <a:schemeClr val="tx1"/>
                 </a:solidFill>
@@ -3577,10 +3578,9 @@
             <a:p>
               <a:pPr algn="ctr"/>
               <a:r>
-                <a:rPr lang="en-US" sz="2400" dirty="0"/>
+                <a:rPr lang="en-US" sz="1200" dirty="0"/>
                 <a:t>+</a:t>
               </a:r>
-              <a:endParaRPr lang="en-US" sz="2400" dirty="0"/>
             </a:p>
           </p:txBody>
         </p:sp>
@@ -3593,7 +3593,7 @@
           <p:spPr>
             <a:xfrm>
               <a:off x="17350091" y="17056101"/>
-              <a:ext cx="1232453" cy="461665"/>
+              <a:ext cx="1415516" cy="553998"/>
             </a:xfrm>
             <a:prstGeom prst="rect">
               <a:avLst/>
@@ -3607,10 +3607,9 @@
             <a:lstStyle/>
             <a:p>
               <a:r>
-                <a:rPr lang="en-US" sz="2400" dirty="0"/>
+                <a:rPr lang="en-US" sz="1200" dirty="0"/>
                 <a:t>Residual</a:t>
               </a:r>
-              <a:endParaRPr lang="en-US" sz="2400" dirty="0"/>
             </a:p>
           </p:txBody>
         </p:sp>
@@ -3658,7 +3657,7 @@
             <a:lstStyle/>
             <a:p>
               <a:pPr algn="ctr"/>
-              <a:endParaRPr lang="en-US"/>
+              <a:endParaRPr lang="en-US" sz="450"/>
             </a:p>
           </p:txBody>
         </p:sp>
@@ -3704,10 +3703,9 @@
             <a:p>
               <a:pPr algn="ctr"/>
               <a:r>
-                <a:rPr lang="en-US" dirty="0"/>
+                <a:rPr lang="en-US" sz="450" dirty="0"/>
                 <a:t>Convolution</a:t>
               </a:r>
-              <a:endParaRPr lang="en-US" dirty="0"/>
             </a:p>
           </p:txBody>
         </p:sp>
@@ -3753,10 +3751,9 @@
             <a:p>
               <a:pPr algn="ctr"/>
               <a:r>
-                <a:rPr lang="en-US" dirty="0"/>
+                <a:rPr lang="en-US" sz="450" dirty="0"/>
                 <a:t>Convolution</a:t>
               </a:r>
-              <a:endParaRPr lang="en-US" dirty="0"/>
             </a:p>
           </p:txBody>
         </p:sp>
@@ -3874,8 +3871,8 @@
           </p:nvSpPr>
           <p:spPr>
             <a:xfrm>
-              <a:off x="14300572" y="19178695"/>
-              <a:ext cx="1105687" cy="369332"/>
+              <a:off x="14439521" y="19178695"/>
+              <a:ext cx="827792" cy="323166"/>
             </a:xfrm>
             <a:prstGeom prst="rect">
               <a:avLst/>
@@ -3890,10 +3887,9 @@
             <a:p>
               <a:pPr algn="ctr"/>
               <a:r>
-                <a:rPr lang="en-US" dirty="0"/>
+                <a:rPr lang="en-US" sz="450" dirty="0"/>
                 <a:t>activation</a:t>
               </a:r>
-              <a:endParaRPr lang="en-US" dirty="0"/>
             </a:p>
           </p:txBody>
         </p:sp>
@@ -3905,8 +3901,8 @@
           </p:nvSpPr>
           <p:spPr>
             <a:xfrm>
-              <a:off x="14422102" y="20786421"/>
-              <a:ext cx="1105687" cy="369332"/>
+              <a:off x="14561051" y="20786421"/>
+              <a:ext cx="827792" cy="323166"/>
             </a:xfrm>
             <a:prstGeom prst="rect">
               <a:avLst/>
@@ -3921,10 +3917,9 @@
             <a:p>
               <a:pPr algn="ctr"/>
               <a:r>
-                <a:rPr lang="en-US" dirty="0"/>
+                <a:rPr lang="en-US" sz="450" dirty="0"/>
                 <a:t>activation</a:t>
               </a:r>
-              <a:endParaRPr lang="en-US" dirty="0"/>
             </a:p>
           </p:txBody>
         </p:sp>
@@ -3936,8 +3931,8 @@
           </p:nvSpPr>
           <p:spPr>
             <a:xfrm>
-              <a:off x="13980847" y="17606162"/>
-              <a:ext cx="1819729" cy="1156022"/>
+              <a:off x="13980847" y="17606163"/>
+              <a:ext cx="580928" cy="323166"/>
             </a:xfrm>
             <a:prstGeom prst="rect">
               <a:avLst/>
@@ -3951,10 +3946,9 @@
             <a:lstStyle/>
             <a:p>
               <a:r>
-                <a:rPr lang="en-US" dirty="0"/>
+                <a:rPr lang="en-US" sz="450" dirty="0"/>
                 <a:t>64-d</a:t>
               </a:r>
-              <a:endParaRPr lang="en-US" dirty="0"/>
             </a:p>
           </p:txBody>
         </p:sp>
@@ -3966,8 +3960,8 @@
           </p:nvSpPr>
           <p:spPr>
             <a:xfrm>
-              <a:off x="13743868" y="17095828"/>
-              <a:ext cx="1173013" cy="461665"/>
+              <a:off x="13743869" y="17095829"/>
+              <a:ext cx="1354474" cy="553998"/>
             </a:xfrm>
             <a:prstGeom prst="rect">
               <a:avLst/>
@@ -3981,10 +3975,9 @@
             <a:lstStyle/>
             <a:p>
               <a:r>
-                <a:rPr lang="en-US" sz="2400" dirty="0"/>
+                <a:rPr lang="en-US" sz="1200" dirty="0"/>
                 <a:t>‘Vanilla’</a:t>
               </a:r>
-              <a:endParaRPr lang="en-US" sz="2400" dirty="0"/>
             </a:p>
           </p:txBody>
         </p:sp>
@@ -4032,7 +4025,7 @@
             <a:lstStyle/>
             <a:p>
               <a:pPr algn="ctr"/>
-              <a:endParaRPr lang="en-US"/>
+              <a:endParaRPr lang="en-US" sz="450"/>
             </a:p>
           </p:txBody>
         </p:sp>
@@ -4111,7 +4104,7 @@
             <a:lstStyle/>
             <a:p>
               <a:pPr algn="ctr"/>
-              <a:endParaRPr lang="en-US">
+              <a:endParaRPr lang="en-US" sz="450">
                 <a:solidFill>
                   <a:schemeClr val="tx1"/>
                 </a:solidFill>
@@ -4161,10 +4154,9 @@
             <a:p>
               <a:pPr algn="ctr"/>
               <a:r>
-                <a:rPr lang="en-US" dirty="0"/>
+                <a:rPr lang="en-US" sz="450" dirty="0"/>
                 <a:t>Convolution</a:t>
               </a:r>
-              <a:endParaRPr lang="en-US" dirty="0"/>
             </a:p>
           </p:txBody>
         </p:sp>
@@ -4213,10 +4205,10 @@
             <a:p>
               <a:pPr algn="ctr"/>
               <a:r>
-                <a:rPr lang="en-US" dirty="0" err="1"/>
+                <a:rPr lang="en-US" sz="450" dirty="0" err="1"/>
                 <a:t>Concat</a:t>
               </a:r>
-              <a:endParaRPr lang="en-US" dirty="0"/>
+              <a:endParaRPr lang="en-US" sz="450" dirty="0"/>
             </a:p>
           </p:txBody>
         </p:sp>
@@ -4340,10 +4332,9 @@
             <a:p>
               <a:pPr algn="ctr"/>
               <a:r>
-                <a:rPr lang="en-US" dirty="0"/>
+                <a:rPr lang="en-US" sz="450" dirty="0"/>
                 <a:t>Convolution</a:t>
               </a:r>
-              <a:endParaRPr lang="en-US" dirty="0"/>
             </a:p>
           </p:txBody>
         </p:sp>
@@ -4389,10 +4380,9 @@
             <a:p>
               <a:pPr algn="ctr"/>
               <a:r>
-                <a:rPr lang="en-US" dirty="0"/>
+                <a:rPr lang="en-US" sz="450" dirty="0"/>
                 <a:t>Convolution</a:t>
               </a:r>
-              <a:endParaRPr lang="en-US" dirty="0"/>
             </a:p>
           </p:txBody>
         </p:sp>
@@ -4444,7 +4434,7 @@
             <a:lstStyle/>
             <a:p>
               <a:pPr algn="ctr"/>
-              <a:endParaRPr lang="en-US">
+              <a:endParaRPr lang="en-US" sz="450">
                 <a:solidFill>
                   <a:schemeClr val="tx1"/>
                 </a:solidFill>
@@ -4533,10 +4523,10 @@
             <a:p>
               <a:pPr algn="ctr"/>
               <a:r>
-                <a:rPr lang="en-US" dirty="0" err="1"/>
+                <a:rPr lang="en-US" sz="450" dirty="0" err="1"/>
                 <a:t>Concat</a:t>
               </a:r>
-              <a:endParaRPr lang="en-US" dirty="0"/>
+              <a:endParaRPr lang="en-US" sz="450" dirty="0"/>
             </a:p>
           </p:txBody>
         </p:sp>
@@ -4580,7 +4570,7 @@
             <a:lstStyle/>
             <a:p>
               <a:pPr algn="ctr"/>
-              <a:endParaRPr lang="en-US">
+              <a:endParaRPr lang="en-US" sz="450">
                 <a:solidFill>
                   <a:schemeClr val="tx1"/>
                 </a:solidFill>
@@ -4630,10 +4620,9 @@
             <a:p>
               <a:pPr algn="ctr"/>
               <a:r>
-                <a:rPr lang="en-US" dirty="0"/>
+                <a:rPr lang="en-US" sz="450" dirty="0"/>
                 <a:t>Convolution</a:t>
               </a:r>
-              <a:endParaRPr lang="en-US" dirty="0"/>
             </a:p>
           </p:txBody>
         </p:sp>
@@ -4718,10 +4707,10 @@
             <a:p>
               <a:pPr algn="ctr"/>
               <a:r>
-                <a:rPr lang="en-US" dirty="0" err="1"/>
+                <a:rPr lang="en-US" sz="450" dirty="0" err="1"/>
                 <a:t>Concat</a:t>
               </a:r>
-              <a:endParaRPr lang="en-US" dirty="0"/>
+              <a:endParaRPr lang="en-US" sz="450" dirty="0"/>
             </a:p>
           </p:txBody>
         </p:sp>
@@ -4812,7 +4801,7 @@
             <a:lstStyle/>
             <a:p>
               <a:pPr algn="ctr"/>
-              <a:endParaRPr lang="en-US">
+              <a:endParaRPr lang="en-US" sz="450">
                 <a:solidFill>
                   <a:schemeClr val="tx1"/>
                 </a:solidFill>
@@ -4860,7 +4849,7 @@
             <a:lstStyle/>
             <a:p>
               <a:pPr algn="ctr"/>
-              <a:endParaRPr lang="en-US">
+              <a:endParaRPr lang="en-US" sz="450">
                 <a:solidFill>
                   <a:schemeClr val="tx1"/>
                 </a:solidFill>
@@ -4916,7 +4905,7 @@
             <a:lstStyle/>
             <a:p>
               <a:pPr algn="ctr"/>
-              <a:endParaRPr lang="en-US">
+              <a:endParaRPr lang="en-US" sz="450">
                 <a:solidFill>
                   <a:schemeClr val="tx1"/>
                 </a:solidFill>
@@ -4932,8 +4921,8 @@
           </p:nvSpPr>
           <p:spPr>
             <a:xfrm>
-              <a:off x="20900153" y="17184994"/>
-              <a:ext cx="963725" cy="461665"/>
+              <a:off x="20807819" y="17184995"/>
+              <a:ext cx="1148392" cy="553998"/>
             </a:xfrm>
             <a:prstGeom prst="rect">
               <a:avLst/>
@@ -4948,10 +4937,9 @@
             <a:p>
               <a:pPr algn="ctr"/>
               <a:r>
-                <a:rPr lang="en-US" sz="2400" dirty="0"/>
+                <a:rPr lang="en-US" sz="1200" dirty="0"/>
                 <a:t>Dense</a:t>
               </a:r>
-              <a:endParaRPr lang="en-US" sz="2400" dirty="0"/>
             </a:p>
           </p:txBody>
         </p:sp>
@@ -4963,8 +4951,8 @@
           </p:nvSpPr>
           <p:spPr>
             <a:xfrm>
-              <a:off x="20191097" y="17938504"/>
-              <a:ext cx="1220719" cy="307777"/>
+              <a:off x="20097417" y="17938505"/>
+              <a:ext cx="1408080" cy="400110"/>
             </a:xfrm>
             <a:prstGeom prst="rect">
               <a:avLst/>
@@ -4979,10 +4967,9 @@
             <a:p>
               <a:pPr algn="ctr"/>
               <a:r>
-                <a:rPr lang="en-US" sz="1400" dirty="0"/>
+                <a:rPr lang="en-US" sz="700" dirty="0"/>
                 <a:t>BN, Activation</a:t>
               </a:r>
-              <a:endParaRPr lang="en-US" sz="1400" dirty="0"/>
             </a:p>
           </p:txBody>
         </p:sp>
@@ -4994,8 +4981,8 @@
           </p:nvSpPr>
           <p:spPr>
             <a:xfrm>
-              <a:off x="20228845" y="19075656"/>
-              <a:ext cx="1220719" cy="307777"/>
+              <a:off x="20135165" y="19075657"/>
+              <a:ext cx="1408080" cy="400110"/>
             </a:xfrm>
             <a:prstGeom prst="rect">
               <a:avLst/>
@@ -5010,10 +4997,9 @@
             <a:p>
               <a:pPr algn="ctr"/>
               <a:r>
-                <a:rPr lang="en-US" sz="1400" dirty="0"/>
+                <a:rPr lang="en-US" sz="700" dirty="0"/>
                 <a:t>BN, Activation</a:t>
               </a:r>
-              <a:endParaRPr lang="en-US" sz="1400" dirty="0"/>
             </a:p>
           </p:txBody>
         </p:sp>
@@ -5025,8 +5011,8 @@
           </p:nvSpPr>
           <p:spPr>
             <a:xfrm>
-              <a:off x="20231262" y="20195149"/>
-              <a:ext cx="1220719" cy="307777"/>
+              <a:off x="20137583" y="20195149"/>
+              <a:ext cx="1408080" cy="400110"/>
             </a:xfrm>
             <a:prstGeom prst="rect">
               <a:avLst/>
@@ -5041,10 +5027,9 @@
             <a:p>
               <a:pPr algn="ctr"/>
               <a:r>
-                <a:rPr lang="en-US" sz="1400" dirty="0"/>
+                <a:rPr lang="en-US" sz="700" dirty="0"/>
                 <a:t>BN, Activation</a:t>
               </a:r>
-              <a:endParaRPr lang="en-US" sz="1400" dirty="0"/>
             </a:p>
           </p:txBody>
         </p:sp>
@@ -5057,8 +5042,8 @@
         </p:nvGrpSpPr>
         <p:grpSpPr>
           <a:xfrm>
-            <a:off x="1271685" y="8611915"/>
-            <a:ext cx="7026495" cy="4136775"/>
+            <a:off x="635843" y="4305958"/>
+            <a:ext cx="3513248" cy="2068388"/>
             <a:chOff x="1271685" y="8611915"/>
             <a:chExt cx="7026495" cy="4136775"/>
           </a:xfrm>
@@ -5192,7 +5177,276 @@
             <a:lstStyle/>
             <a:p>
               <a:pPr algn="ctr"/>
-              <a:endParaRPr lang="en-US"/>
+              <a:endParaRPr lang="en-US" sz="450"/>
+            </a:p>
+          </p:txBody>
+        </p:sp>
+      </p:grpSp>
+      <p:grpSp>
+        <p:nvGrpSpPr>
+          <p:cNvPr id="7" name="Group 6"/>
+          <p:cNvGrpSpPr/>
+          <p:nvPr/>
+        </p:nvGrpSpPr>
+        <p:grpSpPr>
+          <a:xfrm>
+            <a:off x="3725960" y="10511367"/>
+            <a:ext cx="7540713" cy="8185153"/>
+            <a:chOff x="7451919" y="21022733"/>
+            <a:chExt cx="15081425" cy="16370306"/>
+          </a:xfrm>
+        </p:grpSpPr>
+        <p:pic>
+          <p:nvPicPr>
+            <p:cNvPr id="5" name="Picture 4"/>
+            <p:cNvPicPr>
+              <a:picLocks noChangeAspect="1"/>
+            </p:cNvPicPr>
+            <p:nvPr/>
+          </p:nvPicPr>
+          <p:blipFill rotWithShape="1">
+            <a:blip r:embed="rId10"/>
+            <a:srcRect l="1052" r="449"/>
+            <a:stretch/>
+          </p:blipFill>
+          <p:spPr>
+            <a:xfrm>
+              <a:off x="7451919" y="29239639"/>
+              <a:ext cx="15076838" cy="8153400"/>
+            </a:xfrm>
+            <a:prstGeom prst="rect">
+              <a:avLst/>
+            </a:prstGeom>
+          </p:spPr>
+        </p:pic>
+        <p:pic>
+          <p:nvPicPr>
+            <p:cNvPr id="6" name="Picture 5"/>
+            <p:cNvPicPr>
+              <a:picLocks noChangeAspect="1"/>
+            </p:cNvPicPr>
+            <p:nvPr/>
+          </p:nvPicPr>
+          <p:blipFill>
+            <a:blip r:embed="rId11"/>
+            <a:stretch>
+              <a:fillRect/>
+            </a:stretch>
+          </p:blipFill>
+          <p:spPr>
+            <a:xfrm>
+              <a:off x="7521944" y="21022733"/>
+              <a:ext cx="15011400" cy="8143875"/>
+            </a:xfrm>
+            <a:prstGeom prst="rect">
+              <a:avLst/>
+            </a:prstGeom>
+          </p:spPr>
+        </p:pic>
+      </p:grpSp>
+      <p:pic>
+        <p:nvPicPr>
+          <p:cNvPr id="15" name="Picture 14"/>
+          <p:cNvPicPr>
+            <a:picLocks noChangeAspect="1"/>
+          </p:cNvPicPr>
+          <p:nvPr/>
+        </p:nvPicPr>
+        <p:blipFill>
+          <a:blip r:embed="rId12">
+            <a:extLst>
+              <a:ext uri="{28A0092B-C50C-407E-A947-70E740481C1C}">
+                <a14:useLocalDpi xmlns:a14="http://schemas.microsoft.com/office/drawing/2010/main" val="0"/>
+              </a:ext>
+            </a:extLst>
+          </a:blip>
+          <a:stretch>
+            <a:fillRect/>
+          </a:stretch>
+        </p:blipFill>
+        <p:spPr>
+          <a:xfrm>
+            <a:off x="12074441" y="9342821"/>
+            <a:ext cx="2926086" cy="2194565"/>
+          </a:xfrm>
+          <a:prstGeom prst="rect">
+            <a:avLst/>
+          </a:prstGeom>
+        </p:spPr>
+      </p:pic>
+      <p:grpSp>
+        <p:nvGrpSpPr>
+          <p:cNvPr id="68" name="Group 67"/>
+          <p:cNvGrpSpPr/>
+          <p:nvPr/>
+        </p:nvGrpSpPr>
+        <p:grpSpPr>
+          <a:xfrm>
+            <a:off x="10558526" y="7278685"/>
+            <a:ext cx="2926086" cy="2194565"/>
+            <a:chOff x="21117052" y="14557370"/>
+            <a:chExt cx="5852172" cy="4389129"/>
+          </a:xfrm>
+        </p:grpSpPr>
+        <p:pic>
+          <p:nvPicPr>
+            <p:cNvPr id="14" name="Picture 13"/>
+            <p:cNvPicPr>
+              <a:picLocks noChangeAspect="1"/>
+            </p:cNvPicPr>
+            <p:nvPr/>
+          </p:nvPicPr>
+          <p:blipFill>
+            <a:blip r:embed="rId13">
+              <a:extLst>
+                <a:ext uri="{28A0092B-C50C-407E-A947-70E740481C1C}">
+                  <a14:useLocalDpi xmlns:a14="http://schemas.microsoft.com/office/drawing/2010/main" val="0"/>
+                </a:ext>
+              </a:extLst>
+            </a:blip>
+            <a:stretch>
+              <a:fillRect/>
+            </a:stretch>
+          </p:blipFill>
+          <p:spPr>
+            <a:xfrm>
+              <a:off x="21117052" y="14557370"/>
+              <a:ext cx="5852172" cy="4389129"/>
+            </a:xfrm>
+            <a:prstGeom prst="rect">
+              <a:avLst/>
+            </a:prstGeom>
+          </p:spPr>
+        </p:pic>
+        <p:cxnSp>
+          <p:nvCxnSpPr>
+            <p:cNvPr id="17" name="Straight Connector 16"/>
+            <p:cNvCxnSpPr/>
+            <p:nvPr/>
+          </p:nvCxnSpPr>
+          <p:spPr>
+            <a:xfrm flipH="1">
+              <a:off x="22821900" y="15977627"/>
+              <a:ext cx="0" cy="2468880"/>
+            </a:xfrm>
+            <a:prstGeom prst="line">
+              <a:avLst/>
+            </a:prstGeom>
+            <a:ln w="19050">
+              <a:solidFill>
+                <a:schemeClr val="tx1"/>
+              </a:solidFill>
+            </a:ln>
+          </p:spPr>
+          <p:style>
+            <a:lnRef idx="1">
+              <a:schemeClr val="accent1"/>
+            </a:lnRef>
+            <a:fillRef idx="0">
+              <a:schemeClr val="accent1"/>
+            </a:fillRef>
+            <a:effectRef idx="0">
+              <a:schemeClr val="accent1"/>
+            </a:effectRef>
+            <a:fontRef idx="minor">
+              <a:schemeClr val="tx1"/>
+            </a:fontRef>
+          </p:style>
+        </p:cxnSp>
+        <p:cxnSp>
+          <p:nvCxnSpPr>
+            <p:cNvPr id="73" name="Straight Connector 72"/>
+            <p:cNvCxnSpPr/>
+            <p:nvPr/>
+          </p:nvCxnSpPr>
+          <p:spPr>
+            <a:xfrm flipH="1">
+              <a:off x="24866600" y="16007040"/>
+              <a:ext cx="0" cy="2468880"/>
+            </a:xfrm>
+            <a:prstGeom prst="line">
+              <a:avLst/>
+            </a:prstGeom>
+            <a:ln w="19050">
+              <a:solidFill>
+                <a:srgbClr val="FF0000"/>
+              </a:solidFill>
+            </a:ln>
+          </p:spPr>
+          <p:style>
+            <a:lnRef idx="1">
+              <a:schemeClr val="accent1"/>
+            </a:lnRef>
+            <a:fillRef idx="0">
+              <a:schemeClr val="accent1"/>
+            </a:fillRef>
+            <a:effectRef idx="0">
+              <a:schemeClr val="accent1"/>
+            </a:effectRef>
+            <a:fontRef idx="minor">
+              <a:schemeClr val="tx1"/>
+            </a:fontRef>
+          </p:style>
+        </p:cxnSp>
+        <p:sp>
+          <p:nvSpPr>
+            <p:cNvPr id="67" name="TextBox 66"/>
+            <p:cNvSpPr txBox="1"/>
+            <p:nvPr/>
+          </p:nvSpPr>
+          <p:spPr>
+            <a:xfrm>
+              <a:off x="22459830" y="15551160"/>
+              <a:ext cx="693140" cy="323166"/>
+            </a:xfrm>
+            <a:prstGeom prst="rect">
+              <a:avLst/>
+            </a:prstGeom>
+            <a:noFill/>
+          </p:spPr>
+          <p:txBody>
+            <a:bodyPr wrap="none" rtlCol="0">
+              <a:spAutoFit/>
+            </a:bodyPr>
+            <a:lstStyle/>
+            <a:p>
+              <a:r>
+                <a:rPr lang="en-US" sz="450" dirty="0"/>
+                <a:t>Min LR</a:t>
+              </a:r>
+            </a:p>
+          </p:txBody>
+        </p:sp>
+        <p:sp>
+          <p:nvSpPr>
+            <p:cNvPr id="75" name="TextBox 74"/>
+            <p:cNvSpPr txBox="1"/>
+            <p:nvPr/>
+          </p:nvSpPr>
+          <p:spPr>
+            <a:xfrm>
+              <a:off x="24433886" y="15551160"/>
+              <a:ext cx="712376" cy="323166"/>
+            </a:xfrm>
+            <a:prstGeom prst="rect">
+              <a:avLst/>
+            </a:prstGeom>
+            <a:noFill/>
+          </p:spPr>
+          <p:txBody>
+            <a:bodyPr wrap="none" rtlCol="0">
+              <a:spAutoFit/>
+            </a:bodyPr>
+            <a:lstStyle/>
+            <a:p>
+              <a:r>
+                <a:rPr lang="en-US" sz="450" dirty="0">
+                  <a:solidFill>
+                    <a:srgbClr val="FF0000"/>
+                  </a:solidFill>
+                </a:rPr>
+                <a:t>Max LR</a:t>
+              </a:r>
             </a:p>
           </p:txBody>
         </p:sp>
@@ -5261,10 +5515,10 @@
         </p:nvGrpSpPr>
         <p:grpSpPr>
           <a:xfrm>
-            <a:off x="4211754" y="12039925"/>
-            <a:ext cx="21827999" cy="10576228"/>
+            <a:off x="2105877" y="6019963"/>
+            <a:ext cx="10914000" cy="5334280"/>
             <a:chOff x="4211754" y="12039925"/>
-            <a:chExt cx="21827999" cy="10576228"/>
+            <a:chExt cx="21827999" cy="10668559"/>
           </a:xfrm>
         </p:grpSpPr>
         <p:sp>
@@ -5305,7 +5559,7 @@
             </a:fontRef>
           </p:style>
           <p:txBody>
-            <a:bodyPr rot="0" spcFirstLastPara="0" vertOverflow="overflow" horzOverflow="overflow" vert="horz" wrap="square" lIns="91440" tIns="45720" rIns="91440" bIns="45720" numCol="1" spcCol="0" rtlCol="0" fromWordArt="0" anchor="ctr" anchorCtr="0" forceAA="0" compatLnSpc="1">
+            <a:bodyPr rot="0" spcFirstLastPara="0" vertOverflow="overflow" horzOverflow="overflow" vert="horz" wrap="square" lIns="45720" tIns="22860" rIns="45720" bIns="22860" numCol="1" spcCol="0" rtlCol="0" fromWordArt="0" anchor="ctr" anchorCtr="0" forceAA="0" compatLnSpc="1">
               <a:prstTxWarp prst="textNoShape">
                 <a:avLst/>
               </a:prstTxWarp>
@@ -5314,7 +5568,7 @@
             <a:lstStyle/>
             <a:p>
               <a:pPr algn="ctr"/>
-              <a:endParaRPr lang="en-US"/>
+              <a:endParaRPr lang="en-US" sz="450"/>
             </a:p>
           </p:txBody>
         </p:sp>
@@ -5326,8 +5580,8 @@
           </p:nvSpPr>
           <p:spPr>
             <a:xfrm>
-              <a:off x="8008241" y="16973499"/>
-              <a:ext cx="508473" cy="477054"/>
+              <a:off x="8008242" y="16973499"/>
+              <a:ext cx="696344" cy="569386"/>
             </a:xfrm>
             <a:prstGeom prst="rect">
               <a:avLst/>
@@ -5341,10 +5595,10 @@
             <a:lstStyle/>
             <a:p>
               <a:r>
-                <a:rPr lang="en-US" sz="2500" dirty="0" smtClean="0"/>
+                <a:rPr lang="en-US" sz="1250" dirty="0"/>
                 <a:t>32</a:t>
               </a:r>
-              <a:endParaRPr lang="en-US" sz="2500" dirty="0"/>
+              <a:endParaRPr lang="en-US" sz="1250" dirty="0"/>
             </a:p>
           </p:txBody>
         </p:sp>
@@ -5357,7 +5611,7 @@
           <p:spPr>
             <a:xfrm>
               <a:off x="8898714" y="16973499"/>
-              <a:ext cx="508473" cy="477054"/>
+              <a:ext cx="696344" cy="569386"/>
             </a:xfrm>
             <a:prstGeom prst="rect">
               <a:avLst/>
@@ -5371,10 +5625,10 @@
             <a:lstStyle/>
             <a:p>
               <a:r>
-                <a:rPr lang="en-US" sz="2500" dirty="0" smtClean="0"/>
+                <a:rPr lang="en-US" sz="1250" dirty="0"/>
                 <a:t>32</a:t>
               </a:r>
-              <a:endParaRPr lang="en-US" sz="2500" dirty="0"/>
+              <a:endParaRPr lang="en-US" sz="1250" dirty="0"/>
             </a:p>
           </p:txBody>
         </p:sp>
@@ -5387,9 +5641,9 @@
           <p:grpSpPr>
             <a:xfrm>
               <a:off x="6168521" y="13032076"/>
-              <a:ext cx="1558231" cy="4184289"/>
+              <a:ext cx="1746101" cy="4184289"/>
               <a:chOff x="18350689" y="8312592"/>
-              <a:chExt cx="1558231" cy="4184289"/>
+              <a:chExt cx="1746101" cy="4184289"/>
             </a:xfrm>
           </p:grpSpPr>
           <p:sp>
@@ -5436,7 +5690,7 @@
               <a:lstStyle/>
               <a:p>
                 <a:pPr algn="ctr"/>
-                <a:endParaRPr lang="en-US"/>
+                <a:endParaRPr lang="en-US" sz="450"/>
               </a:p>
             </p:txBody>
           </p:sp>
@@ -5476,7 +5730,7 @@
               <a:lstStyle/>
               <a:p>
                 <a:pPr algn="ctr"/>
-                <a:endParaRPr lang="en-US"/>
+                <a:endParaRPr lang="en-US" sz="450"/>
               </a:p>
             </p:txBody>
           </p:sp>
@@ -5489,7 +5743,7 @@
             <p:spPr>
               <a:xfrm>
                 <a:off x="18350689" y="8312592"/>
-                <a:ext cx="346570" cy="477054"/>
+                <a:ext cx="532840" cy="569386"/>
               </a:xfrm>
               <a:prstGeom prst="rect">
                 <a:avLst/>
@@ -5503,10 +5757,10 @@
               <a:lstStyle/>
               <a:p>
                 <a:r>
-                  <a:rPr lang="en-US" sz="2500" dirty="0" smtClean="0"/>
+                  <a:rPr lang="en-US" sz="1250" dirty="0"/>
                   <a:t>3</a:t>
                 </a:r>
-                <a:endParaRPr lang="en-US" sz="2500" dirty="0"/>
+                <a:endParaRPr lang="en-US" sz="1250" dirty="0"/>
               </a:p>
             </p:txBody>
           </p:sp>
@@ -5518,8 +5772,8 @@
             </p:nvSpPr>
             <p:spPr>
               <a:xfrm>
-                <a:off x="18835092" y="8312592"/>
-                <a:ext cx="508473" cy="477054"/>
+                <a:off x="18835093" y="8312592"/>
+                <a:ext cx="696344" cy="569386"/>
               </a:xfrm>
               <a:prstGeom prst="rect">
                 <a:avLst/>
@@ -5533,10 +5787,10 @@
               <a:lstStyle/>
               <a:p>
                 <a:r>
-                  <a:rPr lang="en-US" sz="2500" dirty="0" smtClean="0"/>
+                  <a:rPr lang="en-US" sz="1250" dirty="0"/>
                   <a:t>16</a:t>
                 </a:r>
-                <a:endParaRPr lang="en-US" sz="2500" dirty="0"/>
+                <a:endParaRPr lang="en-US" sz="1250" dirty="0"/>
               </a:p>
             </p:txBody>
           </p:sp>
@@ -5548,8 +5802,8 @@
             </p:nvSpPr>
             <p:spPr>
               <a:xfrm>
-                <a:off x="19400447" y="8312592"/>
-                <a:ext cx="508473" cy="477054"/>
+                <a:off x="19400446" y="8312592"/>
+                <a:ext cx="696344" cy="569386"/>
               </a:xfrm>
               <a:prstGeom prst="rect">
                 <a:avLst/>
@@ -5563,10 +5817,10 @@
               <a:lstStyle/>
               <a:p>
                 <a:r>
-                  <a:rPr lang="en-US" sz="2500" dirty="0" smtClean="0"/>
+                  <a:rPr lang="en-US" sz="1250" dirty="0"/>
                   <a:t>16</a:t>
                 </a:r>
-                <a:endParaRPr lang="en-US" sz="2500" dirty="0"/>
+                <a:endParaRPr lang="en-US" sz="1250" dirty="0"/>
               </a:p>
             </p:txBody>
           </p:sp>
@@ -5614,7 +5868,7 @@
               <a:lstStyle/>
               <a:p>
                 <a:pPr algn="ctr"/>
-                <a:endParaRPr lang="en-US"/>
+                <a:endParaRPr lang="en-US" sz="450"/>
               </a:p>
             </p:txBody>
           </p:sp>
@@ -5662,7 +5916,7 @@
               <a:lstStyle/>
               <a:p>
                 <a:pPr algn="ctr"/>
-                <a:endParaRPr lang="en-US"/>
+                <a:endParaRPr lang="en-US" sz="450"/>
               </a:p>
             </p:txBody>
           </p:sp>
@@ -5702,7 +5956,7 @@
               <a:lstStyle/>
               <a:p>
                 <a:pPr algn="ctr"/>
-                <a:endParaRPr lang="en-US"/>
+                <a:endParaRPr lang="en-US" sz="450"/>
               </a:p>
             </p:txBody>
           </p:sp>
@@ -5742,7 +5996,7 @@
               <a:lstStyle/>
               <a:p>
                 <a:pPr algn="ctr"/>
-                <a:endParaRPr lang="en-US"/>
+                <a:endParaRPr lang="en-US" sz="450"/>
               </a:p>
             </p:txBody>
           </p:sp>
@@ -5791,7 +6045,7 @@
             <a:lstStyle/>
             <a:p>
               <a:pPr algn="ctr"/>
-              <a:endParaRPr lang="en-US"/>
+              <a:endParaRPr lang="en-US" sz="450"/>
             </a:p>
           </p:txBody>
         </p:sp>
@@ -5839,7 +6093,7 @@
             <a:lstStyle/>
             <a:p>
               <a:pPr algn="ctr"/>
-              <a:endParaRPr lang="en-US"/>
+              <a:endParaRPr lang="en-US" sz="450"/>
             </a:p>
           </p:txBody>
         </p:sp>
@@ -5879,7 +6133,7 @@
             <a:lstStyle/>
             <a:p>
               <a:pPr algn="ctr"/>
-              <a:endParaRPr lang="en-US"/>
+              <a:endParaRPr lang="en-US" sz="450"/>
             </a:p>
           </p:txBody>
         </p:sp>
@@ -5919,7 +6173,7 @@
             <a:lstStyle/>
             <a:p>
               <a:pPr algn="ctr"/>
-              <a:endParaRPr lang="en-US"/>
+              <a:endParaRPr lang="en-US" sz="450"/>
             </a:p>
           </p:txBody>
         </p:sp>
@@ -5959,7 +6213,7 @@
             <a:lstStyle/>
             <a:p>
               <a:pPr algn="ctr"/>
-              <a:endParaRPr lang="en-US"/>
+              <a:endParaRPr lang="en-US" sz="450"/>
             </a:p>
           </p:txBody>
         </p:sp>
@@ -6007,7 +6261,7 @@
             <a:lstStyle/>
             <a:p>
               <a:pPr algn="ctr"/>
-              <a:endParaRPr lang="en-US"/>
+              <a:endParaRPr lang="en-US" sz="450"/>
             </a:p>
           </p:txBody>
         </p:sp>
@@ -6019,8 +6273,8 @@
           </p:nvSpPr>
           <p:spPr>
             <a:xfrm flipH="1">
-              <a:off x="18566429" y="20403617"/>
-              <a:ext cx="508473" cy="477054"/>
+              <a:off x="18566429" y="20403616"/>
+              <a:ext cx="696344" cy="569386"/>
             </a:xfrm>
             <a:prstGeom prst="rect">
               <a:avLst/>
@@ -6034,10 +6288,10 @@
             <a:lstStyle/>
             <a:p>
               <a:r>
-                <a:rPr lang="en-US" sz="2500" dirty="0" smtClean="0"/>
+                <a:rPr lang="en-US" sz="1250" dirty="0"/>
                 <a:t>64</a:t>
               </a:r>
-              <a:endParaRPr lang="en-US" sz="2500" dirty="0"/>
+              <a:endParaRPr lang="en-US" sz="1250" dirty="0"/>
             </a:p>
           </p:txBody>
         </p:sp>
@@ -6077,7 +6331,7 @@
             <a:lstStyle/>
             <a:p>
               <a:pPr algn="ctr"/>
-              <a:endParaRPr lang="en-US"/>
+              <a:endParaRPr lang="en-US" sz="450"/>
             </a:p>
           </p:txBody>
         </p:sp>
@@ -6117,7 +6371,7 @@
             <a:lstStyle/>
             <a:p>
               <a:pPr algn="ctr"/>
-              <a:endParaRPr lang="en-US"/>
+              <a:endParaRPr lang="en-US" sz="450"/>
             </a:p>
           </p:txBody>
         </p:sp>
@@ -6171,7 +6425,7 @@
               <a:lstStyle/>
               <a:p>
                 <a:pPr algn="ctr"/>
-                <a:endParaRPr lang="en-US"/>
+                <a:endParaRPr lang="en-US" sz="450"/>
               </a:p>
             </p:txBody>
           </p:sp>
@@ -6219,7 +6473,7 @@
               <a:lstStyle/>
               <a:p>
                 <a:pPr algn="ctr"/>
-                <a:endParaRPr lang="en-US"/>
+                <a:endParaRPr lang="en-US" sz="450"/>
               </a:p>
             </p:txBody>
           </p:sp>
@@ -6268,7 +6522,7 @@
             <a:lstStyle/>
             <a:p>
               <a:pPr algn="ctr"/>
-              <a:endParaRPr lang="en-US"/>
+              <a:endParaRPr lang="en-US" sz="450"/>
             </a:p>
           </p:txBody>
         </p:sp>
@@ -6316,7 +6570,7 @@
             <a:lstStyle/>
             <a:p>
               <a:pPr algn="ctr"/>
-              <a:endParaRPr lang="en-US"/>
+              <a:endParaRPr lang="en-US" sz="450"/>
             </a:p>
           </p:txBody>
         </p:sp>
@@ -6329,7 +6583,7 @@
           <p:spPr>
             <a:xfrm flipH="1">
               <a:off x="18598151" y="13285547"/>
-              <a:ext cx="508473" cy="477054"/>
+              <a:ext cx="696344" cy="569386"/>
             </a:xfrm>
             <a:prstGeom prst="rect">
               <a:avLst/>
@@ -6343,10 +6597,10 @@
             <a:lstStyle/>
             <a:p>
               <a:r>
-                <a:rPr lang="en-US" sz="2500" dirty="0" smtClean="0"/>
+                <a:rPr lang="en-US" sz="1250" dirty="0"/>
                 <a:t>32</a:t>
               </a:r>
-              <a:endParaRPr lang="en-US" sz="2500" dirty="0"/>
+              <a:endParaRPr lang="en-US" sz="1250" dirty="0"/>
             </a:p>
           </p:txBody>
         </p:sp>
@@ -6394,7 +6648,7 @@
             <a:lstStyle/>
             <a:p>
               <a:pPr algn="ctr"/>
-              <a:endParaRPr lang="en-US"/>
+              <a:endParaRPr lang="en-US" sz="450"/>
             </a:p>
           </p:txBody>
         </p:sp>
@@ -6434,7 +6688,7 @@
             <a:lstStyle/>
             <a:p>
               <a:pPr algn="ctr"/>
-              <a:endParaRPr lang="en-US"/>
+              <a:endParaRPr lang="en-US" sz="450"/>
             </a:p>
           </p:txBody>
         </p:sp>
@@ -6488,7 +6742,7 @@
               <a:lstStyle/>
               <a:p>
                 <a:pPr algn="ctr"/>
-                <a:endParaRPr lang="en-US"/>
+                <a:endParaRPr lang="en-US" sz="450"/>
               </a:p>
             </p:txBody>
           </p:sp>
@@ -6536,7 +6790,7 @@
               <a:lstStyle/>
               <a:p>
                 <a:pPr algn="ctr"/>
-                <a:endParaRPr lang="en-US"/>
+                <a:endParaRPr lang="en-US" sz="450"/>
               </a:p>
             </p:txBody>
           </p:sp>
@@ -6550,7 +6804,7 @@
           <p:spPr>
             <a:xfrm flipH="1">
               <a:off x="19326163" y="13285547"/>
-              <a:ext cx="508473" cy="477054"/>
+              <a:ext cx="696344" cy="569386"/>
             </a:xfrm>
             <a:prstGeom prst="rect">
               <a:avLst/>
@@ -6564,10 +6818,10 @@
             <a:lstStyle/>
             <a:p>
               <a:r>
-                <a:rPr lang="en-US" sz="2500" dirty="0" smtClean="0"/>
+                <a:rPr lang="en-US" sz="1250" dirty="0"/>
                 <a:t>32</a:t>
               </a:r>
-              <a:endParaRPr lang="en-US" sz="2500" dirty="0"/>
+              <a:endParaRPr lang="en-US" sz="1250" dirty="0"/>
             </a:p>
           </p:txBody>
         </p:sp>
@@ -6615,7 +6869,7 @@
             <a:lstStyle/>
             <a:p>
               <a:pPr algn="ctr"/>
-              <a:endParaRPr lang="en-US"/>
+              <a:endParaRPr lang="en-US" sz="450"/>
             </a:p>
           </p:txBody>
         </p:sp>
@@ -6658,7 +6912,7 @@
             <a:lstStyle/>
             <a:p>
               <a:pPr algn="ctr"/>
-              <a:endParaRPr lang="en-US"/>
+              <a:endParaRPr lang="en-US" sz="450"/>
             </a:p>
           </p:txBody>
         </p:sp>
@@ -6671,7 +6925,7 @@
           <p:spPr>
             <a:xfrm flipH="1">
               <a:off x="20122485" y="13285547"/>
-              <a:ext cx="346570" cy="477054"/>
+              <a:ext cx="532840" cy="569386"/>
             </a:xfrm>
             <a:prstGeom prst="rect">
               <a:avLst/>
@@ -6685,7 +6939,7 @@
             <a:lstStyle/>
             <a:p>
               <a:r>
-                <a:rPr lang="en-US" sz="2500" dirty="0"/>
+                <a:rPr lang="en-US" sz="1250" dirty="0"/>
                 <a:t>2</a:t>
               </a:r>
             </a:p>
@@ -6735,7 +6989,7 @@
             <a:lstStyle/>
             <a:p>
               <a:pPr algn="ctr"/>
-              <a:endParaRPr lang="en-US"/>
+              <a:endParaRPr lang="en-US" sz="450"/>
             </a:p>
           </p:txBody>
         </p:sp>
@@ -6797,7 +7051,7 @@
               <a:lstStyle/>
               <a:p>
                 <a:pPr algn="ctr"/>
-                <a:endParaRPr lang="en-US"/>
+                <a:endParaRPr lang="en-US" sz="450"/>
               </a:p>
             </p:txBody>
           </p:sp>
@@ -6845,7 +7099,7 @@
               <a:lstStyle/>
               <a:p>
                 <a:pPr algn="ctr"/>
-                <a:endParaRPr lang="en-US"/>
+                <a:endParaRPr lang="en-US" sz="450"/>
               </a:p>
             </p:txBody>
           </p:sp>
@@ -6893,7 +7147,7 @@
               <a:lstStyle/>
               <a:p>
                 <a:pPr algn="ctr"/>
-                <a:endParaRPr lang="en-US"/>
+                <a:endParaRPr lang="en-US" sz="450"/>
               </a:p>
             </p:txBody>
           </p:sp>
@@ -6941,7 +7195,7 @@
               <a:lstStyle/>
               <a:p>
                 <a:pPr algn="ctr"/>
-                <a:endParaRPr lang="en-US"/>
+                <a:endParaRPr lang="en-US" sz="450"/>
               </a:p>
             </p:txBody>
           </p:sp>
@@ -6989,7 +7243,7 @@
               <a:lstStyle/>
               <a:p>
                 <a:pPr algn="ctr"/>
-                <a:endParaRPr lang="en-US"/>
+                <a:endParaRPr lang="en-US" sz="450"/>
               </a:p>
             </p:txBody>
           </p:sp>
@@ -7001,8 +7255,8 @@
             </p:nvSpPr>
             <p:spPr>
               <a:xfrm>
-                <a:off x="20579984" y="19957908"/>
-                <a:ext cx="3139642" cy="707886"/>
+                <a:off x="20579984" y="19957909"/>
+                <a:ext cx="3325912" cy="800220"/>
               </a:xfrm>
               <a:prstGeom prst="rect">
                 <a:avLst/>
@@ -7016,14 +7270,14 @@
               <a:lstStyle/>
               <a:p>
                 <a:r>
-                  <a:rPr lang="en-US" sz="4000" dirty="0" err="1" smtClean="0"/>
+                  <a:rPr lang="en-US" sz="2000" dirty="0" err="1"/>
                   <a:t>Concat</a:t>
                 </a:r>
                 <a:r>
-                  <a:rPr lang="en-US" sz="4000" dirty="0" smtClean="0"/>
+                  <a:rPr lang="en-US" sz="2000" dirty="0"/>
                   <a:t> or Add</a:t>
                 </a:r>
-                <a:endParaRPr lang="en-US" sz="4000" dirty="0"/>
+                <a:endParaRPr lang="en-US" sz="2000" dirty="0"/>
               </a:p>
             </p:txBody>
           </p:sp>
@@ -7035,8 +7289,8 @@
             </p:nvSpPr>
             <p:spPr>
               <a:xfrm>
-                <a:off x="20673025" y="20843901"/>
-                <a:ext cx="4212500" cy="707886"/>
+                <a:off x="20673026" y="20843901"/>
+                <a:ext cx="4400436" cy="800220"/>
               </a:xfrm>
               <a:prstGeom prst="rect">
                 <a:avLst/>
@@ -7050,18 +7304,18 @@
               <a:lstStyle/>
               <a:p>
                 <a:r>
-                  <a:rPr lang="en-US" sz="4000" dirty="0" err="1" smtClean="0"/>
+                  <a:rPr lang="en-US" sz="2000" dirty="0" err="1"/>
                   <a:t>UpSampling</a:t>
                 </a:r>
                 <a:r>
-                  <a:rPr lang="en-US" sz="4000" dirty="0" smtClean="0"/>
+                  <a:rPr lang="en-US" sz="2000" dirty="0"/>
                   <a:t> + </a:t>
                 </a:r>
                 <a:r>
-                  <a:rPr lang="en-US" sz="4000" dirty="0" err="1" smtClean="0"/>
+                  <a:rPr lang="en-US" sz="2000" dirty="0" err="1"/>
                   <a:t>Conv</a:t>
                 </a:r>
-                <a:endParaRPr lang="en-US" sz="4000" dirty="0"/>
+                <a:endParaRPr lang="en-US" sz="2000" dirty="0"/>
               </a:p>
             </p:txBody>
           </p:sp>
@@ -7073,8 +7327,8 @@
             </p:nvSpPr>
             <p:spPr>
               <a:xfrm>
-                <a:off x="20679924" y="21729894"/>
-                <a:ext cx="2835520" cy="707886"/>
+                <a:off x="20679924" y="21729895"/>
+                <a:ext cx="3021852" cy="800220"/>
               </a:xfrm>
               <a:prstGeom prst="rect">
                 <a:avLst/>
@@ -7088,18 +7342,18 @@
               <a:lstStyle/>
               <a:p>
                 <a:r>
-                  <a:rPr lang="en-US" sz="4000" dirty="0" err="1" smtClean="0"/>
+                  <a:rPr lang="en-US" sz="2000" dirty="0" err="1"/>
                   <a:t>Strided</a:t>
                 </a:r>
                 <a:r>
-                  <a:rPr lang="en-US" sz="4000" dirty="0" smtClean="0"/>
+                  <a:rPr lang="en-US" sz="2000" dirty="0"/>
                   <a:t> </a:t>
                 </a:r>
                 <a:r>
-                  <a:rPr lang="en-US" sz="4000" dirty="0" err="1" smtClean="0"/>
+                  <a:rPr lang="en-US" sz="2000" dirty="0" err="1"/>
                   <a:t>Conv</a:t>
                 </a:r>
-                <a:endParaRPr lang="en-US" sz="4000" dirty="0"/>
+                <a:endParaRPr lang="en-US" sz="2000" dirty="0"/>
               </a:p>
             </p:txBody>
           </p:sp>
@@ -7111,8 +7365,8 @@
             </p:nvSpPr>
             <p:spPr>
               <a:xfrm>
-                <a:off x="20683772" y="22537093"/>
-                <a:ext cx="3817135" cy="707886"/>
+                <a:off x="20683772" y="22537092"/>
+                <a:ext cx="3993914" cy="800220"/>
               </a:xfrm>
               <a:prstGeom prst="rect">
                 <a:avLst/>
@@ -7126,14 +7380,14 @@
               <a:lstStyle/>
               <a:p>
                 <a:r>
-                  <a:rPr lang="en-US" sz="4000" dirty="0" smtClean="0"/>
+                  <a:rPr lang="en-US" sz="2000" dirty="0"/>
                   <a:t>Conv 3x3x3, </a:t>
                 </a:r>
                 <a:r>
-                  <a:rPr lang="en-US" sz="4000" dirty="0" err="1" smtClean="0"/>
+                  <a:rPr lang="en-US" sz="2000" dirty="0" err="1"/>
                   <a:t>ReLu</a:t>
                 </a:r>
-                <a:endParaRPr lang="en-US" sz="4000" dirty="0"/>
+                <a:endParaRPr lang="en-US" sz="2000" dirty="0"/>
               </a:p>
             </p:txBody>
           </p:sp>
@@ -7145,8 +7399,8 @@
             </p:nvSpPr>
             <p:spPr>
               <a:xfrm>
-                <a:off x="20685219" y="23378229"/>
-                <a:ext cx="4480265" cy="707886"/>
+                <a:off x="20685220" y="23378228"/>
+                <a:ext cx="4658584" cy="800220"/>
               </a:xfrm>
               <a:prstGeom prst="rect">
                 <a:avLst/>
@@ -7160,14 +7414,14 @@
               <a:lstStyle/>
               <a:p>
                 <a:r>
-                  <a:rPr lang="en-US" sz="4000" dirty="0" smtClean="0"/>
+                  <a:rPr lang="en-US" sz="2000" dirty="0"/>
                   <a:t>Conv 1x1x1, </a:t>
                 </a:r>
                 <a:r>
-                  <a:rPr lang="en-US" sz="4000" dirty="0" err="1" smtClean="0"/>
+                  <a:rPr lang="en-US" sz="2000" dirty="0" err="1"/>
                   <a:t>softmax</a:t>
                 </a:r>
-                <a:endParaRPr lang="en-US" sz="4000" dirty="0"/>
+                <a:endParaRPr lang="en-US" sz="2000" dirty="0"/>
               </a:p>
             </p:txBody>
           </p:sp>
@@ -7213,7 +7467,7 @@
               <a:lstStyle/>
               <a:p>
                 <a:pPr algn="ctr"/>
-                <a:endParaRPr lang="en-US"/>
+                <a:endParaRPr lang="en-US" sz="450"/>
               </a:p>
             </p:txBody>
           </p:sp>
@@ -7262,7 +7516,7 @@
             <a:lstStyle/>
             <a:p>
               <a:pPr algn="ctr"/>
-              <a:endParaRPr lang="en-US"/>
+              <a:endParaRPr lang="en-US" sz="450"/>
             </a:p>
           </p:txBody>
         </p:sp>
@@ -7302,7 +7556,7 @@
             <a:lstStyle/>
             <a:p>
               <a:pPr algn="ctr"/>
-              <a:endParaRPr lang="en-US" dirty="0"/>
+              <a:endParaRPr lang="en-US" sz="450" dirty="0"/>
             </a:p>
           </p:txBody>
         </p:sp>
@@ -7350,7 +7604,7 @@
             <a:lstStyle/>
             <a:p>
               <a:pPr algn="ctr"/>
-              <a:endParaRPr lang="en-US"/>
+              <a:endParaRPr lang="en-US" sz="450"/>
             </a:p>
           </p:txBody>
         </p:sp>
@@ -7390,7 +7644,7 @@
             <a:lstStyle/>
             <a:p>
               <a:pPr algn="ctr"/>
-              <a:endParaRPr lang="en-US" dirty="0"/>
+              <a:endParaRPr lang="en-US" sz="450" dirty="0"/>
             </a:p>
           </p:txBody>
         </p:sp>
@@ -7402,8 +7656,8 @@
           </p:nvSpPr>
           <p:spPr>
             <a:xfrm>
-              <a:off x="13110746" y="22139099"/>
-              <a:ext cx="508473" cy="477054"/>
+              <a:off x="13110746" y="22139098"/>
+              <a:ext cx="696344" cy="569386"/>
             </a:xfrm>
             <a:prstGeom prst="rect">
               <a:avLst/>
@@ -7417,10 +7671,10 @@
             <a:lstStyle/>
             <a:p>
               <a:r>
-                <a:rPr lang="en-US" sz="2500" dirty="0" smtClean="0"/>
+                <a:rPr lang="en-US" sz="1250" dirty="0"/>
                 <a:t>64</a:t>
               </a:r>
-              <a:endParaRPr lang="en-US" sz="2500" dirty="0"/>
+              <a:endParaRPr lang="en-US" sz="1250" dirty="0"/>
             </a:p>
           </p:txBody>
         </p:sp>
@@ -7468,7 +7722,7 @@
             <a:lstStyle/>
             <a:p>
               <a:pPr algn="ctr"/>
-              <a:endParaRPr lang="en-US"/>
+              <a:endParaRPr lang="en-US" sz="450"/>
             </a:p>
           </p:txBody>
         </p:sp>
@@ -7508,7 +7762,7 @@
             <a:lstStyle/>
             <a:p>
               <a:pPr algn="ctr"/>
-              <a:endParaRPr lang="en-US" dirty="0"/>
+              <a:endParaRPr lang="en-US" sz="450" dirty="0"/>
             </a:p>
           </p:txBody>
         </p:sp>
@@ -7520,8 +7774,8 @@
           </p:nvSpPr>
           <p:spPr>
             <a:xfrm>
-              <a:off x="16648888" y="22074412"/>
-              <a:ext cx="508473" cy="477054"/>
+              <a:off x="16648887" y="22074412"/>
+              <a:ext cx="696344" cy="569386"/>
             </a:xfrm>
             <a:prstGeom prst="rect">
               <a:avLst/>
@@ -7535,10 +7789,10 @@
             <a:lstStyle/>
             <a:p>
               <a:r>
-                <a:rPr lang="en-US" sz="2500" dirty="0" smtClean="0"/>
+                <a:rPr lang="en-US" sz="1250" dirty="0"/>
                 <a:t>64</a:t>
               </a:r>
-              <a:endParaRPr lang="en-US" sz="2500" dirty="0"/>
+              <a:endParaRPr lang="en-US" sz="1250" dirty="0"/>
             </a:p>
           </p:txBody>
         </p:sp>
@@ -7550,8 +7804,8 @@
           </p:nvSpPr>
           <p:spPr>
             <a:xfrm>
-              <a:off x="9784655" y="16959976"/>
-              <a:ext cx="508473" cy="477054"/>
+              <a:off x="9784656" y="16959977"/>
+              <a:ext cx="696344" cy="569386"/>
             </a:xfrm>
             <a:prstGeom prst="rect">
               <a:avLst/>
@@ -7565,10 +7819,10 @@
             <a:lstStyle/>
             <a:p>
               <a:r>
-                <a:rPr lang="en-US" sz="2500" dirty="0" smtClean="0"/>
+                <a:rPr lang="en-US" sz="1250" dirty="0"/>
                 <a:t>32</a:t>
               </a:r>
-              <a:endParaRPr lang="en-US" sz="2500" dirty="0"/>
+              <a:endParaRPr lang="en-US" sz="1250" dirty="0"/>
             </a:p>
           </p:txBody>
         </p:sp>
@@ -7616,7 +7870,7 @@
             <a:lstStyle/>
             <a:p>
               <a:pPr algn="ctr"/>
-              <a:endParaRPr lang="en-US"/>
+              <a:endParaRPr lang="en-US" sz="450"/>
             </a:p>
           </p:txBody>
         </p:sp>
@@ -7656,7 +7910,7 @@
             <a:lstStyle/>
             <a:p>
               <a:pPr algn="ctr"/>
-              <a:endParaRPr lang="en-US"/>
+              <a:endParaRPr lang="en-US" sz="450"/>
             </a:p>
           </p:txBody>
         </p:sp>
@@ -7669,7 +7923,7 @@
           <p:spPr>
             <a:xfrm>
               <a:off x="9790614" y="22004278"/>
-              <a:ext cx="508473" cy="477054"/>
+              <a:ext cx="696344" cy="569386"/>
             </a:xfrm>
             <a:prstGeom prst="rect">
               <a:avLst/>
@@ -7683,10 +7937,10 @@
             <a:lstStyle/>
             <a:p>
               <a:r>
-                <a:rPr lang="en-US" sz="2500" dirty="0" smtClean="0"/>
+                <a:rPr lang="en-US" sz="1250" dirty="0"/>
                 <a:t>64</a:t>
               </a:r>
-              <a:endParaRPr lang="en-US" sz="2500" dirty="0"/>
+              <a:endParaRPr lang="en-US" sz="1250" dirty="0"/>
             </a:p>
           </p:txBody>
         </p:sp>
@@ -7735,10 +7989,9 @@
             <a:p>
               <a:pPr algn="ctr"/>
               <a:r>
-                <a:rPr lang="en-US" sz="5400" dirty="0"/>
+                <a:rPr lang="en-US" sz="2700" dirty="0"/>
                 <a:t># of Convolution Blocks</a:t>
               </a:r>
-              <a:endParaRPr lang="en-US" sz="5400" dirty="0"/>
             </a:p>
           </p:txBody>
         </p:sp>
@@ -7751,7 +8004,7 @@
           <p:spPr>
             <a:xfrm flipH="1">
               <a:off x="17633517" y="20406548"/>
-              <a:ext cx="508473" cy="477054"/>
+              <a:ext cx="696344" cy="569386"/>
             </a:xfrm>
             <a:prstGeom prst="rect">
               <a:avLst/>
@@ -7765,10 +8018,10 @@
             <a:lstStyle/>
             <a:p>
               <a:r>
-                <a:rPr lang="en-US" sz="2500" dirty="0" smtClean="0"/>
+                <a:rPr lang="en-US" sz="1250" dirty="0"/>
                 <a:t>64</a:t>
               </a:r>
-              <a:endParaRPr lang="en-US" sz="2500" dirty="0"/>
+              <a:endParaRPr lang="en-US" sz="1250" dirty="0"/>
             </a:p>
           </p:txBody>
         </p:sp>
@@ -7781,7 +8034,7 @@
           <p:spPr>
             <a:xfrm>
               <a:off x="4211754" y="14509757"/>
-              <a:ext cx="1821653" cy="769441"/>
+              <a:ext cx="2006190" cy="861774"/>
             </a:xfrm>
             <a:prstGeom prst="rect">
               <a:avLst/>
@@ -7795,10 +8048,10 @@
             <a:lstStyle/>
             <a:p>
               <a:r>
-                <a:rPr lang="en-US" sz="4400" dirty="0" smtClean="0"/>
+                <a:rPr lang="en-US" sz="2200" dirty="0"/>
                 <a:t>Layer 0</a:t>
               </a:r>
-              <a:endParaRPr lang="en-US" sz="4400" dirty="0"/>
+              <a:endParaRPr lang="en-US" sz="2200" dirty="0"/>
             </a:p>
           </p:txBody>
         </p:sp>
@@ -7811,7 +8064,7 @@
           <p:spPr>
             <a:xfrm>
               <a:off x="4212588" y="17905592"/>
-              <a:ext cx="1821653" cy="769441"/>
+              <a:ext cx="2006190" cy="861774"/>
             </a:xfrm>
             <a:prstGeom prst="rect">
               <a:avLst/>
@@ -7825,10 +8078,10 @@
             <a:lstStyle/>
             <a:p>
               <a:r>
-                <a:rPr lang="en-US" sz="4400" dirty="0" smtClean="0"/>
+                <a:rPr lang="en-US" sz="2200" dirty="0"/>
                 <a:t>Layer 1</a:t>
               </a:r>
-              <a:endParaRPr lang="en-US" sz="4400" dirty="0"/>
+              <a:endParaRPr lang="en-US" sz="2200" dirty="0"/>
             </a:p>
           </p:txBody>
         </p:sp>
@@ -7840,8 +8093,8 @@
           </p:nvSpPr>
           <p:spPr>
             <a:xfrm>
-              <a:off x="4211754" y="21301427"/>
-              <a:ext cx="1821653" cy="769441"/>
+              <a:off x="4211754" y="21301426"/>
+              <a:ext cx="2006190" cy="861774"/>
             </a:xfrm>
             <a:prstGeom prst="rect">
               <a:avLst/>
@@ -7855,10 +8108,10 @@
             <a:lstStyle/>
             <a:p>
               <a:r>
-                <a:rPr lang="en-US" sz="4400" dirty="0" smtClean="0"/>
+                <a:rPr lang="en-US" sz="2200" dirty="0"/>
                 <a:t>Layer 2</a:t>
               </a:r>
-              <a:endParaRPr lang="en-US" sz="4400" dirty="0"/>
+              <a:endParaRPr lang="en-US" sz="2200" dirty="0"/>
             </a:p>
           </p:txBody>
         </p:sp>
@@ -7880,6 +8133,4967 @@
       </p:par>
     </p:tnLst>
   </p:timing>
+</p:sld>
+</file>
+
+<file path=ppt/slides/slide3.xml><?xml version="1.0" encoding="utf-8"?>
+<p:sld xmlns:a="http://schemas.openxmlformats.org/drawingml/2006/main" xmlns:r="http://schemas.openxmlformats.org/officeDocument/2006/relationships" xmlns:p="http://schemas.openxmlformats.org/presentationml/2006/main">
+  <p:cSld>
+    <p:spTree>
+      <p:nvGrpSpPr>
+        <p:cNvPr id="1" name=""/>
+        <p:cNvGrpSpPr/>
+        <p:nvPr/>
+      </p:nvGrpSpPr>
+      <p:grpSpPr>
+        <a:xfrm>
+          <a:off x="0" y="0"/>
+          <a:ext cx="0" cy="0"/>
+          <a:chOff x="0" y="0"/>
+          <a:chExt cx="0" cy="0"/>
+        </a:xfrm>
+      </p:grpSpPr>
+      <p:sp>
+        <p:nvSpPr>
+          <p:cNvPr id="2" name="Title 1"/>
+          <p:cNvSpPr>
+            <a:spLocks noGrp="1"/>
+          </p:cNvSpPr>
+          <p:nvPr>
+            <p:ph type="title"/>
+          </p:nvPr>
+        </p:nvSpPr>
+        <p:spPr/>
+        <p:txBody>
+          <a:bodyPr/>
+          <a:lstStyle/>
+          <a:p>
+            <a:endParaRPr lang="en-US"/>
+          </a:p>
+        </p:txBody>
+      </p:sp>
+      <p:sp>
+        <p:nvSpPr>
+          <p:cNvPr id="68" name="Right Arrow 67"/>
+          <p:cNvSpPr/>
+          <p:nvPr/>
+        </p:nvSpPr>
+        <p:spPr>
+          <a:xfrm>
+            <a:off x="4297764" y="8601904"/>
+            <a:ext cx="228600" cy="228600"/>
+          </a:xfrm>
+          <a:prstGeom prst="rightArrow">
+            <a:avLst/>
+          </a:prstGeom>
+          <a:solidFill>
+            <a:srgbClr val="00B050"/>
+          </a:solidFill>
+          <a:ln>
+            <a:solidFill>
+              <a:schemeClr val="tx1"/>
+            </a:solidFill>
+          </a:ln>
+        </p:spPr>
+        <p:style>
+          <a:lnRef idx="2">
+            <a:schemeClr val="accent1">
+              <a:shade val="50000"/>
+            </a:schemeClr>
+          </a:lnRef>
+          <a:fillRef idx="1">
+            <a:schemeClr val="accent1"/>
+          </a:fillRef>
+          <a:effectRef idx="0">
+            <a:schemeClr val="accent1"/>
+          </a:effectRef>
+          <a:fontRef idx="minor">
+            <a:schemeClr val="lt1"/>
+          </a:fontRef>
+        </p:style>
+        <p:txBody>
+          <a:bodyPr rtlCol="0" anchor="ctr"/>
+          <a:lstStyle/>
+          <a:p>
+            <a:pPr algn="ctr"/>
+            <a:endParaRPr lang="en-US" sz="450"/>
+          </a:p>
+        </p:txBody>
+      </p:sp>
+      <p:sp>
+        <p:nvSpPr>
+          <p:cNvPr id="71" name="Rectangle 70"/>
+          <p:cNvSpPr/>
+          <p:nvPr/>
+        </p:nvSpPr>
+        <p:spPr>
+          <a:xfrm>
+            <a:off x="4065645" y="8030404"/>
+            <a:ext cx="228600" cy="1371600"/>
+          </a:xfrm>
+          <a:prstGeom prst="rect">
+            <a:avLst/>
+          </a:prstGeom>
+          <a:ln>
+            <a:solidFill>
+              <a:schemeClr val="tx1"/>
+            </a:solidFill>
+          </a:ln>
+        </p:spPr>
+        <p:style>
+          <a:lnRef idx="2">
+            <a:schemeClr val="accent1">
+              <a:shade val="50000"/>
+            </a:schemeClr>
+          </a:lnRef>
+          <a:fillRef idx="1">
+            <a:schemeClr val="accent1"/>
+          </a:fillRef>
+          <a:effectRef idx="0">
+            <a:schemeClr val="accent1"/>
+          </a:effectRef>
+          <a:fontRef idx="minor">
+            <a:schemeClr val="lt1"/>
+          </a:fontRef>
+        </p:style>
+        <p:txBody>
+          <a:bodyPr vert="vert270" rtlCol="0" anchor="ctr"/>
+          <a:lstStyle/>
+          <a:p>
+            <a:pPr algn="ctr"/>
+            <a:r>
+              <a:rPr lang="en-US" sz="1200" dirty="0">
+                <a:solidFill>
+                  <a:schemeClr val="tx1"/>
+                </a:solidFill>
+              </a:rPr>
+              <a:t>Image</a:t>
+            </a:r>
+            <a:endParaRPr lang="en-US" sz="1200" dirty="0">
+              <a:solidFill>
+                <a:schemeClr val="tx1"/>
+              </a:solidFill>
+            </a:endParaRPr>
+          </a:p>
+        </p:txBody>
+      </p:sp>
+      <p:sp>
+        <p:nvSpPr>
+          <p:cNvPr id="49" name="Down Arrow 48"/>
+          <p:cNvSpPr/>
+          <p:nvPr/>
+        </p:nvSpPr>
+        <p:spPr>
+          <a:xfrm flipV="1">
+            <a:off x="11624842" y="9787385"/>
+            <a:ext cx="204547" cy="390132"/>
+          </a:xfrm>
+          <a:prstGeom prst="downArrow">
+            <a:avLst/>
+          </a:prstGeom>
+          <a:solidFill>
+            <a:srgbClr val="00B050"/>
+          </a:solidFill>
+          <a:ln>
+            <a:solidFill>
+              <a:schemeClr val="tx1"/>
+            </a:solidFill>
+          </a:ln>
+        </p:spPr>
+        <p:style>
+          <a:lnRef idx="2">
+            <a:schemeClr val="accent1">
+              <a:shade val="50000"/>
+            </a:schemeClr>
+          </a:lnRef>
+          <a:fillRef idx="1">
+            <a:schemeClr val="accent1"/>
+          </a:fillRef>
+          <a:effectRef idx="0">
+            <a:schemeClr val="accent1"/>
+          </a:effectRef>
+          <a:fontRef idx="minor">
+            <a:schemeClr val="lt1"/>
+          </a:fontRef>
+        </p:style>
+        <p:txBody>
+          <a:bodyPr rtlCol="0" anchor="ctr"/>
+          <a:lstStyle/>
+          <a:p>
+            <a:pPr algn="ctr"/>
+            <a:endParaRPr lang="en-US" sz="450"/>
+          </a:p>
+        </p:txBody>
+      </p:sp>
+      <p:sp>
+        <p:nvSpPr>
+          <p:cNvPr id="50" name="Down Arrow 49"/>
+          <p:cNvSpPr/>
+          <p:nvPr/>
+        </p:nvSpPr>
+        <p:spPr>
+          <a:xfrm>
+            <a:off x="11624842" y="10418902"/>
+            <a:ext cx="204547" cy="390132"/>
+          </a:xfrm>
+          <a:prstGeom prst="downArrow">
+            <a:avLst/>
+          </a:prstGeom>
+          <a:solidFill>
+            <a:srgbClr val="C00000"/>
+          </a:solidFill>
+          <a:ln>
+            <a:solidFill>
+              <a:schemeClr val="tx1"/>
+            </a:solidFill>
+          </a:ln>
+        </p:spPr>
+        <p:style>
+          <a:lnRef idx="2">
+            <a:schemeClr val="accent1">
+              <a:shade val="50000"/>
+            </a:schemeClr>
+          </a:lnRef>
+          <a:fillRef idx="1">
+            <a:schemeClr val="accent1"/>
+          </a:fillRef>
+          <a:effectRef idx="0">
+            <a:schemeClr val="accent1"/>
+          </a:effectRef>
+          <a:fontRef idx="minor">
+            <a:schemeClr val="lt1"/>
+          </a:fontRef>
+        </p:style>
+        <p:txBody>
+          <a:bodyPr rtlCol="0" anchor="ctr"/>
+          <a:lstStyle/>
+          <a:p>
+            <a:pPr algn="ctr"/>
+            <a:endParaRPr lang="en-US" sz="450"/>
+          </a:p>
+        </p:txBody>
+      </p:sp>
+      <p:sp>
+        <p:nvSpPr>
+          <p:cNvPr id="51" name="Right Arrow 50"/>
+          <p:cNvSpPr/>
+          <p:nvPr/>
+        </p:nvSpPr>
+        <p:spPr>
+          <a:xfrm>
+            <a:off x="11524201" y="10957753"/>
+            <a:ext cx="457200" cy="228600"/>
+          </a:xfrm>
+          <a:prstGeom prst="rightArrow">
+            <a:avLst/>
+          </a:prstGeom>
+          <a:solidFill>
+            <a:srgbClr val="00B050"/>
+          </a:solidFill>
+          <a:ln>
+            <a:solidFill>
+              <a:schemeClr val="tx1"/>
+            </a:solidFill>
+          </a:ln>
+        </p:spPr>
+        <p:style>
+          <a:lnRef idx="2">
+            <a:schemeClr val="accent1">
+              <a:shade val="50000"/>
+            </a:schemeClr>
+          </a:lnRef>
+          <a:fillRef idx="1">
+            <a:schemeClr val="accent1"/>
+          </a:fillRef>
+          <a:effectRef idx="0">
+            <a:schemeClr val="accent1"/>
+          </a:effectRef>
+          <a:fontRef idx="minor">
+            <a:schemeClr val="lt1"/>
+          </a:fontRef>
+        </p:style>
+        <p:txBody>
+          <a:bodyPr rtlCol="0" anchor="ctr"/>
+          <a:lstStyle/>
+          <a:p>
+            <a:pPr algn="ctr"/>
+            <a:endParaRPr lang="en-US" sz="450"/>
+          </a:p>
+        </p:txBody>
+      </p:sp>
+      <p:sp>
+        <p:nvSpPr>
+          <p:cNvPr id="52" name="Right Arrow 51"/>
+          <p:cNvSpPr/>
+          <p:nvPr/>
+        </p:nvSpPr>
+        <p:spPr>
+          <a:xfrm>
+            <a:off x="11523690" y="11376549"/>
+            <a:ext cx="457200" cy="228600"/>
+          </a:xfrm>
+          <a:prstGeom prst="rightArrow">
+            <a:avLst/>
+          </a:prstGeom>
+          <a:solidFill>
+            <a:srgbClr val="00B0F0"/>
+          </a:solidFill>
+          <a:ln>
+            <a:solidFill>
+              <a:schemeClr val="tx1"/>
+            </a:solidFill>
+          </a:ln>
+        </p:spPr>
+        <p:style>
+          <a:lnRef idx="2">
+            <a:schemeClr val="accent1">
+              <a:shade val="50000"/>
+            </a:schemeClr>
+          </a:lnRef>
+          <a:fillRef idx="1">
+            <a:schemeClr val="accent1"/>
+          </a:fillRef>
+          <a:effectRef idx="0">
+            <a:schemeClr val="accent1"/>
+          </a:effectRef>
+          <a:fontRef idx="minor">
+            <a:schemeClr val="lt1"/>
+          </a:fontRef>
+        </p:style>
+        <p:txBody>
+          <a:bodyPr rtlCol="0" anchor="ctr"/>
+          <a:lstStyle/>
+          <a:p>
+            <a:pPr algn="ctr"/>
+            <a:endParaRPr lang="en-US" sz="450"/>
+          </a:p>
+        </p:txBody>
+      </p:sp>
+      <p:sp>
+        <p:nvSpPr>
+          <p:cNvPr id="54" name="TextBox 53"/>
+          <p:cNvSpPr txBox="1"/>
+          <p:nvPr/>
+        </p:nvSpPr>
+        <p:spPr>
+          <a:xfrm>
+            <a:off x="11962265" y="9673528"/>
+            <a:ext cx="2150269" cy="707886"/>
+          </a:xfrm>
+          <a:prstGeom prst="rect">
+            <a:avLst/>
+          </a:prstGeom>
+          <a:noFill/>
+        </p:spPr>
+        <p:txBody>
+          <a:bodyPr wrap="none" rtlCol="0">
+            <a:spAutoFit/>
+          </a:bodyPr>
+          <a:lstStyle/>
+          <a:p>
+            <a:pPr algn="ctr"/>
+            <a:r>
+              <a:rPr lang="en-US" sz="2000" dirty="0" smtClean="0"/>
+              <a:t>Bilinear </a:t>
+            </a:r>
+            <a:r>
+              <a:rPr lang="en-US" sz="2000" dirty="0" err="1" smtClean="0"/>
+              <a:t>Upsample</a:t>
+            </a:r>
+            <a:r>
+              <a:rPr lang="en-US" sz="2000" dirty="0" smtClean="0"/>
+              <a:t>,</a:t>
+            </a:r>
+          </a:p>
+          <a:p>
+            <a:pPr algn="ctr"/>
+            <a:r>
+              <a:rPr lang="en-US" sz="2000" dirty="0" smtClean="0"/>
+              <a:t>Convolution 3x3x3</a:t>
+            </a:r>
+            <a:endParaRPr lang="en-US" sz="2000" dirty="0"/>
+          </a:p>
+        </p:txBody>
+      </p:sp>
+      <p:sp>
+        <p:nvSpPr>
+          <p:cNvPr id="55" name="TextBox 54"/>
+          <p:cNvSpPr txBox="1"/>
+          <p:nvPr/>
+        </p:nvSpPr>
+        <p:spPr>
+          <a:xfrm>
+            <a:off x="11982462" y="10410198"/>
+            <a:ext cx="2920800" cy="400110"/>
+          </a:xfrm>
+          <a:prstGeom prst="rect">
+            <a:avLst/>
+          </a:prstGeom>
+          <a:noFill/>
+        </p:spPr>
+        <p:txBody>
+          <a:bodyPr wrap="none" rtlCol="0">
+            <a:spAutoFit/>
+          </a:bodyPr>
+          <a:lstStyle/>
+          <a:p>
+            <a:r>
+              <a:rPr lang="en-US" sz="2000" dirty="0" err="1"/>
+              <a:t>Strided</a:t>
+            </a:r>
+            <a:r>
+              <a:rPr lang="en-US" sz="2000" dirty="0"/>
+              <a:t> </a:t>
+            </a:r>
+            <a:r>
+              <a:rPr lang="en-US" sz="2000" dirty="0" smtClean="0"/>
+              <a:t>Convolution 2x2x2</a:t>
+            </a:r>
+            <a:endParaRPr lang="en-US" sz="2000" dirty="0"/>
+          </a:p>
+        </p:txBody>
+      </p:sp>
+      <p:sp>
+        <p:nvSpPr>
+          <p:cNvPr id="56" name="TextBox 55"/>
+          <p:cNvSpPr txBox="1"/>
+          <p:nvPr/>
+        </p:nvSpPr>
+        <p:spPr>
+          <a:xfrm>
+            <a:off x="12117258" y="10890620"/>
+            <a:ext cx="2111284" cy="400110"/>
+          </a:xfrm>
+          <a:prstGeom prst="rect">
+            <a:avLst/>
+          </a:prstGeom>
+          <a:noFill/>
+        </p:spPr>
+        <p:txBody>
+          <a:bodyPr wrap="none" rtlCol="0">
+            <a:spAutoFit/>
+          </a:bodyPr>
+          <a:lstStyle/>
+          <a:p>
+            <a:r>
+              <a:rPr lang="en-US" sz="2000" dirty="0" smtClean="0"/>
+              <a:t>Convolution </a:t>
+            </a:r>
+            <a:r>
+              <a:rPr lang="en-US" sz="2000" dirty="0"/>
+              <a:t>3x3x3</a:t>
+            </a:r>
+            <a:endParaRPr lang="en-US" sz="2000" dirty="0"/>
+          </a:p>
+        </p:txBody>
+      </p:sp>
+      <p:sp>
+        <p:nvSpPr>
+          <p:cNvPr id="57" name="TextBox 56"/>
+          <p:cNvSpPr txBox="1"/>
+          <p:nvPr/>
+        </p:nvSpPr>
+        <p:spPr>
+          <a:xfrm>
+            <a:off x="12117981" y="11311188"/>
+            <a:ext cx="2111284" cy="400110"/>
+          </a:xfrm>
+          <a:prstGeom prst="rect">
+            <a:avLst/>
+          </a:prstGeom>
+          <a:noFill/>
+        </p:spPr>
+        <p:txBody>
+          <a:bodyPr wrap="none" rtlCol="0">
+            <a:spAutoFit/>
+          </a:bodyPr>
+          <a:lstStyle/>
+          <a:p>
+            <a:r>
+              <a:rPr lang="en-US" sz="2000" dirty="0" smtClean="0"/>
+              <a:t>Convolution 1x1x1</a:t>
+            </a:r>
+            <a:endParaRPr lang="en-US" sz="2000" dirty="0"/>
+          </a:p>
+        </p:txBody>
+      </p:sp>
+      <p:sp>
+        <p:nvSpPr>
+          <p:cNvPr id="58" name="Rectangle 57"/>
+          <p:cNvSpPr/>
+          <p:nvPr/>
+        </p:nvSpPr>
+        <p:spPr>
+          <a:xfrm>
+            <a:off x="11331063" y="9567921"/>
+            <a:ext cx="3572199" cy="2763779"/>
+          </a:xfrm>
+          <a:prstGeom prst="rect">
+            <a:avLst/>
+          </a:prstGeom>
+          <a:noFill/>
+          <a:ln w="25400">
+            <a:solidFill>
+              <a:schemeClr val="tx1"/>
+            </a:solidFill>
+          </a:ln>
+        </p:spPr>
+        <p:style>
+          <a:lnRef idx="2">
+            <a:schemeClr val="accent1">
+              <a:shade val="50000"/>
+            </a:schemeClr>
+          </a:lnRef>
+          <a:fillRef idx="1">
+            <a:schemeClr val="accent1"/>
+          </a:fillRef>
+          <a:effectRef idx="0">
+            <a:schemeClr val="accent1"/>
+          </a:effectRef>
+          <a:fontRef idx="minor">
+            <a:schemeClr val="lt1"/>
+          </a:fontRef>
+        </p:style>
+        <p:txBody>
+          <a:bodyPr rtlCol="0" anchor="ctr"/>
+          <a:lstStyle/>
+          <a:p>
+            <a:pPr algn="ctr"/>
+            <a:endParaRPr lang="en-US" sz="450"/>
+          </a:p>
+        </p:txBody>
+      </p:sp>
+      <p:sp>
+        <p:nvSpPr>
+          <p:cNvPr id="45" name="TextBox 44"/>
+          <p:cNvSpPr txBox="1"/>
+          <p:nvPr/>
+        </p:nvSpPr>
+        <p:spPr>
+          <a:xfrm>
+            <a:off x="2861527" y="8435979"/>
+            <a:ext cx="1003095" cy="430887"/>
+          </a:xfrm>
+          <a:prstGeom prst="rect">
+            <a:avLst/>
+          </a:prstGeom>
+          <a:noFill/>
+        </p:spPr>
+        <p:txBody>
+          <a:bodyPr wrap="none" rtlCol="0">
+            <a:spAutoFit/>
+          </a:bodyPr>
+          <a:lstStyle/>
+          <a:p>
+            <a:r>
+              <a:rPr lang="en-US" sz="2200" dirty="0"/>
+              <a:t>Layer 0</a:t>
+            </a:r>
+            <a:endParaRPr lang="en-US" sz="2200" dirty="0"/>
+          </a:p>
+        </p:txBody>
+      </p:sp>
+      <p:sp>
+        <p:nvSpPr>
+          <p:cNvPr id="46" name="TextBox 45"/>
+          <p:cNvSpPr txBox="1"/>
+          <p:nvPr/>
+        </p:nvSpPr>
+        <p:spPr>
+          <a:xfrm>
+            <a:off x="4279906" y="10208723"/>
+            <a:ext cx="1003095" cy="430887"/>
+          </a:xfrm>
+          <a:prstGeom prst="rect">
+            <a:avLst/>
+          </a:prstGeom>
+          <a:noFill/>
+        </p:spPr>
+        <p:txBody>
+          <a:bodyPr wrap="none" rtlCol="0">
+            <a:spAutoFit/>
+          </a:bodyPr>
+          <a:lstStyle/>
+          <a:p>
+            <a:r>
+              <a:rPr lang="en-US" sz="2200" dirty="0"/>
+              <a:t>Layer 1</a:t>
+            </a:r>
+            <a:endParaRPr lang="en-US" sz="2200" dirty="0"/>
+          </a:p>
+        </p:txBody>
+      </p:sp>
+      <p:sp>
+        <p:nvSpPr>
+          <p:cNvPr id="79" name="Rectangle 78"/>
+          <p:cNvSpPr/>
+          <p:nvPr/>
+        </p:nvSpPr>
+        <p:spPr>
+          <a:xfrm>
+            <a:off x="4529195" y="8030404"/>
+            <a:ext cx="228600" cy="1371600"/>
+          </a:xfrm>
+          <a:prstGeom prst="rect">
+            <a:avLst/>
+          </a:prstGeom>
+          <a:ln>
+            <a:solidFill>
+              <a:schemeClr val="tx1"/>
+            </a:solidFill>
+          </a:ln>
+        </p:spPr>
+        <p:style>
+          <a:lnRef idx="2">
+            <a:schemeClr val="accent1">
+              <a:shade val="50000"/>
+            </a:schemeClr>
+          </a:lnRef>
+          <a:fillRef idx="1">
+            <a:schemeClr val="accent1"/>
+          </a:fillRef>
+          <a:effectRef idx="0">
+            <a:schemeClr val="accent1"/>
+          </a:effectRef>
+          <a:fontRef idx="minor">
+            <a:schemeClr val="lt1"/>
+          </a:fontRef>
+        </p:style>
+        <p:txBody>
+          <a:bodyPr vert="vert270" rtlCol="0" anchor="ctr"/>
+          <a:lstStyle/>
+          <a:p>
+            <a:pPr algn="ctr"/>
+            <a:endParaRPr lang="en-US" sz="1200" dirty="0">
+              <a:solidFill>
+                <a:schemeClr val="tx1"/>
+              </a:solidFill>
+            </a:endParaRPr>
+          </a:p>
+        </p:txBody>
+      </p:sp>
+      <p:sp>
+        <p:nvSpPr>
+          <p:cNvPr id="80" name="Rectangle 79"/>
+          <p:cNvSpPr/>
+          <p:nvPr/>
+        </p:nvSpPr>
+        <p:spPr>
+          <a:xfrm>
+            <a:off x="4761314" y="8030404"/>
+            <a:ext cx="228600" cy="1371600"/>
+          </a:xfrm>
+          <a:prstGeom prst="rect">
+            <a:avLst/>
+          </a:prstGeom>
+          <a:solidFill>
+            <a:srgbClr val="FFFF00"/>
+          </a:solidFill>
+          <a:ln>
+            <a:solidFill>
+              <a:schemeClr val="tx1"/>
+            </a:solidFill>
+          </a:ln>
+        </p:spPr>
+        <p:style>
+          <a:lnRef idx="2">
+            <a:schemeClr val="accent1">
+              <a:shade val="50000"/>
+            </a:schemeClr>
+          </a:lnRef>
+          <a:fillRef idx="1">
+            <a:schemeClr val="accent1"/>
+          </a:fillRef>
+          <a:effectRef idx="0">
+            <a:schemeClr val="accent1"/>
+          </a:effectRef>
+          <a:fontRef idx="minor">
+            <a:schemeClr val="lt1"/>
+          </a:fontRef>
+        </p:style>
+        <p:txBody>
+          <a:bodyPr vert="vert270" rtlCol="0" anchor="ctr"/>
+          <a:lstStyle/>
+          <a:p>
+            <a:pPr algn="ctr"/>
+            <a:r>
+              <a:rPr lang="en-US" sz="1200" dirty="0">
+                <a:solidFill>
+                  <a:schemeClr val="tx1"/>
+                </a:solidFill>
+              </a:rPr>
+              <a:t>Elu + BN</a:t>
+            </a:r>
+            <a:endParaRPr lang="en-US" sz="1200" dirty="0">
+              <a:solidFill>
+                <a:schemeClr val="tx1"/>
+              </a:solidFill>
+            </a:endParaRPr>
+          </a:p>
+        </p:txBody>
+      </p:sp>
+      <p:sp>
+        <p:nvSpPr>
+          <p:cNvPr id="93" name="Right Arrow 92"/>
+          <p:cNvSpPr/>
+          <p:nvPr/>
+        </p:nvSpPr>
+        <p:spPr>
+          <a:xfrm>
+            <a:off x="4997542" y="8601904"/>
+            <a:ext cx="228600" cy="228600"/>
+          </a:xfrm>
+          <a:prstGeom prst="rightArrow">
+            <a:avLst/>
+          </a:prstGeom>
+          <a:solidFill>
+            <a:srgbClr val="00B050"/>
+          </a:solidFill>
+          <a:ln>
+            <a:solidFill>
+              <a:schemeClr val="tx1"/>
+            </a:solidFill>
+          </a:ln>
+        </p:spPr>
+        <p:style>
+          <a:lnRef idx="2">
+            <a:schemeClr val="accent1">
+              <a:shade val="50000"/>
+            </a:schemeClr>
+          </a:lnRef>
+          <a:fillRef idx="1">
+            <a:schemeClr val="accent1"/>
+          </a:fillRef>
+          <a:effectRef idx="0">
+            <a:schemeClr val="accent1"/>
+          </a:effectRef>
+          <a:fontRef idx="minor">
+            <a:schemeClr val="lt1"/>
+          </a:fontRef>
+        </p:style>
+        <p:txBody>
+          <a:bodyPr rtlCol="0" anchor="ctr"/>
+          <a:lstStyle/>
+          <a:p>
+            <a:pPr algn="ctr"/>
+            <a:endParaRPr lang="en-US" sz="450"/>
+          </a:p>
+        </p:txBody>
+      </p:sp>
+      <p:sp>
+        <p:nvSpPr>
+          <p:cNvPr id="94" name="Rectangle 93"/>
+          <p:cNvSpPr/>
+          <p:nvPr/>
+        </p:nvSpPr>
+        <p:spPr>
+          <a:xfrm>
+            <a:off x="5228795" y="8030404"/>
+            <a:ext cx="228600" cy="1371600"/>
+          </a:xfrm>
+          <a:prstGeom prst="rect">
+            <a:avLst/>
+          </a:prstGeom>
+          <a:ln>
+            <a:solidFill>
+              <a:schemeClr val="tx1"/>
+            </a:solidFill>
+          </a:ln>
+        </p:spPr>
+        <p:style>
+          <a:lnRef idx="2">
+            <a:schemeClr val="accent1">
+              <a:shade val="50000"/>
+            </a:schemeClr>
+          </a:lnRef>
+          <a:fillRef idx="1">
+            <a:schemeClr val="accent1"/>
+          </a:fillRef>
+          <a:effectRef idx="0">
+            <a:schemeClr val="accent1"/>
+          </a:effectRef>
+          <a:fontRef idx="minor">
+            <a:schemeClr val="lt1"/>
+          </a:fontRef>
+        </p:style>
+        <p:txBody>
+          <a:bodyPr vert="vert270" rtlCol="0" anchor="ctr"/>
+          <a:lstStyle/>
+          <a:p>
+            <a:pPr algn="ctr"/>
+            <a:endParaRPr lang="en-US" sz="1200" dirty="0">
+              <a:solidFill>
+                <a:schemeClr val="tx1"/>
+              </a:solidFill>
+            </a:endParaRPr>
+          </a:p>
+        </p:txBody>
+      </p:sp>
+      <p:sp>
+        <p:nvSpPr>
+          <p:cNvPr id="95" name="Rectangle 94"/>
+          <p:cNvSpPr/>
+          <p:nvPr/>
+        </p:nvSpPr>
+        <p:spPr>
+          <a:xfrm>
+            <a:off x="5471891" y="8030404"/>
+            <a:ext cx="228600" cy="1371600"/>
+          </a:xfrm>
+          <a:prstGeom prst="rect">
+            <a:avLst/>
+          </a:prstGeom>
+          <a:ln>
+            <a:solidFill>
+              <a:schemeClr val="tx1"/>
+            </a:solidFill>
+          </a:ln>
+        </p:spPr>
+        <p:style>
+          <a:lnRef idx="2">
+            <a:schemeClr val="accent1">
+              <a:shade val="50000"/>
+            </a:schemeClr>
+          </a:lnRef>
+          <a:fillRef idx="1">
+            <a:schemeClr val="accent1"/>
+          </a:fillRef>
+          <a:effectRef idx="0">
+            <a:schemeClr val="accent1"/>
+          </a:effectRef>
+          <a:fontRef idx="minor">
+            <a:schemeClr val="lt1"/>
+          </a:fontRef>
+        </p:style>
+        <p:txBody>
+          <a:bodyPr vert="vert270" rtlCol="0" anchor="ctr"/>
+          <a:lstStyle/>
+          <a:p>
+            <a:pPr algn="ctr"/>
+            <a:endParaRPr lang="en-US" sz="1200" dirty="0">
+              <a:solidFill>
+                <a:schemeClr val="tx1"/>
+              </a:solidFill>
+            </a:endParaRPr>
+          </a:p>
+        </p:txBody>
+      </p:sp>
+      <p:sp>
+        <p:nvSpPr>
+          <p:cNvPr id="96" name="Right Arrow 95"/>
+          <p:cNvSpPr/>
+          <p:nvPr/>
+        </p:nvSpPr>
+        <p:spPr>
+          <a:xfrm>
+            <a:off x="5932866" y="8601904"/>
+            <a:ext cx="228600" cy="228600"/>
+          </a:xfrm>
+          <a:prstGeom prst="rightArrow">
+            <a:avLst/>
+          </a:prstGeom>
+          <a:solidFill>
+            <a:srgbClr val="00B0F0"/>
+          </a:solidFill>
+          <a:ln>
+            <a:solidFill>
+              <a:schemeClr val="tx1"/>
+            </a:solidFill>
+          </a:ln>
+        </p:spPr>
+        <p:style>
+          <a:lnRef idx="2">
+            <a:schemeClr val="accent1">
+              <a:shade val="50000"/>
+            </a:schemeClr>
+          </a:lnRef>
+          <a:fillRef idx="1">
+            <a:schemeClr val="accent1"/>
+          </a:fillRef>
+          <a:effectRef idx="0">
+            <a:schemeClr val="accent1"/>
+          </a:effectRef>
+          <a:fontRef idx="minor">
+            <a:schemeClr val="lt1"/>
+          </a:fontRef>
+        </p:style>
+        <p:txBody>
+          <a:bodyPr rtlCol="0" anchor="ctr"/>
+          <a:lstStyle/>
+          <a:p>
+            <a:pPr algn="ctr"/>
+            <a:endParaRPr lang="en-US" sz="450"/>
+          </a:p>
+        </p:txBody>
+      </p:sp>
+      <p:sp>
+        <p:nvSpPr>
+          <p:cNvPr id="97" name="Rectangle 96"/>
+          <p:cNvSpPr/>
+          <p:nvPr/>
+        </p:nvSpPr>
+        <p:spPr>
+          <a:xfrm>
+            <a:off x="6175670" y="8030404"/>
+            <a:ext cx="228600" cy="1371600"/>
+          </a:xfrm>
+          <a:prstGeom prst="rect">
+            <a:avLst/>
+          </a:prstGeom>
+          <a:ln>
+            <a:solidFill>
+              <a:schemeClr val="tx1"/>
+            </a:solidFill>
+          </a:ln>
+        </p:spPr>
+        <p:style>
+          <a:lnRef idx="2">
+            <a:schemeClr val="accent1">
+              <a:shade val="50000"/>
+            </a:schemeClr>
+          </a:lnRef>
+          <a:fillRef idx="1">
+            <a:schemeClr val="accent1"/>
+          </a:fillRef>
+          <a:effectRef idx="0">
+            <a:schemeClr val="accent1"/>
+          </a:effectRef>
+          <a:fontRef idx="minor">
+            <a:schemeClr val="lt1"/>
+          </a:fontRef>
+        </p:style>
+        <p:txBody>
+          <a:bodyPr vert="vert270" rtlCol="0" anchor="ctr"/>
+          <a:lstStyle/>
+          <a:p>
+            <a:pPr algn="ctr"/>
+            <a:endParaRPr lang="en-US" sz="1200" dirty="0">
+              <a:solidFill>
+                <a:schemeClr val="tx1"/>
+              </a:solidFill>
+            </a:endParaRPr>
+          </a:p>
+        </p:txBody>
+      </p:sp>
+      <p:sp>
+        <p:nvSpPr>
+          <p:cNvPr id="98" name="Rectangle 97"/>
+          <p:cNvSpPr/>
+          <p:nvPr/>
+        </p:nvSpPr>
+        <p:spPr>
+          <a:xfrm>
+            <a:off x="6411134" y="8030404"/>
+            <a:ext cx="228600" cy="1371600"/>
+          </a:xfrm>
+          <a:prstGeom prst="rect">
+            <a:avLst/>
+          </a:prstGeom>
+          <a:solidFill>
+            <a:srgbClr val="FFFF00"/>
+          </a:solidFill>
+          <a:ln>
+            <a:solidFill>
+              <a:schemeClr val="tx1"/>
+            </a:solidFill>
+          </a:ln>
+        </p:spPr>
+        <p:style>
+          <a:lnRef idx="2">
+            <a:schemeClr val="accent1">
+              <a:shade val="50000"/>
+            </a:schemeClr>
+          </a:lnRef>
+          <a:fillRef idx="1">
+            <a:schemeClr val="accent1"/>
+          </a:fillRef>
+          <a:effectRef idx="0">
+            <a:schemeClr val="accent1"/>
+          </a:effectRef>
+          <a:fontRef idx="minor">
+            <a:schemeClr val="lt1"/>
+          </a:fontRef>
+        </p:style>
+        <p:txBody>
+          <a:bodyPr vert="vert270" rtlCol="0" anchor="ctr"/>
+          <a:lstStyle/>
+          <a:p>
+            <a:pPr algn="ctr"/>
+            <a:r>
+              <a:rPr lang="en-US" sz="1200" dirty="0">
+                <a:solidFill>
+                  <a:schemeClr val="tx1"/>
+                </a:solidFill>
+              </a:rPr>
+              <a:t>Elu + BN</a:t>
+            </a:r>
+            <a:endParaRPr lang="en-US" sz="1200" dirty="0">
+              <a:solidFill>
+                <a:schemeClr val="tx1"/>
+              </a:solidFill>
+            </a:endParaRPr>
+          </a:p>
+        </p:txBody>
+      </p:sp>
+      <p:sp>
+        <p:nvSpPr>
+          <p:cNvPr id="99" name="Right Arrow 98"/>
+          <p:cNvSpPr/>
+          <p:nvPr/>
+        </p:nvSpPr>
+        <p:spPr>
+          <a:xfrm>
+            <a:off x="6639734" y="8601904"/>
+            <a:ext cx="228600" cy="228600"/>
+          </a:xfrm>
+          <a:prstGeom prst="rightArrow">
+            <a:avLst/>
+          </a:prstGeom>
+          <a:solidFill>
+            <a:srgbClr val="00B050"/>
+          </a:solidFill>
+          <a:ln>
+            <a:solidFill>
+              <a:schemeClr val="tx1"/>
+            </a:solidFill>
+          </a:ln>
+        </p:spPr>
+        <p:style>
+          <a:lnRef idx="2">
+            <a:schemeClr val="accent1">
+              <a:shade val="50000"/>
+            </a:schemeClr>
+          </a:lnRef>
+          <a:fillRef idx="1">
+            <a:schemeClr val="accent1"/>
+          </a:fillRef>
+          <a:effectRef idx="0">
+            <a:schemeClr val="accent1"/>
+          </a:effectRef>
+          <a:fontRef idx="minor">
+            <a:schemeClr val="lt1"/>
+          </a:fontRef>
+        </p:style>
+        <p:txBody>
+          <a:bodyPr rtlCol="0" anchor="ctr"/>
+          <a:lstStyle/>
+          <a:p>
+            <a:pPr algn="ctr"/>
+            <a:endParaRPr lang="en-US" sz="450"/>
+          </a:p>
+        </p:txBody>
+      </p:sp>
+      <p:sp>
+        <p:nvSpPr>
+          <p:cNvPr id="100" name="Rectangle 99"/>
+          <p:cNvSpPr/>
+          <p:nvPr/>
+        </p:nvSpPr>
+        <p:spPr>
+          <a:xfrm>
+            <a:off x="6874643" y="8030404"/>
+            <a:ext cx="228600" cy="1371600"/>
+          </a:xfrm>
+          <a:prstGeom prst="rect">
+            <a:avLst/>
+          </a:prstGeom>
+          <a:ln>
+            <a:solidFill>
+              <a:schemeClr val="tx1"/>
+            </a:solidFill>
+          </a:ln>
+        </p:spPr>
+        <p:style>
+          <a:lnRef idx="2">
+            <a:schemeClr val="accent1">
+              <a:shade val="50000"/>
+            </a:schemeClr>
+          </a:lnRef>
+          <a:fillRef idx="1">
+            <a:schemeClr val="accent1"/>
+          </a:fillRef>
+          <a:effectRef idx="0">
+            <a:schemeClr val="accent1"/>
+          </a:effectRef>
+          <a:fontRef idx="minor">
+            <a:schemeClr val="lt1"/>
+          </a:fontRef>
+        </p:style>
+        <p:txBody>
+          <a:bodyPr vert="vert270" rtlCol="0" anchor="ctr"/>
+          <a:lstStyle/>
+          <a:p>
+            <a:pPr algn="ctr"/>
+            <a:endParaRPr lang="en-US" sz="1200" dirty="0">
+              <a:solidFill>
+                <a:schemeClr val="tx1"/>
+              </a:solidFill>
+            </a:endParaRPr>
+          </a:p>
+        </p:txBody>
+      </p:sp>
+      <p:sp>
+        <p:nvSpPr>
+          <p:cNvPr id="103" name="Rectangle 102"/>
+          <p:cNvSpPr/>
+          <p:nvPr/>
+        </p:nvSpPr>
+        <p:spPr>
+          <a:xfrm>
+            <a:off x="7102584" y="8030404"/>
+            <a:ext cx="228600" cy="1371600"/>
+          </a:xfrm>
+          <a:prstGeom prst="rect">
+            <a:avLst/>
+          </a:prstGeom>
+          <a:ln>
+            <a:solidFill>
+              <a:schemeClr val="tx1"/>
+            </a:solidFill>
+          </a:ln>
+        </p:spPr>
+        <p:style>
+          <a:lnRef idx="2">
+            <a:schemeClr val="accent1">
+              <a:shade val="50000"/>
+            </a:schemeClr>
+          </a:lnRef>
+          <a:fillRef idx="1">
+            <a:schemeClr val="accent1"/>
+          </a:fillRef>
+          <a:effectRef idx="0">
+            <a:schemeClr val="accent1"/>
+          </a:effectRef>
+          <a:fontRef idx="minor">
+            <a:schemeClr val="lt1"/>
+          </a:fontRef>
+        </p:style>
+        <p:txBody>
+          <a:bodyPr vert="vert270" rtlCol="0" anchor="ctr"/>
+          <a:lstStyle/>
+          <a:p>
+            <a:pPr algn="ctr"/>
+            <a:endParaRPr lang="en-US" sz="1200" dirty="0">
+              <a:solidFill>
+                <a:schemeClr val="tx1"/>
+              </a:solidFill>
+            </a:endParaRPr>
+          </a:p>
+        </p:txBody>
+      </p:sp>
+      <p:sp>
+        <p:nvSpPr>
+          <p:cNvPr id="104" name="Rectangle 103"/>
+          <p:cNvSpPr/>
+          <p:nvPr/>
+        </p:nvSpPr>
+        <p:spPr>
+          <a:xfrm>
+            <a:off x="7330524" y="8030404"/>
+            <a:ext cx="228600" cy="1371600"/>
+          </a:xfrm>
+          <a:prstGeom prst="rect">
+            <a:avLst/>
+          </a:prstGeom>
+          <a:ln>
+            <a:solidFill>
+              <a:schemeClr val="tx1"/>
+            </a:solidFill>
+          </a:ln>
+        </p:spPr>
+        <p:style>
+          <a:lnRef idx="2">
+            <a:schemeClr val="accent1">
+              <a:shade val="50000"/>
+            </a:schemeClr>
+          </a:lnRef>
+          <a:fillRef idx="1">
+            <a:schemeClr val="accent1"/>
+          </a:fillRef>
+          <a:effectRef idx="0">
+            <a:schemeClr val="accent1"/>
+          </a:effectRef>
+          <a:fontRef idx="minor">
+            <a:schemeClr val="lt1"/>
+          </a:fontRef>
+        </p:style>
+        <p:txBody>
+          <a:bodyPr vert="vert270" rtlCol="0" anchor="ctr"/>
+          <a:lstStyle/>
+          <a:p>
+            <a:pPr algn="ctr"/>
+            <a:endParaRPr lang="en-US" sz="1200" dirty="0">
+              <a:solidFill>
+                <a:schemeClr val="tx1"/>
+              </a:solidFill>
+            </a:endParaRPr>
+          </a:p>
+        </p:txBody>
+      </p:sp>
+      <p:sp>
+        <p:nvSpPr>
+          <p:cNvPr id="106" name="Right Arrow 105"/>
+          <p:cNvSpPr/>
+          <p:nvPr/>
+        </p:nvSpPr>
+        <p:spPr>
+          <a:xfrm>
+            <a:off x="7564091" y="8601904"/>
+            <a:ext cx="228600" cy="228600"/>
+          </a:xfrm>
+          <a:prstGeom prst="rightArrow">
+            <a:avLst/>
+          </a:prstGeom>
+          <a:solidFill>
+            <a:srgbClr val="00B0F0"/>
+          </a:solidFill>
+          <a:ln>
+            <a:solidFill>
+              <a:schemeClr val="tx1"/>
+            </a:solidFill>
+          </a:ln>
+        </p:spPr>
+        <p:style>
+          <a:lnRef idx="2">
+            <a:schemeClr val="accent1">
+              <a:shade val="50000"/>
+            </a:schemeClr>
+          </a:lnRef>
+          <a:fillRef idx="1">
+            <a:schemeClr val="accent1"/>
+          </a:fillRef>
+          <a:effectRef idx="0">
+            <a:schemeClr val="accent1"/>
+          </a:effectRef>
+          <a:fontRef idx="minor">
+            <a:schemeClr val="lt1"/>
+          </a:fontRef>
+        </p:style>
+        <p:txBody>
+          <a:bodyPr rtlCol="0" anchor="ctr"/>
+          <a:lstStyle/>
+          <a:p>
+            <a:pPr algn="ctr"/>
+            <a:endParaRPr lang="en-US" sz="450"/>
+          </a:p>
+        </p:txBody>
+      </p:sp>
+      <p:sp>
+        <p:nvSpPr>
+          <p:cNvPr id="107" name="Rectangle 106"/>
+          <p:cNvSpPr/>
+          <p:nvPr/>
+        </p:nvSpPr>
+        <p:spPr>
+          <a:xfrm>
+            <a:off x="7797370" y="8030404"/>
+            <a:ext cx="228600" cy="1371600"/>
+          </a:xfrm>
+          <a:prstGeom prst="rect">
+            <a:avLst/>
+          </a:prstGeom>
+          <a:ln>
+            <a:solidFill>
+              <a:schemeClr val="tx1"/>
+            </a:solidFill>
+          </a:ln>
+        </p:spPr>
+        <p:style>
+          <a:lnRef idx="2">
+            <a:schemeClr val="accent1">
+              <a:shade val="50000"/>
+            </a:schemeClr>
+          </a:lnRef>
+          <a:fillRef idx="1">
+            <a:schemeClr val="accent1"/>
+          </a:fillRef>
+          <a:effectRef idx="0">
+            <a:schemeClr val="accent1"/>
+          </a:effectRef>
+          <a:fontRef idx="minor">
+            <a:schemeClr val="lt1"/>
+          </a:fontRef>
+        </p:style>
+        <p:txBody>
+          <a:bodyPr vert="vert270" rtlCol="0" anchor="ctr"/>
+          <a:lstStyle/>
+          <a:p>
+            <a:pPr algn="ctr"/>
+            <a:endParaRPr lang="en-US" sz="1200" dirty="0">
+              <a:solidFill>
+                <a:schemeClr val="tx1"/>
+              </a:solidFill>
+            </a:endParaRPr>
+          </a:p>
+        </p:txBody>
+      </p:sp>
+      <p:sp>
+        <p:nvSpPr>
+          <p:cNvPr id="108" name="Rectangle 107"/>
+          <p:cNvSpPr/>
+          <p:nvPr/>
+        </p:nvSpPr>
+        <p:spPr>
+          <a:xfrm>
+            <a:off x="8032834" y="8030404"/>
+            <a:ext cx="228600" cy="1371600"/>
+          </a:xfrm>
+          <a:prstGeom prst="rect">
+            <a:avLst/>
+          </a:prstGeom>
+          <a:solidFill>
+            <a:srgbClr val="FFFF00"/>
+          </a:solidFill>
+          <a:ln>
+            <a:solidFill>
+              <a:schemeClr val="tx1"/>
+            </a:solidFill>
+          </a:ln>
+        </p:spPr>
+        <p:style>
+          <a:lnRef idx="2">
+            <a:schemeClr val="accent1">
+              <a:shade val="50000"/>
+            </a:schemeClr>
+          </a:lnRef>
+          <a:fillRef idx="1">
+            <a:schemeClr val="accent1"/>
+          </a:fillRef>
+          <a:effectRef idx="0">
+            <a:schemeClr val="accent1"/>
+          </a:effectRef>
+          <a:fontRef idx="minor">
+            <a:schemeClr val="lt1"/>
+          </a:fontRef>
+        </p:style>
+        <p:txBody>
+          <a:bodyPr vert="vert270" rtlCol="0" anchor="ctr"/>
+          <a:lstStyle/>
+          <a:p>
+            <a:pPr algn="ctr"/>
+            <a:r>
+              <a:rPr lang="en-US" sz="1200" dirty="0">
+                <a:solidFill>
+                  <a:schemeClr val="tx1"/>
+                </a:solidFill>
+              </a:rPr>
+              <a:t>Elu + BN</a:t>
+            </a:r>
+            <a:endParaRPr lang="en-US" sz="1200" dirty="0">
+              <a:solidFill>
+                <a:schemeClr val="tx1"/>
+              </a:solidFill>
+            </a:endParaRPr>
+          </a:p>
+        </p:txBody>
+      </p:sp>
+      <p:sp>
+        <p:nvSpPr>
+          <p:cNvPr id="109" name="Rectangle 108"/>
+          <p:cNvSpPr/>
+          <p:nvPr/>
+        </p:nvSpPr>
+        <p:spPr>
+          <a:xfrm>
+            <a:off x="5704266" y="8030404"/>
+            <a:ext cx="228600" cy="1371600"/>
+          </a:xfrm>
+          <a:prstGeom prst="rect">
+            <a:avLst/>
+          </a:prstGeom>
+          <a:solidFill>
+            <a:srgbClr val="FFFF00"/>
+          </a:solidFill>
+          <a:ln>
+            <a:solidFill>
+              <a:schemeClr val="tx1"/>
+            </a:solidFill>
+          </a:ln>
+        </p:spPr>
+        <p:style>
+          <a:lnRef idx="2">
+            <a:schemeClr val="accent1">
+              <a:shade val="50000"/>
+            </a:schemeClr>
+          </a:lnRef>
+          <a:fillRef idx="1">
+            <a:schemeClr val="accent1"/>
+          </a:fillRef>
+          <a:effectRef idx="0">
+            <a:schemeClr val="accent1"/>
+          </a:effectRef>
+          <a:fontRef idx="minor">
+            <a:schemeClr val="lt1"/>
+          </a:fontRef>
+        </p:style>
+        <p:txBody>
+          <a:bodyPr vert="vert270" rtlCol="0" anchor="ctr"/>
+          <a:lstStyle/>
+          <a:p>
+            <a:pPr algn="ctr"/>
+            <a:r>
+              <a:rPr lang="en-US" sz="1200" dirty="0">
+                <a:solidFill>
+                  <a:schemeClr val="tx1"/>
+                </a:solidFill>
+              </a:rPr>
+              <a:t>Elu + BN</a:t>
+            </a:r>
+            <a:endParaRPr lang="en-US" sz="1200" dirty="0">
+              <a:solidFill>
+                <a:schemeClr val="tx1"/>
+              </a:solidFill>
+            </a:endParaRPr>
+          </a:p>
+        </p:txBody>
+      </p:sp>
+      <p:sp>
+        <p:nvSpPr>
+          <p:cNvPr id="110" name="Rectangle 109"/>
+          <p:cNvSpPr/>
+          <p:nvPr/>
+        </p:nvSpPr>
+        <p:spPr>
+          <a:xfrm>
+            <a:off x="5460016" y="9738367"/>
+            <a:ext cx="228600" cy="1371600"/>
+          </a:xfrm>
+          <a:prstGeom prst="rect">
+            <a:avLst/>
+          </a:prstGeom>
+          <a:ln>
+            <a:solidFill>
+              <a:schemeClr val="tx1"/>
+            </a:solidFill>
+          </a:ln>
+        </p:spPr>
+        <p:style>
+          <a:lnRef idx="2">
+            <a:schemeClr val="accent1">
+              <a:shade val="50000"/>
+            </a:schemeClr>
+          </a:lnRef>
+          <a:fillRef idx="1">
+            <a:schemeClr val="accent1"/>
+          </a:fillRef>
+          <a:effectRef idx="0">
+            <a:schemeClr val="accent1"/>
+          </a:effectRef>
+          <a:fontRef idx="minor">
+            <a:schemeClr val="lt1"/>
+          </a:fontRef>
+        </p:style>
+        <p:txBody>
+          <a:bodyPr vert="vert270" rtlCol="0" anchor="ctr"/>
+          <a:lstStyle/>
+          <a:p>
+            <a:pPr algn="ctr"/>
+            <a:endParaRPr lang="en-US" sz="1200" dirty="0">
+              <a:solidFill>
+                <a:schemeClr val="tx1"/>
+              </a:solidFill>
+            </a:endParaRPr>
+          </a:p>
+        </p:txBody>
+      </p:sp>
+      <p:sp>
+        <p:nvSpPr>
+          <p:cNvPr id="113" name="Rectangle 112"/>
+          <p:cNvSpPr/>
+          <p:nvPr/>
+        </p:nvSpPr>
+        <p:spPr>
+          <a:xfrm>
+            <a:off x="5688616" y="9738367"/>
+            <a:ext cx="228600" cy="1371600"/>
+          </a:xfrm>
+          <a:prstGeom prst="rect">
+            <a:avLst/>
+          </a:prstGeom>
+          <a:solidFill>
+            <a:srgbClr val="FFFF00"/>
+          </a:solidFill>
+          <a:ln>
+            <a:solidFill>
+              <a:schemeClr val="tx1"/>
+            </a:solidFill>
+          </a:ln>
+        </p:spPr>
+        <p:style>
+          <a:lnRef idx="2">
+            <a:schemeClr val="accent1">
+              <a:shade val="50000"/>
+            </a:schemeClr>
+          </a:lnRef>
+          <a:fillRef idx="1">
+            <a:schemeClr val="accent1"/>
+          </a:fillRef>
+          <a:effectRef idx="0">
+            <a:schemeClr val="accent1"/>
+          </a:effectRef>
+          <a:fontRef idx="minor">
+            <a:schemeClr val="lt1"/>
+          </a:fontRef>
+        </p:style>
+        <p:txBody>
+          <a:bodyPr vert="vert270" rtlCol="0" anchor="ctr"/>
+          <a:lstStyle/>
+          <a:p>
+            <a:pPr algn="ctr"/>
+            <a:r>
+              <a:rPr lang="en-US" sz="1200" dirty="0">
+                <a:solidFill>
+                  <a:schemeClr val="tx1"/>
+                </a:solidFill>
+              </a:rPr>
+              <a:t>Elu + BN</a:t>
+            </a:r>
+            <a:endParaRPr lang="en-US" sz="1200" dirty="0">
+              <a:solidFill>
+                <a:schemeClr val="tx1"/>
+              </a:solidFill>
+            </a:endParaRPr>
+          </a:p>
+        </p:txBody>
+      </p:sp>
+      <p:sp>
+        <p:nvSpPr>
+          <p:cNvPr id="114" name="Right Arrow 113"/>
+          <p:cNvSpPr/>
+          <p:nvPr/>
+        </p:nvSpPr>
+        <p:spPr>
+          <a:xfrm>
+            <a:off x="5927970" y="10284350"/>
+            <a:ext cx="228600" cy="228600"/>
+          </a:xfrm>
+          <a:prstGeom prst="rightArrow">
+            <a:avLst/>
+          </a:prstGeom>
+          <a:solidFill>
+            <a:srgbClr val="00B050"/>
+          </a:solidFill>
+          <a:ln>
+            <a:solidFill>
+              <a:schemeClr val="tx1"/>
+            </a:solidFill>
+          </a:ln>
+        </p:spPr>
+        <p:style>
+          <a:lnRef idx="2">
+            <a:schemeClr val="accent1">
+              <a:shade val="50000"/>
+            </a:schemeClr>
+          </a:lnRef>
+          <a:fillRef idx="1">
+            <a:schemeClr val="accent1"/>
+          </a:fillRef>
+          <a:effectRef idx="0">
+            <a:schemeClr val="accent1"/>
+          </a:effectRef>
+          <a:fontRef idx="minor">
+            <a:schemeClr val="lt1"/>
+          </a:fontRef>
+        </p:style>
+        <p:txBody>
+          <a:bodyPr rtlCol="0" anchor="ctr"/>
+          <a:lstStyle/>
+          <a:p>
+            <a:pPr algn="ctr"/>
+            <a:endParaRPr lang="en-US" sz="450"/>
+          </a:p>
+        </p:txBody>
+      </p:sp>
+      <p:sp>
+        <p:nvSpPr>
+          <p:cNvPr id="115" name="Rectangle 114"/>
+          <p:cNvSpPr/>
+          <p:nvPr/>
+        </p:nvSpPr>
+        <p:spPr>
+          <a:xfrm>
+            <a:off x="6149698" y="9733784"/>
+            <a:ext cx="228600" cy="1371600"/>
+          </a:xfrm>
+          <a:prstGeom prst="rect">
+            <a:avLst/>
+          </a:prstGeom>
+          <a:ln>
+            <a:solidFill>
+              <a:schemeClr val="tx1"/>
+            </a:solidFill>
+          </a:ln>
+        </p:spPr>
+        <p:style>
+          <a:lnRef idx="2">
+            <a:schemeClr val="accent1">
+              <a:shade val="50000"/>
+            </a:schemeClr>
+          </a:lnRef>
+          <a:fillRef idx="1">
+            <a:schemeClr val="accent1"/>
+          </a:fillRef>
+          <a:effectRef idx="0">
+            <a:schemeClr val="accent1"/>
+          </a:effectRef>
+          <a:fontRef idx="minor">
+            <a:schemeClr val="lt1"/>
+          </a:fontRef>
+        </p:style>
+        <p:txBody>
+          <a:bodyPr vert="vert270" rtlCol="0" anchor="ctr"/>
+          <a:lstStyle/>
+          <a:p>
+            <a:pPr algn="ctr"/>
+            <a:endParaRPr lang="en-US" sz="1200" dirty="0">
+              <a:solidFill>
+                <a:schemeClr val="tx1"/>
+              </a:solidFill>
+            </a:endParaRPr>
+          </a:p>
+        </p:txBody>
+      </p:sp>
+      <p:sp>
+        <p:nvSpPr>
+          <p:cNvPr id="116" name="Rectangle 115"/>
+          <p:cNvSpPr/>
+          <p:nvPr/>
+        </p:nvSpPr>
+        <p:spPr>
+          <a:xfrm>
+            <a:off x="6392794" y="9733784"/>
+            <a:ext cx="228600" cy="1371600"/>
+          </a:xfrm>
+          <a:prstGeom prst="rect">
+            <a:avLst/>
+          </a:prstGeom>
+          <a:ln>
+            <a:solidFill>
+              <a:schemeClr val="tx1"/>
+            </a:solidFill>
+          </a:ln>
+        </p:spPr>
+        <p:style>
+          <a:lnRef idx="2">
+            <a:schemeClr val="accent1">
+              <a:shade val="50000"/>
+            </a:schemeClr>
+          </a:lnRef>
+          <a:fillRef idx="1">
+            <a:schemeClr val="accent1"/>
+          </a:fillRef>
+          <a:effectRef idx="0">
+            <a:schemeClr val="accent1"/>
+          </a:effectRef>
+          <a:fontRef idx="minor">
+            <a:schemeClr val="lt1"/>
+          </a:fontRef>
+        </p:style>
+        <p:txBody>
+          <a:bodyPr vert="vert270" rtlCol="0" anchor="ctr"/>
+          <a:lstStyle/>
+          <a:p>
+            <a:pPr algn="ctr"/>
+            <a:endParaRPr lang="en-US" sz="1200" dirty="0">
+              <a:solidFill>
+                <a:schemeClr val="tx1"/>
+              </a:solidFill>
+            </a:endParaRPr>
+          </a:p>
+        </p:txBody>
+      </p:sp>
+      <p:sp>
+        <p:nvSpPr>
+          <p:cNvPr id="117" name="Rectangle 116"/>
+          <p:cNvSpPr/>
+          <p:nvPr/>
+        </p:nvSpPr>
+        <p:spPr>
+          <a:xfrm>
+            <a:off x="6625169" y="9733784"/>
+            <a:ext cx="228600" cy="1371600"/>
+          </a:xfrm>
+          <a:prstGeom prst="rect">
+            <a:avLst/>
+          </a:prstGeom>
+          <a:solidFill>
+            <a:srgbClr val="FFFF00"/>
+          </a:solidFill>
+          <a:ln>
+            <a:solidFill>
+              <a:schemeClr val="tx1"/>
+            </a:solidFill>
+          </a:ln>
+        </p:spPr>
+        <p:style>
+          <a:lnRef idx="2">
+            <a:schemeClr val="accent1">
+              <a:shade val="50000"/>
+            </a:schemeClr>
+          </a:lnRef>
+          <a:fillRef idx="1">
+            <a:schemeClr val="accent1"/>
+          </a:fillRef>
+          <a:effectRef idx="0">
+            <a:schemeClr val="accent1"/>
+          </a:effectRef>
+          <a:fontRef idx="minor">
+            <a:schemeClr val="lt1"/>
+          </a:fontRef>
+        </p:style>
+        <p:txBody>
+          <a:bodyPr vert="vert270" rtlCol="0" anchor="ctr"/>
+          <a:lstStyle/>
+          <a:p>
+            <a:pPr algn="ctr"/>
+            <a:r>
+              <a:rPr lang="en-US" sz="1200" dirty="0">
+                <a:solidFill>
+                  <a:schemeClr val="tx1"/>
+                </a:solidFill>
+              </a:rPr>
+              <a:t>Elu + BN</a:t>
+            </a:r>
+            <a:endParaRPr lang="en-US" sz="1200" dirty="0">
+              <a:solidFill>
+                <a:schemeClr val="tx1"/>
+              </a:solidFill>
+            </a:endParaRPr>
+          </a:p>
+        </p:txBody>
+      </p:sp>
+      <p:sp>
+        <p:nvSpPr>
+          <p:cNvPr id="119" name="Right Arrow 118"/>
+          <p:cNvSpPr/>
+          <p:nvPr/>
+        </p:nvSpPr>
+        <p:spPr>
+          <a:xfrm>
+            <a:off x="6854522" y="10311638"/>
+            <a:ext cx="228600" cy="228600"/>
+          </a:xfrm>
+          <a:prstGeom prst="rightArrow">
+            <a:avLst/>
+          </a:prstGeom>
+          <a:solidFill>
+            <a:srgbClr val="00B0F0"/>
+          </a:solidFill>
+          <a:ln>
+            <a:solidFill>
+              <a:schemeClr val="tx1"/>
+            </a:solidFill>
+          </a:ln>
+        </p:spPr>
+        <p:style>
+          <a:lnRef idx="2">
+            <a:schemeClr val="accent1">
+              <a:shade val="50000"/>
+            </a:schemeClr>
+          </a:lnRef>
+          <a:fillRef idx="1">
+            <a:schemeClr val="accent1"/>
+          </a:fillRef>
+          <a:effectRef idx="0">
+            <a:schemeClr val="accent1"/>
+          </a:effectRef>
+          <a:fontRef idx="minor">
+            <a:schemeClr val="lt1"/>
+          </a:fontRef>
+        </p:style>
+        <p:txBody>
+          <a:bodyPr rtlCol="0" anchor="ctr"/>
+          <a:lstStyle/>
+          <a:p>
+            <a:pPr algn="ctr"/>
+            <a:endParaRPr lang="en-US" sz="450"/>
+          </a:p>
+        </p:txBody>
+      </p:sp>
+      <p:sp>
+        <p:nvSpPr>
+          <p:cNvPr id="120" name="Rectangle 119"/>
+          <p:cNvSpPr/>
+          <p:nvPr/>
+        </p:nvSpPr>
+        <p:spPr>
+          <a:xfrm>
+            <a:off x="7097326" y="9740138"/>
+            <a:ext cx="228600" cy="1371600"/>
+          </a:xfrm>
+          <a:prstGeom prst="rect">
+            <a:avLst/>
+          </a:prstGeom>
+          <a:ln>
+            <a:solidFill>
+              <a:schemeClr val="tx1"/>
+            </a:solidFill>
+          </a:ln>
+        </p:spPr>
+        <p:style>
+          <a:lnRef idx="2">
+            <a:schemeClr val="accent1">
+              <a:shade val="50000"/>
+            </a:schemeClr>
+          </a:lnRef>
+          <a:fillRef idx="1">
+            <a:schemeClr val="accent1"/>
+          </a:fillRef>
+          <a:effectRef idx="0">
+            <a:schemeClr val="accent1"/>
+          </a:effectRef>
+          <a:fontRef idx="minor">
+            <a:schemeClr val="lt1"/>
+          </a:fontRef>
+        </p:style>
+        <p:txBody>
+          <a:bodyPr vert="vert270" rtlCol="0" anchor="ctr"/>
+          <a:lstStyle/>
+          <a:p>
+            <a:pPr algn="ctr"/>
+            <a:endParaRPr lang="en-US" sz="1200" dirty="0">
+              <a:solidFill>
+                <a:schemeClr val="tx1"/>
+              </a:solidFill>
+            </a:endParaRPr>
+          </a:p>
+        </p:txBody>
+      </p:sp>
+      <p:sp>
+        <p:nvSpPr>
+          <p:cNvPr id="121" name="Rectangle 120"/>
+          <p:cNvSpPr/>
+          <p:nvPr/>
+        </p:nvSpPr>
+        <p:spPr>
+          <a:xfrm>
+            <a:off x="7332790" y="9740138"/>
+            <a:ext cx="228600" cy="1371600"/>
+          </a:xfrm>
+          <a:prstGeom prst="rect">
+            <a:avLst/>
+          </a:prstGeom>
+          <a:solidFill>
+            <a:srgbClr val="FFFF00"/>
+          </a:solidFill>
+          <a:ln>
+            <a:solidFill>
+              <a:schemeClr val="tx1"/>
+            </a:solidFill>
+          </a:ln>
+        </p:spPr>
+        <p:style>
+          <a:lnRef idx="2">
+            <a:schemeClr val="accent1">
+              <a:shade val="50000"/>
+            </a:schemeClr>
+          </a:lnRef>
+          <a:fillRef idx="1">
+            <a:schemeClr val="accent1"/>
+          </a:fillRef>
+          <a:effectRef idx="0">
+            <a:schemeClr val="accent1"/>
+          </a:effectRef>
+          <a:fontRef idx="minor">
+            <a:schemeClr val="lt1"/>
+          </a:fontRef>
+        </p:style>
+        <p:txBody>
+          <a:bodyPr vert="vert270" rtlCol="0" anchor="ctr"/>
+          <a:lstStyle/>
+          <a:p>
+            <a:pPr algn="ctr"/>
+            <a:r>
+              <a:rPr lang="en-US" sz="1200" dirty="0">
+                <a:solidFill>
+                  <a:schemeClr val="tx1"/>
+                </a:solidFill>
+              </a:rPr>
+              <a:t>Elu + BN</a:t>
+            </a:r>
+            <a:endParaRPr lang="en-US" sz="1200" dirty="0">
+              <a:solidFill>
+                <a:schemeClr val="tx1"/>
+              </a:solidFill>
+            </a:endParaRPr>
+          </a:p>
+        </p:txBody>
+      </p:sp>
+      <p:sp>
+        <p:nvSpPr>
+          <p:cNvPr id="122" name="Right Arrow 121"/>
+          <p:cNvSpPr/>
+          <p:nvPr/>
+        </p:nvSpPr>
+        <p:spPr>
+          <a:xfrm>
+            <a:off x="7568349" y="10303671"/>
+            <a:ext cx="228600" cy="228600"/>
+          </a:xfrm>
+          <a:prstGeom prst="rightArrow">
+            <a:avLst/>
+          </a:prstGeom>
+          <a:solidFill>
+            <a:srgbClr val="00B050"/>
+          </a:solidFill>
+          <a:ln>
+            <a:solidFill>
+              <a:schemeClr val="tx1"/>
+            </a:solidFill>
+          </a:ln>
+        </p:spPr>
+        <p:style>
+          <a:lnRef idx="2">
+            <a:schemeClr val="accent1">
+              <a:shade val="50000"/>
+            </a:schemeClr>
+          </a:lnRef>
+          <a:fillRef idx="1">
+            <a:schemeClr val="accent1"/>
+          </a:fillRef>
+          <a:effectRef idx="0">
+            <a:schemeClr val="accent1"/>
+          </a:effectRef>
+          <a:fontRef idx="minor">
+            <a:schemeClr val="lt1"/>
+          </a:fontRef>
+        </p:style>
+        <p:txBody>
+          <a:bodyPr rtlCol="0" anchor="ctr"/>
+          <a:lstStyle/>
+          <a:p>
+            <a:pPr algn="ctr"/>
+            <a:endParaRPr lang="en-US" sz="450"/>
+          </a:p>
+        </p:txBody>
+      </p:sp>
+      <p:sp>
+        <p:nvSpPr>
+          <p:cNvPr id="123" name="Rectangle 122"/>
+          <p:cNvSpPr/>
+          <p:nvPr/>
+        </p:nvSpPr>
+        <p:spPr>
+          <a:xfrm>
+            <a:off x="7808340" y="9742072"/>
+            <a:ext cx="228600" cy="1371600"/>
+          </a:xfrm>
+          <a:prstGeom prst="rect">
+            <a:avLst/>
+          </a:prstGeom>
+          <a:ln>
+            <a:solidFill>
+              <a:schemeClr val="tx1"/>
+            </a:solidFill>
+          </a:ln>
+        </p:spPr>
+        <p:style>
+          <a:lnRef idx="2">
+            <a:schemeClr val="accent1">
+              <a:shade val="50000"/>
+            </a:schemeClr>
+          </a:lnRef>
+          <a:fillRef idx="1">
+            <a:schemeClr val="accent1"/>
+          </a:fillRef>
+          <a:effectRef idx="0">
+            <a:schemeClr val="accent1"/>
+          </a:effectRef>
+          <a:fontRef idx="minor">
+            <a:schemeClr val="lt1"/>
+          </a:fontRef>
+        </p:style>
+        <p:txBody>
+          <a:bodyPr vert="vert270" rtlCol="0" anchor="ctr"/>
+          <a:lstStyle/>
+          <a:p>
+            <a:pPr algn="ctr"/>
+            <a:endParaRPr lang="en-US" sz="1200" dirty="0">
+              <a:solidFill>
+                <a:schemeClr val="tx1"/>
+              </a:solidFill>
+            </a:endParaRPr>
+          </a:p>
+        </p:txBody>
+      </p:sp>
+      <p:sp>
+        <p:nvSpPr>
+          <p:cNvPr id="124" name="Rectangle 123"/>
+          <p:cNvSpPr/>
+          <p:nvPr/>
+        </p:nvSpPr>
+        <p:spPr>
+          <a:xfrm>
+            <a:off x="8028362" y="9742072"/>
+            <a:ext cx="228600" cy="1371600"/>
+          </a:xfrm>
+          <a:prstGeom prst="rect">
+            <a:avLst/>
+          </a:prstGeom>
+          <a:ln>
+            <a:solidFill>
+              <a:schemeClr val="tx1"/>
+            </a:solidFill>
+          </a:ln>
+        </p:spPr>
+        <p:style>
+          <a:lnRef idx="2">
+            <a:schemeClr val="accent1">
+              <a:shade val="50000"/>
+            </a:schemeClr>
+          </a:lnRef>
+          <a:fillRef idx="1">
+            <a:schemeClr val="accent1"/>
+          </a:fillRef>
+          <a:effectRef idx="0">
+            <a:schemeClr val="accent1"/>
+          </a:effectRef>
+          <a:fontRef idx="minor">
+            <a:schemeClr val="lt1"/>
+          </a:fontRef>
+        </p:style>
+        <p:txBody>
+          <a:bodyPr vert="vert270" rtlCol="0" anchor="ctr"/>
+          <a:lstStyle/>
+          <a:p>
+            <a:pPr algn="ctr"/>
+            <a:endParaRPr lang="en-US" sz="1200" dirty="0">
+              <a:solidFill>
+                <a:schemeClr val="tx1"/>
+              </a:solidFill>
+            </a:endParaRPr>
+          </a:p>
+        </p:txBody>
+      </p:sp>
+      <p:sp>
+        <p:nvSpPr>
+          <p:cNvPr id="125" name="Rectangle 124"/>
+          <p:cNvSpPr/>
+          <p:nvPr/>
+        </p:nvSpPr>
+        <p:spPr>
+          <a:xfrm>
+            <a:off x="8264221" y="9742072"/>
+            <a:ext cx="228600" cy="1371600"/>
+          </a:xfrm>
+          <a:prstGeom prst="rect">
+            <a:avLst/>
+          </a:prstGeom>
+          <a:ln>
+            <a:solidFill>
+              <a:schemeClr val="tx1"/>
+            </a:solidFill>
+          </a:ln>
+        </p:spPr>
+        <p:style>
+          <a:lnRef idx="2">
+            <a:schemeClr val="accent1">
+              <a:shade val="50000"/>
+            </a:schemeClr>
+          </a:lnRef>
+          <a:fillRef idx="1">
+            <a:schemeClr val="accent1"/>
+          </a:fillRef>
+          <a:effectRef idx="0">
+            <a:schemeClr val="accent1"/>
+          </a:effectRef>
+          <a:fontRef idx="minor">
+            <a:schemeClr val="lt1"/>
+          </a:fontRef>
+        </p:style>
+        <p:txBody>
+          <a:bodyPr vert="vert270" rtlCol="0" anchor="ctr"/>
+          <a:lstStyle/>
+          <a:p>
+            <a:pPr algn="ctr"/>
+            <a:endParaRPr lang="en-US" sz="1200" dirty="0">
+              <a:solidFill>
+                <a:schemeClr val="tx1"/>
+              </a:solidFill>
+            </a:endParaRPr>
+          </a:p>
+        </p:txBody>
+      </p:sp>
+      <p:sp>
+        <p:nvSpPr>
+          <p:cNvPr id="128" name="Right Arrow 127"/>
+          <p:cNvSpPr/>
+          <p:nvPr/>
+        </p:nvSpPr>
+        <p:spPr>
+          <a:xfrm>
+            <a:off x="8505532" y="10305284"/>
+            <a:ext cx="228600" cy="228600"/>
+          </a:xfrm>
+          <a:prstGeom prst="rightArrow">
+            <a:avLst/>
+          </a:prstGeom>
+          <a:solidFill>
+            <a:srgbClr val="00B0F0"/>
+          </a:solidFill>
+          <a:ln>
+            <a:solidFill>
+              <a:schemeClr val="tx1"/>
+            </a:solidFill>
+          </a:ln>
+        </p:spPr>
+        <p:style>
+          <a:lnRef idx="2">
+            <a:schemeClr val="accent1">
+              <a:shade val="50000"/>
+            </a:schemeClr>
+          </a:lnRef>
+          <a:fillRef idx="1">
+            <a:schemeClr val="accent1"/>
+          </a:fillRef>
+          <a:effectRef idx="0">
+            <a:schemeClr val="accent1"/>
+          </a:effectRef>
+          <a:fontRef idx="minor">
+            <a:schemeClr val="lt1"/>
+          </a:fontRef>
+        </p:style>
+        <p:txBody>
+          <a:bodyPr rtlCol="0" anchor="ctr"/>
+          <a:lstStyle/>
+          <a:p>
+            <a:pPr algn="ctr"/>
+            <a:endParaRPr lang="en-US" sz="450"/>
+          </a:p>
+        </p:txBody>
+      </p:sp>
+      <p:sp>
+        <p:nvSpPr>
+          <p:cNvPr id="129" name="Rectangle 128"/>
+          <p:cNvSpPr/>
+          <p:nvPr/>
+        </p:nvSpPr>
+        <p:spPr>
+          <a:xfrm>
+            <a:off x="8748336" y="9733784"/>
+            <a:ext cx="228600" cy="1371600"/>
+          </a:xfrm>
+          <a:prstGeom prst="rect">
+            <a:avLst/>
+          </a:prstGeom>
+          <a:ln>
+            <a:solidFill>
+              <a:schemeClr val="tx1"/>
+            </a:solidFill>
+          </a:ln>
+        </p:spPr>
+        <p:style>
+          <a:lnRef idx="2">
+            <a:schemeClr val="accent1">
+              <a:shade val="50000"/>
+            </a:schemeClr>
+          </a:lnRef>
+          <a:fillRef idx="1">
+            <a:schemeClr val="accent1"/>
+          </a:fillRef>
+          <a:effectRef idx="0">
+            <a:schemeClr val="accent1"/>
+          </a:effectRef>
+          <a:fontRef idx="minor">
+            <a:schemeClr val="lt1"/>
+          </a:fontRef>
+        </p:style>
+        <p:txBody>
+          <a:bodyPr vert="vert270" rtlCol="0" anchor="ctr"/>
+          <a:lstStyle/>
+          <a:p>
+            <a:pPr algn="ctr"/>
+            <a:endParaRPr lang="en-US" sz="1200" dirty="0">
+              <a:solidFill>
+                <a:schemeClr val="tx1"/>
+              </a:solidFill>
+            </a:endParaRPr>
+          </a:p>
+        </p:txBody>
+      </p:sp>
+      <p:sp>
+        <p:nvSpPr>
+          <p:cNvPr id="130" name="Rectangle 129"/>
+          <p:cNvSpPr/>
+          <p:nvPr/>
+        </p:nvSpPr>
+        <p:spPr>
+          <a:xfrm>
+            <a:off x="8983800" y="9733784"/>
+            <a:ext cx="228600" cy="1371600"/>
+          </a:xfrm>
+          <a:prstGeom prst="rect">
+            <a:avLst/>
+          </a:prstGeom>
+          <a:solidFill>
+            <a:srgbClr val="FFFF00"/>
+          </a:solidFill>
+          <a:ln>
+            <a:solidFill>
+              <a:schemeClr val="tx1"/>
+            </a:solidFill>
+          </a:ln>
+        </p:spPr>
+        <p:style>
+          <a:lnRef idx="2">
+            <a:schemeClr val="accent1">
+              <a:shade val="50000"/>
+            </a:schemeClr>
+          </a:lnRef>
+          <a:fillRef idx="1">
+            <a:schemeClr val="accent1"/>
+          </a:fillRef>
+          <a:effectRef idx="0">
+            <a:schemeClr val="accent1"/>
+          </a:effectRef>
+          <a:fontRef idx="minor">
+            <a:schemeClr val="lt1"/>
+          </a:fontRef>
+        </p:style>
+        <p:txBody>
+          <a:bodyPr vert="vert270" rtlCol="0" anchor="ctr"/>
+          <a:lstStyle/>
+          <a:p>
+            <a:pPr algn="ctr"/>
+            <a:r>
+              <a:rPr lang="en-US" sz="1200" dirty="0">
+                <a:solidFill>
+                  <a:schemeClr val="tx1"/>
+                </a:solidFill>
+              </a:rPr>
+              <a:t>Elu + BN</a:t>
+            </a:r>
+            <a:endParaRPr lang="en-US" sz="1200" dirty="0">
+              <a:solidFill>
+                <a:schemeClr val="tx1"/>
+              </a:solidFill>
+            </a:endParaRPr>
+          </a:p>
+        </p:txBody>
+      </p:sp>
+      <p:sp>
+        <p:nvSpPr>
+          <p:cNvPr id="131" name="Right Arrow 130"/>
+          <p:cNvSpPr/>
+          <p:nvPr/>
+        </p:nvSpPr>
+        <p:spPr>
+          <a:xfrm>
+            <a:off x="9210267" y="10301737"/>
+            <a:ext cx="228600" cy="228600"/>
+          </a:xfrm>
+          <a:prstGeom prst="rightArrow">
+            <a:avLst/>
+          </a:prstGeom>
+          <a:solidFill>
+            <a:srgbClr val="00B050"/>
+          </a:solidFill>
+          <a:ln>
+            <a:solidFill>
+              <a:schemeClr val="tx1"/>
+            </a:solidFill>
+          </a:ln>
+        </p:spPr>
+        <p:style>
+          <a:lnRef idx="2">
+            <a:schemeClr val="accent1">
+              <a:shade val="50000"/>
+            </a:schemeClr>
+          </a:lnRef>
+          <a:fillRef idx="1">
+            <a:schemeClr val="accent1"/>
+          </a:fillRef>
+          <a:effectRef idx="0">
+            <a:schemeClr val="accent1"/>
+          </a:effectRef>
+          <a:fontRef idx="minor">
+            <a:schemeClr val="lt1"/>
+          </a:fontRef>
+        </p:style>
+        <p:txBody>
+          <a:bodyPr rtlCol="0" anchor="ctr"/>
+          <a:lstStyle/>
+          <a:p>
+            <a:pPr algn="ctr"/>
+            <a:endParaRPr lang="en-US" sz="450"/>
+          </a:p>
+        </p:txBody>
+      </p:sp>
+      <p:sp>
+        <p:nvSpPr>
+          <p:cNvPr id="132" name="Rectangle 131"/>
+          <p:cNvSpPr/>
+          <p:nvPr/>
+        </p:nvSpPr>
+        <p:spPr>
+          <a:xfrm>
+            <a:off x="9450258" y="9740138"/>
+            <a:ext cx="228600" cy="1371600"/>
+          </a:xfrm>
+          <a:prstGeom prst="rect">
+            <a:avLst/>
+          </a:prstGeom>
+          <a:ln>
+            <a:solidFill>
+              <a:schemeClr val="tx1"/>
+            </a:solidFill>
+          </a:ln>
+        </p:spPr>
+        <p:style>
+          <a:lnRef idx="2">
+            <a:schemeClr val="accent1">
+              <a:shade val="50000"/>
+            </a:schemeClr>
+          </a:lnRef>
+          <a:fillRef idx="1">
+            <a:schemeClr val="accent1"/>
+          </a:fillRef>
+          <a:effectRef idx="0">
+            <a:schemeClr val="accent1"/>
+          </a:effectRef>
+          <a:fontRef idx="minor">
+            <a:schemeClr val="lt1"/>
+          </a:fontRef>
+        </p:style>
+        <p:txBody>
+          <a:bodyPr vert="vert270" rtlCol="0" anchor="ctr"/>
+          <a:lstStyle/>
+          <a:p>
+            <a:pPr algn="ctr"/>
+            <a:endParaRPr lang="en-US" sz="1200" dirty="0">
+              <a:solidFill>
+                <a:schemeClr val="tx1"/>
+              </a:solidFill>
+            </a:endParaRPr>
+          </a:p>
+        </p:txBody>
+      </p:sp>
+      <p:sp>
+        <p:nvSpPr>
+          <p:cNvPr id="133" name="Rectangle 132"/>
+          <p:cNvSpPr/>
+          <p:nvPr/>
+        </p:nvSpPr>
+        <p:spPr>
+          <a:xfrm>
+            <a:off x="9670280" y="9740138"/>
+            <a:ext cx="228600" cy="1371600"/>
+          </a:xfrm>
+          <a:prstGeom prst="rect">
+            <a:avLst/>
+          </a:prstGeom>
+          <a:ln>
+            <a:solidFill>
+              <a:schemeClr val="tx1"/>
+            </a:solidFill>
+          </a:ln>
+        </p:spPr>
+        <p:style>
+          <a:lnRef idx="2">
+            <a:schemeClr val="accent1">
+              <a:shade val="50000"/>
+            </a:schemeClr>
+          </a:lnRef>
+          <a:fillRef idx="1">
+            <a:schemeClr val="accent1"/>
+          </a:fillRef>
+          <a:effectRef idx="0">
+            <a:schemeClr val="accent1"/>
+          </a:effectRef>
+          <a:fontRef idx="minor">
+            <a:schemeClr val="lt1"/>
+          </a:fontRef>
+        </p:style>
+        <p:txBody>
+          <a:bodyPr vert="vert270" rtlCol="0" anchor="ctr"/>
+          <a:lstStyle/>
+          <a:p>
+            <a:pPr algn="ctr"/>
+            <a:endParaRPr lang="en-US" sz="1200" dirty="0">
+              <a:solidFill>
+                <a:schemeClr val="tx1"/>
+              </a:solidFill>
+            </a:endParaRPr>
+          </a:p>
+        </p:txBody>
+      </p:sp>
+      <p:sp>
+        <p:nvSpPr>
+          <p:cNvPr id="134" name="Rectangle 133"/>
+          <p:cNvSpPr/>
+          <p:nvPr/>
+        </p:nvSpPr>
+        <p:spPr>
+          <a:xfrm>
+            <a:off x="9906139" y="9740138"/>
+            <a:ext cx="228600" cy="1371600"/>
+          </a:xfrm>
+          <a:prstGeom prst="rect">
+            <a:avLst/>
+          </a:prstGeom>
+          <a:ln>
+            <a:solidFill>
+              <a:schemeClr val="tx1"/>
+            </a:solidFill>
+          </a:ln>
+        </p:spPr>
+        <p:style>
+          <a:lnRef idx="2">
+            <a:schemeClr val="accent1">
+              <a:shade val="50000"/>
+            </a:schemeClr>
+          </a:lnRef>
+          <a:fillRef idx="1">
+            <a:schemeClr val="accent1"/>
+          </a:fillRef>
+          <a:effectRef idx="0">
+            <a:schemeClr val="accent1"/>
+          </a:effectRef>
+          <a:fontRef idx="minor">
+            <a:schemeClr val="lt1"/>
+          </a:fontRef>
+        </p:style>
+        <p:txBody>
+          <a:bodyPr vert="vert270" rtlCol="0" anchor="ctr"/>
+          <a:lstStyle/>
+          <a:p>
+            <a:pPr algn="ctr"/>
+            <a:endParaRPr lang="en-US" sz="1200" dirty="0">
+              <a:solidFill>
+                <a:schemeClr val="tx1"/>
+              </a:solidFill>
+            </a:endParaRPr>
+          </a:p>
+        </p:txBody>
+      </p:sp>
+      <p:sp>
+        <p:nvSpPr>
+          <p:cNvPr id="138" name="Rectangle 137"/>
+          <p:cNvSpPr/>
+          <p:nvPr/>
+        </p:nvSpPr>
+        <p:spPr>
+          <a:xfrm>
+            <a:off x="10133841" y="9740138"/>
+            <a:ext cx="228600" cy="1371600"/>
+          </a:xfrm>
+          <a:prstGeom prst="rect">
+            <a:avLst/>
+          </a:prstGeom>
+          <a:ln>
+            <a:solidFill>
+              <a:schemeClr val="tx1"/>
+            </a:solidFill>
+          </a:ln>
+        </p:spPr>
+        <p:style>
+          <a:lnRef idx="2">
+            <a:schemeClr val="accent1">
+              <a:shade val="50000"/>
+            </a:schemeClr>
+          </a:lnRef>
+          <a:fillRef idx="1">
+            <a:schemeClr val="accent1"/>
+          </a:fillRef>
+          <a:effectRef idx="0">
+            <a:schemeClr val="accent1"/>
+          </a:effectRef>
+          <a:fontRef idx="minor">
+            <a:schemeClr val="lt1"/>
+          </a:fontRef>
+        </p:style>
+        <p:txBody>
+          <a:bodyPr vert="vert270" rtlCol="0" anchor="ctr"/>
+          <a:lstStyle/>
+          <a:p>
+            <a:pPr algn="ctr"/>
+            <a:endParaRPr lang="en-US" sz="1200" dirty="0">
+              <a:solidFill>
+                <a:schemeClr val="tx1"/>
+              </a:solidFill>
+            </a:endParaRPr>
+          </a:p>
+        </p:txBody>
+      </p:sp>
+      <p:sp>
+        <p:nvSpPr>
+          <p:cNvPr id="139" name="Right Arrow 138"/>
+          <p:cNvSpPr/>
+          <p:nvPr/>
+        </p:nvSpPr>
+        <p:spPr>
+          <a:xfrm>
+            <a:off x="10374032" y="10321917"/>
+            <a:ext cx="228600" cy="228600"/>
+          </a:xfrm>
+          <a:prstGeom prst="rightArrow">
+            <a:avLst/>
+          </a:prstGeom>
+          <a:solidFill>
+            <a:srgbClr val="00B0F0"/>
+          </a:solidFill>
+          <a:ln>
+            <a:solidFill>
+              <a:schemeClr val="tx1"/>
+            </a:solidFill>
+          </a:ln>
+        </p:spPr>
+        <p:style>
+          <a:lnRef idx="2">
+            <a:schemeClr val="accent1">
+              <a:shade val="50000"/>
+            </a:schemeClr>
+          </a:lnRef>
+          <a:fillRef idx="1">
+            <a:schemeClr val="accent1"/>
+          </a:fillRef>
+          <a:effectRef idx="0">
+            <a:schemeClr val="accent1"/>
+          </a:effectRef>
+          <a:fontRef idx="minor">
+            <a:schemeClr val="lt1"/>
+          </a:fontRef>
+        </p:style>
+        <p:txBody>
+          <a:bodyPr rtlCol="0" anchor="ctr"/>
+          <a:lstStyle/>
+          <a:p>
+            <a:pPr algn="ctr"/>
+            <a:endParaRPr lang="en-US" sz="450"/>
+          </a:p>
+        </p:txBody>
+      </p:sp>
+      <p:sp>
+        <p:nvSpPr>
+          <p:cNvPr id="140" name="Rectangle 139"/>
+          <p:cNvSpPr/>
+          <p:nvPr/>
+        </p:nvSpPr>
+        <p:spPr>
+          <a:xfrm>
+            <a:off x="10616836" y="9750417"/>
+            <a:ext cx="228600" cy="1371600"/>
+          </a:xfrm>
+          <a:prstGeom prst="rect">
+            <a:avLst/>
+          </a:prstGeom>
+          <a:ln>
+            <a:solidFill>
+              <a:schemeClr val="tx1"/>
+            </a:solidFill>
+          </a:ln>
+        </p:spPr>
+        <p:style>
+          <a:lnRef idx="2">
+            <a:schemeClr val="accent1">
+              <a:shade val="50000"/>
+            </a:schemeClr>
+          </a:lnRef>
+          <a:fillRef idx="1">
+            <a:schemeClr val="accent1"/>
+          </a:fillRef>
+          <a:effectRef idx="0">
+            <a:schemeClr val="accent1"/>
+          </a:effectRef>
+          <a:fontRef idx="minor">
+            <a:schemeClr val="lt1"/>
+          </a:fontRef>
+        </p:style>
+        <p:txBody>
+          <a:bodyPr vert="vert270" rtlCol="0" anchor="ctr"/>
+          <a:lstStyle/>
+          <a:p>
+            <a:pPr algn="ctr"/>
+            <a:endParaRPr lang="en-US" sz="1200" dirty="0">
+              <a:solidFill>
+                <a:schemeClr val="tx1"/>
+              </a:solidFill>
+            </a:endParaRPr>
+          </a:p>
+        </p:txBody>
+      </p:sp>
+      <p:sp>
+        <p:nvSpPr>
+          <p:cNvPr id="141" name="Rectangle 140"/>
+          <p:cNvSpPr/>
+          <p:nvPr/>
+        </p:nvSpPr>
+        <p:spPr>
+          <a:xfrm>
+            <a:off x="10852300" y="9750417"/>
+            <a:ext cx="228600" cy="1371600"/>
+          </a:xfrm>
+          <a:prstGeom prst="rect">
+            <a:avLst/>
+          </a:prstGeom>
+          <a:solidFill>
+            <a:srgbClr val="FFFF00"/>
+          </a:solidFill>
+          <a:ln>
+            <a:solidFill>
+              <a:schemeClr val="tx1"/>
+            </a:solidFill>
+          </a:ln>
+        </p:spPr>
+        <p:style>
+          <a:lnRef idx="2">
+            <a:schemeClr val="accent1">
+              <a:shade val="50000"/>
+            </a:schemeClr>
+          </a:lnRef>
+          <a:fillRef idx="1">
+            <a:schemeClr val="accent1"/>
+          </a:fillRef>
+          <a:effectRef idx="0">
+            <a:schemeClr val="accent1"/>
+          </a:effectRef>
+          <a:fontRef idx="minor">
+            <a:schemeClr val="lt1"/>
+          </a:fontRef>
+        </p:style>
+        <p:txBody>
+          <a:bodyPr vert="vert270" rtlCol="0" anchor="ctr"/>
+          <a:lstStyle/>
+          <a:p>
+            <a:pPr algn="ctr"/>
+            <a:r>
+              <a:rPr lang="en-US" sz="1200" dirty="0">
+                <a:solidFill>
+                  <a:schemeClr val="tx1"/>
+                </a:solidFill>
+              </a:rPr>
+              <a:t>Elu + BN</a:t>
+            </a:r>
+            <a:endParaRPr lang="en-US" sz="1200" dirty="0">
+              <a:solidFill>
+                <a:schemeClr val="tx1"/>
+              </a:solidFill>
+            </a:endParaRPr>
+          </a:p>
+        </p:txBody>
+      </p:sp>
+      <p:cxnSp>
+        <p:nvCxnSpPr>
+          <p:cNvPr id="144" name="Curved Connector 143"/>
+          <p:cNvCxnSpPr>
+            <a:stCxn id="150" idx="2"/>
+            <a:endCxn id="141" idx="0"/>
+          </p:cNvCxnSpPr>
+          <p:nvPr/>
+        </p:nvCxnSpPr>
+        <p:spPr>
+          <a:xfrm rot="16200000" flipH="1">
+            <a:off x="9721556" y="8505372"/>
+            <a:ext cx="348413" cy="2141675"/>
+          </a:xfrm>
+          <a:prstGeom prst="curvedConnector3">
+            <a:avLst>
+              <a:gd name="adj1" fmla="val 50000"/>
+            </a:avLst>
+          </a:prstGeom>
+          <a:ln w="34925">
+            <a:solidFill>
+              <a:srgbClr val="00B050"/>
+            </a:solidFill>
+            <a:headEnd type="triangle"/>
+            <a:tailEnd type="triangle"/>
+          </a:ln>
+        </p:spPr>
+        <p:style>
+          <a:lnRef idx="1">
+            <a:schemeClr val="accent1"/>
+          </a:lnRef>
+          <a:fillRef idx="0">
+            <a:schemeClr val="accent1"/>
+          </a:fillRef>
+          <a:effectRef idx="0">
+            <a:schemeClr val="accent1"/>
+          </a:effectRef>
+          <a:fontRef idx="minor">
+            <a:schemeClr val="tx1"/>
+          </a:fontRef>
+        </p:style>
+      </p:cxnSp>
+      <p:sp>
+        <p:nvSpPr>
+          <p:cNvPr id="150" name="Rectangle 149"/>
+          <p:cNvSpPr/>
+          <p:nvPr/>
+        </p:nvSpPr>
+        <p:spPr>
+          <a:xfrm>
+            <a:off x="8710625" y="8030404"/>
+            <a:ext cx="228600" cy="1371600"/>
+          </a:xfrm>
+          <a:prstGeom prst="rect">
+            <a:avLst/>
+          </a:prstGeom>
+          <a:ln>
+            <a:solidFill>
+              <a:schemeClr val="tx1"/>
+            </a:solidFill>
+          </a:ln>
+        </p:spPr>
+        <p:style>
+          <a:lnRef idx="2">
+            <a:schemeClr val="accent1">
+              <a:shade val="50000"/>
+            </a:schemeClr>
+          </a:lnRef>
+          <a:fillRef idx="1">
+            <a:schemeClr val="accent1"/>
+          </a:fillRef>
+          <a:effectRef idx="0">
+            <a:schemeClr val="accent1"/>
+          </a:effectRef>
+          <a:fontRef idx="minor">
+            <a:schemeClr val="lt1"/>
+          </a:fontRef>
+        </p:style>
+        <p:txBody>
+          <a:bodyPr vert="vert270" rtlCol="0" anchor="ctr"/>
+          <a:lstStyle/>
+          <a:p>
+            <a:pPr algn="ctr"/>
+            <a:endParaRPr lang="en-US" sz="1200" dirty="0">
+              <a:solidFill>
+                <a:schemeClr val="tx1"/>
+              </a:solidFill>
+            </a:endParaRPr>
+          </a:p>
+        </p:txBody>
+      </p:sp>
+      <p:sp>
+        <p:nvSpPr>
+          <p:cNvPr id="151" name="Rectangle 150"/>
+          <p:cNvSpPr/>
+          <p:nvPr/>
+        </p:nvSpPr>
+        <p:spPr>
+          <a:xfrm>
+            <a:off x="8942744" y="8030404"/>
+            <a:ext cx="228600" cy="1371600"/>
+          </a:xfrm>
+          <a:prstGeom prst="rect">
+            <a:avLst/>
+          </a:prstGeom>
+          <a:solidFill>
+            <a:srgbClr val="FFFF00"/>
+          </a:solidFill>
+          <a:ln>
+            <a:solidFill>
+              <a:schemeClr val="tx1"/>
+            </a:solidFill>
+          </a:ln>
+        </p:spPr>
+        <p:style>
+          <a:lnRef idx="2">
+            <a:schemeClr val="accent1">
+              <a:shade val="50000"/>
+            </a:schemeClr>
+          </a:lnRef>
+          <a:fillRef idx="1">
+            <a:schemeClr val="accent1"/>
+          </a:fillRef>
+          <a:effectRef idx="0">
+            <a:schemeClr val="accent1"/>
+          </a:effectRef>
+          <a:fontRef idx="minor">
+            <a:schemeClr val="lt1"/>
+          </a:fontRef>
+        </p:style>
+        <p:txBody>
+          <a:bodyPr vert="vert270" rtlCol="0" anchor="ctr"/>
+          <a:lstStyle/>
+          <a:p>
+            <a:pPr algn="ctr"/>
+            <a:r>
+              <a:rPr lang="en-US" sz="1200" dirty="0">
+                <a:solidFill>
+                  <a:schemeClr val="tx1"/>
+                </a:solidFill>
+              </a:rPr>
+              <a:t>Elu + BN</a:t>
+            </a:r>
+            <a:endParaRPr lang="en-US" sz="1200" dirty="0">
+              <a:solidFill>
+                <a:schemeClr val="tx1"/>
+              </a:solidFill>
+            </a:endParaRPr>
+          </a:p>
+        </p:txBody>
+      </p:sp>
+      <p:sp>
+        <p:nvSpPr>
+          <p:cNvPr id="153" name="Right Arrow 152"/>
+          <p:cNvSpPr/>
+          <p:nvPr/>
+        </p:nvSpPr>
+        <p:spPr>
+          <a:xfrm>
+            <a:off x="9178972" y="8601904"/>
+            <a:ext cx="228600" cy="228600"/>
+          </a:xfrm>
+          <a:prstGeom prst="rightArrow">
+            <a:avLst/>
+          </a:prstGeom>
+          <a:solidFill>
+            <a:srgbClr val="00B050"/>
+          </a:solidFill>
+          <a:ln>
+            <a:solidFill>
+              <a:schemeClr val="tx1"/>
+            </a:solidFill>
+          </a:ln>
+        </p:spPr>
+        <p:style>
+          <a:lnRef idx="2">
+            <a:schemeClr val="accent1">
+              <a:shade val="50000"/>
+            </a:schemeClr>
+          </a:lnRef>
+          <a:fillRef idx="1">
+            <a:schemeClr val="accent1"/>
+          </a:fillRef>
+          <a:effectRef idx="0">
+            <a:schemeClr val="accent1"/>
+          </a:effectRef>
+          <a:fontRef idx="minor">
+            <a:schemeClr val="lt1"/>
+          </a:fontRef>
+        </p:style>
+        <p:txBody>
+          <a:bodyPr rtlCol="0" anchor="ctr"/>
+          <a:lstStyle/>
+          <a:p>
+            <a:pPr algn="ctr"/>
+            <a:endParaRPr lang="en-US" sz="450"/>
+          </a:p>
+        </p:txBody>
+      </p:sp>
+      <p:sp>
+        <p:nvSpPr>
+          <p:cNvPr id="154" name="Rectangle 153"/>
+          <p:cNvSpPr/>
+          <p:nvPr/>
+        </p:nvSpPr>
+        <p:spPr>
+          <a:xfrm>
+            <a:off x="9410225" y="8030404"/>
+            <a:ext cx="228600" cy="1371600"/>
+          </a:xfrm>
+          <a:prstGeom prst="rect">
+            <a:avLst/>
+          </a:prstGeom>
+          <a:ln>
+            <a:solidFill>
+              <a:schemeClr val="tx1"/>
+            </a:solidFill>
+          </a:ln>
+        </p:spPr>
+        <p:style>
+          <a:lnRef idx="2">
+            <a:schemeClr val="accent1">
+              <a:shade val="50000"/>
+            </a:schemeClr>
+          </a:lnRef>
+          <a:fillRef idx="1">
+            <a:schemeClr val="accent1"/>
+          </a:fillRef>
+          <a:effectRef idx="0">
+            <a:schemeClr val="accent1"/>
+          </a:effectRef>
+          <a:fontRef idx="minor">
+            <a:schemeClr val="lt1"/>
+          </a:fontRef>
+        </p:style>
+        <p:txBody>
+          <a:bodyPr vert="vert270" rtlCol="0" anchor="ctr"/>
+          <a:lstStyle/>
+          <a:p>
+            <a:pPr algn="ctr"/>
+            <a:endParaRPr lang="en-US" sz="1200" dirty="0">
+              <a:solidFill>
+                <a:schemeClr val="tx1"/>
+              </a:solidFill>
+            </a:endParaRPr>
+          </a:p>
+        </p:txBody>
+      </p:sp>
+      <p:sp>
+        <p:nvSpPr>
+          <p:cNvPr id="155" name="Rectangle 154"/>
+          <p:cNvSpPr/>
+          <p:nvPr/>
+        </p:nvSpPr>
+        <p:spPr>
+          <a:xfrm>
+            <a:off x="9649609" y="8030404"/>
+            <a:ext cx="228600" cy="1371600"/>
+          </a:xfrm>
+          <a:prstGeom prst="rect">
+            <a:avLst/>
+          </a:prstGeom>
+          <a:ln>
+            <a:solidFill>
+              <a:schemeClr val="tx1"/>
+            </a:solidFill>
+          </a:ln>
+        </p:spPr>
+        <p:style>
+          <a:lnRef idx="2">
+            <a:schemeClr val="accent1">
+              <a:shade val="50000"/>
+            </a:schemeClr>
+          </a:lnRef>
+          <a:fillRef idx="1">
+            <a:schemeClr val="accent1"/>
+          </a:fillRef>
+          <a:effectRef idx="0">
+            <a:schemeClr val="accent1"/>
+          </a:effectRef>
+          <a:fontRef idx="minor">
+            <a:schemeClr val="lt1"/>
+          </a:fontRef>
+        </p:style>
+        <p:txBody>
+          <a:bodyPr vert="vert270" rtlCol="0" anchor="ctr"/>
+          <a:lstStyle/>
+          <a:p>
+            <a:pPr algn="ctr"/>
+            <a:endParaRPr lang="en-US" sz="1200" dirty="0">
+              <a:solidFill>
+                <a:schemeClr val="tx1"/>
+              </a:solidFill>
+            </a:endParaRPr>
+          </a:p>
+        </p:txBody>
+      </p:sp>
+      <p:sp>
+        <p:nvSpPr>
+          <p:cNvPr id="156" name="Right Arrow 155"/>
+          <p:cNvSpPr/>
+          <p:nvPr/>
+        </p:nvSpPr>
+        <p:spPr>
+          <a:xfrm>
+            <a:off x="10843270" y="8601904"/>
+            <a:ext cx="228600" cy="228600"/>
+          </a:xfrm>
+          <a:prstGeom prst="rightArrow">
+            <a:avLst/>
+          </a:prstGeom>
+          <a:solidFill>
+            <a:srgbClr val="00B0F0"/>
+          </a:solidFill>
+          <a:ln>
+            <a:solidFill>
+              <a:schemeClr val="tx1"/>
+            </a:solidFill>
+          </a:ln>
+        </p:spPr>
+        <p:style>
+          <a:lnRef idx="2">
+            <a:schemeClr val="accent1">
+              <a:shade val="50000"/>
+            </a:schemeClr>
+          </a:lnRef>
+          <a:fillRef idx="1">
+            <a:schemeClr val="accent1"/>
+          </a:fillRef>
+          <a:effectRef idx="0">
+            <a:schemeClr val="accent1"/>
+          </a:effectRef>
+          <a:fontRef idx="minor">
+            <a:schemeClr val="lt1"/>
+          </a:fontRef>
+        </p:style>
+        <p:txBody>
+          <a:bodyPr rtlCol="0" anchor="ctr"/>
+          <a:lstStyle/>
+          <a:p>
+            <a:pPr algn="ctr"/>
+            <a:endParaRPr lang="en-US" sz="450"/>
+          </a:p>
+        </p:txBody>
+      </p:sp>
+      <p:sp>
+        <p:nvSpPr>
+          <p:cNvPr id="157" name="Rectangle 156"/>
+          <p:cNvSpPr/>
+          <p:nvPr/>
+        </p:nvSpPr>
+        <p:spPr>
+          <a:xfrm>
+            <a:off x="11076549" y="8030404"/>
+            <a:ext cx="228600" cy="1371600"/>
+          </a:xfrm>
+          <a:prstGeom prst="rect">
+            <a:avLst/>
+          </a:prstGeom>
+          <a:ln>
+            <a:solidFill>
+              <a:schemeClr val="tx1"/>
+            </a:solidFill>
+          </a:ln>
+        </p:spPr>
+        <p:style>
+          <a:lnRef idx="2">
+            <a:schemeClr val="accent1">
+              <a:shade val="50000"/>
+            </a:schemeClr>
+          </a:lnRef>
+          <a:fillRef idx="1">
+            <a:schemeClr val="accent1"/>
+          </a:fillRef>
+          <a:effectRef idx="0">
+            <a:schemeClr val="accent1"/>
+          </a:effectRef>
+          <a:fontRef idx="minor">
+            <a:schemeClr val="lt1"/>
+          </a:fontRef>
+        </p:style>
+        <p:txBody>
+          <a:bodyPr vert="vert270" rtlCol="0" anchor="ctr"/>
+          <a:lstStyle/>
+          <a:p>
+            <a:pPr algn="ctr"/>
+            <a:endParaRPr lang="en-US" sz="1200" dirty="0">
+              <a:solidFill>
+                <a:schemeClr val="tx1"/>
+              </a:solidFill>
+            </a:endParaRPr>
+          </a:p>
+        </p:txBody>
+      </p:sp>
+      <p:sp>
+        <p:nvSpPr>
+          <p:cNvPr id="158" name="Rectangle 157"/>
+          <p:cNvSpPr/>
+          <p:nvPr/>
+        </p:nvSpPr>
+        <p:spPr>
+          <a:xfrm>
+            <a:off x="11312013" y="8030404"/>
+            <a:ext cx="228600" cy="1371600"/>
+          </a:xfrm>
+          <a:prstGeom prst="rect">
+            <a:avLst/>
+          </a:prstGeom>
+          <a:solidFill>
+            <a:srgbClr val="FFFF00"/>
+          </a:solidFill>
+          <a:ln>
+            <a:solidFill>
+              <a:schemeClr val="tx1"/>
+            </a:solidFill>
+          </a:ln>
+        </p:spPr>
+        <p:style>
+          <a:lnRef idx="2">
+            <a:schemeClr val="accent1">
+              <a:shade val="50000"/>
+            </a:schemeClr>
+          </a:lnRef>
+          <a:fillRef idx="1">
+            <a:schemeClr val="accent1"/>
+          </a:fillRef>
+          <a:effectRef idx="0">
+            <a:schemeClr val="accent1"/>
+          </a:effectRef>
+          <a:fontRef idx="minor">
+            <a:schemeClr val="lt1"/>
+          </a:fontRef>
+        </p:style>
+        <p:txBody>
+          <a:bodyPr vert="vert270" rtlCol="0" anchor="ctr"/>
+          <a:lstStyle/>
+          <a:p>
+            <a:pPr algn="ctr"/>
+            <a:r>
+              <a:rPr lang="en-US" sz="1200" dirty="0">
+                <a:solidFill>
+                  <a:schemeClr val="tx1"/>
+                </a:solidFill>
+              </a:rPr>
+              <a:t>Elu + BN</a:t>
+            </a:r>
+            <a:endParaRPr lang="en-US" sz="1200" dirty="0">
+              <a:solidFill>
+                <a:schemeClr val="tx1"/>
+              </a:solidFill>
+            </a:endParaRPr>
+          </a:p>
+        </p:txBody>
+      </p:sp>
+      <p:sp>
+        <p:nvSpPr>
+          <p:cNvPr id="159" name="Right Arrow 158"/>
+          <p:cNvSpPr/>
+          <p:nvPr/>
+        </p:nvSpPr>
+        <p:spPr>
+          <a:xfrm>
+            <a:off x="11550138" y="8601904"/>
+            <a:ext cx="228600" cy="228600"/>
+          </a:xfrm>
+          <a:prstGeom prst="rightArrow">
+            <a:avLst/>
+          </a:prstGeom>
+          <a:solidFill>
+            <a:srgbClr val="00B050"/>
+          </a:solidFill>
+          <a:ln>
+            <a:solidFill>
+              <a:schemeClr val="tx1"/>
+            </a:solidFill>
+          </a:ln>
+        </p:spPr>
+        <p:style>
+          <a:lnRef idx="2">
+            <a:schemeClr val="accent1">
+              <a:shade val="50000"/>
+            </a:schemeClr>
+          </a:lnRef>
+          <a:fillRef idx="1">
+            <a:schemeClr val="accent1"/>
+          </a:fillRef>
+          <a:effectRef idx="0">
+            <a:schemeClr val="accent1"/>
+          </a:effectRef>
+          <a:fontRef idx="minor">
+            <a:schemeClr val="lt1"/>
+          </a:fontRef>
+        </p:style>
+        <p:txBody>
+          <a:bodyPr rtlCol="0" anchor="ctr"/>
+          <a:lstStyle/>
+          <a:p>
+            <a:pPr algn="ctr"/>
+            <a:endParaRPr lang="en-US" sz="450"/>
+          </a:p>
+        </p:txBody>
+      </p:sp>
+      <p:sp>
+        <p:nvSpPr>
+          <p:cNvPr id="165" name="Right Arrow 164"/>
+          <p:cNvSpPr/>
+          <p:nvPr/>
+        </p:nvSpPr>
+        <p:spPr>
+          <a:xfrm>
+            <a:off x="12969125" y="8601904"/>
+            <a:ext cx="228600" cy="228600"/>
+          </a:xfrm>
+          <a:prstGeom prst="rightArrow">
+            <a:avLst/>
+          </a:prstGeom>
+          <a:solidFill>
+            <a:srgbClr val="00B0F0"/>
+          </a:solidFill>
+          <a:ln>
+            <a:solidFill>
+              <a:schemeClr val="tx1"/>
+            </a:solidFill>
+          </a:ln>
+        </p:spPr>
+        <p:style>
+          <a:lnRef idx="2">
+            <a:schemeClr val="accent1">
+              <a:shade val="50000"/>
+            </a:schemeClr>
+          </a:lnRef>
+          <a:fillRef idx="1">
+            <a:schemeClr val="accent1"/>
+          </a:fillRef>
+          <a:effectRef idx="0">
+            <a:schemeClr val="accent1"/>
+          </a:effectRef>
+          <a:fontRef idx="minor">
+            <a:schemeClr val="lt1"/>
+          </a:fontRef>
+        </p:style>
+        <p:txBody>
+          <a:bodyPr rtlCol="0" anchor="ctr"/>
+          <a:lstStyle/>
+          <a:p>
+            <a:pPr algn="ctr"/>
+            <a:endParaRPr lang="en-US" sz="450"/>
+          </a:p>
+        </p:txBody>
+      </p:sp>
+      <p:sp>
+        <p:nvSpPr>
+          <p:cNvPr id="166" name="Rectangle 165"/>
+          <p:cNvSpPr/>
+          <p:nvPr/>
+        </p:nvSpPr>
+        <p:spPr>
+          <a:xfrm>
+            <a:off x="13211929" y="8030404"/>
+            <a:ext cx="228600" cy="1371600"/>
+          </a:xfrm>
+          <a:prstGeom prst="rect">
+            <a:avLst/>
+          </a:prstGeom>
+          <a:ln>
+            <a:solidFill>
+              <a:schemeClr val="tx1"/>
+            </a:solidFill>
+          </a:ln>
+        </p:spPr>
+        <p:style>
+          <a:lnRef idx="2">
+            <a:schemeClr val="accent1">
+              <a:shade val="50000"/>
+            </a:schemeClr>
+          </a:lnRef>
+          <a:fillRef idx="1">
+            <a:schemeClr val="accent1"/>
+          </a:fillRef>
+          <a:effectRef idx="0">
+            <a:schemeClr val="accent1"/>
+          </a:effectRef>
+          <a:fontRef idx="minor">
+            <a:schemeClr val="lt1"/>
+          </a:fontRef>
+        </p:style>
+        <p:txBody>
+          <a:bodyPr vert="vert270" rtlCol="0" anchor="ctr"/>
+          <a:lstStyle/>
+          <a:p>
+            <a:pPr algn="ctr"/>
+            <a:endParaRPr lang="en-US" sz="1200" dirty="0">
+              <a:solidFill>
+                <a:schemeClr val="tx1"/>
+              </a:solidFill>
+            </a:endParaRPr>
+          </a:p>
+        </p:txBody>
+      </p:sp>
+      <p:sp>
+        <p:nvSpPr>
+          <p:cNvPr id="167" name="Rectangle 166"/>
+          <p:cNvSpPr/>
+          <p:nvPr/>
+        </p:nvSpPr>
+        <p:spPr>
+          <a:xfrm>
+            <a:off x="13447393" y="8030404"/>
+            <a:ext cx="228600" cy="1371600"/>
+          </a:xfrm>
+          <a:prstGeom prst="rect">
+            <a:avLst/>
+          </a:prstGeom>
+          <a:solidFill>
+            <a:srgbClr val="FFFF00"/>
+          </a:solidFill>
+          <a:ln>
+            <a:solidFill>
+              <a:schemeClr val="tx1"/>
+            </a:solidFill>
+          </a:ln>
+        </p:spPr>
+        <p:style>
+          <a:lnRef idx="2">
+            <a:schemeClr val="accent1">
+              <a:shade val="50000"/>
+            </a:schemeClr>
+          </a:lnRef>
+          <a:fillRef idx="1">
+            <a:schemeClr val="accent1"/>
+          </a:fillRef>
+          <a:effectRef idx="0">
+            <a:schemeClr val="accent1"/>
+          </a:effectRef>
+          <a:fontRef idx="minor">
+            <a:schemeClr val="lt1"/>
+          </a:fontRef>
+        </p:style>
+        <p:txBody>
+          <a:bodyPr vert="vert270" rtlCol="0" anchor="ctr"/>
+          <a:lstStyle/>
+          <a:p>
+            <a:pPr algn="ctr"/>
+            <a:r>
+              <a:rPr lang="en-US" sz="1200" dirty="0">
+                <a:solidFill>
+                  <a:schemeClr val="tx1"/>
+                </a:solidFill>
+              </a:rPr>
+              <a:t>Elu + BN</a:t>
+            </a:r>
+            <a:endParaRPr lang="en-US" sz="1200" dirty="0">
+              <a:solidFill>
+                <a:schemeClr val="tx1"/>
+              </a:solidFill>
+            </a:endParaRPr>
+          </a:p>
+        </p:txBody>
+      </p:sp>
+      <p:sp>
+        <p:nvSpPr>
+          <p:cNvPr id="168" name="Rectangle 167"/>
+          <p:cNvSpPr/>
+          <p:nvPr/>
+        </p:nvSpPr>
+        <p:spPr>
+          <a:xfrm>
+            <a:off x="10602227" y="8030404"/>
+            <a:ext cx="228600" cy="1371600"/>
+          </a:xfrm>
+          <a:prstGeom prst="rect">
+            <a:avLst/>
+          </a:prstGeom>
+          <a:solidFill>
+            <a:srgbClr val="FFFF00"/>
+          </a:solidFill>
+          <a:ln>
+            <a:solidFill>
+              <a:schemeClr val="tx1"/>
+            </a:solidFill>
+          </a:ln>
+        </p:spPr>
+        <p:style>
+          <a:lnRef idx="2">
+            <a:schemeClr val="accent1">
+              <a:shade val="50000"/>
+            </a:schemeClr>
+          </a:lnRef>
+          <a:fillRef idx="1">
+            <a:schemeClr val="accent1"/>
+          </a:fillRef>
+          <a:effectRef idx="0">
+            <a:schemeClr val="accent1"/>
+          </a:effectRef>
+          <a:fontRef idx="minor">
+            <a:schemeClr val="lt1"/>
+          </a:fontRef>
+        </p:style>
+        <p:txBody>
+          <a:bodyPr vert="vert270" rtlCol="0" anchor="ctr"/>
+          <a:lstStyle/>
+          <a:p>
+            <a:pPr algn="ctr"/>
+            <a:r>
+              <a:rPr lang="en-US" sz="1200" dirty="0">
+                <a:solidFill>
+                  <a:schemeClr val="tx1"/>
+                </a:solidFill>
+              </a:rPr>
+              <a:t>Elu + BN</a:t>
+            </a:r>
+            <a:endParaRPr lang="en-US" sz="1200" dirty="0">
+              <a:solidFill>
+                <a:schemeClr val="tx1"/>
+              </a:solidFill>
+            </a:endParaRPr>
+          </a:p>
+        </p:txBody>
+      </p:sp>
+      <p:cxnSp>
+        <p:nvCxnSpPr>
+          <p:cNvPr id="170" name="Curved Connector 169"/>
+          <p:cNvCxnSpPr>
+            <a:stCxn id="108" idx="2"/>
+            <a:endCxn id="110" idx="0"/>
+          </p:cNvCxnSpPr>
+          <p:nvPr/>
+        </p:nvCxnSpPr>
+        <p:spPr>
+          <a:xfrm rot="5400000">
+            <a:off x="6692544" y="8283776"/>
+            <a:ext cx="336363" cy="2572818"/>
+          </a:xfrm>
+          <a:prstGeom prst="curvedConnector3">
+            <a:avLst>
+              <a:gd name="adj1" fmla="val 50000"/>
+            </a:avLst>
+          </a:prstGeom>
+          <a:ln w="34925">
+            <a:solidFill>
+              <a:srgbClr val="C00000"/>
+            </a:solidFill>
+            <a:headEnd type="triangle"/>
+            <a:tailEnd type="triangle"/>
+          </a:ln>
+        </p:spPr>
+        <p:style>
+          <a:lnRef idx="1">
+            <a:schemeClr val="accent1"/>
+          </a:lnRef>
+          <a:fillRef idx="0">
+            <a:schemeClr val="accent1"/>
+          </a:fillRef>
+          <a:effectRef idx="0">
+            <a:schemeClr val="accent1"/>
+          </a:effectRef>
+          <a:fontRef idx="minor">
+            <a:schemeClr val="tx1"/>
+          </a:fontRef>
+        </p:style>
+      </p:cxnSp>
+      <p:sp>
+        <p:nvSpPr>
+          <p:cNvPr id="176" name="Rectangle 175"/>
+          <p:cNvSpPr/>
+          <p:nvPr/>
+        </p:nvSpPr>
+        <p:spPr>
+          <a:xfrm>
+            <a:off x="9888993" y="8030404"/>
+            <a:ext cx="228600" cy="1371600"/>
+          </a:xfrm>
+          <a:prstGeom prst="rect">
+            <a:avLst/>
+          </a:prstGeom>
+          <a:ln>
+            <a:solidFill>
+              <a:schemeClr val="tx1"/>
+            </a:solidFill>
+          </a:ln>
+        </p:spPr>
+        <p:style>
+          <a:lnRef idx="2">
+            <a:schemeClr val="accent1">
+              <a:shade val="50000"/>
+            </a:schemeClr>
+          </a:lnRef>
+          <a:fillRef idx="1">
+            <a:schemeClr val="accent1"/>
+          </a:fillRef>
+          <a:effectRef idx="0">
+            <a:schemeClr val="accent1"/>
+          </a:effectRef>
+          <a:fontRef idx="minor">
+            <a:schemeClr val="lt1"/>
+          </a:fontRef>
+        </p:style>
+        <p:txBody>
+          <a:bodyPr vert="vert270" rtlCol="0" anchor="ctr"/>
+          <a:lstStyle/>
+          <a:p>
+            <a:pPr algn="ctr"/>
+            <a:endParaRPr lang="en-US" sz="1200" dirty="0">
+              <a:solidFill>
+                <a:schemeClr val="tx1"/>
+              </a:solidFill>
+            </a:endParaRPr>
+          </a:p>
+        </p:txBody>
+      </p:sp>
+      <p:sp>
+        <p:nvSpPr>
+          <p:cNvPr id="180" name="Rectangle 179"/>
+          <p:cNvSpPr/>
+          <p:nvPr/>
+        </p:nvSpPr>
+        <p:spPr>
+          <a:xfrm>
+            <a:off x="10128377" y="8030404"/>
+            <a:ext cx="228600" cy="1371600"/>
+          </a:xfrm>
+          <a:prstGeom prst="rect">
+            <a:avLst/>
+          </a:prstGeom>
+          <a:ln>
+            <a:solidFill>
+              <a:schemeClr val="tx1"/>
+            </a:solidFill>
+          </a:ln>
+        </p:spPr>
+        <p:style>
+          <a:lnRef idx="2">
+            <a:schemeClr val="accent1">
+              <a:shade val="50000"/>
+            </a:schemeClr>
+          </a:lnRef>
+          <a:fillRef idx="1">
+            <a:schemeClr val="accent1"/>
+          </a:fillRef>
+          <a:effectRef idx="0">
+            <a:schemeClr val="accent1"/>
+          </a:effectRef>
+          <a:fontRef idx="minor">
+            <a:schemeClr val="lt1"/>
+          </a:fontRef>
+        </p:style>
+        <p:txBody>
+          <a:bodyPr vert="vert270" rtlCol="0" anchor="ctr"/>
+          <a:lstStyle/>
+          <a:p>
+            <a:pPr algn="ctr"/>
+            <a:endParaRPr lang="en-US" sz="1200" dirty="0">
+              <a:solidFill>
+                <a:schemeClr val="tx1"/>
+              </a:solidFill>
+            </a:endParaRPr>
+          </a:p>
+        </p:txBody>
+      </p:sp>
+      <p:sp>
+        <p:nvSpPr>
+          <p:cNvPr id="181" name="Rectangle 180"/>
+          <p:cNvSpPr/>
+          <p:nvPr/>
+        </p:nvSpPr>
+        <p:spPr>
+          <a:xfrm>
+            <a:off x="11783164" y="8030404"/>
+            <a:ext cx="228600" cy="1371600"/>
+          </a:xfrm>
+          <a:prstGeom prst="rect">
+            <a:avLst/>
+          </a:prstGeom>
+          <a:ln>
+            <a:solidFill>
+              <a:schemeClr val="tx1"/>
+            </a:solidFill>
+          </a:ln>
+        </p:spPr>
+        <p:style>
+          <a:lnRef idx="2">
+            <a:schemeClr val="accent1">
+              <a:shade val="50000"/>
+            </a:schemeClr>
+          </a:lnRef>
+          <a:fillRef idx="1">
+            <a:schemeClr val="accent1"/>
+          </a:fillRef>
+          <a:effectRef idx="0">
+            <a:schemeClr val="accent1"/>
+          </a:effectRef>
+          <a:fontRef idx="minor">
+            <a:schemeClr val="lt1"/>
+          </a:fontRef>
+        </p:style>
+        <p:txBody>
+          <a:bodyPr vert="vert270" rtlCol="0" anchor="ctr"/>
+          <a:lstStyle/>
+          <a:p>
+            <a:pPr algn="ctr"/>
+            <a:endParaRPr lang="en-US" sz="1200" dirty="0">
+              <a:solidFill>
+                <a:schemeClr val="tx1"/>
+              </a:solidFill>
+            </a:endParaRPr>
+          </a:p>
+        </p:txBody>
+      </p:sp>
+      <p:sp>
+        <p:nvSpPr>
+          <p:cNvPr id="182" name="Rectangle 181"/>
+          <p:cNvSpPr/>
+          <p:nvPr/>
+        </p:nvSpPr>
+        <p:spPr>
+          <a:xfrm>
+            <a:off x="12016952" y="8030404"/>
+            <a:ext cx="228600" cy="1371600"/>
+          </a:xfrm>
+          <a:prstGeom prst="rect">
+            <a:avLst/>
+          </a:prstGeom>
+          <a:ln>
+            <a:solidFill>
+              <a:schemeClr val="tx1"/>
+            </a:solidFill>
+          </a:ln>
+        </p:spPr>
+        <p:style>
+          <a:lnRef idx="2">
+            <a:schemeClr val="accent1">
+              <a:shade val="50000"/>
+            </a:schemeClr>
+          </a:lnRef>
+          <a:fillRef idx="1">
+            <a:schemeClr val="accent1"/>
+          </a:fillRef>
+          <a:effectRef idx="0">
+            <a:schemeClr val="accent1"/>
+          </a:effectRef>
+          <a:fontRef idx="minor">
+            <a:schemeClr val="lt1"/>
+          </a:fontRef>
+        </p:style>
+        <p:txBody>
+          <a:bodyPr vert="vert270" rtlCol="0" anchor="ctr"/>
+          <a:lstStyle/>
+          <a:p>
+            <a:pPr algn="ctr"/>
+            <a:endParaRPr lang="en-US" sz="1200" dirty="0">
+              <a:solidFill>
+                <a:schemeClr val="tx1"/>
+              </a:solidFill>
+            </a:endParaRPr>
+          </a:p>
+        </p:txBody>
+      </p:sp>
+      <p:sp>
+        <p:nvSpPr>
+          <p:cNvPr id="183" name="Rectangle 182"/>
+          <p:cNvSpPr/>
+          <p:nvPr/>
+        </p:nvSpPr>
+        <p:spPr>
+          <a:xfrm>
+            <a:off x="12255869" y="8030404"/>
+            <a:ext cx="228600" cy="1371600"/>
+          </a:xfrm>
+          <a:prstGeom prst="rect">
+            <a:avLst/>
+          </a:prstGeom>
+          <a:ln>
+            <a:solidFill>
+              <a:schemeClr val="tx1"/>
+            </a:solidFill>
+          </a:ln>
+        </p:spPr>
+        <p:style>
+          <a:lnRef idx="2">
+            <a:schemeClr val="accent1">
+              <a:shade val="50000"/>
+            </a:schemeClr>
+          </a:lnRef>
+          <a:fillRef idx="1">
+            <a:schemeClr val="accent1"/>
+          </a:fillRef>
+          <a:effectRef idx="0">
+            <a:schemeClr val="accent1"/>
+          </a:effectRef>
+          <a:fontRef idx="minor">
+            <a:schemeClr val="lt1"/>
+          </a:fontRef>
+        </p:style>
+        <p:txBody>
+          <a:bodyPr vert="vert270" rtlCol="0" anchor="ctr"/>
+          <a:lstStyle/>
+          <a:p>
+            <a:pPr algn="ctr"/>
+            <a:endParaRPr lang="en-US" sz="1200" dirty="0">
+              <a:solidFill>
+                <a:schemeClr val="tx1"/>
+              </a:solidFill>
+            </a:endParaRPr>
+          </a:p>
+        </p:txBody>
+      </p:sp>
+      <p:sp>
+        <p:nvSpPr>
+          <p:cNvPr id="184" name="Rectangle 183"/>
+          <p:cNvSpPr/>
+          <p:nvPr/>
+        </p:nvSpPr>
+        <p:spPr>
+          <a:xfrm>
+            <a:off x="12493994" y="8030404"/>
+            <a:ext cx="228600" cy="1371600"/>
+          </a:xfrm>
+          <a:prstGeom prst="rect">
+            <a:avLst/>
+          </a:prstGeom>
+          <a:ln>
+            <a:solidFill>
+              <a:schemeClr val="tx1"/>
+            </a:solidFill>
+          </a:ln>
+        </p:spPr>
+        <p:style>
+          <a:lnRef idx="2">
+            <a:schemeClr val="accent1">
+              <a:shade val="50000"/>
+            </a:schemeClr>
+          </a:lnRef>
+          <a:fillRef idx="1">
+            <a:schemeClr val="accent1"/>
+          </a:fillRef>
+          <a:effectRef idx="0">
+            <a:schemeClr val="accent1"/>
+          </a:effectRef>
+          <a:fontRef idx="minor">
+            <a:schemeClr val="lt1"/>
+          </a:fontRef>
+        </p:style>
+        <p:txBody>
+          <a:bodyPr vert="vert270" rtlCol="0" anchor="ctr"/>
+          <a:lstStyle/>
+          <a:p>
+            <a:pPr algn="ctr"/>
+            <a:endParaRPr lang="en-US" sz="1200" dirty="0">
+              <a:solidFill>
+                <a:schemeClr val="tx1"/>
+              </a:solidFill>
+            </a:endParaRPr>
+          </a:p>
+        </p:txBody>
+      </p:sp>
+      <p:sp>
+        <p:nvSpPr>
+          <p:cNvPr id="185" name="Rectangle 184"/>
+          <p:cNvSpPr/>
+          <p:nvPr/>
+        </p:nvSpPr>
+        <p:spPr>
+          <a:xfrm>
+            <a:off x="12732422" y="8030404"/>
+            <a:ext cx="228600" cy="1371600"/>
+          </a:xfrm>
+          <a:prstGeom prst="rect">
+            <a:avLst/>
+          </a:prstGeom>
+          <a:ln>
+            <a:solidFill>
+              <a:schemeClr val="tx1"/>
+            </a:solidFill>
+          </a:ln>
+        </p:spPr>
+        <p:style>
+          <a:lnRef idx="2">
+            <a:schemeClr val="accent1">
+              <a:shade val="50000"/>
+            </a:schemeClr>
+          </a:lnRef>
+          <a:fillRef idx="1">
+            <a:schemeClr val="accent1"/>
+          </a:fillRef>
+          <a:effectRef idx="0">
+            <a:schemeClr val="accent1"/>
+          </a:effectRef>
+          <a:fontRef idx="minor">
+            <a:schemeClr val="lt1"/>
+          </a:fontRef>
+        </p:style>
+        <p:txBody>
+          <a:bodyPr vert="vert270" rtlCol="0" anchor="ctr"/>
+          <a:lstStyle/>
+          <a:p>
+            <a:pPr algn="ctr"/>
+            <a:endParaRPr lang="en-US" sz="1200" dirty="0">
+              <a:solidFill>
+                <a:schemeClr val="tx1"/>
+              </a:solidFill>
+            </a:endParaRPr>
+          </a:p>
+        </p:txBody>
+      </p:sp>
+      <p:sp>
+        <p:nvSpPr>
+          <p:cNvPr id="188" name="Rectangle 187"/>
+          <p:cNvSpPr/>
+          <p:nvPr/>
+        </p:nvSpPr>
+        <p:spPr>
+          <a:xfrm>
+            <a:off x="10367761" y="8030404"/>
+            <a:ext cx="228600" cy="1371600"/>
+          </a:xfrm>
+          <a:prstGeom prst="rect">
+            <a:avLst/>
+          </a:prstGeom>
+          <a:ln>
+            <a:solidFill>
+              <a:schemeClr val="tx1"/>
+            </a:solidFill>
+          </a:ln>
+        </p:spPr>
+        <p:style>
+          <a:lnRef idx="2">
+            <a:schemeClr val="accent1">
+              <a:shade val="50000"/>
+            </a:schemeClr>
+          </a:lnRef>
+          <a:fillRef idx="1">
+            <a:schemeClr val="accent1"/>
+          </a:fillRef>
+          <a:effectRef idx="0">
+            <a:schemeClr val="accent1"/>
+          </a:effectRef>
+          <a:fontRef idx="minor">
+            <a:schemeClr val="lt1"/>
+          </a:fontRef>
+        </p:style>
+        <p:txBody>
+          <a:bodyPr vert="vert270" rtlCol="0" anchor="ctr"/>
+          <a:lstStyle/>
+          <a:p>
+            <a:pPr algn="ctr"/>
+            <a:endParaRPr lang="en-US" sz="1200" dirty="0">
+              <a:solidFill>
+                <a:schemeClr val="tx1"/>
+              </a:solidFill>
+            </a:endParaRPr>
+          </a:p>
+        </p:txBody>
+      </p:sp>
+      <p:sp>
+        <p:nvSpPr>
+          <p:cNvPr id="192" name="Right Arrow 191"/>
+          <p:cNvSpPr/>
+          <p:nvPr/>
+        </p:nvSpPr>
+        <p:spPr>
+          <a:xfrm>
+            <a:off x="13683080" y="8601904"/>
+            <a:ext cx="228600" cy="228600"/>
+          </a:xfrm>
+          <a:prstGeom prst="rightArrow">
+            <a:avLst/>
+          </a:prstGeom>
+          <a:solidFill>
+            <a:srgbClr val="00B0F0"/>
+          </a:solidFill>
+          <a:ln>
+            <a:solidFill>
+              <a:schemeClr val="tx1"/>
+            </a:solidFill>
+          </a:ln>
+        </p:spPr>
+        <p:style>
+          <a:lnRef idx="2">
+            <a:schemeClr val="accent1">
+              <a:shade val="50000"/>
+            </a:schemeClr>
+          </a:lnRef>
+          <a:fillRef idx="1">
+            <a:schemeClr val="accent1"/>
+          </a:fillRef>
+          <a:effectRef idx="0">
+            <a:schemeClr val="accent1"/>
+          </a:effectRef>
+          <a:fontRef idx="minor">
+            <a:schemeClr val="lt1"/>
+          </a:fontRef>
+        </p:style>
+        <p:txBody>
+          <a:bodyPr rtlCol="0" anchor="ctr"/>
+          <a:lstStyle/>
+          <a:p>
+            <a:pPr algn="ctr"/>
+            <a:endParaRPr lang="en-US" sz="450"/>
+          </a:p>
+        </p:txBody>
+      </p:sp>
+      <p:sp>
+        <p:nvSpPr>
+          <p:cNvPr id="193" name="Rectangle 192"/>
+          <p:cNvSpPr/>
+          <p:nvPr/>
+        </p:nvSpPr>
+        <p:spPr>
+          <a:xfrm>
+            <a:off x="13925884" y="8030404"/>
+            <a:ext cx="228600" cy="1371600"/>
+          </a:xfrm>
+          <a:prstGeom prst="rect">
+            <a:avLst/>
+          </a:prstGeom>
+          <a:ln>
+            <a:solidFill>
+              <a:schemeClr val="tx1"/>
+            </a:solidFill>
+          </a:ln>
+        </p:spPr>
+        <p:style>
+          <a:lnRef idx="2">
+            <a:schemeClr val="accent1">
+              <a:shade val="50000"/>
+            </a:schemeClr>
+          </a:lnRef>
+          <a:fillRef idx="1">
+            <a:schemeClr val="accent1"/>
+          </a:fillRef>
+          <a:effectRef idx="0">
+            <a:schemeClr val="accent1"/>
+          </a:effectRef>
+          <a:fontRef idx="minor">
+            <a:schemeClr val="lt1"/>
+          </a:fontRef>
+        </p:style>
+        <p:txBody>
+          <a:bodyPr vert="vert270" rtlCol="0" anchor="ctr"/>
+          <a:lstStyle/>
+          <a:p>
+            <a:pPr algn="ctr"/>
+            <a:endParaRPr lang="en-US" sz="1200" dirty="0">
+              <a:solidFill>
+                <a:schemeClr val="tx1"/>
+              </a:solidFill>
+            </a:endParaRPr>
+          </a:p>
+        </p:txBody>
+      </p:sp>
+      <p:sp>
+        <p:nvSpPr>
+          <p:cNvPr id="194" name="Rectangle 193"/>
+          <p:cNvSpPr/>
+          <p:nvPr/>
+        </p:nvSpPr>
+        <p:spPr>
+          <a:xfrm>
+            <a:off x="14161348" y="8030404"/>
+            <a:ext cx="228600" cy="1371600"/>
+          </a:xfrm>
+          <a:prstGeom prst="rect">
+            <a:avLst/>
+          </a:prstGeom>
+          <a:solidFill>
+            <a:srgbClr val="FFFF00"/>
+          </a:solidFill>
+          <a:ln>
+            <a:solidFill>
+              <a:schemeClr val="tx1"/>
+            </a:solidFill>
+          </a:ln>
+        </p:spPr>
+        <p:style>
+          <a:lnRef idx="2">
+            <a:schemeClr val="accent1">
+              <a:shade val="50000"/>
+            </a:schemeClr>
+          </a:lnRef>
+          <a:fillRef idx="1">
+            <a:schemeClr val="accent1"/>
+          </a:fillRef>
+          <a:effectRef idx="0">
+            <a:schemeClr val="accent1"/>
+          </a:effectRef>
+          <a:fontRef idx="minor">
+            <a:schemeClr val="lt1"/>
+          </a:fontRef>
+        </p:style>
+        <p:txBody>
+          <a:bodyPr vert="vert270" rtlCol="0" anchor="ctr"/>
+          <a:lstStyle/>
+          <a:p>
+            <a:pPr algn="ctr"/>
+            <a:r>
+              <a:rPr lang="en-US" sz="1200" dirty="0" err="1" smtClean="0">
+                <a:solidFill>
+                  <a:schemeClr val="tx1"/>
+                </a:solidFill>
+              </a:rPr>
+              <a:t>Softmax</a:t>
+            </a:r>
+            <a:endParaRPr lang="en-US" sz="1200" dirty="0">
+              <a:solidFill>
+                <a:schemeClr val="tx1"/>
+              </a:solidFill>
+            </a:endParaRPr>
+          </a:p>
+        </p:txBody>
+      </p:sp>
+      <p:sp>
+        <p:nvSpPr>
+          <p:cNvPr id="199" name="Curved Down Arrow 198"/>
+          <p:cNvSpPr/>
+          <p:nvPr/>
+        </p:nvSpPr>
+        <p:spPr>
+          <a:xfrm>
+            <a:off x="11523690" y="11749968"/>
+            <a:ext cx="497599" cy="365760"/>
+          </a:xfrm>
+          <a:prstGeom prst="curvedDownArrow">
+            <a:avLst/>
+          </a:prstGeom>
+          <a:ln>
+            <a:solidFill>
+              <a:schemeClr val="tx1"/>
+            </a:solidFill>
+          </a:ln>
+        </p:spPr>
+        <p:style>
+          <a:lnRef idx="2">
+            <a:schemeClr val="accent1">
+              <a:shade val="50000"/>
+            </a:schemeClr>
+          </a:lnRef>
+          <a:fillRef idx="1">
+            <a:schemeClr val="accent1"/>
+          </a:fillRef>
+          <a:effectRef idx="0">
+            <a:schemeClr val="accent1"/>
+          </a:effectRef>
+          <a:fontRef idx="minor">
+            <a:schemeClr val="lt1"/>
+          </a:fontRef>
+        </p:style>
+        <p:txBody>
+          <a:bodyPr rot="0" spcFirstLastPara="0" vertOverflow="overflow" horzOverflow="overflow" vert="horz" wrap="square" lIns="45720" tIns="22860" rIns="45720" bIns="22860" numCol="1" spcCol="0" rtlCol="0" fromWordArt="0" anchor="ctr" anchorCtr="0" forceAA="0" compatLnSpc="1">
+            <a:prstTxWarp prst="textNoShape">
+              <a:avLst/>
+            </a:prstTxWarp>
+            <a:noAutofit/>
+          </a:bodyPr>
+          <a:lstStyle/>
+          <a:p>
+            <a:pPr algn="ctr"/>
+            <a:endParaRPr lang="en-US" sz="450">
+              <a:solidFill>
+                <a:schemeClr val="tx1"/>
+              </a:solidFill>
+            </a:endParaRPr>
+          </a:p>
+        </p:txBody>
+      </p:sp>
+      <p:sp>
+        <p:nvSpPr>
+          <p:cNvPr id="200" name="TextBox 199"/>
+          <p:cNvSpPr txBox="1"/>
+          <p:nvPr/>
+        </p:nvSpPr>
+        <p:spPr>
+          <a:xfrm>
+            <a:off x="12117258" y="11694697"/>
+            <a:ext cx="1701107" cy="400110"/>
+          </a:xfrm>
+          <a:prstGeom prst="rect">
+            <a:avLst/>
+          </a:prstGeom>
+          <a:noFill/>
+        </p:spPr>
+        <p:txBody>
+          <a:bodyPr wrap="none" rtlCol="0">
+            <a:spAutoFit/>
+          </a:bodyPr>
+          <a:lstStyle/>
+          <a:p>
+            <a:r>
+              <a:rPr lang="en-US" sz="2000" dirty="0" smtClean="0"/>
+              <a:t>Concatenation</a:t>
+            </a:r>
+            <a:endParaRPr lang="en-US" sz="2000" dirty="0"/>
+          </a:p>
+        </p:txBody>
+      </p:sp>
+      <p:sp>
+        <p:nvSpPr>
+          <p:cNvPr id="191" name="Curved Down Arrow 190"/>
+          <p:cNvSpPr/>
+          <p:nvPr/>
+        </p:nvSpPr>
+        <p:spPr>
+          <a:xfrm>
+            <a:off x="8757170" y="7650872"/>
+            <a:ext cx="4284673" cy="365760"/>
+          </a:xfrm>
+          <a:prstGeom prst="curvedDownArrow">
+            <a:avLst/>
+          </a:prstGeom>
+          <a:ln>
+            <a:solidFill>
+              <a:schemeClr val="tx1"/>
+            </a:solidFill>
+          </a:ln>
+        </p:spPr>
+        <p:style>
+          <a:lnRef idx="2">
+            <a:schemeClr val="accent1">
+              <a:shade val="50000"/>
+            </a:schemeClr>
+          </a:lnRef>
+          <a:fillRef idx="1">
+            <a:schemeClr val="accent1"/>
+          </a:fillRef>
+          <a:effectRef idx="0">
+            <a:schemeClr val="accent1"/>
+          </a:effectRef>
+          <a:fontRef idx="minor">
+            <a:schemeClr val="lt1"/>
+          </a:fontRef>
+        </p:style>
+        <p:txBody>
+          <a:bodyPr rot="0" spcFirstLastPara="0" vertOverflow="overflow" horzOverflow="overflow" vert="horz" wrap="square" lIns="45720" tIns="22860" rIns="45720" bIns="22860" numCol="1" spcCol="0" rtlCol="0" fromWordArt="0" anchor="ctr" anchorCtr="0" forceAA="0" compatLnSpc="1">
+            <a:prstTxWarp prst="textNoShape">
+              <a:avLst/>
+            </a:prstTxWarp>
+            <a:noAutofit/>
+          </a:bodyPr>
+          <a:lstStyle/>
+          <a:p>
+            <a:pPr algn="ctr"/>
+            <a:endParaRPr lang="en-US" sz="450">
+              <a:solidFill>
+                <a:schemeClr val="tx1"/>
+              </a:solidFill>
+            </a:endParaRPr>
+          </a:p>
+        </p:txBody>
+      </p:sp>
+      <p:sp>
+        <p:nvSpPr>
+          <p:cNvPr id="190" name="Curved Down Arrow 189"/>
+          <p:cNvSpPr/>
+          <p:nvPr/>
+        </p:nvSpPr>
+        <p:spPr>
+          <a:xfrm>
+            <a:off x="6925006" y="7564211"/>
+            <a:ext cx="5849615" cy="457200"/>
+          </a:xfrm>
+          <a:prstGeom prst="curvedDownArrow">
+            <a:avLst/>
+          </a:prstGeom>
+          <a:ln>
+            <a:solidFill>
+              <a:schemeClr val="tx1"/>
+            </a:solidFill>
+          </a:ln>
+        </p:spPr>
+        <p:style>
+          <a:lnRef idx="2">
+            <a:schemeClr val="accent1">
+              <a:shade val="50000"/>
+            </a:schemeClr>
+          </a:lnRef>
+          <a:fillRef idx="1">
+            <a:schemeClr val="accent1"/>
+          </a:fillRef>
+          <a:effectRef idx="0">
+            <a:schemeClr val="accent1"/>
+          </a:effectRef>
+          <a:fontRef idx="minor">
+            <a:schemeClr val="lt1"/>
+          </a:fontRef>
+        </p:style>
+        <p:txBody>
+          <a:bodyPr rot="0" spcFirstLastPara="0" vertOverflow="overflow" horzOverflow="overflow" vert="horz" wrap="square" lIns="45720" tIns="22860" rIns="45720" bIns="22860" numCol="1" spcCol="0" rtlCol="0" fromWordArt="0" anchor="ctr" anchorCtr="0" forceAA="0" compatLnSpc="1">
+            <a:prstTxWarp prst="textNoShape">
+              <a:avLst/>
+            </a:prstTxWarp>
+            <a:noAutofit/>
+          </a:bodyPr>
+          <a:lstStyle/>
+          <a:p>
+            <a:pPr algn="ctr"/>
+            <a:endParaRPr lang="en-US" sz="450">
+              <a:solidFill>
+                <a:schemeClr val="tx1"/>
+              </a:solidFill>
+            </a:endParaRPr>
+          </a:p>
+        </p:txBody>
+      </p:sp>
+      <p:sp>
+        <p:nvSpPr>
+          <p:cNvPr id="187" name="Curved Down Arrow 186"/>
+          <p:cNvSpPr/>
+          <p:nvPr/>
+        </p:nvSpPr>
+        <p:spPr>
+          <a:xfrm>
+            <a:off x="5296119" y="7480212"/>
+            <a:ext cx="7249902" cy="548640"/>
+          </a:xfrm>
+          <a:prstGeom prst="curvedDownArrow">
+            <a:avLst/>
+          </a:prstGeom>
+          <a:ln>
+            <a:solidFill>
+              <a:schemeClr val="tx1"/>
+            </a:solidFill>
+          </a:ln>
+        </p:spPr>
+        <p:style>
+          <a:lnRef idx="2">
+            <a:schemeClr val="accent1">
+              <a:shade val="50000"/>
+            </a:schemeClr>
+          </a:lnRef>
+          <a:fillRef idx="1">
+            <a:schemeClr val="accent1"/>
+          </a:fillRef>
+          <a:effectRef idx="0">
+            <a:schemeClr val="accent1"/>
+          </a:effectRef>
+          <a:fontRef idx="minor">
+            <a:schemeClr val="lt1"/>
+          </a:fontRef>
+        </p:style>
+        <p:txBody>
+          <a:bodyPr rot="0" spcFirstLastPara="0" vertOverflow="overflow" horzOverflow="overflow" vert="horz" wrap="square" lIns="45720" tIns="22860" rIns="45720" bIns="22860" numCol="1" spcCol="0" rtlCol="0" fromWordArt="0" anchor="ctr" anchorCtr="0" forceAA="0" compatLnSpc="1">
+            <a:prstTxWarp prst="textNoShape">
+              <a:avLst/>
+            </a:prstTxWarp>
+            <a:noAutofit/>
+          </a:bodyPr>
+          <a:lstStyle/>
+          <a:p>
+            <a:pPr algn="ctr"/>
+            <a:endParaRPr lang="en-US" sz="450">
+              <a:solidFill>
+                <a:schemeClr val="tx1"/>
+              </a:solidFill>
+            </a:endParaRPr>
+          </a:p>
+        </p:txBody>
+      </p:sp>
+      <p:sp>
+        <p:nvSpPr>
+          <p:cNvPr id="186" name="Curved Down Arrow 185"/>
+          <p:cNvSpPr/>
+          <p:nvPr/>
+        </p:nvSpPr>
+        <p:spPr>
+          <a:xfrm>
+            <a:off x="4597659" y="7392274"/>
+            <a:ext cx="7709934" cy="640080"/>
+          </a:xfrm>
+          <a:prstGeom prst="curvedDownArrow">
+            <a:avLst/>
+          </a:prstGeom>
+          <a:ln>
+            <a:solidFill>
+              <a:schemeClr val="tx1"/>
+            </a:solidFill>
+          </a:ln>
+        </p:spPr>
+        <p:style>
+          <a:lnRef idx="2">
+            <a:schemeClr val="accent1">
+              <a:shade val="50000"/>
+            </a:schemeClr>
+          </a:lnRef>
+          <a:fillRef idx="1">
+            <a:schemeClr val="accent1"/>
+          </a:fillRef>
+          <a:effectRef idx="0">
+            <a:schemeClr val="accent1"/>
+          </a:effectRef>
+          <a:fontRef idx="minor">
+            <a:schemeClr val="lt1"/>
+          </a:fontRef>
+        </p:style>
+        <p:txBody>
+          <a:bodyPr rot="0" spcFirstLastPara="0" vertOverflow="overflow" horzOverflow="overflow" vert="horz" wrap="square" lIns="45720" tIns="22860" rIns="45720" bIns="22860" numCol="1" spcCol="0" rtlCol="0" fromWordArt="0" anchor="ctr" anchorCtr="0" forceAA="0" compatLnSpc="1">
+            <a:prstTxWarp prst="textNoShape">
+              <a:avLst/>
+            </a:prstTxWarp>
+            <a:noAutofit/>
+          </a:bodyPr>
+          <a:lstStyle/>
+          <a:p>
+            <a:pPr algn="ctr"/>
+            <a:endParaRPr lang="en-US" sz="450">
+              <a:solidFill>
+                <a:schemeClr val="tx1"/>
+              </a:solidFill>
+            </a:endParaRPr>
+          </a:p>
+        </p:txBody>
+      </p:sp>
+      <p:sp>
+        <p:nvSpPr>
+          <p:cNvPr id="179" name="Curved Down Arrow 178"/>
+          <p:cNvSpPr/>
+          <p:nvPr/>
+        </p:nvSpPr>
+        <p:spPr>
+          <a:xfrm>
+            <a:off x="8758008" y="7641696"/>
+            <a:ext cx="1859923" cy="365760"/>
+          </a:xfrm>
+          <a:prstGeom prst="curvedDownArrow">
+            <a:avLst/>
+          </a:prstGeom>
+          <a:ln>
+            <a:solidFill>
+              <a:schemeClr val="tx1"/>
+            </a:solidFill>
+          </a:ln>
+        </p:spPr>
+        <p:style>
+          <a:lnRef idx="2">
+            <a:schemeClr val="accent1">
+              <a:shade val="50000"/>
+            </a:schemeClr>
+          </a:lnRef>
+          <a:fillRef idx="1">
+            <a:schemeClr val="accent1"/>
+          </a:fillRef>
+          <a:effectRef idx="0">
+            <a:schemeClr val="accent1"/>
+          </a:effectRef>
+          <a:fontRef idx="minor">
+            <a:schemeClr val="lt1"/>
+          </a:fontRef>
+        </p:style>
+        <p:txBody>
+          <a:bodyPr rot="0" spcFirstLastPara="0" vertOverflow="overflow" horzOverflow="overflow" vert="horz" wrap="square" lIns="45720" tIns="22860" rIns="45720" bIns="22860" numCol="1" spcCol="0" rtlCol="0" fromWordArt="0" anchor="ctr" anchorCtr="0" forceAA="0" compatLnSpc="1">
+            <a:prstTxWarp prst="textNoShape">
+              <a:avLst/>
+            </a:prstTxWarp>
+            <a:noAutofit/>
+          </a:bodyPr>
+          <a:lstStyle/>
+          <a:p>
+            <a:pPr algn="ctr"/>
+            <a:endParaRPr lang="en-US" sz="450">
+              <a:solidFill>
+                <a:schemeClr val="tx1"/>
+              </a:solidFill>
+            </a:endParaRPr>
+          </a:p>
+        </p:txBody>
+      </p:sp>
+      <p:sp>
+        <p:nvSpPr>
+          <p:cNvPr id="189" name="Curved Down Arrow 188"/>
+          <p:cNvSpPr/>
+          <p:nvPr/>
+        </p:nvSpPr>
+        <p:spPr>
+          <a:xfrm>
+            <a:off x="6925080" y="7567633"/>
+            <a:ext cx="3450673" cy="457200"/>
+          </a:xfrm>
+          <a:prstGeom prst="curvedDownArrow">
+            <a:avLst/>
+          </a:prstGeom>
+          <a:ln>
+            <a:solidFill>
+              <a:schemeClr val="tx1"/>
+            </a:solidFill>
+          </a:ln>
+        </p:spPr>
+        <p:style>
+          <a:lnRef idx="2">
+            <a:schemeClr val="accent1">
+              <a:shade val="50000"/>
+            </a:schemeClr>
+          </a:lnRef>
+          <a:fillRef idx="1">
+            <a:schemeClr val="accent1"/>
+          </a:fillRef>
+          <a:effectRef idx="0">
+            <a:schemeClr val="accent1"/>
+          </a:effectRef>
+          <a:fontRef idx="minor">
+            <a:schemeClr val="lt1"/>
+          </a:fontRef>
+        </p:style>
+        <p:txBody>
+          <a:bodyPr rot="0" spcFirstLastPara="0" vertOverflow="overflow" horzOverflow="overflow" vert="horz" wrap="square" lIns="45720" tIns="22860" rIns="45720" bIns="22860" numCol="1" spcCol="0" rtlCol="0" fromWordArt="0" anchor="ctr" anchorCtr="0" forceAA="0" compatLnSpc="1">
+            <a:prstTxWarp prst="textNoShape">
+              <a:avLst/>
+            </a:prstTxWarp>
+            <a:noAutofit/>
+          </a:bodyPr>
+          <a:lstStyle/>
+          <a:p>
+            <a:pPr algn="ctr"/>
+            <a:endParaRPr lang="en-US" sz="450">
+              <a:solidFill>
+                <a:schemeClr val="tx1"/>
+              </a:solidFill>
+            </a:endParaRPr>
+          </a:p>
+        </p:txBody>
+      </p:sp>
+      <p:sp>
+        <p:nvSpPr>
+          <p:cNvPr id="178" name="Curved Down Arrow 177"/>
+          <p:cNvSpPr/>
+          <p:nvPr/>
+        </p:nvSpPr>
+        <p:spPr>
+          <a:xfrm>
+            <a:off x="5296119" y="7479467"/>
+            <a:ext cx="4845168" cy="548640"/>
+          </a:xfrm>
+          <a:prstGeom prst="curvedDownArrow">
+            <a:avLst/>
+          </a:prstGeom>
+          <a:ln>
+            <a:solidFill>
+              <a:schemeClr val="tx1"/>
+            </a:solidFill>
+          </a:ln>
+        </p:spPr>
+        <p:style>
+          <a:lnRef idx="2">
+            <a:schemeClr val="accent1">
+              <a:shade val="50000"/>
+            </a:schemeClr>
+          </a:lnRef>
+          <a:fillRef idx="1">
+            <a:schemeClr val="accent1"/>
+          </a:fillRef>
+          <a:effectRef idx="0">
+            <a:schemeClr val="accent1"/>
+          </a:effectRef>
+          <a:fontRef idx="minor">
+            <a:schemeClr val="lt1"/>
+          </a:fontRef>
+        </p:style>
+        <p:txBody>
+          <a:bodyPr rot="0" spcFirstLastPara="0" vertOverflow="overflow" horzOverflow="overflow" vert="horz" wrap="square" lIns="45720" tIns="22860" rIns="45720" bIns="22860" numCol="1" spcCol="0" rtlCol="0" fromWordArt="0" anchor="ctr" anchorCtr="0" forceAA="0" compatLnSpc="1">
+            <a:prstTxWarp prst="textNoShape">
+              <a:avLst/>
+            </a:prstTxWarp>
+            <a:noAutofit/>
+          </a:bodyPr>
+          <a:lstStyle/>
+          <a:p>
+            <a:pPr algn="ctr"/>
+            <a:endParaRPr lang="en-US" sz="450">
+              <a:solidFill>
+                <a:schemeClr val="tx1"/>
+              </a:solidFill>
+            </a:endParaRPr>
+          </a:p>
+        </p:txBody>
+      </p:sp>
+      <p:sp>
+        <p:nvSpPr>
+          <p:cNvPr id="177" name="Curved Down Arrow 176"/>
+          <p:cNvSpPr/>
+          <p:nvPr/>
+        </p:nvSpPr>
+        <p:spPr>
+          <a:xfrm>
+            <a:off x="4598650" y="7392274"/>
+            <a:ext cx="5326635" cy="640080"/>
+          </a:xfrm>
+          <a:prstGeom prst="curvedDownArrow">
+            <a:avLst/>
+          </a:prstGeom>
+          <a:ln>
+            <a:solidFill>
+              <a:schemeClr val="tx1"/>
+            </a:solidFill>
+          </a:ln>
+        </p:spPr>
+        <p:style>
+          <a:lnRef idx="2">
+            <a:schemeClr val="accent1">
+              <a:shade val="50000"/>
+            </a:schemeClr>
+          </a:lnRef>
+          <a:fillRef idx="1">
+            <a:schemeClr val="accent1"/>
+          </a:fillRef>
+          <a:effectRef idx="0">
+            <a:schemeClr val="accent1"/>
+          </a:effectRef>
+          <a:fontRef idx="minor">
+            <a:schemeClr val="lt1"/>
+          </a:fontRef>
+        </p:style>
+        <p:txBody>
+          <a:bodyPr rot="0" spcFirstLastPara="0" vertOverflow="overflow" horzOverflow="overflow" vert="horz" wrap="square" lIns="45720" tIns="22860" rIns="45720" bIns="22860" numCol="1" spcCol="0" rtlCol="0" fromWordArt="0" anchor="ctr" anchorCtr="0" forceAA="0" compatLnSpc="1">
+            <a:prstTxWarp prst="textNoShape">
+              <a:avLst/>
+            </a:prstTxWarp>
+            <a:noAutofit/>
+          </a:bodyPr>
+          <a:lstStyle/>
+          <a:p>
+            <a:pPr algn="ctr"/>
+            <a:endParaRPr lang="en-US" sz="450">
+              <a:solidFill>
+                <a:schemeClr val="tx1"/>
+              </a:solidFill>
+            </a:endParaRPr>
+          </a:p>
+        </p:txBody>
+      </p:sp>
+      <p:sp>
+        <p:nvSpPr>
+          <p:cNvPr id="105" name="Curved Down Arrow 104"/>
+          <p:cNvSpPr/>
+          <p:nvPr/>
+        </p:nvSpPr>
+        <p:spPr>
+          <a:xfrm>
+            <a:off x="5296120" y="7479467"/>
+            <a:ext cx="2282054" cy="548640"/>
+          </a:xfrm>
+          <a:prstGeom prst="curvedDownArrow">
+            <a:avLst/>
+          </a:prstGeom>
+          <a:ln>
+            <a:solidFill>
+              <a:schemeClr val="tx1"/>
+            </a:solidFill>
+          </a:ln>
+        </p:spPr>
+        <p:style>
+          <a:lnRef idx="2">
+            <a:schemeClr val="accent1">
+              <a:shade val="50000"/>
+            </a:schemeClr>
+          </a:lnRef>
+          <a:fillRef idx="1">
+            <a:schemeClr val="accent1"/>
+          </a:fillRef>
+          <a:effectRef idx="0">
+            <a:schemeClr val="accent1"/>
+          </a:effectRef>
+          <a:fontRef idx="minor">
+            <a:schemeClr val="lt1"/>
+          </a:fontRef>
+        </p:style>
+        <p:txBody>
+          <a:bodyPr rot="0" spcFirstLastPara="0" vertOverflow="overflow" horzOverflow="overflow" vert="horz" wrap="square" lIns="45720" tIns="22860" rIns="45720" bIns="22860" numCol="1" spcCol="0" rtlCol="0" fromWordArt="0" anchor="ctr" anchorCtr="0" forceAA="0" compatLnSpc="1">
+            <a:prstTxWarp prst="textNoShape">
+              <a:avLst/>
+            </a:prstTxWarp>
+            <a:noAutofit/>
+          </a:bodyPr>
+          <a:lstStyle/>
+          <a:p>
+            <a:pPr algn="ctr"/>
+            <a:endParaRPr lang="en-US" sz="450">
+              <a:solidFill>
+                <a:schemeClr val="tx1"/>
+              </a:solidFill>
+            </a:endParaRPr>
+          </a:p>
+        </p:txBody>
+      </p:sp>
+      <p:sp>
+        <p:nvSpPr>
+          <p:cNvPr id="101" name="Curved Down Arrow 100"/>
+          <p:cNvSpPr/>
+          <p:nvPr/>
+        </p:nvSpPr>
+        <p:spPr>
+          <a:xfrm>
+            <a:off x="4595518" y="7392313"/>
+            <a:ext cx="2754056" cy="640080"/>
+          </a:xfrm>
+          <a:prstGeom prst="curvedDownArrow">
+            <a:avLst/>
+          </a:prstGeom>
+          <a:ln>
+            <a:solidFill>
+              <a:schemeClr val="tx1"/>
+            </a:solidFill>
+          </a:ln>
+        </p:spPr>
+        <p:style>
+          <a:lnRef idx="2">
+            <a:schemeClr val="accent1">
+              <a:shade val="50000"/>
+            </a:schemeClr>
+          </a:lnRef>
+          <a:fillRef idx="1">
+            <a:schemeClr val="accent1"/>
+          </a:fillRef>
+          <a:effectRef idx="0">
+            <a:schemeClr val="accent1"/>
+          </a:effectRef>
+          <a:fontRef idx="minor">
+            <a:schemeClr val="lt1"/>
+          </a:fontRef>
+        </p:style>
+        <p:txBody>
+          <a:bodyPr rot="0" spcFirstLastPara="0" vertOverflow="overflow" horzOverflow="overflow" vert="horz" wrap="square" lIns="45720" tIns="22860" rIns="45720" bIns="22860" numCol="1" spcCol="0" rtlCol="0" fromWordArt="0" anchor="ctr" anchorCtr="0" forceAA="0" compatLnSpc="1">
+            <a:prstTxWarp prst="textNoShape">
+              <a:avLst/>
+            </a:prstTxWarp>
+            <a:noAutofit/>
+          </a:bodyPr>
+          <a:lstStyle/>
+          <a:p>
+            <a:pPr algn="ctr"/>
+            <a:endParaRPr lang="en-US" sz="450">
+              <a:solidFill>
+                <a:schemeClr val="tx1"/>
+              </a:solidFill>
+            </a:endParaRPr>
+          </a:p>
+        </p:txBody>
+      </p:sp>
+      <p:sp>
+        <p:nvSpPr>
+          <p:cNvPr id="83" name="Curved Down Arrow 82"/>
+          <p:cNvSpPr/>
+          <p:nvPr/>
+        </p:nvSpPr>
+        <p:spPr>
+          <a:xfrm>
+            <a:off x="4598651" y="7392313"/>
+            <a:ext cx="1142882" cy="640080"/>
+          </a:xfrm>
+          <a:prstGeom prst="curvedDownArrow">
+            <a:avLst/>
+          </a:prstGeom>
+          <a:ln>
+            <a:solidFill>
+              <a:schemeClr val="tx1"/>
+            </a:solidFill>
+          </a:ln>
+        </p:spPr>
+        <p:style>
+          <a:lnRef idx="2">
+            <a:schemeClr val="accent1">
+              <a:shade val="50000"/>
+            </a:schemeClr>
+          </a:lnRef>
+          <a:fillRef idx="1">
+            <a:schemeClr val="accent1"/>
+          </a:fillRef>
+          <a:effectRef idx="0">
+            <a:schemeClr val="accent1"/>
+          </a:effectRef>
+          <a:fontRef idx="minor">
+            <a:schemeClr val="lt1"/>
+          </a:fontRef>
+        </p:style>
+        <p:txBody>
+          <a:bodyPr rot="0" spcFirstLastPara="0" vertOverflow="overflow" horzOverflow="overflow" vert="horz" wrap="square" lIns="45720" tIns="22860" rIns="45720" bIns="22860" numCol="1" spcCol="0" rtlCol="0" fromWordArt="0" anchor="ctr" anchorCtr="0" forceAA="0" compatLnSpc="1">
+            <a:prstTxWarp prst="textNoShape">
+              <a:avLst/>
+            </a:prstTxWarp>
+            <a:noAutofit/>
+          </a:bodyPr>
+          <a:lstStyle/>
+          <a:p>
+            <a:pPr algn="ctr"/>
+            <a:endParaRPr lang="en-US" sz="450">
+              <a:solidFill>
+                <a:schemeClr val="tx1"/>
+              </a:solidFill>
+            </a:endParaRPr>
+          </a:p>
+        </p:txBody>
+      </p:sp>
+      <p:sp>
+        <p:nvSpPr>
+          <p:cNvPr id="137" name="Curved Down Arrow 136"/>
+          <p:cNvSpPr/>
+          <p:nvPr/>
+        </p:nvSpPr>
+        <p:spPr>
+          <a:xfrm flipV="1">
+            <a:off x="7884512" y="11122017"/>
+            <a:ext cx="2471579" cy="365760"/>
+          </a:xfrm>
+          <a:prstGeom prst="curvedDownArrow">
+            <a:avLst/>
+          </a:prstGeom>
+          <a:ln>
+            <a:solidFill>
+              <a:schemeClr val="tx1"/>
+            </a:solidFill>
+          </a:ln>
+        </p:spPr>
+        <p:style>
+          <a:lnRef idx="2">
+            <a:schemeClr val="accent1">
+              <a:shade val="50000"/>
+            </a:schemeClr>
+          </a:lnRef>
+          <a:fillRef idx="1">
+            <a:schemeClr val="accent1"/>
+          </a:fillRef>
+          <a:effectRef idx="0">
+            <a:schemeClr val="accent1"/>
+          </a:effectRef>
+          <a:fontRef idx="minor">
+            <a:schemeClr val="lt1"/>
+          </a:fontRef>
+        </p:style>
+        <p:txBody>
+          <a:bodyPr rot="0" spcFirstLastPara="0" vertOverflow="overflow" horzOverflow="overflow" vert="horz" wrap="square" lIns="45720" tIns="22860" rIns="45720" bIns="22860" numCol="1" spcCol="0" rtlCol="0" fromWordArt="0" anchor="ctr" anchorCtr="0" forceAA="0" compatLnSpc="1">
+            <a:prstTxWarp prst="textNoShape">
+              <a:avLst/>
+            </a:prstTxWarp>
+            <a:noAutofit/>
+          </a:bodyPr>
+          <a:lstStyle/>
+          <a:p>
+            <a:pPr algn="ctr"/>
+            <a:endParaRPr lang="en-US" sz="450">
+              <a:solidFill>
+                <a:schemeClr val="tx1"/>
+              </a:solidFill>
+            </a:endParaRPr>
+          </a:p>
+        </p:txBody>
+      </p:sp>
+      <p:sp>
+        <p:nvSpPr>
+          <p:cNvPr id="135" name="Curved Down Arrow 134"/>
+          <p:cNvSpPr/>
+          <p:nvPr/>
+        </p:nvSpPr>
+        <p:spPr>
+          <a:xfrm flipV="1">
+            <a:off x="6213957" y="11108123"/>
+            <a:ext cx="3914432" cy="457200"/>
+          </a:xfrm>
+          <a:prstGeom prst="curvedDownArrow">
+            <a:avLst/>
+          </a:prstGeom>
+          <a:ln>
+            <a:solidFill>
+              <a:schemeClr val="tx1"/>
+            </a:solidFill>
+          </a:ln>
+        </p:spPr>
+        <p:style>
+          <a:lnRef idx="2">
+            <a:schemeClr val="accent1">
+              <a:shade val="50000"/>
+            </a:schemeClr>
+          </a:lnRef>
+          <a:fillRef idx="1">
+            <a:schemeClr val="accent1"/>
+          </a:fillRef>
+          <a:effectRef idx="0">
+            <a:schemeClr val="accent1"/>
+          </a:effectRef>
+          <a:fontRef idx="minor">
+            <a:schemeClr val="lt1"/>
+          </a:fontRef>
+        </p:style>
+        <p:txBody>
+          <a:bodyPr rot="0" spcFirstLastPara="0" vertOverflow="overflow" horzOverflow="overflow" vert="horz" wrap="square" lIns="45720" tIns="22860" rIns="45720" bIns="22860" numCol="1" spcCol="0" rtlCol="0" fromWordArt="0" anchor="ctr" anchorCtr="0" forceAA="0" compatLnSpc="1">
+            <a:prstTxWarp prst="textNoShape">
+              <a:avLst/>
+            </a:prstTxWarp>
+            <a:noAutofit/>
+          </a:bodyPr>
+          <a:lstStyle/>
+          <a:p>
+            <a:pPr algn="ctr"/>
+            <a:endParaRPr lang="en-US" sz="450">
+              <a:solidFill>
+                <a:schemeClr val="tx1"/>
+              </a:solidFill>
+            </a:endParaRPr>
+          </a:p>
+        </p:txBody>
+      </p:sp>
+      <p:sp>
+        <p:nvSpPr>
+          <p:cNvPr id="136" name="Curved Down Arrow 135"/>
+          <p:cNvSpPr/>
+          <p:nvPr/>
+        </p:nvSpPr>
+        <p:spPr>
+          <a:xfrm flipV="1">
+            <a:off x="5518467" y="11115667"/>
+            <a:ext cx="4374063" cy="548640"/>
+          </a:xfrm>
+          <a:prstGeom prst="curvedDownArrow">
+            <a:avLst/>
+          </a:prstGeom>
+          <a:ln>
+            <a:solidFill>
+              <a:schemeClr val="tx1"/>
+            </a:solidFill>
+          </a:ln>
+        </p:spPr>
+        <p:style>
+          <a:lnRef idx="2">
+            <a:schemeClr val="accent1">
+              <a:shade val="50000"/>
+            </a:schemeClr>
+          </a:lnRef>
+          <a:fillRef idx="1">
+            <a:schemeClr val="accent1"/>
+          </a:fillRef>
+          <a:effectRef idx="0">
+            <a:schemeClr val="accent1"/>
+          </a:effectRef>
+          <a:fontRef idx="minor">
+            <a:schemeClr val="lt1"/>
+          </a:fontRef>
+        </p:style>
+        <p:txBody>
+          <a:bodyPr rot="0" spcFirstLastPara="0" vertOverflow="overflow" horzOverflow="overflow" vert="horz" wrap="square" lIns="45720" tIns="22860" rIns="45720" bIns="22860" numCol="1" spcCol="0" rtlCol="0" fromWordArt="0" anchor="ctr" anchorCtr="0" forceAA="0" compatLnSpc="1">
+            <a:prstTxWarp prst="textNoShape">
+              <a:avLst/>
+            </a:prstTxWarp>
+            <a:noAutofit/>
+          </a:bodyPr>
+          <a:lstStyle/>
+          <a:p>
+            <a:pPr algn="ctr"/>
+            <a:endParaRPr lang="en-US" sz="450">
+              <a:solidFill>
+                <a:schemeClr val="tx1"/>
+              </a:solidFill>
+            </a:endParaRPr>
+          </a:p>
+        </p:txBody>
+      </p:sp>
+      <p:sp>
+        <p:nvSpPr>
+          <p:cNvPr id="127" name="Curved Down Arrow 126"/>
+          <p:cNvSpPr/>
+          <p:nvPr/>
+        </p:nvSpPr>
+        <p:spPr>
+          <a:xfrm flipV="1">
+            <a:off x="6213957" y="11114298"/>
+            <a:ext cx="2292473" cy="457200"/>
+          </a:xfrm>
+          <a:prstGeom prst="curvedDownArrow">
+            <a:avLst/>
+          </a:prstGeom>
+          <a:ln>
+            <a:solidFill>
+              <a:schemeClr val="tx1"/>
+            </a:solidFill>
+          </a:ln>
+        </p:spPr>
+        <p:style>
+          <a:lnRef idx="2">
+            <a:schemeClr val="accent1">
+              <a:shade val="50000"/>
+            </a:schemeClr>
+          </a:lnRef>
+          <a:fillRef idx="1">
+            <a:schemeClr val="accent1"/>
+          </a:fillRef>
+          <a:effectRef idx="0">
+            <a:schemeClr val="accent1"/>
+          </a:effectRef>
+          <a:fontRef idx="minor">
+            <a:schemeClr val="lt1"/>
+          </a:fontRef>
+        </p:style>
+        <p:txBody>
+          <a:bodyPr rot="0" spcFirstLastPara="0" vertOverflow="overflow" horzOverflow="overflow" vert="horz" wrap="square" lIns="45720" tIns="22860" rIns="45720" bIns="22860" numCol="1" spcCol="0" rtlCol="0" fromWordArt="0" anchor="ctr" anchorCtr="0" forceAA="0" compatLnSpc="1">
+            <a:prstTxWarp prst="textNoShape">
+              <a:avLst/>
+            </a:prstTxWarp>
+            <a:noAutofit/>
+          </a:bodyPr>
+          <a:lstStyle/>
+          <a:p>
+            <a:pPr algn="ctr"/>
+            <a:endParaRPr lang="en-US" sz="450">
+              <a:solidFill>
+                <a:schemeClr val="tx1"/>
+              </a:solidFill>
+            </a:endParaRPr>
+          </a:p>
+        </p:txBody>
+      </p:sp>
+      <p:sp>
+        <p:nvSpPr>
+          <p:cNvPr id="126" name="Curved Down Arrow 125"/>
+          <p:cNvSpPr/>
+          <p:nvPr/>
+        </p:nvSpPr>
+        <p:spPr>
+          <a:xfrm flipV="1">
+            <a:off x="5518467" y="11122017"/>
+            <a:ext cx="2745754" cy="548640"/>
+          </a:xfrm>
+          <a:prstGeom prst="curvedDownArrow">
+            <a:avLst/>
+          </a:prstGeom>
+          <a:ln>
+            <a:solidFill>
+              <a:schemeClr val="tx1"/>
+            </a:solidFill>
+          </a:ln>
+        </p:spPr>
+        <p:style>
+          <a:lnRef idx="2">
+            <a:schemeClr val="accent1">
+              <a:shade val="50000"/>
+            </a:schemeClr>
+          </a:lnRef>
+          <a:fillRef idx="1">
+            <a:schemeClr val="accent1"/>
+          </a:fillRef>
+          <a:effectRef idx="0">
+            <a:schemeClr val="accent1"/>
+          </a:effectRef>
+          <a:fontRef idx="minor">
+            <a:schemeClr val="lt1"/>
+          </a:fontRef>
+        </p:style>
+        <p:txBody>
+          <a:bodyPr rot="0" spcFirstLastPara="0" vertOverflow="overflow" horzOverflow="overflow" vert="horz" wrap="square" lIns="45720" tIns="22860" rIns="45720" bIns="22860" numCol="1" spcCol="0" rtlCol="0" fromWordArt="0" anchor="ctr" anchorCtr="0" forceAA="0" compatLnSpc="1">
+            <a:prstTxWarp prst="textNoShape">
+              <a:avLst/>
+            </a:prstTxWarp>
+            <a:noAutofit/>
+          </a:bodyPr>
+          <a:lstStyle/>
+          <a:p>
+            <a:pPr algn="ctr"/>
+            <a:endParaRPr lang="en-US" sz="450">
+              <a:solidFill>
+                <a:schemeClr val="tx1"/>
+              </a:solidFill>
+            </a:endParaRPr>
+          </a:p>
+        </p:txBody>
+      </p:sp>
+      <p:sp>
+        <p:nvSpPr>
+          <p:cNvPr id="118" name="Curved Down Arrow 117"/>
+          <p:cNvSpPr/>
+          <p:nvPr/>
+        </p:nvSpPr>
+        <p:spPr>
+          <a:xfrm flipV="1">
+            <a:off x="5518467" y="11115667"/>
+            <a:ext cx="1102927" cy="548640"/>
+          </a:xfrm>
+          <a:prstGeom prst="curvedDownArrow">
+            <a:avLst/>
+          </a:prstGeom>
+          <a:ln>
+            <a:solidFill>
+              <a:schemeClr val="tx1"/>
+            </a:solidFill>
+          </a:ln>
+        </p:spPr>
+        <p:style>
+          <a:lnRef idx="2">
+            <a:schemeClr val="accent1">
+              <a:shade val="50000"/>
+            </a:schemeClr>
+          </a:lnRef>
+          <a:fillRef idx="1">
+            <a:schemeClr val="accent1"/>
+          </a:fillRef>
+          <a:effectRef idx="0">
+            <a:schemeClr val="accent1"/>
+          </a:effectRef>
+          <a:fontRef idx="minor">
+            <a:schemeClr val="lt1"/>
+          </a:fontRef>
+        </p:style>
+        <p:txBody>
+          <a:bodyPr rot="0" spcFirstLastPara="0" vertOverflow="overflow" horzOverflow="overflow" vert="horz" wrap="square" lIns="45720" tIns="22860" rIns="45720" bIns="22860" numCol="1" spcCol="0" rtlCol="0" fromWordArt="0" anchor="ctr" anchorCtr="0" forceAA="0" compatLnSpc="1">
+            <a:prstTxWarp prst="textNoShape">
+              <a:avLst/>
+            </a:prstTxWarp>
+            <a:noAutofit/>
+          </a:bodyPr>
+          <a:lstStyle/>
+          <a:p>
+            <a:pPr algn="ctr"/>
+            <a:endParaRPr lang="en-US" sz="450">
+              <a:solidFill>
+                <a:schemeClr val="tx1"/>
+              </a:solidFill>
+            </a:endParaRPr>
+          </a:p>
+        </p:txBody>
+      </p:sp>
+    </p:spTree>
+    <p:extLst>
+      <p:ext uri="{BB962C8B-B14F-4D97-AF65-F5344CB8AC3E}">
+        <p14:creationId xmlns:p14="http://schemas.microsoft.com/office/powerpoint/2010/main" val="198146631"/>
+      </p:ext>
+    </p:extLst>
+  </p:cSld>
+  <p:clrMapOvr>
+    <a:masterClrMapping/>
+  </p:clrMapOvr>
 </p:sld>
 </file>
 

--- a/Paper/Liver_Disease_Paper/Iteration_0/Paper figures.pptx
+++ b/Paper/Liver_Disease_Paper/Iteration_0/Paper figures.pptx
@@ -6,8 +6,9 @@
   </p:sldMasterIdLst>
   <p:sldIdLst>
     <p:sldId id="257" r:id="rId2"/>
-    <p:sldId id="259" r:id="rId3"/>
-    <p:sldId id="260" r:id="rId4"/>
+    <p:sldId id="261" r:id="rId3"/>
+    <p:sldId id="259" r:id="rId4"/>
+    <p:sldId id="260" r:id="rId5"/>
   </p:sldIdLst>
   <p:sldSz cx="18288000" cy="18288000"/>
   <p:notesSz cx="6858000" cy="9144000"/>
@@ -245,7 +246,7 @@
           <a:p>
             <a:fld id="{1F57380E-2143-4096-B547-DE8B390321C5}" type="datetimeFigureOut">
               <a:rPr lang="en-US" smtClean="0"/>
-              <a:t>7/28/2020</a:t>
+              <a:t>8/24/2020</a:t>
             </a:fld>
             <a:endParaRPr lang="en-US"/>
           </a:p>
@@ -415,7 +416,7 @@
           <a:p>
             <a:fld id="{1F57380E-2143-4096-B547-DE8B390321C5}" type="datetimeFigureOut">
               <a:rPr lang="en-US" smtClean="0"/>
-              <a:t>7/28/2020</a:t>
+              <a:t>8/24/2020</a:t>
             </a:fld>
             <a:endParaRPr lang="en-US"/>
           </a:p>
@@ -595,7 +596,7 @@
           <a:p>
             <a:fld id="{1F57380E-2143-4096-B547-DE8B390321C5}" type="datetimeFigureOut">
               <a:rPr lang="en-US" smtClean="0"/>
-              <a:t>7/28/2020</a:t>
+              <a:t>8/24/2020</a:t>
             </a:fld>
             <a:endParaRPr lang="en-US"/>
           </a:p>
@@ -765,7 +766,7 @@
           <a:p>
             <a:fld id="{1F57380E-2143-4096-B547-DE8B390321C5}" type="datetimeFigureOut">
               <a:rPr lang="en-US" smtClean="0"/>
-              <a:t>7/28/2020</a:t>
+              <a:t>8/24/2020</a:t>
             </a:fld>
             <a:endParaRPr lang="en-US"/>
           </a:p>
@@ -1009,7 +1010,7 @@
           <a:p>
             <a:fld id="{1F57380E-2143-4096-B547-DE8B390321C5}" type="datetimeFigureOut">
               <a:rPr lang="en-US" smtClean="0"/>
-              <a:t>7/28/2020</a:t>
+              <a:t>8/24/2020</a:t>
             </a:fld>
             <a:endParaRPr lang="en-US"/>
           </a:p>
@@ -1241,7 +1242,7 @@
           <a:p>
             <a:fld id="{1F57380E-2143-4096-B547-DE8B390321C5}" type="datetimeFigureOut">
               <a:rPr lang="en-US" smtClean="0"/>
-              <a:t>7/28/2020</a:t>
+              <a:t>8/24/2020</a:t>
             </a:fld>
             <a:endParaRPr lang="en-US"/>
           </a:p>
@@ -1608,7 +1609,7 @@
           <a:p>
             <a:fld id="{1F57380E-2143-4096-B547-DE8B390321C5}" type="datetimeFigureOut">
               <a:rPr lang="en-US" smtClean="0"/>
-              <a:t>7/28/2020</a:t>
+              <a:t>8/24/2020</a:t>
             </a:fld>
             <a:endParaRPr lang="en-US"/>
           </a:p>
@@ -1726,7 +1727,7 @@
           <a:p>
             <a:fld id="{1F57380E-2143-4096-B547-DE8B390321C5}" type="datetimeFigureOut">
               <a:rPr lang="en-US" smtClean="0"/>
-              <a:t>7/28/2020</a:t>
+              <a:t>8/24/2020</a:t>
             </a:fld>
             <a:endParaRPr lang="en-US"/>
           </a:p>
@@ -1821,7 +1822,7 @@
           <a:p>
             <a:fld id="{1F57380E-2143-4096-B547-DE8B390321C5}" type="datetimeFigureOut">
               <a:rPr lang="en-US" smtClean="0"/>
-              <a:t>7/28/2020</a:t>
+              <a:t>8/24/2020</a:t>
             </a:fld>
             <a:endParaRPr lang="en-US"/>
           </a:p>
@@ -2098,7 +2099,7 @@
           <a:p>
             <a:fld id="{1F57380E-2143-4096-B547-DE8B390321C5}" type="datetimeFigureOut">
               <a:rPr lang="en-US" smtClean="0"/>
-              <a:t>7/28/2020</a:t>
+              <a:t>8/24/2020</a:t>
             </a:fld>
             <a:endParaRPr lang="en-US"/>
           </a:p>
@@ -2355,7 +2356,7 @@
           <a:p>
             <a:fld id="{1F57380E-2143-4096-B547-DE8B390321C5}" type="datetimeFigureOut">
               <a:rPr lang="en-US" smtClean="0"/>
-              <a:t>7/28/2020</a:t>
+              <a:t>8/24/2020</a:t>
             </a:fld>
             <a:endParaRPr lang="en-US"/>
           </a:p>
@@ -2568,7 +2569,7 @@
           <a:p>
             <a:fld id="{1F57380E-2143-4096-B547-DE8B390321C5}" type="datetimeFigureOut">
               <a:rPr lang="en-US" smtClean="0"/>
-              <a:t>7/28/2020</a:t>
+              <a:t>8/24/2020</a:t>
             </a:fld>
             <a:endParaRPr lang="en-US"/>
           </a:p>
@@ -5488,37 +5489,18 @@
           <a:chExt cx="0" cy="0"/>
         </a:xfrm>
       </p:grpSpPr>
-      <p:sp>
-        <p:nvSpPr>
-          <p:cNvPr id="2" name="Title 1"/>
-          <p:cNvSpPr>
-            <a:spLocks noGrp="1"/>
-          </p:cNvSpPr>
-          <p:nvPr>
-            <p:ph type="title"/>
-          </p:nvPr>
-        </p:nvSpPr>
-        <p:spPr/>
-        <p:txBody>
-          <a:bodyPr/>
-          <a:lstStyle/>
-          <a:p>
-            <a:endParaRPr lang="en-US"/>
-          </a:p>
-        </p:txBody>
-      </p:sp>
       <p:grpSp>
         <p:nvGrpSpPr>
-          <p:cNvPr id="245" name="Group 244"/>
+          <p:cNvPr id="10" name="Group 9"/>
           <p:cNvGrpSpPr/>
           <p:nvPr/>
         </p:nvGrpSpPr>
         <p:grpSpPr>
           <a:xfrm>
-            <a:off x="2105877" y="6019963"/>
-            <a:ext cx="10914000" cy="5334280"/>
-            <a:chOff x="4211754" y="12039925"/>
-            <a:chExt cx="21827999" cy="10668559"/>
+            <a:off x="2478250" y="682172"/>
+            <a:ext cx="8331819" cy="4688114"/>
+            <a:chOff x="3682936" y="2162629"/>
+            <a:chExt cx="8331819" cy="4688114"/>
           </a:xfrm>
         </p:grpSpPr>
         <p:sp>
@@ -5529,8 +5511,584 @@
           </p:nvSpPr>
           <p:spPr>
             <a:xfrm>
-              <a:off x="6589458" y="12975053"/>
-              <a:ext cx="1165422" cy="3461047"/>
+              <a:off x="3682936" y="2162629"/>
+              <a:ext cx="8088150" cy="4688114"/>
+            </a:xfrm>
+            <a:prstGeom prst="rect">
+              <a:avLst/>
+            </a:prstGeom>
+            <a:solidFill>
+              <a:schemeClr val="tx1"/>
+            </a:solidFill>
+            <a:ln>
+              <a:solidFill>
+                <a:schemeClr val="tx1"/>
+              </a:solidFill>
+            </a:ln>
+          </p:spPr>
+          <p:style>
+            <a:lnRef idx="2">
+              <a:schemeClr val="accent1">
+                <a:shade val="50000"/>
+              </a:schemeClr>
+            </a:lnRef>
+            <a:fillRef idx="1">
+              <a:schemeClr val="accent1"/>
+            </a:fillRef>
+            <a:effectRef idx="0">
+              <a:schemeClr val="accent1"/>
+            </a:effectRef>
+            <a:fontRef idx="minor">
+              <a:schemeClr val="lt1"/>
+            </a:fontRef>
+          </p:style>
+          <p:txBody>
+            <a:bodyPr rtlCol="0" anchor="ctr"/>
+            <a:lstStyle/>
+            <a:p>
+              <a:pPr algn="ctr"/>
+              <a:endParaRPr lang="en-US"/>
+            </a:p>
+          </p:txBody>
+        </p:sp>
+        <p:pic>
+          <p:nvPicPr>
+            <p:cNvPr id="4" name="Picture 2" descr="image001"/>
+            <p:cNvPicPr>
+              <a:picLocks noChangeAspect="1" noChangeArrowheads="1"/>
+            </p:cNvPicPr>
+            <p:nvPr/>
+          </p:nvPicPr>
+          <p:blipFill rotWithShape="1">
+            <a:blip r:embed="rId2">
+              <a:extLst>
+                <a:ext uri="{28A0092B-C50C-407E-A947-70E740481C1C}">
+                  <a14:useLocalDpi xmlns:a14="http://schemas.microsoft.com/office/drawing/2010/main" val="0"/>
+                </a:ext>
+              </a:extLst>
+            </a:blip>
+            <a:srcRect l="65585" b="57645"/>
+            <a:stretch/>
+          </p:blipFill>
+          <p:spPr bwMode="auto">
+            <a:xfrm>
+              <a:off x="7873815" y="2293943"/>
+              <a:ext cx="3787779" cy="1875951"/>
+            </a:xfrm>
+            <a:prstGeom prst="rect">
+              <a:avLst/>
+            </a:prstGeom>
+            <a:noFill/>
+            <a:ln>
+              <a:noFill/>
+            </a:ln>
+            <a:extLst>
+              <a:ext uri="{909E8E84-426E-40DD-AFC4-6F175D3DCCD1}">
+                <a14:hiddenFill xmlns:a14="http://schemas.microsoft.com/office/drawing/2010/main">
+                  <a:solidFill>
+                    <a:srgbClr val="FFFFFF"/>
+                  </a:solidFill>
+                </a14:hiddenFill>
+              </a:ext>
+              <a:ext uri="{91240B29-F687-4F45-9708-019B960494DF}">
+                <a14:hiddenLine xmlns:a14="http://schemas.microsoft.com/office/drawing/2010/main" w="9525">
+                  <a:solidFill>
+                    <a:srgbClr val="000000"/>
+                  </a:solidFill>
+                  <a:miter lim="800000"/>
+                  <a:headEnd/>
+                  <a:tailEnd/>
+                </a14:hiddenLine>
+              </a:ext>
+            </a:extLst>
+          </p:spPr>
+        </p:pic>
+        <p:pic>
+          <p:nvPicPr>
+            <p:cNvPr id="5" name="Picture 2" descr="image001"/>
+            <p:cNvPicPr>
+              <a:picLocks noChangeAspect="1" noChangeArrowheads="1"/>
+            </p:cNvPicPr>
+            <p:nvPr/>
+          </p:nvPicPr>
+          <p:blipFill rotWithShape="1">
+            <a:blip r:embed="rId2">
+              <a:extLst>
+                <a:ext uri="{28A0092B-C50C-407E-A947-70E740481C1C}">
+                  <a14:useLocalDpi xmlns:a14="http://schemas.microsoft.com/office/drawing/2010/main" val="0"/>
+                </a:ext>
+              </a:extLst>
+            </a:blip>
+            <a:srcRect r="62926"/>
+            <a:stretch/>
+          </p:blipFill>
+          <p:spPr bwMode="auto">
+            <a:xfrm>
+              <a:off x="3710451" y="2293943"/>
+              <a:ext cx="4053873" cy="4429125"/>
+            </a:xfrm>
+            <a:prstGeom prst="rect">
+              <a:avLst/>
+            </a:prstGeom>
+            <a:noFill/>
+            <a:ln>
+              <a:noFill/>
+            </a:ln>
+            <a:extLst>
+              <a:ext uri="{909E8E84-426E-40DD-AFC4-6F175D3DCCD1}">
+                <a14:hiddenFill xmlns:a14="http://schemas.microsoft.com/office/drawing/2010/main">
+                  <a:solidFill>
+                    <a:srgbClr val="FFFFFF"/>
+                  </a:solidFill>
+                </a14:hiddenFill>
+              </a:ext>
+              <a:ext uri="{91240B29-F687-4F45-9708-019B960494DF}">
+                <a14:hiddenLine xmlns:a14="http://schemas.microsoft.com/office/drawing/2010/main" w="9525">
+                  <a:solidFill>
+                    <a:srgbClr val="000000"/>
+                  </a:solidFill>
+                  <a:miter lim="800000"/>
+                  <a:headEnd/>
+                  <a:tailEnd/>
+                </a14:hiddenLine>
+              </a:ext>
+            </a:extLst>
+          </p:spPr>
+        </p:pic>
+        <p:pic>
+          <p:nvPicPr>
+            <p:cNvPr id="6" name="Picture 2" descr="image001"/>
+            <p:cNvPicPr>
+              <a:picLocks noChangeAspect="1" noChangeArrowheads="1"/>
+            </p:cNvPicPr>
+            <p:nvPr/>
+          </p:nvPicPr>
+          <p:blipFill rotWithShape="1">
+            <a:blip r:embed="rId2">
+              <a:extLst>
+                <a:ext uri="{28A0092B-C50C-407E-A947-70E740481C1C}">
+                  <a14:useLocalDpi xmlns:a14="http://schemas.microsoft.com/office/drawing/2010/main" val="0"/>
+                </a:ext>
+              </a:extLst>
+            </a:blip>
+            <a:srcRect l="70165" t="55113"/>
+            <a:stretch/>
+          </p:blipFill>
+          <p:spPr bwMode="auto">
+            <a:xfrm>
+              <a:off x="7905852" y="4301208"/>
+              <a:ext cx="3812389" cy="2323264"/>
+            </a:xfrm>
+            <a:prstGeom prst="rect">
+              <a:avLst/>
+            </a:prstGeom>
+            <a:noFill/>
+            <a:ln>
+              <a:noFill/>
+            </a:ln>
+            <a:extLst>
+              <a:ext uri="{909E8E84-426E-40DD-AFC4-6F175D3DCCD1}">
+                <a14:hiddenFill xmlns:a14="http://schemas.microsoft.com/office/drawing/2010/main">
+                  <a:solidFill>
+                    <a:srgbClr val="FFFFFF"/>
+                  </a:solidFill>
+                </a14:hiddenFill>
+              </a:ext>
+              <a:ext uri="{91240B29-F687-4F45-9708-019B960494DF}">
+                <a14:hiddenLine xmlns:a14="http://schemas.microsoft.com/office/drawing/2010/main" w="9525">
+                  <a:solidFill>
+                    <a:srgbClr val="000000"/>
+                  </a:solidFill>
+                  <a:miter lim="800000"/>
+                  <a:headEnd/>
+                  <a:tailEnd/>
+                </a14:hiddenLine>
+              </a:ext>
+            </a:extLst>
+          </p:spPr>
+        </p:pic>
+        <p:sp>
+          <p:nvSpPr>
+            <p:cNvPr id="8" name="Rectangle 7"/>
+            <p:cNvSpPr/>
+            <p:nvPr/>
+          </p:nvSpPr>
+          <p:spPr>
+            <a:xfrm>
+              <a:off x="7791839" y="2162629"/>
+              <a:ext cx="114013" cy="4688114"/>
+            </a:xfrm>
+            <a:prstGeom prst="rect">
+              <a:avLst/>
+            </a:prstGeom>
+            <a:solidFill>
+              <a:schemeClr val="bg1"/>
+            </a:solidFill>
+            <a:ln>
+              <a:solidFill>
+                <a:schemeClr val="bg1"/>
+              </a:solidFill>
+            </a:ln>
+          </p:spPr>
+          <p:style>
+            <a:lnRef idx="2">
+              <a:schemeClr val="accent1">
+                <a:shade val="50000"/>
+              </a:schemeClr>
+            </a:lnRef>
+            <a:fillRef idx="1">
+              <a:schemeClr val="accent1"/>
+            </a:fillRef>
+            <a:effectRef idx="0">
+              <a:schemeClr val="accent1"/>
+            </a:effectRef>
+            <a:fontRef idx="minor">
+              <a:schemeClr val="lt1"/>
+            </a:fontRef>
+          </p:style>
+          <p:txBody>
+            <a:bodyPr rtlCol="0" anchor="ctr"/>
+            <a:lstStyle/>
+            <a:p>
+              <a:pPr algn="ctr"/>
+              <a:endParaRPr lang="en-US"/>
+            </a:p>
+          </p:txBody>
+        </p:sp>
+        <p:sp>
+          <p:nvSpPr>
+            <p:cNvPr id="9" name="Rectangle 8"/>
+            <p:cNvSpPr/>
+            <p:nvPr/>
+          </p:nvSpPr>
+          <p:spPr>
+            <a:xfrm>
+              <a:off x="7873815" y="4169893"/>
+              <a:ext cx="4140940" cy="131315"/>
+            </a:xfrm>
+            <a:prstGeom prst="rect">
+              <a:avLst/>
+            </a:prstGeom>
+            <a:solidFill>
+              <a:schemeClr val="bg1"/>
+            </a:solidFill>
+            <a:ln>
+              <a:solidFill>
+                <a:schemeClr val="bg1"/>
+              </a:solidFill>
+            </a:ln>
+          </p:spPr>
+          <p:style>
+            <a:lnRef idx="2">
+              <a:schemeClr val="accent1">
+                <a:shade val="50000"/>
+              </a:schemeClr>
+            </a:lnRef>
+            <a:fillRef idx="1">
+              <a:schemeClr val="accent1"/>
+            </a:fillRef>
+            <a:effectRef idx="0">
+              <a:schemeClr val="accent1"/>
+            </a:effectRef>
+            <a:fontRef idx="minor">
+              <a:schemeClr val="lt1"/>
+            </a:fontRef>
+          </p:style>
+          <p:txBody>
+            <a:bodyPr rtlCol="0" anchor="ctr"/>
+            <a:lstStyle/>
+            <a:p>
+              <a:pPr algn="ctr"/>
+              <a:endParaRPr lang="en-US"/>
+            </a:p>
+          </p:txBody>
+        </p:sp>
+      </p:grpSp>
+      <p:grpSp>
+        <p:nvGrpSpPr>
+          <p:cNvPr id="21" name="Group 20"/>
+          <p:cNvGrpSpPr/>
+          <p:nvPr/>
+        </p:nvGrpSpPr>
+        <p:grpSpPr>
+          <a:xfrm>
+            <a:off x="2039483" y="6223227"/>
+            <a:ext cx="5566003" cy="3631973"/>
+            <a:chOff x="2039483" y="6223227"/>
+            <a:chExt cx="5566003" cy="3631973"/>
+          </a:xfrm>
+        </p:grpSpPr>
+        <p:sp>
+          <p:nvSpPr>
+            <p:cNvPr id="18" name="Rectangle 17"/>
+            <p:cNvSpPr/>
+            <p:nvPr/>
+          </p:nvSpPr>
+          <p:spPr>
+            <a:xfrm>
+              <a:off x="2039483" y="6223227"/>
+              <a:ext cx="5566003" cy="3631973"/>
+            </a:xfrm>
+            <a:prstGeom prst="rect">
+              <a:avLst/>
+            </a:prstGeom>
+            <a:solidFill>
+              <a:schemeClr val="tx1"/>
+            </a:solidFill>
+            <a:ln>
+              <a:solidFill>
+                <a:schemeClr val="tx1"/>
+              </a:solidFill>
+            </a:ln>
+          </p:spPr>
+          <p:style>
+            <a:lnRef idx="2">
+              <a:schemeClr val="accent1">
+                <a:shade val="50000"/>
+              </a:schemeClr>
+            </a:lnRef>
+            <a:fillRef idx="1">
+              <a:schemeClr val="accent1"/>
+            </a:fillRef>
+            <a:effectRef idx="0">
+              <a:schemeClr val="accent1"/>
+            </a:effectRef>
+            <a:fontRef idx="minor">
+              <a:schemeClr val="lt1"/>
+            </a:fontRef>
+          </p:style>
+          <p:txBody>
+            <a:bodyPr rtlCol="0" anchor="ctr"/>
+            <a:lstStyle/>
+            <a:p>
+              <a:pPr algn="ctr"/>
+              <a:endParaRPr lang="en-US"/>
+            </a:p>
+          </p:txBody>
+        </p:sp>
+        <p:pic>
+          <p:nvPicPr>
+            <p:cNvPr id="15" name="Picture 14"/>
+            <p:cNvPicPr>
+              <a:picLocks noChangeAspect="1"/>
+            </p:cNvPicPr>
+            <p:nvPr/>
+          </p:nvPicPr>
+          <p:blipFill>
+            <a:blip r:embed="rId3"/>
+            <a:stretch>
+              <a:fillRect/>
+            </a:stretch>
+          </p:blipFill>
+          <p:spPr>
+            <a:xfrm>
+              <a:off x="2206171" y="6462712"/>
+              <a:ext cx="2804669" cy="3273891"/>
+            </a:xfrm>
+            <a:prstGeom prst="rect">
+              <a:avLst/>
+            </a:prstGeom>
+          </p:spPr>
+        </p:pic>
+        <p:pic>
+          <p:nvPicPr>
+            <p:cNvPr id="16" name="Picture 15"/>
+            <p:cNvPicPr>
+              <a:picLocks noChangeAspect="1"/>
+            </p:cNvPicPr>
+            <p:nvPr/>
+          </p:nvPicPr>
+          <p:blipFill>
+            <a:blip r:embed="rId4"/>
+            <a:stretch>
+              <a:fillRect/>
+            </a:stretch>
+          </p:blipFill>
+          <p:spPr>
+            <a:xfrm>
+              <a:off x="5214937" y="8567284"/>
+              <a:ext cx="2238375" cy="1164765"/>
+            </a:xfrm>
+            <a:prstGeom prst="rect">
+              <a:avLst/>
+            </a:prstGeom>
+          </p:spPr>
+        </p:pic>
+        <p:pic>
+          <p:nvPicPr>
+            <p:cNvPr id="17" name="Picture 16"/>
+            <p:cNvPicPr>
+              <a:picLocks noChangeAspect="1"/>
+            </p:cNvPicPr>
+            <p:nvPr/>
+          </p:nvPicPr>
+          <p:blipFill>
+            <a:blip r:embed="rId5"/>
+            <a:stretch>
+              <a:fillRect/>
+            </a:stretch>
+          </p:blipFill>
+          <p:spPr>
+            <a:xfrm>
+              <a:off x="5214937" y="6462712"/>
+              <a:ext cx="2238375" cy="1990725"/>
+            </a:xfrm>
+            <a:prstGeom prst="rect">
+              <a:avLst/>
+            </a:prstGeom>
+          </p:spPr>
+        </p:pic>
+        <p:sp>
+          <p:nvSpPr>
+            <p:cNvPr id="19" name="Rectangle 18"/>
+            <p:cNvSpPr/>
+            <p:nvPr/>
+          </p:nvSpPr>
+          <p:spPr>
+            <a:xfrm>
+              <a:off x="5063515" y="6223227"/>
+              <a:ext cx="114013" cy="3631973"/>
+            </a:xfrm>
+            <a:prstGeom prst="rect">
+              <a:avLst/>
+            </a:prstGeom>
+            <a:solidFill>
+              <a:schemeClr val="bg1"/>
+            </a:solidFill>
+            <a:ln>
+              <a:solidFill>
+                <a:schemeClr val="bg1"/>
+              </a:solidFill>
+            </a:ln>
+          </p:spPr>
+          <p:style>
+            <a:lnRef idx="2">
+              <a:schemeClr val="accent1">
+                <a:shade val="50000"/>
+              </a:schemeClr>
+            </a:lnRef>
+            <a:fillRef idx="1">
+              <a:schemeClr val="accent1"/>
+            </a:fillRef>
+            <a:effectRef idx="0">
+              <a:schemeClr val="accent1"/>
+            </a:effectRef>
+            <a:fontRef idx="minor">
+              <a:schemeClr val="lt1"/>
+            </a:fontRef>
+          </p:style>
+          <p:txBody>
+            <a:bodyPr rtlCol="0" anchor="ctr"/>
+            <a:lstStyle/>
+            <a:p>
+              <a:pPr algn="ctr"/>
+              <a:endParaRPr lang="en-US"/>
+            </a:p>
+          </p:txBody>
+        </p:sp>
+        <p:sp>
+          <p:nvSpPr>
+            <p:cNvPr id="20" name="Rectangle 19"/>
+            <p:cNvSpPr/>
+            <p:nvPr/>
+          </p:nvSpPr>
+          <p:spPr>
+            <a:xfrm>
+              <a:off x="5145491" y="8230491"/>
+              <a:ext cx="2459995" cy="100709"/>
+            </a:xfrm>
+            <a:prstGeom prst="rect">
+              <a:avLst/>
+            </a:prstGeom>
+            <a:solidFill>
+              <a:schemeClr val="bg1"/>
+            </a:solidFill>
+            <a:ln>
+              <a:solidFill>
+                <a:schemeClr val="bg1"/>
+              </a:solidFill>
+            </a:ln>
+          </p:spPr>
+          <p:style>
+            <a:lnRef idx="2">
+              <a:schemeClr val="accent1">
+                <a:shade val="50000"/>
+              </a:schemeClr>
+            </a:lnRef>
+            <a:fillRef idx="1">
+              <a:schemeClr val="accent1"/>
+            </a:fillRef>
+            <a:effectRef idx="0">
+              <a:schemeClr val="accent1"/>
+            </a:effectRef>
+            <a:fontRef idx="minor">
+              <a:schemeClr val="lt1"/>
+            </a:fontRef>
+          </p:style>
+          <p:txBody>
+            <a:bodyPr rtlCol="0" anchor="ctr"/>
+            <a:lstStyle/>
+            <a:p>
+              <a:pPr algn="ctr"/>
+              <a:endParaRPr lang="en-US"/>
+            </a:p>
+          </p:txBody>
+        </p:sp>
+      </p:grpSp>
+    </p:spTree>
+    <p:extLst>
+      <p:ext uri="{BB962C8B-B14F-4D97-AF65-F5344CB8AC3E}">
+        <p14:creationId xmlns:p14="http://schemas.microsoft.com/office/powerpoint/2010/main" val="3146965609"/>
+      </p:ext>
+    </p:extLst>
+  </p:cSld>
+  <p:clrMapOvr>
+    <a:masterClrMapping/>
+  </p:clrMapOvr>
+</p:sld>
+</file>
+
+<file path=ppt/slides/slide3.xml><?xml version="1.0" encoding="utf-8"?>
+<p:sld xmlns:a="http://schemas.openxmlformats.org/drawingml/2006/main" xmlns:r="http://schemas.openxmlformats.org/officeDocument/2006/relationships" xmlns:p="http://schemas.openxmlformats.org/presentationml/2006/main">
+  <p:cSld>
+    <p:spTree>
+      <p:nvGrpSpPr>
+        <p:cNvPr id="1" name=""/>
+        <p:cNvGrpSpPr/>
+        <p:nvPr/>
+      </p:nvGrpSpPr>
+      <p:grpSpPr>
+        <a:xfrm>
+          <a:off x="0" y="0"/>
+          <a:ext cx="0" cy="0"/>
+          <a:chOff x="0" y="0"/>
+          <a:chExt cx="0" cy="0"/>
+        </a:xfrm>
+      </p:grpSpPr>
+      <p:grpSp>
+        <p:nvGrpSpPr>
+          <p:cNvPr id="5" name="Group 4"/>
+          <p:cNvGrpSpPr/>
+          <p:nvPr/>
+        </p:nvGrpSpPr>
+        <p:grpSpPr>
+          <a:xfrm>
+            <a:off x="2671207" y="1094760"/>
+            <a:ext cx="12300549" cy="5353765"/>
+            <a:chOff x="3200708" y="5540991"/>
+            <a:chExt cx="12300549" cy="5353765"/>
+          </a:xfrm>
+        </p:grpSpPr>
+        <p:sp>
+          <p:nvSpPr>
+            <p:cNvPr id="7" name="Rectangle 6"/>
+            <p:cNvSpPr/>
+            <p:nvPr/>
+          </p:nvSpPr>
+          <p:spPr>
+            <a:xfrm>
+              <a:off x="5580729" y="6008556"/>
+              <a:ext cx="582711" cy="1730524"/>
             </a:xfrm>
             <a:prstGeom prst="rect">
               <a:avLst/>
@@ -5580,8 +6138,8 @@
           </p:nvSpPr>
           <p:spPr>
             <a:xfrm>
-              <a:off x="8008242" y="16973499"/>
-              <a:ext cx="696344" cy="569386"/>
+              <a:off x="6290121" y="8007779"/>
+              <a:ext cx="348172" cy="284693"/>
             </a:xfrm>
             <a:prstGeom prst="rect">
               <a:avLst/>
@@ -5598,7 +6156,6 @@
                 <a:rPr lang="en-US" sz="1250" dirty="0"/>
                 <a:t>32</a:t>
               </a:r>
-              <a:endParaRPr lang="en-US" sz="1250" dirty="0"/>
             </a:p>
           </p:txBody>
         </p:sp>
@@ -5610,8 +6167,8 @@
           </p:nvSpPr>
           <p:spPr>
             <a:xfrm>
-              <a:off x="8898714" y="16973499"/>
-              <a:ext cx="696344" cy="569386"/>
+              <a:off x="6735357" y="8007779"/>
+              <a:ext cx="348172" cy="284693"/>
             </a:xfrm>
             <a:prstGeom prst="rect">
               <a:avLst/>
@@ -5628,7 +6185,6 @@
                 <a:rPr lang="en-US" sz="1250" dirty="0"/>
                 <a:t>32</a:t>
               </a:r>
-              <a:endParaRPr lang="en-US" sz="1250" dirty="0"/>
             </a:p>
           </p:txBody>
         </p:sp>
@@ -5640,8 +6196,8 @@
           </p:nvGrpSpPr>
           <p:grpSpPr>
             <a:xfrm>
-              <a:off x="6168521" y="13032076"/>
-              <a:ext cx="1746101" cy="4184289"/>
+              <a:off x="5370261" y="6037068"/>
+              <a:ext cx="873051" cy="2092145"/>
               <a:chOff x="18350689" y="8312592"/>
               <a:chExt cx="1746101" cy="4184289"/>
             </a:xfrm>
@@ -5760,7 +6316,6 @@
                   <a:rPr lang="en-US" sz="1250" dirty="0"/>
                   <a:t>3</a:t>
                 </a:r>
-                <a:endParaRPr lang="en-US" sz="1250" dirty="0"/>
               </a:p>
             </p:txBody>
           </p:sp>
@@ -5790,7 +6345,6 @@
                   <a:rPr lang="en-US" sz="1250" dirty="0"/>
                   <a:t>16</a:t>
                 </a:r>
-                <a:endParaRPr lang="en-US" sz="1250" dirty="0"/>
               </a:p>
             </p:txBody>
           </p:sp>
@@ -5820,7 +6374,6 @@
                   <a:rPr lang="en-US" sz="1250" dirty="0"/>
                   <a:t>16</a:t>
                 </a:r>
-                <a:endParaRPr lang="en-US" sz="1250" dirty="0"/>
               </a:p>
             </p:txBody>
           </p:sp>
@@ -6009,8 +6562,8 @@
           </p:nvSpPr>
           <p:spPr>
             <a:xfrm>
-              <a:off x="7623670" y="18588515"/>
-              <a:ext cx="388374" cy="484632"/>
+              <a:off x="6097835" y="8815287"/>
+              <a:ext cx="194187" cy="242316"/>
             </a:xfrm>
             <a:prstGeom prst="rightArrow">
               <a:avLst/>
@@ -6057,8 +6610,8 @@
           </p:nvSpPr>
           <p:spPr>
             <a:xfrm>
-              <a:off x="8512912" y="18588515"/>
-              <a:ext cx="388374" cy="484632"/>
+              <a:off x="6542456" y="8815287"/>
+              <a:ext cx="194187" cy="242316"/>
             </a:xfrm>
             <a:prstGeom prst="rightArrow">
               <a:avLst/>
@@ -6105,8 +6658,8 @@
           </p:nvSpPr>
           <p:spPr>
             <a:xfrm>
-              <a:off x="7373236" y="17459231"/>
-              <a:ext cx="182880" cy="2743200"/>
+              <a:off x="5972618" y="8250645"/>
+              <a:ext cx="91440" cy="1371600"/>
             </a:xfrm>
             <a:prstGeom prst="rect">
               <a:avLst/>
@@ -6145,8 +6698,8 @@
           </p:nvSpPr>
           <p:spPr>
             <a:xfrm>
-              <a:off x="8079598" y="17459231"/>
-              <a:ext cx="365760" cy="2743200"/>
+              <a:off x="6325799" y="8250645"/>
+              <a:ext cx="182880" cy="1371600"/>
             </a:xfrm>
             <a:prstGeom prst="rect">
               <a:avLst/>
@@ -6185,8 +6738,8 @@
           </p:nvSpPr>
           <p:spPr>
             <a:xfrm>
-              <a:off x="8968839" y="17459231"/>
-              <a:ext cx="365760" cy="2743200"/>
+              <a:off x="6770420" y="8250645"/>
+              <a:ext cx="182880" cy="1371600"/>
             </a:xfrm>
             <a:prstGeom prst="rect">
               <a:avLst/>
@@ -6225,8 +6778,8 @@
           </p:nvSpPr>
           <p:spPr>
             <a:xfrm flipV="1">
-              <a:off x="16770017" y="20444069"/>
-              <a:ext cx="409094" cy="780264"/>
+              <a:off x="10671009" y="9743064"/>
+              <a:ext cx="204547" cy="390132"/>
             </a:xfrm>
             <a:prstGeom prst="downArrow">
               <a:avLst/>
@@ -6273,8 +6826,8 @@
           </p:nvSpPr>
           <p:spPr>
             <a:xfrm flipH="1">
-              <a:off x="18566429" y="20403616"/>
-              <a:ext cx="696344" cy="569386"/>
+              <a:off x="11569215" y="9722838"/>
+              <a:ext cx="348172" cy="284693"/>
             </a:xfrm>
             <a:prstGeom prst="rect">
               <a:avLst/>
@@ -6291,7 +6844,6 @@
                 <a:rPr lang="en-US" sz="1250" dirty="0"/>
                 <a:t>64</a:t>
               </a:r>
-              <a:endParaRPr lang="en-US" sz="1250" dirty="0"/>
             </a:p>
           </p:txBody>
         </p:sp>
@@ -6303,8 +6855,8 @@
           </p:nvSpPr>
           <p:spPr>
             <a:xfrm flipH="1">
-              <a:off x="18641485" y="17569555"/>
-              <a:ext cx="365760" cy="2743200"/>
+              <a:off x="11606743" y="8305807"/>
+              <a:ext cx="182880" cy="1371600"/>
             </a:xfrm>
             <a:prstGeom prst="rect">
               <a:avLst/>
@@ -6343,8 +6895,8 @@
           </p:nvSpPr>
           <p:spPr>
             <a:xfrm flipH="1">
-              <a:off x="17708890" y="17569555"/>
-              <a:ext cx="365760" cy="2743200"/>
+              <a:off x="11140445" y="8305807"/>
+              <a:ext cx="182880" cy="1371600"/>
             </a:xfrm>
             <a:prstGeom prst="rect">
               <a:avLst/>
@@ -6383,8 +6935,8 @@
           </p:nvGrpSpPr>
           <p:grpSpPr>
             <a:xfrm>
-              <a:off x="16425841" y="17569555"/>
-              <a:ext cx="731520" cy="2743200"/>
+              <a:off x="10498921" y="8305807"/>
+              <a:ext cx="365760" cy="1371600"/>
               <a:chOff x="28554490" y="16388363"/>
               <a:chExt cx="1463709" cy="2743200"/>
             </a:xfrm>
@@ -6486,8 +7038,8 @@
           </p:nvSpPr>
           <p:spPr>
             <a:xfrm>
-              <a:off x="10291393" y="18171046"/>
-              <a:ext cx="6030280" cy="1179420"/>
+              <a:off x="7431697" y="8606553"/>
+              <a:ext cx="3015140" cy="589710"/>
             </a:xfrm>
             <a:prstGeom prst="rightArrow">
               <a:avLst/>
@@ -6534,8 +7086,8 @@
           </p:nvSpPr>
           <p:spPr>
             <a:xfrm flipV="1">
-              <a:off x="18598151" y="16732172"/>
-              <a:ext cx="409094" cy="780264"/>
+              <a:off x="11585076" y="7887116"/>
+              <a:ext cx="204547" cy="390132"/>
             </a:xfrm>
             <a:prstGeom prst="downArrow">
               <a:avLst/>
@@ -6582,8 +7134,8 @@
           </p:nvSpPr>
           <p:spPr>
             <a:xfrm flipH="1">
-              <a:off x="18598151" y="13285547"/>
-              <a:ext cx="696344" cy="569386"/>
+              <a:off x="11585076" y="6163803"/>
+              <a:ext cx="348172" cy="284693"/>
             </a:xfrm>
             <a:prstGeom prst="rect">
               <a:avLst/>
@@ -6600,7 +7152,6 @@
                 <a:rPr lang="en-US" sz="1250" dirty="0"/>
                 <a:t>32</a:t>
               </a:r>
-              <a:endParaRPr lang="en-US" sz="1250" dirty="0"/>
             </a:p>
           </p:txBody>
         </p:sp>
@@ -6612,8 +7163,8 @@
           </p:nvSpPr>
           <p:spPr>
             <a:xfrm>
-              <a:off x="19048936" y="14866325"/>
-              <a:ext cx="388374" cy="484632"/>
+              <a:off x="11810468" y="6954192"/>
+              <a:ext cx="194187" cy="242316"/>
             </a:xfrm>
             <a:prstGeom prst="rightArrow">
               <a:avLst/>
@@ -6660,8 +7211,8 @@
           </p:nvSpPr>
           <p:spPr>
             <a:xfrm flipH="1">
-              <a:off x="19511678" y="13737041"/>
-              <a:ext cx="182880" cy="2743200"/>
+              <a:off x="12041839" y="6389550"/>
+              <a:ext cx="91440" cy="1371600"/>
             </a:xfrm>
             <a:prstGeom prst="rect">
               <a:avLst/>
@@ -6700,8 +7251,8 @@
           </p:nvGrpSpPr>
           <p:grpSpPr>
             <a:xfrm>
-              <a:off x="18608808" y="13737041"/>
-              <a:ext cx="365760" cy="2743200"/>
+              <a:off x="11590404" y="6389550"/>
+              <a:ext cx="182880" cy="1371600"/>
               <a:chOff x="28554490" y="16388363"/>
               <a:chExt cx="1463709" cy="2743200"/>
             </a:xfrm>
@@ -6803,8 +7354,8 @@
           </p:nvSpPr>
           <p:spPr>
             <a:xfrm flipH="1">
-              <a:off x="19326163" y="13285547"/>
-              <a:ext cx="696344" cy="569386"/>
+              <a:off x="11949082" y="6163803"/>
+              <a:ext cx="348172" cy="284693"/>
             </a:xfrm>
             <a:prstGeom prst="rect">
               <a:avLst/>
@@ -6821,7 +7372,6 @@
                 <a:rPr lang="en-US" sz="1250" dirty="0"/>
                 <a:t>32</a:t>
               </a:r>
-              <a:endParaRPr lang="en-US" sz="1250" dirty="0"/>
             </a:p>
           </p:txBody>
         </p:sp>
@@ -6833,8 +7383,8 @@
           </p:nvSpPr>
           <p:spPr>
             <a:xfrm>
-              <a:off x="19780990" y="14866325"/>
-              <a:ext cx="388374" cy="484632"/>
+              <a:off x="12176495" y="6954192"/>
+              <a:ext cx="194187" cy="242316"/>
             </a:xfrm>
             <a:prstGeom prst="rightArrow">
               <a:avLst/>
@@ -6881,8 +7431,8 @@
           </p:nvSpPr>
           <p:spPr>
             <a:xfrm flipH="1">
-              <a:off x="20243731" y="13737041"/>
-              <a:ext cx="91440" cy="2743200"/>
+              <a:off x="12407866" y="6389550"/>
+              <a:ext cx="45720" cy="1371600"/>
             </a:xfrm>
             <a:prstGeom prst="rect">
               <a:avLst/>
@@ -6924,8 +7474,8 @@
           </p:nvSpPr>
           <p:spPr>
             <a:xfrm flipH="1">
-              <a:off x="20122485" y="13285547"/>
-              <a:ext cx="532840" cy="569386"/>
+              <a:off x="12347243" y="6163803"/>
+              <a:ext cx="266420" cy="284693"/>
             </a:xfrm>
             <a:prstGeom prst="rect">
               <a:avLst/>
@@ -6953,8 +7503,8 @@
           </p:nvSpPr>
           <p:spPr>
             <a:xfrm>
-              <a:off x="7911092" y="14222716"/>
-              <a:ext cx="10529085" cy="1343524"/>
+              <a:off x="6241546" y="6632388"/>
+              <a:ext cx="5264543" cy="671762"/>
             </a:xfrm>
             <a:prstGeom prst="rightArrow">
               <a:avLst/>
@@ -7001,8 +7551,8 @@
           </p:nvGrpSpPr>
           <p:grpSpPr>
             <a:xfrm>
-              <a:off x="19724917" y="17818808"/>
-              <a:ext cx="6314836" cy="4472643"/>
+              <a:off x="12148459" y="8430434"/>
+              <a:ext cx="3157418" cy="2236322"/>
               <a:chOff x="19111384" y="19891693"/>
               <a:chExt cx="6314836" cy="4472643"/>
             </a:xfrm>
@@ -7277,7 +7827,6 @@
                   <a:rPr lang="en-US" sz="2000" dirty="0"/>
                   <a:t> or Add</a:t>
                 </a:r>
-                <a:endParaRPr lang="en-US" sz="2000" dirty="0"/>
               </a:p>
             </p:txBody>
           </p:sp>
@@ -7480,8 +8029,8 @@
           </p:nvSpPr>
           <p:spPr>
             <a:xfrm>
-              <a:off x="9834345" y="20444069"/>
-              <a:ext cx="409094" cy="780264"/>
+              <a:off x="7203173" y="9743064"/>
+              <a:ext cx="204547" cy="390132"/>
             </a:xfrm>
             <a:prstGeom prst="downArrow">
               <a:avLst/>
@@ -7528,8 +8077,8 @@
           </p:nvSpPr>
           <p:spPr>
             <a:xfrm>
-              <a:off x="9164218" y="21318478"/>
-              <a:ext cx="1828800" cy="685800"/>
+              <a:off x="6868109" y="10180269"/>
+              <a:ext cx="914400" cy="342900"/>
             </a:xfrm>
             <a:prstGeom prst="rect">
               <a:avLst/>
@@ -7568,8 +8117,8 @@
           </p:nvSpPr>
           <p:spPr>
             <a:xfrm>
-              <a:off x="11165404" y="21419062"/>
-              <a:ext cx="914400" cy="484632"/>
+              <a:off x="7868702" y="10230561"/>
+              <a:ext cx="457200" cy="242316"/>
             </a:xfrm>
             <a:prstGeom prst="rightArrow">
               <a:avLst/>
@@ -7616,8 +8165,8 @@
           </p:nvSpPr>
           <p:spPr>
             <a:xfrm>
-              <a:off x="12252190" y="21318478"/>
-              <a:ext cx="2286000" cy="685800"/>
+              <a:off x="8412095" y="10180269"/>
+              <a:ext cx="1143000" cy="342900"/>
             </a:xfrm>
             <a:prstGeom prst="rect">
               <a:avLst/>
@@ -7656,8 +8205,8 @@
           </p:nvSpPr>
           <p:spPr>
             <a:xfrm>
-              <a:off x="13110746" y="22139098"/>
-              <a:ext cx="696344" cy="569386"/>
+              <a:off x="8841373" y="10590579"/>
+              <a:ext cx="348172" cy="284693"/>
             </a:xfrm>
             <a:prstGeom prst="rect">
               <a:avLst/>
@@ -7674,7 +8223,6 @@
                 <a:rPr lang="en-US" sz="1250" dirty="0"/>
                 <a:t>64</a:t>
               </a:r>
-              <a:endParaRPr lang="en-US" sz="1250" dirty="0"/>
             </a:p>
           </p:txBody>
         </p:sp>
@@ -7686,8 +8234,8 @@
           </p:nvSpPr>
           <p:spPr>
             <a:xfrm>
-              <a:off x="14710576" y="21436847"/>
-              <a:ext cx="914400" cy="484632"/>
+              <a:off x="9641288" y="10239453"/>
+              <a:ext cx="457200" cy="242316"/>
             </a:xfrm>
             <a:prstGeom prst="rightArrow">
               <a:avLst/>
@@ -7734,8 +8282,8 @@
           </p:nvSpPr>
           <p:spPr>
             <a:xfrm>
-              <a:off x="15797362" y="21301743"/>
-              <a:ext cx="2286000" cy="685800"/>
+              <a:off x="10184681" y="10171901"/>
+              <a:ext cx="1143000" cy="342900"/>
             </a:xfrm>
             <a:prstGeom prst="rect">
               <a:avLst/>
@@ -7774,8 +8322,8 @@
           </p:nvSpPr>
           <p:spPr>
             <a:xfrm>
-              <a:off x="16648887" y="22074412"/>
-              <a:ext cx="696344" cy="569386"/>
+              <a:off x="10610444" y="10558236"/>
+              <a:ext cx="348172" cy="284693"/>
             </a:xfrm>
             <a:prstGeom prst="rect">
               <a:avLst/>
@@ -7792,7 +8340,6 @@
                 <a:rPr lang="en-US" sz="1250" dirty="0"/>
                 <a:t>64</a:t>
               </a:r>
-              <a:endParaRPr lang="en-US" sz="1250" dirty="0"/>
             </a:p>
           </p:txBody>
         </p:sp>
@@ -7804,8 +8351,8 @@
           </p:nvSpPr>
           <p:spPr>
             <a:xfrm>
-              <a:off x="9784656" y="16959977"/>
-              <a:ext cx="696344" cy="569386"/>
+              <a:off x="7178328" y="8001018"/>
+              <a:ext cx="348172" cy="284693"/>
             </a:xfrm>
             <a:prstGeom prst="rect">
               <a:avLst/>
@@ -7822,7 +8369,6 @@
                 <a:rPr lang="en-US" sz="1250" dirty="0"/>
                 <a:t>32</a:t>
               </a:r>
-              <a:endParaRPr lang="en-US" sz="1250" dirty="0"/>
             </a:p>
           </p:txBody>
         </p:sp>
@@ -7834,8 +8380,8 @@
           </p:nvSpPr>
           <p:spPr>
             <a:xfrm>
-              <a:off x="9402153" y="18584176"/>
-              <a:ext cx="388374" cy="484632"/>
+              <a:off x="6987077" y="8813118"/>
+              <a:ext cx="194187" cy="242316"/>
             </a:xfrm>
             <a:prstGeom prst="rightArrow">
               <a:avLst/>
@@ -7882,8 +8428,8 @@
           </p:nvSpPr>
           <p:spPr>
             <a:xfrm>
-              <a:off x="9858080" y="17454892"/>
-              <a:ext cx="365760" cy="2743200"/>
+              <a:off x="7215040" y="8248476"/>
+              <a:ext cx="182880" cy="1371600"/>
             </a:xfrm>
             <a:prstGeom prst="rect">
               <a:avLst/>
@@ -7922,8 +8468,8 @@
           </p:nvSpPr>
           <p:spPr>
             <a:xfrm>
-              <a:off x="9790614" y="22004278"/>
-              <a:ext cx="696344" cy="569386"/>
+              <a:off x="7181307" y="10523169"/>
+              <a:ext cx="348172" cy="284693"/>
             </a:xfrm>
             <a:prstGeom prst="rect">
               <a:avLst/>
@@ -7940,7 +8486,198 @@
                 <a:rPr lang="en-US" sz="1250" dirty="0"/>
                 <a:t>64</a:t>
               </a:r>
-              <a:endParaRPr lang="en-US" sz="1250" dirty="0"/>
+            </a:p>
+          </p:txBody>
+        </p:sp>
+        <p:sp>
+          <p:nvSpPr>
+            <p:cNvPr id="239" name="TextBox 238"/>
+            <p:cNvSpPr txBox="1"/>
+            <p:nvPr/>
+          </p:nvSpPr>
+          <p:spPr>
+            <a:xfrm flipH="1">
+              <a:off x="11102759" y="9724304"/>
+              <a:ext cx="348172" cy="284693"/>
+            </a:xfrm>
+            <a:prstGeom prst="rect">
+              <a:avLst/>
+            </a:prstGeom>
+            <a:noFill/>
+          </p:spPr>
+          <p:txBody>
+            <a:bodyPr wrap="none" rtlCol="0">
+              <a:spAutoFit/>
+            </a:bodyPr>
+            <a:lstStyle/>
+            <a:p>
+              <a:r>
+                <a:rPr lang="en-US" sz="1250" dirty="0"/>
+                <a:t>64</a:t>
+              </a:r>
+            </a:p>
+          </p:txBody>
+        </p:sp>
+        <p:sp>
+          <p:nvSpPr>
+            <p:cNvPr id="242" name="TextBox 241"/>
+            <p:cNvSpPr txBox="1"/>
+            <p:nvPr/>
+          </p:nvSpPr>
+          <p:spPr>
+            <a:xfrm>
+              <a:off x="4391877" y="6775908"/>
+              <a:ext cx="1003095" cy="430887"/>
+            </a:xfrm>
+            <a:prstGeom prst="rect">
+              <a:avLst/>
+            </a:prstGeom>
+            <a:noFill/>
+          </p:spPr>
+          <p:txBody>
+            <a:bodyPr wrap="none" rtlCol="0">
+              <a:spAutoFit/>
+            </a:bodyPr>
+            <a:lstStyle/>
+            <a:p>
+              <a:r>
+                <a:rPr lang="en-US" sz="2200" dirty="0"/>
+                <a:t>Layer 0</a:t>
+              </a:r>
+            </a:p>
+          </p:txBody>
+        </p:sp>
+        <p:sp>
+          <p:nvSpPr>
+            <p:cNvPr id="243" name="TextBox 242"/>
+            <p:cNvSpPr txBox="1"/>
+            <p:nvPr/>
+          </p:nvSpPr>
+          <p:spPr>
+            <a:xfrm>
+              <a:off x="4392294" y="8473826"/>
+              <a:ext cx="1003095" cy="430887"/>
+            </a:xfrm>
+            <a:prstGeom prst="rect">
+              <a:avLst/>
+            </a:prstGeom>
+            <a:noFill/>
+          </p:spPr>
+          <p:txBody>
+            <a:bodyPr wrap="none" rtlCol="0">
+              <a:spAutoFit/>
+            </a:bodyPr>
+            <a:lstStyle/>
+            <a:p>
+              <a:r>
+                <a:rPr lang="en-US" sz="2200" dirty="0"/>
+                <a:t>Layer 1</a:t>
+              </a:r>
+            </a:p>
+          </p:txBody>
+        </p:sp>
+        <p:sp>
+          <p:nvSpPr>
+            <p:cNvPr id="244" name="TextBox 243"/>
+            <p:cNvSpPr txBox="1"/>
+            <p:nvPr/>
+          </p:nvSpPr>
+          <p:spPr>
+            <a:xfrm>
+              <a:off x="4391877" y="10171743"/>
+              <a:ext cx="1003095" cy="430887"/>
+            </a:xfrm>
+            <a:prstGeom prst="rect">
+              <a:avLst/>
+            </a:prstGeom>
+            <a:noFill/>
+          </p:spPr>
+          <p:txBody>
+            <a:bodyPr wrap="none" rtlCol="0">
+              <a:spAutoFit/>
+            </a:bodyPr>
+            <a:lstStyle/>
+            <a:p>
+              <a:r>
+                <a:rPr lang="en-US" sz="2200" dirty="0"/>
+                <a:t>Layer 2</a:t>
+              </a:r>
+            </a:p>
+          </p:txBody>
+        </p:sp>
+        <p:sp>
+          <p:nvSpPr>
+            <p:cNvPr id="3" name="TextBox 2"/>
+            <p:cNvSpPr txBox="1"/>
+            <p:nvPr/>
+          </p:nvSpPr>
+          <p:spPr>
+            <a:xfrm>
+              <a:off x="3200708" y="8129213"/>
+              <a:ext cx="362600" cy="461665"/>
+            </a:xfrm>
+            <a:prstGeom prst="rect">
+              <a:avLst/>
+            </a:prstGeom>
+            <a:noFill/>
+          </p:spPr>
+          <p:txBody>
+            <a:bodyPr wrap="none" rtlCol="0">
+              <a:spAutoFit/>
+            </a:bodyPr>
+            <a:lstStyle/>
+            <a:p>
+              <a:r>
+                <a:rPr lang="en-US" sz="2400" dirty="0" smtClean="0"/>
+                <a:t>A</a:t>
+              </a:r>
+              <a:endParaRPr lang="en-US" sz="2400" dirty="0"/>
+            </a:p>
+          </p:txBody>
+        </p:sp>
+        <p:sp>
+          <p:nvSpPr>
+            <p:cNvPr id="4" name="Rectangle 3"/>
+            <p:cNvSpPr/>
+            <p:nvPr/>
+          </p:nvSpPr>
+          <p:spPr>
+            <a:xfrm>
+              <a:off x="4115379" y="5722213"/>
+              <a:ext cx="11385878" cy="5172543"/>
+            </a:xfrm>
+            <a:prstGeom prst="rect">
+              <a:avLst/>
+            </a:prstGeom>
+            <a:noFill/>
+            <a:ln>
+              <a:solidFill>
+                <a:schemeClr val="tx1"/>
+              </a:solidFill>
+            </a:ln>
+          </p:spPr>
+          <p:style>
+            <a:lnRef idx="2">
+              <a:schemeClr val="accent1">
+                <a:shade val="50000"/>
+              </a:schemeClr>
+            </a:lnRef>
+            <a:fillRef idx="1">
+              <a:schemeClr val="accent1"/>
+            </a:fillRef>
+            <a:effectRef idx="0">
+              <a:schemeClr val="accent1"/>
+            </a:effectRef>
+            <a:fontRef idx="minor">
+              <a:schemeClr val="lt1"/>
+            </a:fontRef>
+          </p:style>
+          <p:txBody>
+            <a:bodyPr rtlCol="0" anchor="ctr"/>
+            <a:lstStyle/>
+            <a:p>
+              <a:pPr algn="ctr"/>
+              <a:endParaRPr lang="en-US"/>
             </a:p>
           </p:txBody>
         </p:sp>
@@ -7952,8 +8689,8 @@
           </p:nvSpPr>
           <p:spPr>
             <a:xfrm rot="4733698">
-              <a:off x="12612654" y="7895566"/>
-              <a:ext cx="2125169" cy="10413888"/>
+              <a:off x="8592327" y="3468812"/>
+              <a:ext cx="1062585" cy="5206944"/>
             </a:xfrm>
             <a:prstGeom prst="downArrow">
               <a:avLst/>
@@ -7995,16 +8732,4915 @@
             </a:p>
           </p:txBody>
         </p:sp>
+      </p:grpSp>
+      <p:sp>
+        <p:nvSpPr>
+          <p:cNvPr id="216" name="TextBox 215"/>
+          <p:cNvSpPr txBox="1"/>
+          <p:nvPr/>
+        </p:nvSpPr>
+        <p:spPr>
+          <a:xfrm>
+            <a:off x="2701998" y="8674102"/>
+            <a:ext cx="351378" cy="461665"/>
+          </a:xfrm>
+          <a:prstGeom prst="rect">
+            <a:avLst/>
+          </a:prstGeom>
+          <a:noFill/>
+        </p:spPr>
+        <p:txBody>
+          <a:bodyPr wrap="none" rtlCol="0">
+            <a:spAutoFit/>
+          </a:bodyPr>
+          <a:lstStyle/>
+          <a:p>
+            <a:r>
+              <a:rPr lang="en-US" sz="2400" dirty="0" smtClean="0"/>
+              <a:t>B</a:t>
+            </a:r>
+            <a:endParaRPr lang="en-US" sz="2400" dirty="0"/>
+          </a:p>
+        </p:txBody>
+      </p:sp>
+      <p:grpSp>
+        <p:nvGrpSpPr>
+          <p:cNvPr id="10" name="Group 9"/>
+          <p:cNvGrpSpPr/>
+          <p:nvPr/>
+        </p:nvGrpSpPr>
+        <p:grpSpPr>
+          <a:xfrm>
+            <a:off x="2701998" y="10750739"/>
+            <a:ext cx="12690402" cy="5403661"/>
+            <a:chOff x="2701998" y="10750739"/>
+            <a:chExt cx="12690402" cy="5403661"/>
+          </a:xfrm>
+        </p:grpSpPr>
+        <p:grpSp>
+          <p:nvGrpSpPr>
+            <p:cNvPr id="8" name="Group 7"/>
+            <p:cNvGrpSpPr/>
+            <p:nvPr/>
+          </p:nvGrpSpPr>
+          <p:grpSpPr>
+            <a:xfrm>
+              <a:off x="3163476" y="10969373"/>
+              <a:ext cx="12041735" cy="4939426"/>
+              <a:chOff x="3253649" y="13185506"/>
+              <a:chExt cx="12041735" cy="4939426"/>
+            </a:xfrm>
+          </p:grpSpPr>
+          <p:sp>
+            <p:nvSpPr>
+              <p:cNvPr id="217" name="Right Arrow 216"/>
+              <p:cNvSpPr/>
+              <p:nvPr/>
+            </p:nvSpPr>
+            <p:spPr>
+              <a:xfrm>
+                <a:off x="4689886" y="14395136"/>
+                <a:ext cx="228600" cy="228600"/>
+              </a:xfrm>
+              <a:prstGeom prst="rightArrow">
+                <a:avLst/>
+              </a:prstGeom>
+              <a:solidFill>
+                <a:srgbClr val="00B050"/>
+              </a:solidFill>
+              <a:ln>
+                <a:solidFill>
+                  <a:schemeClr val="tx1"/>
+                </a:solidFill>
+              </a:ln>
+            </p:spPr>
+            <p:style>
+              <a:lnRef idx="2">
+                <a:schemeClr val="accent1">
+                  <a:shade val="50000"/>
+                </a:schemeClr>
+              </a:lnRef>
+              <a:fillRef idx="1">
+                <a:schemeClr val="accent1"/>
+              </a:fillRef>
+              <a:effectRef idx="0">
+                <a:schemeClr val="accent1"/>
+              </a:effectRef>
+              <a:fontRef idx="minor">
+                <a:schemeClr val="lt1"/>
+              </a:fontRef>
+            </p:style>
+            <p:txBody>
+              <a:bodyPr rtlCol="0" anchor="ctr"/>
+              <a:lstStyle/>
+              <a:p>
+                <a:pPr algn="ctr"/>
+                <a:endParaRPr lang="en-US" sz="450"/>
+              </a:p>
+            </p:txBody>
+          </p:sp>
+          <p:sp>
+            <p:nvSpPr>
+              <p:cNvPr id="218" name="Rectangle 217"/>
+              <p:cNvSpPr/>
+              <p:nvPr/>
+            </p:nvSpPr>
+            <p:spPr>
+              <a:xfrm>
+                <a:off x="4457767" y="13823636"/>
+                <a:ext cx="228600" cy="1371600"/>
+              </a:xfrm>
+              <a:prstGeom prst="rect">
+                <a:avLst/>
+              </a:prstGeom>
+              <a:ln>
+                <a:solidFill>
+                  <a:schemeClr val="tx1"/>
+                </a:solidFill>
+              </a:ln>
+            </p:spPr>
+            <p:style>
+              <a:lnRef idx="2">
+                <a:schemeClr val="accent1">
+                  <a:shade val="50000"/>
+                </a:schemeClr>
+              </a:lnRef>
+              <a:fillRef idx="1">
+                <a:schemeClr val="accent1"/>
+              </a:fillRef>
+              <a:effectRef idx="0">
+                <a:schemeClr val="accent1"/>
+              </a:effectRef>
+              <a:fontRef idx="minor">
+                <a:schemeClr val="lt1"/>
+              </a:fontRef>
+            </p:style>
+            <p:txBody>
+              <a:bodyPr vert="vert270" rtlCol="0" anchor="ctr"/>
+              <a:lstStyle/>
+              <a:p>
+                <a:pPr algn="ctr"/>
+                <a:r>
+                  <a:rPr lang="en-US" sz="1200" dirty="0">
+                    <a:solidFill>
+                      <a:schemeClr val="tx1"/>
+                    </a:solidFill>
+                  </a:rPr>
+                  <a:t>Image</a:t>
+                </a:r>
+              </a:p>
+            </p:txBody>
+          </p:sp>
+          <p:sp>
+            <p:nvSpPr>
+              <p:cNvPr id="221" name="Down Arrow 220"/>
+              <p:cNvSpPr/>
+              <p:nvPr/>
+            </p:nvSpPr>
+            <p:spPr>
+              <a:xfrm flipV="1">
+                <a:off x="12016964" y="15580617"/>
+                <a:ext cx="204547" cy="390132"/>
+              </a:xfrm>
+              <a:prstGeom prst="downArrow">
+                <a:avLst/>
+              </a:prstGeom>
+              <a:solidFill>
+                <a:srgbClr val="00B050"/>
+              </a:solidFill>
+              <a:ln>
+                <a:solidFill>
+                  <a:schemeClr val="tx1"/>
+                </a:solidFill>
+              </a:ln>
+            </p:spPr>
+            <p:style>
+              <a:lnRef idx="2">
+                <a:schemeClr val="accent1">
+                  <a:shade val="50000"/>
+                </a:schemeClr>
+              </a:lnRef>
+              <a:fillRef idx="1">
+                <a:schemeClr val="accent1"/>
+              </a:fillRef>
+              <a:effectRef idx="0">
+                <a:schemeClr val="accent1"/>
+              </a:effectRef>
+              <a:fontRef idx="minor">
+                <a:schemeClr val="lt1"/>
+              </a:fontRef>
+            </p:style>
+            <p:txBody>
+              <a:bodyPr rtlCol="0" anchor="ctr"/>
+              <a:lstStyle/>
+              <a:p>
+                <a:pPr algn="ctr"/>
+                <a:endParaRPr lang="en-US" sz="450"/>
+              </a:p>
+            </p:txBody>
+          </p:sp>
+          <p:sp>
+            <p:nvSpPr>
+              <p:cNvPr id="229" name="Down Arrow 228"/>
+              <p:cNvSpPr/>
+              <p:nvPr/>
+            </p:nvSpPr>
+            <p:spPr>
+              <a:xfrm>
+                <a:off x="12016964" y="16212134"/>
+                <a:ext cx="204547" cy="390132"/>
+              </a:xfrm>
+              <a:prstGeom prst="downArrow">
+                <a:avLst/>
+              </a:prstGeom>
+              <a:solidFill>
+                <a:srgbClr val="C00000"/>
+              </a:solidFill>
+              <a:ln>
+                <a:solidFill>
+                  <a:schemeClr val="tx1"/>
+                </a:solidFill>
+              </a:ln>
+            </p:spPr>
+            <p:style>
+              <a:lnRef idx="2">
+                <a:schemeClr val="accent1">
+                  <a:shade val="50000"/>
+                </a:schemeClr>
+              </a:lnRef>
+              <a:fillRef idx="1">
+                <a:schemeClr val="accent1"/>
+              </a:fillRef>
+              <a:effectRef idx="0">
+                <a:schemeClr val="accent1"/>
+              </a:effectRef>
+              <a:fontRef idx="minor">
+                <a:schemeClr val="lt1"/>
+              </a:fontRef>
+            </p:style>
+            <p:txBody>
+              <a:bodyPr rtlCol="0" anchor="ctr"/>
+              <a:lstStyle/>
+              <a:p>
+                <a:pPr algn="ctr"/>
+                <a:endParaRPr lang="en-US" sz="450"/>
+              </a:p>
+            </p:txBody>
+          </p:sp>
+          <p:sp>
+            <p:nvSpPr>
+              <p:cNvPr id="230" name="Right Arrow 229"/>
+              <p:cNvSpPr/>
+              <p:nvPr/>
+            </p:nvSpPr>
+            <p:spPr>
+              <a:xfrm>
+                <a:off x="11916323" y="16750985"/>
+                <a:ext cx="457200" cy="228600"/>
+              </a:xfrm>
+              <a:prstGeom prst="rightArrow">
+                <a:avLst/>
+              </a:prstGeom>
+              <a:solidFill>
+                <a:srgbClr val="00B050"/>
+              </a:solidFill>
+              <a:ln>
+                <a:solidFill>
+                  <a:schemeClr val="tx1"/>
+                </a:solidFill>
+              </a:ln>
+            </p:spPr>
+            <p:style>
+              <a:lnRef idx="2">
+                <a:schemeClr val="accent1">
+                  <a:shade val="50000"/>
+                </a:schemeClr>
+              </a:lnRef>
+              <a:fillRef idx="1">
+                <a:schemeClr val="accent1"/>
+              </a:fillRef>
+              <a:effectRef idx="0">
+                <a:schemeClr val="accent1"/>
+              </a:effectRef>
+              <a:fontRef idx="minor">
+                <a:schemeClr val="lt1"/>
+              </a:fontRef>
+            </p:style>
+            <p:txBody>
+              <a:bodyPr rtlCol="0" anchor="ctr"/>
+              <a:lstStyle/>
+              <a:p>
+                <a:pPr algn="ctr"/>
+                <a:endParaRPr lang="en-US" sz="450"/>
+              </a:p>
+            </p:txBody>
+          </p:sp>
+          <p:sp>
+            <p:nvSpPr>
+              <p:cNvPr id="235" name="Right Arrow 234"/>
+              <p:cNvSpPr/>
+              <p:nvPr/>
+            </p:nvSpPr>
+            <p:spPr>
+              <a:xfrm>
+                <a:off x="11915812" y="17169781"/>
+                <a:ext cx="457200" cy="228600"/>
+              </a:xfrm>
+              <a:prstGeom prst="rightArrow">
+                <a:avLst/>
+              </a:prstGeom>
+              <a:solidFill>
+                <a:srgbClr val="00B0F0"/>
+              </a:solidFill>
+              <a:ln>
+                <a:solidFill>
+                  <a:schemeClr val="tx1"/>
+                </a:solidFill>
+              </a:ln>
+            </p:spPr>
+            <p:style>
+              <a:lnRef idx="2">
+                <a:schemeClr val="accent1">
+                  <a:shade val="50000"/>
+                </a:schemeClr>
+              </a:lnRef>
+              <a:fillRef idx="1">
+                <a:schemeClr val="accent1"/>
+              </a:fillRef>
+              <a:effectRef idx="0">
+                <a:schemeClr val="accent1"/>
+              </a:effectRef>
+              <a:fontRef idx="minor">
+                <a:schemeClr val="lt1"/>
+              </a:fontRef>
+            </p:style>
+            <p:txBody>
+              <a:bodyPr rtlCol="0" anchor="ctr"/>
+              <a:lstStyle/>
+              <a:p>
+                <a:pPr algn="ctr"/>
+                <a:endParaRPr lang="en-US" sz="450"/>
+              </a:p>
+            </p:txBody>
+          </p:sp>
+          <p:sp>
+            <p:nvSpPr>
+              <p:cNvPr id="236" name="TextBox 235"/>
+              <p:cNvSpPr txBox="1"/>
+              <p:nvPr/>
+            </p:nvSpPr>
+            <p:spPr>
+              <a:xfrm>
+                <a:off x="12354387" y="15466760"/>
+                <a:ext cx="2150269" cy="707886"/>
+              </a:xfrm>
+              <a:prstGeom prst="rect">
+                <a:avLst/>
+              </a:prstGeom>
+              <a:noFill/>
+            </p:spPr>
+            <p:txBody>
+              <a:bodyPr wrap="none" rtlCol="0">
+                <a:spAutoFit/>
+              </a:bodyPr>
+              <a:lstStyle/>
+              <a:p>
+                <a:pPr algn="ctr"/>
+                <a:r>
+                  <a:rPr lang="en-US" sz="2000" dirty="0" smtClean="0"/>
+                  <a:t>Bilinear </a:t>
+                </a:r>
+                <a:r>
+                  <a:rPr lang="en-US" sz="2000" dirty="0" err="1" smtClean="0"/>
+                  <a:t>Upsample</a:t>
+                </a:r>
+                <a:r>
+                  <a:rPr lang="en-US" sz="2000" dirty="0" smtClean="0"/>
+                  <a:t>,</a:t>
+                </a:r>
+              </a:p>
+              <a:p>
+                <a:pPr algn="ctr"/>
+                <a:r>
+                  <a:rPr lang="en-US" sz="2000" dirty="0" smtClean="0"/>
+                  <a:t>Convolution 3x3x3</a:t>
+                </a:r>
+                <a:endParaRPr lang="en-US" sz="2000" dirty="0"/>
+              </a:p>
+            </p:txBody>
+          </p:sp>
+          <p:sp>
+            <p:nvSpPr>
+              <p:cNvPr id="237" name="TextBox 236"/>
+              <p:cNvSpPr txBox="1"/>
+              <p:nvPr/>
+            </p:nvSpPr>
+            <p:spPr>
+              <a:xfrm>
+                <a:off x="12374584" y="16203430"/>
+                <a:ext cx="2920800" cy="400110"/>
+              </a:xfrm>
+              <a:prstGeom prst="rect">
+                <a:avLst/>
+              </a:prstGeom>
+              <a:noFill/>
+            </p:spPr>
+            <p:txBody>
+              <a:bodyPr wrap="none" rtlCol="0">
+                <a:spAutoFit/>
+              </a:bodyPr>
+              <a:lstStyle/>
+              <a:p>
+                <a:r>
+                  <a:rPr lang="en-US" sz="2000" dirty="0" err="1"/>
+                  <a:t>Strided</a:t>
+                </a:r>
+                <a:r>
+                  <a:rPr lang="en-US" sz="2000" dirty="0"/>
+                  <a:t> </a:t>
+                </a:r>
+                <a:r>
+                  <a:rPr lang="en-US" sz="2000" dirty="0" smtClean="0"/>
+                  <a:t>Convolution 2x2x2</a:t>
+                </a:r>
+                <a:endParaRPr lang="en-US" sz="2000" dirty="0"/>
+              </a:p>
+            </p:txBody>
+          </p:sp>
+          <p:sp>
+            <p:nvSpPr>
+              <p:cNvPr id="238" name="TextBox 237"/>
+              <p:cNvSpPr txBox="1"/>
+              <p:nvPr/>
+            </p:nvSpPr>
+            <p:spPr>
+              <a:xfrm>
+                <a:off x="12509380" y="16683852"/>
+                <a:ext cx="2111284" cy="400110"/>
+              </a:xfrm>
+              <a:prstGeom prst="rect">
+                <a:avLst/>
+              </a:prstGeom>
+              <a:noFill/>
+            </p:spPr>
+            <p:txBody>
+              <a:bodyPr wrap="none" rtlCol="0">
+                <a:spAutoFit/>
+              </a:bodyPr>
+              <a:lstStyle/>
+              <a:p>
+                <a:r>
+                  <a:rPr lang="en-US" sz="2000" dirty="0" smtClean="0"/>
+                  <a:t>Convolution </a:t>
+                </a:r>
+                <a:r>
+                  <a:rPr lang="en-US" sz="2000" dirty="0"/>
+                  <a:t>3x3x3</a:t>
+                </a:r>
+              </a:p>
+            </p:txBody>
+          </p:sp>
+          <p:sp>
+            <p:nvSpPr>
+              <p:cNvPr id="240" name="TextBox 239"/>
+              <p:cNvSpPr txBox="1"/>
+              <p:nvPr/>
+            </p:nvSpPr>
+            <p:spPr>
+              <a:xfrm>
+                <a:off x="12510103" y="17104420"/>
+                <a:ext cx="2111284" cy="400110"/>
+              </a:xfrm>
+              <a:prstGeom prst="rect">
+                <a:avLst/>
+              </a:prstGeom>
+              <a:noFill/>
+            </p:spPr>
+            <p:txBody>
+              <a:bodyPr wrap="none" rtlCol="0">
+                <a:spAutoFit/>
+              </a:bodyPr>
+              <a:lstStyle/>
+              <a:p>
+                <a:r>
+                  <a:rPr lang="en-US" sz="2000" dirty="0" smtClean="0"/>
+                  <a:t>Convolution 1x1x1</a:t>
+                </a:r>
+                <a:endParaRPr lang="en-US" sz="2000" dirty="0"/>
+              </a:p>
+            </p:txBody>
+          </p:sp>
+          <p:sp>
+            <p:nvSpPr>
+              <p:cNvPr id="241" name="Rectangle 240"/>
+              <p:cNvSpPr/>
+              <p:nvPr/>
+            </p:nvSpPr>
+            <p:spPr>
+              <a:xfrm>
+                <a:off x="11723185" y="15361153"/>
+                <a:ext cx="3572199" cy="2763779"/>
+              </a:xfrm>
+              <a:prstGeom prst="rect">
+                <a:avLst/>
+              </a:prstGeom>
+              <a:noFill/>
+              <a:ln w="25400">
+                <a:solidFill>
+                  <a:schemeClr val="tx1"/>
+                </a:solidFill>
+              </a:ln>
+            </p:spPr>
+            <p:style>
+              <a:lnRef idx="2">
+                <a:schemeClr val="accent1">
+                  <a:shade val="50000"/>
+                </a:schemeClr>
+              </a:lnRef>
+              <a:fillRef idx="1">
+                <a:schemeClr val="accent1"/>
+              </a:fillRef>
+              <a:effectRef idx="0">
+                <a:schemeClr val="accent1"/>
+              </a:effectRef>
+              <a:fontRef idx="minor">
+                <a:schemeClr val="lt1"/>
+              </a:fontRef>
+            </p:style>
+            <p:txBody>
+              <a:bodyPr rtlCol="0" anchor="ctr"/>
+              <a:lstStyle/>
+              <a:p>
+                <a:pPr algn="ctr"/>
+                <a:endParaRPr lang="en-US" sz="450"/>
+              </a:p>
+            </p:txBody>
+          </p:sp>
+          <p:sp>
+            <p:nvSpPr>
+              <p:cNvPr id="246" name="TextBox 245"/>
+              <p:cNvSpPr txBox="1"/>
+              <p:nvPr/>
+            </p:nvSpPr>
+            <p:spPr>
+              <a:xfrm>
+                <a:off x="3253649" y="14229211"/>
+                <a:ext cx="1003095" cy="430887"/>
+              </a:xfrm>
+              <a:prstGeom prst="rect">
+                <a:avLst/>
+              </a:prstGeom>
+              <a:noFill/>
+            </p:spPr>
+            <p:txBody>
+              <a:bodyPr wrap="none" rtlCol="0">
+                <a:spAutoFit/>
+              </a:bodyPr>
+              <a:lstStyle/>
+              <a:p>
+                <a:r>
+                  <a:rPr lang="en-US" sz="2200" dirty="0"/>
+                  <a:t>Layer 0</a:t>
+                </a:r>
+              </a:p>
+            </p:txBody>
+          </p:sp>
+          <p:sp>
+            <p:nvSpPr>
+              <p:cNvPr id="247" name="TextBox 246"/>
+              <p:cNvSpPr txBox="1"/>
+              <p:nvPr/>
+            </p:nvSpPr>
+            <p:spPr>
+              <a:xfrm>
+                <a:off x="4672028" y="16001955"/>
+                <a:ext cx="1003095" cy="430887"/>
+              </a:xfrm>
+              <a:prstGeom prst="rect">
+                <a:avLst/>
+              </a:prstGeom>
+              <a:noFill/>
+            </p:spPr>
+            <p:txBody>
+              <a:bodyPr wrap="none" rtlCol="0">
+                <a:spAutoFit/>
+              </a:bodyPr>
+              <a:lstStyle/>
+              <a:p>
+                <a:r>
+                  <a:rPr lang="en-US" sz="2200" dirty="0"/>
+                  <a:t>Layer 1</a:t>
+                </a:r>
+              </a:p>
+            </p:txBody>
+          </p:sp>
+          <p:sp>
+            <p:nvSpPr>
+              <p:cNvPr id="248" name="Rectangle 247"/>
+              <p:cNvSpPr/>
+              <p:nvPr/>
+            </p:nvSpPr>
+            <p:spPr>
+              <a:xfrm>
+                <a:off x="4921317" y="13823636"/>
+                <a:ext cx="228600" cy="1371600"/>
+              </a:xfrm>
+              <a:prstGeom prst="rect">
+                <a:avLst/>
+              </a:prstGeom>
+              <a:ln>
+                <a:solidFill>
+                  <a:schemeClr val="tx1"/>
+                </a:solidFill>
+              </a:ln>
+            </p:spPr>
+            <p:style>
+              <a:lnRef idx="2">
+                <a:schemeClr val="accent1">
+                  <a:shade val="50000"/>
+                </a:schemeClr>
+              </a:lnRef>
+              <a:fillRef idx="1">
+                <a:schemeClr val="accent1"/>
+              </a:fillRef>
+              <a:effectRef idx="0">
+                <a:schemeClr val="accent1"/>
+              </a:effectRef>
+              <a:fontRef idx="minor">
+                <a:schemeClr val="lt1"/>
+              </a:fontRef>
+            </p:style>
+            <p:txBody>
+              <a:bodyPr vert="vert270" rtlCol="0" anchor="ctr"/>
+              <a:lstStyle/>
+              <a:p>
+                <a:pPr algn="ctr"/>
+                <a:endParaRPr lang="en-US" sz="1200" dirty="0">
+                  <a:solidFill>
+                    <a:schemeClr val="tx1"/>
+                  </a:solidFill>
+                </a:endParaRPr>
+              </a:p>
+            </p:txBody>
+          </p:sp>
+          <p:sp>
+            <p:nvSpPr>
+              <p:cNvPr id="249" name="Rectangle 248"/>
+              <p:cNvSpPr/>
+              <p:nvPr/>
+            </p:nvSpPr>
+            <p:spPr>
+              <a:xfrm>
+                <a:off x="5153436" y="13823636"/>
+                <a:ext cx="228600" cy="1371600"/>
+              </a:xfrm>
+              <a:prstGeom prst="rect">
+                <a:avLst/>
+              </a:prstGeom>
+              <a:solidFill>
+                <a:srgbClr val="FFFF00"/>
+              </a:solidFill>
+              <a:ln>
+                <a:solidFill>
+                  <a:schemeClr val="tx1"/>
+                </a:solidFill>
+              </a:ln>
+            </p:spPr>
+            <p:style>
+              <a:lnRef idx="2">
+                <a:schemeClr val="accent1">
+                  <a:shade val="50000"/>
+                </a:schemeClr>
+              </a:lnRef>
+              <a:fillRef idx="1">
+                <a:schemeClr val="accent1"/>
+              </a:fillRef>
+              <a:effectRef idx="0">
+                <a:schemeClr val="accent1"/>
+              </a:effectRef>
+              <a:fontRef idx="minor">
+                <a:schemeClr val="lt1"/>
+              </a:fontRef>
+            </p:style>
+            <p:txBody>
+              <a:bodyPr vert="vert270" rtlCol="0" anchor="ctr"/>
+              <a:lstStyle/>
+              <a:p>
+                <a:pPr algn="ctr"/>
+                <a:r>
+                  <a:rPr lang="en-US" sz="1200" dirty="0">
+                    <a:solidFill>
+                      <a:schemeClr val="tx1"/>
+                    </a:solidFill>
+                  </a:rPr>
+                  <a:t>Elu + BN</a:t>
+                </a:r>
+              </a:p>
+            </p:txBody>
+          </p:sp>
+          <p:sp>
+            <p:nvSpPr>
+              <p:cNvPr id="250" name="Right Arrow 249"/>
+              <p:cNvSpPr/>
+              <p:nvPr/>
+            </p:nvSpPr>
+            <p:spPr>
+              <a:xfrm>
+                <a:off x="5389664" y="14395136"/>
+                <a:ext cx="228600" cy="228600"/>
+              </a:xfrm>
+              <a:prstGeom prst="rightArrow">
+                <a:avLst/>
+              </a:prstGeom>
+              <a:solidFill>
+                <a:srgbClr val="00B050"/>
+              </a:solidFill>
+              <a:ln>
+                <a:solidFill>
+                  <a:schemeClr val="tx1"/>
+                </a:solidFill>
+              </a:ln>
+            </p:spPr>
+            <p:style>
+              <a:lnRef idx="2">
+                <a:schemeClr val="accent1">
+                  <a:shade val="50000"/>
+                </a:schemeClr>
+              </a:lnRef>
+              <a:fillRef idx="1">
+                <a:schemeClr val="accent1"/>
+              </a:fillRef>
+              <a:effectRef idx="0">
+                <a:schemeClr val="accent1"/>
+              </a:effectRef>
+              <a:fontRef idx="minor">
+                <a:schemeClr val="lt1"/>
+              </a:fontRef>
+            </p:style>
+            <p:txBody>
+              <a:bodyPr rtlCol="0" anchor="ctr"/>
+              <a:lstStyle/>
+              <a:p>
+                <a:pPr algn="ctr"/>
+                <a:endParaRPr lang="en-US" sz="450"/>
+              </a:p>
+            </p:txBody>
+          </p:sp>
+          <p:sp>
+            <p:nvSpPr>
+              <p:cNvPr id="251" name="Rectangle 250"/>
+              <p:cNvSpPr/>
+              <p:nvPr/>
+            </p:nvSpPr>
+            <p:spPr>
+              <a:xfrm>
+                <a:off x="5620917" y="13823636"/>
+                <a:ext cx="228600" cy="1371600"/>
+              </a:xfrm>
+              <a:prstGeom prst="rect">
+                <a:avLst/>
+              </a:prstGeom>
+              <a:ln>
+                <a:solidFill>
+                  <a:schemeClr val="tx1"/>
+                </a:solidFill>
+              </a:ln>
+            </p:spPr>
+            <p:style>
+              <a:lnRef idx="2">
+                <a:schemeClr val="accent1">
+                  <a:shade val="50000"/>
+                </a:schemeClr>
+              </a:lnRef>
+              <a:fillRef idx="1">
+                <a:schemeClr val="accent1"/>
+              </a:fillRef>
+              <a:effectRef idx="0">
+                <a:schemeClr val="accent1"/>
+              </a:effectRef>
+              <a:fontRef idx="minor">
+                <a:schemeClr val="lt1"/>
+              </a:fontRef>
+            </p:style>
+            <p:txBody>
+              <a:bodyPr vert="vert270" rtlCol="0" anchor="ctr"/>
+              <a:lstStyle/>
+              <a:p>
+                <a:pPr algn="ctr"/>
+                <a:endParaRPr lang="en-US" sz="1200" dirty="0">
+                  <a:solidFill>
+                    <a:schemeClr val="tx1"/>
+                  </a:solidFill>
+                </a:endParaRPr>
+              </a:p>
+            </p:txBody>
+          </p:sp>
+          <p:sp>
+            <p:nvSpPr>
+              <p:cNvPr id="252" name="Rectangle 251"/>
+              <p:cNvSpPr/>
+              <p:nvPr/>
+            </p:nvSpPr>
+            <p:spPr>
+              <a:xfrm>
+                <a:off x="5864013" y="13823636"/>
+                <a:ext cx="228600" cy="1371600"/>
+              </a:xfrm>
+              <a:prstGeom prst="rect">
+                <a:avLst/>
+              </a:prstGeom>
+              <a:ln>
+                <a:solidFill>
+                  <a:schemeClr val="tx1"/>
+                </a:solidFill>
+              </a:ln>
+            </p:spPr>
+            <p:style>
+              <a:lnRef idx="2">
+                <a:schemeClr val="accent1">
+                  <a:shade val="50000"/>
+                </a:schemeClr>
+              </a:lnRef>
+              <a:fillRef idx="1">
+                <a:schemeClr val="accent1"/>
+              </a:fillRef>
+              <a:effectRef idx="0">
+                <a:schemeClr val="accent1"/>
+              </a:effectRef>
+              <a:fontRef idx="minor">
+                <a:schemeClr val="lt1"/>
+              </a:fontRef>
+            </p:style>
+            <p:txBody>
+              <a:bodyPr vert="vert270" rtlCol="0" anchor="ctr"/>
+              <a:lstStyle/>
+              <a:p>
+                <a:pPr algn="ctr"/>
+                <a:endParaRPr lang="en-US" sz="1200" dirty="0">
+                  <a:solidFill>
+                    <a:schemeClr val="tx1"/>
+                  </a:solidFill>
+                </a:endParaRPr>
+              </a:p>
+            </p:txBody>
+          </p:sp>
+          <p:sp>
+            <p:nvSpPr>
+              <p:cNvPr id="253" name="Right Arrow 252"/>
+              <p:cNvSpPr/>
+              <p:nvPr/>
+            </p:nvSpPr>
+            <p:spPr>
+              <a:xfrm>
+                <a:off x="6324988" y="14395136"/>
+                <a:ext cx="228600" cy="228600"/>
+              </a:xfrm>
+              <a:prstGeom prst="rightArrow">
+                <a:avLst/>
+              </a:prstGeom>
+              <a:solidFill>
+                <a:srgbClr val="00B0F0"/>
+              </a:solidFill>
+              <a:ln>
+                <a:solidFill>
+                  <a:schemeClr val="tx1"/>
+                </a:solidFill>
+              </a:ln>
+            </p:spPr>
+            <p:style>
+              <a:lnRef idx="2">
+                <a:schemeClr val="accent1">
+                  <a:shade val="50000"/>
+                </a:schemeClr>
+              </a:lnRef>
+              <a:fillRef idx="1">
+                <a:schemeClr val="accent1"/>
+              </a:fillRef>
+              <a:effectRef idx="0">
+                <a:schemeClr val="accent1"/>
+              </a:effectRef>
+              <a:fontRef idx="minor">
+                <a:schemeClr val="lt1"/>
+              </a:fontRef>
+            </p:style>
+            <p:txBody>
+              <a:bodyPr rtlCol="0" anchor="ctr"/>
+              <a:lstStyle/>
+              <a:p>
+                <a:pPr algn="ctr"/>
+                <a:endParaRPr lang="en-US" sz="450"/>
+              </a:p>
+            </p:txBody>
+          </p:sp>
+          <p:sp>
+            <p:nvSpPr>
+              <p:cNvPr id="254" name="Rectangle 253"/>
+              <p:cNvSpPr/>
+              <p:nvPr/>
+            </p:nvSpPr>
+            <p:spPr>
+              <a:xfrm>
+                <a:off x="6567792" y="13823636"/>
+                <a:ext cx="228600" cy="1371600"/>
+              </a:xfrm>
+              <a:prstGeom prst="rect">
+                <a:avLst/>
+              </a:prstGeom>
+              <a:ln>
+                <a:solidFill>
+                  <a:schemeClr val="tx1"/>
+                </a:solidFill>
+              </a:ln>
+            </p:spPr>
+            <p:style>
+              <a:lnRef idx="2">
+                <a:schemeClr val="accent1">
+                  <a:shade val="50000"/>
+                </a:schemeClr>
+              </a:lnRef>
+              <a:fillRef idx="1">
+                <a:schemeClr val="accent1"/>
+              </a:fillRef>
+              <a:effectRef idx="0">
+                <a:schemeClr val="accent1"/>
+              </a:effectRef>
+              <a:fontRef idx="minor">
+                <a:schemeClr val="lt1"/>
+              </a:fontRef>
+            </p:style>
+            <p:txBody>
+              <a:bodyPr vert="vert270" rtlCol="0" anchor="ctr"/>
+              <a:lstStyle/>
+              <a:p>
+                <a:pPr algn="ctr"/>
+                <a:endParaRPr lang="en-US" sz="1200" dirty="0">
+                  <a:solidFill>
+                    <a:schemeClr val="tx1"/>
+                  </a:solidFill>
+                </a:endParaRPr>
+              </a:p>
+            </p:txBody>
+          </p:sp>
+          <p:sp>
+            <p:nvSpPr>
+              <p:cNvPr id="255" name="Rectangle 254"/>
+              <p:cNvSpPr/>
+              <p:nvPr/>
+            </p:nvSpPr>
+            <p:spPr>
+              <a:xfrm>
+                <a:off x="6803256" y="13823636"/>
+                <a:ext cx="228600" cy="1371600"/>
+              </a:xfrm>
+              <a:prstGeom prst="rect">
+                <a:avLst/>
+              </a:prstGeom>
+              <a:solidFill>
+                <a:srgbClr val="FFFF00"/>
+              </a:solidFill>
+              <a:ln>
+                <a:solidFill>
+                  <a:schemeClr val="tx1"/>
+                </a:solidFill>
+              </a:ln>
+            </p:spPr>
+            <p:style>
+              <a:lnRef idx="2">
+                <a:schemeClr val="accent1">
+                  <a:shade val="50000"/>
+                </a:schemeClr>
+              </a:lnRef>
+              <a:fillRef idx="1">
+                <a:schemeClr val="accent1"/>
+              </a:fillRef>
+              <a:effectRef idx="0">
+                <a:schemeClr val="accent1"/>
+              </a:effectRef>
+              <a:fontRef idx="minor">
+                <a:schemeClr val="lt1"/>
+              </a:fontRef>
+            </p:style>
+            <p:txBody>
+              <a:bodyPr vert="vert270" rtlCol="0" anchor="ctr"/>
+              <a:lstStyle/>
+              <a:p>
+                <a:pPr algn="ctr"/>
+                <a:r>
+                  <a:rPr lang="en-US" sz="1200" dirty="0">
+                    <a:solidFill>
+                      <a:schemeClr val="tx1"/>
+                    </a:solidFill>
+                  </a:rPr>
+                  <a:t>Elu + BN</a:t>
+                </a:r>
+              </a:p>
+            </p:txBody>
+          </p:sp>
+          <p:sp>
+            <p:nvSpPr>
+              <p:cNvPr id="256" name="Right Arrow 255"/>
+              <p:cNvSpPr/>
+              <p:nvPr/>
+            </p:nvSpPr>
+            <p:spPr>
+              <a:xfrm>
+                <a:off x="7031856" y="14395136"/>
+                <a:ext cx="228600" cy="228600"/>
+              </a:xfrm>
+              <a:prstGeom prst="rightArrow">
+                <a:avLst/>
+              </a:prstGeom>
+              <a:solidFill>
+                <a:srgbClr val="00B050"/>
+              </a:solidFill>
+              <a:ln>
+                <a:solidFill>
+                  <a:schemeClr val="tx1"/>
+                </a:solidFill>
+              </a:ln>
+            </p:spPr>
+            <p:style>
+              <a:lnRef idx="2">
+                <a:schemeClr val="accent1">
+                  <a:shade val="50000"/>
+                </a:schemeClr>
+              </a:lnRef>
+              <a:fillRef idx="1">
+                <a:schemeClr val="accent1"/>
+              </a:fillRef>
+              <a:effectRef idx="0">
+                <a:schemeClr val="accent1"/>
+              </a:effectRef>
+              <a:fontRef idx="minor">
+                <a:schemeClr val="lt1"/>
+              </a:fontRef>
+            </p:style>
+            <p:txBody>
+              <a:bodyPr rtlCol="0" anchor="ctr"/>
+              <a:lstStyle/>
+              <a:p>
+                <a:pPr algn="ctr"/>
+                <a:endParaRPr lang="en-US" sz="450"/>
+              </a:p>
+            </p:txBody>
+          </p:sp>
+          <p:sp>
+            <p:nvSpPr>
+              <p:cNvPr id="257" name="Rectangle 256"/>
+              <p:cNvSpPr/>
+              <p:nvPr/>
+            </p:nvSpPr>
+            <p:spPr>
+              <a:xfrm>
+                <a:off x="7266765" y="13823636"/>
+                <a:ext cx="228600" cy="1371600"/>
+              </a:xfrm>
+              <a:prstGeom prst="rect">
+                <a:avLst/>
+              </a:prstGeom>
+              <a:ln>
+                <a:solidFill>
+                  <a:schemeClr val="tx1"/>
+                </a:solidFill>
+              </a:ln>
+            </p:spPr>
+            <p:style>
+              <a:lnRef idx="2">
+                <a:schemeClr val="accent1">
+                  <a:shade val="50000"/>
+                </a:schemeClr>
+              </a:lnRef>
+              <a:fillRef idx="1">
+                <a:schemeClr val="accent1"/>
+              </a:fillRef>
+              <a:effectRef idx="0">
+                <a:schemeClr val="accent1"/>
+              </a:effectRef>
+              <a:fontRef idx="minor">
+                <a:schemeClr val="lt1"/>
+              </a:fontRef>
+            </p:style>
+            <p:txBody>
+              <a:bodyPr vert="vert270" rtlCol="0" anchor="ctr"/>
+              <a:lstStyle/>
+              <a:p>
+                <a:pPr algn="ctr"/>
+                <a:endParaRPr lang="en-US" sz="1200" dirty="0">
+                  <a:solidFill>
+                    <a:schemeClr val="tx1"/>
+                  </a:solidFill>
+                </a:endParaRPr>
+              </a:p>
+            </p:txBody>
+          </p:sp>
+          <p:sp>
+            <p:nvSpPr>
+              <p:cNvPr id="258" name="Rectangle 257"/>
+              <p:cNvSpPr/>
+              <p:nvPr/>
+            </p:nvSpPr>
+            <p:spPr>
+              <a:xfrm>
+                <a:off x="7494706" y="13823636"/>
+                <a:ext cx="228600" cy="1371600"/>
+              </a:xfrm>
+              <a:prstGeom prst="rect">
+                <a:avLst/>
+              </a:prstGeom>
+              <a:ln>
+                <a:solidFill>
+                  <a:schemeClr val="tx1"/>
+                </a:solidFill>
+              </a:ln>
+            </p:spPr>
+            <p:style>
+              <a:lnRef idx="2">
+                <a:schemeClr val="accent1">
+                  <a:shade val="50000"/>
+                </a:schemeClr>
+              </a:lnRef>
+              <a:fillRef idx="1">
+                <a:schemeClr val="accent1"/>
+              </a:fillRef>
+              <a:effectRef idx="0">
+                <a:schemeClr val="accent1"/>
+              </a:effectRef>
+              <a:fontRef idx="minor">
+                <a:schemeClr val="lt1"/>
+              </a:fontRef>
+            </p:style>
+            <p:txBody>
+              <a:bodyPr vert="vert270" rtlCol="0" anchor="ctr"/>
+              <a:lstStyle/>
+              <a:p>
+                <a:pPr algn="ctr"/>
+                <a:endParaRPr lang="en-US" sz="1200" dirty="0">
+                  <a:solidFill>
+                    <a:schemeClr val="tx1"/>
+                  </a:solidFill>
+                </a:endParaRPr>
+              </a:p>
+            </p:txBody>
+          </p:sp>
+          <p:sp>
+            <p:nvSpPr>
+              <p:cNvPr id="259" name="Rectangle 258"/>
+              <p:cNvSpPr/>
+              <p:nvPr/>
+            </p:nvSpPr>
+            <p:spPr>
+              <a:xfrm>
+                <a:off x="7722646" y="13823636"/>
+                <a:ext cx="228600" cy="1371600"/>
+              </a:xfrm>
+              <a:prstGeom prst="rect">
+                <a:avLst/>
+              </a:prstGeom>
+              <a:ln>
+                <a:solidFill>
+                  <a:schemeClr val="tx1"/>
+                </a:solidFill>
+              </a:ln>
+            </p:spPr>
+            <p:style>
+              <a:lnRef idx="2">
+                <a:schemeClr val="accent1">
+                  <a:shade val="50000"/>
+                </a:schemeClr>
+              </a:lnRef>
+              <a:fillRef idx="1">
+                <a:schemeClr val="accent1"/>
+              </a:fillRef>
+              <a:effectRef idx="0">
+                <a:schemeClr val="accent1"/>
+              </a:effectRef>
+              <a:fontRef idx="minor">
+                <a:schemeClr val="lt1"/>
+              </a:fontRef>
+            </p:style>
+            <p:txBody>
+              <a:bodyPr vert="vert270" rtlCol="0" anchor="ctr"/>
+              <a:lstStyle/>
+              <a:p>
+                <a:pPr algn="ctr"/>
+                <a:endParaRPr lang="en-US" sz="1200" dirty="0">
+                  <a:solidFill>
+                    <a:schemeClr val="tx1"/>
+                  </a:solidFill>
+                </a:endParaRPr>
+              </a:p>
+            </p:txBody>
+          </p:sp>
+          <p:sp>
+            <p:nvSpPr>
+              <p:cNvPr id="260" name="Right Arrow 259"/>
+              <p:cNvSpPr/>
+              <p:nvPr/>
+            </p:nvSpPr>
+            <p:spPr>
+              <a:xfrm>
+                <a:off x="7956213" y="14395136"/>
+                <a:ext cx="228600" cy="228600"/>
+              </a:xfrm>
+              <a:prstGeom prst="rightArrow">
+                <a:avLst/>
+              </a:prstGeom>
+              <a:solidFill>
+                <a:srgbClr val="00B0F0"/>
+              </a:solidFill>
+              <a:ln>
+                <a:solidFill>
+                  <a:schemeClr val="tx1"/>
+                </a:solidFill>
+              </a:ln>
+            </p:spPr>
+            <p:style>
+              <a:lnRef idx="2">
+                <a:schemeClr val="accent1">
+                  <a:shade val="50000"/>
+                </a:schemeClr>
+              </a:lnRef>
+              <a:fillRef idx="1">
+                <a:schemeClr val="accent1"/>
+              </a:fillRef>
+              <a:effectRef idx="0">
+                <a:schemeClr val="accent1"/>
+              </a:effectRef>
+              <a:fontRef idx="minor">
+                <a:schemeClr val="lt1"/>
+              </a:fontRef>
+            </p:style>
+            <p:txBody>
+              <a:bodyPr rtlCol="0" anchor="ctr"/>
+              <a:lstStyle/>
+              <a:p>
+                <a:pPr algn="ctr"/>
+                <a:endParaRPr lang="en-US" sz="450"/>
+              </a:p>
+            </p:txBody>
+          </p:sp>
+          <p:sp>
+            <p:nvSpPr>
+              <p:cNvPr id="261" name="Rectangle 260"/>
+              <p:cNvSpPr/>
+              <p:nvPr/>
+            </p:nvSpPr>
+            <p:spPr>
+              <a:xfrm>
+                <a:off x="8189492" y="13823636"/>
+                <a:ext cx="228600" cy="1371600"/>
+              </a:xfrm>
+              <a:prstGeom prst="rect">
+                <a:avLst/>
+              </a:prstGeom>
+              <a:ln>
+                <a:solidFill>
+                  <a:schemeClr val="tx1"/>
+                </a:solidFill>
+              </a:ln>
+            </p:spPr>
+            <p:style>
+              <a:lnRef idx="2">
+                <a:schemeClr val="accent1">
+                  <a:shade val="50000"/>
+                </a:schemeClr>
+              </a:lnRef>
+              <a:fillRef idx="1">
+                <a:schemeClr val="accent1"/>
+              </a:fillRef>
+              <a:effectRef idx="0">
+                <a:schemeClr val="accent1"/>
+              </a:effectRef>
+              <a:fontRef idx="minor">
+                <a:schemeClr val="lt1"/>
+              </a:fontRef>
+            </p:style>
+            <p:txBody>
+              <a:bodyPr vert="vert270" rtlCol="0" anchor="ctr"/>
+              <a:lstStyle/>
+              <a:p>
+                <a:pPr algn="ctr"/>
+                <a:endParaRPr lang="en-US" sz="1200" dirty="0">
+                  <a:solidFill>
+                    <a:schemeClr val="tx1"/>
+                  </a:solidFill>
+                </a:endParaRPr>
+              </a:p>
+            </p:txBody>
+          </p:sp>
+          <p:sp>
+            <p:nvSpPr>
+              <p:cNvPr id="262" name="Rectangle 261"/>
+              <p:cNvSpPr/>
+              <p:nvPr/>
+            </p:nvSpPr>
+            <p:spPr>
+              <a:xfrm>
+                <a:off x="8424956" y="13823636"/>
+                <a:ext cx="228600" cy="1371600"/>
+              </a:xfrm>
+              <a:prstGeom prst="rect">
+                <a:avLst/>
+              </a:prstGeom>
+              <a:solidFill>
+                <a:srgbClr val="FFFF00"/>
+              </a:solidFill>
+              <a:ln>
+                <a:solidFill>
+                  <a:schemeClr val="tx1"/>
+                </a:solidFill>
+              </a:ln>
+            </p:spPr>
+            <p:style>
+              <a:lnRef idx="2">
+                <a:schemeClr val="accent1">
+                  <a:shade val="50000"/>
+                </a:schemeClr>
+              </a:lnRef>
+              <a:fillRef idx="1">
+                <a:schemeClr val="accent1"/>
+              </a:fillRef>
+              <a:effectRef idx="0">
+                <a:schemeClr val="accent1"/>
+              </a:effectRef>
+              <a:fontRef idx="minor">
+                <a:schemeClr val="lt1"/>
+              </a:fontRef>
+            </p:style>
+            <p:txBody>
+              <a:bodyPr vert="vert270" rtlCol="0" anchor="ctr"/>
+              <a:lstStyle/>
+              <a:p>
+                <a:pPr algn="ctr"/>
+                <a:r>
+                  <a:rPr lang="en-US" sz="1200" dirty="0">
+                    <a:solidFill>
+                      <a:schemeClr val="tx1"/>
+                    </a:solidFill>
+                  </a:rPr>
+                  <a:t>Elu + BN</a:t>
+                </a:r>
+              </a:p>
+            </p:txBody>
+          </p:sp>
+          <p:sp>
+            <p:nvSpPr>
+              <p:cNvPr id="263" name="Rectangle 262"/>
+              <p:cNvSpPr/>
+              <p:nvPr/>
+            </p:nvSpPr>
+            <p:spPr>
+              <a:xfrm>
+                <a:off x="6096388" y="13823636"/>
+                <a:ext cx="228600" cy="1371600"/>
+              </a:xfrm>
+              <a:prstGeom prst="rect">
+                <a:avLst/>
+              </a:prstGeom>
+              <a:solidFill>
+                <a:srgbClr val="FFFF00"/>
+              </a:solidFill>
+              <a:ln>
+                <a:solidFill>
+                  <a:schemeClr val="tx1"/>
+                </a:solidFill>
+              </a:ln>
+            </p:spPr>
+            <p:style>
+              <a:lnRef idx="2">
+                <a:schemeClr val="accent1">
+                  <a:shade val="50000"/>
+                </a:schemeClr>
+              </a:lnRef>
+              <a:fillRef idx="1">
+                <a:schemeClr val="accent1"/>
+              </a:fillRef>
+              <a:effectRef idx="0">
+                <a:schemeClr val="accent1"/>
+              </a:effectRef>
+              <a:fontRef idx="minor">
+                <a:schemeClr val="lt1"/>
+              </a:fontRef>
+            </p:style>
+            <p:txBody>
+              <a:bodyPr vert="vert270" rtlCol="0" anchor="ctr"/>
+              <a:lstStyle/>
+              <a:p>
+                <a:pPr algn="ctr"/>
+                <a:r>
+                  <a:rPr lang="en-US" sz="1200" dirty="0">
+                    <a:solidFill>
+                      <a:schemeClr val="tx1"/>
+                    </a:solidFill>
+                  </a:rPr>
+                  <a:t>Elu + BN</a:t>
+                </a:r>
+              </a:p>
+            </p:txBody>
+          </p:sp>
+          <p:sp>
+            <p:nvSpPr>
+              <p:cNvPr id="264" name="Rectangle 263"/>
+              <p:cNvSpPr/>
+              <p:nvPr/>
+            </p:nvSpPr>
+            <p:spPr>
+              <a:xfrm>
+                <a:off x="5852138" y="15531599"/>
+                <a:ext cx="228600" cy="1371600"/>
+              </a:xfrm>
+              <a:prstGeom prst="rect">
+                <a:avLst/>
+              </a:prstGeom>
+              <a:ln>
+                <a:solidFill>
+                  <a:schemeClr val="tx1"/>
+                </a:solidFill>
+              </a:ln>
+            </p:spPr>
+            <p:style>
+              <a:lnRef idx="2">
+                <a:schemeClr val="accent1">
+                  <a:shade val="50000"/>
+                </a:schemeClr>
+              </a:lnRef>
+              <a:fillRef idx="1">
+                <a:schemeClr val="accent1"/>
+              </a:fillRef>
+              <a:effectRef idx="0">
+                <a:schemeClr val="accent1"/>
+              </a:effectRef>
+              <a:fontRef idx="minor">
+                <a:schemeClr val="lt1"/>
+              </a:fontRef>
+            </p:style>
+            <p:txBody>
+              <a:bodyPr vert="vert270" rtlCol="0" anchor="ctr"/>
+              <a:lstStyle/>
+              <a:p>
+                <a:pPr algn="ctr"/>
+                <a:endParaRPr lang="en-US" sz="1200" dirty="0">
+                  <a:solidFill>
+                    <a:schemeClr val="tx1"/>
+                  </a:solidFill>
+                </a:endParaRPr>
+              </a:p>
+            </p:txBody>
+          </p:sp>
+          <p:sp>
+            <p:nvSpPr>
+              <p:cNvPr id="265" name="Rectangle 264"/>
+              <p:cNvSpPr/>
+              <p:nvPr/>
+            </p:nvSpPr>
+            <p:spPr>
+              <a:xfrm>
+                <a:off x="6080738" y="15531599"/>
+                <a:ext cx="228600" cy="1371600"/>
+              </a:xfrm>
+              <a:prstGeom prst="rect">
+                <a:avLst/>
+              </a:prstGeom>
+              <a:solidFill>
+                <a:srgbClr val="FFFF00"/>
+              </a:solidFill>
+              <a:ln>
+                <a:solidFill>
+                  <a:schemeClr val="tx1"/>
+                </a:solidFill>
+              </a:ln>
+            </p:spPr>
+            <p:style>
+              <a:lnRef idx="2">
+                <a:schemeClr val="accent1">
+                  <a:shade val="50000"/>
+                </a:schemeClr>
+              </a:lnRef>
+              <a:fillRef idx="1">
+                <a:schemeClr val="accent1"/>
+              </a:fillRef>
+              <a:effectRef idx="0">
+                <a:schemeClr val="accent1"/>
+              </a:effectRef>
+              <a:fontRef idx="minor">
+                <a:schemeClr val="lt1"/>
+              </a:fontRef>
+            </p:style>
+            <p:txBody>
+              <a:bodyPr vert="vert270" rtlCol="0" anchor="ctr"/>
+              <a:lstStyle/>
+              <a:p>
+                <a:pPr algn="ctr"/>
+                <a:r>
+                  <a:rPr lang="en-US" sz="1200" dirty="0">
+                    <a:solidFill>
+                      <a:schemeClr val="tx1"/>
+                    </a:solidFill>
+                  </a:rPr>
+                  <a:t>Elu + BN</a:t>
+                </a:r>
+              </a:p>
+            </p:txBody>
+          </p:sp>
+          <p:sp>
+            <p:nvSpPr>
+              <p:cNvPr id="266" name="Right Arrow 265"/>
+              <p:cNvSpPr/>
+              <p:nvPr/>
+            </p:nvSpPr>
+            <p:spPr>
+              <a:xfrm>
+                <a:off x="6320092" y="16077582"/>
+                <a:ext cx="228600" cy="228600"/>
+              </a:xfrm>
+              <a:prstGeom prst="rightArrow">
+                <a:avLst/>
+              </a:prstGeom>
+              <a:solidFill>
+                <a:srgbClr val="00B050"/>
+              </a:solidFill>
+              <a:ln>
+                <a:solidFill>
+                  <a:schemeClr val="tx1"/>
+                </a:solidFill>
+              </a:ln>
+            </p:spPr>
+            <p:style>
+              <a:lnRef idx="2">
+                <a:schemeClr val="accent1">
+                  <a:shade val="50000"/>
+                </a:schemeClr>
+              </a:lnRef>
+              <a:fillRef idx="1">
+                <a:schemeClr val="accent1"/>
+              </a:fillRef>
+              <a:effectRef idx="0">
+                <a:schemeClr val="accent1"/>
+              </a:effectRef>
+              <a:fontRef idx="minor">
+                <a:schemeClr val="lt1"/>
+              </a:fontRef>
+            </p:style>
+            <p:txBody>
+              <a:bodyPr rtlCol="0" anchor="ctr"/>
+              <a:lstStyle/>
+              <a:p>
+                <a:pPr algn="ctr"/>
+                <a:endParaRPr lang="en-US" sz="450"/>
+              </a:p>
+            </p:txBody>
+          </p:sp>
+          <p:sp>
+            <p:nvSpPr>
+              <p:cNvPr id="267" name="Rectangle 266"/>
+              <p:cNvSpPr/>
+              <p:nvPr/>
+            </p:nvSpPr>
+            <p:spPr>
+              <a:xfrm>
+                <a:off x="6541820" y="15527016"/>
+                <a:ext cx="228600" cy="1371600"/>
+              </a:xfrm>
+              <a:prstGeom prst="rect">
+                <a:avLst/>
+              </a:prstGeom>
+              <a:ln>
+                <a:solidFill>
+                  <a:schemeClr val="tx1"/>
+                </a:solidFill>
+              </a:ln>
+            </p:spPr>
+            <p:style>
+              <a:lnRef idx="2">
+                <a:schemeClr val="accent1">
+                  <a:shade val="50000"/>
+                </a:schemeClr>
+              </a:lnRef>
+              <a:fillRef idx="1">
+                <a:schemeClr val="accent1"/>
+              </a:fillRef>
+              <a:effectRef idx="0">
+                <a:schemeClr val="accent1"/>
+              </a:effectRef>
+              <a:fontRef idx="minor">
+                <a:schemeClr val="lt1"/>
+              </a:fontRef>
+            </p:style>
+            <p:txBody>
+              <a:bodyPr vert="vert270" rtlCol="0" anchor="ctr"/>
+              <a:lstStyle/>
+              <a:p>
+                <a:pPr algn="ctr"/>
+                <a:endParaRPr lang="en-US" sz="1200" dirty="0">
+                  <a:solidFill>
+                    <a:schemeClr val="tx1"/>
+                  </a:solidFill>
+                </a:endParaRPr>
+              </a:p>
+            </p:txBody>
+          </p:sp>
+          <p:sp>
+            <p:nvSpPr>
+              <p:cNvPr id="268" name="Rectangle 267"/>
+              <p:cNvSpPr/>
+              <p:nvPr/>
+            </p:nvSpPr>
+            <p:spPr>
+              <a:xfrm>
+                <a:off x="6784916" y="15527016"/>
+                <a:ext cx="228600" cy="1371600"/>
+              </a:xfrm>
+              <a:prstGeom prst="rect">
+                <a:avLst/>
+              </a:prstGeom>
+              <a:ln>
+                <a:solidFill>
+                  <a:schemeClr val="tx1"/>
+                </a:solidFill>
+              </a:ln>
+            </p:spPr>
+            <p:style>
+              <a:lnRef idx="2">
+                <a:schemeClr val="accent1">
+                  <a:shade val="50000"/>
+                </a:schemeClr>
+              </a:lnRef>
+              <a:fillRef idx="1">
+                <a:schemeClr val="accent1"/>
+              </a:fillRef>
+              <a:effectRef idx="0">
+                <a:schemeClr val="accent1"/>
+              </a:effectRef>
+              <a:fontRef idx="minor">
+                <a:schemeClr val="lt1"/>
+              </a:fontRef>
+            </p:style>
+            <p:txBody>
+              <a:bodyPr vert="vert270" rtlCol="0" anchor="ctr"/>
+              <a:lstStyle/>
+              <a:p>
+                <a:pPr algn="ctr"/>
+                <a:endParaRPr lang="en-US" sz="1200" dirty="0">
+                  <a:solidFill>
+                    <a:schemeClr val="tx1"/>
+                  </a:solidFill>
+                </a:endParaRPr>
+              </a:p>
+            </p:txBody>
+          </p:sp>
+          <p:sp>
+            <p:nvSpPr>
+              <p:cNvPr id="269" name="Rectangle 268"/>
+              <p:cNvSpPr/>
+              <p:nvPr/>
+            </p:nvSpPr>
+            <p:spPr>
+              <a:xfrm>
+                <a:off x="7017291" y="15527016"/>
+                <a:ext cx="228600" cy="1371600"/>
+              </a:xfrm>
+              <a:prstGeom prst="rect">
+                <a:avLst/>
+              </a:prstGeom>
+              <a:solidFill>
+                <a:srgbClr val="FFFF00"/>
+              </a:solidFill>
+              <a:ln>
+                <a:solidFill>
+                  <a:schemeClr val="tx1"/>
+                </a:solidFill>
+              </a:ln>
+            </p:spPr>
+            <p:style>
+              <a:lnRef idx="2">
+                <a:schemeClr val="accent1">
+                  <a:shade val="50000"/>
+                </a:schemeClr>
+              </a:lnRef>
+              <a:fillRef idx="1">
+                <a:schemeClr val="accent1"/>
+              </a:fillRef>
+              <a:effectRef idx="0">
+                <a:schemeClr val="accent1"/>
+              </a:effectRef>
+              <a:fontRef idx="minor">
+                <a:schemeClr val="lt1"/>
+              </a:fontRef>
+            </p:style>
+            <p:txBody>
+              <a:bodyPr vert="vert270" rtlCol="0" anchor="ctr"/>
+              <a:lstStyle/>
+              <a:p>
+                <a:pPr algn="ctr"/>
+                <a:r>
+                  <a:rPr lang="en-US" sz="1200" dirty="0">
+                    <a:solidFill>
+                      <a:schemeClr val="tx1"/>
+                    </a:solidFill>
+                  </a:rPr>
+                  <a:t>Elu + BN</a:t>
+                </a:r>
+              </a:p>
+            </p:txBody>
+          </p:sp>
+          <p:sp>
+            <p:nvSpPr>
+              <p:cNvPr id="270" name="Right Arrow 269"/>
+              <p:cNvSpPr/>
+              <p:nvPr/>
+            </p:nvSpPr>
+            <p:spPr>
+              <a:xfrm>
+                <a:off x="7246644" y="16104870"/>
+                <a:ext cx="228600" cy="228600"/>
+              </a:xfrm>
+              <a:prstGeom prst="rightArrow">
+                <a:avLst/>
+              </a:prstGeom>
+              <a:solidFill>
+                <a:srgbClr val="00B0F0"/>
+              </a:solidFill>
+              <a:ln>
+                <a:solidFill>
+                  <a:schemeClr val="tx1"/>
+                </a:solidFill>
+              </a:ln>
+            </p:spPr>
+            <p:style>
+              <a:lnRef idx="2">
+                <a:schemeClr val="accent1">
+                  <a:shade val="50000"/>
+                </a:schemeClr>
+              </a:lnRef>
+              <a:fillRef idx="1">
+                <a:schemeClr val="accent1"/>
+              </a:fillRef>
+              <a:effectRef idx="0">
+                <a:schemeClr val="accent1"/>
+              </a:effectRef>
+              <a:fontRef idx="minor">
+                <a:schemeClr val="lt1"/>
+              </a:fontRef>
+            </p:style>
+            <p:txBody>
+              <a:bodyPr rtlCol="0" anchor="ctr"/>
+              <a:lstStyle/>
+              <a:p>
+                <a:pPr algn="ctr"/>
+                <a:endParaRPr lang="en-US" sz="450"/>
+              </a:p>
+            </p:txBody>
+          </p:sp>
+          <p:sp>
+            <p:nvSpPr>
+              <p:cNvPr id="271" name="Rectangle 270"/>
+              <p:cNvSpPr/>
+              <p:nvPr/>
+            </p:nvSpPr>
+            <p:spPr>
+              <a:xfrm>
+                <a:off x="7489448" y="15533370"/>
+                <a:ext cx="228600" cy="1371600"/>
+              </a:xfrm>
+              <a:prstGeom prst="rect">
+                <a:avLst/>
+              </a:prstGeom>
+              <a:ln>
+                <a:solidFill>
+                  <a:schemeClr val="tx1"/>
+                </a:solidFill>
+              </a:ln>
+            </p:spPr>
+            <p:style>
+              <a:lnRef idx="2">
+                <a:schemeClr val="accent1">
+                  <a:shade val="50000"/>
+                </a:schemeClr>
+              </a:lnRef>
+              <a:fillRef idx="1">
+                <a:schemeClr val="accent1"/>
+              </a:fillRef>
+              <a:effectRef idx="0">
+                <a:schemeClr val="accent1"/>
+              </a:effectRef>
+              <a:fontRef idx="minor">
+                <a:schemeClr val="lt1"/>
+              </a:fontRef>
+            </p:style>
+            <p:txBody>
+              <a:bodyPr vert="vert270" rtlCol="0" anchor="ctr"/>
+              <a:lstStyle/>
+              <a:p>
+                <a:pPr algn="ctr"/>
+                <a:endParaRPr lang="en-US" sz="1200" dirty="0">
+                  <a:solidFill>
+                    <a:schemeClr val="tx1"/>
+                  </a:solidFill>
+                </a:endParaRPr>
+              </a:p>
+            </p:txBody>
+          </p:sp>
+          <p:sp>
+            <p:nvSpPr>
+              <p:cNvPr id="272" name="Rectangle 271"/>
+              <p:cNvSpPr/>
+              <p:nvPr/>
+            </p:nvSpPr>
+            <p:spPr>
+              <a:xfrm>
+                <a:off x="7724912" y="15533370"/>
+                <a:ext cx="228600" cy="1371600"/>
+              </a:xfrm>
+              <a:prstGeom prst="rect">
+                <a:avLst/>
+              </a:prstGeom>
+              <a:solidFill>
+                <a:srgbClr val="FFFF00"/>
+              </a:solidFill>
+              <a:ln>
+                <a:solidFill>
+                  <a:schemeClr val="tx1"/>
+                </a:solidFill>
+              </a:ln>
+            </p:spPr>
+            <p:style>
+              <a:lnRef idx="2">
+                <a:schemeClr val="accent1">
+                  <a:shade val="50000"/>
+                </a:schemeClr>
+              </a:lnRef>
+              <a:fillRef idx="1">
+                <a:schemeClr val="accent1"/>
+              </a:fillRef>
+              <a:effectRef idx="0">
+                <a:schemeClr val="accent1"/>
+              </a:effectRef>
+              <a:fontRef idx="minor">
+                <a:schemeClr val="lt1"/>
+              </a:fontRef>
+            </p:style>
+            <p:txBody>
+              <a:bodyPr vert="vert270" rtlCol="0" anchor="ctr"/>
+              <a:lstStyle/>
+              <a:p>
+                <a:pPr algn="ctr"/>
+                <a:r>
+                  <a:rPr lang="en-US" sz="1200" dirty="0">
+                    <a:solidFill>
+                      <a:schemeClr val="tx1"/>
+                    </a:solidFill>
+                  </a:rPr>
+                  <a:t>Elu + BN</a:t>
+                </a:r>
+              </a:p>
+            </p:txBody>
+          </p:sp>
+          <p:sp>
+            <p:nvSpPr>
+              <p:cNvPr id="273" name="Right Arrow 272"/>
+              <p:cNvSpPr/>
+              <p:nvPr/>
+            </p:nvSpPr>
+            <p:spPr>
+              <a:xfrm>
+                <a:off x="7960471" y="16096903"/>
+                <a:ext cx="228600" cy="228600"/>
+              </a:xfrm>
+              <a:prstGeom prst="rightArrow">
+                <a:avLst/>
+              </a:prstGeom>
+              <a:solidFill>
+                <a:srgbClr val="00B050"/>
+              </a:solidFill>
+              <a:ln>
+                <a:solidFill>
+                  <a:schemeClr val="tx1"/>
+                </a:solidFill>
+              </a:ln>
+            </p:spPr>
+            <p:style>
+              <a:lnRef idx="2">
+                <a:schemeClr val="accent1">
+                  <a:shade val="50000"/>
+                </a:schemeClr>
+              </a:lnRef>
+              <a:fillRef idx="1">
+                <a:schemeClr val="accent1"/>
+              </a:fillRef>
+              <a:effectRef idx="0">
+                <a:schemeClr val="accent1"/>
+              </a:effectRef>
+              <a:fontRef idx="minor">
+                <a:schemeClr val="lt1"/>
+              </a:fontRef>
+            </p:style>
+            <p:txBody>
+              <a:bodyPr rtlCol="0" anchor="ctr"/>
+              <a:lstStyle/>
+              <a:p>
+                <a:pPr algn="ctr"/>
+                <a:endParaRPr lang="en-US" sz="450"/>
+              </a:p>
+            </p:txBody>
+          </p:sp>
+          <p:sp>
+            <p:nvSpPr>
+              <p:cNvPr id="274" name="Rectangle 273"/>
+              <p:cNvSpPr/>
+              <p:nvPr/>
+            </p:nvSpPr>
+            <p:spPr>
+              <a:xfrm>
+                <a:off x="8200462" y="15535304"/>
+                <a:ext cx="228600" cy="1371600"/>
+              </a:xfrm>
+              <a:prstGeom prst="rect">
+                <a:avLst/>
+              </a:prstGeom>
+              <a:ln>
+                <a:solidFill>
+                  <a:schemeClr val="tx1"/>
+                </a:solidFill>
+              </a:ln>
+            </p:spPr>
+            <p:style>
+              <a:lnRef idx="2">
+                <a:schemeClr val="accent1">
+                  <a:shade val="50000"/>
+                </a:schemeClr>
+              </a:lnRef>
+              <a:fillRef idx="1">
+                <a:schemeClr val="accent1"/>
+              </a:fillRef>
+              <a:effectRef idx="0">
+                <a:schemeClr val="accent1"/>
+              </a:effectRef>
+              <a:fontRef idx="minor">
+                <a:schemeClr val="lt1"/>
+              </a:fontRef>
+            </p:style>
+            <p:txBody>
+              <a:bodyPr vert="vert270" rtlCol="0" anchor="ctr"/>
+              <a:lstStyle/>
+              <a:p>
+                <a:pPr algn="ctr"/>
+                <a:endParaRPr lang="en-US" sz="1200" dirty="0">
+                  <a:solidFill>
+                    <a:schemeClr val="tx1"/>
+                  </a:solidFill>
+                </a:endParaRPr>
+              </a:p>
+            </p:txBody>
+          </p:sp>
+          <p:sp>
+            <p:nvSpPr>
+              <p:cNvPr id="275" name="Rectangle 274"/>
+              <p:cNvSpPr/>
+              <p:nvPr/>
+            </p:nvSpPr>
+            <p:spPr>
+              <a:xfrm>
+                <a:off x="8420484" y="15535304"/>
+                <a:ext cx="228600" cy="1371600"/>
+              </a:xfrm>
+              <a:prstGeom prst="rect">
+                <a:avLst/>
+              </a:prstGeom>
+              <a:ln>
+                <a:solidFill>
+                  <a:schemeClr val="tx1"/>
+                </a:solidFill>
+              </a:ln>
+            </p:spPr>
+            <p:style>
+              <a:lnRef idx="2">
+                <a:schemeClr val="accent1">
+                  <a:shade val="50000"/>
+                </a:schemeClr>
+              </a:lnRef>
+              <a:fillRef idx="1">
+                <a:schemeClr val="accent1"/>
+              </a:fillRef>
+              <a:effectRef idx="0">
+                <a:schemeClr val="accent1"/>
+              </a:effectRef>
+              <a:fontRef idx="minor">
+                <a:schemeClr val="lt1"/>
+              </a:fontRef>
+            </p:style>
+            <p:txBody>
+              <a:bodyPr vert="vert270" rtlCol="0" anchor="ctr"/>
+              <a:lstStyle/>
+              <a:p>
+                <a:pPr algn="ctr"/>
+                <a:endParaRPr lang="en-US" sz="1200" dirty="0">
+                  <a:solidFill>
+                    <a:schemeClr val="tx1"/>
+                  </a:solidFill>
+                </a:endParaRPr>
+              </a:p>
+            </p:txBody>
+          </p:sp>
+          <p:sp>
+            <p:nvSpPr>
+              <p:cNvPr id="276" name="Rectangle 275"/>
+              <p:cNvSpPr/>
+              <p:nvPr/>
+            </p:nvSpPr>
+            <p:spPr>
+              <a:xfrm>
+                <a:off x="8656343" y="15535304"/>
+                <a:ext cx="228600" cy="1371600"/>
+              </a:xfrm>
+              <a:prstGeom prst="rect">
+                <a:avLst/>
+              </a:prstGeom>
+              <a:ln>
+                <a:solidFill>
+                  <a:schemeClr val="tx1"/>
+                </a:solidFill>
+              </a:ln>
+            </p:spPr>
+            <p:style>
+              <a:lnRef idx="2">
+                <a:schemeClr val="accent1">
+                  <a:shade val="50000"/>
+                </a:schemeClr>
+              </a:lnRef>
+              <a:fillRef idx="1">
+                <a:schemeClr val="accent1"/>
+              </a:fillRef>
+              <a:effectRef idx="0">
+                <a:schemeClr val="accent1"/>
+              </a:effectRef>
+              <a:fontRef idx="minor">
+                <a:schemeClr val="lt1"/>
+              </a:fontRef>
+            </p:style>
+            <p:txBody>
+              <a:bodyPr vert="vert270" rtlCol="0" anchor="ctr"/>
+              <a:lstStyle/>
+              <a:p>
+                <a:pPr algn="ctr"/>
+                <a:endParaRPr lang="en-US" sz="1200" dirty="0">
+                  <a:solidFill>
+                    <a:schemeClr val="tx1"/>
+                  </a:solidFill>
+                </a:endParaRPr>
+              </a:p>
+            </p:txBody>
+          </p:sp>
+          <p:sp>
+            <p:nvSpPr>
+              <p:cNvPr id="277" name="Right Arrow 276"/>
+              <p:cNvSpPr/>
+              <p:nvPr/>
+            </p:nvSpPr>
+            <p:spPr>
+              <a:xfrm>
+                <a:off x="8897654" y="16098516"/>
+                <a:ext cx="228600" cy="228600"/>
+              </a:xfrm>
+              <a:prstGeom prst="rightArrow">
+                <a:avLst/>
+              </a:prstGeom>
+              <a:solidFill>
+                <a:srgbClr val="00B0F0"/>
+              </a:solidFill>
+              <a:ln>
+                <a:solidFill>
+                  <a:schemeClr val="tx1"/>
+                </a:solidFill>
+              </a:ln>
+            </p:spPr>
+            <p:style>
+              <a:lnRef idx="2">
+                <a:schemeClr val="accent1">
+                  <a:shade val="50000"/>
+                </a:schemeClr>
+              </a:lnRef>
+              <a:fillRef idx="1">
+                <a:schemeClr val="accent1"/>
+              </a:fillRef>
+              <a:effectRef idx="0">
+                <a:schemeClr val="accent1"/>
+              </a:effectRef>
+              <a:fontRef idx="minor">
+                <a:schemeClr val="lt1"/>
+              </a:fontRef>
+            </p:style>
+            <p:txBody>
+              <a:bodyPr rtlCol="0" anchor="ctr"/>
+              <a:lstStyle/>
+              <a:p>
+                <a:pPr algn="ctr"/>
+                <a:endParaRPr lang="en-US" sz="450"/>
+              </a:p>
+            </p:txBody>
+          </p:sp>
+          <p:sp>
+            <p:nvSpPr>
+              <p:cNvPr id="278" name="Rectangle 277"/>
+              <p:cNvSpPr/>
+              <p:nvPr/>
+            </p:nvSpPr>
+            <p:spPr>
+              <a:xfrm>
+                <a:off x="9140458" y="15527016"/>
+                <a:ext cx="228600" cy="1371600"/>
+              </a:xfrm>
+              <a:prstGeom prst="rect">
+                <a:avLst/>
+              </a:prstGeom>
+              <a:ln>
+                <a:solidFill>
+                  <a:schemeClr val="tx1"/>
+                </a:solidFill>
+              </a:ln>
+            </p:spPr>
+            <p:style>
+              <a:lnRef idx="2">
+                <a:schemeClr val="accent1">
+                  <a:shade val="50000"/>
+                </a:schemeClr>
+              </a:lnRef>
+              <a:fillRef idx="1">
+                <a:schemeClr val="accent1"/>
+              </a:fillRef>
+              <a:effectRef idx="0">
+                <a:schemeClr val="accent1"/>
+              </a:effectRef>
+              <a:fontRef idx="minor">
+                <a:schemeClr val="lt1"/>
+              </a:fontRef>
+            </p:style>
+            <p:txBody>
+              <a:bodyPr vert="vert270" rtlCol="0" anchor="ctr"/>
+              <a:lstStyle/>
+              <a:p>
+                <a:pPr algn="ctr"/>
+                <a:endParaRPr lang="en-US" sz="1200" dirty="0">
+                  <a:solidFill>
+                    <a:schemeClr val="tx1"/>
+                  </a:solidFill>
+                </a:endParaRPr>
+              </a:p>
+            </p:txBody>
+          </p:sp>
+          <p:sp>
+            <p:nvSpPr>
+              <p:cNvPr id="279" name="Rectangle 278"/>
+              <p:cNvSpPr/>
+              <p:nvPr/>
+            </p:nvSpPr>
+            <p:spPr>
+              <a:xfrm>
+                <a:off x="9375922" y="15527016"/>
+                <a:ext cx="228600" cy="1371600"/>
+              </a:xfrm>
+              <a:prstGeom prst="rect">
+                <a:avLst/>
+              </a:prstGeom>
+              <a:solidFill>
+                <a:srgbClr val="FFFF00"/>
+              </a:solidFill>
+              <a:ln>
+                <a:solidFill>
+                  <a:schemeClr val="tx1"/>
+                </a:solidFill>
+              </a:ln>
+            </p:spPr>
+            <p:style>
+              <a:lnRef idx="2">
+                <a:schemeClr val="accent1">
+                  <a:shade val="50000"/>
+                </a:schemeClr>
+              </a:lnRef>
+              <a:fillRef idx="1">
+                <a:schemeClr val="accent1"/>
+              </a:fillRef>
+              <a:effectRef idx="0">
+                <a:schemeClr val="accent1"/>
+              </a:effectRef>
+              <a:fontRef idx="minor">
+                <a:schemeClr val="lt1"/>
+              </a:fontRef>
+            </p:style>
+            <p:txBody>
+              <a:bodyPr vert="vert270" rtlCol="0" anchor="ctr"/>
+              <a:lstStyle/>
+              <a:p>
+                <a:pPr algn="ctr"/>
+                <a:r>
+                  <a:rPr lang="en-US" sz="1200" dirty="0">
+                    <a:solidFill>
+                      <a:schemeClr val="tx1"/>
+                    </a:solidFill>
+                  </a:rPr>
+                  <a:t>Elu + BN</a:t>
+                </a:r>
+              </a:p>
+            </p:txBody>
+          </p:sp>
+          <p:sp>
+            <p:nvSpPr>
+              <p:cNvPr id="280" name="Right Arrow 279"/>
+              <p:cNvSpPr/>
+              <p:nvPr/>
+            </p:nvSpPr>
+            <p:spPr>
+              <a:xfrm>
+                <a:off x="9602389" y="16094969"/>
+                <a:ext cx="228600" cy="228600"/>
+              </a:xfrm>
+              <a:prstGeom prst="rightArrow">
+                <a:avLst/>
+              </a:prstGeom>
+              <a:solidFill>
+                <a:srgbClr val="00B050"/>
+              </a:solidFill>
+              <a:ln>
+                <a:solidFill>
+                  <a:schemeClr val="tx1"/>
+                </a:solidFill>
+              </a:ln>
+            </p:spPr>
+            <p:style>
+              <a:lnRef idx="2">
+                <a:schemeClr val="accent1">
+                  <a:shade val="50000"/>
+                </a:schemeClr>
+              </a:lnRef>
+              <a:fillRef idx="1">
+                <a:schemeClr val="accent1"/>
+              </a:fillRef>
+              <a:effectRef idx="0">
+                <a:schemeClr val="accent1"/>
+              </a:effectRef>
+              <a:fontRef idx="minor">
+                <a:schemeClr val="lt1"/>
+              </a:fontRef>
+            </p:style>
+            <p:txBody>
+              <a:bodyPr rtlCol="0" anchor="ctr"/>
+              <a:lstStyle/>
+              <a:p>
+                <a:pPr algn="ctr"/>
+                <a:endParaRPr lang="en-US" sz="450"/>
+              </a:p>
+            </p:txBody>
+          </p:sp>
+          <p:sp>
+            <p:nvSpPr>
+              <p:cNvPr id="281" name="Rectangle 280"/>
+              <p:cNvSpPr/>
+              <p:nvPr/>
+            </p:nvSpPr>
+            <p:spPr>
+              <a:xfrm>
+                <a:off x="9842380" y="15533370"/>
+                <a:ext cx="228600" cy="1371600"/>
+              </a:xfrm>
+              <a:prstGeom prst="rect">
+                <a:avLst/>
+              </a:prstGeom>
+              <a:ln>
+                <a:solidFill>
+                  <a:schemeClr val="tx1"/>
+                </a:solidFill>
+              </a:ln>
+            </p:spPr>
+            <p:style>
+              <a:lnRef idx="2">
+                <a:schemeClr val="accent1">
+                  <a:shade val="50000"/>
+                </a:schemeClr>
+              </a:lnRef>
+              <a:fillRef idx="1">
+                <a:schemeClr val="accent1"/>
+              </a:fillRef>
+              <a:effectRef idx="0">
+                <a:schemeClr val="accent1"/>
+              </a:effectRef>
+              <a:fontRef idx="minor">
+                <a:schemeClr val="lt1"/>
+              </a:fontRef>
+            </p:style>
+            <p:txBody>
+              <a:bodyPr vert="vert270" rtlCol="0" anchor="ctr"/>
+              <a:lstStyle/>
+              <a:p>
+                <a:pPr algn="ctr"/>
+                <a:endParaRPr lang="en-US" sz="1200" dirty="0">
+                  <a:solidFill>
+                    <a:schemeClr val="tx1"/>
+                  </a:solidFill>
+                </a:endParaRPr>
+              </a:p>
+            </p:txBody>
+          </p:sp>
+          <p:sp>
+            <p:nvSpPr>
+              <p:cNvPr id="282" name="Rectangle 281"/>
+              <p:cNvSpPr/>
+              <p:nvPr/>
+            </p:nvSpPr>
+            <p:spPr>
+              <a:xfrm>
+                <a:off x="10062402" y="15533370"/>
+                <a:ext cx="228600" cy="1371600"/>
+              </a:xfrm>
+              <a:prstGeom prst="rect">
+                <a:avLst/>
+              </a:prstGeom>
+              <a:ln>
+                <a:solidFill>
+                  <a:schemeClr val="tx1"/>
+                </a:solidFill>
+              </a:ln>
+            </p:spPr>
+            <p:style>
+              <a:lnRef idx="2">
+                <a:schemeClr val="accent1">
+                  <a:shade val="50000"/>
+                </a:schemeClr>
+              </a:lnRef>
+              <a:fillRef idx="1">
+                <a:schemeClr val="accent1"/>
+              </a:fillRef>
+              <a:effectRef idx="0">
+                <a:schemeClr val="accent1"/>
+              </a:effectRef>
+              <a:fontRef idx="minor">
+                <a:schemeClr val="lt1"/>
+              </a:fontRef>
+            </p:style>
+            <p:txBody>
+              <a:bodyPr vert="vert270" rtlCol="0" anchor="ctr"/>
+              <a:lstStyle/>
+              <a:p>
+                <a:pPr algn="ctr"/>
+                <a:endParaRPr lang="en-US" sz="1200" dirty="0">
+                  <a:solidFill>
+                    <a:schemeClr val="tx1"/>
+                  </a:solidFill>
+                </a:endParaRPr>
+              </a:p>
+            </p:txBody>
+          </p:sp>
+          <p:sp>
+            <p:nvSpPr>
+              <p:cNvPr id="283" name="Rectangle 282"/>
+              <p:cNvSpPr/>
+              <p:nvPr/>
+            </p:nvSpPr>
+            <p:spPr>
+              <a:xfrm>
+                <a:off x="10298261" y="15533370"/>
+                <a:ext cx="228600" cy="1371600"/>
+              </a:xfrm>
+              <a:prstGeom prst="rect">
+                <a:avLst/>
+              </a:prstGeom>
+              <a:ln>
+                <a:solidFill>
+                  <a:schemeClr val="tx1"/>
+                </a:solidFill>
+              </a:ln>
+            </p:spPr>
+            <p:style>
+              <a:lnRef idx="2">
+                <a:schemeClr val="accent1">
+                  <a:shade val="50000"/>
+                </a:schemeClr>
+              </a:lnRef>
+              <a:fillRef idx="1">
+                <a:schemeClr val="accent1"/>
+              </a:fillRef>
+              <a:effectRef idx="0">
+                <a:schemeClr val="accent1"/>
+              </a:effectRef>
+              <a:fontRef idx="minor">
+                <a:schemeClr val="lt1"/>
+              </a:fontRef>
+            </p:style>
+            <p:txBody>
+              <a:bodyPr vert="vert270" rtlCol="0" anchor="ctr"/>
+              <a:lstStyle/>
+              <a:p>
+                <a:pPr algn="ctr"/>
+                <a:endParaRPr lang="en-US" sz="1200" dirty="0">
+                  <a:solidFill>
+                    <a:schemeClr val="tx1"/>
+                  </a:solidFill>
+                </a:endParaRPr>
+              </a:p>
+            </p:txBody>
+          </p:sp>
+          <p:sp>
+            <p:nvSpPr>
+              <p:cNvPr id="284" name="Rectangle 283"/>
+              <p:cNvSpPr/>
+              <p:nvPr/>
+            </p:nvSpPr>
+            <p:spPr>
+              <a:xfrm>
+                <a:off x="10525963" y="15533370"/>
+                <a:ext cx="228600" cy="1371600"/>
+              </a:xfrm>
+              <a:prstGeom prst="rect">
+                <a:avLst/>
+              </a:prstGeom>
+              <a:ln>
+                <a:solidFill>
+                  <a:schemeClr val="tx1"/>
+                </a:solidFill>
+              </a:ln>
+            </p:spPr>
+            <p:style>
+              <a:lnRef idx="2">
+                <a:schemeClr val="accent1">
+                  <a:shade val="50000"/>
+                </a:schemeClr>
+              </a:lnRef>
+              <a:fillRef idx="1">
+                <a:schemeClr val="accent1"/>
+              </a:fillRef>
+              <a:effectRef idx="0">
+                <a:schemeClr val="accent1"/>
+              </a:effectRef>
+              <a:fontRef idx="minor">
+                <a:schemeClr val="lt1"/>
+              </a:fontRef>
+            </p:style>
+            <p:txBody>
+              <a:bodyPr vert="vert270" rtlCol="0" anchor="ctr"/>
+              <a:lstStyle/>
+              <a:p>
+                <a:pPr algn="ctr"/>
+                <a:endParaRPr lang="en-US" sz="1200" dirty="0">
+                  <a:solidFill>
+                    <a:schemeClr val="tx1"/>
+                  </a:solidFill>
+                </a:endParaRPr>
+              </a:p>
+            </p:txBody>
+          </p:sp>
+          <p:sp>
+            <p:nvSpPr>
+              <p:cNvPr id="285" name="Right Arrow 284"/>
+              <p:cNvSpPr/>
+              <p:nvPr/>
+            </p:nvSpPr>
+            <p:spPr>
+              <a:xfrm>
+                <a:off x="10766154" y="16115149"/>
+                <a:ext cx="228600" cy="228600"/>
+              </a:xfrm>
+              <a:prstGeom prst="rightArrow">
+                <a:avLst/>
+              </a:prstGeom>
+              <a:solidFill>
+                <a:srgbClr val="00B0F0"/>
+              </a:solidFill>
+              <a:ln>
+                <a:solidFill>
+                  <a:schemeClr val="tx1"/>
+                </a:solidFill>
+              </a:ln>
+            </p:spPr>
+            <p:style>
+              <a:lnRef idx="2">
+                <a:schemeClr val="accent1">
+                  <a:shade val="50000"/>
+                </a:schemeClr>
+              </a:lnRef>
+              <a:fillRef idx="1">
+                <a:schemeClr val="accent1"/>
+              </a:fillRef>
+              <a:effectRef idx="0">
+                <a:schemeClr val="accent1"/>
+              </a:effectRef>
+              <a:fontRef idx="minor">
+                <a:schemeClr val="lt1"/>
+              </a:fontRef>
+            </p:style>
+            <p:txBody>
+              <a:bodyPr rtlCol="0" anchor="ctr"/>
+              <a:lstStyle/>
+              <a:p>
+                <a:pPr algn="ctr"/>
+                <a:endParaRPr lang="en-US" sz="450"/>
+              </a:p>
+            </p:txBody>
+          </p:sp>
+          <p:sp>
+            <p:nvSpPr>
+              <p:cNvPr id="286" name="Rectangle 285"/>
+              <p:cNvSpPr/>
+              <p:nvPr/>
+            </p:nvSpPr>
+            <p:spPr>
+              <a:xfrm>
+                <a:off x="11008958" y="15543649"/>
+                <a:ext cx="228600" cy="1371600"/>
+              </a:xfrm>
+              <a:prstGeom prst="rect">
+                <a:avLst/>
+              </a:prstGeom>
+              <a:ln>
+                <a:solidFill>
+                  <a:schemeClr val="tx1"/>
+                </a:solidFill>
+              </a:ln>
+            </p:spPr>
+            <p:style>
+              <a:lnRef idx="2">
+                <a:schemeClr val="accent1">
+                  <a:shade val="50000"/>
+                </a:schemeClr>
+              </a:lnRef>
+              <a:fillRef idx="1">
+                <a:schemeClr val="accent1"/>
+              </a:fillRef>
+              <a:effectRef idx="0">
+                <a:schemeClr val="accent1"/>
+              </a:effectRef>
+              <a:fontRef idx="minor">
+                <a:schemeClr val="lt1"/>
+              </a:fontRef>
+            </p:style>
+            <p:txBody>
+              <a:bodyPr vert="vert270" rtlCol="0" anchor="ctr"/>
+              <a:lstStyle/>
+              <a:p>
+                <a:pPr algn="ctr"/>
+                <a:endParaRPr lang="en-US" sz="1200" dirty="0">
+                  <a:solidFill>
+                    <a:schemeClr val="tx1"/>
+                  </a:solidFill>
+                </a:endParaRPr>
+              </a:p>
+            </p:txBody>
+          </p:sp>
+          <p:sp>
+            <p:nvSpPr>
+              <p:cNvPr id="287" name="Rectangle 286"/>
+              <p:cNvSpPr/>
+              <p:nvPr/>
+            </p:nvSpPr>
+            <p:spPr>
+              <a:xfrm>
+                <a:off x="11244422" y="15543649"/>
+                <a:ext cx="228600" cy="1371600"/>
+              </a:xfrm>
+              <a:prstGeom prst="rect">
+                <a:avLst/>
+              </a:prstGeom>
+              <a:solidFill>
+                <a:srgbClr val="FFFF00"/>
+              </a:solidFill>
+              <a:ln>
+                <a:solidFill>
+                  <a:schemeClr val="tx1"/>
+                </a:solidFill>
+              </a:ln>
+            </p:spPr>
+            <p:style>
+              <a:lnRef idx="2">
+                <a:schemeClr val="accent1">
+                  <a:shade val="50000"/>
+                </a:schemeClr>
+              </a:lnRef>
+              <a:fillRef idx="1">
+                <a:schemeClr val="accent1"/>
+              </a:fillRef>
+              <a:effectRef idx="0">
+                <a:schemeClr val="accent1"/>
+              </a:effectRef>
+              <a:fontRef idx="minor">
+                <a:schemeClr val="lt1"/>
+              </a:fontRef>
+            </p:style>
+            <p:txBody>
+              <a:bodyPr vert="vert270" rtlCol="0" anchor="ctr"/>
+              <a:lstStyle/>
+              <a:p>
+                <a:pPr algn="ctr"/>
+                <a:r>
+                  <a:rPr lang="en-US" sz="1200" dirty="0">
+                    <a:solidFill>
+                      <a:schemeClr val="tx1"/>
+                    </a:solidFill>
+                  </a:rPr>
+                  <a:t>Elu + BN</a:t>
+                </a:r>
+              </a:p>
+            </p:txBody>
+          </p:sp>
+          <p:cxnSp>
+            <p:nvCxnSpPr>
+              <p:cNvPr id="288" name="Curved Connector 287"/>
+              <p:cNvCxnSpPr>
+                <a:stCxn id="289" idx="2"/>
+                <a:endCxn id="287" idx="0"/>
+              </p:cNvCxnSpPr>
+              <p:nvPr/>
+            </p:nvCxnSpPr>
+            <p:spPr>
+              <a:xfrm rot="16200000" flipH="1">
+                <a:off x="10113678" y="14298604"/>
+                <a:ext cx="348413" cy="2141675"/>
+              </a:xfrm>
+              <a:prstGeom prst="curvedConnector3">
+                <a:avLst>
+                  <a:gd name="adj1" fmla="val 50000"/>
+                </a:avLst>
+              </a:prstGeom>
+              <a:ln w="34925">
+                <a:solidFill>
+                  <a:srgbClr val="00B050"/>
+                </a:solidFill>
+                <a:headEnd type="triangle"/>
+                <a:tailEnd type="triangle"/>
+              </a:ln>
+            </p:spPr>
+            <p:style>
+              <a:lnRef idx="1">
+                <a:schemeClr val="accent1"/>
+              </a:lnRef>
+              <a:fillRef idx="0">
+                <a:schemeClr val="accent1"/>
+              </a:fillRef>
+              <a:effectRef idx="0">
+                <a:schemeClr val="accent1"/>
+              </a:effectRef>
+              <a:fontRef idx="minor">
+                <a:schemeClr val="tx1"/>
+              </a:fontRef>
+            </p:style>
+          </p:cxnSp>
+          <p:sp>
+            <p:nvSpPr>
+              <p:cNvPr id="289" name="Rectangle 288"/>
+              <p:cNvSpPr/>
+              <p:nvPr/>
+            </p:nvSpPr>
+            <p:spPr>
+              <a:xfrm>
+                <a:off x="9102747" y="13823636"/>
+                <a:ext cx="228600" cy="1371600"/>
+              </a:xfrm>
+              <a:prstGeom prst="rect">
+                <a:avLst/>
+              </a:prstGeom>
+              <a:ln>
+                <a:solidFill>
+                  <a:schemeClr val="tx1"/>
+                </a:solidFill>
+              </a:ln>
+            </p:spPr>
+            <p:style>
+              <a:lnRef idx="2">
+                <a:schemeClr val="accent1">
+                  <a:shade val="50000"/>
+                </a:schemeClr>
+              </a:lnRef>
+              <a:fillRef idx="1">
+                <a:schemeClr val="accent1"/>
+              </a:fillRef>
+              <a:effectRef idx="0">
+                <a:schemeClr val="accent1"/>
+              </a:effectRef>
+              <a:fontRef idx="minor">
+                <a:schemeClr val="lt1"/>
+              </a:fontRef>
+            </p:style>
+            <p:txBody>
+              <a:bodyPr vert="vert270" rtlCol="0" anchor="ctr"/>
+              <a:lstStyle/>
+              <a:p>
+                <a:pPr algn="ctr"/>
+                <a:endParaRPr lang="en-US" sz="1200" dirty="0">
+                  <a:solidFill>
+                    <a:schemeClr val="tx1"/>
+                  </a:solidFill>
+                </a:endParaRPr>
+              </a:p>
+            </p:txBody>
+          </p:sp>
+          <p:sp>
+            <p:nvSpPr>
+              <p:cNvPr id="290" name="Rectangle 289"/>
+              <p:cNvSpPr/>
+              <p:nvPr/>
+            </p:nvSpPr>
+            <p:spPr>
+              <a:xfrm>
+                <a:off x="9334866" y="13823636"/>
+                <a:ext cx="228600" cy="1371600"/>
+              </a:xfrm>
+              <a:prstGeom prst="rect">
+                <a:avLst/>
+              </a:prstGeom>
+              <a:solidFill>
+                <a:srgbClr val="FFFF00"/>
+              </a:solidFill>
+              <a:ln>
+                <a:solidFill>
+                  <a:schemeClr val="tx1"/>
+                </a:solidFill>
+              </a:ln>
+            </p:spPr>
+            <p:style>
+              <a:lnRef idx="2">
+                <a:schemeClr val="accent1">
+                  <a:shade val="50000"/>
+                </a:schemeClr>
+              </a:lnRef>
+              <a:fillRef idx="1">
+                <a:schemeClr val="accent1"/>
+              </a:fillRef>
+              <a:effectRef idx="0">
+                <a:schemeClr val="accent1"/>
+              </a:effectRef>
+              <a:fontRef idx="minor">
+                <a:schemeClr val="lt1"/>
+              </a:fontRef>
+            </p:style>
+            <p:txBody>
+              <a:bodyPr vert="vert270" rtlCol="0" anchor="ctr"/>
+              <a:lstStyle/>
+              <a:p>
+                <a:pPr algn="ctr"/>
+                <a:r>
+                  <a:rPr lang="en-US" sz="1200" dirty="0">
+                    <a:solidFill>
+                      <a:schemeClr val="tx1"/>
+                    </a:solidFill>
+                  </a:rPr>
+                  <a:t>Elu + BN</a:t>
+                </a:r>
+              </a:p>
+            </p:txBody>
+          </p:sp>
+          <p:sp>
+            <p:nvSpPr>
+              <p:cNvPr id="291" name="Right Arrow 290"/>
+              <p:cNvSpPr/>
+              <p:nvPr/>
+            </p:nvSpPr>
+            <p:spPr>
+              <a:xfrm>
+                <a:off x="9571094" y="14395136"/>
+                <a:ext cx="228600" cy="228600"/>
+              </a:xfrm>
+              <a:prstGeom prst="rightArrow">
+                <a:avLst/>
+              </a:prstGeom>
+              <a:solidFill>
+                <a:srgbClr val="00B050"/>
+              </a:solidFill>
+              <a:ln>
+                <a:solidFill>
+                  <a:schemeClr val="tx1"/>
+                </a:solidFill>
+              </a:ln>
+            </p:spPr>
+            <p:style>
+              <a:lnRef idx="2">
+                <a:schemeClr val="accent1">
+                  <a:shade val="50000"/>
+                </a:schemeClr>
+              </a:lnRef>
+              <a:fillRef idx="1">
+                <a:schemeClr val="accent1"/>
+              </a:fillRef>
+              <a:effectRef idx="0">
+                <a:schemeClr val="accent1"/>
+              </a:effectRef>
+              <a:fontRef idx="minor">
+                <a:schemeClr val="lt1"/>
+              </a:fontRef>
+            </p:style>
+            <p:txBody>
+              <a:bodyPr rtlCol="0" anchor="ctr"/>
+              <a:lstStyle/>
+              <a:p>
+                <a:pPr algn="ctr"/>
+                <a:endParaRPr lang="en-US" sz="450"/>
+              </a:p>
+            </p:txBody>
+          </p:sp>
+          <p:sp>
+            <p:nvSpPr>
+              <p:cNvPr id="292" name="Rectangle 291"/>
+              <p:cNvSpPr/>
+              <p:nvPr/>
+            </p:nvSpPr>
+            <p:spPr>
+              <a:xfrm>
+                <a:off x="9802347" y="13823636"/>
+                <a:ext cx="228600" cy="1371600"/>
+              </a:xfrm>
+              <a:prstGeom prst="rect">
+                <a:avLst/>
+              </a:prstGeom>
+              <a:ln>
+                <a:solidFill>
+                  <a:schemeClr val="tx1"/>
+                </a:solidFill>
+              </a:ln>
+            </p:spPr>
+            <p:style>
+              <a:lnRef idx="2">
+                <a:schemeClr val="accent1">
+                  <a:shade val="50000"/>
+                </a:schemeClr>
+              </a:lnRef>
+              <a:fillRef idx="1">
+                <a:schemeClr val="accent1"/>
+              </a:fillRef>
+              <a:effectRef idx="0">
+                <a:schemeClr val="accent1"/>
+              </a:effectRef>
+              <a:fontRef idx="minor">
+                <a:schemeClr val="lt1"/>
+              </a:fontRef>
+            </p:style>
+            <p:txBody>
+              <a:bodyPr vert="vert270" rtlCol="0" anchor="ctr"/>
+              <a:lstStyle/>
+              <a:p>
+                <a:pPr algn="ctr"/>
+                <a:endParaRPr lang="en-US" sz="1200" dirty="0">
+                  <a:solidFill>
+                    <a:schemeClr val="tx1"/>
+                  </a:solidFill>
+                </a:endParaRPr>
+              </a:p>
+            </p:txBody>
+          </p:sp>
+          <p:sp>
+            <p:nvSpPr>
+              <p:cNvPr id="293" name="Rectangle 292"/>
+              <p:cNvSpPr/>
+              <p:nvPr/>
+            </p:nvSpPr>
+            <p:spPr>
+              <a:xfrm>
+                <a:off x="10041731" y="13823636"/>
+                <a:ext cx="228600" cy="1371600"/>
+              </a:xfrm>
+              <a:prstGeom prst="rect">
+                <a:avLst/>
+              </a:prstGeom>
+              <a:ln>
+                <a:solidFill>
+                  <a:schemeClr val="tx1"/>
+                </a:solidFill>
+              </a:ln>
+            </p:spPr>
+            <p:style>
+              <a:lnRef idx="2">
+                <a:schemeClr val="accent1">
+                  <a:shade val="50000"/>
+                </a:schemeClr>
+              </a:lnRef>
+              <a:fillRef idx="1">
+                <a:schemeClr val="accent1"/>
+              </a:fillRef>
+              <a:effectRef idx="0">
+                <a:schemeClr val="accent1"/>
+              </a:effectRef>
+              <a:fontRef idx="minor">
+                <a:schemeClr val="lt1"/>
+              </a:fontRef>
+            </p:style>
+            <p:txBody>
+              <a:bodyPr vert="vert270" rtlCol="0" anchor="ctr"/>
+              <a:lstStyle/>
+              <a:p>
+                <a:pPr algn="ctr"/>
+                <a:endParaRPr lang="en-US" sz="1200" dirty="0">
+                  <a:solidFill>
+                    <a:schemeClr val="tx1"/>
+                  </a:solidFill>
+                </a:endParaRPr>
+              </a:p>
+            </p:txBody>
+          </p:sp>
+          <p:sp>
+            <p:nvSpPr>
+              <p:cNvPr id="294" name="Right Arrow 293"/>
+              <p:cNvSpPr/>
+              <p:nvPr/>
+            </p:nvSpPr>
+            <p:spPr>
+              <a:xfrm>
+                <a:off x="11235392" y="14395136"/>
+                <a:ext cx="228600" cy="228600"/>
+              </a:xfrm>
+              <a:prstGeom prst="rightArrow">
+                <a:avLst/>
+              </a:prstGeom>
+              <a:solidFill>
+                <a:srgbClr val="00B0F0"/>
+              </a:solidFill>
+              <a:ln>
+                <a:solidFill>
+                  <a:schemeClr val="tx1"/>
+                </a:solidFill>
+              </a:ln>
+            </p:spPr>
+            <p:style>
+              <a:lnRef idx="2">
+                <a:schemeClr val="accent1">
+                  <a:shade val="50000"/>
+                </a:schemeClr>
+              </a:lnRef>
+              <a:fillRef idx="1">
+                <a:schemeClr val="accent1"/>
+              </a:fillRef>
+              <a:effectRef idx="0">
+                <a:schemeClr val="accent1"/>
+              </a:effectRef>
+              <a:fontRef idx="minor">
+                <a:schemeClr val="lt1"/>
+              </a:fontRef>
+            </p:style>
+            <p:txBody>
+              <a:bodyPr rtlCol="0" anchor="ctr"/>
+              <a:lstStyle/>
+              <a:p>
+                <a:pPr algn="ctr"/>
+                <a:endParaRPr lang="en-US" sz="450"/>
+              </a:p>
+            </p:txBody>
+          </p:sp>
+          <p:sp>
+            <p:nvSpPr>
+              <p:cNvPr id="295" name="Rectangle 294"/>
+              <p:cNvSpPr/>
+              <p:nvPr/>
+            </p:nvSpPr>
+            <p:spPr>
+              <a:xfrm>
+                <a:off x="11468671" y="13823636"/>
+                <a:ext cx="228600" cy="1371600"/>
+              </a:xfrm>
+              <a:prstGeom prst="rect">
+                <a:avLst/>
+              </a:prstGeom>
+              <a:ln>
+                <a:solidFill>
+                  <a:schemeClr val="tx1"/>
+                </a:solidFill>
+              </a:ln>
+            </p:spPr>
+            <p:style>
+              <a:lnRef idx="2">
+                <a:schemeClr val="accent1">
+                  <a:shade val="50000"/>
+                </a:schemeClr>
+              </a:lnRef>
+              <a:fillRef idx="1">
+                <a:schemeClr val="accent1"/>
+              </a:fillRef>
+              <a:effectRef idx="0">
+                <a:schemeClr val="accent1"/>
+              </a:effectRef>
+              <a:fontRef idx="minor">
+                <a:schemeClr val="lt1"/>
+              </a:fontRef>
+            </p:style>
+            <p:txBody>
+              <a:bodyPr vert="vert270" rtlCol="0" anchor="ctr"/>
+              <a:lstStyle/>
+              <a:p>
+                <a:pPr algn="ctr"/>
+                <a:endParaRPr lang="en-US" sz="1200" dirty="0">
+                  <a:solidFill>
+                    <a:schemeClr val="tx1"/>
+                  </a:solidFill>
+                </a:endParaRPr>
+              </a:p>
+            </p:txBody>
+          </p:sp>
+          <p:sp>
+            <p:nvSpPr>
+              <p:cNvPr id="296" name="Rectangle 295"/>
+              <p:cNvSpPr/>
+              <p:nvPr/>
+            </p:nvSpPr>
+            <p:spPr>
+              <a:xfrm>
+                <a:off x="11704135" y="13823636"/>
+                <a:ext cx="228600" cy="1371600"/>
+              </a:xfrm>
+              <a:prstGeom prst="rect">
+                <a:avLst/>
+              </a:prstGeom>
+              <a:solidFill>
+                <a:srgbClr val="FFFF00"/>
+              </a:solidFill>
+              <a:ln>
+                <a:solidFill>
+                  <a:schemeClr val="tx1"/>
+                </a:solidFill>
+              </a:ln>
+            </p:spPr>
+            <p:style>
+              <a:lnRef idx="2">
+                <a:schemeClr val="accent1">
+                  <a:shade val="50000"/>
+                </a:schemeClr>
+              </a:lnRef>
+              <a:fillRef idx="1">
+                <a:schemeClr val="accent1"/>
+              </a:fillRef>
+              <a:effectRef idx="0">
+                <a:schemeClr val="accent1"/>
+              </a:effectRef>
+              <a:fontRef idx="minor">
+                <a:schemeClr val="lt1"/>
+              </a:fontRef>
+            </p:style>
+            <p:txBody>
+              <a:bodyPr vert="vert270" rtlCol="0" anchor="ctr"/>
+              <a:lstStyle/>
+              <a:p>
+                <a:pPr algn="ctr"/>
+                <a:r>
+                  <a:rPr lang="en-US" sz="1200" dirty="0">
+                    <a:solidFill>
+                      <a:schemeClr val="tx1"/>
+                    </a:solidFill>
+                  </a:rPr>
+                  <a:t>Elu + BN</a:t>
+                </a:r>
+              </a:p>
+            </p:txBody>
+          </p:sp>
+          <p:sp>
+            <p:nvSpPr>
+              <p:cNvPr id="297" name="Right Arrow 296"/>
+              <p:cNvSpPr/>
+              <p:nvPr/>
+            </p:nvSpPr>
+            <p:spPr>
+              <a:xfrm>
+                <a:off x="11942260" y="14395136"/>
+                <a:ext cx="228600" cy="228600"/>
+              </a:xfrm>
+              <a:prstGeom prst="rightArrow">
+                <a:avLst/>
+              </a:prstGeom>
+              <a:solidFill>
+                <a:srgbClr val="00B050"/>
+              </a:solidFill>
+              <a:ln>
+                <a:solidFill>
+                  <a:schemeClr val="tx1"/>
+                </a:solidFill>
+              </a:ln>
+            </p:spPr>
+            <p:style>
+              <a:lnRef idx="2">
+                <a:schemeClr val="accent1">
+                  <a:shade val="50000"/>
+                </a:schemeClr>
+              </a:lnRef>
+              <a:fillRef idx="1">
+                <a:schemeClr val="accent1"/>
+              </a:fillRef>
+              <a:effectRef idx="0">
+                <a:schemeClr val="accent1"/>
+              </a:effectRef>
+              <a:fontRef idx="minor">
+                <a:schemeClr val="lt1"/>
+              </a:fontRef>
+            </p:style>
+            <p:txBody>
+              <a:bodyPr rtlCol="0" anchor="ctr"/>
+              <a:lstStyle/>
+              <a:p>
+                <a:pPr algn="ctr"/>
+                <a:endParaRPr lang="en-US" sz="450"/>
+              </a:p>
+            </p:txBody>
+          </p:sp>
+          <p:sp>
+            <p:nvSpPr>
+              <p:cNvPr id="298" name="Right Arrow 297"/>
+              <p:cNvSpPr/>
+              <p:nvPr/>
+            </p:nvSpPr>
+            <p:spPr>
+              <a:xfrm>
+                <a:off x="13361247" y="14395136"/>
+                <a:ext cx="228600" cy="228600"/>
+              </a:xfrm>
+              <a:prstGeom prst="rightArrow">
+                <a:avLst/>
+              </a:prstGeom>
+              <a:solidFill>
+                <a:srgbClr val="00B0F0"/>
+              </a:solidFill>
+              <a:ln>
+                <a:solidFill>
+                  <a:schemeClr val="tx1"/>
+                </a:solidFill>
+              </a:ln>
+            </p:spPr>
+            <p:style>
+              <a:lnRef idx="2">
+                <a:schemeClr val="accent1">
+                  <a:shade val="50000"/>
+                </a:schemeClr>
+              </a:lnRef>
+              <a:fillRef idx="1">
+                <a:schemeClr val="accent1"/>
+              </a:fillRef>
+              <a:effectRef idx="0">
+                <a:schemeClr val="accent1"/>
+              </a:effectRef>
+              <a:fontRef idx="minor">
+                <a:schemeClr val="lt1"/>
+              </a:fontRef>
+            </p:style>
+            <p:txBody>
+              <a:bodyPr rtlCol="0" anchor="ctr"/>
+              <a:lstStyle/>
+              <a:p>
+                <a:pPr algn="ctr"/>
+                <a:endParaRPr lang="en-US" sz="450"/>
+              </a:p>
+            </p:txBody>
+          </p:sp>
+          <p:sp>
+            <p:nvSpPr>
+              <p:cNvPr id="299" name="Rectangle 298"/>
+              <p:cNvSpPr/>
+              <p:nvPr/>
+            </p:nvSpPr>
+            <p:spPr>
+              <a:xfrm>
+                <a:off x="13604051" y="13823636"/>
+                <a:ext cx="228600" cy="1371600"/>
+              </a:xfrm>
+              <a:prstGeom prst="rect">
+                <a:avLst/>
+              </a:prstGeom>
+              <a:ln>
+                <a:solidFill>
+                  <a:schemeClr val="tx1"/>
+                </a:solidFill>
+              </a:ln>
+            </p:spPr>
+            <p:style>
+              <a:lnRef idx="2">
+                <a:schemeClr val="accent1">
+                  <a:shade val="50000"/>
+                </a:schemeClr>
+              </a:lnRef>
+              <a:fillRef idx="1">
+                <a:schemeClr val="accent1"/>
+              </a:fillRef>
+              <a:effectRef idx="0">
+                <a:schemeClr val="accent1"/>
+              </a:effectRef>
+              <a:fontRef idx="minor">
+                <a:schemeClr val="lt1"/>
+              </a:fontRef>
+            </p:style>
+            <p:txBody>
+              <a:bodyPr vert="vert270" rtlCol="0" anchor="ctr"/>
+              <a:lstStyle/>
+              <a:p>
+                <a:pPr algn="ctr"/>
+                <a:endParaRPr lang="en-US" sz="1200" dirty="0">
+                  <a:solidFill>
+                    <a:schemeClr val="tx1"/>
+                  </a:solidFill>
+                </a:endParaRPr>
+              </a:p>
+            </p:txBody>
+          </p:sp>
+          <p:sp>
+            <p:nvSpPr>
+              <p:cNvPr id="300" name="Rectangle 299"/>
+              <p:cNvSpPr/>
+              <p:nvPr/>
+            </p:nvSpPr>
+            <p:spPr>
+              <a:xfrm>
+                <a:off x="13839515" y="13823636"/>
+                <a:ext cx="228600" cy="1371600"/>
+              </a:xfrm>
+              <a:prstGeom prst="rect">
+                <a:avLst/>
+              </a:prstGeom>
+              <a:solidFill>
+                <a:srgbClr val="FFFF00"/>
+              </a:solidFill>
+              <a:ln>
+                <a:solidFill>
+                  <a:schemeClr val="tx1"/>
+                </a:solidFill>
+              </a:ln>
+            </p:spPr>
+            <p:style>
+              <a:lnRef idx="2">
+                <a:schemeClr val="accent1">
+                  <a:shade val="50000"/>
+                </a:schemeClr>
+              </a:lnRef>
+              <a:fillRef idx="1">
+                <a:schemeClr val="accent1"/>
+              </a:fillRef>
+              <a:effectRef idx="0">
+                <a:schemeClr val="accent1"/>
+              </a:effectRef>
+              <a:fontRef idx="minor">
+                <a:schemeClr val="lt1"/>
+              </a:fontRef>
+            </p:style>
+            <p:txBody>
+              <a:bodyPr vert="vert270" rtlCol="0" anchor="ctr"/>
+              <a:lstStyle/>
+              <a:p>
+                <a:pPr algn="ctr"/>
+                <a:r>
+                  <a:rPr lang="en-US" sz="1200" dirty="0">
+                    <a:solidFill>
+                      <a:schemeClr val="tx1"/>
+                    </a:solidFill>
+                  </a:rPr>
+                  <a:t>Elu + BN</a:t>
+                </a:r>
+              </a:p>
+            </p:txBody>
+          </p:sp>
+          <p:sp>
+            <p:nvSpPr>
+              <p:cNvPr id="301" name="Rectangle 300"/>
+              <p:cNvSpPr/>
+              <p:nvPr/>
+            </p:nvSpPr>
+            <p:spPr>
+              <a:xfrm>
+                <a:off x="10994349" y="13823636"/>
+                <a:ext cx="228600" cy="1371600"/>
+              </a:xfrm>
+              <a:prstGeom prst="rect">
+                <a:avLst/>
+              </a:prstGeom>
+              <a:solidFill>
+                <a:srgbClr val="FFFF00"/>
+              </a:solidFill>
+              <a:ln>
+                <a:solidFill>
+                  <a:schemeClr val="tx1"/>
+                </a:solidFill>
+              </a:ln>
+            </p:spPr>
+            <p:style>
+              <a:lnRef idx="2">
+                <a:schemeClr val="accent1">
+                  <a:shade val="50000"/>
+                </a:schemeClr>
+              </a:lnRef>
+              <a:fillRef idx="1">
+                <a:schemeClr val="accent1"/>
+              </a:fillRef>
+              <a:effectRef idx="0">
+                <a:schemeClr val="accent1"/>
+              </a:effectRef>
+              <a:fontRef idx="minor">
+                <a:schemeClr val="lt1"/>
+              </a:fontRef>
+            </p:style>
+            <p:txBody>
+              <a:bodyPr vert="vert270" rtlCol="0" anchor="ctr"/>
+              <a:lstStyle/>
+              <a:p>
+                <a:pPr algn="ctr"/>
+                <a:r>
+                  <a:rPr lang="en-US" sz="1200" dirty="0">
+                    <a:solidFill>
+                      <a:schemeClr val="tx1"/>
+                    </a:solidFill>
+                  </a:rPr>
+                  <a:t>Elu + BN</a:t>
+                </a:r>
+              </a:p>
+            </p:txBody>
+          </p:sp>
+          <p:cxnSp>
+            <p:nvCxnSpPr>
+              <p:cNvPr id="302" name="Curved Connector 301"/>
+              <p:cNvCxnSpPr>
+                <a:stCxn id="262" idx="2"/>
+                <a:endCxn id="264" idx="0"/>
+              </p:cNvCxnSpPr>
+              <p:nvPr/>
+            </p:nvCxnSpPr>
+            <p:spPr>
+              <a:xfrm rot="5400000">
+                <a:off x="7084666" y="14077008"/>
+                <a:ext cx="336363" cy="2572818"/>
+              </a:xfrm>
+              <a:prstGeom prst="curvedConnector3">
+                <a:avLst>
+                  <a:gd name="adj1" fmla="val 50000"/>
+                </a:avLst>
+              </a:prstGeom>
+              <a:ln w="34925">
+                <a:solidFill>
+                  <a:srgbClr val="C00000"/>
+                </a:solidFill>
+                <a:headEnd type="triangle"/>
+                <a:tailEnd type="triangle"/>
+              </a:ln>
+            </p:spPr>
+            <p:style>
+              <a:lnRef idx="1">
+                <a:schemeClr val="accent1"/>
+              </a:lnRef>
+              <a:fillRef idx="0">
+                <a:schemeClr val="accent1"/>
+              </a:fillRef>
+              <a:effectRef idx="0">
+                <a:schemeClr val="accent1"/>
+              </a:effectRef>
+              <a:fontRef idx="minor">
+                <a:schemeClr val="tx1"/>
+              </a:fontRef>
+            </p:style>
+          </p:cxnSp>
+          <p:sp>
+            <p:nvSpPr>
+              <p:cNvPr id="303" name="Rectangle 302"/>
+              <p:cNvSpPr/>
+              <p:nvPr/>
+            </p:nvSpPr>
+            <p:spPr>
+              <a:xfrm>
+                <a:off x="10281115" y="13823636"/>
+                <a:ext cx="228600" cy="1371600"/>
+              </a:xfrm>
+              <a:prstGeom prst="rect">
+                <a:avLst/>
+              </a:prstGeom>
+              <a:ln>
+                <a:solidFill>
+                  <a:schemeClr val="tx1"/>
+                </a:solidFill>
+              </a:ln>
+            </p:spPr>
+            <p:style>
+              <a:lnRef idx="2">
+                <a:schemeClr val="accent1">
+                  <a:shade val="50000"/>
+                </a:schemeClr>
+              </a:lnRef>
+              <a:fillRef idx="1">
+                <a:schemeClr val="accent1"/>
+              </a:fillRef>
+              <a:effectRef idx="0">
+                <a:schemeClr val="accent1"/>
+              </a:effectRef>
+              <a:fontRef idx="minor">
+                <a:schemeClr val="lt1"/>
+              </a:fontRef>
+            </p:style>
+            <p:txBody>
+              <a:bodyPr vert="vert270" rtlCol="0" anchor="ctr"/>
+              <a:lstStyle/>
+              <a:p>
+                <a:pPr algn="ctr"/>
+                <a:endParaRPr lang="en-US" sz="1200" dirty="0">
+                  <a:solidFill>
+                    <a:schemeClr val="tx1"/>
+                  </a:solidFill>
+                </a:endParaRPr>
+              </a:p>
+            </p:txBody>
+          </p:sp>
+          <p:sp>
+            <p:nvSpPr>
+              <p:cNvPr id="304" name="Rectangle 303"/>
+              <p:cNvSpPr/>
+              <p:nvPr/>
+            </p:nvSpPr>
+            <p:spPr>
+              <a:xfrm>
+                <a:off x="10520499" y="13823636"/>
+                <a:ext cx="228600" cy="1371600"/>
+              </a:xfrm>
+              <a:prstGeom prst="rect">
+                <a:avLst/>
+              </a:prstGeom>
+              <a:ln>
+                <a:solidFill>
+                  <a:schemeClr val="tx1"/>
+                </a:solidFill>
+              </a:ln>
+            </p:spPr>
+            <p:style>
+              <a:lnRef idx="2">
+                <a:schemeClr val="accent1">
+                  <a:shade val="50000"/>
+                </a:schemeClr>
+              </a:lnRef>
+              <a:fillRef idx="1">
+                <a:schemeClr val="accent1"/>
+              </a:fillRef>
+              <a:effectRef idx="0">
+                <a:schemeClr val="accent1"/>
+              </a:effectRef>
+              <a:fontRef idx="minor">
+                <a:schemeClr val="lt1"/>
+              </a:fontRef>
+            </p:style>
+            <p:txBody>
+              <a:bodyPr vert="vert270" rtlCol="0" anchor="ctr"/>
+              <a:lstStyle/>
+              <a:p>
+                <a:pPr algn="ctr"/>
+                <a:endParaRPr lang="en-US" sz="1200" dirty="0">
+                  <a:solidFill>
+                    <a:schemeClr val="tx1"/>
+                  </a:solidFill>
+                </a:endParaRPr>
+              </a:p>
+            </p:txBody>
+          </p:sp>
+          <p:sp>
+            <p:nvSpPr>
+              <p:cNvPr id="305" name="Rectangle 304"/>
+              <p:cNvSpPr/>
+              <p:nvPr/>
+            </p:nvSpPr>
+            <p:spPr>
+              <a:xfrm>
+                <a:off x="12175286" y="13823636"/>
+                <a:ext cx="228600" cy="1371600"/>
+              </a:xfrm>
+              <a:prstGeom prst="rect">
+                <a:avLst/>
+              </a:prstGeom>
+              <a:ln>
+                <a:solidFill>
+                  <a:schemeClr val="tx1"/>
+                </a:solidFill>
+              </a:ln>
+            </p:spPr>
+            <p:style>
+              <a:lnRef idx="2">
+                <a:schemeClr val="accent1">
+                  <a:shade val="50000"/>
+                </a:schemeClr>
+              </a:lnRef>
+              <a:fillRef idx="1">
+                <a:schemeClr val="accent1"/>
+              </a:fillRef>
+              <a:effectRef idx="0">
+                <a:schemeClr val="accent1"/>
+              </a:effectRef>
+              <a:fontRef idx="minor">
+                <a:schemeClr val="lt1"/>
+              </a:fontRef>
+            </p:style>
+            <p:txBody>
+              <a:bodyPr vert="vert270" rtlCol="0" anchor="ctr"/>
+              <a:lstStyle/>
+              <a:p>
+                <a:pPr algn="ctr"/>
+                <a:endParaRPr lang="en-US" sz="1200" dirty="0">
+                  <a:solidFill>
+                    <a:schemeClr val="tx1"/>
+                  </a:solidFill>
+                </a:endParaRPr>
+              </a:p>
+            </p:txBody>
+          </p:sp>
+          <p:sp>
+            <p:nvSpPr>
+              <p:cNvPr id="306" name="Rectangle 305"/>
+              <p:cNvSpPr/>
+              <p:nvPr/>
+            </p:nvSpPr>
+            <p:spPr>
+              <a:xfrm>
+                <a:off x="12409074" y="13823636"/>
+                <a:ext cx="228600" cy="1371600"/>
+              </a:xfrm>
+              <a:prstGeom prst="rect">
+                <a:avLst/>
+              </a:prstGeom>
+              <a:ln>
+                <a:solidFill>
+                  <a:schemeClr val="tx1"/>
+                </a:solidFill>
+              </a:ln>
+            </p:spPr>
+            <p:style>
+              <a:lnRef idx="2">
+                <a:schemeClr val="accent1">
+                  <a:shade val="50000"/>
+                </a:schemeClr>
+              </a:lnRef>
+              <a:fillRef idx="1">
+                <a:schemeClr val="accent1"/>
+              </a:fillRef>
+              <a:effectRef idx="0">
+                <a:schemeClr val="accent1"/>
+              </a:effectRef>
+              <a:fontRef idx="minor">
+                <a:schemeClr val="lt1"/>
+              </a:fontRef>
+            </p:style>
+            <p:txBody>
+              <a:bodyPr vert="vert270" rtlCol="0" anchor="ctr"/>
+              <a:lstStyle/>
+              <a:p>
+                <a:pPr algn="ctr"/>
+                <a:endParaRPr lang="en-US" sz="1200" dirty="0">
+                  <a:solidFill>
+                    <a:schemeClr val="tx1"/>
+                  </a:solidFill>
+                </a:endParaRPr>
+              </a:p>
+            </p:txBody>
+          </p:sp>
+          <p:sp>
+            <p:nvSpPr>
+              <p:cNvPr id="307" name="Rectangle 306"/>
+              <p:cNvSpPr/>
+              <p:nvPr/>
+            </p:nvSpPr>
+            <p:spPr>
+              <a:xfrm>
+                <a:off x="12647991" y="13823636"/>
+                <a:ext cx="228600" cy="1371600"/>
+              </a:xfrm>
+              <a:prstGeom prst="rect">
+                <a:avLst/>
+              </a:prstGeom>
+              <a:ln>
+                <a:solidFill>
+                  <a:schemeClr val="tx1"/>
+                </a:solidFill>
+              </a:ln>
+            </p:spPr>
+            <p:style>
+              <a:lnRef idx="2">
+                <a:schemeClr val="accent1">
+                  <a:shade val="50000"/>
+                </a:schemeClr>
+              </a:lnRef>
+              <a:fillRef idx="1">
+                <a:schemeClr val="accent1"/>
+              </a:fillRef>
+              <a:effectRef idx="0">
+                <a:schemeClr val="accent1"/>
+              </a:effectRef>
+              <a:fontRef idx="minor">
+                <a:schemeClr val="lt1"/>
+              </a:fontRef>
+            </p:style>
+            <p:txBody>
+              <a:bodyPr vert="vert270" rtlCol="0" anchor="ctr"/>
+              <a:lstStyle/>
+              <a:p>
+                <a:pPr algn="ctr"/>
+                <a:endParaRPr lang="en-US" sz="1200" dirty="0">
+                  <a:solidFill>
+                    <a:schemeClr val="tx1"/>
+                  </a:solidFill>
+                </a:endParaRPr>
+              </a:p>
+            </p:txBody>
+          </p:sp>
+          <p:sp>
+            <p:nvSpPr>
+              <p:cNvPr id="308" name="Rectangle 307"/>
+              <p:cNvSpPr/>
+              <p:nvPr/>
+            </p:nvSpPr>
+            <p:spPr>
+              <a:xfrm>
+                <a:off x="12886116" y="13823636"/>
+                <a:ext cx="228600" cy="1371600"/>
+              </a:xfrm>
+              <a:prstGeom prst="rect">
+                <a:avLst/>
+              </a:prstGeom>
+              <a:ln>
+                <a:solidFill>
+                  <a:schemeClr val="tx1"/>
+                </a:solidFill>
+              </a:ln>
+            </p:spPr>
+            <p:style>
+              <a:lnRef idx="2">
+                <a:schemeClr val="accent1">
+                  <a:shade val="50000"/>
+                </a:schemeClr>
+              </a:lnRef>
+              <a:fillRef idx="1">
+                <a:schemeClr val="accent1"/>
+              </a:fillRef>
+              <a:effectRef idx="0">
+                <a:schemeClr val="accent1"/>
+              </a:effectRef>
+              <a:fontRef idx="minor">
+                <a:schemeClr val="lt1"/>
+              </a:fontRef>
+            </p:style>
+            <p:txBody>
+              <a:bodyPr vert="vert270" rtlCol="0" anchor="ctr"/>
+              <a:lstStyle/>
+              <a:p>
+                <a:pPr algn="ctr"/>
+                <a:endParaRPr lang="en-US" sz="1200" dirty="0">
+                  <a:solidFill>
+                    <a:schemeClr val="tx1"/>
+                  </a:solidFill>
+                </a:endParaRPr>
+              </a:p>
+            </p:txBody>
+          </p:sp>
+          <p:sp>
+            <p:nvSpPr>
+              <p:cNvPr id="309" name="Rectangle 308"/>
+              <p:cNvSpPr/>
+              <p:nvPr/>
+            </p:nvSpPr>
+            <p:spPr>
+              <a:xfrm>
+                <a:off x="13124544" y="13823636"/>
+                <a:ext cx="228600" cy="1371600"/>
+              </a:xfrm>
+              <a:prstGeom prst="rect">
+                <a:avLst/>
+              </a:prstGeom>
+              <a:ln>
+                <a:solidFill>
+                  <a:schemeClr val="tx1"/>
+                </a:solidFill>
+              </a:ln>
+            </p:spPr>
+            <p:style>
+              <a:lnRef idx="2">
+                <a:schemeClr val="accent1">
+                  <a:shade val="50000"/>
+                </a:schemeClr>
+              </a:lnRef>
+              <a:fillRef idx="1">
+                <a:schemeClr val="accent1"/>
+              </a:fillRef>
+              <a:effectRef idx="0">
+                <a:schemeClr val="accent1"/>
+              </a:effectRef>
+              <a:fontRef idx="minor">
+                <a:schemeClr val="lt1"/>
+              </a:fontRef>
+            </p:style>
+            <p:txBody>
+              <a:bodyPr vert="vert270" rtlCol="0" anchor="ctr"/>
+              <a:lstStyle/>
+              <a:p>
+                <a:pPr algn="ctr"/>
+                <a:endParaRPr lang="en-US" sz="1200" dirty="0">
+                  <a:solidFill>
+                    <a:schemeClr val="tx1"/>
+                  </a:solidFill>
+                </a:endParaRPr>
+              </a:p>
+            </p:txBody>
+          </p:sp>
+          <p:sp>
+            <p:nvSpPr>
+              <p:cNvPr id="310" name="Rectangle 309"/>
+              <p:cNvSpPr/>
+              <p:nvPr/>
+            </p:nvSpPr>
+            <p:spPr>
+              <a:xfrm>
+                <a:off x="10759883" y="13823636"/>
+                <a:ext cx="228600" cy="1371600"/>
+              </a:xfrm>
+              <a:prstGeom prst="rect">
+                <a:avLst/>
+              </a:prstGeom>
+              <a:ln>
+                <a:solidFill>
+                  <a:schemeClr val="tx1"/>
+                </a:solidFill>
+              </a:ln>
+            </p:spPr>
+            <p:style>
+              <a:lnRef idx="2">
+                <a:schemeClr val="accent1">
+                  <a:shade val="50000"/>
+                </a:schemeClr>
+              </a:lnRef>
+              <a:fillRef idx="1">
+                <a:schemeClr val="accent1"/>
+              </a:fillRef>
+              <a:effectRef idx="0">
+                <a:schemeClr val="accent1"/>
+              </a:effectRef>
+              <a:fontRef idx="minor">
+                <a:schemeClr val="lt1"/>
+              </a:fontRef>
+            </p:style>
+            <p:txBody>
+              <a:bodyPr vert="vert270" rtlCol="0" anchor="ctr"/>
+              <a:lstStyle/>
+              <a:p>
+                <a:pPr algn="ctr"/>
+                <a:endParaRPr lang="en-US" sz="1200" dirty="0">
+                  <a:solidFill>
+                    <a:schemeClr val="tx1"/>
+                  </a:solidFill>
+                </a:endParaRPr>
+              </a:p>
+            </p:txBody>
+          </p:sp>
+          <p:sp>
+            <p:nvSpPr>
+              <p:cNvPr id="311" name="Right Arrow 310"/>
+              <p:cNvSpPr/>
+              <p:nvPr/>
+            </p:nvSpPr>
+            <p:spPr>
+              <a:xfrm>
+                <a:off x="14075202" y="14395136"/>
+                <a:ext cx="228600" cy="228600"/>
+              </a:xfrm>
+              <a:prstGeom prst="rightArrow">
+                <a:avLst/>
+              </a:prstGeom>
+              <a:solidFill>
+                <a:srgbClr val="00B0F0"/>
+              </a:solidFill>
+              <a:ln>
+                <a:solidFill>
+                  <a:schemeClr val="tx1"/>
+                </a:solidFill>
+              </a:ln>
+            </p:spPr>
+            <p:style>
+              <a:lnRef idx="2">
+                <a:schemeClr val="accent1">
+                  <a:shade val="50000"/>
+                </a:schemeClr>
+              </a:lnRef>
+              <a:fillRef idx="1">
+                <a:schemeClr val="accent1"/>
+              </a:fillRef>
+              <a:effectRef idx="0">
+                <a:schemeClr val="accent1"/>
+              </a:effectRef>
+              <a:fontRef idx="minor">
+                <a:schemeClr val="lt1"/>
+              </a:fontRef>
+            </p:style>
+            <p:txBody>
+              <a:bodyPr rtlCol="0" anchor="ctr"/>
+              <a:lstStyle/>
+              <a:p>
+                <a:pPr algn="ctr"/>
+                <a:endParaRPr lang="en-US" sz="450"/>
+              </a:p>
+            </p:txBody>
+          </p:sp>
+          <p:sp>
+            <p:nvSpPr>
+              <p:cNvPr id="312" name="Rectangle 311"/>
+              <p:cNvSpPr/>
+              <p:nvPr/>
+            </p:nvSpPr>
+            <p:spPr>
+              <a:xfrm>
+                <a:off x="14318006" y="13823636"/>
+                <a:ext cx="228600" cy="1371600"/>
+              </a:xfrm>
+              <a:prstGeom prst="rect">
+                <a:avLst/>
+              </a:prstGeom>
+              <a:ln>
+                <a:solidFill>
+                  <a:schemeClr val="tx1"/>
+                </a:solidFill>
+              </a:ln>
+            </p:spPr>
+            <p:style>
+              <a:lnRef idx="2">
+                <a:schemeClr val="accent1">
+                  <a:shade val="50000"/>
+                </a:schemeClr>
+              </a:lnRef>
+              <a:fillRef idx="1">
+                <a:schemeClr val="accent1"/>
+              </a:fillRef>
+              <a:effectRef idx="0">
+                <a:schemeClr val="accent1"/>
+              </a:effectRef>
+              <a:fontRef idx="minor">
+                <a:schemeClr val="lt1"/>
+              </a:fontRef>
+            </p:style>
+            <p:txBody>
+              <a:bodyPr vert="vert270" rtlCol="0" anchor="ctr"/>
+              <a:lstStyle/>
+              <a:p>
+                <a:pPr algn="ctr"/>
+                <a:endParaRPr lang="en-US" sz="1200" dirty="0">
+                  <a:solidFill>
+                    <a:schemeClr val="tx1"/>
+                  </a:solidFill>
+                </a:endParaRPr>
+              </a:p>
+            </p:txBody>
+          </p:sp>
+          <p:sp>
+            <p:nvSpPr>
+              <p:cNvPr id="313" name="Rectangle 312"/>
+              <p:cNvSpPr/>
+              <p:nvPr/>
+            </p:nvSpPr>
+            <p:spPr>
+              <a:xfrm>
+                <a:off x="14553470" y="13823636"/>
+                <a:ext cx="228600" cy="1371600"/>
+              </a:xfrm>
+              <a:prstGeom prst="rect">
+                <a:avLst/>
+              </a:prstGeom>
+              <a:solidFill>
+                <a:srgbClr val="FFFF00"/>
+              </a:solidFill>
+              <a:ln>
+                <a:solidFill>
+                  <a:schemeClr val="tx1"/>
+                </a:solidFill>
+              </a:ln>
+            </p:spPr>
+            <p:style>
+              <a:lnRef idx="2">
+                <a:schemeClr val="accent1">
+                  <a:shade val="50000"/>
+                </a:schemeClr>
+              </a:lnRef>
+              <a:fillRef idx="1">
+                <a:schemeClr val="accent1"/>
+              </a:fillRef>
+              <a:effectRef idx="0">
+                <a:schemeClr val="accent1"/>
+              </a:effectRef>
+              <a:fontRef idx="minor">
+                <a:schemeClr val="lt1"/>
+              </a:fontRef>
+            </p:style>
+            <p:txBody>
+              <a:bodyPr vert="vert270" rtlCol="0" anchor="ctr"/>
+              <a:lstStyle/>
+              <a:p>
+                <a:pPr algn="ctr"/>
+                <a:r>
+                  <a:rPr lang="en-US" sz="1200" dirty="0" err="1" smtClean="0">
+                    <a:solidFill>
+                      <a:schemeClr val="tx1"/>
+                    </a:solidFill>
+                  </a:rPr>
+                  <a:t>Softmax</a:t>
+                </a:r>
+                <a:endParaRPr lang="en-US" sz="1200" dirty="0">
+                  <a:solidFill>
+                    <a:schemeClr val="tx1"/>
+                  </a:solidFill>
+                </a:endParaRPr>
+              </a:p>
+            </p:txBody>
+          </p:sp>
+          <p:sp>
+            <p:nvSpPr>
+              <p:cNvPr id="314" name="Curved Down Arrow 313"/>
+              <p:cNvSpPr/>
+              <p:nvPr/>
+            </p:nvSpPr>
+            <p:spPr>
+              <a:xfrm>
+                <a:off x="11915812" y="17543200"/>
+                <a:ext cx="497599" cy="365760"/>
+              </a:xfrm>
+              <a:prstGeom prst="curvedDownArrow">
+                <a:avLst/>
+              </a:prstGeom>
+              <a:ln>
+                <a:solidFill>
+                  <a:schemeClr val="tx1"/>
+                </a:solidFill>
+              </a:ln>
+            </p:spPr>
+            <p:style>
+              <a:lnRef idx="2">
+                <a:schemeClr val="accent1">
+                  <a:shade val="50000"/>
+                </a:schemeClr>
+              </a:lnRef>
+              <a:fillRef idx="1">
+                <a:schemeClr val="accent1"/>
+              </a:fillRef>
+              <a:effectRef idx="0">
+                <a:schemeClr val="accent1"/>
+              </a:effectRef>
+              <a:fontRef idx="minor">
+                <a:schemeClr val="lt1"/>
+              </a:fontRef>
+            </p:style>
+            <p:txBody>
+              <a:bodyPr rot="0" spcFirstLastPara="0" vertOverflow="overflow" horzOverflow="overflow" vert="horz" wrap="square" lIns="45720" tIns="22860" rIns="45720" bIns="22860" numCol="1" spcCol="0" rtlCol="0" fromWordArt="0" anchor="ctr" anchorCtr="0" forceAA="0" compatLnSpc="1">
+                <a:prstTxWarp prst="textNoShape">
+                  <a:avLst/>
+                </a:prstTxWarp>
+                <a:noAutofit/>
+              </a:bodyPr>
+              <a:lstStyle/>
+              <a:p>
+                <a:pPr algn="ctr"/>
+                <a:endParaRPr lang="en-US" sz="450">
+                  <a:solidFill>
+                    <a:schemeClr val="tx1"/>
+                  </a:solidFill>
+                </a:endParaRPr>
+              </a:p>
+            </p:txBody>
+          </p:sp>
+          <p:sp>
+            <p:nvSpPr>
+              <p:cNvPr id="315" name="TextBox 314"/>
+              <p:cNvSpPr txBox="1"/>
+              <p:nvPr/>
+            </p:nvSpPr>
+            <p:spPr>
+              <a:xfrm>
+                <a:off x="12509380" y="17487929"/>
+                <a:ext cx="1701107" cy="400110"/>
+              </a:xfrm>
+              <a:prstGeom prst="rect">
+                <a:avLst/>
+              </a:prstGeom>
+              <a:noFill/>
+            </p:spPr>
+            <p:txBody>
+              <a:bodyPr wrap="none" rtlCol="0">
+                <a:spAutoFit/>
+              </a:bodyPr>
+              <a:lstStyle/>
+              <a:p>
+                <a:r>
+                  <a:rPr lang="en-US" sz="2000" dirty="0" smtClean="0"/>
+                  <a:t>Concatenation</a:t>
+                </a:r>
+                <a:endParaRPr lang="en-US" sz="2000" dirty="0"/>
+              </a:p>
+            </p:txBody>
+          </p:sp>
+          <p:sp>
+            <p:nvSpPr>
+              <p:cNvPr id="316" name="Curved Down Arrow 315"/>
+              <p:cNvSpPr/>
+              <p:nvPr/>
+            </p:nvSpPr>
+            <p:spPr>
+              <a:xfrm>
+                <a:off x="9149292" y="13444104"/>
+                <a:ext cx="4284673" cy="365760"/>
+              </a:xfrm>
+              <a:prstGeom prst="curvedDownArrow">
+                <a:avLst/>
+              </a:prstGeom>
+              <a:ln>
+                <a:solidFill>
+                  <a:schemeClr val="tx1"/>
+                </a:solidFill>
+              </a:ln>
+            </p:spPr>
+            <p:style>
+              <a:lnRef idx="2">
+                <a:schemeClr val="accent1">
+                  <a:shade val="50000"/>
+                </a:schemeClr>
+              </a:lnRef>
+              <a:fillRef idx="1">
+                <a:schemeClr val="accent1"/>
+              </a:fillRef>
+              <a:effectRef idx="0">
+                <a:schemeClr val="accent1"/>
+              </a:effectRef>
+              <a:fontRef idx="minor">
+                <a:schemeClr val="lt1"/>
+              </a:fontRef>
+            </p:style>
+            <p:txBody>
+              <a:bodyPr rot="0" spcFirstLastPara="0" vertOverflow="overflow" horzOverflow="overflow" vert="horz" wrap="square" lIns="45720" tIns="22860" rIns="45720" bIns="22860" numCol="1" spcCol="0" rtlCol="0" fromWordArt="0" anchor="ctr" anchorCtr="0" forceAA="0" compatLnSpc="1">
+                <a:prstTxWarp prst="textNoShape">
+                  <a:avLst/>
+                </a:prstTxWarp>
+                <a:noAutofit/>
+              </a:bodyPr>
+              <a:lstStyle/>
+              <a:p>
+                <a:pPr algn="ctr"/>
+                <a:endParaRPr lang="en-US" sz="450">
+                  <a:solidFill>
+                    <a:schemeClr val="tx1"/>
+                  </a:solidFill>
+                </a:endParaRPr>
+              </a:p>
+            </p:txBody>
+          </p:sp>
+          <p:sp>
+            <p:nvSpPr>
+              <p:cNvPr id="317" name="Curved Down Arrow 316"/>
+              <p:cNvSpPr/>
+              <p:nvPr/>
+            </p:nvSpPr>
+            <p:spPr>
+              <a:xfrm>
+                <a:off x="7317128" y="13357443"/>
+                <a:ext cx="5849615" cy="457200"/>
+              </a:xfrm>
+              <a:prstGeom prst="curvedDownArrow">
+                <a:avLst/>
+              </a:prstGeom>
+              <a:ln>
+                <a:solidFill>
+                  <a:schemeClr val="tx1"/>
+                </a:solidFill>
+              </a:ln>
+            </p:spPr>
+            <p:style>
+              <a:lnRef idx="2">
+                <a:schemeClr val="accent1">
+                  <a:shade val="50000"/>
+                </a:schemeClr>
+              </a:lnRef>
+              <a:fillRef idx="1">
+                <a:schemeClr val="accent1"/>
+              </a:fillRef>
+              <a:effectRef idx="0">
+                <a:schemeClr val="accent1"/>
+              </a:effectRef>
+              <a:fontRef idx="minor">
+                <a:schemeClr val="lt1"/>
+              </a:fontRef>
+            </p:style>
+            <p:txBody>
+              <a:bodyPr rot="0" spcFirstLastPara="0" vertOverflow="overflow" horzOverflow="overflow" vert="horz" wrap="square" lIns="45720" tIns="22860" rIns="45720" bIns="22860" numCol="1" spcCol="0" rtlCol="0" fromWordArt="0" anchor="ctr" anchorCtr="0" forceAA="0" compatLnSpc="1">
+                <a:prstTxWarp prst="textNoShape">
+                  <a:avLst/>
+                </a:prstTxWarp>
+                <a:noAutofit/>
+              </a:bodyPr>
+              <a:lstStyle/>
+              <a:p>
+                <a:pPr algn="ctr"/>
+                <a:endParaRPr lang="en-US" sz="450">
+                  <a:solidFill>
+                    <a:schemeClr val="tx1"/>
+                  </a:solidFill>
+                </a:endParaRPr>
+              </a:p>
+            </p:txBody>
+          </p:sp>
+          <p:sp>
+            <p:nvSpPr>
+              <p:cNvPr id="318" name="Curved Down Arrow 317"/>
+              <p:cNvSpPr/>
+              <p:nvPr/>
+            </p:nvSpPr>
+            <p:spPr>
+              <a:xfrm>
+                <a:off x="5688241" y="13273444"/>
+                <a:ext cx="7249902" cy="548640"/>
+              </a:xfrm>
+              <a:prstGeom prst="curvedDownArrow">
+                <a:avLst/>
+              </a:prstGeom>
+              <a:ln>
+                <a:solidFill>
+                  <a:schemeClr val="tx1"/>
+                </a:solidFill>
+              </a:ln>
+            </p:spPr>
+            <p:style>
+              <a:lnRef idx="2">
+                <a:schemeClr val="accent1">
+                  <a:shade val="50000"/>
+                </a:schemeClr>
+              </a:lnRef>
+              <a:fillRef idx="1">
+                <a:schemeClr val="accent1"/>
+              </a:fillRef>
+              <a:effectRef idx="0">
+                <a:schemeClr val="accent1"/>
+              </a:effectRef>
+              <a:fontRef idx="minor">
+                <a:schemeClr val="lt1"/>
+              </a:fontRef>
+            </p:style>
+            <p:txBody>
+              <a:bodyPr rot="0" spcFirstLastPara="0" vertOverflow="overflow" horzOverflow="overflow" vert="horz" wrap="square" lIns="45720" tIns="22860" rIns="45720" bIns="22860" numCol="1" spcCol="0" rtlCol="0" fromWordArt="0" anchor="ctr" anchorCtr="0" forceAA="0" compatLnSpc="1">
+                <a:prstTxWarp prst="textNoShape">
+                  <a:avLst/>
+                </a:prstTxWarp>
+                <a:noAutofit/>
+              </a:bodyPr>
+              <a:lstStyle/>
+              <a:p>
+                <a:pPr algn="ctr"/>
+                <a:endParaRPr lang="en-US" sz="450">
+                  <a:solidFill>
+                    <a:schemeClr val="tx1"/>
+                  </a:solidFill>
+                </a:endParaRPr>
+              </a:p>
+            </p:txBody>
+          </p:sp>
+          <p:sp>
+            <p:nvSpPr>
+              <p:cNvPr id="319" name="Curved Down Arrow 318"/>
+              <p:cNvSpPr/>
+              <p:nvPr/>
+            </p:nvSpPr>
+            <p:spPr>
+              <a:xfrm>
+                <a:off x="4989781" y="13185506"/>
+                <a:ext cx="7709934" cy="640080"/>
+              </a:xfrm>
+              <a:prstGeom prst="curvedDownArrow">
+                <a:avLst/>
+              </a:prstGeom>
+              <a:ln>
+                <a:solidFill>
+                  <a:schemeClr val="tx1"/>
+                </a:solidFill>
+              </a:ln>
+            </p:spPr>
+            <p:style>
+              <a:lnRef idx="2">
+                <a:schemeClr val="accent1">
+                  <a:shade val="50000"/>
+                </a:schemeClr>
+              </a:lnRef>
+              <a:fillRef idx="1">
+                <a:schemeClr val="accent1"/>
+              </a:fillRef>
+              <a:effectRef idx="0">
+                <a:schemeClr val="accent1"/>
+              </a:effectRef>
+              <a:fontRef idx="minor">
+                <a:schemeClr val="lt1"/>
+              </a:fontRef>
+            </p:style>
+            <p:txBody>
+              <a:bodyPr rot="0" spcFirstLastPara="0" vertOverflow="overflow" horzOverflow="overflow" vert="horz" wrap="square" lIns="45720" tIns="22860" rIns="45720" bIns="22860" numCol="1" spcCol="0" rtlCol="0" fromWordArt="0" anchor="ctr" anchorCtr="0" forceAA="0" compatLnSpc="1">
+                <a:prstTxWarp prst="textNoShape">
+                  <a:avLst/>
+                </a:prstTxWarp>
+                <a:noAutofit/>
+              </a:bodyPr>
+              <a:lstStyle/>
+              <a:p>
+                <a:pPr algn="ctr"/>
+                <a:endParaRPr lang="en-US" sz="450">
+                  <a:solidFill>
+                    <a:schemeClr val="tx1"/>
+                  </a:solidFill>
+                </a:endParaRPr>
+              </a:p>
+            </p:txBody>
+          </p:sp>
+          <p:sp>
+            <p:nvSpPr>
+              <p:cNvPr id="320" name="Curved Down Arrow 319"/>
+              <p:cNvSpPr/>
+              <p:nvPr/>
+            </p:nvSpPr>
+            <p:spPr>
+              <a:xfrm>
+                <a:off x="9150130" y="13434928"/>
+                <a:ext cx="1859923" cy="365760"/>
+              </a:xfrm>
+              <a:prstGeom prst="curvedDownArrow">
+                <a:avLst/>
+              </a:prstGeom>
+              <a:ln>
+                <a:solidFill>
+                  <a:schemeClr val="tx1"/>
+                </a:solidFill>
+              </a:ln>
+            </p:spPr>
+            <p:style>
+              <a:lnRef idx="2">
+                <a:schemeClr val="accent1">
+                  <a:shade val="50000"/>
+                </a:schemeClr>
+              </a:lnRef>
+              <a:fillRef idx="1">
+                <a:schemeClr val="accent1"/>
+              </a:fillRef>
+              <a:effectRef idx="0">
+                <a:schemeClr val="accent1"/>
+              </a:effectRef>
+              <a:fontRef idx="minor">
+                <a:schemeClr val="lt1"/>
+              </a:fontRef>
+            </p:style>
+            <p:txBody>
+              <a:bodyPr rot="0" spcFirstLastPara="0" vertOverflow="overflow" horzOverflow="overflow" vert="horz" wrap="square" lIns="45720" tIns="22860" rIns="45720" bIns="22860" numCol="1" spcCol="0" rtlCol="0" fromWordArt="0" anchor="ctr" anchorCtr="0" forceAA="0" compatLnSpc="1">
+                <a:prstTxWarp prst="textNoShape">
+                  <a:avLst/>
+                </a:prstTxWarp>
+                <a:noAutofit/>
+              </a:bodyPr>
+              <a:lstStyle/>
+              <a:p>
+                <a:pPr algn="ctr"/>
+                <a:endParaRPr lang="en-US" sz="450">
+                  <a:solidFill>
+                    <a:schemeClr val="tx1"/>
+                  </a:solidFill>
+                </a:endParaRPr>
+              </a:p>
+            </p:txBody>
+          </p:sp>
+          <p:sp>
+            <p:nvSpPr>
+              <p:cNvPr id="321" name="Curved Down Arrow 320"/>
+              <p:cNvSpPr/>
+              <p:nvPr/>
+            </p:nvSpPr>
+            <p:spPr>
+              <a:xfrm>
+                <a:off x="7317202" y="13360865"/>
+                <a:ext cx="3450673" cy="457200"/>
+              </a:xfrm>
+              <a:prstGeom prst="curvedDownArrow">
+                <a:avLst/>
+              </a:prstGeom>
+              <a:ln>
+                <a:solidFill>
+                  <a:schemeClr val="tx1"/>
+                </a:solidFill>
+              </a:ln>
+            </p:spPr>
+            <p:style>
+              <a:lnRef idx="2">
+                <a:schemeClr val="accent1">
+                  <a:shade val="50000"/>
+                </a:schemeClr>
+              </a:lnRef>
+              <a:fillRef idx="1">
+                <a:schemeClr val="accent1"/>
+              </a:fillRef>
+              <a:effectRef idx="0">
+                <a:schemeClr val="accent1"/>
+              </a:effectRef>
+              <a:fontRef idx="minor">
+                <a:schemeClr val="lt1"/>
+              </a:fontRef>
+            </p:style>
+            <p:txBody>
+              <a:bodyPr rot="0" spcFirstLastPara="0" vertOverflow="overflow" horzOverflow="overflow" vert="horz" wrap="square" lIns="45720" tIns="22860" rIns="45720" bIns="22860" numCol="1" spcCol="0" rtlCol="0" fromWordArt="0" anchor="ctr" anchorCtr="0" forceAA="0" compatLnSpc="1">
+                <a:prstTxWarp prst="textNoShape">
+                  <a:avLst/>
+                </a:prstTxWarp>
+                <a:noAutofit/>
+              </a:bodyPr>
+              <a:lstStyle/>
+              <a:p>
+                <a:pPr algn="ctr"/>
+                <a:endParaRPr lang="en-US" sz="450">
+                  <a:solidFill>
+                    <a:schemeClr val="tx1"/>
+                  </a:solidFill>
+                </a:endParaRPr>
+              </a:p>
+            </p:txBody>
+          </p:sp>
+          <p:sp>
+            <p:nvSpPr>
+              <p:cNvPr id="322" name="Curved Down Arrow 321"/>
+              <p:cNvSpPr/>
+              <p:nvPr/>
+            </p:nvSpPr>
+            <p:spPr>
+              <a:xfrm>
+                <a:off x="5688241" y="13272699"/>
+                <a:ext cx="4845168" cy="548640"/>
+              </a:xfrm>
+              <a:prstGeom prst="curvedDownArrow">
+                <a:avLst/>
+              </a:prstGeom>
+              <a:ln>
+                <a:solidFill>
+                  <a:schemeClr val="tx1"/>
+                </a:solidFill>
+              </a:ln>
+            </p:spPr>
+            <p:style>
+              <a:lnRef idx="2">
+                <a:schemeClr val="accent1">
+                  <a:shade val="50000"/>
+                </a:schemeClr>
+              </a:lnRef>
+              <a:fillRef idx="1">
+                <a:schemeClr val="accent1"/>
+              </a:fillRef>
+              <a:effectRef idx="0">
+                <a:schemeClr val="accent1"/>
+              </a:effectRef>
+              <a:fontRef idx="minor">
+                <a:schemeClr val="lt1"/>
+              </a:fontRef>
+            </p:style>
+            <p:txBody>
+              <a:bodyPr rot="0" spcFirstLastPara="0" vertOverflow="overflow" horzOverflow="overflow" vert="horz" wrap="square" lIns="45720" tIns="22860" rIns="45720" bIns="22860" numCol="1" spcCol="0" rtlCol="0" fromWordArt="0" anchor="ctr" anchorCtr="0" forceAA="0" compatLnSpc="1">
+                <a:prstTxWarp prst="textNoShape">
+                  <a:avLst/>
+                </a:prstTxWarp>
+                <a:noAutofit/>
+              </a:bodyPr>
+              <a:lstStyle/>
+              <a:p>
+                <a:pPr algn="ctr"/>
+                <a:endParaRPr lang="en-US" sz="450">
+                  <a:solidFill>
+                    <a:schemeClr val="tx1"/>
+                  </a:solidFill>
+                </a:endParaRPr>
+              </a:p>
+            </p:txBody>
+          </p:sp>
+          <p:sp>
+            <p:nvSpPr>
+              <p:cNvPr id="323" name="Curved Down Arrow 322"/>
+              <p:cNvSpPr/>
+              <p:nvPr/>
+            </p:nvSpPr>
+            <p:spPr>
+              <a:xfrm>
+                <a:off x="4990772" y="13185506"/>
+                <a:ext cx="5326635" cy="640080"/>
+              </a:xfrm>
+              <a:prstGeom prst="curvedDownArrow">
+                <a:avLst/>
+              </a:prstGeom>
+              <a:ln>
+                <a:solidFill>
+                  <a:schemeClr val="tx1"/>
+                </a:solidFill>
+              </a:ln>
+            </p:spPr>
+            <p:style>
+              <a:lnRef idx="2">
+                <a:schemeClr val="accent1">
+                  <a:shade val="50000"/>
+                </a:schemeClr>
+              </a:lnRef>
+              <a:fillRef idx="1">
+                <a:schemeClr val="accent1"/>
+              </a:fillRef>
+              <a:effectRef idx="0">
+                <a:schemeClr val="accent1"/>
+              </a:effectRef>
+              <a:fontRef idx="minor">
+                <a:schemeClr val="lt1"/>
+              </a:fontRef>
+            </p:style>
+            <p:txBody>
+              <a:bodyPr rot="0" spcFirstLastPara="0" vertOverflow="overflow" horzOverflow="overflow" vert="horz" wrap="square" lIns="45720" tIns="22860" rIns="45720" bIns="22860" numCol="1" spcCol="0" rtlCol="0" fromWordArt="0" anchor="ctr" anchorCtr="0" forceAA="0" compatLnSpc="1">
+                <a:prstTxWarp prst="textNoShape">
+                  <a:avLst/>
+                </a:prstTxWarp>
+                <a:noAutofit/>
+              </a:bodyPr>
+              <a:lstStyle/>
+              <a:p>
+                <a:pPr algn="ctr"/>
+                <a:endParaRPr lang="en-US" sz="450">
+                  <a:solidFill>
+                    <a:schemeClr val="tx1"/>
+                  </a:solidFill>
+                </a:endParaRPr>
+              </a:p>
+            </p:txBody>
+          </p:sp>
+          <p:sp>
+            <p:nvSpPr>
+              <p:cNvPr id="324" name="Curved Down Arrow 323"/>
+              <p:cNvSpPr/>
+              <p:nvPr/>
+            </p:nvSpPr>
+            <p:spPr>
+              <a:xfrm>
+                <a:off x="5688242" y="13272699"/>
+                <a:ext cx="2282054" cy="548640"/>
+              </a:xfrm>
+              <a:prstGeom prst="curvedDownArrow">
+                <a:avLst/>
+              </a:prstGeom>
+              <a:ln>
+                <a:solidFill>
+                  <a:schemeClr val="tx1"/>
+                </a:solidFill>
+              </a:ln>
+            </p:spPr>
+            <p:style>
+              <a:lnRef idx="2">
+                <a:schemeClr val="accent1">
+                  <a:shade val="50000"/>
+                </a:schemeClr>
+              </a:lnRef>
+              <a:fillRef idx="1">
+                <a:schemeClr val="accent1"/>
+              </a:fillRef>
+              <a:effectRef idx="0">
+                <a:schemeClr val="accent1"/>
+              </a:effectRef>
+              <a:fontRef idx="minor">
+                <a:schemeClr val="lt1"/>
+              </a:fontRef>
+            </p:style>
+            <p:txBody>
+              <a:bodyPr rot="0" spcFirstLastPara="0" vertOverflow="overflow" horzOverflow="overflow" vert="horz" wrap="square" lIns="45720" tIns="22860" rIns="45720" bIns="22860" numCol="1" spcCol="0" rtlCol="0" fromWordArt="0" anchor="ctr" anchorCtr="0" forceAA="0" compatLnSpc="1">
+                <a:prstTxWarp prst="textNoShape">
+                  <a:avLst/>
+                </a:prstTxWarp>
+                <a:noAutofit/>
+              </a:bodyPr>
+              <a:lstStyle/>
+              <a:p>
+                <a:pPr algn="ctr"/>
+                <a:endParaRPr lang="en-US" sz="450">
+                  <a:solidFill>
+                    <a:schemeClr val="tx1"/>
+                  </a:solidFill>
+                </a:endParaRPr>
+              </a:p>
+            </p:txBody>
+          </p:sp>
+          <p:sp>
+            <p:nvSpPr>
+              <p:cNvPr id="325" name="Curved Down Arrow 324"/>
+              <p:cNvSpPr/>
+              <p:nvPr/>
+            </p:nvSpPr>
+            <p:spPr>
+              <a:xfrm>
+                <a:off x="4987640" y="13185545"/>
+                <a:ext cx="2754056" cy="640080"/>
+              </a:xfrm>
+              <a:prstGeom prst="curvedDownArrow">
+                <a:avLst/>
+              </a:prstGeom>
+              <a:ln>
+                <a:solidFill>
+                  <a:schemeClr val="tx1"/>
+                </a:solidFill>
+              </a:ln>
+            </p:spPr>
+            <p:style>
+              <a:lnRef idx="2">
+                <a:schemeClr val="accent1">
+                  <a:shade val="50000"/>
+                </a:schemeClr>
+              </a:lnRef>
+              <a:fillRef idx="1">
+                <a:schemeClr val="accent1"/>
+              </a:fillRef>
+              <a:effectRef idx="0">
+                <a:schemeClr val="accent1"/>
+              </a:effectRef>
+              <a:fontRef idx="minor">
+                <a:schemeClr val="lt1"/>
+              </a:fontRef>
+            </p:style>
+            <p:txBody>
+              <a:bodyPr rot="0" spcFirstLastPara="0" vertOverflow="overflow" horzOverflow="overflow" vert="horz" wrap="square" lIns="45720" tIns="22860" rIns="45720" bIns="22860" numCol="1" spcCol="0" rtlCol="0" fromWordArt="0" anchor="ctr" anchorCtr="0" forceAA="0" compatLnSpc="1">
+                <a:prstTxWarp prst="textNoShape">
+                  <a:avLst/>
+                </a:prstTxWarp>
+                <a:noAutofit/>
+              </a:bodyPr>
+              <a:lstStyle/>
+              <a:p>
+                <a:pPr algn="ctr"/>
+                <a:endParaRPr lang="en-US" sz="450">
+                  <a:solidFill>
+                    <a:schemeClr val="tx1"/>
+                  </a:solidFill>
+                </a:endParaRPr>
+              </a:p>
+            </p:txBody>
+          </p:sp>
+          <p:sp>
+            <p:nvSpPr>
+              <p:cNvPr id="326" name="Curved Down Arrow 325"/>
+              <p:cNvSpPr/>
+              <p:nvPr/>
+            </p:nvSpPr>
+            <p:spPr>
+              <a:xfrm>
+                <a:off x="4990773" y="13185545"/>
+                <a:ext cx="1142882" cy="640080"/>
+              </a:xfrm>
+              <a:prstGeom prst="curvedDownArrow">
+                <a:avLst/>
+              </a:prstGeom>
+              <a:ln>
+                <a:solidFill>
+                  <a:schemeClr val="tx1"/>
+                </a:solidFill>
+              </a:ln>
+            </p:spPr>
+            <p:style>
+              <a:lnRef idx="2">
+                <a:schemeClr val="accent1">
+                  <a:shade val="50000"/>
+                </a:schemeClr>
+              </a:lnRef>
+              <a:fillRef idx="1">
+                <a:schemeClr val="accent1"/>
+              </a:fillRef>
+              <a:effectRef idx="0">
+                <a:schemeClr val="accent1"/>
+              </a:effectRef>
+              <a:fontRef idx="minor">
+                <a:schemeClr val="lt1"/>
+              </a:fontRef>
+            </p:style>
+            <p:txBody>
+              <a:bodyPr rot="0" spcFirstLastPara="0" vertOverflow="overflow" horzOverflow="overflow" vert="horz" wrap="square" lIns="45720" tIns="22860" rIns="45720" bIns="22860" numCol="1" spcCol="0" rtlCol="0" fromWordArt="0" anchor="ctr" anchorCtr="0" forceAA="0" compatLnSpc="1">
+                <a:prstTxWarp prst="textNoShape">
+                  <a:avLst/>
+                </a:prstTxWarp>
+                <a:noAutofit/>
+              </a:bodyPr>
+              <a:lstStyle/>
+              <a:p>
+                <a:pPr algn="ctr"/>
+                <a:endParaRPr lang="en-US" sz="450">
+                  <a:solidFill>
+                    <a:schemeClr val="tx1"/>
+                  </a:solidFill>
+                </a:endParaRPr>
+              </a:p>
+            </p:txBody>
+          </p:sp>
+          <p:sp>
+            <p:nvSpPr>
+              <p:cNvPr id="327" name="Curved Down Arrow 326"/>
+              <p:cNvSpPr/>
+              <p:nvPr/>
+            </p:nvSpPr>
+            <p:spPr>
+              <a:xfrm flipV="1">
+                <a:off x="8276634" y="16915249"/>
+                <a:ext cx="2471579" cy="365760"/>
+              </a:xfrm>
+              <a:prstGeom prst="curvedDownArrow">
+                <a:avLst/>
+              </a:prstGeom>
+              <a:ln>
+                <a:solidFill>
+                  <a:schemeClr val="tx1"/>
+                </a:solidFill>
+              </a:ln>
+            </p:spPr>
+            <p:style>
+              <a:lnRef idx="2">
+                <a:schemeClr val="accent1">
+                  <a:shade val="50000"/>
+                </a:schemeClr>
+              </a:lnRef>
+              <a:fillRef idx="1">
+                <a:schemeClr val="accent1"/>
+              </a:fillRef>
+              <a:effectRef idx="0">
+                <a:schemeClr val="accent1"/>
+              </a:effectRef>
+              <a:fontRef idx="minor">
+                <a:schemeClr val="lt1"/>
+              </a:fontRef>
+            </p:style>
+            <p:txBody>
+              <a:bodyPr rot="0" spcFirstLastPara="0" vertOverflow="overflow" horzOverflow="overflow" vert="horz" wrap="square" lIns="45720" tIns="22860" rIns="45720" bIns="22860" numCol="1" spcCol="0" rtlCol="0" fromWordArt="0" anchor="ctr" anchorCtr="0" forceAA="0" compatLnSpc="1">
+                <a:prstTxWarp prst="textNoShape">
+                  <a:avLst/>
+                </a:prstTxWarp>
+                <a:noAutofit/>
+              </a:bodyPr>
+              <a:lstStyle/>
+              <a:p>
+                <a:pPr algn="ctr"/>
+                <a:endParaRPr lang="en-US" sz="450">
+                  <a:solidFill>
+                    <a:schemeClr val="tx1"/>
+                  </a:solidFill>
+                </a:endParaRPr>
+              </a:p>
+            </p:txBody>
+          </p:sp>
+          <p:sp>
+            <p:nvSpPr>
+              <p:cNvPr id="328" name="Curved Down Arrow 327"/>
+              <p:cNvSpPr/>
+              <p:nvPr/>
+            </p:nvSpPr>
+            <p:spPr>
+              <a:xfrm flipV="1">
+                <a:off x="6606079" y="16901355"/>
+                <a:ext cx="3914432" cy="457200"/>
+              </a:xfrm>
+              <a:prstGeom prst="curvedDownArrow">
+                <a:avLst/>
+              </a:prstGeom>
+              <a:ln>
+                <a:solidFill>
+                  <a:schemeClr val="tx1"/>
+                </a:solidFill>
+              </a:ln>
+            </p:spPr>
+            <p:style>
+              <a:lnRef idx="2">
+                <a:schemeClr val="accent1">
+                  <a:shade val="50000"/>
+                </a:schemeClr>
+              </a:lnRef>
+              <a:fillRef idx="1">
+                <a:schemeClr val="accent1"/>
+              </a:fillRef>
+              <a:effectRef idx="0">
+                <a:schemeClr val="accent1"/>
+              </a:effectRef>
+              <a:fontRef idx="minor">
+                <a:schemeClr val="lt1"/>
+              </a:fontRef>
+            </p:style>
+            <p:txBody>
+              <a:bodyPr rot="0" spcFirstLastPara="0" vertOverflow="overflow" horzOverflow="overflow" vert="horz" wrap="square" lIns="45720" tIns="22860" rIns="45720" bIns="22860" numCol="1" spcCol="0" rtlCol="0" fromWordArt="0" anchor="ctr" anchorCtr="0" forceAA="0" compatLnSpc="1">
+                <a:prstTxWarp prst="textNoShape">
+                  <a:avLst/>
+                </a:prstTxWarp>
+                <a:noAutofit/>
+              </a:bodyPr>
+              <a:lstStyle/>
+              <a:p>
+                <a:pPr algn="ctr"/>
+                <a:endParaRPr lang="en-US" sz="450">
+                  <a:solidFill>
+                    <a:schemeClr val="tx1"/>
+                  </a:solidFill>
+                </a:endParaRPr>
+              </a:p>
+            </p:txBody>
+          </p:sp>
+          <p:sp>
+            <p:nvSpPr>
+              <p:cNvPr id="329" name="Curved Down Arrow 328"/>
+              <p:cNvSpPr/>
+              <p:nvPr/>
+            </p:nvSpPr>
+            <p:spPr>
+              <a:xfrm flipV="1">
+                <a:off x="5910589" y="16908899"/>
+                <a:ext cx="4374063" cy="548640"/>
+              </a:xfrm>
+              <a:prstGeom prst="curvedDownArrow">
+                <a:avLst/>
+              </a:prstGeom>
+              <a:ln>
+                <a:solidFill>
+                  <a:schemeClr val="tx1"/>
+                </a:solidFill>
+              </a:ln>
+            </p:spPr>
+            <p:style>
+              <a:lnRef idx="2">
+                <a:schemeClr val="accent1">
+                  <a:shade val="50000"/>
+                </a:schemeClr>
+              </a:lnRef>
+              <a:fillRef idx="1">
+                <a:schemeClr val="accent1"/>
+              </a:fillRef>
+              <a:effectRef idx="0">
+                <a:schemeClr val="accent1"/>
+              </a:effectRef>
+              <a:fontRef idx="minor">
+                <a:schemeClr val="lt1"/>
+              </a:fontRef>
+            </p:style>
+            <p:txBody>
+              <a:bodyPr rot="0" spcFirstLastPara="0" vertOverflow="overflow" horzOverflow="overflow" vert="horz" wrap="square" lIns="45720" tIns="22860" rIns="45720" bIns="22860" numCol="1" spcCol="0" rtlCol="0" fromWordArt="0" anchor="ctr" anchorCtr="0" forceAA="0" compatLnSpc="1">
+                <a:prstTxWarp prst="textNoShape">
+                  <a:avLst/>
+                </a:prstTxWarp>
+                <a:noAutofit/>
+              </a:bodyPr>
+              <a:lstStyle/>
+              <a:p>
+                <a:pPr algn="ctr"/>
+                <a:endParaRPr lang="en-US" sz="450">
+                  <a:solidFill>
+                    <a:schemeClr val="tx1"/>
+                  </a:solidFill>
+                </a:endParaRPr>
+              </a:p>
+            </p:txBody>
+          </p:sp>
+          <p:sp>
+            <p:nvSpPr>
+              <p:cNvPr id="330" name="Curved Down Arrow 329"/>
+              <p:cNvSpPr/>
+              <p:nvPr/>
+            </p:nvSpPr>
+            <p:spPr>
+              <a:xfrm flipV="1">
+                <a:off x="6606079" y="16907530"/>
+                <a:ext cx="2292473" cy="457200"/>
+              </a:xfrm>
+              <a:prstGeom prst="curvedDownArrow">
+                <a:avLst/>
+              </a:prstGeom>
+              <a:ln>
+                <a:solidFill>
+                  <a:schemeClr val="tx1"/>
+                </a:solidFill>
+              </a:ln>
+            </p:spPr>
+            <p:style>
+              <a:lnRef idx="2">
+                <a:schemeClr val="accent1">
+                  <a:shade val="50000"/>
+                </a:schemeClr>
+              </a:lnRef>
+              <a:fillRef idx="1">
+                <a:schemeClr val="accent1"/>
+              </a:fillRef>
+              <a:effectRef idx="0">
+                <a:schemeClr val="accent1"/>
+              </a:effectRef>
+              <a:fontRef idx="minor">
+                <a:schemeClr val="lt1"/>
+              </a:fontRef>
+            </p:style>
+            <p:txBody>
+              <a:bodyPr rot="0" spcFirstLastPara="0" vertOverflow="overflow" horzOverflow="overflow" vert="horz" wrap="square" lIns="45720" tIns="22860" rIns="45720" bIns="22860" numCol="1" spcCol="0" rtlCol="0" fromWordArt="0" anchor="ctr" anchorCtr="0" forceAA="0" compatLnSpc="1">
+                <a:prstTxWarp prst="textNoShape">
+                  <a:avLst/>
+                </a:prstTxWarp>
+                <a:noAutofit/>
+              </a:bodyPr>
+              <a:lstStyle/>
+              <a:p>
+                <a:pPr algn="ctr"/>
+                <a:endParaRPr lang="en-US" sz="450">
+                  <a:solidFill>
+                    <a:schemeClr val="tx1"/>
+                  </a:solidFill>
+                </a:endParaRPr>
+              </a:p>
+            </p:txBody>
+          </p:sp>
+          <p:sp>
+            <p:nvSpPr>
+              <p:cNvPr id="331" name="Curved Down Arrow 330"/>
+              <p:cNvSpPr/>
+              <p:nvPr/>
+            </p:nvSpPr>
+            <p:spPr>
+              <a:xfrm flipV="1">
+                <a:off x="5910589" y="16915249"/>
+                <a:ext cx="2745754" cy="548640"/>
+              </a:xfrm>
+              <a:prstGeom prst="curvedDownArrow">
+                <a:avLst/>
+              </a:prstGeom>
+              <a:ln>
+                <a:solidFill>
+                  <a:schemeClr val="tx1"/>
+                </a:solidFill>
+              </a:ln>
+            </p:spPr>
+            <p:style>
+              <a:lnRef idx="2">
+                <a:schemeClr val="accent1">
+                  <a:shade val="50000"/>
+                </a:schemeClr>
+              </a:lnRef>
+              <a:fillRef idx="1">
+                <a:schemeClr val="accent1"/>
+              </a:fillRef>
+              <a:effectRef idx="0">
+                <a:schemeClr val="accent1"/>
+              </a:effectRef>
+              <a:fontRef idx="minor">
+                <a:schemeClr val="lt1"/>
+              </a:fontRef>
+            </p:style>
+            <p:txBody>
+              <a:bodyPr rot="0" spcFirstLastPara="0" vertOverflow="overflow" horzOverflow="overflow" vert="horz" wrap="square" lIns="45720" tIns="22860" rIns="45720" bIns="22860" numCol="1" spcCol="0" rtlCol="0" fromWordArt="0" anchor="ctr" anchorCtr="0" forceAA="0" compatLnSpc="1">
+                <a:prstTxWarp prst="textNoShape">
+                  <a:avLst/>
+                </a:prstTxWarp>
+                <a:noAutofit/>
+              </a:bodyPr>
+              <a:lstStyle/>
+              <a:p>
+                <a:pPr algn="ctr"/>
+                <a:endParaRPr lang="en-US" sz="450">
+                  <a:solidFill>
+                    <a:schemeClr val="tx1"/>
+                  </a:solidFill>
+                </a:endParaRPr>
+              </a:p>
+            </p:txBody>
+          </p:sp>
+          <p:sp>
+            <p:nvSpPr>
+              <p:cNvPr id="332" name="Curved Down Arrow 331"/>
+              <p:cNvSpPr/>
+              <p:nvPr/>
+            </p:nvSpPr>
+            <p:spPr>
+              <a:xfrm flipV="1">
+                <a:off x="5910589" y="16908899"/>
+                <a:ext cx="1102927" cy="548640"/>
+              </a:xfrm>
+              <a:prstGeom prst="curvedDownArrow">
+                <a:avLst/>
+              </a:prstGeom>
+              <a:ln>
+                <a:solidFill>
+                  <a:schemeClr val="tx1"/>
+                </a:solidFill>
+              </a:ln>
+            </p:spPr>
+            <p:style>
+              <a:lnRef idx="2">
+                <a:schemeClr val="accent1">
+                  <a:shade val="50000"/>
+                </a:schemeClr>
+              </a:lnRef>
+              <a:fillRef idx="1">
+                <a:schemeClr val="accent1"/>
+              </a:fillRef>
+              <a:effectRef idx="0">
+                <a:schemeClr val="accent1"/>
+              </a:effectRef>
+              <a:fontRef idx="minor">
+                <a:schemeClr val="lt1"/>
+              </a:fontRef>
+            </p:style>
+            <p:txBody>
+              <a:bodyPr rot="0" spcFirstLastPara="0" vertOverflow="overflow" horzOverflow="overflow" vert="horz" wrap="square" lIns="45720" tIns="22860" rIns="45720" bIns="22860" numCol="1" spcCol="0" rtlCol="0" fromWordArt="0" anchor="ctr" anchorCtr="0" forceAA="0" compatLnSpc="1">
+                <a:prstTxWarp prst="textNoShape">
+                  <a:avLst/>
+                </a:prstTxWarp>
+                <a:noAutofit/>
+              </a:bodyPr>
+              <a:lstStyle/>
+              <a:p>
+                <a:pPr algn="ctr"/>
+                <a:endParaRPr lang="en-US" sz="450">
+                  <a:solidFill>
+                    <a:schemeClr val="tx1"/>
+                  </a:solidFill>
+                </a:endParaRPr>
+              </a:p>
+            </p:txBody>
+          </p:sp>
+        </p:grpSp>
         <p:sp>
           <p:nvSpPr>
-            <p:cNvPr id="239" name="TextBox 238"/>
+            <p:cNvPr id="333" name="TextBox 332"/>
             <p:cNvSpPr txBox="1"/>
             <p:nvPr/>
           </p:nvSpPr>
           <p:spPr>
-            <a:xfrm flipH="1">
-              <a:off x="17633517" y="20406548"/>
-              <a:ext cx="696344" cy="569386"/>
+            <a:xfrm>
+              <a:off x="2701998" y="13221736"/>
+              <a:ext cx="348172" cy="461665"/>
             </a:xfrm>
             <a:prstGeom prst="rect">
               <a:avLst/>
@@ -8018,23 +13654,430 @@
             <a:lstStyle/>
             <a:p>
               <a:r>
-                <a:rPr lang="en-US" sz="1250" dirty="0"/>
-                <a:t>64</a:t>
+                <a:rPr lang="en-US" sz="2400" dirty="0"/>
+                <a:t>C</a:t>
               </a:r>
-              <a:endParaRPr lang="en-US" sz="1250" dirty="0"/>
+              <a:endParaRPr lang="en-US" sz="2400" dirty="0"/>
             </a:p>
           </p:txBody>
         </p:sp>
         <p:sp>
           <p:nvSpPr>
-            <p:cNvPr id="242" name="TextBox 241"/>
+            <p:cNvPr id="334" name="Rectangle 333"/>
+            <p:cNvSpPr/>
+            <p:nvPr/>
+          </p:nvSpPr>
+          <p:spPr>
+            <a:xfrm>
+              <a:off x="3159878" y="10750739"/>
+              <a:ext cx="12232522" cy="5403661"/>
+            </a:xfrm>
+            <a:prstGeom prst="rect">
+              <a:avLst/>
+            </a:prstGeom>
+            <a:noFill/>
+            <a:ln>
+              <a:solidFill>
+                <a:schemeClr val="tx1"/>
+              </a:solidFill>
+            </a:ln>
+          </p:spPr>
+          <p:style>
+            <a:lnRef idx="2">
+              <a:schemeClr val="accent1">
+                <a:shade val="50000"/>
+              </a:schemeClr>
+            </a:lnRef>
+            <a:fillRef idx="1">
+              <a:schemeClr val="accent1"/>
+            </a:fillRef>
+            <a:effectRef idx="0">
+              <a:schemeClr val="accent1"/>
+            </a:effectRef>
+            <a:fontRef idx="minor">
+              <a:schemeClr val="lt1"/>
+            </a:fontRef>
+          </p:style>
+          <p:txBody>
+            <a:bodyPr rtlCol="0" anchor="ctr"/>
+            <a:lstStyle/>
+            <a:p>
+              <a:pPr algn="ctr"/>
+              <a:endParaRPr lang="en-US"/>
+            </a:p>
+          </p:txBody>
+        </p:sp>
+      </p:grpSp>
+      <p:grpSp>
+        <p:nvGrpSpPr>
+          <p:cNvPr id="335" name="Group 334"/>
+          <p:cNvGrpSpPr/>
+          <p:nvPr/>
+        </p:nvGrpSpPr>
+        <p:grpSpPr>
+          <a:xfrm>
+            <a:off x="4692201" y="6752308"/>
+            <a:ext cx="9771684" cy="3584724"/>
+            <a:chOff x="12678173" y="17095828"/>
+            <a:chExt cx="11127016" cy="4390954"/>
+          </a:xfrm>
+        </p:grpSpPr>
+        <p:sp>
+          <p:nvSpPr>
+            <p:cNvPr id="336" name="Rectangle 335"/>
+            <p:cNvSpPr/>
+            <p:nvPr/>
+          </p:nvSpPr>
+          <p:spPr>
+            <a:xfrm>
+              <a:off x="16358112" y="17170738"/>
+              <a:ext cx="3294786" cy="4280671"/>
+            </a:xfrm>
+            <a:prstGeom prst="rect">
+              <a:avLst/>
+            </a:prstGeom>
+            <a:solidFill>
+              <a:schemeClr val="bg1"/>
+            </a:solidFill>
+            <a:ln>
+              <a:solidFill>
+                <a:schemeClr val="tx1"/>
+              </a:solidFill>
+            </a:ln>
+          </p:spPr>
+          <p:style>
+            <a:lnRef idx="2">
+              <a:schemeClr val="accent1">
+                <a:shade val="50000"/>
+              </a:schemeClr>
+            </a:lnRef>
+            <a:fillRef idx="1">
+              <a:schemeClr val="accent1"/>
+            </a:fillRef>
+            <a:effectRef idx="0">
+              <a:schemeClr val="accent1"/>
+            </a:effectRef>
+            <a:fontRef idx="minor">
+              <a:schemeClr val="lt1"/>
+            </a:fontRef>
+          </p:style>
+          <p:txBody>
+            <a:bodyPr rtlCol="0" anchor="ctr"/>
+            <a:lstStyle/>
+            <a:p>
+              <a:pPr algn="ctr"/>
+              <a:endParaRPr lang="en-US" sz="450"/>
+            </a:p>
+          </p:txBody>
+        </p:sp>
+        <p:cxnSp>
+          <p:nvCxnSpPr>
+            <p:cNvPr id="337" name="Straight Arrow Connector 336"/>
+            <p:cNvCxnSpPr>
+              <a:stCxn id="347" idx="4"/>
+            </p:cNvCxnSpPr>
+            <p:nvPr/>
+          </p:nvCxnSpPr>
+          <p:spPr>
+            <a:xfrm>
+              <a:off x="17973650" y="21199687"/>
+              <a:ext cx="0" cy="274320"/>
+            </a:xfrm>
+            <a:prstGeom prst="straightConnector1">
+              <a:avLst/>
+            </a:prstGeom>
+            <a:ln w="50800">
+              <a:tailEnd type="triangle"/>
+            </a:ln>
+          </p:spPr>
+          <p:style>
+            <a:lnRef idx="1">
+              <a:schemeClr val="accent1"/>
+            </a:lnRef>
+            <a:fillRef idx="0">
+              <a:schemeClr val="accent1"/>
+            </a:fillRef>
+            <a:effectRef idx="0">
+              <a:schemeClr val="accent1"/>
+            </a:effectRef>
+            <a:fontRef idx="minor">
+              <a:schemeClr val="tx1"/>
+            </a:fontRef>
+          </p:style>
+        </p:cxnSp>
+        <p:sp>
+          <p:nvSpPr>
+            <p:cNvPr id="338" name="Rectangle 337"/>
+            <p:cNvSpPr/>
+            <p:nvPr/>
+          </p:nvSpPr>
+          <p:spPr>
+            <a:xfrm>
+              <a:off x="16766169" y="18345134"/>
+              <a:ext cx="2400300" cy="807180"/>
+            </a:xfrm>
+            <a:prstGeom prst="rect">
+              <a:avLst/>
+            </a:prstGeom>
+            <a:ln>
+              <a:solidFill>
+                <a:schemeClr val="tx1"/>
+              </a:solidFill>
+            </a:ln>
+          </p:spPr>
+          <p:style>
+            <a:lnRef idx="2">
+              <a:schemeClr val="accent1">
+                <a:shade val="50000"/>
+              </a:schemeClr>
+            </a:lnRef>
+            <a:fillRef idx="1">
+              <a:schemeClr val="accent1"/>
+            </a:fillRef>
+            <a:effectRef idx="0">
+              <a:schemeClr val="accent1"/>
+            </a:effectRef>
+            <a:fontRef idx="minor">
+              <a:schemeClr val="lt1"/>
+            </a:fontRef>
+          </p:style>
+          <p:txBody>
+            <a:bodyPr rtlCol="0" anchor="ctr"/>
+            <a:lstStyle/>
+            <a:p>
+              <a:pPr algn="ctr"/>
+              <a:r>
+                <a:rPr lang="en-US" sz="2000" dirty="0"/>
+                <a:t>Convolution</a:t>
+              </a:r>
+            </a:p>
+          </p:txBody>
+        </p:sp>
+        <p:sp>
+          <p:nvSpPr>
+            <p:cNvPr id="339" name="Rectangle 338"/>
+            <p:cNvSpPr/>
+            <p:nvPr/>
+          </p:nvSpPr>
+          <p:spPr>
+            <a:xfrm>
+              <a:off x="16766168" y="19609514"/>
+              <a:ext cx="2400300" cy="807180"/>
+            </a:xfrm>
+            <a:prstGeom prst="rect">
+              <a:avLst/>
+            </a:prstGeom>
+            <a:ln>
+              <a:solidFill>
+                <a:schemeClr val="tx1"/>
+              </a:solidFill>
+            </a:ln>
+          </p:spPr>
+          <p:style>
+            <a:lnRef idx="2">
+              <a:schemeClr val="accent1">
+                <a:shade val="50000"/>
+              </a:schemeClr>
+            </a:lnRef>
+            <a:fillRef idx="1">
+              <a:schemeClr val="accent1"/>
+            </a:fillRef>
+            <a:effectRef idx="0">
+              <a:schemeClr val="accent1"/>
+            </a:effectRef>
+            <a:fontRef idx="minor">
+              <a:schemeClr val="lt1"/>
+            </a:fontRef>
+          </p:style>
+          <p:txBody>
+            <a:bodyPr rtlCol="0" anchor="ctr"/>
+            <a:lstStyle/>
+            <a:p>
+              <a:pPr algn="ctr"/>
+              <a:r>
+                <a:rPr lang="en-US" sz="2000" dirty="0"/>
+                <a:t>Convolution</a:t>
+              </a:r>
+            </a:p>
+          </p:txBody>
+        </p:sp>
+        <p:cxnSp>
+          <p:nvCxnSpPr>
+            <p:cNvPr id="340" name="Straight Arrow Connector 339"/>
+            <p:cNvCxnSpPr>
+              <a:stCxn id="338" idx="2"/>
+              <a:endCxn id="339" idx="0"/>
+            </p:cNvCxnSpPr>
+            <p:nvPr/>
+          </p:nvCxnSpPr>
+          <p:spPr>
+            <a:xfrm flipH="1">
+              <a:off x="17966318" y="19152314"/>
+              <a:ext cx="1" cy="457199"/>
+            </a:xfrm>
+            <a:prstGeom prst="straightConnector1">
+              <a:avLst/>
+            </a:prstGeom>
+            <a:ln w="50800">
+              <a:tailEnd type="triangle"/>
+            </a:ln>
+          </p:spPr>
+          <p:style>
+            <a:lnRef idx="1">
+              <a:schemeClr val="accent1"/>
+            </a:lnRef>
+            <a:fillRef idx="0">
+              <a:schemeClr val="accent1"/>
+            </a:fillRef>
+            <a:effectRef idx="0">
+              <a:schemeClr val="accent1"/>
+            </a:effectRef>
+            <a:fontRef idx="minor">
+              <a:schemeClr val="tx1"/>
+            </a:fontRef>
+          </p:style>
+        </p:cxnSp>
+        <p:cxnSp>
+          <p:nvCxnSpPr>
+            <p:cNvPr id="341" name="Straight Arrow Connector 340"/>
+            <p:cNvCxnSpPr>
+              <a:endCxn id="338" idx="0"/>
+            </p:cNvCxnSpPr>
+            <p:nvPr/>
+          </p:nvCxnSpPr>
+          <p:spPr>
+            <a:xfrm>
+              <a:off x="17966319" y="18017948"/>
+              <a:ext cx="0" cy="327186"/>
+            </a:xfrm>
+            <a:prstGeom prst="straightConnector1">
+              <a:avLst/>
+            </a:prstGeom>
+            <a:ln w="50800">
+              <a:tailEnd type="triangle"/>
+            </a:ln>
+          </p:spPr>
+          <p:style>
+            <a:lnRef idx="1">
+              <a:schemeClr val="accent1"/>
+            </a:lnRef>
+            <a:fillRef idx="0">
+              <a:schemeClr val="accent1"/>
+            </a:fillRef>
+            <a:effectRef idx="0">
+              <a:schemeClr val="accent1"/>
+            </a:effectRef>
+            <a:fontRef idx="minor">
+              <a:schemeClr val="tx1"/>
+            </a:fontRef>
+          </p:style>
+        </p:cxnSp>
+        <p:cxnSp>
+          <p:nvCxnSpPr>
+            <p:cNvPr id="342" name="Straight Arrow Connector 341"/>
+            <p:cNvCxnSpPr>
+              <a:stCxn id="339" idx="2"/>
+              <a:endCxn id="347" idx="0"/>
+            </p:cNvCxnSpPr>
+            <p:nvPr/>
+          </p:nvCxnSpPr>
+          <p:spPr>
+            <a:xfrm>
+              <a:off x="17966318" y="20416693"/>
+              <a:ext cx="7332" cy="325794"/>
+            </a:xfrm>
+            <a:prstGeom prst="straightConnector1">
+              <a:avLst/>
+            </a:prstGeom>
+            <a:ln w="50800">
+              <a:tailEnd type="triangle"/>
+            </a:ln>
+          </p:spPr>
+          <p:style>
+            <a:lnRef idx="1">
+              <a:schemeClr val="accent1"/>
+            </a:lnRef>
+            <a:fillRef idx="0">
+              <a:schemeClr val="accent1"/>
+            </a:fillRef>
+            <a:effectRef idx="0">
+              <a:schemeClr val="accent1"/>
+            </a:effectRef>
+            <a:fontRef idx="minor">
+              <a:schemeClr val="tx1"/>
+            </a:fontRef>
+          </p:style>
+        </p:cxnSp>
+        <p:sp>
+          <p:nvSpPr>
+            <p:cNvPr id="343" name="TextBox 342"/>
             <p:cNvSpPr txBox="1"/>
             <p:nvPr/>
           </p:nvSpPr>
           <p:spPr>
             <a:xfrm>
-              <a:off x="4211754" y="14509757"/>
-              <a:ext cx="2006190" cy="861774"/>
+              <a:off x="17978162" y="19152315"/>
+              <a:ext cx="1141056" cy="414697"/>
+            </a:xfrm>
+            <a:prstGeom prst="rect">
+              <a:avLst/>
+            </a:prstGeom>
+            <a:noFill/>
+          </p:spPr>
+          <p:txBody>
+            <a:bodyPr wrap="none" rtlCol="0">
+              <a:spAutoFit/>
+            </a:bodyPr>
+            <a:lstStyle/>
+            <a:p>
+              <a:pPr algn="ctr"/>
+              <a:r>
+                <a:rPr lang="en-US" sz="1600" dirty="0"/>
+                <a:t>activation</a:t>
+              </a:r>
+            </a:p>
+          </p:txBody>
+        </p:sp>
+        <p:sp>
+          <p:nvSpPr>
+            <p:cNvPr id="344" name="TextBox 343"/>
+            <p:cNvSpPr txBox="1"/>
+            <p:nvPr/>
+          </p:nvSpPr>
+          <p:spPr>
+            <a:xfrm>
+              <a:off x="18105748" y="21072085"/>
+              <a:ext cx="1141056" cy="414697"/>
+            </a:xfrm>
+            <a:prstGeom prst="rect">
+              <a:avLst/>
+            </a:prstGeom>
+            <a:noFill/>
+          </p:spPr>
+          <p:txBody>
+            <a:bodyPr wrap="none" rtlCol="0">
+              <a:spAutoFit/>
+            </a:bodyPr>
+            <a:lstStyle/>
+            <a:p>
+              <a:pPr algn="ctr"/>
+              <a:r>
+                <a:rPr lang="en-US" sz="1600" dirty="0"/>
+                <a:t>activation</a:t>
+              </a:r>
+            </a:p>
+          </p:txBody>
+        </p:sp>
+        <p:sp>
+          <p:nvSpPr>
+            <p:cNvPr id="345" name="TextBox 344"/>
+            <p:cNvSpPr txBox="1"/>
+            <p:nvPr/>
+          </p:nvSpPr>
+          <p:spPr>
+            <a:xfrm>
+              <a:off x="17650782" y="17673033"/>
+              <a:ext cx="641060" cy="414697"/>
             </a:xfrm>
             <a:prstGeom prst="rect">
               <a:avLst/>
@@ -8048,23 +14091,118 @@
             <a:lstStyle/>
             <a:p>
               <a:r>
-                <a:rPr lang="en-US" sz="2200" dirty="0"/>
-                <a:t>Layer 0</a:t>
+                <a:rPr lang="en-US" sz="1600" dirty="0"/>
+                <a:t>64-d</a:t>
               </a:r>
-              <a:endParaRPr lang="en-US" sz="2200" dirty="0"/>
             </a:p>
           </p:txBody>
         </p:sp>
         <p:sp>
           <p:nvSpPr>
-            <p:cNvPr id="243" name="TextBox 242"/>
+            <p:cNvPr id="346" name="Curved Up Arrow 345"/>
+            <p:cNvSpPr/>
+            <p:nvPr/>
+          </p:nvSpPr>
+          <p:spPr>
+            <a:xfrm rot="16200000" flipH="1">
+              <a:off x="17218595" y="18825687"/>
+              <a:ext cx="3354040" cy="1248320"/>
+            </a:xfrm>
+            <a:prstGeom prst="curvedUpArrow">
+              <a:avLst>
+                <a:gd name="adj1" fmla="val 7684"/>
+                <a:gd name="adj2" fmla="val 19964"/>
+                <a:gd name="adj3" fmla="val 22348"/>
+              </a:avLst>
+            </a:prstGeom>
+          </p:spPr>
+          <p:style>
+            <a:lnRef idx="2">
+              <a:schemeClr val="accent1">
+                <a:shade val="50000"/>
+              </a:schemeClr>
+            </a:lnRef>
+            <a:fillRef idx="1">
+              <a:schemeClr val="accent1"/>
+            </a:fillRef>
+            <a:effectRef idx="0">
+              <a:schemeClr val="accent1"/>
+            </a:effectRef>
+            <a:fontRef idx="minor">
+              <a:schemeClr val="lt1"/>
+            </a:fontRef>
+          </p:style>
+          <p:txBody>
+            <a:bodyPr rtlCol="0" anchor="ctr"/>
+            <a:lstStyle/>
+            <a:p>
+              <a:pPr algn="ctr"/>
+              <a:endParaRPr lang="en-US" sz="450">
+                <a:solidFill>
+                  <a:schemeClr val="tx1"/>
+                </a:solidFill>
+              </a:endParaRPr>
+            </a:p>
+          </p:txBody>
+        </p:sp>
+        <p:sp>
+          <p:nvSpPr>
+            <p:cNvPr id="347" name="Oval 346"/>
+            <p:cNvSpPr/>
+            <p:nvPr/>
+          </p:nvSpPr>
+          <p:spPr>
+            <a:xfrm>
+              <a:off x="17745050" y="20742487"/>
+              <a:ext cx="457200" cy="457200"/>
+            </a:xfrm>
+            <a:prstGeom prst="ellipse">
+              <a:avLst/>
+            </a:prstGeom>
+            <a:ln>
+              <a:solidFill>
+                <a:schemeClr val="tx1"/>
+              </a:solidFill>
+            </a:ln>
+          </p:spPr>
+          <p:style>
+            <a:lnRef idx="2">
+              <a:schemeClr val="accent1">
+                <a:shade val="50000"/>
+              </a:schemeClr>
+            </a:lnRef>
+            <a:fillRef idx="1">
+              <a:schemeClr val="accent1"/>
+            </a:fillRef>
+            <a:effectRef idx="0">
+              <a:schemeClr val="accent1"/>
+            </a:effectRef>
+            <a:fontRef idx="minor">
+              <a:schemeClr val="lt1"/>
+            </a:fontRef>
+          </p:style>
+          <p:txBody>
+            <a:bodyPr rtlCol="0" anchor="ctr"/>
+            <a:lstStyle/>
+            <a:p>
+              <a:pPr algn="ctr"/>
+              <a:r>
+                <a:rPr lang="en-US" sz="1200" dirty="0"/>
+                <a:t>+</a:t>
+              </a:r>
+            </a:p>
+          </p:txBody>
+        </p:sp>
+        <p:sp>
+          <p:nvSpPr>
+            <p:cNvPr id="348" name="TextBox 347"/>
             <p:cNvSpPr txBox="1"/>
             <p:nvPr/>
           </p:nvSpPr>
           <p:spPr>
             <a:xfrm>
-              <a:off x="4212588" y="17905592"/>
-              <a:ext cx="2006190" cy="861774"/>
+              <a:off x="17357975" y="17221345"/>
+              <a:ext cx="1207280" cy="490098"/>
             </a:xfrm>
             <a:prstGeom prst="rect">
               <a:avLst/>
@@ -8078,23 +14216,335 @@
             <a:lstStyle/>
             <a:p>
               <a:r>
-                <a:rPr lang="en-US" sz="2200" dirty="0"/>
-                <a:t>Layer 1</a:t>
+                <a:rPr lang="en-US" sz="2000" dirty="0"/>
+                <a:t>Residual</a:t>
               </a:r>
-              <a:endParaRPr lang="en-US" sz="2200" dirty="0"/>
             </a:p>
           </p:txBody>
         </p:sp>
         <p:sp>
           <p:nvSpPr>
-            <p:cNvPr id="244" name="TextBox 243"/>
+            <p:cNvPr id="349" name="Rectangle 348"/>
+            <p:cNvSpPr/>
+            <p:nvPr/>
+          </p:nvSpPr>
+          <p:spPr>
+            <a:xfrm>
+              <a:off x="12678173" y="17159726"/>
+              <a:ext cx="3294786" cy="4233782"/>
+            </a:xfrm>
+            <a:prstGeom prst="rect">
+              <a:avLst/>
+            </a:prstGeom>
+            <a:solidFill>
+              <a:schemeClr val="bg1"/>
+            </a:solidFill>
+            <a:ln>
+              <a:solidFill>
+                <a:schemeClr val="tx1"/>
+              </a:solidFill>
+            </a:ln>
+          </p:spPr>
+          <p:style>
+            <a:lnRef idx="2">
+              <a:schemeClr val="accent1">
+                <a:shade val="50000"/>
+              </a:schemeClr>
+            </a:lnRef>
+            <a:fillRef idx="1">
+              <a:schemeClr val="accent1"/>
+            </a:fillRef>
+            <a:effectRef idx="0">
+              <a:schemeClr val="accent1"/>
+            </a:effectRef>
+            <a:fontRef idx="minor">
+              <a:schemeClr val="lt1"/>
+            </a:fontRef>
+          </p:style>
+          <p:txBody>
+            <a:bodyPr rtlCol="0" anchor="ctr"/>
+            <a:lstStyle/>
+            <a:p>
+              <a:pPr algn="ctr"/>
+              <a:endParaRPr lang="en-US" sz="450"/>
+            </a:p>
+          </p:txBody>
+        </p:sp>
+        <p:sp>
+          <p:nvSpPr>
+            <p:cNvPr id="350" name="Rectangle 349"/>
+            <p:cNvSpPr/>
+            <p:nvPr/>
+          </p:nvSpPr>
+          <p:spPr>
+            <a:xfrm>
+              <a:off x="13086230" y="18321258"/>
+              <a:ext cx="2400300" cy="798339"/>
+            </a:xfrm>
+            <a:prstGeom prst="rect">
+              <a:avLst/>
+            </a:prstGeom>
+            <a:ln>
+              <a:solidFill>
+                <a:schemeClr val="tx1"/>
+              </a:solidFill>
+            </a:ln>
+          </p:spPr>
+          <p:style>
+            <a:lnRef idx="2">
+              <a:schemeClr val="accent1">
+                <a:shade val="50000"/>
+              </a:schemeClr>
+            </a:lnRef>
+            <a:fillRef idx="1">
+              <a:schemeClr val="accent1"/>
+            </a:fillRef>
+            <a:effectRef idx="0">
+              <a:schemeClr val="accent1"/>
+            </a:effectRef>
+            <a:fontRef idx="minor">
+              <a:schemeClr val="lt1"/>
+            </a:fontRef>
+          </p:style>
+          <p:txBody>
+            <a:bodyPr rtlCol="0" anchor="ctr"/>
+            <a:lstStyle/>
+            <a:p>
+              <a:pPr algn="ctr"/>
+              <a:r>
+                <a:rPr lang="en-US" sz="2000" dirty="0"/>
+                <a:t>Convolution</a:t>
+              </a:r>
+              <a:endParaRPr lang="en-US" sz="450" dirty="0"/>
+            </a:p>
+          </p:txBody>
+        </p:sp>
+        <p:sp>
+          <p:nvSpPr>
+            <p:cNvPr id="351" name="Rectangle 350"/>
+            <p:cNvSpPr/>
+            <p:nvPr/>
+          </p:nvSpPr>
+          <p:spPr>
+            <a:xfrm>
+              <a:off x="13086230" y="19887146"/>
+              <a:ext cx="2400300" cy="798339"/>
+            </a:xfrm>
+            <a:prstGeom prst="rect">
+              <a:avLst/>
+            </a:prstGeom>
+            <a:ln>
+              <a:solidFill>
+                <a:schemeClr val="tx1"/>
+              </a:solidFill>
+            </a:ln>
+          </p:spPr>
+          <p:style>
+            <a:lnRef idx="2">
+              <a:schemeClr val="accent1">
+                <a:shade val="50000"/>
+              </a:schemeClr>
+            </a:lnRef>
+            <a:fillRef idx="1">
+              <a:schemeClr val="accent1"/>
+            </a:fillRef>
+            <a:effectRef idx="0">
+              <a:schemeClr val="accent1"/>
+            </a:effectRef>
+            <a:fontRef idx="minor">
+              <a:schemeClr val="lt1"/>
+            </a:fontRef>
+          </p:style>
+          <p:txBody>
+            <a:bodyPr rtlCol="0" anchor="ctr"/>
+            <a:lstStyle/>
+            <a:p>
+              <a:pPr algn="ctr"/>
+              <a:r>
+                <a:rPr lang="en-US" sz="2000" dirty="0"/>
+                <a:t>Convolution</a:t>
+              </a:r>
+              <a:endParaRPr lang="en-US" sz="450" dirty="0"/>
+            </a:p>
+          </p:txBody>
+        </p:sp>
+        <p:cxnSp>
+          <p:nvCxnSpPr>
+            <p:cNvPr id="352" name="Straight Arrow Connector 351"/>
+            <p:cNvCxnSpPr>
+              <a:stCxn id="350" idx="2"/>
+              <a:endCxn id="351" idx="0"/>
+            </p:cNvCxnSpPr>
+            <p:nvPr/>
+          </p:nvCxnSpPr>
+          <p:spPr>
+            <a:xfrm>
+              <a:off x="14286380" y="19119597"/>
+              <a:ext cx="0" cy="767549"/>
+            </a:xfrm>
+            <a:prstGeom prst="straightConnector1">
+              <a:avLst/>
+            </a:prstGeom>
+            <a:ln w="50800">
+              <a:tailEnd type="triangle"/>
+            </a:ln>
+          </p:spPr>
+          <p:style>
+            <a:lnRef idx="1">
+              <a:schemeClr val="accent1"/>
+            </a:lnRef>
+            <a:fillRef idx="0">
+              <a:schemeClr val="accent1"/>
+            </a:fillRef>
+            <a:effectRef idx="0">
+              <a:schemeClr val="accent1"/>
+            </a:effectRef>
+            <a:fontRef idx="minor">
+              <a:schemeClr val="tx1"/>
+            </a:fontRef>
+          </p:style>
+        </p:cxnSp>
+        <p:cxnSp>
+          <p:nvCxnSpPr>
+            <p:cNvPr id="353" name="Straight Arrow Connector 352"/>
+            <p:cNvCxnSpPr>
+              <a:endCxn id="350" idx="0"/>
+            </p:cNvCxnSpPr>
+            <p:nvPr/>
+          </p:nvCxnSpPr>
+          <p:spPr>
+            <a:xfrm>
+              <a:off x="14286380" y="17997656"/>
+              <a:ext cx="0" cy="323602"/>
+            </a:xfrm>
+            <a:prstGeom prst="straightConnector1">
+              <a:avLst/>
+            </a:prstGeom>
+            <a:ln w="50800">
+              <a:tailEnd type="triangle"/>
+            </a:ln>
+          </p:spPr>
+          <p:style>
+            <a:lnRef idx="1">
+              <a:schemeClr val="accent1"/>
+            </a:lnRef>
+            <a:fillRef idx="0">
+              <a:schemeClr val="accent1"/>
+            </a:fillRef>
+            <a:effectRef idx="0">
+              <a:schemeClr val="accent1"/>
+            </a:effectRef>
+            <a:fontRef idx="minor">
+              <a:schemeClr val="tx1"/>
+            </a:fontRef>
+          </p:style>
+        </p:cxnSp>
+        <p:cxnSp>
+          <p:nvCxnSpPr>
+            <p:cNvPr id="354" name="Straight Arrow Connector 353"/>
+            <p:cNvCxnSpPr>
+              <a:stCxn id="351" idx="2"/>
+            </p:cNvCxnSpPr>
+            <p:nvPr/>
+          </p:nvCxnSpPr>
+          <p:spPr>
+            <a:xfrm flipH="1">
+              <a:off x="14286379" y="20685486"/>
+              <a:ext cx="1" cy="704828"/>
+            </a:xfrm>
+            <a:prstGeom prst="straightConnector1">
+              <a:avLst/>
+            </a:prstGeom>
+            <a:ln w="50800">
+              <a:tailEnd type="triangle"/>
+            </a:ln>
+          </p:spPr>
+          <p:style>
+            <a:lnRef idx="1">
+              <a:schemeClr val="accent1"/>
+            </a:lnRef>
+            <a:fillRef idx="0">
+              <a:schemeClr val="accent1"/>
+            </a:fillRef>
+            <a:effectRef idx="0">
+              <a:schemeClr val="accent1"/>
+            </a:effectRef>
+            <a:fontRef idx="minor">
+              <a:schemeClr val="tx1"/>
+            </a:fontRef>
+          </p:style>
+        </p:cxnSp>
+        <p:sp>
+          <p:nvSpPr>
+            <p:cNvPr id="355" name="TextBox 354"/>
             <p:cNvSpPr txBox="1"/>
             <p:nvPr/>
           </p:nvSpPr>
           <p:spPr>
             <a:xfrm>
-              <a:off x="4211754" y="21301426"/>
-              <a:ext cx="2006190" cy="861774"/>
+              <a:off x="14282892" y="19178695"/>
+              <a:ext cx="1141057" cy="414697"/>
+            </a:xfrm>
+            <a:prstGeom prst="rect">
+              <a:avLst/>
+            </a:prstGeom>
+            <a:noFill/>
+          </p:spPr>
+          <p:txBody>
+            <a:bodyPr wrap="none" rtlCol="0">
+              <a:spAutoFit/>
+            </a:bodyPr>
+            <a:lstStyle/>
+            <a:p>
+              <a:pPr algn="ctr"/>
+              <a:r>
+                <a:rPr lang="en-US" sz="1600" dirty="0"/>
+                <a:t>activation</a:t>
+              </a:r>
+              <a:endParaRPr lang="en-US" sz="450" dirty="0"/>
+            </a:p>
+          </p:txBody>
+        </p:sp>
+        <p:sp>
+          <p:nvSpPr>
+            <p:cNvPr id="356" name="TextBox 355"/>
+            <p:cNvSpPr txBox="1"/>
+            <p:nvPr/>
+          </p:nvSpPr>
+          <p:spPr>
+            <a:xfrm>
+              <a:off x="14404420" y="20786421"/>
+              <a:ext cx="1141056" cy="414697"/>
+            </a:xfrm>
+            <a:prstGeom prst="rect">
+              <a:avLst/>
+            </a:prstGeom>
+            <a:noFill/>
+          </p:spPr>
+          <p:txBody>
+            <a:bodyPr wrap="none" rtlCol="0">
+              <a:spAutoFit/>
+            </a:bodyPr>
+            <a:lstStyle/>
+            <a:p>
+              <a:pPr algn="ctr"/>
+              <a:r>
+                <a:rPr lang="en-US" sz="1600" dirty="0"/>
+                <a:t>activation</a:t>
+              </a:r>
+            </a:p>
+          </p:txBody>
+        </p:sp>
+        <p:sp>
+          <p:nvSpPr>
+            <p:cNvPr id="357" name="TextBox 356"/>
+            <p:cNvSpPr txBox="1"/>
+            <p:nvPr/>
+          </p:nvSpPr>
+          <p:spPr>
+            <a:xfrm>
+              <a:off x="13949763" y="17550171"/>
+              <a:ext cx="641060" cy="414697"/>
             </a:xfrm>
             <a:prstGeom prst="rect">
               <a:avLst/>
@@ -8108,10 +14558,1099 @@
             <a:lstStyle/>
             <a:p>
               <a:r>
-                <a:rPr lang="en-US" sz="2200" dirty="0"/>
-                <a:t>Layer 2</a:t>
+                <a:rPr lang="en-US" sz="1600" dirty="0"/>
+                <a:t>64-d</a:t>
               </a:r>
-              <a:endParaRPr lang="en-US" sz="2200" dirty="0"/>
+            </a:p>
+          </p:txBody>
+        </p:sp>
+        <p:sp>
+          <p:nvSpPr>
+            <p:cNvPr id="358" name="TextBox 357"/>
+            <p:cNvSpPr txBox="1"/>
+            <p:nvPr/>
+          </p:nvSpPr>
+          <p:spPr>
+            <a:xfrm>
+              <a:off x="13743869" y="17095828"/>
+              <a:ext cx="1113969" cy="490098"/>
+            </a:xfrm>
+            <a:prstGeom prst="rect">
+              <a:avLst/>
+            </a:prstGeom>
+            <a:noFill/>
+          </p:spPr>
+          <p:txBody>
+            <a:bodyPr wrap="none" rtlCol="0">
+              <a:spAutoFit/>
+            </a:bodyPr>
+            <a:lstStyle/>
+            <a:p>
+              <a:r>
+                <a:rPr lang="en-US" sz="1600" dirty="0"/>
+                <a:t>‘</a:t>
+              </a:r>
+              <a:r>
+                <a:rPr lang="en-US" sz="2000" dirty="0"/>
+                <a:t>Vanilla</a:t>
+              </a:r>
+              <a:r>
+                <a:rPr lang="en-US" sz="1600" dirty="0"/>
+                <a:t>’</a:t>
+              </a:r>
+            </a:p>
+          </p:txBody>
+        </p:sp>
+        <p:sp>
+          <p:nvSpPr>
+            <p:cNvPr id="359" name="Rectangle 358"/>
+            <p:cNvSpPr/>
+            <p:nvPr/>
+          </p:nvSpPr>
+          <p:spPr>
+            <a:xfrm>
+              <a:off x="19950271" y="17174433"/>
+              <a:ext cx="3854918" cy="4270533"/>
+            </a:xfrm>
+            <a:prstGeom prst="rect">
+              <a:avLst/>
+            </a:prstGeom>
+            <a:solidFill>
+              <a:schemeClr val="bg1"/>
+            </a:solidFill>
+            <a:ln>
+              <a:solidFill>
+                <a:schemeClr val="tx1"/>
+              </a:solidFill>
+            </a:ln>
+          </p:spPr>
+          <p:style>
+            <a:lnRef idx="2">
+              <a:schemeClr val="accent1">
+                <a:shade val="50000"/>
+              </a:schemeClr>
+            </a:lnRef>
+            <a:fillRef idx="1">
+              <a:schemeClr val="accent1"/>
+            </a:fillRef>
+            <a:effectRef idx="0">
+              <a:schemeClr val="accent1"/>
+            </a:effectRef>
+            <a:fontRef idx="minor">
+              <a:schemeClr val="lt1"/>
+            </a:fontRef>
+          </p:style>
+          <p:txBody>
+            <a:bodyPr rtlCol="0" anchor="ctr"/>
+            <a:lstStyle/>
+            <a:p>
+              <a:pPr algn="ctr"/>
+              <a:endParaRPr lang="en-US" sz="450"/>
+            </a:p>
+          </p:txBody>
+        </p:sp>
+        <p:cxnSp>
+          <p:nvCxnSpPr>
+            <p:cNvPr id="360" name="Straight Arrow Connector 359"/>
+            <p:cNvCxnSpPr>
+              <a:endCxn id="363" idx="0"/>
+            </p:cNvCxnSpPr>
+            <p:nvPr/>
+          </p:nvCxnSpPr>
+          <p:spPr>
+            <a:xfrm>
+              <a:off x="21442782" y="18306587"/>
+              <a:ext cx="0" cy="501569"/>
+            </a:xfrm>
+            <a:prstGeom prst="straightConnector1">
+              <a:avLst/>
+            </a:prstGeom>
+            <a:ln w="50800">
+              <a:tailEnd type="triangle"/>
+            </a:ln>
+          </p:spPr>
+          <p:style>
+            <a:lnRef idx="1">
+              <a:schemeClr val="accent1"/>
+            </a:lnRef>
+            <a:fillRef idx="0">
+              <a:schemeClr val="accent1"/>
+            </a:fillRef>
+            <a:effectRef idx="0">
+              <a:schemeClr val="accent1"/>
+            </a:effectRef>
+            <a:fontRef idx="minor">
+              <a:schemeClr val="tx1"/>
+            </a:fontRef>
+          </p:style>
+        </p:cxnSp>
+        <p:sp>
+          <p:nvSpPr>
+            <p:cNvPr id="361" name="Curved Up Arrow 360"/>
+            <p:cNvSpPr/>
+            <p:nvPr/>
+          </p:nvSpPr>
+          <p:spPr>
+            <a:xfrm rot="16200000" flipH="1">
+              <a:off x="21958254" y="17957082"/>
+              <a:ext cx="1309592" cy="891829"/>
+            </a:xfrm>
+            <a:prstGeom prst="curvedUpArrow">
+              <a:avLst>
+                <a:gd name="adj1" fmla="val 7684"/>
+                <a:gd name="adj2" fmla="val 19964"/>
+                <a:gd name="adj3" fmla="val 22348"/>
+              </a:avLst>
+            </a:prstGeom>
+          </p:spPr>
+          <p:style>
+            <a:lnRef idx="2">
+              <a:schemeClr val="accent1">
+                <a:shade val="50000"/>
+              </a:schemeClr>
+            </a:lnRef>
+            <a:fillRef idx="1">
+              <a:schemeClr val="accent1"/>
+            </a:fillRef>
+            <a:effectRef idx="0">
+              <a:schemeClr val="accent1"/>
+            </a:effectRef>
+            <a:fontRef idx="minor">
+              <a:schemeClr val="lt1"/>
+            </a:fontRef>
+          </p:style>
+          <p:txBody>
+            <a:bodyPr rtlCol="0" anchor="ctr"/>
+            <a:lstStyle/>
+            <a:p>
+              <a:pPr algn="ctr"/>
+              <a:endParaRPr lang="en-US" sz="450">
+                <a:solidFill>
+                  <a:schemeClr val="tx1"/>
+                </a:solidFill>
+              </a:endParaRPr>
+            </a:p>
+          </p:txBody>
+        </p:sp>
+        <p:sp>
+          <p:nvSpPr>
+            <p:cNvPr id="362" name="Rectangle 361"/>
+            <p:cNvSpPr/>
+            <p:nvPr/>
+          </p:nvSpPr>
+          <p:spPr>
+            <a:xfrm>
+              <a:off x="20718429" y="19382658"/>
+              <a:ext cx="1448706" cy="268274"/>
+            </a:xfrm>
+            <a:prstGeom prst="rect">
+              <a:avLst/>
+            </a:prstGeom>
+            <a:ln>
+              <a:solidFill>
+                <a:schemeClr val="tx1"/>
+              </a:solidFill>
+            </a:ln>
+          </p:spPr>
+          <p:style>
+            <a:lnRef idx="2">
+              <a:schemeClr val="accent1">
+                <a:shade val="50000"/>
+              </a:schemeClr>
+            </a:lnRef>
+            <a:fillRef idx="1">
+              <a:schemeClr val="accent1"/>
+            </a:fillRef>
+            <a:effectRef idx="0">
+              <a:schemeClr val="accent1"/>
+            </a:effectRef>
+            <a:fontRef idx="minor">
+              <a:schemeClr val="lt1"/>
+            </a:fontRef>
+          </p:style>
+          <p:txBody>
+            <a:bodyPr rtlCol="0" anchor="ctr"/>
+            <a:lstStyle/>
+            <a:p>
+              <a:pPr algn="ctr"/>
+              <a:r>
+                <a:rPr lang="en-US" sz="1600" dirty="0"/>
+                <a:t>Convolution</a:t>
+              </a:r>
+            </a:p>
+          </p:txBody>
+        </p:sp>
+        <p:sp>
+          <p:nvSpPr>
+            <p:cNvPr id="363" name="Rectangle 362"/>
+            <p:cNvSpPr/>
+            <p:nvPr/>
+          </p:nvSpPr>
+          <p:spPr>
+            <a:xfrm>
+              <a:off x="20718429" y="18808156"/>
+              <a:ext cx="1448706" cy="268274"/>
+            </a:xfrm>
+            <a:prstGeom prst="rect">
+              <a:avLst/>
+            </a:prstGeom>
+            <a:solidFill>
+              <a:srgbClr val="FF0000"/>
+            </a:solidFill>
+            <a:ln>
+              <a:solidFill>
+                <a:schemeClr val="tx1"/>
+              </a:solidFill>
+            </a:ln>
+          </p:spPr>
+          <p:style>
+            <a:lnRef idx="2">
+              <a:schemeClr val="accent1">
+                <a:shade val="50000"/>
+              </a:schemeClr>
+            </a:lnRef>
+            <a:fillRef idx="1">
+              <a:schemeClr val="accent1"/>
+            </a:fillRef>
+            <a:effectRef idx="0">
+              <a:schemeClr val="accent1"/>
+            </a:effectRef>
+            <a:fontRef idx="minor">
+              <a:schemeClr val="lt1"/>
+            </a:fontRef>
+          </p:style>
+          <p:txBody>
+            <a:bodyPr rtlCol="0" anchor="ctr"/>
+            <a:lstStyle/>
+            <a:p>
+              <a:pPr algn="ctr"/>
+              <a:r>
+                <a:rPr lang="en-US" sz="1600" dirty="0" err="1"/>
+                <a:t>Concat</a:t>
+              </a:r>
+              <a:endParaRPr lang="en-US" sz="1600" dirty="0"/>
+            </a:p>
+          </p:txBody>
+        </p:sp>
+        <p:cxnSp>
+          <p:nvCxnSpPr>
+            <p:cNvPr id="364" name="Straight Arrow Connector 363"/>
+            <p:cNvCxnSpPr>
+              <a:stCxn id="363" idx="2"/>
+              <a:endCxn id="362" idx="0"/>
+            </p:cNvCxnSpPr>
+            <p:nvPr/>
+          </p:nvCxnSpPr>
+          <p:spPr>
+            <a:xfrm>
+              <a:off x="21442782" y="19076430"/>
+              <a:ext cx="0" cy="306228"/>
+            </a:xfrm>
+            <a:prstGeom prst="straightConnector1">
+              <a:avLst/>
+            </a:prstGeom>
+            <a:ln w="50800">
+              <a:solidFill>
+                <a:srgbClr val="00B050"/>
+              </a:solidFill>
+              <a:tailEnd type="triangle"/>
+            </a:ln>
+          </p:spPr>
+          <p:style>
+            <a:lnRef idx="1">
+              <a:schemeClr val="accent1"/>
+            </a:lnRef>
+            <a:fillRef idx="0">
+              <a:schemeClr val="accent1"/>
+            </a:fillRef>
+            <a:effectRef idx="0">
+              <a:schemeClr val="accent1"/>
+            </a:effectRef>
+            <a:fontRef idx="minor">
+              <a:schemeClr val="tx1"/>
+            </a:fontRef>
+          </p:style>
+        </p:cxnSp>
+        <p:cxnSp>
+          <p:nvCxnSpPr>
+            <p:cNvPr id="365" name="Straight Arrow Connector 364"/>
+            <p:cNvCxnSpPr>
+              <a:stCxn id="366" idx="2"/>
+              <a:endCxn id="367" idx="0"/>
+            </p:cNvCxnSpPr>
+            <p:nvPr/>
+          </p:nvCxnSpPr>
+          <p:spPr>
+            <a:xfrm>
+              <a:off x="21427299" y="17927428"/>
+              <a:ext cx="0" cy="306227"/>
+            </a:xfrm>
+            <a:prstGeom prst="straightConnector1">
+              <a:avLst/>
+            </a:prstGeom>
+            <a:ln w="50800">
+              <a:solidFill>
+                <a:srgbClr val="00B050"/>
+              </a:solidFill>
+              <a:tailEnd type="triangle"/>
+            </a:ln>
+          </p:spPr>
+          <p:style>
+            <a:lnRef idx="1">
+              <a:schemeClr val="accent1"/>
+            </a:lnRef>
+            <a:fillRef idx="0">
+              <a:schemeClr val="accent1"/>
+            </a:fillRef>
+            <a:effectRef idx="0">
+              <a:schemeClr val="accent1"/>
+            </a:effectRef>
+            <a:fontRef idx="minor">
+              <a:schemeClr val="tx1"/>
+            </a:fontRef>
+          </p:style>
+        </p:cxnSp>
+        <p:sp>
+          <p:nvSpPr>
+            <p:cNvPr id="366" name="Rectangle 365"/>
+            <p:cNvSpPr/>
+            <p:nvPr/>
+          </p:nvSpPr>
+          <p:spPr>
+            <a:xfrm>
+              <a:off x="20702946" y="17659154"/>
+              <a:ext cx="1448706" cy="268274"/>
+            </a:xfrm>
+            <a:prstGeom prst="rect">
+              <a:avLst/>
+            </a:prstGeom>
+            <a:ln>
+              <a:solidFill>
+                <a:schemeClr val="tx1"/>
+              </a:solidFill>
+            </a:ln>
+          </p:spPr>
+          <p:style>
+            <a:lnRef idx="2">
+              <a:schemeClr val="accent1">
+                <a:shade val="50000"/>
+              </a:schemeClr>
+            </a:lnRef>
+            <a:fillRef idx="1">
+              <a:schemeClr val="accent1"/>
+            </a:fillRef>
+            <a:effectRef idx="0">
+              <a:schemeClr val="accent1"/>
+            </a:effectRef>
+            <a:fontRef idx="minor">
+              <a:schemeClr val="lt1"/>
+            </a:fontRef>
+          </p:style>
+          <p:txBody>
+            <a:bodyPr rtlCol="0" anchor="ctr"/>
+            <a:lstStyle/>
+            <a:p>
+              <a:pPr algn="ctr"/>
+              <a:r>
+                <a:rPr lang="en-US" sz="1600" dirty="0"/>
+                <a:t>Convolution</a:t>
+              </a:r>
+              <a:endParaRPr lang="en-US" sz="800" dirty="0"/>
+            </a:p>
+          </p:txBody>
+        </p:sp>
+        <p:sp>
+          <p:nvSpPr>
+            <p:cNvPr id="367" name="Rectangle 366"/>
+            <p:cNvSpPr/>
+            <p:nvPr/>
+          </p:nvSpPr>
+          <p:spPr>
+            <a:xfrm>
+              <a:off x="20702946" y="18233655"/>
+              <a:ext cx="1448706" cy="268274"/>
+            </a:xfrm>
+            <a:prstGeom prst="rect">
+              <a:avLst/>
+            </a:prstGeom>
+            <a:ln>
+              <a:solidFill>
+                <a:schemeClr val="tx1"/>
+              </a:solidFill>
+            </a:ln>
+          </p:spPr>
+          <p:style>
+            <a:lnRef idx="2">
+              <a:schemeClr val="accent1">
+                <a:shade val="50000"/>
+              </a:schemeClr>
+            </a:lnRef>
+            <a:fillRef idx="1">
+              <a:schemeClr val="accent1"/>
+            </a:fillRef>
+            <a:effectRef idx="0">
+              <a:schemeClr val="accent1"/>
+            </a:effectRef>
+            <a:fontRef idx="minor">
+              <a:schemeClr val="lt1"/>
+            </a:fontRef>
+          </p:style>
+          <p:txBody>
+            <a:bodyPr rtlCol="0" anchor="ctr"/>
+            <a:lstStyle/>
+            <a:p>
+              <a:pPr algn="ctr"/>
+              <a:r>
+                <a:rPr lang="en-US" sz="1600" dirty="0"/>
+                <a:t>Convolution</a:t>
+              </a:r>
+            </a:p>
+          </p:txBody>
+        </p:sp>
+        <p:sp>
+          <p:nvSpPr>
+            <p:cNvPr id="368" name="Curved Up Arrow 367"/>
+            <p:cNvSpPr/>
+            <p:nvPr/>
+          </p:nvSpPr>
+          <p:spPr>
+            <a:xfrm rot="16200000" flipH="1">
+              <a:off x="21795027" y="18697967"/>
+              <a:ext cx="1806657" cy="1093403"/>
+            </a:xfrm>
+            <a:prstGeom prst="curvedUpArrow">
+              <a:avLst>
+                <a:gd name="adj1" fmla="val 7684"/>
+                <a:gd name="adj2" fmla="val 19964"/>
+                <a:gd name="adj3" fmla="val 22348"/>
+              </a:avLst>
+            </a:prstGeom>
+            <a:solidFill>
+              <a:srgbClr val="FF0000"/>
+            </a:solidFill>
+            <a:ln>
+              <a:solidFill>
+                <a:srgbClr val="FF0000"/>
+              </a:solidFill>
+            </a:ln>
+          </p:spPr>
+          <p:style>
+            <a:lnRef idx="2">
+              <a:schemeClr val="accent1">
+                <a:shade val="50000"/>
+              </a:schemeClr>
+            </a:lnRef>
+            <a:fillRef idx="1">
+              <a:schemeClr val="accent1"/>
+            </a:fillRef>
+            <a:effectRef idx="0">
+              <a:schemeClr val="accent1"/>
+            </a:effectRef>
+            <a:fontRef idx="minor">
+              <a:schemeClr val="lt1"/>
+            </a:fontRef>
+          </p:style>
+          <p:txBody>
+            <a:bodyPr rtlCol="0" anchor="ctr"/>
+            <a:lstStyle/>
+            <a:p>
+              <a:pPr algn="ctr"/>
+              <a:endParaRPr lang="en-US" sz="450">
+                <a:solidFill>
+                  <a:schemeClr val="tx1"/>
+                </a:solidFill>
+              </a:endParaRPr>
+            </a:p>
+          </p:txBody>
+        </p:sp>
+        <p:cxnSp>
+          <p:nvCxnSpPr>
+            <p:cNvPr id="369" name="Straight Arrow Connector 368"/>
+            <p:cNvCxnSpPr>
+              <a:stCxn id="362" idx="2"/>
+              <a:endCxn id="370" idx="0"/>
+            </p:cNvCxnSpPr>
+            <p:nvPr/>
+          </p:nvCxnSpPr>
+          <p:spPr>
+            <a:xfrm>
+              <a:off x="21442782" y="19650932"/>
+              <a:ext cx="0" cy="300889"/>
+            </a:xfrm>
+            <a:prstGeom prst="straightConnector1">
+              <a:avLst/>
+            </a:prstGeom>
+            <a:ln w="50800">
+              <a:tailEnd type="triangle"/>
+            </a:ln>
+          </p:spPr>
+          <p:style>
+            <a:lnRef idx="1">
+              <a:schemeClr val="accent1"/>
+            </a:lnRef>
+            <a:fillRef idx="0">
+              <a:schemeClr val="accent1"/>
+            </a:fillRef>
+            <a:effectRef idx="0">
+              <a:schemeClr val="accent1"/>
+            </a:effectRef>
+            <a:fontRef idx="minor">
+              <a:schemeClr val="tx1"/>
+            </a:fontRef>
+          </p:style>
+        </p:cxnSp>
+        <p:sp>
+          <p:nvSpPr>
+            <p:cNvPr id="370" name="Rectangle 369"/>
+            <p:cNvSpPr/>
+            <p:nvPr/>
+          </p:nvSpPr>
+          <p:spPr>
+            <a:xfrm>
+              <a:off x="20718429" y="19951821"/>
+              <a:ext cx="1448706" cy="268274"/>
+            </a:xfrm>
+            <a:prstGeom prst="rect">
+              <a:avLst/>
+            </a:prstGeom>
+            <a:solidFill>
+              <a:srgbClr val="FF0000"/>
+            </a:solidFill>
+            <a:ln>
+              <a:solidFill>
+                <a:schemeClr val="tx1"/>
+              </a:solidFill>
+            </a:ln>
+          </p:spPr>
+          <p:style>
+            <a:lnRef idx="2">
+              <a:schemeClr val="accent1">
+                <a:shade val="50000"/>
+              </a:schemeClr>
+            </a:lnRef>
+            <a:fillRef idx="1">
+              <a:schemeClr val="accent1"/>
+            </a:fillRef>
+            <a:effectRef idx="0">
+              <a:schemeClr val="accent1"/>
+            </a:effectRef>
+            <a:fontRef idx="minor">
+              <a:schemeClr val="lt1"/>
+            </a:fontRef>
+          </p:style>
+          <p:txBody>
+            <a:bodyPr rtlCol="0" anchor="ctr"/>
+            <a:lstStyle/>
+            <a:p>
+              <a:pPr algn="ctr"/>
+              <a:r>
+                <a:rPr lang="en-US" sz="1600" dirty="0" err="1"/>
+                <a:t>Concat</a:t>
+              </a:r>
+              <a:endParaRPr lang="en-US" sz="1600" dirty="0"/>
+            </a:p>
+          </p:txBody>
+        </p:sp>
+        <p:sp>
+          <p:nvSpPr>
+            <p:cNvPr id="371" name="Curved Up Arrow 370"/>
+            <p:cNvSpPr/>
+            <p:nvPr/>
+          </p:nvSpPr>
+          <p:spPr>
+            <a:xfrm rot="16200000" flipH="1">
+              <a:off x="21506987" y="18409930"/>
+              <a:ext cx="2390480" cy="1085660"/>
+            </a:xfrm>
+            <a:prstGeom prst="curvedUpArrow">
+              <a:avLst>
+                <a:gd name="adj1" fmla="val 7684"/>
+                <a:gd name="adj2" fmla="val 19964"/>
+                <a:gd name="adj3" fmla="val 22348"/>
+              </a:avLst>
+            </a:prstGeom>
+          </p:spPr>
+          <p:style>
+            <a:lnRef idx="2">
+              <a:schemeClr val="accent1">
+                <a:shade val="50000"/>
+              </a:schemeClr>
+            </a:lnRef>
+            <a:fillRef idx="1">
+              <a:schemeClr val="accent1"/>
+            </a:fillRef>
+            <a:effectRef idx="0">
+              <a:schemeClr val="accent1"/>
+            </a:effectRef>
+            <a:fontRef idx="minor">
+              <a:schemeClr val="lt1"/>
+            </a:fontRef>
+          </p:style>
+          <p:txBody>
+            <a:bodyPr rtlCol="0" anchor="ctr"/>
+            <a:lstStyle/>
+            <a:p>
+              <a:pPr algn="ctr"/>
+              <a:endParaRPr lang="en-US" sz="450">
+                <a:solidFill>
+                  <a:schemeClr val="tx1"/>
+                </a:solidFill>
+              </a:endParaRPr>
+            </a:p>
+          </p:txBody>
+        </p:sp>
+        <p:sp>
+          <p:nvSpPr>
+            <p:cNvPr id="372" name="Rectangle 371"/>
+            <p:cNvSpPr/>
+            <p:nvPr/>
+          </p:nvSpPr>
+          <p:spPr>
+            <a:xfrm>
+              <a:off x="20718429" y="20512868"/>
+              <a:ext cx="1448706" cy="268274"/>
+            </a:xfrm>
+            <a:prstGeom prst="rect">
+              <a:avLst/>
+            </a:prstGeom>
+            <a:ln>
+              <a:solidFill>
+                <a:schemeClr val="tx1"/>
+              </a:solidFill>
+            </a:ln>
+          </p:spPr>
+          <p:style>
+            <a:lnRef idx="2">
+              <a:schemeClr val="accent1">
+                <a:shade val="50000"/>
+              </a:schemeClr>
+            </a:lnRef>
+            <a:fillRef idx="1">
+              <a:schemeClr val="accent1"/>
+            </a:fillRef>
+            <a:effectRef idx="0">
+              <a:schemeClr val="accent1"/>
+            </a:effectRef>
+            <a:fontRef idx="minor">
+              <a:schemeClr val="lt1"/>
+            </a:fontRef>
+          </p:style>
+          <p:txBody>
+            <a:bodyPr rtlCol="0" anchor="ctr"/>
+            <a:lstStyle/>
+            <a:p>
+              <a:pPr algn="ctr"/>
+              <a:r>
+                <a:rPr lang="en-US" sz="1600" dirty="0"/>
+                <a:t>Convolution</a:t>
+              </a:r>
+            </a:p>
+          </p:txBody>
+        </p:sp>
+        <p:cxnSp>
+          <p:nvCxnSpPr>
+            <p:cNvPr id="373" name="Straight Arrow Connector 372"/>
+            <p:cNvCxnSpPr>
+              <a:stCxn id="372" idx="2"/>
+              <a:endCxn id="374" idx="0"/>
+            </p:cNvCxnSpPr>
+            <p:nvPr/>
+          </p:nvCxnSpPr>
+          <p:spPr>
+            <a:xfrm>
+              <a:off x="21442782" y="20781142"/>
+              <a:ext cx="0" cy="300889"/>
+            </a:xfrm>
+            <a:prstGeom prst="straightConnector1">
+              <a:avLst/>
+            </a:prstGeom>
+            <a:ln w="50800">
+              <a:tailEnd type="triangle"/>
+            </a:ln>
+          </p:spPr>
+          <p:style>
+            <a:lnRef idx="1">
+              <a:schemeClr val="accent1"/>
+            </a:lnRef>
+            <a:fillRef idx="0">
+              <a:schemeClr val="accent1"/>
+            </a:fillRef>
+            <a:effectRef idx="0">
+              <a:schemeClr val="accent1"/>
+            </a:effectRef>
+            <a:fontRef idx="minor">
+              <a:schemeClr val="tx1"/>
+            </a:fontRef>
+          </p:style>
+        </p:cxnSp>
+        <p:sp>
+          <p:nvSpPr>
+            <p:cNvPr id="374" name="Rectangle 373"/>
+            <p:cNvSpPr/>
+            <p:nvPr/>
+          </p:nvSpPr>
+          <p:spPr>
+            <a:xfrm>
+              <a:off x="20718429" y="21082031"/>
+              <a:ext cx="1448706" cy="268274"/>
+            </a:xfrm>
+            <a:prstGeom prst="rect">
+              <a:avLst/>
+            </a:prstGeom>
+            <a:solidFill>
+              <a:srgbClr val="FF0000"/>
+            </a:solidFill>
+            <a:ln>
+              <a:solidFill>
+                <a:schemeClr val="tx1"/>
+              </a:solidFill>
+            </a:ln>
+          </p:spPr>
+          <p:style>
+            <a:lnRef idx="2">
+              <a:schemeClr val="accent1">
+                <a:shade val="50000"/>
+              </a:schemeClr>
+            </a:lnRef>
+            <a:fillRef idx="1">
+              <a:schemeClr val="accent1"/>
+            </a:fillRef>
+            <a:effectRef idx="0">
+              <a:schemeClr val="accent1"/>
+            </a:effectRef>
+            <a:fontRef idx="minor">
+              <a:schemeClr val="lt1"/>
+            </a:fontRef>
+          </p:style>
+          <p:txBody>
+            <a:bodyPr rtlCol="0" anchor="ctr"/>
+            <a:lstStyle/>
+            <a:p>
+              <a:pPr algn="ctr"/>
+              <a:r>
+                <a:rPr lang="en-US" sz="1600" dirty="0" err="1"/>
+                <a:t>Concat</a:t>
+              </a:r>
+              <a:endParaRPr lang="en-US" sz="1600" dirty="0"/>
+            </a:p>
+          </p:txBody>
+        </p:sp>
+        <p:cxnSp>
+          <p:nvCxnSpPr>
+            <p:cNvPr id="375" name="Straight Arrow Connector 374"/>
+            <p:cNvCxnSpPr>
+              <a:stCxn id="370" idx="2"/>
+              <a:endCxn id="372" idx="0"/>
+            </p:cNvCxnSpPr>
+            <p:nvPr/>
+          </p:nvCxnSpPr>
+          <p:spPr>
+            <a:xfrm>
+              <a:off x="21442782" y="20220095"/>
+              <a:ext cx="0" cy="292773"/>
+            </a:xfrm>
+            <a:prstGeom prst="straightConnector1">
+              <a:avLst/>
+            </a:prstGeom>
+            <a:ln w="50800">
+              <a:solidFill>
+                <a:srgbClr val="00B050"/>
+              </a:solidFill>
+              <a:tailEnd type="triangle"/>
+            </a:ln>
+          </p:spPr>
+          <p:style>
+            <a:lnRef idx="1">
+              <a:schemeClr val="accent1"/>
+            </a:lnRef>
+            <a:fillRef idx="0">
+              <a:schemeClr val="accent1"/>
+            </a:fillRef>
+            <a:effectRef idx="0">
+              <a:schemeClr val="accent1"/>
+            </a:effectRef>
+            <a:fontRef idx="minor">
+              <a:schemeClr val="tx1"/>
+            </a:fontRef>
+          </p:style>
+        </p:cxnSp>
+        <p:sp>
+          <p:nvSpPr>
+            <p:cNvPr id="376" name="Curved Up Arrow 375"/>
+            <p:cNvSpPr/>
+            <p:nvPr/>
+          </p:nvSpPr>
+          <p:spPr>
+            <a:xfrm rot="16200000" flipH="1">
+              <a:off x="21255689" y="19246636"/>
+              <a:ext cx="3008964" cy="1198373"/>
+            </a:xfrm>
+            <a:prstGeom prst="curvedUpArrow">
+              <a:avLst>
+                <a:gd name="adj1" fmla="val 7684"/>
+                <a:gd name="adj2" fmla="val 19964"/>
+                <a:gd name="adj3" fmla="val 22348"/>
+              </a:avLst>
+            </a:prstGeom>
+            <a:solidFill>
+              <a:srgbClr val="FF0000"/>
+            </a:solidFill>
+            <a:ln>
+              <a:solidFill>
+                <a:srgbClr val="FF0000"/>
+              </a:solidFill>
+            </a:ln>
+          </p:spPr>
+          <p:style>
+            <a:lnRef idx="2">
+              <a:schemeClr val="accent1">
+                <a:shade val="50000"/>
+              </a:schemeClr>
+            </a:lnRef>
+            <a:fillRef idx="1">
+              <a:schemeClr val="accent1"/>
+            </a:fillRef>
+            <a:effectRef idx="0">
+              <a:schemeClr val="accent1"/>
+            </a:effectRef>
+            <a:fontRef idx="minor">
+              <a:schemeClr val="lt1"/>
+            </a:fontRef>
+          </p:style>
+          <p:txBody>
+            <a:bodyPr rtlCol="0" anchor="ctr"/>
+            <a:lstStyle/>
+            <a:p>
+              <a:pPr algn="ctr"/>
+              <a:endParaRPr lang="en-US" sz="450">
+                <a:solidFill>
+                  <a:schemeClr val="tx1"/>
+                </a:solidFill>
+              </a:endParaRPr>
+            </a:p>
+          </p:txBody>
+        </p:sp>
+        <p:sp>
+          <p:nvSpPr>
+            <p:cNvPr id="377" name="Curved Up Arrow 376"/>
+            <p:cNvSpPr/>
+            <p:nvPr/>
+          </p:nvSpPr>
+          <p:spPr>
+            <a:xfrm rot="16200000" flipH="1">
+              <a:off x="21106326" y="18799469"/>
+              <a:ext cx="3604554" cy="1497118"/>
+            </a:xfrm>
+            <a:prstGeom prst="curvedUpArrow">
+              <a:avLst>
+                <a:gd name="adj1" fmla="val 7684"/>
+                <a:gd name="adj2" fmla="val 19964"/>
+                <a:gd name="adj3" fmla="val 22348"/>
+              </a:avLst>
+            </a:prstGeom>
+          </p:spPr>
+          <p:style>
+            <a:lnRef idx="2">
+              <a:schemeClr val="accent1">
+                <a:shade val="50000"/>
+              </a:schemeClr>
+            </a:lnRef>
+            <a:fillRef idx="1">
+              <a:schemeClr val="accent1"/>
+            </a:fillRef>
+            <a:effectRef idx="0">
+              <a:schemeClr val="accent1"/>
+            </a:effectRef>
+            <a:fontRef idx="minor">
+              <a:schemeClr val="lt1"/>
+            </a:fontRef>
+          </p:style>
+          <p:txBody>
+            <a:bodyPr rtlCol="0" anchor="ctr"/>
+            <a:lstStyle/>
+            <a:p>
+              <a:pPr algn="ctr"/>
+              <a:endParaRPr lang="en-US" sz="450">
+                <a:solidFill>
+                  <a:schemeClr val="tx1"/>
+                </a:solidFill>
+              </a:endParaRPr>
+            </a:p>
+          </p:txBody>
+        </p:sp>
+        <p:sp>
+          <p:nvSpPr>
+            <p:cNvPr id="378" name="Curved Up Arrow 377"/>
+            <p:cNvSpPr/>
+            <p:nvPr/>
+          </p:nvSpPr>
+          <p:spPr>
+            <a:xfrm rot="16200000" flipH="1">
+              <a:off x="21972418" y="19665559"/>
+              <a:ext cx="1856244" cy="1513251"/>
+            </a:xfrm>
+            <a:prstGeom prst="curvedUpArrow">
+              <a:avLst>
+                <a:gd name="adj1" fmla="val 7684"/>
+                <a:gd name="adj2" fmla="val 19964"/>
+                <a:gd name="adj3" fmla="val 22348"/>
+              </a:avLst>
+            </a:prstGeom>
+            <a:solidFill>
+              <a:srgbClr val="00B050"/>
+            </a:solidFill>
+            <a:ln>
+              <a:solidFill>
+                <a:srgbClr val="00B050"/>
+              </a:solidFill>
+            </a:ln>
+          </p:spPr>
+          <p:style>
+            <a:lnRef idx="2">
+              <a:schemeClr val="accent1">
+                <a:shade val="50000"/>
+              </a:schemeClr>
+            </a:lnRef>
+            <a:fillRef idx="1">
+              <a:schemeClr val="accent1"/>
+            </a:fillRef>
+            <a:effectRef idx="0">
+              <a:schemeClr val="accent1"/>
+            </a:effectRef>
+            <a:fontRef idx="minor">
+              <a:schemeClr val="lt1"/>
+            </a:fontRef>
+          </p:style>
+          <p:txBody>
+            <a:bodyPr rtlCol="0" anchor="ctr"/>
+            <a:lstStyle/>
+            <a:p>
+              <a:pPr algn="ctr"/>
+              <a:endParaRPr lang="en-US" sz="450">
+                <a:solidFill>
+                  <a:schemeClr val="tx1"/>
+                </a:solidFill>
+              </a:endParaRPr>
+            </a:p>
+          </p:txBody>
+        </p:sp>
+        <p:sp>
+          <p:nvSpPr>
+            <p:cNvPr id="379" name="TextBox 378"/>
+            <p:cNvSpPr txBox="1"/>
+            <p:nvPr/>
+          </p:nvSpPr>
+          <p:spPr>
+            <a:xfrm>
+              <a:off x="20907244" y="17184995"/>
+              <a:ext cx="949541" cy="490098"/>
+            </a:xfrm>
+            <a:prstGeom prst="rect">
+              <a:avLst/>
+            </a:prstGeom>
+            <a:noFill/>
+          </p:spPr>
+          <p:txBody>
+            <a:bodyPr wrap="none" rtlCol="0">
+              <a:spAutoFit/>
+            </a:bodyPr>
+            <a:lstStyle/>
+            <a:p>
+              <a:pPr algn="ctr"/>
+              <a:r>
+                <a:rPr lang="en-US" sz="2000" dirty="0"/>
+                <a:t>Dense</a:t>
+              </a:r>
+            </a:p>
+          </p:txBody>
+        </p:sp>
+        <p:sp>
+          <p:nvSpPr>
+            <p:cNvPr id="380" name="TextBox 379"/>
+            <p:cNvSpPr txBox="1"/>
+            <p:nvPr/>
+          </p:nvSpPr>
+          <p:spPr>
+            <a:xfrm>
+              <a:off x="20052942" y="17897319"/>
+              <a:ext cx="1390033" cy="376998"/>
+            </a:xfrm>
+            <a:prstGeom prst="rect">
+              <a:avLst/>
+            </a:prstGeom>
+            <a:noFill/>
+          </p:spPr>
+          <p:txBody>
+            <a:bodyPr wrap="none" rtlCol="0">
+              <a:spAutoFit/>
+            </a:bodyPr>
+            <a:lstStyle/>
+            <a:p>
+              <a:pPr algn="ctr"/>
+              <a:r>
+                <a:rPr lang="en-US" sz="1400" dirty="0"/>
+                <a:t>BN, Activation</a:t>
+              </a:r>
+            </a:p>
+          </p:txBody>
+        </p:sp>
+        <p:sp>
+          <p:nvSpPr>
+            <p:cNvPr id="381" name="TextBox 380"/>
+            <p:cNvSpPr txBox="1"/>
+            <p:nvPr/>
+          </p:nvSpPr>
+          <p:spPr>
+            <a:xfrm>
+              <a:off x="19987741" y="19046228"/>
+              <a:ext cx="1390033" cy="376998"/>
+            </a:xfrm>
+            <a:prstGeom prst="rect">
+              <a:avLst/>
+            </a:prstGeom>
+            <a:noFill/>
+          </p:spPr>
+          <p:txBody>
+            <a:bodyPr wrap="none" rtlCol="0">
+              <a:spAutoFit/>
+            </a:bodyPr>
+            <a:lstStyle/>
+            <a:p>
+              <a:pPr algn="ctr"/>
+              <a:r>
+                <a:rPr lang="en-US" sz="1400" dirty="0"/>
+                <a:t>BN, Activation</a:t>
+              </a:r>
+            </a:p>
+          </p:txBody>
+        </p:sp>
+        <p:sp>
+          <p:nvSpPr>
+            <p:cNvPr id="382" name="TextBox 381"/>
+            <p:cNvSpPr txBox="1"/>
+            <p:nvPr/>
+          </p:nvSpPr>
+          <p:spPr>
+            <a:xfrm>
+              <a:off x="19980983" y="20196408"/>
+              <a:ext cx="1390033" cy="376998"/>
+            </a:xfrm>
+            <a:prstGeom prst="rect">
+              <a:avLst/>
+            </a:prstGeom>
+            <a:noFill/>
+          </p:spPr>
+          <p:txBody>
+            <a:bodyPr wrap="none" rtlCol="0">
+              <a:spAutoFit/>
+            </a:bodyPr>
+            <a:lstStyle/>
+            <a:p>
+              <a:pPr algn="ctr"/>
+              <a:r>
+                <a:rPr lang="en-US" sz="1400" dirty="0"/>
+                <a:t>BN, Activation</a:t>
+              </a:r>
             </a:p>
           </p:txBody>
         </p:sp>
@@ -8136,7 +15675,7 @@
 </p:sld>
 </file>
 
-<file path=ppt/slides/slide3.xml><?xml version="1.0" encoding="utf-8"?>
+<file path=ppt/slides/slide4.xml><?xml version="1.0" encoding="utf-8"?>
 <p:sld xmlns:a="http://schemas.openxmlformats.org/drawingml/2006/main" xmlns:r="http://schemas.openxmlformats.org/officeDocument/2006/relationships" xmlns:p="http://schemas.openxmlformats.org/presentationml/2006/main">
   <p:cSld>
     <p:spTree>
@@ -8269,11 +15808,6 @@
               </a:rPr>
               <a:t>Image</a:t>
             </a:r>
-            <a:endParaRPr lang="en-US" sz="1200" dirty="0">
-              <a:solidFill>
-                <a:schemeClr val="tx1"/>
-              </a:solidFill>
-            </a:endParaRPr>
           </a:p>
         </p:txBody>
       </p:sp>
@@ -8583,7 +16117,6 @@
               <a:rPr lang="en-US" sz="2000" dirty="0"/>
               <a:t>3x3x3</a:t>
             </a:r>
-            <a:endParaRPr lang="en-US" sz="2000" dirty="0"/>
           </a:p>
         </p:txBody>
       </p:sp>
@@ -8689,7 +16222,6 @@
               <a:rPr lang="en-US" sz="2200" dirty="0"/>
               <a:t>Layer 0</a:t>
             </a:r>
-            <a:endParaRPr lang="en-US" sz="2200" dirty="0"/>
           </a:p>
         </p:txBody>
       </p:sp>
@@ -8719,7 +16251,6 @@
               <a:rPr lang="en-US" sz="2200" dirty="0"/>
               <a:t>Layer 1</a:t>
             </a:r>
-            <a:endParaRPr lang="en-US" sz="2200" dirty="0"/>
           </a:p>
         </p:txBody>
       </p:sp>
@@ -8824,11 +16355,6 @@
               </a:rPr>
               <a:t>Elu + BN</a:t>
             </a:r>
-            <a:endParaRPr lang="en-US" sz="1200" dirty="0">
-              <a:solidFill>
-                <a:schemeClr val="tx1"/>
-              </a:solidFill>
-            </a:endParaRPr>
           </a:p>
         </p:txBody>
       </p:sp>
@@ -9127,11 +16653,6 @@
               </a:rPr>
               <a:t>Elu + BN</a:t>
             </a:r>
-            <a:endParaRPr lang="en-US" sz="1200" dirty="0">
-              <a:solidFill>
-                <a:schemeClr val="tx1"/>
-              </a:solidFill>
-            </a:endParaRPr>
           </a:p>
         </p:txBody>
       </p:sp>
@@ -9479,11 +17000,6 @@
               </a:rPr>
               <a:t>Elu + BN</a:t>
             </a:r>
-            <a:endParaRPr lang="en-US" sz="1200" dirty="0">
-              <a:solidFill>
-                <a:schemeClr val="tx1"/>
-              </a:solidFill>
-            </a:endParaRPr>
           </a:p>
         </p:txBody>
       </p:sp>
@@ -9539,11 +17055,6 @@
               </a:rPr>
               <a:t>Elu + BN</a:t>
             </a:r>
-            <a:endParaRPr lang="en-US" sz="1200" dirty="0">
-              <a:solidFill>
-                <a:schemeClr val="tx1"/>
-              </a:solidFill>
-            </a:endParaRPr>
           </a:p>
         </p:txBody>
       </p:sp>
@@ -9648,11 +17159,6 @@
               </a:rPr>
               <a:t>Elu + BN</a:t>
             </a:r>
-            <a:endParaRPr lang="en-US" sz="1200" dirty="0">
-              <a:solidFill>
-                <a:schemeClr val="tx1"/>
-              </a:solidFill>
-            </a:endParaRPr>
           </a:p>
         </p:txBody>
       </p:sp>
@@ -9854,11 +17360,6 @@
               </a:rPr>
               <a:t>Elu + BN</a:t>
             </a:r>
-            <a:endParaRPr lang="en-US" sz="1200" dirty="0">
-              <a:solidFill>
-                <a:schemeClr val="tx1"/>
-              </a:solidFill>
-            </a:endParaRPr>
           </a:p>
         </p:txBody>
       </p:sp>
@@ -10011,11 +17512,6 @@
               </a:rPr>
               <a:t>Elu + BN</a:t>
             </a:r>
-            <a:endParaRPr lang="en-US" sz="1200" dirty="0">
-              <a:solidFill>
-                <a:schemeClr val="tx1"/>
-              </a:solidFill>
-            </a:endParaRPr>
           </a:p>
         </p:txBody>
       </p:sp>
@@ -10363,11 +17859,6 @@
               </a:rPr>
               <a:t>Elu + BN</a:t>
             </a:r>
-            <a:endParaRPr lang="en-US" sz="1200" dirty="0">
-              <a:solidFill>
-                <a:schemeClr val="tx1"/>
-              </a:solidFill>
-            </a:endParaRPr>
           </a:p>
         </p:txBody>
       </p:sp>
@@ -10764,11 +18255,6 @@
               </a:rPr>
               <a:t>Elu + BN</a:t>
             </a:r>
-            <a:endParaRPr lang="en-US" sz="1200" dirty="0">
-              <a:solidFill>
-                <a:schemeClr val="tx1"/>
-              </a:solidFill>
-            </a:endParaRPr>
           </a:p>
         </p:txBody>
       </p:sp>
@@ -10915,11 +18401,6 @@
               </a:rPr>
               <a:t>Elu + BN</a:t>
             </a:r>
-            <a:endParaRPr lang="en-US" sz="1200" dirty="0">
-              <a:solidFill>
-                <a:schemeClr val="tx1"/>
-              </a:solidFill>
-            </a:endParaRPr>
           </a:p>
         </p:txBody>
       </p:sp>
@@ -11218,11 +18699,6 @@
               </a:rPr>
               <a:t>Elu + BN</a:t>
             </a:r>
-            <a:endParaRPr lang="en-US" sz="1200" dirty="0">
-              <a:solidFill>
-                <a:schemeClr val="tx1"/>
-              </a:solidFill>
-            </a:endParaRPr>
           </a:p>
         </p:txBody>
       </p:sp>
@@ -11423,11 +18899,6 @@
               </a:rPr>
               <a:t>Elu + BN</a:t>
             </a:r>
-            <a:endParaRPr lang="en-US" sz="1200" dirty="0">
-              <a:solidFill>
-                <a:schemeClr val="tx1"/>
-              </a:solidFill>
-            </a:endParaRPr>
           </a:p>
         </p:txBody>
       </p:sp>
@@ -11483,11 +18954,6 @@
               </a:rPr>
               <a:t>Elu + BN</a:t>
             </a:r>
-            <a:endParaRPr lang="en-US" sz="1200" dirty="0">
-              <a:solidFill>
-                <a:schemeClr val="tx1"/>
-              </a:solidFill>
-            </a:endParaRPr>
           </a:p>
         </p:txBody>
       </p:sp>

--- a/Paper/Liver_Disease_Paper/Iteration_0/Paper figures.pptx
+++ b/Paper/Liver_Disease_Paper/Iteration_0/Paper figures.pptx
@@ -6,21 +6,22 @@
   </p:sldMasterIdLst>
   <p:sldIdLst>
     <p:sldId id="257" r:id="rId2"/>
-    <p:sldId id="261" r:id="rId3"/>
-    <p:sldId id="259" r:id="rId4"/>
-    <p:sldId id="260" r:id="rId5"/>
-    <p:sldId id="268" r:id="rId6"/>
-    <p:sldId id="269" r:id="rId7"/>
-    <p:sldId id="270" r:id="rId8"/>
-    <p:sldId id="271" r:id="rId9"/>
-    <p:sldId id="272" r:id="rId10"/>
-    <p:sldId id="273" r:id="rId11"/>
-    <p:sldId id="263" r:id="rId12"/>
-    <p:sldId id="264" r:id="rId13"/>
-    <p:sldId id="265" r:id="rId14"/>
-    <p:sldId id="266" r:id="rId15"/>
-    <p:sldId id="267" r:id="rId16"/>
-    <p:sldId id="274" r:id="rId17"/>
+    <p:sldId id="275" r:id="rId3"/>
+    <p:sldId id="261" r:id="rId4"/>
+    <p:sldId id="259" r:id="rId5"/>
+    <p:sldId id="260" r:id="rId6"/>
+    <p:sldId id="268" r:id="rId7"/>
+    <p:sldId id="269" r:id="rId8"/>
+    <p:sldId id="270" r:id="rId9"/>
+    <p:sldId id="271" r:id="rId10"/>
+    <p:sldId id="272" r:id="rId11"/>
+    <p:sldId id="273" r:id="rId12"/>
+    <p:sldId id="263" r:id="rId13"/>
+    <p:sldId id="264" r:id="rId14"/>
+    <p:sldId id="265" r:id="rId15"/>
+    <p:sldId id="266" r:id="rId16"/>
+    <p:sldId id="267" r:id="rId17"/>
+    <p:sldId id="274" r:id="rId18"/>
   </p:sldIdLst>
   <p:sldSz cx="18288000" cy="18288000"/>
   <p:notesSz cx="6858000" cy="9144000"/>
@@ -168,7 +169,6 @@
           </a:p>
         </c:rich>
       </c:tx>
-      <c:layout/>
       <c:overlay val="0"/>
       <c:spPr>
         <a:noFill/>
@@ -584,7 +584,6 @@
               </a:p>
             </c:rich>
           </c:tx>
-          <c:layout/>
           <c:overlay val="0"/>
           <c:spPr>
             <a:noFill/>
@@ -706,7 +705,6 @@
               </a:p>
             </c:rich>
           </c:tx>
-          <c:layout/>
           <c:overlay val="0"/>
           <c:spPr>
             <a:noFill/>
@@ -782,7 +780,6 @@
     </c:plotArea>
     <c:legend>
       <c:legendPos val="b"/>
-      <c:layout/>
       <c:overlay val="0"/>
       <c:spPr>
         <a:noFill/>
@@ -880,7 +877,6 @@
           </a:p>
         </c:rich>
       </c:tx>
-      <c:layout/>
       <c:overlay val="0"/>
       <c:spPr>
         <a:noFill/>
@@ -1251,7 +1247,6 @@
               </a:p>
             </c:rich>
           </c:tx>
-          <c:layout/>
           <c:overlay val="0"/>
           <c:spPr>
             <a:noFill/>
@@ -1372,7 +1367,6 @@
               </a:p>
             </c:rich>
           </c:tx>
-          <c:layout/>
           <c:overlay val="0"/>
           <c:spPr>
             <a:noFill/>
@@ -1448,7 +1442,6 @@
     </c:plotArea>
     <c:legend>
       <c:legendPos val="b"/>
-      <c:layout/>
       <c:overlay val="0"/>
       <c:spPr>
         <a:noFill/>
@@ -2272,15 +2265,7 @@
             </a:pPr>
             <a:r>
               <a:rPr lang="en-US" sz="1600" dirty="0"/>
-              <a:t>Median Surface </a:t>
-            </a:r>
-            <a:r>
-              <a:rPr lang="en-US" sz="1600" dirty="0" smtClean="0"/>
-              <a:t>Distance (mm) </a:t>
-            </a:r>
-            <a:r>
-              <a:rPr lang="en-US" sz="1600" dirty="0"/>
-              <a:t>and Volume (cc) vs Patient Number</a:t>
+              <a:t>Median Surface Distance (mm) and Volume (cc) vs Patient Number</a:t>
             </a:r>
           </a:p>
         </c:rich>
@@ -9170,7 +9155,7 @@
           </a:lstStyle>
           <a:p>
             <a:r>
-              <a:rPr lang="en-US" smtClean="0"/>
+              <a:rPr lang="en-US"/>
               <a:t>Click to edit Master title style</a:t>
             </a:r>
             <a:endParaRPr lang="en-US" dirty="0"/>
@@ -9235,7 +9220,7 @@
           </a:lstStyle>
           <a:p>
             <a:r>
-              <a:rPr lang="en-US" smtClean="0"/>
+              <a:rPr lang="en-US"/>
               <a:t>Click to edit Master subtitle style</a:t>
             </a:r>
             <a:endParaRPr lang="en-US" dirty="0"/>
@@ -9259,7 +9244,7 @@
           <a:p>
             <a:fld id="{1F57380E-2143-4096-B547-DE8B390321C5}" type="datetimeFigureOut">
               <a:rPr lang="en-US" smtClean="0"/>
-              <a:t>3/30/2022</a:t>
+              <a:t>6/13/2022</a:t>
             </a:fld>
             <a:endParaRPr lang="en-US"/>
           </a:p>
@@ -9353,7 +9338,7 @@
           <a:lstStyle/>
           <a:p>
             <a:r>
-              <a:rPr lang="en-US" smtClean="0"/>
+              <a:rPr lang="en-US"/>
               <a:t>Click to edit Master title style</a:t>
             </a:r>
             <a:endParaRPr lang="en-US" dirty="0"/>
@@ -9377,35 +9362,35 @@
           <a:p>
             <a:pPr lvl="0"/>
             <a:r>
-              <a:rPr lang="en-US" smtClean="0"/>
+              <a:rPr lang="en-US"/>
               <a:t>Edit Master text styles</a:t>
             </a:r>
           </a:p>
           <a:p>
             <a:pPr lvl="1"/>
             <a:r>
-              <a:rPr lang="en-US" smtClean="0"/>
+              <a:rPr lang="en-US"/>
               <a:t>Second level</a:t>
             </a:r>
           </a:p>
           <a:p>
             <a:pPr lvl="2"/>
             <a:r>
-              <a:rPr lang="en-US" smtClean="0"/>
+              <a:rPr lang="en-US"/>
               <a:t>Third level</a:t>
             </a:r>
           </a:p>
           <a:p>
             <a:pPr lvl="3"/>
             <a:r>
-              <a:rPr lang="en-US" smtClean="0"/>
+              <a:rPr lang="en-US"/>
               <a:t>Fourth level</a:t>
             </a:r>
           </a:p>
           <a:p>
             <a:pPr lvl="4"/>
             <a:r>
-              <a:rPr lang="en-US" smtClean="0"/>
+              <a:rPr lang="en-US"/>
               <a:t>Fifth level</a:t>
             </a:r>
             <a:endParaRPr lang="en-US" dirty="0"/>
@@ -9429,7 +9414,7 @@
           <a:p>
             <a:fld id="{1F57380E-2143-4096-B547-DE8B390321C5}" type="datetimeFigureOut">
               <a:rPr lang="en-US" smtClean="0"/>
-              <a:t>3/30/2022</a:t>
+              <a:t>6/13/2022</a:t>
             </a:fld>
             <a:endParaRPr lang="en-US"/>
           </a:p>
@@ -9528,7 +9513,7 @@
           <a:lstStyle/>
           <a:p>
             <a:r>
-              <a:rPr lang="en-US" smtClean="0"/>
+              <a:rPr lang="en-US"/>
               <a:t>Click to edit Master title style</a:t>
             </a:r>
             <a:endParaRPr lang="en-US" dirty="0"/>
@@ -9557,35 +9542,35 @@
           <a:p>
             <a:pPr lvl="0"/>
             <a:r>
-              <a:rPr lang="en-US" smtClean="0"/>
+              <a:rPr lang="en-US"/>
               <a:t>Edit Master text styles</a:t>
             </a:r>
           </a:p>
           <a:p>
             <a:pPr lvl="1"/>
             <a:r>
-              <a:rPr lang="en-US" smtClean="0"/>
+              <a:rPr lang="en-US"/>
               <a:t>Second level</a:t>
             </a:r>
           </a:p>
           <a:p>
             <a:pPr lvl="2"/>
             <a:r>
-              <a:rPr lang="en-US" smtClean="0"/>
+              <a:rPr lang="en-US"/>
               <a:t>Third level</a:t>
             </a:r>
           </a:p>
           <a:p>
             <a:pPr lvl="3"/>
             <a:r>
-              <a:rPr lang="en-US" smtClean="0"/>
+              <a:rPr lang="en-US"/>
               <a:t>Fourth level</a:t>
             </a:r>
           </a:p>
           <a:p>
             <a:pPr lvl="4"/>
             <a:r>
-              <a:rPr lang="en-US" smtClean="0"/>
+              <a:rPr lang="en-US"/>
               <a:t>Fifth level</a:t>
             </a:r>
             <a:endParaRPr lang="en-US" dirty="0"/>
@@ -9609,7 +9594,7 @@
           <a:p>
             <a:fld id="{1F57380E-2143-4096-B547-DE8B390321C5}" type="datetimeFigureOut">
               <a:rPr lang="en-US" smtClean="0"/>
-              <a:t>3/30/2022</a:t>
+              <a:t>6/13/2022</a:t>
             </a:fld>
             <a:endParaRPr lang="en-US"/>
           </a:p>
@@ -9703,7 +9688,7 @@
           <a:lstStyle/>
           <a:p>
             <a:r>
-              <a:rPr lang="en-US" smtClean="0"/>
+              <a:rPr lang="en-US"/>
               <a:t>Click to edit Master title style</a:t>
             </a:r>
             <a:endParaRPr lang="en-US" dirty="0"/>
@@ -9727,35 +9712,35 @@
           <a:p>
             <a:pPr lvl="0"/>
             <a:r>
-              <a:rPr lang="en-US" smtClean="0"/>
+              <a:rPr lang="en-US"/>
               <a:t>Edit Master text styles</a:t>
             </a:r>
           </a:p>
           <a:p>
             <a:pPr lvl="1"/>
             <a:r>
-              <a:rPr lang="en-US" smtClean="0"/>
+              <a:rPr lang="en-US"/>
               <a:t>Second level</a:t>
             </a:r>
           </a:p>
           <a:p>
             <a:pPr lvl="2"/>
             <a:r>
-              <a:rPr lang="en-US" smtClean="0"/>
+              <a:rPr lang="en-US"/>
               <a:t>Third level</a:t>
             </a:r>
           </a:p>
           <a:p>
             <a:pPr lvl="3"/>
             <a:r>
-              <a:rPr lang="en-US" smtClean="0"/>
+              <a:rPr lang="en-US"/>
               <a:t>Fourth level</a:t>
             </a:r>
           </a:p>
           <a:p>
             <a:pPr lvl="4"/>
             <a:r>
-              <a:rPr lang="en-US" smtClean="0"/>
+              <a:rPr lang="en-US"/>
               <a:t>Fifth level</a:t>
             </a:r>
             <a:endParaRPr lang="en-US" dirty="0"/>
@@ -9779,7 +9764,7 @@
           <a:p>
             <a:fld id="{1F57380E-2143-4096-B547-DE8B390321C5}" type="datetimeFigureOut">
               <a:rPr lang="en-US" smtClean="0"/>
-              <a:t>3/30/2022</a:t>
+              <a:t>6/13/2022</a:t>
             </a:fld>
             <a:endParaRPr lang="en-US"/>
           </a:p>
@@ -9882,7 +9867,7 @@
           </a:lstStyle>
           <a:p>
             <a:r>
-              <a:rPr lang="en-US" smtClean="0"/>
+              <a:rPr lang="en-US"/>
               <a:t>Click to edit Master title style</a:t>
             </a:r>
             <a:endParaRPr lang="en-US" dirty="0"/>
@@ -10000,7 +9985,7 @@
           <a:p>
             <a:pPr lvl="0"/>
             <a:r>
-              <a:rPr lang="en-US" smtClean="0"/>
+              <a:rPr lang="en-US"/>
               <a:t>Edit Master text styles</a:t>
             </a:r>
           </a:p>
@@ -10023,7 +10008,7 @@
           <a:p>
             <a:fld id="{1F57380E-2143-4096-B547-DE8B390321C5}" type="datetimeFigureOut">
               <a:rPr lang="en-US" smtClean="0"/>
-              <a:t>3/30/2022</a:t>
+              <a:t>6/13/2022</a:t>
             </a:fld>
             <a:endParaRPr lang="en-US"/>
           </a:p>
@@ -10117,7 +10102,7 @@
           <a:lstStyle/>
           <a:p>
             <a:r>
-              <a:rPr lang="en-US" smtClean="0"/>
+              <a:rPr lang="en-US"/>
               <a:t>Click to edit Master title style</a:t>
             </a:r>
             <a:endParaRPr lang="en-US" dirty="0"/>
@@ -10146,35 +10131,35 @@
           <a:p>
             <a:pPr lvl="0"/>
             <a:r>
-              <a:rPr lang="en-US" smtClean="0"/>
+              <a:rPr lang="en-US"/>
               <a:t>Edit Master text styles</a:t>
             </a:r>
           </a:p>
           <a:p>
             <a:pPr lvl="1"/>
             <a:r>
-              <a:rPr lang="en-US" smtClean="0"/>
+              <a:rPr lang="en-US"/>
               <a:t>Second level</a:t>
             </a:r>
           </a:p>
           <a:p>
             <a:pPr lvl="2"/>
             <a:r>
-              <a:rPr lang="en-US" smtClean="0"/>
+              <a:rPr lang="en-US"/>
               <a:t>Third level</a:t>
             </a:r>
           </a:p>
           <a:p>
             <a:pPr lvl="3"/>
             <a:r>
-              <a:rPr lang="en-US" smtClean="0"/>
+              <a:rPr lang="en-US"/>
               <a:t>Fourth level</a:t>
             </a:r>
           </a:p>
           <a:p>
             <a:pPr lvl="4"/>
             <a:r>
-              <a:rPr lang="en-US" smtClean="0"/>
+              <a:rPr lang="en-US"/>
               <a:t>Fifth level</a:t>
             </a:r>
             <a:endParaRPr lang="en-US" dirty="0"/>
@@ -10203,35 +10188,35 @@
           <a:p>
             <a:pPr lvl="0"/>
             <a:r>
-              <a:rPr lang="en-US" smtClean="0"/>
+              <a:rPr lang="en-US"/>
               <a:t>Edit Master text styles</a:t>
             </a:r>
           </a:p>
           <a:p>
             <a:pPr lvl="1"/>
             <a:r>
-              <a:rPr lang="en-US" smtClean="0"/>
+              <a:rPr lang="en-US"/>
               <a:t>Second level</a:t>
             </a:r>
           </a:p>
           <a:p>
             <a:pPr lvl="2"/>
             <a:r>
-              <a:rPr lang="en-US" smtClean="0"/>
+              <a:rPr lang="en-US"/>
               <a:t>Third level</a:t>
             </a:r>
           </a:p>
           <a:p>
             <a:pPr lvl="3"/>
             <a:r>
-              <a:rPr lang="en-US" smtClean="0"/>
+              <a:rPr lang="en-US"/>
               <a:t>Fourth level</a:t>
             </a:r>
           </a:p>
           <a:p>
             <a:pPr lvl="4"/>
             <a:r>
-              <a:rPr lang="en-US" smtClean="0"/>
+              <a:rPr lang="en-US"/>
               <a:t>Fifth level</a:t>
             </a:r>
             <a:endParaRPr lang="en-US" dirty="0"/>
@@ -10255,7 +10240,7 @@
           <a:p>
             <a:fld id="{1F57380E-2143-4096-B547-DE8B390321C5}" type="datetimeFigureOut">
               <a:rPr lang="en-US" smtClean="0"/>
-              <a:t>3/30/2022</a:t>
+              <a:t>6/13/2022</a:t>
             </a:fld>
             <a:endParaRPr lang="en-US"/>
           </a:p>
@@ -10354,7 +10339,7 @@
           <a:lstStyle/>
           <a:p>
             <a:r>
-              <a:rPr lang="en-US" smtClean="0"/>
+              <a:rPr lang="en-US"/>
               <a:t>Click to edit Master title style</a:t>
             </a:r>
             <a:endParaRPr lang="en-US" dirty="0"/>
@@ -10420,7 +10405,7 @@
           <a:p>
             <a:pPr lvl="0"/>
             <a:r>
-              <a:rPr lang="en-US" smtClean="0"/>
+              <a:rPr lang="en-US"/>
               <a:t>Edit Master text styles</a:t>
             </a:r>
           </a:p>
@@ -10448,35 +10433,35 @@
           <a:p>
             <a:pPr lvl="0"/>
             <a:r>
-              <a:rPr lang="en-US" smtClean="0"/>
+              <a:rPr lang="en-US"/>
               <a:t>Edit Master text styles</a:t>
             </a:r>
           </a:p>
           <a:p>
             <a:pPr lvl="1"/>
             <a:r>
-              <a:rPr lang="en-US" smtClean="0"/>
+              <a:rPr lang="en-US"/>
               <a:t>Second level</a:t>
             </a:r>
           </a:p>
           <a:p>
             <a:pPr lvl="2"/>
             <a:r>
-              <a:rPr lang="en-US" smtClean="0"/>
+              <a:rPr lang="en-US"/>
               <a:t>Third level</a:t>
             </a:r>
           </a:p>
           <a:p>
             <a:pPr lvl="3"/>
             <a:r>
-              <a:rPr lang="en-US" smtClean="0"/>
+              <a:rPr lang="en-US"/>
               <a:t>Fourth level</a:t>
             </a:r>
           </a:p>
           <a:p>
             <a:pPr lvl="4"/>
             <a:r>
-              <a:rPr lang="en-US" smtClean="0"/>
+              <a:rPr lang="en-US"/>
               <a:t>Fifth level</a:t>
             </a:r>
             <a:endParaRPr lang="en-US" dirty="0"/>
@@ -10542,7 +10527,7 @@
           <a:p>
             <a:pPr lvl="0"/>
             <a:r>
-              <a:rPr lang="en-US" smtClean="0"/>
+              <a:rPr lang="en-US"/>
               <a:t>Edit Master text styles</a:t>
             </a:r>
           </a:p>
@@ -10570,35 +10555,35 @@
           <a:p>
             <a:pPr lvl="0"/>
             <a:r>
-              <a:rPr lang="en-US" smtClean="0"/>
+              <a:rPr lang="en-US"/>
               <a:t>Edit Master text styles</a:t>
             </a:r>
           </a:p>
           <a:p>
             <a:pPr lvl="1"/>
             <a:r>
-              <a:rPr lang="en-US" smtClean="0"/>
+              <a:rPr lang="en-US"/>
               <a:t>Second level</a:t>
             </a:r>
           </a:p>
           <a:p>
             <a:pPr lvl="2"/>
             <a:r>
-              <a:rPr lang="en-US" smtClean="0"/>
+              <a:rPr lang="en-US"/>
               <a:t>Third level</a:t>
             </a:r>
           </a:p>
           <a:p>
             <a:pPr lvl="3"/>
             <a:r>
-              <a:rPr lang="en-US" smtClean="0"/>
+              <a:rPr lang="en-US"/>
               <a:t>Fourth level</a:t>
             </a:r>
           </a:p>
           <a:p>
             <a:pPr lvl="4"/>
             <a:r>
-              <a:rPr lang="en-US" smtClean="0"/>
+              <a:rPr lang="en-US"/>
               <a:t>Fifth level</a:t>
             </a:r>
             <a:endParaRPr lang="en-US" dirty="0"/>
@@ -10622,7 +10607,7 @@
           <a:p>
             <a:fld id="{1F57380E-2143-4096-B547-DE8B390321C5}" type="datetimeFigureOut">
               <a:rPr lang="en-US" smtClean="0"/>
-              <a:t>3/30/2022</a:t>
+              <a:t>6/13/2022</a:t>
             </a:fld>
             <a:endParaRPr lang="en-US"/>
           </a:p>
@@ -10716,7 +10701,7 @@
           <a:lstStyle/>
           <a:p>
             <a:r>
-              <a:rPr lang="en-US" smtClean="0"/>
+              <a:rPr lang="en-US"/>
               <a:t>Click to edit Master title style</a:t>
             </a:r>
             <a:endParaRPr lang="en-US" dirty="0"/>
@@ -10740,7 +10725,7 @@
           <a:p>
             <a:fld id="{1F57380E-2143-4096-B547-DE8B390321C5}" type="datetimeFigureOut">
               <a:rPr lang="en-US" smtClean="0"/>
-              <a:t>3/30/2022</a:t>
+              <a:t>6/13/2022</a:t>
             </a:fld>
             <a:endParaRPr lang="en-US"/>
           </a:p>
@@ -10835,7 +10820,7 @@
           <a:p>
             <a:fld id="{1F57380E-2143-4096-B547-DE8B390321C5}" type="datetimeFigureOut">
               <a:rPr lang="en-US" smtClean="0"/>
-              <a:t>3/30/2022</a:t>
+              <a:t>6/13/2022</a:t>
             </a:fld>
             <a:endParaRPr lang="en-US"/>
           </a:p>
@@ -10938,7 +10923,7 @@
           </a:lstStyle>
           <a:p>
             <a:r>
-              <a:rPr lang="en-US" smtClean="0"/>
+              <a:rPr lang="en-US"/>
               <a:t>Click to edit Master title style</a:t>
             </a:r>
             <a:endParaRPr lang="en-US" dirty="0"/>
@@ -10995,35 +10980,35 @@
           <a:p>
             <a:pPr lvl="0"/>
             <a:r>
-              <a:rPr lang="en-US" smtClean="0"/>
+              <a:rPr lang="en-US"/>
               <a:t>Edit Master text styles</a:t>
             </a:r>
           </a:p>
           <a:p>
             <a:pPr lvl="1"/>
             <a:r>
-              <a:rPr lang="en-US" smtClean="0"/>
+              <a:rPr lang="en-US"/>
               <a:t>Second level</a:t>
             </a:r>
           </a:p>
           <a:p>
             <a:pPr lvl="2"/>
             <a:r>
-              <a:rPr lang="en-US" smtClean="0"/>
+              <a:rPr lang="en-US"/>
               <a:t>Third level</a:t>
             </a:r>
           </a:p>
           <a:p>
             <a:pPr lvl="3"/>
             <a:r>
-              <a:rPr lang="en-US" smtClean="0"/>
+              <a:rPr lang="en-US"/>
               <a:t>Fourth level</a:t>
             </a:r>
           </a:p>
           <a:p>
             <a:pPr lvl="4"/>
             <a:r>
-              <a:rPr lang="en-US" smtClean="0"/>
+              <a:rPr lang="en-US"/>
               <a:t>Fifth level</a:t>
             </a:r>
             <a:endParaRPr lang="en-US" dirty="0"/>
@@ -11089,7 +11074,7 @@
           <a:p>
             <a:pPr lvl="0"/>
             <a:r>
-              <a:rPr lang="en-US" smtClean="0"/>
+              <a:rPr lang="en-US"/>
               <a:t>Edit Master text styles</a:t>
             </a:r>
           </a:p>
@@ -11112,7 +11097,7 @@
           <a:p>
             <a:fld id="{1F57380E-2143-4096-B547-DE8B390321C5}" type="datetimeFigureOut">
               <a:rPr lang="en-US" smtClean="0"/>
-              <a:t>3/30/2022</a:t>
+              <a:t>6/13/2022</a:t>
             </a:fld>
             <a:endParaRPr lang="en-US"/>
           </a:p>
@@ -11215,7 +11200,7 @@
           </a:lstStyle>
           <a:p>
             <a:r>
-              <a:rPr lang="en-US" smtClean="0"/>
+              <a:rPr lang="en-US"/>
               <a:t>Click to edit Master title style</a:t>
             </a:r>
             <a:endParaRPr lang="en-US" dirty="0"/>
@@ -11280,7 +11265,7 @@
           </a:lstStyle>
           <a:p>
             <a:r>
-              <a:rPr lang="en-US" smtClean="0"/>
+              <a:rPr lang="en-US"/>
               <a:t>Click icon to add picture</a:t>
             </a:r>
             <a:endParaRPr lang="en-US" dirty="0"/>
@@ -11346,7 +11331,7 @@
           <a:p>
             <a:pPr lvl="0"/>
             <a:r>
-              <a:rPr lang="en-US" smtClean="0"/>
+              <a:rPr lang="en-US"/>
               <a:t>Edit Master text styles</a:t>
             </a:r>
           </a:p>
@@ -11369,7 +11354,7 @@
           <a:p>
             <a:fld id="{1F57380E-2143-4096-B547-DE8B390321C5}" type="datetimeFigureOut">
               <a:rPr lang="en-US" smtClean="0"/>
-              <a:t>3/30/2022</a:t>
+              <a:t>6/13/2022</a:t>
             </a:fld>
             <a:endParaRPr lang="en-US"/>
           </a:p>
@@ -11478,7 +11463,7 @@
           <a:lstStyle/>
           <a:p>
             <a:r>
-              <a:rPr lang="en-US" smtClean="0"/>
+              <a:rPr lang="en-US"/>
               <a:t>Click to edit Master title style</a:t>
             </a:r>
             <a:endParaRPr lang="en-US" dirty="0"/>
@@ -11512,35 +11497,35 @@
           <a:p>
             <a:pPr lvl="0"/>
             <a:r>
-              <a:rPr lang="en-US" smtClean="0"/>
+              <a:rPr lang="en-US"/>
               <a:t>Edit Master text styles</a:t>
             </a:r>
           </a:p>
           <a:p>
             <a:pPr lvl="1"/>
             <a:r>
-              <a:rPr lang="en-US" smtClean="0"/>
+              <a:rPr lang="en-US"/>
               <a:t>Second level</a:t>
             </a:r>
           </a:p>
           <a:p>
             <a:pPr lvl="2"/>
             <a:r>
-              <a:rPr lang="en-US" smtClean="0"/>
+              <a:rPr lang="en-US"/>
               <a:t>Third level</a:t>
             </a:r>
           </a:p>
           <a:p>
             <a:pPr lvl="3"/>
             <a:r>
-              <a:rPr lang="en-US" smtClean="0"/>
+              <a:rPr lang="en-US"/>
               <a:t>Fourth level</a:t>
             </a:r>
           </a:p>
           <a:p>
             <a:pPr lvl="4"/>
             <a:r>
-              <a:rPr lang="en-US" smtClean="0"/>
+              <a:rPr lang="en-US"/>
               <a:t>Fifth level</a:t>
             </a:r>
             <a:endParaRPr lang="en-US" dirty="0"/>
@@ -11582,7 +11567,7 @@
           <a:p>
             <a:fld id="{1F57380E-2143-4096-B547-DE8B390321C5}" type="datetimeFigureOut">
               <a:rPr lang="en-US" smtClean="0"/>
-              <a:t>3/30/2022</a:t>
+              <a:t>6/13/2022</a:t>
             </a:fld>
             <a:endParaRPr lang="en-US"/>
           </a:p>
@@ -12121,7 +12106,7 @@
         </p:nvGrpSpPr>
         <p:grpSpPr>
           <a:xfrm>
-            <a:off x="2336164" y="7480301"/>
+            <a:off x="727257" y="9491411"/>
             <a:ext cx="5563508" cy="2208953"/>
             <a:chOff x="12678173" y="17056101"/>
             <a:chExt cx="11127016" cy="4417906"/>
@@ -14528,6 +14513,222 @@
           </a:graphic>
         </p:graphicFrame>
       </p:grpSp>
+      <p:grpSp>
+        <p:nvGrpSpPr>
+          <p:cNvPr id="81" name="Group 80">
+            <a:extLst>
+              <a:ext uri="{FF2B5EF4-FFF2-40B4-BE49-F238E27FC236}">
+                <a16:creationId xmlns:a16="http://schemas.microsoft.com/office/drawing/2014/main" id="{4981E981-E771-C81C-7530-1938378B9331}"/>
+              </a:ext>
+            </a:extLst>
+          </p:cNvPr>
+          <p:cNvGrpSpPr/>
+          <p:nvPr/>
+        </p:nvGrpSpPr>
+        <p:grpSpPr>
+          <a:xfrm>
+            <a:off x="274894" y="6657087"/>
+            <a:ext cx="5027773" cy="2402925"/>
+            <a:chOff x="274894" y="6657087"/>
+            <a:chExt cx="5027773" cy="2402925"/>
+          </a:xfrm>
+        </p:grpSpPr>
+        <p:pic>
+          <p:nvPicPr>
+            <p:cNvPr id="4" name="Picture 3">
+              <a:extLst>
+                <a:ext uri="{FF2B5EF4-FFF2-40B4-BE49-F238E27FC236}">
+                  <a16:creationId xmlns:a16="http://schemas.microsoft.com/office/drawing/2014/main" id="{2C13DC8C-150D-092F-06AE-59CB5EA8E813}"/>
+                </a:ext>
+              </a:extLst>
+            </p:cNvPr>
+            <p:cNvPicPr>
+              <a:picLocks noChangeAspect="1"/>
+            </p:cNvPicPr>
+            <p:nvPr/>
+          </p:nvPicPr>
+          <p:blipFill>
+            <a:blip r:embed="rId16"/>
+            <a:stretch>
+              <a:fillRect/>
+            </a:stretch>
+          </p:blipFill>
+          <p:spPr>
+            <a:xfrm>
+              <a:off x="1937342" y="6657087"/>
+              <a:ext cx="1703808" cy="2335464"/>
+            </a:xfrm>
+            <a:prstGeom prst="rect">
+              <a:avLst/>
+            </a:prstGeom>
+          </p:spPr>
+        </p:pic>
+        <p:pic>
+          <p:nvPicPr>
+            <p:cNvPr id="18" name="Picture 17">
+              <a:extLst>
+                <a:ext uri="{FF2B5EF4-FFF2-40B4-BE49-F238E27FC236}">
+                  <a16:creationId xmlns:a16="http://schemas.microsoft.com/office/drawing/2014/main" id="{355D5027-4D0F-38FF-702D-A9368C5938D3}"/>
+                </a:ext>
+              </a:extLst>
+            </p:cNvPr>
+            <p:cNvPicPr>
+              <a:picLocks noChangeAspect="1"/>
+            </p:cNvPicPr>
+            <p:nvPr/>
+          </p:nvPicPr>
+          <p:blipFill>
+            <a:blip r:embed="rId17"/>
+            <a:stretch>
+              <a:fillRect/>
+            </a:stretch>
+          </p:blipFill>
+          <p:spPr>
+            <a:xfrm>
+              <a:off x="274894" y="6657442"/>
+              <a:ext cx="1647393" cy="2337188"/>
+            </a:xfrm>
+            <a:prstGeom prst="rect">
+              <a:avLst/>
+            </a:prstGeom>
+          </p:spPr>
+        </p:pic>
+        <p:pic>
+          <p:nvPicPr>
+            <p:cNvPr id="70" name="Picture 69">
+              <a:extLst>
+                <a:ext uri="{FF2B5EF4-FFF2-40B4-BE49-F238E27FC236}">
+                  <a16:creationId xmlns:a16="http://schemas.microsoft.com/office/drawing/2014/main" id="{44C0F802-D88F-7EC9-2113-09AD425A08A4}"/>
+                </a:ext>
+              </a:extLst>
+            </p:cNvPr>
+            <p:cNvPicPr>
+              <a:picLocks noChangeAspect="1"/>
+            </p:cNvPicPr>
+            <p:nvPr/>
+          </p:nvPicPr>
+          <p:blipFill rotWithShape="1">
+            <a:blip r:embed="rId18"/>
+            <a:srcRect l="11205" r="8514"/>
+            <a:stretch/>
+          </p:blipFill>
+          <p:spPr>
+            <a:xfrm>
+              <a:off x="4548287" y="8308275"/>
+              <a:ext cx="754380" cy="751737"/>
+            </a:xfrm>
+            <a:prstGeom prst="rect">
+              <a:avLst/>
+            </a:prstGeom>
+          </p:spPr>
+        </p:pic>
+        <p:pic>
+          <p:nvPicPr>
+            <p:cNvPr id="89" name="Picture 88">
+              <a:extLst>
+                <a:ext uri="{FF2B5EF4-FFF2-40B4-BE49-F238E27FC236}">
+                  <a16:creationId xmlns:a16="http://schemas.microsoft.com/office/drawing/2014/main" id="{5BDEE199-2EF3-4165-1FBE-0EC0E27A3E08}"/>
+                </a:ext>
+              </a:extLst>
+            </p:cNvPr>
+            <p:cNvPicPr>
+              <a:picLocks noChangeAspect="1"/>
+            </p:cNvPicPr>
+            <p:nvPr/>
+          </p:nvPicPr>
+          <p:blipFill>
+            <a:blip r:embed="rId19"/>
+            <a:stretch>
+              <a:fillRect/>
+            </a:stretch>
+          </p:blipFill>
+          <p:spPr>
+            <a:xfrm>
+              <a:off x="4552630" y="7525690"/>
+              <a:ext cx="745695" cy="762452"/>
+            </a:xfrm>
+            <a:prstGeom prst="rect">
+              <a:avLst/>
+            </a:prstGeom>
+          </p:spPr>
+        </p:pic>
+        <p:pic>
+          <p:nvPicPr>
+            <p:cNvPr id="90" name="Picture 89">
+              <a:extLst>
+                <a:ext uri="{FF2B5EF4-FFF2-40B4-BE49-F238E27FC236}">
+                  <a16:creationId xmlns:a16="http://schemas.microsoft.com/office/drawing/2014/main" id="{D3B329BE-1A50-2283-88E6-529FDB14038A}"/>
+                </a:ext>
+              </a:extLst>
+            </p:cNvPr>
+            <p:cNvPicPr>
+              <a:picLocks noChangeAspect="1"/>
+            </p:cNvPicPr>
+            <p:nvPr/>
+          </p:nvPicPr>
+          <p:blipFill>
+            <a:blip r:embed="rId20"/>
+            <a:stretch>
+              <a:fillRect/>
+            </a:stretch>
+          </p:blipFill>
+          <p:spPr>
+            <a:xfrm>
+              <a:off x="4549240" y="6657803"/>
+              <a:ext cx="752475" cy="857250"/>
+            </a:xfrm>
+            <a:prstGeom prst="rect">
+              <a:avLst/>
+            </a:prstGeom>
+          </p:spPr>
+        </p:pic>
+        <p:sp>
+          <p:nvSpPr>
+            <p:cNvPr id="91" name="Right Arrow 92">
+              <a:extLst>
+                <a:ext uri="{FF2B5EF4-FFF2-40B4-BE49-F238E27FC236}">
+                  <a16:creationId xmlns:a16="http://schemas.microsoft.com/office/drawing/2014/main" id="{A048C3D6-0C9D-ECCE-BF31-00A2D1234E00}"/>
+                </a:ext>
+              </a:extLst>
+            </p:cNvPr>
+            <p:cNvSpPr/>
+            <p:nvPr/>
+          </p:nvSpPr>
+          <p:spPr>
+            <a:xfrm>
+              <a:off x="3673980" y="7694960"/>
+              <a:ext cx="845820" cy="415846"/>
+            </a:xfrm>
+            <a:prstGeom prst="rightArrow">
+              <a:avLst/>
+            </a:prstGeom>
+          </p:spPr>
+          <p:style>
+            <a:lnRef idx="2">
+              <a:schemeClr val="accent1">
+                <a:shade val="50000"/>
+              </a:schemeClr>
+            </a:lnRef>
+            <a:fillRef idx="1">
+              <a:schemeClr val="accent1"/>
+            </a:fillRef>
+            <a:effectRef idx="0">
+              <a:schemeClr val="accent1"/>
+            </a:effectRef>
+            <a:fontRef idx="minor">
+              <a:schemeClr val="lt1"/>
+            </a:fontRef>
+          </p:style>
+          <p:txBody>
+            <a:bodyPr rtlCol="0" anchor="ctr"/>
+            <a:lstStyle/>
+            <a:p>
+              <a:pPr algn="ctr"/>
+              <a:endParaRPr lang="en-US" sz="450"/>
+            </a:p>
+          </p:txBody>
+        </p:sp>
+      </p:grpSp>
     </p:spTree>
     <p:extLst>
       <p:ext uri="{BB962C8B-B14F-4D97-AF65-F5344CB8AC3E}">
@@ -14538,17 +14739,105 @@
   <p:clrMapOvr>
     <a:masterClrMapping/>
   </p:clrMapOvr>
-  <p:timing>
-    <p:tnLst>
-      <p:par>
-        <p:cTn id="1" dur="indefinite" restart="never" nodeType="tmRoot"/>
-      </p:par>
-    </p:tnLst>
-  </p:timing>
 </p:sld>
 </file>
 
 <file path=ppt/slides/slide10.xml><?xml version="1.0" encoding="utf-8"?>
+<p:sld xmlns:a="http://schemas.openxmlformats.org/drawingml/2006/main" xmlns:r="http://schemas.openxmlformats.org/officeDocument/2006/relationships" xmlns:p="http://schemas.openxmlformats.org/presentationml/2006/main">
+  <p:cSld>
+    <p:spTree>
+      <p:nvGrpSpPr>
+        <p:cNvPr id="1" name=""/>
+        <p:cNvGrpSpPr/>
+        <p:nvPr/>
+      </p:nvGrpSpPr>
+      <p:grpSpPr>
+        <a:xfrm>
+          <a:off x="0" y="0"/>
+          <a:ext cx="0" cy="0"/>
+          <a:chOff x="0" y="0"/>
+          <a:chExt cx="0" cy="0"/>
+        </a:xfrm>
+      </p:grpSpPr>
+      <p:sp>
+        <p:nvSpPr>
+          <p:cNvPr id="2" name="Title 1"/>
+          <p:cNvSpPr>
+            <a:spLocks noGrp="1"/>
+          </p:cNvSpPr>
+          <p:nvPr>
+            <p:ph type="title"/>
+          </p:nvPr>
+        </p:nvSpPr>
+        <p:spPr/>
+        <p:txBody>
+          <a:bodyPr/>
+          <a:lstStyle/>
+          <a:p>
+            <a:r>
+              <a:rPr lang="en-US" dirty="0"/>
+              <a:t>Quantitative Comparison of MDA</a:t>
+            </a:r>
+          </a:p>
+        </p:txBody>
+      </p:sp>
+      <p:sp>
+        <p:nvSpPr>
+          <p:cNvPr id="3" name="Content Placeholder 2"/>
+          <p:cNvSpPr>
+            <a:spLocks noGrp="1"/>
+          </p:cNvSpPr>
+          <p:nvPr>
+            <p:ph idx="1"/>
+          </p:nvPr>
+        </p:nvSpPr>
+        <p:spPr/>
+        <p:txBody>
+          <a:bodyPr/>
+          <a:lstStyle/>
+          <a:p>
+            <a:endParaRPr lang="en-US" dirty="0"/>
+          </a:p>
+        </p:txBody>
+      </p:sp>
+      <p:pic>
+        <p:nvPicPr>
+          <p:cNvPr id="4" name="Picture 3"/>
+          <p:cNvPicPr>
+            <a:picLocks noChangeAspect="1"/>
+          </p:cNvPicPr>
+          <p:nvPr/>
+        </p:nvPicPr>
+        <p:blipFill>
+          <a:blip r:embed="rId2"/>
+          <a:stretch>
+            <a:fillRect/>
+          </a:stretch>
+        </p:blipFill>
+        <p:spPr>
+          <a:xfrm>
+            <a:off x="1690687" y="6929437"/>
+            <a:ext cx="4962525" cy="4162425"/>
+          </a:xfrm>
+          <a:prstGeom prst="rect">
+            <a:avLst/>
+          </a:prstGeom>
+        </p:spPr>
+      </p:pic>
+    </p:spTree>
+    <p:extLst>
+      <p:ext uri="{BB962C8B-B14F-4D97-AF65-F5344CB8AC3E}">
+        <p14:creationId xmlns:p14="http://schemas.microsoft.com/office/powerpoint/2010/main" val="1925429846"/>
+      </p:ext>
+    </p:extLst>
+  </p:cSld>
+  <p:clrMapOvr>
+    <a:masterClrMapping/>
+  </p:clrMapOvr>
+</p:sld>
+</file>
+
+<file path=ppt/slides/slide11.xml><?xml version="1.0" encoding="utf-8"?>
 <p:sld xmlns:a="http://schemas.openxmlformats.org/drawingml/2006/main" xmlns:r="http://schemas.openxmlformats.org/officeDocument/2006/relationships" xmlns:p="http://schemas.openxmlformats.org/presentationml/2006/main">
   <p:cSld>
     <p:spTree>
@@ -14745,7 +15034,7 @@
                 <a:lstStyle/>
                 <a:p>
                   <a:r>
-                    <a:rPr lang="en-US" dirty="0" smtClean="0">
+                    <a:rPr lang="en-US" dirty="0">
                       <a:solidFill>
                         <a:srgbClr val="FF0000"/>
                       </a:solidFill>
@@ -14761,21 +15050,8 @@
                         <a:srgbClr val="04E604"/>
                       </a:solidFill>
                     </a:rPr>
-                    <a:t>A</a:t>
+                    <a:t>Ablation</a:t>
                   </a:r>
-                  <a:r>
-                    <a:rPr lang="en-US" dirty="0" smtClean="0">
-                      <a:solidFill>
-                        <a:srgbClr val="04E604"/>
-                      </a:solidFill>
-                    </a:rPr>
-                    <a:t>blation</a:t>
-                  </a:r>
-                  <a:endParaRPr lang="en-US" dirty="0">
-                    <a:solidFill>
-                      <a:srgbClr val="04E604"/>
-                    </a:solidFill>
-                  </a:endParaRPr>
                 </a:p>
               </p:txBody>
             </p:sp>
@@ -14804,7 +15080,7 @@
                 <a:lstStyle/>
                 <a:p>
                   <a:r>
-                    <a:rPr lang="en-US" dirty="0" smtClean="0">
+                    <a:rPr lang="en-US" dirty="0">
                       <a:solidFill>
                         <a:srgbClr val="5EEFFE"/>
                       </a:solidFill>
@@ -14820,21 +15096,8 @@
                         <a:srgbClr val="04E604"/>
                       </a:solidFill>
                     </a:rPr>
-                    <a:t>A</a:t>
+                    <a:t>Ablation</a:t>
                   </a:r>
-                  <a:r>
-                    <a:rPr lang="en-US" dirty="0" smtClean="0">
-                      <a:solidFill>
-                        <a:srgbClr val="04E604"/>
-                      </a:solidFill>
-                    </a:rPr>
-                    <a:t>blation</a:t>
-                  </a:r>
-                  <a:endParaRPr lang="en-US" dirty="0">
-                    <a:solidFill>
-                      <a:srgbClr val="04E604"/>
-                    </a:solidFill>
-                  </a:endParaRPr>
                 </a:p>
               </p:txBody>
             </p:sp>
@@ -14990,7 +15253,7 @@
               <a:lstStyle/>
               <a:p>
                 <a:r>
-                  <a:rPr lang="en-US" dirty="0" smtClean="0">
+                  <a:rPr lang="en-US" dirty="0">
                     <a:solidFill>
                       <a:srgbClr val="FF0000"/>
                     </a:solidFill>
@@ -15006,21 +15269,8 @@
                       <a:srgbClr val="04E604"/>
                     </a:solidFill>
                   </a:rPr>
-                  <a:t>A</a:t>
+                  <a:t>Ablation</a:t>
                 </a:r>
-                <a:r>
-                  <a:rPr lang="en-US" dirty="0" smtClean="0">
-                    <a:solidFill>
-                      <a:srgbClr val="04E604"/>
-                    </a:solidFill>
-                  </a:rPr>
-                  <a:t>blation</a:t>
-                </a:r>
-                <a:endParaRPr lang="en-US" dirty="0">
-                  <a:solidFill>
-                    <a:srgbClr val="04E604"/>
-                  </a:solidFill>
-                </a:endParaRPr>
               </a:p>
             </p:txBody>
           </p:sp>
@@ -15049,7 +15299,7 @@
               <a:lstStyle/>
               <a:p>
                 <a:r>
-                  <a:rPr lang="en-US" dirty="0" smtClean="0">
+                  <a:rPr lang="en-US" dirty="0">
                     <a:solidFill>
                       <a:srgbClr val="5EEFFE"/>
                     </a:solidFill>
@@ -15065,21 +15315,8 @@
                       <a:srgbClr val="04E604"/>
                     </a:solidFill>
                   </a:rPr>
-                  <a:t>A</a:t>
+                  <a:t>Ablation</a:t>
                 </a:r>
-                <a:r>
-                  <a:rPr lang="en-US" dirty="0" smtClean="0">
-                    <a:solidFill>
-                      <a:srgbClr val="04E604"/>
-                    </a:solidFill>
-                  </a:rPr>
-                  <a:t>blation</a:t>
-                </a:r>
-                <a:endParaRPr lang="en-US" dirty="0">
-                  <a:solidFill>
-                    <a:srgbClr val="04E604"/>
-                  </a:solidFill>
-                </a:endParaRPr>
               </a:p>
             </p:txBody>
           </p:sp>
@@ -15107,18 +15344,13 @@
             <a:lstStyle/>
             <a:p>
               <a:r>
-                <a:rPr lang="en-US" sz="2800" dirty="0" smtClean="0">
+                <a:rPr lang="en-US" sz="2800" dirty="0">
                   <a:solidFill>
                     <a:schemeClr val="bg1"/>
                   </a:solidFill>
                 </a:rPr>
                 <a:t>Patient 14</a:t>
               </a:r>
-              <a:endParaRPr lang="en-US" sz="2800" dirty="0">
-                <a:solidFill>
-                  <a:schemeClr val="bg1"/>
-                </a:solidFill>
-              </a:endParaRPr>
             </a:p>
           </p:txBody>
         </p:sp>
@@ -15145,18 +15377,13 @@
             <a:lstStyle/>
             <a:p>
               <a:r>
-                <a:rPr lang="en-US" sz="2800" dirty="0" smtClean="0">
+                <a:rPr lang="en-US" sz="2800" dirty="0">
                   <a:solidFill>
                     <a:schemeClr val="bg1"/>
                   </a:solidFill>
                 </a:rPr>
                 <a:t>Patient 5</a:t>
               </a:r>
-              <a:endParaRPr lang="en-US" sz="2800" dirty="0">
-                <a:solidFill>
-                  <a:schemeClr val="bg1"/>
-                </a:solidFill>
-              </a:endParaRPr>
             </a:p>
           </p:txBody>
         </p:sp>
@@ -15171,17 +15398,10 @@
   <p:clrMapOvr>
     <a:masterClrMapping/>
   </p:clrMapOvr>
-  <p:timing>
-    <p:tnLst>
-      <p:par>
-        <p:cTn id="1" dur="indefinite" restart="never" nodeType="tmRoot"/>
-      </p:par>
-    </p:tnLst>
-  </p:timing>
 </p:sld>
 </file>
 
-<file path=ppt/slides/slide11.xml><?xml version="1.0" encoding="utf-8"?>
+<file path=ppt/slides/slide12.xml><?xml version="1.0" encoding="utf-8"?>
 <p:sld xmlns:a="http://schemas.openxmlformats.org/drawingml/2006/main" xmlns:r="http://schemas.openxmlformats.org/officeDocument/2006/relationships" xmlns:p="http://schemas.openxmlformats.org/presentationml/2006/main">
   <p:cSld>
     <p:spTree>
@@ -15337,7 +15557,7 @@
 </p:sld>
 </file>
 
-<file path=ppt/slides/slide12.xml><?xml version="1.0" encoding="utf-8"?>
+<file path=ppt/slides/slide13.xml><?xml version="1.0" encoding="utf-8"?>
 <p:sld xmlns:a="http://schemas.openxmlformats.org/drawingml/2006/main" xmlns:r="http://schemas.openxmlformats.org/officeDocument/2006/relationships" xmlns:p="http://schemas.openxmlformats.org/presentationml/2006/main">
   <p:cSld>
     <p:spTree>
@@ -15370,10 +15590,9 @@
           <a:lstStyle/>
           <a:p>
             <a:r>
-              <a:rPr lang="en-US" dirty="0" smtClean="0"/>
+              <a:rPr lang="en-US" dirty="0"/>
               <a:t>Lits_100</a:t>
             </a:r>
-            <a:endParaRPr lang="en-US" dirty="0"/>
           </a:p>
         </p:txBody>
       </p:sp>
@@ -15897,7 +16116,7 @@
 </p:sld>
 </file>
 
-<file path=ppt/slides/slide13.xml><?xml version="1.0" encoding="utf-8"?>
+<file path=ppt/slides/slide14.xml><?xml version="1.0" encoding="utf-8"?>
 <p:sld xmlns:a="http://schemas.openxmlformats.org/drawingml/2006/main" xmlns:r="http://schemas.openxmlformats.org/officeDocument/2006/relationships" xmlns:p="http://schemas.openxmlformats.org/presentationml/2006/main">
   <p:cSld>
     <p:spTree>
@@ -16509,7 +16728,7 @@
 </p:sld>
 </file>
 
-<file path=ppt/slides/slide14.xml><?xml version="1.0" encoding="utf-8"?>
+<file path=ppt/slides/slide15.xml><?xml version="1.0" encoding="utf-8"?>
 <p:sld xmlns:a="http://schemas.openxmlformats.org/drawingml/2006/main" xmlns:r="http://schemas.openxmlformats.org/officeDocument/2006/relationships" xmlns:p="http://schemas.openxmlformats.org/presentationml/2006/main">
   <p:cSld>
     <p:spTree>
@@ -16717,7 +16936,7 @@
 </p:sld>
 </file>
 
-<file path=ppt/slides/slide15.xml><?xml version="1.0" encoding="utf-8"?>
+<file path=ppt/slides/slide16.xml><?xml version="1.0" encoding="utf-8"?>
 <p:sld xmlns:a="http://schemas.openxmlformats.org/drawingml/2006/main" xmlns:r="http://schemas.openxmlformats.org/officeDocument/2006/relationships" xmlns:p="http://schemas.openxmlformats.org/presentationml/2006/main">
   <p:cSld>
     <p:spTree>
@@ -16769,38 +16988,33 @@
           <a:lstStyle/>
           <a:p>
             <a:r>
-              <a:rPr lang="en-US" dirty="0" err="1" smtClean="0"/>
+              <a:rPr lang="en-US" dirty="0" err="1"/>
               <a:t>Lits</a:t>
             </a:r>
             <a:r>
-              <a:rPr lang="en-US" dirty="0" smtClean="0"/>
+              <a:rPr lang="en-US" dirty="0"/>
               <a:t> 57 removed, not a patient</a:t>
             </a:r>
           </a:p>
           <a:p>
             <a:r>
-              <a:rPr lang="en-US" dirty="0" err="1" smtClean="0"/>
+              <a:rPr lang="en-US" dirty="0" err="1"/>
               <a:t>Lits</a:t>
             </a:r>
             <a:r>
-              <a:rPr lang="en-US" dirty="0" smtClean="0"/>
+              <a:rPr lang="en-US" dirty="0"/>
               <a:t> 59 removed, not transverse</a:t>
             </a:r>
           </a:p>
           <a:p>
             <a:r>
-              <a:rPr lang="en-US" dirty="0" err="1" smtClean="0"/>
+              <a:rPr lang="en-US" dirty="0" err="1"/>
               <a:t>Lits</a:t>
             </a:r>
             <a:r>
               <a:rPr lang="en-US" dirty="0"/>
-              <a:t> </a:t>
+              <a:t> 0</a:t>
             </a:r>
-            <a:r>
-              <a:rPr lang="en-US" dirty="0" smtClean="0"/>
-              <a:t>0</a:t>
-            </a:r>
-            <a:endParaRPr lang="en-US" dirty="0"/>
           </a:p>
         </p:txBody>
       </p:sp>
@@ -16841,7 +17055,7 @@
 </p:sld>
 </file>
 
-<file path=ppt/slides/slide16.xml><?xml version="1.0" encoding="utf-8"?>
+<file path=ppt/slides/slide17.xml><?xml version="1.0" encoding="utf-8"?>
 <p:sld xmlns:a="http://schemas.openxmlformats.org/drawingml/2006/main" xmlns:r="http://schemas.openxmlformats.org/officeDocument/2006/relationships" xmlns:p="http://schemas.openxmlformats.org/presentationml/2006/main">
   <p:cSld>
     <p:spTree>
@@ -19380,6 +19594,4561 @@
       </p:grpSpPr>
       <p:grpSp>
         <p:nvGrpSpPr>
+          <p:cNvPr id="74" name="Group 73">
+            <a:extLst>
+              <a:ext uri="{FF2B5EF4-FFF2-40B4-BE49-F238E27FC236}">
+                <a16:creationId xmlns:a16="http://schemas.microsoft.com/office/drawing/2014/main" id="{D7A29DC3-08AF-3239-2EFF-B55188C5CD75}"/>
+              </a:ext>
+            </a:extLst>
+          </p:cNvPr>
+          <p:cNvGrpSpPr/>
+          <p:nvPr/>
+        </p:nvGrpSpPr>
+        <p:grpSpPr>
+          <a:xfrm>
+            <a:off x="3604928" y="1199782"/>
+            <a:ext cx="11385878" cy="5172543"/>
+            <a:chOff x="3604928" y="1199782"/>
+            <a:chExt cx="11385878" cy="5172543"/>
+          </a:xfrm>
+        </p:grpSpPr>
+        <p:sp>
+          <p:nvSpPr>
+            <p:cNvPr id="6" name="TextBox 5">
+              <a:extLst>
+                <a:ext uri="{FF2B5EF4-FFF2-40B4-BE49-F238E27FC236}">
+                  <a16:creationId xmlns:a16="http://schemas.microsoft.com/office/drawing/2014/main" id="{56D2F02B-9EC9-1742-461A-7E5D978600F2}"/>
+                </a:ext>
+              </a:extLst>
+            </p:cNvPr>
+            <p:cNvSpPr txBox="1"/>
+            <p:nvPr/>
+          </p:nvSpPr>
+          <p:spPr>
+            <a:xfrm>
+              <a:off x="5779670" y="3485348"/>
+              <a:ext cx="348172" cy="284693"/>
+            </a:xfrm>
+            <a:prstGeom prst="rect">
+              <a:avLst/>
+            </a:prstGeom>
+            <a:noFill/>
+          </p:spPr>
+          <p:txBody>
+            <a:bodyPr wrap="none" rtlCol="0">
+              <a:spAutoFit/>
+            </a:bodyPr>
+            <a:lstStyle/>
+            <a:p>
+              <a:r>
+                <a:rPr lang="en-US" sz="1250" dirty="0"/>
+                <a:t>32</a:t>
+              </a:r>
+            </a:p>
+          </p:txBody>
+        </p:sp>
+        <p:sp>
+          <p:nvSpPr>
+            <p:cNvPr id="7" name="TextBox 6">
+              <a:extLst>
+                <a:ext uri="{FF2B5EF4-FFF2-40B4-BE49-F238E27FC236}">
+                  <a16:creationId xmlns:a16="http://schemas.microsoft.com/office/drawing/2014/main" id="{4CE6F07F-2AF8-778A-C12B-42AFCF42AAE1}"/>
+                </a:ext>
+              </a:extLst>
+            </p:cNvPr>
+            <p:cNvSpPr txBox="1"/>
+            <p:nvPr/>
+          </p:nvSpPr>
+          <p:spPr>
+            <a:xfrm>
+              <a:off x="6224906" y="3485348"/>
+              <a:ext cx="348172" cy="284693"/>
+            </a:xfrm>
+            <a:prstGeom prst="rect">
+              <a:avLst/>
+            </a:prstGeom>
+            <a:noFill/>
+          </p:spPr>
+          <p:txBody>
+            <a:bodyPr wrap="none" rtlCol="0">
+              <a:spAutoFit/>
+            </a:bodyPr>
+            <a:lstStyle/>
+            <a:p>
+              <a:r>
+                <a:rPr lang="en-US" sz="1250" dirty="0"/>
+                <a:t>32</a:t>
+              </a:r>
+            </a:p>
+          </p:txBody>
+        </p:sp>
+        <p:sp>
+          <p:nvSpPr>
+            <p:cNvPr id="65" name="Down Arrow 218">
+              <a:extLst>
+                <a:ext uri="{FF2B5EF4-FFF2-40B4-BE49-F238E27FC236}">
+                  <a16:creationId xmlns:a16="http://schemas.microsoft.com/office/drawing/2014/main" id="{27DEA756-091F-9370-50D9-1C97AD04DD29}"/>
+                </a:ext>
+              </a:extLst>
+            </p:cNvPr>
+            <p:cNvSpPr/>
+            <p:nvPr/>
+          </p:nvSpPr>
+          <p:spPr>
+            <a:xfrm>
+              <a:off x="5420577" y="3216650"/>
+              <a:ext cx="204547" cy="390132"/>
+            </a:xfrm>
+            <a:prstGeom prst="downArrow">
+              <a:avLst/>
+            </a:prstGeom>
+            <a:solidFill>
+              <a:srgbClr val="C00000"/>
+            </a:solidFill>
+            <a:ln>
+              <a:solidFill>
+                <a:srgbClr val="C00000"/>
+              </a:solidFill>
+            </a:ln>
+          </p:spPr>
+          <p:style>
+            <a:lnRef idx="2">
+              <a:schemeClr val="accent1">
+                <a:shade val="50000"/>
+              </a:schemeClr>
+            </a:lnRef>
+            <a:fillRef idx="1">
+              <a:schemeClr val="accent1"/>
+            </a:fillRef>
+            <a:effectRef idx="0">
+              <a:schemeClr val="accent1"/>
+            </a:effectRef>
+            <a:fontRef idx="minor">
+              <a:schemeClr val="lt1"/>
+            </a:fontRef>
+          </p:style>
+          <p:txBody>
+            <a:bodyPr rtlCol="0" anchor="ctr"/>
+            <a:lstStyle/>
+            <a:p>
+              <a:pPr algn="ctr"/>
+              <a:endParaRPr lang="en-US" sz="450"/>
+            </a:p>
+          </p:txBody>
+        </p:sp>
+        <p:sp>
+          <p:nvSpPr>
+            <p:cNvPr id="66" name="Rectangle 65">
+              <a:extLst>
+                <a:ext uri="{FF2B5EF4-FFF2-40B4-BE49-F238E27FC236}">
+                  <a16:creationId xmlns:a16="http://schemas.microsoft.com/office/drawing/2014/main" id="{A4DD8D4B-0521-A17F-1316-96B0B4A1EC12}"/>
+                </a:ext>
+              </a:extLst>
+            </p:cNvPr>
+            <p:cNvSpPr/>
+            <p:nvPr/>
+          </p:nvSpPr>
+          <p:spPr>
+            <a:xfrm>
+              <a:off x="5183410" y="1760636"/>
+              <a:ext cx="91440" cy="1371600"/>
+            </a:xfrm>
+            <a:prstGeom prst="rect">
+              <a:avLst/>
+            </a:prstGeom>
+          </p:spPr>
+          <p:style>
+            <a:lnRef idx="2">
+              <a:schemeClr val="accent1">
+                <a:shade val="50000"/>
+              </a:schemeClr>
+            </a:lnRef>
+            <a:fillRef idx="1">
+              <a:schemeClr val="accent1"/>
+            </a:fillRef>
+            <a:effectRef idx="0">
+              <a:schemeClr val="accent1"/>
+            </a:effectRef>
+            <a:fontRef idx="minor">
+              <a:schemeClr val="lt1"/>
+            </a:fontRef>
+          </p:style>
+          <p:txBody>
+            <a:bodyPr rtlCol="0" anchor="ctr"/>
+            <a:lstStyle/>
+            <a:p>
+              <a:pPr algn="ctr"/>
+              <a:endParaRPr lang="en-US" sz="450"/>
+            </a:p>
+          </p:txBody>
+        </p:sp>
+        <p:sp>
+          <p:nvSpPr>
+            <p:cNvPr id="67" name="TextBox 66">
+              <a:extLst>
+                <a:ext uri="{FF2B5EF4-FFF2-40B4-BE49-F238E27FC236}">
+                  <a16:creationId xmlns:a16="http://schemas.microsoft.com/office/drawing/2014/main" id="{28812903-07F8-7CC1-ADF4-DC92EDA6B285}"/>
+                </a:ext>
+              </a:extLst>
+            </p:cNvPr>
+            <p:cNvSpPr txBox="1"/>
+            <p:nvPr/>
+          </p:nvSpPr>
+          <p:spPr>
+            <a:xfrm>
+              <a:off x="4821710" y="1514637"/>
+              <a:ext cx="266420" cy="284693"/>
+            </a:xfrm>
+            <a:prstGeom prst="rect">
+              <a:avLst/>
+            </a:prstGeom>
+            <a:noFill/>
+          </p:spPr>
+          <p:txBody>
+            <a:bodyPr wrap="none" rtlCol="0">
+              <a:spAutoFit/>
+            </a:bodyPr>
+            <a:lstStyle/>
+            <a:p>
+              <a:r>
+                <a:rPr lang="en-US" sz="1250" dirty="0"/>
+                <a:t>5</a:t>
+              </a:r>
+            </a:p>
+          </p:txBody>
+        </p:sp>
+        <p:sp>
+          <p:nvSpPr>
+            <p:cNvPr id="68" name="TextBox 67">
+              <a:extLst>
+                <a:ext uri="{FF2B5EF4-FFF2-40B4-BE49-F238E27FC236}">
+                  <a16:creationId xmlns:a16="http://schemas.microsoft.com/office/drawing/2014/main" id="{935E8802-EE72-86D2-9012-B662E32FCF47}"/>
+                </a:ext>
+              </a:extLst>
+            </p:cNvPr>
+            <p:cNvSpPr txBox="1"/>
+            <p:nvPr/>
+          </p:nvSpPr>
+          <p:spPr>
+            <a:xfrm>
+              <a:off x="5063912" y="1514637"/>
+              <a:ext cx="348172" cy="284693"/>
+            </a:xfrm>
+            <a:prstGeom prst="rect">
+              <a:avLst/>
+            </a:prstGeom>
+            <a:noFill/>
+          </p:spPr>
+          <p:txBody>
+            <a:bodyPr wrap="none" rtlCol="0">
+              <a:spAutoFit/>
+            </a:bodyPr>
+            <a:lstStyle/>
+            <a:p>
+              <a:r>
+                <a:rPr lang="en-US" sz="1250" dirty="0"/>
+                <a:t>16</a:t>
+              </a:r>
+            </a:p>
+          </p:txBody>
+        </p:sp>
+        <p:sp>
+          <p:nvSpPr>
+            <p:cNvPr id="69" name="TextBox 68">
+              <a:extLst>
+                <a:ext uri="{FF2B5EF4-FFF2-40B4-BE49-F238E27FC236}">
+                  <a16:creationId xmlns:a16="http://schemas.microsoft.com/office/drawing/2014/main" id="{68AEF11C-6855-05EF-148B-9DD1E6D156DB}"/>
+                </a:ext>
+              </a:extLst>
+            </p:cNvPr>
+            <p:cNvSpPr txBox="1"/>
+            <p:nvPr/>
+          </p:nvSpPr>
+          <p:spPr>
+            <a:xfrm>
+              <a:off x="5346589" y="1514637"/>
+              <a:ext cx="348172" cy="284693"/>
+            </a:xfrm>
+            <a:prstGeom prst="rect">
+              <a:avLst/>
+            </a:prstGeom>
+            <a:noFill/>
+          </p:spPr>
+          <p:txBody>
+            <a:bodyPr wrap="none" rtlCol="0">
+              <a:spAutoFit/>
+            </a:bodyPr>
+            <a:lstStyle/>
+            <a:p>
+              <a:r>
+                <a:rPr lang="en-US" sz="1250" dirty="0"/>
+                <a:t>16</a:t>
+              </a:r>
+            </a:p>
+          </p:txBody>
+        </p:sp>
+        <p:sp>
+          <p:nvSpPr>
+            <p:cNvPr id="70" name="Right Arrow 224">
+              <a:extLst>
+                <a:ext uri="{FF2B5EF4-FFF2-40B4-BE49-F238E27FC236}">
+                  <a16:creationId xmlns:a16="http://schemas.microsoft.com/office/drawing/2014/main" id="{ECC689EC-EB95-8C82-DEE5-E531E5FFE67A}"/>
+                </a:ext>
+              </a:extLst>
+            </p:cNvPr>
+            <p:cNvSpPr/>
+            <p:nvPr/>
+          </p:nvSpPr>
+          <p:spPr>
+            <a:xfrm>
+              <a:off x="4990698" y="2325278"/>
+              <a:ext cx="194187" cy="242316"/>
+            </a:xfrm>
+            <a:prstGeom prst="rightArrow">
+              <a:avLst/>
+            </a:prstGeom>
+            <a:solidFill>
+              <a:srgbClr val="002060"/>
+            </a:solidFill>
+            <a:ln>
+              <a:solidFill>
+                <a:srgbClr val="002060"/>
+              </a:solidFill>
+            </a:ln>
+          </p:spPr>
+          <p:style>
+            <a:lnRef idx="2">
+              <a:schemeClr val="accent1">
+                <a:shade val="50000"/>
+              </a:schemeClr>
+            </a:lnRef>
+            <a:fillRef idx="1">
+              <a:schemeClr val="accent1"/>
+            </a:fillRef>
+            <a:effectRef idx="0">
+              <a:schemeClr val="accent1"/>
+            </a:effectRef>
+            <a:fontRef idx="minor">
+              <a:schemeClr val="lt1"/>
+            </a:fontRef>
+          </p:style>
+          <p:txBody>
+            <a:bodyPr rtlCol="0" anchor="ctr"/>
+            <a:lstStyle/>
+            <a:p>
+              <a:pPr algn="ctr"/>
+              <a:endParaRPr lang="en-US" sz="450"/>
+            </a:p>
+          </p:txBody>
+        </p:sp>
+        <p:sp>
+          <p:nvSpPr>
+            <p:cNvPr id="71" name="Right Arrow 225">
+              <a:extLst>
+                <a:ext uri="{FF2B5EF4-FFF2-40B4-BE49-F238E27FC236}">
+                  <a16:creationId xmlns:a16="http://schemas.microsoft.com/office/drawing/2014/main" id="{0F696842-AF0F-DFEB-3284-F94502B87578}"/>
+                </a:ext>
+              </a:extLst>
+            </p:cNvPr>
+            <p:cNvSpPr/>
+            <p:nvPr/>
+          </p:nvSpPr>
+          <p:spPr>
+            <a:xfrm>
+              <a:off x="5273375" y="2325278"/>
+              <a:ext cx="194187" cy="242316"/>
+            </a:xfrm>
+            <a:prstGeom prst="rightArrow">
+              <a:avLst/>
+            </a:prstGeom>
+            <a:solidFill>
+              <a:srgbClr val="002060"/>
+            </a:solidFill>
+            <a:ln>
+              <a:solidFill>
+                <a:srgbClr val="002060"/>
+              </a:solidFill>
+            </a:ln>
+          </p:spPr>
+          <p:style>
+            <a:lnRef idx="2">
+              <a:schemeClr val="accent1">
+                <a:shade val="50000"/>
+              </a:schemeClr>
+            </a:lnRef>
+            <a:fillRef idx="1">
+              <a:schemeClr val="accent1"/>
+            </a:fillRef>
+            <a:effectRef idx="0">
+              <a:schemeClr val="accent1"/>
+            </a:effectRef>
+            <a:fontRef idx="minor">
+              <a:schemeClr val="lt1"/>
+            </a:fontRef>
+          </p:style>
+          <p:txBody>
+            <a:bodyPr rtlCol="0" anchor="ctr"/>
+            <a:lstStyle/>
+            <a:p>
+              <a:pPr algn="ctr"/>
+              <a:endParaRPr lang="en-US" sz="450"/>
+            </a:p>
+          </p:txBody>
+        </p:sp>
+        <p:sp>
+          <p:nvSpPr>
+            <p:cNvPr id="72" name="Rectangle 71">
+              <a:extLst>
+                <a:ext uri="{FF2B5EF4-FFF2-40B4-BE49-F238E27FC236}">
+                  <a16:creationId xmlns:a16="http://schemas.microsoft.com/office/drawing/2014/main" id="{EB971E70-CF50-5599-CC3F-5F845908B7EB}"/>
+                </a:ext>
+              </a:extLst>
+            </p:cNvPr>
+            <p:cNvSpPr/>
+            <p:nvPr/>
+          </p:nvSpPr>
+          <p:spPr>
+            <a:xfrm>
+              <a:off x="5466087" y="1760636"/>
+              <a:ext cx="91440" cy="1371600"/>
+            </a:xfrm>
+            <a:prstGeom prst="rect">
+              <a:avLst/>
+            </a:prstGeom>
+          </p:spPr>
+          <p:style>
+            <a:lnRef idx="2">
+              <a:schemeClr val="accent1">
+                <a:shade val="50000"/>
+              </a:schemeClr>
+            </a:lnRef>
+            <a:fillRef idx="1">
+              <a:schemeClr val="accent1"/>
+            </a:fillRef>
+            <a:effectRef idx="0">
+              <a:schemeClr val="accent1"/>
+            </a:effectRef>
+            <a:fontRef idx="minor">
+              <a:schemeClr val="lt1"/>
+            </a:fontRef>
+          </p:style>
+          <p:txBody>
+            <a:bodyPr rtlCol="0" anchor="ctr"/>
+            <a:lstStyle/>
+            <a:p>
+              <a:pPr algn="ctr"/>
+              <a:endParaRPr lang="en-US" sz="450" dirty="0"/>
+            </a:p>
+          </p:txBody>
+        </p:sp>
+        <p:sp>
+          <p:nvSpPr>
+            <p:cNvPr id="73" name="Rectangle 72">
+              <a:extLst>
+                <a:ext uri="{FF2B5EF4-FFF2-40B4-BE49-F238E27FC236}">
+                  <a16:creationId xmlns:a16="http://schemas.microsoft.com/office/drawing/2014/main" id="{FE549A23-60C0-D7E7-3F8B-8AA28B0C3081}"/>
+                </a:ext>
+              </a:extLst>
+            </p:cNvPr>
+            <p:cNvSpPr/>
+            <p:nvPr/>
+          </p:nvSpPr>
+          <p:spPr>
+            <a:xfrm>
+              <a:off x="4900733" y="1760636"/>
+              <a:ext cx="91440" cy="1371600"/>
+            </a:xfrm>
+            <a:prstGeom prst="rect">
+              <a:avLst/>
+            </a:prstGeom>
+          </p:spPr>
+          <p:style>
+            <a:lnRef idx="2">
+              <a:schemeClr val="accent1">
+                <a:shade val="50000"/>
+              </a:schemeClr>
+            </a:lnRef>
+            <a:fillRef idx="1">
+              <a:schemeClr val="accent1"/>
+            </a:fillRef>
+            <a:effectRef idx="0">
+              <a:schemeClr val="accent1"/>
+            </a:effectRef>
+            <a:fontRef idx="minor">
+              <a:schemeClr val="lt1"/>
+            </a:fontRef>
+          </p:style>
+          <p:txBody>
+            <a:bodyPr rtlCol="0" anchor="ctr"/>
+            <a:lstStyle/>
+            <a:p>
+              <a:pPr algn="ctr"/>
+              <a:endParaRPr lang="en-US" sz="450"/>
+            </a:p>
+          </p:txBody>
+        </p:sp>
+        <p:sp>
+          <p:nvSpPr>
+            <p:cNvPr id="9" name="Right Arrow 131">
+              <a:extLst>
+                <a:ext uri="{FF2B5EF4-FFF2-40B4-BE49-F238E27FC236}">
+                  <a16:creationId xmlns:a16="http://schemas.microsoft.com/office/drawing/2014/main" id="{7DEE202A-0E68-67EE-0BEB-2BD068EC2753}"/>
+                </a:ext>
+              </a:extLst>
+            </p:cNvPr>
+            <p:cNvSpPr/>
+            <p:nvPr/>
+          </p:nvSpPr>
+          <p:spPr>
+            <a:xfrm>
+              <a:off x="5587384" y="4292856"/>
+              <a:ext cx="194187" cy="242316"/>
+            </a:xfrm>
+            <a:prstGeom prst="rightArrow">
+              <a:avLst/>
+            </a:prstGeom>
+            <a:solidFill>
+              <a:srgbClr val="002060"/>
+            </a:solidFill>
+            <a:ln>
+              <a:solidFill>
+                <a:srgbClr val="002060"/>
+              </a:solidFill>
+            </a:ln>
+          </p:spPr>
+          <p:style>
+            <a:lnRef idx="2">
+              <a:schemeClr val="accent1">
+                <a:shade val="50000"/>
+              </a:schemeClr>
+            </a:lnRef>
+            <a:fillRef idx="1">
+              <a:schemeClr val="accent1"/>
+            </a:fillRef>
+            <a:effectRef idx="0">
+              <a:schemeClr val="accent1"/>
+            </a:effectRef>
+            <a:fontRef idx="minor">
+              <a:schemeClr val="lt1"/>
+            </a:fontRef>
+          </p:style>
+          <p:txBody>
+            <a:bodyPr rtlCol="0" anchor="ctr"/>
+            <a:lstStyle/>
+            <a:p>
+              <a:pPr algn="ctr"/>
+              <a:endParaRPr lang="en-US" sz="450"/>
+            </a:p>
+          </p:txBody>
+        </p:sp>
+        <p:sp>
+          <p:nvSpPr>
+            <p:cNvPr id="10" name="Right Arrow 132">
+              <a:extLst>
+                <a:ext uri="{FF2B5EF4-FFF2-40B4-BE49-F238E27FC236}">
+                  <a16:creationId xmlns:a16="http://schemas.microsoft.com/office/drawing/2014/main" id="{102E0F84-05BE-EBE8-DA8D-7B09B149829B}"/>
+                </a:ext>
+              </a:extLst>
+            </p:cNvPr>
+            <p:cNvSpPr/>
+            <p:nvPr/>
+          </p:nvSpPr>
+          <p:spPr>
+            <a:xfrm>
+              <a:off x="6032005" y="4292856"/>
+              <a:ext cx="194187" cy="242316"/>
+            </a:xfrm>
+            <a:prstGeom prst="rightArrow">
+              <a:avLst/>
+            </a:prstGeom>
+            <a:solidFill>
+              <a:srgbClr val="002060"/>
+            </a:solidFill>
+            <a:ln>
+              <a:solidFill>
+                <a:srgbClr val="002060"/>
+              </a:solidFill>
+            </a:ln>
+          </p:spPr>
+          <p:style>
+            <a:lnRef idx="2">
+              <a:schemeClr val="accent1">
+                <a:shade val="50000"/>
+              </a:schemeClr>
+            </a:lnRef>
+            <a:fillRef idx="1">
+              <a:schemeClr val="accent1"/>
+            </a:fillRef>
+            <a:effectRef idx="0">
+              <a:schemeClr val="accent1"/>
+            </a:effectRef>
+            <a:fontRef idx="minor">
+              <a:schemeClr val="lt1"/>
+            </a:fontRef>
+          </p:style>
+          <p:txBody>
+            <a:bodyPr rtlCol="0" anchor="ctr"/>
+            <a:lstStyle/>
+            <a:p>
+              <a:pPr algn="ctr"/>
+              <a:endParaRPr lang="en-US" sz="450"/>
+            </a:p>
+          </p:txBody>
+        </p:sp>
+        <p:sp>
+          <p:nvSpPr>
+            <p:cNvPr id="11" name="Rectangle 10">
+              <a:extLst>
+                <a:ext uri="{FF2B5EF4-FFF2-40B4-BE49-F238E27FC236}">
+                  <a16:creationId xmlns:a16="http://schemas.microsoft.com/office/drawing/2014/main" id="{EB52C180-5683-98A7-FAC8-5B4296D7E699}"/>
+                </a:ext>
+              </a:extLst>
+            </p:cNvPr>
+            <p:cNvSpPr/>
+            <p:nvPr/>
+          </p:nvSpPr>
+          <p:spPr>
+            <a:xfrm>
+              <a:off x="5462167" y="3728214"/>
+              <a:ext cx="91440" cy="1371600"/>
+            </a:xfrm>
+            <a:prstGeom prst="rect">
+              <a:avLst/>
+            </a:prstGeom>
+          </p:spPr>
+          <p:style>
+            <a:lnRef idx="2">
+              <a:schemeClr val="accent1">
+                <a:shade val="50000"/>
+              </a:schemeClr>
+            </a:lnRef>
+            <a:fillRef idx="1">
+              <a:schemeClr val="accent1"/>
+            </a:fillRef>
+            <a:effectRef idx="0">
+              <a:schemeClr val="accent1"/>
+            </a:effectRef>
+            <a:fontRef idx="minor">
+              <a:schemeClr val="lt1"/>
+            </a:fontRef>
+          </p:style>
+          <p:txBody>
+            <a:bodyPr rtlCol="0" anchor="ctr"/>
+            <a:lstStyle/>
+            <a:p>
+              <a:pPr algn="ctr"/>
+              <a:endParaRPr lang="en-US" sz="450"/>
+            </a:p>
+          </p:txBody>
+        </p:sp>
+        <p:sp>
+          <p:nvSpPr>
+            <p:cNvPr id="12" name="Rectangle 11">
+              <a:extLst>
+                <a:ext uri="{FF2B5EF4-FFF2-40B4-BE49-F238E27FC236}">
+                  <a16:creationId xmlns:a16="http://schemas.microsoft.com/office/drawing/2014/main" id="{F69F4D6B-A7AE-DFEC-1A3A-FE5CB17CF04F}"/>
+                </a:ext>
+              </a:extLst>
+            </p:cNvPr>
+            <p:cNvSpPr/>
+            <p:nvPr/>
+          </p:nvSpPr>
+          <p:spPr>
+            <a:xfrm>
+              <a:off x="5815348" y="3728214"/>
+              <a:ext cx="182880" cy="1371600"/>
+            </a:xfrm>
+            <a:prstGeom prst="rect">
+              <a:avLst/>
+            </a:prstGeom>
+          </p:spPr>
+          <p:style>
+            <a:lnRef idx="2">
+              <a:schemeClr val="accent1">
+                <a:shade val="50000"/>
+              </a:schemeClr>
+            </a:lnRef>
+            <a:fillRef idx="1">
+              <a:schemeClr val="accent1"/>
+            </a:fillRef>
+            <a:effectRef idx="0">
+              <a:schemeClr val="accent1"/>
+            </a:effectRef>
+            <a:fontRef idx="minor">
+              <a:schemeClr val="lt1"/>
+            </a:fontRef>
+          </p:style>
+          <p:txBody>
+            <a:bodyPr rtlCol="0" anchor="ctr"/>
+            <a:lstStyle/>
+            <a:p>
+              <a:pPr algn="ctr"/>
+              <a:endParaRPr lang="en-US" sz="450"/>
+            </a:p>
+          </p:txBody>
+        </p:sp>
+        <p:sp>
+          <p:nvSpPr>
+            <p:cNvPr id="13" name="Rectangle 12">
+              <a:extLst>
+                <a:ext uri="{FF2B5EF4-FFF2-40B4-BE49-F238E27FC236}">
+                  <a16:creationId xmlns:a16="http://schemas.microsoft.com/office/drawing/2014/main" id="{9C3FF3FF-CDCD-770E-2CEC-34A49B64356D}"/>
+                </a:ext>
+              </a:extLst>
+            </p:cNvPr>
+            <p:cNvSpPr/>
+            <p:nvPr/>
+          </p:nvSpPr>
+          <p:spPr>
+            <a:xfrm>
+              <a:off x="6259969" y="3728214"/>
+              <a:ext cx="182880" cy="1371600"/>
+            </a:xfrm>
+            <a:prstGeom prst="rect">
+              <a:avLst/>
+            </a:prstGeom>
+          </p:spPr>
+          <p:style>
+            <a:lnRef idx="2">
+              <a:schemeClr val="accent1">
+                <a:shade val="50000"/>
+              </a:schemeClr>
+            </a:lnRef>
+            <a:fillRef idx="1">
+              <a:schemeClr val="accent1"/>
+            </a:fillRef>
+            <a:effectRef idx="0">
+              <a:schemeClr val="accent1"/>
+            </a:effectRef>
+            <a:fontRef idx="minor">
+              <a:schemeClr val="lt1"/>
+            </a:fontRef>
+          </p:style>
+          <p:txBody>
+            <a:bodyPr rtlCol="0" anchor="ctr"/>
+            <a:lstStyle/>
+            <a:p>
+              <a:pPr algn="ctr"/>
+              <a:endParaRPr lang="en-US" sz="450"/>
+            </a:p>
+          </p:txBody>
+        </p:sp>
+        <p:sp>
+          <p:nvSpPr>
+            <p:cNvPr id="14" name="Down Arrow 152">
+              <a:extLst>
+                <a:ext uri="{FF2B5EF4-FFF2-40B4-BE49-F238E27FC236}">
+                  <a16:creationId xmlns:a16="http://schemas.microsoft.com/office/drawing/2014/main" id="{120B2B56-115F-7FEE-6720-F66E87DB0C31}"/>
+                </a:ext>
+              </a:extLst>
+            </p:cNvPr>
+            <p:cNvSpPr/>
+            <p:nvPr/>
+          </p:nvSpPr>
+          <p:spPr>
+            <a:xfrm flipV="1">
+              <a:off x="10160558" y="5220633"/>
+              <a:ext cx="204547" cy="390132"/>
+            </a:xfrm>
+            <a:prstGeom prst="downArrow">
+              <a:avLst/>
+            </a:prstGeom>
+            <a:solidFill>
+              <a:srgbClr val="00B050"/>
+            </a:solidFill>
+            <a:ln>
+              <a:solidFill>
+                <a:srgbClr val="00B050"/>
+              </a:solidFill>
+            </a:ln>
+          </p:spPr>
+          <p:style>
+            <a:lnRef idx="2">
+              <a:schemeClr val="accent1">
+                <a:shade val="50000"/>
+              </a:schemeClr>
+            </a:lnRef>
+            <a:fillRef idx="1">
+              <a:schemeClr val="accent1"/>
+            </a:fillRef>
+            <a:effectRef idx="0">
+              <a:schemeClr val="accent1"/>
+            </a:effectRef>
+            <a:fontRef idx="minor">
+              <a:schemeClr val="lt1"/>
+            </a:fontRef>
+          </p:style>
+          <p:txBody>
+            <a:bodyPr rtlCol="0" anchor="ctr"/>
+            <a:lstStyle/>
+            <a:p>
+              <a:pPr algn="ctr"/>
+              <a:endParaRPr lang="en-US" sz="450"/>
+            </a:p>
+          </p:txBody>
+        </p:sp>
+        <p:sp>
+          <p:nvSpPr>
+            <p:cNvPr id="15" name="TextBox 14">
+              <a:extLst>
+                <a:ext uri="{FF2B5EF4-FFF2-40B4-BE49-F238E27FC236}">
+                  <a16:creationId xmlns:a16="http://schemas.microsoft.com/office/drawing/2014/main" id="{855A838E-1C92-A2FC-5DF9-5BC5DE810D64}"/>
+                </a:ext>
+              </a:extLst>
+            </p:cNvPr>
+            <p:cNvSpPr txBox="1"/>
+            <p:nvPr/>
+          </p:nvSpPr>
+          <p:spPr>
+            <a:xfrm flipH="1">
+              <a:off x="11058764" y="5200407"/>
+              <a:ext cx="348172" cy="284693"/>
+            </a:xfrm>
+            <a:prstGeom prst="rect">
+              <a:avLst/>
+            </a:prstGeom>
+            <a:noFill/>
+          </p:spPr>
+          <p:txBody>
+            <a:bodyPr wrap="none" rtlCol="0">
+              <a:spAutoFit/>
+            </a:bodyPr>
+            <a:lstStyle/>
+            <a:p>
+              <a:r>
+                <a:rPr lang="en-US" sz="1250" dirty="0"/>
+                <a:t>64</a:t>
+              </a:r>
+            </a:p>
+          </p:txBody>
+        </p:sp>
+        <p:sp>
+          <p:nvSpPr>
+            <p:cNvPr id="16" name="Rectangle 15">
+              <a:extLst>
+                <a:ext uri="{FF2B5EF4-FFF2-40B4-BE49-F238E27FC236}">
+                  <a16:creationId xmlns:a16="http://schemas.microsoft.com/office/drawing/2014/main" id="{51176A9B-6176-1AF6-F574-9777F47F84FE}"/>
+                </a:ext>
+              </a:extLst>
+            </p:cNvPr>
+            <p:cNvSpPr/>
+            <p:nvPr/>
+          </p:nvSpPr>
+          <p:spPr>
+            <a:xfrm flipH="1">
+              <a:off x="11096292" y="3783376"/>
+              <a:ext cx="182880" cy="1371600"/>
+            </a:xfrm>
+            <a:prstGeom prst="rect">
+              <a:avLst/>
+            </a:prstGeom>
+          </p:spPr>
+          <p:style>
+            <a:lnRef idx="2">
+              <a:schemeClr val="accent1">
+                <a:shade val="50000"/>
+              </a:schemeClr>
+            </a:lnRef>
+            <a:fillRef idx="1">
+              <a:schemeClr val="accent1"/>
+            </a:fillRef>
+            <a:effectRef idx="0">
+              <a:schemeClr val="accent1"/>
+            </a:effectRef>
+            <a:fontRef idx="minor">
+              <a:schemeClr val="lt1"/>
+            </a:fontRef>
+          </p:style>
+          <p:txBody>
+            <a:bodyPr rtlCol="0" anchor="ctr"/>
+            <a:lstStyle/>
+            <a:p>
+              <a:pPr algn="ctr"/>
+              <a:endParaRPr lang="en-US" sz="450"/>
+            </a:p>
+          </p:txBody>
+        </p:sp>
+        <p:sp>
+          <p:nvSpPr>
+            <p:cNvPr id="17" name="Rectangle 16">
+              <a:extLst>
+                <a:ext uri="{FF2B5EF4-FFF2-40B4-BE49-F238E27FC236}">
+                  <a16:creationId xmlns:a16="http://schemas.microsoft.com/office/drawing/2014/main" id="{1E474EB4-CB24-5F06-DD3D-8F32AC93AC93}"/>
+                </a:ext>
+              </a:extLst>
+            </p:cNvPr>
+            <p:cNvSpPr/>
+            <p:nvPr/>
+          </p:nvSpPr>
+          <p:spPr>
+            <a:xfrm flipH="1">
+              <a:off x="10629994" y="3783376"/>
+              <a:ext cx="182880" cy="1371600"/>
+            </a:xfrm>
+            <a:prstGeom prst="rect">
+              <a:avLst/>
+            </a:prstGeom>
+          </p:spPr>
+          <p:style>
+            <a:lnRef idx="2">
+              <a:schemeClr val="accent1">
+                <a:shade val="50000"/>
+              </a:schemeClr>
+            </a:lnRef>
+            <a:fillRef idx="1">
+              <a:schemeClr val="accent1"/>
+            </a:fillRef>
+            <a:effectRef idx="0">
+              <a:schemeClr val="accent1"/>
+            </a:effectRef>
+            <a:fontRef idx="minor">
+              <a:schemeClr val="lt1"/>
+            </a:fontRef>
+          </p:style>
+          <p:txBody>
+            <a:bodyPr rtlCol="0" anchor="ctr"/>
+            <a:lstStyle/>
+            <a:p>
+              <a:pPr algn="ctr"/>
+              <a:endParaRPr lang="en-US" sz="450"/>
+            </a:p>
+          </p:txBody>
+        </p:sp>
+        <p:sp>
+          <p:nvSpPr>
+            <p:cNvPr id="63" name="Rectangle 62">
+              <a:extLst>
+                <a:ext uri="{FF2B5EF4-FFF2-40B4-BE49-F238E27FC236}">
+                  <a16:creationId xmlns:a16="http://schemas.microsoft.com/office/drawing/2014/main" id="{837CE6FA-DE9B-0DB8-0683-93F15CD1E26B}"/>
+                </a:ext>
+              </a:extLst>
+            </p:cNvPr>
+            <p:cNvSpPr/>
+            <p:nvPr/>
+          </p:nvSpPr>
+          <p:spPr>
+            <a:xfrm flipH="1">
+              <a:off x="10171434" y="3783376"/>
+              <a:ext cx="182796" cy="1371600"/>
+            </a:xfrm>
+            <a:prstGeom prst="rect">
+              <a:avLst/>
+            </a:prstGeom>
+          </p:spPr>
+          <p:style>
+            <a:lnRef idx="2">
+              <a:schemeClr val="accent1">
+                <a:shade val="50000"/>
+              </a:schemeClr>
+            </a:lnRef>
+            <a:fillRef idx="1">
+              <a:schemeClr val="accent1"/>
+            </a:fillRef>
+            <a:effectRef idx="0">
+              <a:schemeClr val="accent1"/>
+            </a:effectRef>
+            <a:fontRef idx="minor">
+              <a:schemeClr val="lt1"/>
+            </a:fontRef>
+          </p:style>
+          <p:txBody>
+            <a:bodyPr rtlCol="0" anchor="ctr"/>
+            <a:lstStyle/>
+            <a:p>
+              <a:pPr algn="ctr"/>
+              <a:endParaRPr lang="en-US" sz="450"/>
+            </a:p>
+          </p:txBody>
+        </p:sp>
+        <p:sp>
+          <p:nvSpPr>
+            <p:cNvPr id="64" name="Rectangle 63">
+              <a:extLst>
+                <a:ext uri="{FF2B5EF4-FFF2-40B4-BE49-F238E27FC236}">
+                  <a16:creationId xmlns:a16="http://schemas.microsoft.com/office/drawing/2014/main" id="{794AC600-0ACD-A874-352D-38F18713739B}"/>
+                </a:ext>
+              </a:extLst>
+            </p:cNvPr>
+            <p:cNvSpPr/>
+            <p:nvPr/>
+          </p:nvSpPr>
+          <p:spPr>
+            <a:xfrm flipH="1">
+              <a:off x="9988470" y="3783376"/>
+              <a:ext cx="182796" cy="1371600"/>
+            </a:xfrm>
+            <a:prstGeom prst="rect">
+              <a:avLst/>
+            </a:prstGeom>
+            <a:solidFill>
+              <a:schemeClr val="accent3"/>
+            </a:solidFill>
+            <a:ln>
+              <a:solidFill>
+                <a:schemeClr val="accent3"/>
+              </a:solidFill>
+            </a:ln>
+          </p:spPr>
+          <p:style>
+            <a:lnRef idx="2">
+              <a:schemeClr val="accent1">
+                <a:shade val="50000"/>
+              </a:schemeClr>
+            </a:lnRef>
+            <a:fillRef idx="1">
+              <a:schemeClr val="accent1"/>
+            </a:fillRef>
+            <a:effectRef idx="0">
+              <a:schemeClr val="accent1"/>
+            </a:effectRef>
+            <a:fontRef idx="minor">
+              <a:schemeClr val="lt1"/>
+            </a:fontRef>
+          </p:style>
+          <p:txBody>
+            <a:bodyPr rtlCol="0" anchor="ctr"/>
+            <a:lstStyle/>
+            <a:p>
+              <a:pPr algn="ctr"/>
+              <a:endParaRPr lang="en-US" sz="450"/>
+            </a:p>
+          </p:txBody>
+        </p:sp>
+        <p:sp>
+          <p:nvSpPr>
+            <p:cNvPr id="19" name="Right Arrow 161">
+              <a:extLst>
+                <a:ext uri="{FF2B5EF4-FFF2-40B4-BE49-F238E27FC236}">
+                  <a16:creationId xmlns:a16="http://schemas.microsoft.com/office/drawing/2014/main" id="{6AF49E00-D634-3F65-3D65-72C905BB4B63}"/>
+                </a:ext>
+              </a:extLst>
+            </p:cNvPr>
+            <p:cNvSpPr/>
+            <p:nvPr/>
+          </p:nvSpPr>
+          <p:spPr>
+            <a:xfrm>
+              <a:off x="6921246" y="4084122"/>
+              <a:ext cx="3015140" cy="589710"/>
+            </a:xfrm>
+            <a:prstGeom prst="rightArrow">
+              <a:avLst/>
+            </a:prstGeom>
+            <a:solidFill>
+              <a:schemeClr val="accent3"/>
+            </a:solidFill>
+            <a:ln>
+              <a:solidFill>
+                <a:schemeClr val="accent3"/>
+              </a:solidFill>
+            </a:ln>
+          </p:spPr>
+          <p:style>
+            <a:lnRef idx="2">
+              <a:schemeClr val="accent1">
+                <a:shade val="50000"/>
+              </a:schemeClr>
+            </a:lnRef>
+            <a:fillRef idx="1">
+              <a:schemeClr val="accent1"/>
+            </a:fillRef>
+            <a:effectRef idx="0">
+              <a:schemeClr val="accent1"/>
+            </a:effectRef>
+            <a:fontRef idx="minor">
+              <a:schemeClr val="lt1"/>
+            </a:fontRef>
+          </p:style>
+          <p:txBody>
+            <a:bodyPr rtlCol="0" anchor="ctr"/>
+            <a:lstStyle/>
+            <a:p>
+              <a:pPr algn="ctr"/>
+              <a:endParaRPr lang="en-US" sz="450"/>
+            </a:p>
+          </p:txBody>
+        </p:sp>
+        <p:sp>
+          <p:nvSpPr>
+            <p:cNvPr id="20" name="Down Arrow 163">
+              <a:extLst>
+                <a:ext uri="{FF2B5EF4-FFF2-40B4-BE49-F238E27FC236}">
+                  <a16:creationId xmlns:a16="http://schemas.microsoft.com/office/drawing/2014/main" id="{8AAFC1F2-AC7A-E649-811E-BC65A112853D}"/>
+                </a:ext>
+              </a:extLst>
+            </p:cNvPr>
+            <p:cNvSpPr/>
+            <p:nvPr/>
+          </p:nvSpPr>
+          <p:spPr>
+            <a:xfrm flipV="1">
+              <a:off x="11074625" y="3364685"/>
+              <a:ext cx="204547" cy="390132"/>
+            </a:xfrm>
+            <a:prstGeom prst="downArrow">
+              <a:avLst/>
+            </a:prstGeom>
+            <a:solidFill>
+              <a:srgbClr val="00B050"/>
+            </a:solidFill>
+            <a:ln>
+              <a:solidFill>
+                <a:srgbClr val="00B050"/>
+              </a:solidFill>
+            </a:ln>
+          </p:spPr>
+          <p:style>
+            <a:lnRef idx="2">
+              <a:schemeClr val="accent1">
+                <a:shade val="50000"/>
+              </a:schemeClr>
+            </a:lnRef>
+            <a:fillRef idx="1">
+              <a:schemeClr val="accent1"/>
+            </a:fillRef>
+            <a:effectRef idx="0">
+              <a:schemeClr val="accent1"/>
+            </a:effectRef>
+            <a:fontRef idx="minor">
+              <a:schemeClr val="lt1"/>
+            </a:fontRef>
+          </p:style>
+          <p:txBody>
+            <a:bodyPr rtlCol="0" anchor="ctr"/>
+            <a:lstStyle/>
+            <a:p>
+              <a:pPr algn="ctr"/>
+              <a:endParaRPr lang="en-US" sz="450"/>
+            </a:p>
+          </p:txBody>
+        </p:sp>
+        <p:sp>
+          <p:nvSpPr>
+            <p:cNvPr id="21" name="TextBox 20">
+              <a:extLst>
+                <a:ext uri="{FF2B5EF4-FFF2-40B4-BE49-F238E27FC236}">
+                  <a16:creationId xmlns:a16="http://schemas.microsoft.com/office/drawing/2014/main" id="{FAEF8418-AA15-E1FB-4FC9-E90373718F39}"/>
+                </a:ext>
+              </a:extLst>
+            </p:cNvPr>
+            <p:cNvSpPr txBox="1"/>
+            <p:nvPr/>
+          </p:nvSpPr>
+          <p:spPr>
+            <a:xfrm flipH="1">
+              <a:off x="11049225" y="1641372"/>
+              <a:ext cx="348172" cy="284693"/>
+            </a:xfrm>
+            <a:prstGeom prst="rect">
+              <a:avLst/>
+            </a:prstGeom>
+            <a:noFill/>
+          </p:spPr>
+          <p:txBody>
+            <a:bodyPr wrap="none" rtlCol="0">
+              <a:spAutoFit/>
+            </a:bodyPr>
+            <a:lstStyle/>
+            <a:p>
+              <a:r>
+                <a:rPr lang="en-US" sz="1250" dirty="0"/>
+                <a:t>32</a:t>
+              </a:r>
+            </a:p>
+          </p:txBody>
+        </p:sp>
+        <p:sp>
+          <p:nvSpPr>
+            <p:cNvPr id="22" name="Right Arrow 166">
+              <a:extLst>
+                <a:ext uri="{FF2B5EF4-FFF2-40B4-BE49-F238E27FC236}">
+                  <a16:creationId xmlns:a16="http://schemas.microsoft.com/office/drawing/2014/main" id="{D75B392C-5917-6A1F-7451-FA652A965CBE}"/>
+                </a:ext>
+              </a:extLst>
+            </p:cNvPr>
+            <p:cNvSpPr/>
+            <p:nvPr/>
+          </p:nvSpPr>
+          <p:spPr>
+            <a:xfrm>
+              <a:off x="11300017" y="2431761"/>
+              <a:ext cx="194187" cy="242316"/>
+            </a:xfrm>
+            <a:prstGeom prst="rightArrow">
+              <a:avLst/>
+            </a:prstGeom>
+            <a:solidFill>
+              <a:srgbClr val="002060"/>
+            </a:solidFill>
+            <a:ln>
+              <a:solidFill>
+                <a:srgbClr val="002060"/>
+              </a:solidFill>
+            </a:ln>
+          </p:spPr>
+          <p:style>
+            <a:lnRef idx="2">
+              <a:schemeClr val="accent1">
+                <a:shade val="50000"/>
+              </a:schemeClr>
+            </a:lnRef>
+            <a:fillRef idx="1">
+              <a:schemeClr val="accent1"/>
+            </a:fillRef>
+            <a:effectRef idx="0">
+              <a:schemeClr val="accent1"/>
+            </a:effectRef>
+            <a:fontRef idx="minor">
+              <a:schemeClr val="lt1"/>
+            </a:fontRef>
+          </p:style>
+          <p:txBody>
+            <a:bodyPr rtlCol="0" anchor="ctr"/>
+            <a:lstStyle/>
+            <a:p>
+              <a:pPr algn="ctr"/>
+              <a:endParaRPr lang="en-US" sz="450"/>
+            </a:p>
+          </p:txBody>
+        </p:sp>
+        <p:sp>
+          <p:nvSpPr>
+            <p:cNvPr id="23" name="Rectangle 22">
+              <a:extLst>
+                <a:ext uri="{FF2B5EF4-FFF2-40B4-BE49-F238E27FC236}">
+                  <a16:creationId xmlns:a16="http://schemas.microsoft.com/office/drawing/2014/main" id="{226BC909-7A40-FE12-05D5-F6EDBB595F81}"/>
+                </a:ext>
+              </a:extLst>
+            </p:cNvPr>
+            <p:cNvSpPr/>
+            <p:nvPr/>
+          </p:nvSpPr>
+          <p:spPr>
+            <a:xfrm flipH="1">
+              <a:off x="11531388" y="1867119"/>
+              <a:ext cx="91440" cy="1371600"/>
+            </a:xfrm>
+            <a:prstGeom prst="rect">
+              <a:avLst/>
+            </a:prstGeom>
+          </p:spPr>
+          <p:style>
+            <a:lnRef idx="2">
+              <a:schemeClr val="accent1">
+                <a:shade val="50000"/>
+              </a:schemeClr>
+            </a:lnRef>
+            <a:fillRef idx="1">
+              <a:schemeClr val="accent1"/>
+            </a:fillRef>
+            <a:effectRef idx="0">
+              <a:schemeClr val="accent1"/>
+            </a:effectRef>
+            <a:fontRef idx="minor">
+              <a:schemeClr val="lt1"/>
+            </a:fontRef>
+          </p:style>
+          <p:txBody>
+            <a:bodyPr rtlCol="0" anchor="ctr"/>
+            <a:lstStyle/>
+            <a:p>
+              <a:pPr algn="ctr"/>
+              <a:endParaRPr lang="en-US" sz="450"/>
+            </a:p>
+          </p:txBody>
+        </p:sp>
+        <p:sp>
+          <p:nvSpPr>
+            <p:cNvPr id="61" name="Rectangle 60">
+              <a:extLst>
+                <a:ext uri="{FF2B5EF4-FFF2-40B4-BE49-F238E27FC236}">
+                  <a16:creationId xmlns:a16="http://schemas.microsoft.com/office/drawing/2014/main" id="{38450608-A093-73C9-F304-DE61DD1AB0B4}"/>
+                </a:ext>
+              </a:extLst>
+            </p:cNvPr>
+            <p:cNvSpPr/>
+            <p:nvPr/>
+          </p:nvSpPr>
+          <p:spPr>
+            <a:xfrm flipH="1">
+              <a:off x="11171435" y="1867119"/>
+              <a:ext cx="91398" cy="1371600"/>
+            </a:xfrm>
+            <a:prstGeom prst="rect">
+              <a:avLst/>
+            </a:prstGeom>
+          </p:spPr>
+          <p:style>
+            <a:lnRef idx="2">
+              <a:schemeClr val="accent1">
+                <a:shade val="50000"/>
+              </a:schemeClr>
+            </a:lnRef>
+            <a:fillRef idx="1">
+              <a:schemeClr val="accent1"/>
+            </a:fillRef>
+            <a:effectRef idx="0">
+              <a:schemeClr val="accent1"/>
+            </a:effectRef>
+            <a:fontRef idx="minor">
+              <a:schemeClr val="lt1"/>
+            </a:fontRef>
+          </p:style>
+          <p:txBody>
+            <a:bodyPr rtlCol="0" anchor="ctr"/>
+            <a:lstStyle/>
+            <a:p>
+              <a:pPr algn="ctr"/>
+              <a:endParaRPr lang="en-US" sz="450"/>
+            </a:p>
+          </p:txBody>
+        </p:sp>
+        <p:sp>
+          <p:nvSpPr>
+            <p:cNvPr id="62" name="Rectangle 61">
+              <a:extLst>
+                <a:ext uri="{FF2B5EF4-FFF2-40B4-BE49-F238E27FC236}">
+                  <a16:creationId xmlns:a16="http://schemas.microsoft.com/office/drawing/2014/main" id="{FE324750-AFA7-5064-26DD-FE87142BE517}"/>
+                </a:ext>
+              </a:extLst>
+            </p:cNvPr>
+            <p:cNvSpPr/>
+            <p:nvPr/>
+          </p:nvSpPr>
+          <p:spPr>
+            <a:xfrm flipH="1">
+              <a:off x="11079953" y="1867119"/>
+              <a:ext cx="91398" cy="1371600"/>
+            </a:xfrm>
+            <a:prstGeom prst="rect">
+              <a:avLst/>
+            </a:prstGeom>
+            <a:solidFill>
+              <a:schemeClr val="accent3"/>
+            </a:solidFill>
+            <a:ln>
+              <a:solidFill>
+                <a:schemeClr val="accent3"/>
+              </a:solidFill>
+            </a:ln>
+          </p:spPr>
+          <p:style>
+            <a:lnRef idx="2">
+              <a:schemeClr val="accent1">
+                <a:shade val="50000"/>
+              </a:schemeClr>
+            </a:lnRef>
+            <a:fillRef idx="1">
+              <a:schemeClr val="accent1"/>
+            </a:fillRef>
+            <a:effectRef idx="0">
+              <a:schemeClr val="accent1"/>
+            </a:effectRef>
+            <a:fontRef idx="minor">
+              <a:schemeClr val="lt1"/>
+            </a:fontRef>
+          </p:style>
+          <p:txBody>
+            <a:bodyPr rtlCol="0" anchor="ctr"/>
+            <a:lstStyle/>
+            <a:p>
+              <a:pPr algn="ctr"/>
+              <a:endParaRPr lang="en-US" sz="450"/>
+            </a:p>
+          </p:txBody>
+        </p:sp>
+        <p:sp>
+          <p:nvSpPr>
+            <p:cNvPr id="25" name="TextBox 24">
+              <a:extLst>
+                <a:ext uri="{FF2B5EF4-FFF2-40B4-BE49-F238E27FC236}">
+                  <a16:creationId xmlns:a16="http://schemas.microsoft.com/office/drawing/2014/main" id="{11025BB1-8458-E059-328C-20388B454759}"/>
+                </a:ext>
+              </a:extLst>
+            </p:cNvPr>
+            <p:cNvSpPr txBox="1"/>
+            <p:nvPr/>
+          </p:nvSpPr>
+          <p:spPr>
+            <a:xfrm flipH="1">
+              <a:off x="11413231" y="1641372"/>
+              <a:ext cx="348172" cy="284693"/>
+            </a:xfrm>
+            <a:prstGeom prst="rect">
+              <a:avLst/>
+            </a:prstGeom>
+            <a:noFill/>
+          </p:spPr>
+          <p:txBody>
+            <a:bodyPr wrap="none" rtlCol="0">
+              <a:spAutoFit/>
+            </a:bodyPr>
+            <a:lstStyle/>
+            <a:p>
+              <a:r>
+                <a:rPr lang="en-US" sz="1250" dirty="0"/>
+                <a:t>32</a:t>
+              </a:r>
+            </a:p>
+          </p:txBody>
+        </p:sp>
+        <p:sp>
+          <p:nvSpPr>
+            <p:cNvPr id="26" name="Right Arrow 173">
+              <a:extLst>
+                <a:ext uri="{FF2B5EF4-FFF2-40B4-BE49-F238E27FC236}">
+                  <a16:creationId xmlns:a16="http://schemas.microsoft.com/office/drawing/2014/main" id="{7CD3C7D0-8FD5-2F98-D4D7-65D9624F0F5F}"/>
+                </a:ext>
+              </a:extLst>
+            </p:cNvPr>
+            <p:cNvSpPr/>
+            <p:nvPr/>
+          </p:nvSpPr>
+          <p:spPr>
+            <a:xfrm>
+              <a:off x="11666044" y="2431761"/>
+              <a:ext cx="194187" cy="242316"/>
+            </a:xfrm>
+            <a:prstGeom prst="rightArrow">
+              <a:avLst/>
+            </a:prstGeom>
+            <a:solidFill>
+              <a:srgbClr val="00B0F0"/>
+            </a:solidFill>
+            <a:ln>
+              <a:solidFill>
+                <a:srgbClr val="00B0F0"/>
+              </a:solidFill>
+            </a:ln>
+          </p:spPr>
+          <p:style>
+            <a:lnRef idx="2">
+              <a:schemeClr val="accent1">
+                <a:shade val="50000"/>
+              </a:schemeClr>
+            </a:lnRef>
+            <a:fillRef idx="1">
+              <a:schemeClr val="accent1"/>
+            </a:fillRef>
+            <a:effectRef idx="0">
+              <a:schemeClr val="accent1"/>
+            </a:effectRef>
+            <a:fontRef idx="minor">
+              <a:schemeClr val="lt1"/>
+            </a:fontRef>
+          </p:style>
+          <p:txBody>
+            <a:bodyPr rtlCol="0" anchor="ctr"/>
+            <a:lstStyle/>
+            <a:p>
+              <a:pPr algn="ctr"/>
+              <a:endParaRPr lang="en-US" sz="450"/>
+            </a:p>
+          </p:txBody>
+        </p:sp>
+        <p:sp>
+          <p:nvSpPr>
+            <p:cNvPr id="27" name="Rectangle 26">
+              <a:extLst>
+                <a:ext uri="{FF2B5EF4-FFF2-40B4-BE49-F238E27FC236}">
+                  <a16:creationId xmlns:a16="http://schemas.microsoft.com/office/drawing/2014/main" id="{3992B1B6-AEB7-085E-ABD1-8D561994596D}"/>
+                </a:ext>
+              </a:extLst>
+            </p:cNvPr>
+            <p:cNvSpPr/>
+            <p:nvPr/>
+          </p:nvSpPr>
+          <p:spPr>
+            <a:xfrm flipH="1">
+              <a:off x="11897415" y="1867119"/>
+              <a:ext cx="45720" cy="1371600"/>
+            </a:xfrm>
+            <a:prstGeom prst="rect">
+              <a:avLst/>
+            </a:prstGeom>
+            <a:solidFill>
+              <a:srgbClr val="00B0F0"/>
+            </a:solidFill>
+          </p:spPr>
+          <p:style>
+            <a:lnRef idx="2">
+              <a:schemeClr val="accent1">
+                <a:shade val="50000"/>
+              </a:schemeClr>
+            </a:lnRef>
+            <a:fillRef idx="1">
+              <a:schemeClr val="accent1"/>
+            </a:fillRef>
+            <a:effectRef idx="0">
+              <a:schemeClr val="accent1"/>
+            </a:effectRef>
+            <a:fontRef idx="minor">
+              <a:schemeClr val="lt1"/>
+            </a:fontRef>
+          </p:style>
+          <p:txBody>
+            <a:bodyPr rtlCol="0" anchor="ctr"/>
+            <a:lstStyle/>
+            <a:p>
+              <a:pPr algn="ctr"/>
+              <a:endParaRPr lang="en-US" sz="450"/>
+            </a:p>
+          </p:txBody>
+        </p:sp>
+        <p:sp>
+          <p:nvSpPr>
+            <p:cNvPr id="28" name="TextBox 27">
+              <a:extLst>
+                <a:ext uri="{FF2B5EF4-FFF2-40B4-BE49-F238E27FC236}">
+                  <a16:creationId xmlns:a16="http://schemas.microsoft.com/office/drawing/2014/main" id="{15888C3B-72D7-514D-79C8-679F00A8CD89}"/>
+                </a:ext>
+              </a:extLst>
+            </p:cNvPr>
+            <p:cNvSpPr txBox="1"/>
+            <p:nvPr/>
+          </p:nvSpPr>
+          <p:spPr>
+            <a:xfrm flipH="1">
+              <a:off x="11811392" y="1641372"/>
+              <a:ext cx="266420" cy="284693"/>
+            </a:xfrm>
+            <a:prstGeom prst="rect">
+              <a:avLst/>
+            </a:prstGeom>
+            <a:noFill/>
+          </p:spPr>
+          <p:txBody>
+            <a:bodyPr wrap="none" rtlCol="0">
+              <a:spAutoFit/>
+            </a:bodyPr>
+            <a:lstStyle/>
+            <a:p>
+              <a:r>
+                <a:rPr lang="en-US" sz="1250" dirty="0"/>
+                <a:t>2</a:t>
+              </a:r>
+            </a:p>
+          </p:txBody>
+        </p:sp>
+        <p:sp>
+          <p:nvSpPr>
+            <p:cNvPr id="29" name="Right Arrow 176">
+              <a:extLst>
+                <a:ext uri="{FF2B5EF4-FFF2-40B4-BE49-F238E27FC236}">
+                  <a16:creationId xmlns:a16="http://schemas.microsoft.com/office/drawing/2014/main" id="{A8BE20CE-0E5A-8CF0-C9F3-16D7E1F06393}"/>
+                </a:ext>
+              </a:extLst>
+            </p:cNvPr>
+            <p:cNvSpPr/>
+            <p:nvPr/>
+          </p:nvSpPr>
+          <p:spPr>
+            <a:xfrm>
+              <a:off x="5731095" y="2109957"/>
+              <a:ext cx="5264543" cy="671762"/>
+            </a:xfrm>
+            <a:prstGeom prst="rightArrow">
+              <a:avLst/>
+            </a:prstGeom>
+            <a:solidFill>
+              <a:schemeClr val="accent3"/>
+            </a:solidFill>
+            <a:ln>
+              <a:solidFill>
+                <a:schemeClr val="accent3"/>
+              </a:solidFill>
+            </a:ln>
+          </p:spPr>
+          <p:style>
+            <a:lnRef idx="2">
+              <a:schemeClr val="accent1">
+                <a:shade val="50000"/>
+              </a:schemeClr>
+            </a:lnRef>
+            <a:fillRef idx="1">
+              <a:schemeClr val="accent1"/>
+            </a:fillRef>
+            <a:effectRef idx="0">
+              <a:schemeClr val="accent1"/>
+            </a:effectRef>
+            <a:fontRef idx="minor">
+              <a:schemeClr val="lt1"/>
+            </a:fontRef>
+          </p:style>
+          <p:txBody>
+            <a:bodyPr rtlCol="0" anchor="ctr"/>
+            <a:lstStyle/>
+            <a:p>
+              <a:pPr algn="ctr"/>
+              <a:endParaRPr lang="en-US" sz="450"/>
+            </a:p>
+          </p:txBody>
+        </p:sp>
+        <p:sp>
+          <p:nvSpPr>
+            <p:cNvPr id="50" name="Right Arrow 197">
+              <a:extLst>
+                <a:ext uri="{FF2B5EF4-FFF2-40B4-BE49-F238E27FC236}">
+                  <a16:creationId xmlns:a16="http://schemas.microsoft.com/office/drawing/2014/main" id="{F9F2E859-0066-2326-89F0-1D754D0E8473}"/>
+                </a:ext>
+              </a:extLst>
+            </p:cNvPr>
+            <p:cNvSpPr/>
+            <p:nvPr/>
+          </p:nvSpPr>
+          <p:spPr>
+            <a:xfrm>
+              <a:off x="11764380" y="3991802"/>
+              <a:ext cx="517495" cy="274298"/>
+            </a:xfrm>
+            <a:prstGeom prst="rightArrow">
+              <a:avLst/>
+            </a:prstGeom>
+            <a:solidFill>
+              <a:schemeClr val="accent3"/>
+            </a:solidFill>
+            <a:ln>
+              <a:solidFill>
+                <a:schemeClr val="accent3"/>
+              </a:solidFill>
+            </a:ln>
+          </p:spPr>
+          <p:style>
+            <a:lnRef idx="2">
+              <a:schemeClr val="accent1">
+                <a:shade val="50000"/>
+              </a:schemeClr>
+            </a:lnRef>
+            <a:fillRef idx="1">
+              <a:schemeClr val="accent1"/>
+            </a:fillRef>
+            <a:effectRef idx="0">
+              <a:schemeClr val="accent1"/>
+            </a:effectRef>
+            <a:fontRef idx="minor">
+              <a:schemeClr val="lt1"/>
+            </a:fontRef>
+          </p:style>
+          <p:txBody>
+            <a:bodyPr rtlCol="0" anchor="ctr"/>
+            <a:lstStyle/>
+            <a:p>
+              <a:pPr algn="ctr"/>
+              <a:endParaRPr lang="en-US" sz="450"/>
+            </a:p>
+          </p:txBody>
+        </p:sp>
+        <p:sp>
+          <p:nvSpPr>
+            <p:cNvPr id="51" name="Down Arrow 198">
+              <a:extLst>
+                <a:ext uri="{FF2B5EF4-FFF2-40B4-BE49-F238E27FC236}">
+                  <a16:creationId xmlns:a16="http://schemas.microsoft.com/office/drawing/2014/main" id="{690DEED1-516B-EDB9-90F3-AF9DC96F66BA}"/>
+                </a:ext>
+              </a:extLst>
+            </p:cNvPr>
+            <p:cNvSpPr/>
+            <p:nvPr/>
+          </p:nvSpPr>
+          <p:spPr>
+            <a:xfrm flipV="1">
+              <a:off x="11931786" y="4361378"/>
+              <a:ext cx="204547" cy="390132"/>
+            </a:xfrm>
+            <a:prstGeom prst="downArrow">
+              <a:avLst/>
+            </a:prstGeom>
+            <a:solidFill>
+              <a:srgbClr val="00B050"/>
+            </a:solidFill>
+            <a:ln>
+              <a:solidFill>
+                <a:srgbClr val="00B050"/>
+              </a:solidFill>
+            </a:ln>
+          </p:spPr>
+          <p:style>
+            <a:lnRef idx="2">
+              <a:schemeClr val="accent1">
+                <a:shade val="50000"/>
+              </a:schemeClr>
+            </a:lnRef>
+            <a:fillRef idx="1">
+              <a:schemeClr val="accent1"/>
+            </a:fillRef>
+            <a:effectRef idx="0">
+              <a:schemeClr val="accent1"/>
+            </a:effectRef>
+            <a:fontRef idx="minor">
+              <a:schemeClr val="lt1"/>
+            </a:fontRef>
+          </p:style>
+          <p:txBody>
+            <a:bodyPr rtlCol="0" anchor="ctr"/>
+            <a:lstStyle/>
+            <a:p>
+              <a:pPr algn="ctr"/>
+              <a:endParaRPr lang="en-US" sz="450"/>
+            </a:p>
+          </p:txBody>
+        </p:sp>
+        <p:sp>
+          <p:nvSpPr>
+            <p:cNvPr id="52" name="Down Arrow 199">
+              <a:extLst>
+                <a:ext uri="{FF2B5EF4-FFF2-40B4-BE49-F238E27FC236}">
+                  <a16:creationId xmlns:a16="http://schemas.microsoft.com/office/drawing/2014/main" id="{8F12646C-9D7A-75A9-CAF5-9B2FE6BE2341}"/>
+                </a:ext>
+              </a:extLst>
+            </p:cNvPr>
+            <p:cNvSpPr/>
+            <p:nvPr/>
+          </p:nvSpPr>
+          <p:spPr>
+            <a:xfrm>
+              <a:off x="11931786" y="4842807"/>
+              <a:ext cx="204547" cy="390132"/>
+            </a:xfrm>
+            <a:prstGeom prst="downArrow">
+              <a:avLst/>
+            </a:prstGeom>
+            <a:solidFill>
+              <a:srgbClr val="C00000"/>
+            </a:solidFill>
+            <a:ln>
+              <a:solidFill>
+                <a:srgbClr val="C00000"/>
+              </a:solidFill>
+            </a:ln>
+          </p:spPr>
+          <p:style>
+            <a:lnRef idx="2">
+              <a:schemeClr val="accent1">
+                <a:shade val="50000"/>
+              </a:schemeClr>
+            </a:lnRef>
+            <a:fillRef idx="1">
+              <a:schemeClr val="accent1"/>
+            </a:fillRef>
+            <a:effectRef idx="0">
+              <a:schemeClr val="accent1"/>
+            </a:effectRef>
+            <a:fontRef idx="minor">
+              <a:schemeClr val="lt1"/>
+            </a:fontRef>
+          </p:style>
+          <p:txBody>
+            <a:bodyPr rtlCol="0" anchor="ctr"/>
+            <a:lstStyle/>
+            <a:p>
+              <a:pPr algn="ctr"/>
+              <a:endParaRPr lang="en-US" sz="450"/>
+            </a:p>
+          </p:txBody>
+        </p:sp>
+        <p:sp>
+          <p:nvSpPr>
+            <p:cNvPr id="53" name="Right Arrow 200">
+              <a:extLst>
+                <a:ext uri="{FF2B5EF4-FFF2-40B4-BE49-F238E27FC236}">
+                  <a16:creationId xmlns:a16="http://schemas.microsoft.com/office/drawing/2014/main" id="{9CA8FBA7-E4F6-ACB5-15DE-8D99A115B0A3}"/>
+                </a:ext>
+              </a:extLst>
+            </p:cNvPr>
+            <p:cNvSpPr/>
+            <p:nvPr/>
+          </p:nvSpPr>
+          <p:spPr>
+            <a:xfrm>
+              <a:off x="11827916" y="5266837"/>
+              <a:ext cx="501613" cy="296405"/>
+            </a:xfrm>
+            <a:prstGeom prst="rightArrow">
+              <a:avLst/>
+            </a:prstGeom>
+            <a:solidFill>
+              <a:srgbClr val="002060"/>
+            </a:solidFill>
+            <a:ln>
+              <a:solidFill>
+                <a:srgbClr val="002060"/>
+              </a:solidFill>
+            </a:ln>
+          </p:spPr>
+          <p:style>
+            <a:lnRef idx="2">
+              <a:schemeClr val="accent1">
+                <a:shade val="50000"/>
+              </a:schemeClr>
+            </a:lnRef>
+            <a:fillRef idx="1">
+              <a:schemeClr val="accent1"/>
+            </a:fillRef>
+            <a:effectRef idx="0">
+              <a:schemeClr val="accent1"/>
+            </a:effectRef>
+            <a:fontRef idx="minor">
+              <a:schemeClr val="lt1"/>
+            </a:fontRef>
+          </p:style>
+          <p:txBody>
+            <a:bodyPr rtlCol="0" anchor="ctr"/>
+            <a:lstStyle/>
+            <a:p>
+              <a:pPr algn="ctr"/>
+              <a:endParaRPr lang="en-US" sz="450"/>
+            </a:p>
+          </p:txBody>
+        </p:sp>
+        <p:sp>
+          <p:nvSpPr>
+            <p:cNvPr id="54" name="Right Arrow 201">
+              <a:extLst>
+                <a:ext uri="{FF2B5EF4-FFF2-40B4-BE49-F238E27FC236}">
+                  <a16:creationId xmlns:a16="http://schemas.microsoft.com/office/drawing/2014/main" id="{F3A36ABB-0E50-C492-253D-4243C6EF0344}"/>
+                </a:ext>
+              </a:extLst>
+            </p:cNvPr>
+            <p:cNvSpPr/>
+            <p:nvPr/>
+          </p:nvSpPr>
+          <p:spPr>
+            <a:xfrm>
+              <a:off x="11841495" y="5680397"/>
+              <a:ext cx="501613" cy="296405"/>
+            </a:xfrm>
+            <a:prstGeom prst="rightArrow">
+              <a:avLst/>
+            </a:prstGeom>
+            <a:solidFill>
+              <a:srgbClr val="00B0F0"/>
+            </a:solidFill>
+            <a:ln>
+              <a:solidFill>
+                <a:srgbClr val="00B0F0"/>
+              </a:solidFill>
+            </a:ln>
+          </p:spPr>
+          <p:style>
+            <a:lnRef idx="2">
+              <a:schemeClr val="accent1">
+                <a:shade val="50000"/>
+              </a:schemeClr>
+            </a:lnRef>
+            <a:fillRef idx="1">
+              <a:schemeClr val="accent1"/>
+            </a:fillRef>
+            <a:effectRef idx="0">
+              <a:schemeClr val="accent1"/>
+            </a:effectRef>
+            <a:fontRef idx="minor">
+              <a:schemeClr val="lt1"/>
+            </a:fontRef>
+          </p:style>
+          <p:txBody>
+            <a:bodyPr rtlCol="0" anchor="ctr"/>
+            <a:lstStyle/>
+            <a:p>
+              <a:pPr algn="ctr"/>
+              <a:endParaRPr lang="en-US" sz="450"/>
+            </a:p>
+          </p:txBody>
+        </p:sp>
+        <p:sp>
+          <p:nvSpPr>
+            <p:cNvPr id="55" name="TextBox 54">
+              <a:extLst>
+                <a:ext uri="{FF2B5EF4-FFF2-40B4-BE49-F238E27FC236}">
+                  <a16:creationId xmlns:a16="http://schemas.microsoft.com/office/drawing/2014/main" id="{C0ED9D0A-ABAE-9C47-8DF8-7A506BF84A74}"/>
+                </a:ext>
+              </a:extLst>
+            </p:cNvPr>
+            <p:cNvSpPr txBox="1"/>
+            <p:nvPr/>
+          </p:nvSpPr>
+          <p:spPr>
+            <a:xfrm>
+              <a:off x="12372308" y="3941111"/>
+              <a:ext cx="1758815" cy="400110"/>
+            </a:xfrm>
+            <a:prstGeom prst="rect">
+              <a:avLst/>
+            </a:prstGeom>
+            <a:noFill/>
+          </p:spPr>
+          <p:txBody>
+            <a:bodyPr wrap="none" rtlCol="0">
+              <a:spAutoFit/>
+            </a:bodyPr>
+            <a:lstStyle/>
+            <a:p>
+              <a:r>
+                <a:rPr lang="en-US" sz="2000" dirty="0"/>
+                <a:t>Concatenation</a:t>
+              </a:r>
+            </a:p>
+          </p:txBody>
+        </p:sp>
+        <p:sp>
+          <p:nvSpPr>
+            <p:cNvPr id="56" name="TextBox 55">
+              <a:extLst>
+                <a:ext uri="{FF2B5EF4-FFF2-40B4-BE49-F238E27FC236}">
+                  <a16:creationId xmlns:a16="http://schemas.microsoft.com/office/drawing/2014/main" id="{E83E74C5-C261-461A-A18D-88AE2E319F06}"/>
+                </a:ext>
+              </a:extLst>
+            </p:cNvPr>
+            <p:cNvSpPr txBox="1"/>
+            <p:nvPr/>
+          </p:nvSpPr>
+          <p:spPr>
+            <a:xfrm>
+              <a:off x="12418829" y="4384107"/>
+              <a:ext cx="1810367" cy="400110"/>
+            </a:xfrm>
+            <a:prstGeom prst="rect">
+              <a:avLst/>
+            </a:prstGeom>
+            <a:noFill/>
+          </p:spPr>
+          <p:txBody>
+            <a:bodyPr wrap="none" rtlCol="0">
+              <a:spAutoFit/>
+            </a:bodyPr>
+            <a:lstStyle/>
+            <a:p>
+              <a:r>
+                <a:rPr lang="en-US" sz="2000" dirty="0"/>
+                <a:t>Transpose Conv</a:t>
+              </a:r>
+            </a:p>
+          </p:txBody>
+        </p:sp>
+        <p:sp>
+          <p:nvSpPr>
+            <p:cNvPr id="57" name="TextBox 56">
+              <a:extLst>
+                <a:ext uri="{FF2B5EF4-FFF2-40B4-BE49-F238E27FC236}">
+                  <a16:creationId xmlns:a16="http://schemas.microsoft.com/office/drawing/2014/main" id="{D4D14DA5-61EC-0506-3027-7A37EE1108DA}"/>
+                </a:ext>
+              </a:extLst>
+            </p:cNvPr>
+            <p:cNvSpPr txBox="1"/>
+            <p:nvPr/>
+          </p:nvSpPr>
+          <p:spPr>
+            <a:xfrm>
+              <a:off x="12422278" y="4827104"/>
+              <a:ext cx="1510926" cy="400110"/>
+            </a:xfrm>
+            <a:prstGeom prst="rect">
+              <a:avLst/>
+            </a:prstGeom>
+            <a:noFill/>
+          </p:spPr>
+          <p:txBody>
+            <a:bodyPr wrap="none" rtlCol="0">
+              <a:spAutoFit/>
+            </a:bodyPr>
+            <a:lstStyle/>
+            <a:p>
+              <a:r>
+                <a:rPr lang="en-US" sz="2000" dirty="0" err="1"/>
+                <a:t>Strided</a:t>
+              </a:r>
+              <a:r>
+                <a:rPr lang="en-US" sz="2000" dirty="0"/>
+                <a:t> </a:t>
+              </a:r>
+              <a:r>
+                <a:rPr lang="en-US" sz="2000" dirty="0" err="1"/>
+                <a:t>Conv</a:t>
+              </a:r>
+              <a:endParaRPr lang="en-US" sz="2000" dirty="0"/>
+            </a:p>
+          </p:txBody>
+        </p:sp>
+        <p:sp>
+          <p:nvSpPr>
+            <p:cNvPr id="58" name="TextBox 57">
+              <a:extLst>
+                <a:ext uri="{FF2B5EF4-FFF2-40B4-BE49-F238E27FC236}">
+                  <a16:creationId xmlns:a16="http://schemas.microsoft.com/office/drawing/2014/main" id="{9F4BE996-3DDC-2437-8A58-EBA119C1A063}"/>
+                </a:ext>
+              </a:extLst>
+            </p:cNvPr>
+            <p:cNvSpPr txBox="1"/>
+            <p:nvPr/>
+          </p:nvSpPr>
+          <p:spPr>
+            <a:xfrm>
+              <a:off x="12424202" y="5230703"/>
+              <a:ext cx="1781450" cy="400110"/>
+            </a:xfrm>
+            <a:prstGeom prst="rect">
+              <a:avLst/>
+            </a:prstGeom>
+            <a:noFill/>
+          </p:spPr>
+          <p:txBody>
+            <a:bodyPr wrap="none" rtlCol="0">
+              <a:spAutoFit/>
+            </a:bodyPr>
+            <a:lstStyle/>
+            <a:p>
+              <a:r>
+                <a:rPr lang="en-US" sz="2000" dirty="0"/>
+                <a:t>Conv 3x3, </a:t>
+              </a:r>
+              <a:r>
+                <a:rPr lang="en-US" sz="2000" dirty="0" err="1"/>
+                <a:t>ReLU</a:t>
+              </a:r>
+              <a:endParaRPr lang="en-US" sz="2000" dirty="0"/>
+            </a:p>
+          </p:txBody>
+        </p:sp>
+        <p:sp>
+          <p:nvSpPr>
+            <p:cNvPr id="59" name="TextBox 58">
+              <a:extLst>
+                <a:ext uri="{FF2B5EF4-FFF2-40B4-BE49-F238E27FC236}">
+                  <a16:creationId xmlns:a16="http://schemas.microsoft.com/office/drawing/2014/main" id="{08F8FE58-9F0B-2D77-6A8B-33189D1F6621}"/>
+                </a:ext>
+              </a:extLst>
+            </p:cNvPr>
+            <p:cNvSpPr txBox="1"/>
+            <p:nvPr/>
+          </p:nvSpPr>
+          <p:spPr>
+            <a:xfrm>
+              <a:off x="12424926" y="5651271"/>
+              <a:ext cx="1781450" cy="400110"/>
+            </a:xfrm>
+            <a:prstGeom prst="rect">
+              <a:avLst/>
+            </a:prstGeom>
+            <a:noFill/>
+          </p:spPr>
+          <p:txBody>
+            <a:bodyPr wrap="none" rtlCol="0">
+              <a:spAutoFit/>
+            </a:bodyPr>
+            <a:lstStyle/>
+            <a:p>
+              <a:r>
+                <a:rPr lang="en-US" sz="2000" dirty="0"/>
+                <a:t>Conv 1x1, </a:t>
+              </a:r>
+              <a:r>
+                <a:rPr lang="en-US" sz="2000" dirty="0" err="1"/>
+                <a:t>ReLU</a:t>
+              </a:r>
+              <a:endParaRPr lang="en-US" sz="2000" dirty="0"/>
+            </a:p>
+          </p:txBody>
+        </p:sp>
+        <p:sp>
+          <p:nvSpPr>
+            <p:cNvPr id="60" name="Rectangle 59">
+              <a:extLst>
+                <a:ext uri="{FF2B5EF4-FFF2-40B4-BE49-F238E27FC236}">
+                  <a16:creationId xmlns:a16="http://schemas.microsoft.com/office/drawing/2014/main" id="{439115F1-BF63-DBB0-0529-302590E32997}"/>
+                </a:ext>
+              </a:extLst>
+            </p:cNvPr>
+            <p:cNvSpPr/>
+            <p:nvPr/>
+          </p:nvSpPr>
+          <p:spPr>
+            <a:xfrm>
+              <a:off x="11638008" y="3908003"/>
+              <a:ext cx="3157418" cy="2236322"/>
+            </a:xfrm>
+            <a:prstGeom prst="rect">
+              <a:avLst/>
+            </a:prstGeom>
+            <a:noFill/>
+            <a:ln w="25400">
+              <a:solidFill>
+                <a:schemeClr val="tx1"/>
+              </a:solidFill>
+            </a:ln>
+          </p:spPr>
+          <p:style>
+            <a:lnRef idx="2">
+              <a:schemeClr val="accent1">
+                <a:shade val="50000"/>
+              </a:schemeClr>
+            </a:lnRef>
+            <a:fillRef idx="1">
+              <a:schemeClr val="accent1"/>
+            </a:fillRef>
+            <a:effectRef idx="0">
+              <a:schemeClr val="accent1"/>
+            </a:effectRef>
+            <a:fontRef idx="minor">
+              <a:schemeClr val="lt1"/>
+            </a:fontRef>
+          </p:style>
+          <p:txBody>
+            <a:bodyPr rtlCol="0" anchor="ctr"/>
+            <a:lstStyle/>
+            <a:p>
+              <a:pPr algn="ctr"/>
+              <a:endParaRPr lang="en-US" sz="450"/>
+            </a:p>
+          </p:txBody>
+        </p:sp>
+        <p:sp>
+          <p:nvSpPr>
+            <p:cNvPr id="31" name="Down Arrow 178">
+              <a:extLst>
+                <a:ext uri="{FF2B5EF4-FFF2-40B4-BE49-F238E27FC236}">
+                  <a16:creationId xmlns:a16="http://schemas.microsoft.com/office/drawing/2014/main" id="{EF5D7777-0A26-5E96-6B11-2B789AB1074F}"/>
+                </a:ext>
+              </a:extLst>
+            </p:cNvPr>
+            <p:cNvSpPr/>
+            <p:nvPr/>
+          </p:nvSpPr>
+          <p:spPr>
+            <a:xfrm>
+              <a:off x="6692722" y="5220633"/>
+              <a:ext cx="204547" cy="390132"/>
+            </a:xfrm>
+            <a:prstGeom prst="downArrow">
+              <a:avLst/>
+            </a:prstGeom>
+            <a:solidFill>
+              <a:srgbClr val="C00000"/>
+            </a:solidFill>
+            <a:ln>
+              <a:solidFill>
+                <a:srgbClr val="C00000"/>
+              </a:solidFill>
+            </a:ln>
+          </p:spPr>
+          <p:style>
+            <a:lnRef idx="2">
+              <a:schemeClr val="accent1">
+                <a:shade val="50000"/>
+              </a:schemeClr>
+            </a:lnRef>
+            <a:fillRef idx="1">
+              <a:schemeClr val="accent1"/>
+            </a:fillRef>
+            <a:effectRef idx="0">
+              <a:schemeClr val="accent1"/>
+            </a:effectRef>
+            <a:fontRef idx="minor">
+              <a:schemeClr val="lt1"/>
+            </a:fontRef>
+          </p:style>
+          <p:txBody>
+            <a:bodyPr rtlCol="0" anchor="ctr"/>
+            <a:lstStyle/>
+            <a:p>
+              <a:pPr algn="ctr"/>
+              <a:endParaRPr lang="en-US" sz="450"/>
+            </a:p>
+          </p:txBody>
+        </p:sp>
+        <p:sp>
+          <p:nvSpPr>
+            <p:cNvPr id="32" name="Rectangle 31">
+              <a:extLst>
+                <a:ext uri="{FF2B5EF4-FFF2-40B4-BE49-F238E27FC236}">
+                  <a16:creationId xmlns:a16="http://schemas.microsoft.com/office/drawing/2014/main" id="{805A742E-46DD-882A-EB4D-D6154B6CC283}"/>
+                </a:ext>
+              </a:extLst>
+            </p:cNvPr>
+            <p:cNvSpPr/>
+            <p:nvPr/>
+          </p:nvSpPr>
+          <p:spPr>
+            <a:xfrm>
+              <a:off x="6357658" y="5657838"/>
+              <a:ext cx="914400" cy="342900"/>
+            </a:xfrm>
+            <a:prstGeom prst="rect">
+              <a:avLst/>
+            </a:prstGeom>
+          </p:spPr>
+          <p:style>
+            <a:lnRef idx="2">
+              <a:schemeClr val="accent1">
+                <a:shade val="50000"/>
+              </a:schemeClr>
+            </a:lnRef>
+            <a:fillRef idx="1">
+              <a:schemeClr val="accent1"/>
+            </a:fillRef>
+            <a:effectRef idx="0">
+              <a:schemeClr val="accent1"/>
+            </a:effectRef>
+            <a:fontRef idx="minor">
+              <a:schemeClr val="lt1"/>
+            </a:fontRef>
+          </p:style>
+          <p:txBody>
+            <a:bodyPr rtlCol="0" anchor="ctr"/>
+            <a:lstStyle/>
+            <a:p>
+              <a:pPr algn="ctr"/>
+              <a:endParaRPr lang="en-US" sz="450" dirty="0"/>
+            </a:p>
+          </p:txBody>
+        </p:sp>
+        <p:sp>
+          <p:nvSpPr>
+            <p:cNvPr id="33" name="Right Arrow 181">
+              <a:extLst>
+                <a:ext uri="{FF2B5EF4-FFF2-40B4-BE49-F238E27FC236}">
+                  <a16:creationId xmlns:a16="http://schemas.microsoft.com/office/drawing/2014/main" id="{35F0F22A-ED4B-CA63-14F1-870B89662E27}"/>
+                </a:ext>
+              </a:extLst>
+            </p:cNvPr>
+            <p:cNvSpPr/>
+            <p:nvPr/>
+          </p:nvSpPr>
+          <p:spPr>
+            <a:xfrm>
+              <a:off x="7358251" y="5708130"/>
+              <a:ext cx="457200" cy="242316"/>
+            </a:xfrm>
+            <a:prstGeom prst="rightArrow">
+              <a:avLst/>
+            </a:prstGeom>
+            <a:solidFill>
+              <a:srgbClr val="002060"/>
+            </a:solidFill>
+            <a:ln>
+              <a:solidFill>
+                <a:srgbClr val="002060"/>
+              </a:solidFill>
+            </a:ln>
+          </p:spPr>
+          <p:style>
+            <a:lnRef idx="2">
+              <a:schemeClr val="accent1">
+                <a:shade val="50000"/>
+              </a:schemeClr>
+            </a:lnRef>
+            <a:fillRef idx="1">
+              <a:schemeClr val="accent1"/>
+            </a:fillRef>
+            <a:effectRef idx="0">
+              <a:schemeClr val="accent1"/>
+            </a:effectRef>
+            <a:fontRef idx="minor">
+              <a:schemeClr val="lt1"/>
+            </a:fontRef>
+          </p:style>
+          <p:txBody>
+            <a:bodyPr rtlCol="0" anchor="ctr"/>
+            <a:lstStyle/>
+            <a:p>
+              <a:pPr algn="ctr"/>
+              <a:endParaRPr lang="en-US" sz="450"/>
+            </a:p>
+          </p:txBody>
+        </p:sp>
+        <p:sp>
+          <p:nvSpPr>
+            <p:cNvPr id="34" name="Rectangle 33">
+              <a:extLst>
+                <a:ext uri="{FF2B5EF4-FFF2-40B4-BE49-F238E27FC236}">
+                  <a16:creationId xmlns:a16="http://schemas.microsoft.com/office/drawing/2014/main" id="{21FFED8B-6128-7CCE-5A99-B832F6AE056C}"/>
+                </a:ext>
+              </a:extLst>
+            </p:cNvPr>
+            <p:cNvSpPr/>
+            <p:nvPr/>
+          </p:nvSpPr>
+          <p:spPr>
+            <a:xfrm>
+              <a:off x="7901644" y="5657838"/>
+              <a:ext cx="1143000" cy="342900"/>
+            </a:xfrm>
+            <a:prstGeom prst="rect">
+              <a:avLst/>
+            </a:prstGeom>
+          </p:spPr>
+          <p:style>
+            <a:lnRef idx="2">
+              <a:schemeClr val="accent1">
+                <a:shade val="50000"/>
+              </a:schemeClr>
+            </a:lnRef>
+            <a:fillRef idx="1">
+              <a:schemeClr val="accent1"/>
+            </a:fillRef>
+            <a:effectRef idx="0">
+              <a:schemeClr val="accent1"/>
+            </a:effectRef>
+            <a:fontRef idx="minor">
+              <a:schemeClr val="lt1"/>
+            </a:fontRef>
+          </p:style>
+          <p:txBody>
+            <a:bodyPr rtlCol="0" anchor="ctr"/>
+            <a:lstStyle/>
+            <a:p>
+              <a:pPr algn="ctr"/>
+              <a:endParaRPr lang="en-US" sz="450" dirty="0"/>
+            </a:p>
+          </p:txBody>
+        </p:sp>
+        <p:sp>
+          <p:nvSpPr>
+            <p:cNvPr id="35" name="TextBox 34">
+              <a:extLst>
+                <a:ext uri="{FF2B5EF4-FFF2-40B4-BE49-F238E27FC236}">
+                  <a16:creationId xmlns:a16="http://schemas.microsoft.com/office/drawing/2014/main" id="{F645E765-306F-980A-BF06-CAE7746FCCAA}"/>
+                </a:ext>
+              </a:extLst>
+            </p:cNvPr>
+            <p:cNvSpPr txBox="1"/>
+            <p:nvPr/>
+          </p:nvSpPr>
+          <p:spPr>
+            <a:xfrm>
+              <a:off x="8330922" y="6068148"/>
+              <a:ext cx="348172" cy="284693"/>
+            </a:xfrm>
+            <a:prstGeom prst="rect">
+              <a:avLst/>
+            </a:prstGeom>
+            <a:noFill/>
+          </p:spPr>
+          <p:txBody>
+            <a:bodyPr wrap="none" rtlCol="0">
+              <a:spAutoFit/>
+            </a:bodyPr>
+            <a:lstStyle/>
+            <a:p>
+              <a:r>
+                <a:rPr lang="en-US" sz="1250" dirty="0"/>
+                <a:t>64</a:t>
+              </a:r>
+            </a:p>
+          </p:txBody>
+        </p:sp>
+        <p:sp>
+          <p:nvSpPr>
+            <p:cNvPr id="36" name="Right Arrow 186">
+              <a:extLst>
+                <a:ext uri="{FF2B5EF4-FFF2-40B4-BE49-F238E27FC236}">
+                  <a16:creationId xmlns:a16="http://schemas.microsoft.com/office/drawing/2014/main" id="{B352C301-886D-0C1C-87D4-A26B84079D48}"/>
+                </a:ext>
+              </a:extLst>
+            </p:cNvPr>
+            <p:cNvSpPr/>
+            <p:nvPr/>
+          </p:nvSpPr>
+          <p:spPr>
+            <a:xfrm>
+              <a:off x="9130837" y="5717022"/>
+              <a:ext cx="457200" cy="242316"/>
+            </a:xfrm>
+            <a:prstGeom prst="rightArrow">
+              <a:avLst/>
+            </a:prstGeom>
+            <a:solidFill>
+              <a:srgbClr val="002060"/>
+            </a:solidFill>
+            <a:ln>
+              <a:solidFill>
+                <a:srgbClr val="002060"/>
+              </a:solidFill>
+            </a:ln>
+          </p:spPr>
+          <p:style>
+            <a:lnRef idx="2">
+              <a:schemeClr val="accent1">
+                <a:shade val="50000"/>
+              </a:schemeClr>
+            </a:lnRef>
+            <a:fillRef idx="1">
+              <a:schemeClr val="accent1"/>
+            </a:fillRef>
+            <a:effectRef idx="0">
+              <a:schemeClr val="accent1"/>
+            </a:effectRef>
+            <a:fontRef idx="minor">
+              <a:schemeClr val="lt1"/>
+            </a:fontRef>
+          </p:style>
+          <p:txBody>
+            <a:bodyPr rtlCol="0" anchor="ctr"/>
+            <a:lstStyle/>
+            <a:p>
+              <a:pPr algn="ctr"/>
+              <a:endParaRPr lang="en-US" sz="450"/>
+            </a:p>
+          </p:txBody>
+        </p:sp>
+        <p:sp>
+          <p:nvSpPr>
+            <p:cNvPr id="37" name="Rectangle 36">
+              <a:extLst>
+                <a:ext uri="{FF2B5EF4-FFF2-40B4-BE49-F238E27FC236}">
+                  <a16:creationId xmlns:a16="http://schemas.microsoft.com/office/drawing/2014/main" id="{2FA2A4B0-D6DB-BBF0-CBC7-6DD43993078B}"/>
+                </a:ext>
+              </a:extLst>
+            </p:cNvPr>
+            <p:cNvSpPr/>
+            <p:nvPr/>
+          </p:nvSpPr>
+          <p:spPr>
+            <a:xfrm>
+              <a:off x="9674230" y="5649470"/>
+              <a:ext cx="1143000" cy="342900"/>
+            </a:xfrm>
+            <a:prstGeom prst="rect">
+              <a:avLst/>
+            </a:prstGeom>
+          </p:spPr>
+          <p:style>
+            <a:lnRef idx="2">
+              <a:schemeClr val="accent1">
+                <a:shade val="50000"/>
+              </a:schemeClr>
+            </a:lnRef>
+            <a:fillRef idx="1">
+              <a:schemeClr val="accent1"/>
+            </a:fillRef>
+            <a:effectRef idx="0">
+              <a:schemeClr val="accent1"/>
+            </a:effectRef>
+            <a:fontRef idx="minor">
+              <a:schemeClr val="lt1"/>
+            </a:fontRef>
+          </p:style>
+          <p:txBody>
+            <a:bodyPr rtlCol="0" anchor="ctr"/>
+            <a:lstStyle/>
+            <a:p>
+              <a:pPr algn="ctr"/>
+              <a:endParaRPr lang="en-US" sz="450" dirty="0"/>
+            </a:p>
+          </p:txBody>
+        </p:sp>
+        <p:sp>
+          <p:nvSpPr>
+            <p:cNvPr id="38" name="TextBox 37">
+              <a:extLst>
+                <a:ext uri="{FF2B5EF4-FFF2-40B4-BE49-F238E27FC236}">
+                  <a16:creationId xmlns:a16="http://schemas.microsoft.com/office/drawing/2014/main" id="{BDD963D2-63EC-C539-02FC-615FECEEB1B2}"/>
+                </a:ext>
+              </a:extLst>
+            </p:cNvPr>
+            <p:cNvSpPr txBox="1"/>
+            <p:nvPr/>
+          </p:nvSpPr>
+          <p:spPr>
+            <a:xfrm>
+              <a:off x="10099993" y="6035805"/>
+              <a:ext cx="348172" cy="284693"/>
+            </a:xfrm>
+            <a:prstGeom prst="rect">
+              <a:avLst/>
+            </a:prstGeom>
+            <a:noFill/>
+          </p:spPr>
+          <p:txBody>
+            <a:bodyPr wrap="none" rtlCol="0">
+              <a:spAutoFit/>
+            </a:bodyPr>
+            <a:lstStyle/>
+            <a:p>
+              <a:r>
+                <a:rPr lang="en-US" sz="1250" dirty="0"/>
+                <a:t>64</a:t>
+              </a:r>
+            </a:p>
+          </p:txBody>
+        </p:sp>
+        <p:sp>
+          <p:nvSpPr>
+            <p:cNvPr id="39" name="TextBox 38">
+              <a:extLst>
+                <a:ext uri="{FF2B5EF4-FFF2-40B4-BE49-F238E27FC236}">
+                  <a16:creationId xmlns:a16="http://schemas.microsoft.com/office/drawing/2014/main" id="{312D7C8B-D317-3431-506B-7E3125987AFA}"/>
+                </a:ext>
+              </a:extLst>
+            </p:cNvPr>
+            <p:cNvSpPr txBox="1"/>
+            <p:nvPr/>
+          </p:nvSpPr>
+          <p:spPr>
+            <a:xfrm>
+              <a:off x="6667877" y="3478587"/>
+              <a:ext cx="348172" cy="284693"/>
+            </a:xfrm>
+            <a:prstGeom prst="rect">
+              <a:avLst/>
+            </a:prstGeom>
+            <a:noFill/>
+          </p:spPr>
+          <p:txBody>
+            <a:bodyPr wrap="none" rtlCol="0">
+              <a:spAutoFit/>
+            </a:bodyPr>
+            <a:lstStyle/>
+            <a:p>
+              <a:r>
+                <a:rPr lang="en-US" sz="1250" dirty="0"/>
+                <a:t>32</a:t>
+              </a:r>
+            </a:p>
+          </p:txBody>
+        </p:sp>
+        <p:sp>
+          <p:nvSpPr>
+            <p:cNvPr id="40" name="Right Arrow 231">
+              <a:extLst>
+                <a:ext uri="{FF2B5EF4-FFF2-40B4-BE49-F238E27FC236}">
+                  <a16:creationId xmlns:a16="http://schemas.microsoft.com/office/drawing/2014/main" id="{8FDF2557-CEC4-C1A3-839D-DF4D98F67490}"/>
+                </a:ext>
+              </a:extLst>
+            </p:cNvPr>
+            <p:cNvSpPr/>
+            <p:nvPr/>
+          </p:nvSpPr>
+          <p:spPr>
+            <a:xfrm>
+              <a:off x="6476626" y="4290687"/>
+              <a:ext cx="194187" cy="242316"/>
+            </a:xfrm>
+            <a:prstGeom prst="rightArrow">
+              <a:avLst/>
+            </a:prstGeom>
+            <a:solidFill>
+              <a:srgbClr val="002060"/>
+            </a:solidFill>
+            <a:ln>
+              <a:solidFill>
+                <a:srgbClr val="002060"/>
+              </a:solidFill>
+            </a:ln>
+          </p:spPr>
+          <p:style>
+            <a:lnRef idx="2">
+              <a:schemeClr val="accent1">
+                <a:shade val="50000"/>
+              </a:schemeClr>
+            </a:lnRef>
+            <a:fillRef idx="1">
+              <a:schemeClr val="accent1"/>
+            </a:fillRef>
+            <a:effectRef idx="0">
+              <a:schemeClr val="accent1"/>
+            </a:effectRef>
+            <a:fontRef idx="minor">
+              <a:schemeClr val="lt1"/>
+            </a:fontRef>
+          </p:style>
+          <p:txBody>
+            <a:bodyPr rtlCol="0" anchor="ctr"/>
+            <a:lstStyle/>
+            <a:p>
+              <a:pPr algn="ctr"/>
+              <a:endParaRPr lang="en-US" sz="450"/>
+            </a:p>
+          </p:txBody>
+        </p:sp>
+        <p:sp>
+          <p:nvSpPr>
+            <p:cNvPr id="41" name="Rectangle 40">
+              <a:extLst>
+                <a:ext uri="{FF2B5EF4-FFF2-40B4-BE49-F238E27FC236}">
+                  <a16:creationId xmlns:a16="http://schemas.microsoft.com/office/drawing/2014/main" id="{313755D0-BE8D-A6B2-E68B-C07EEA078E33}"/>
+                </a:ext>
+              </a:extLst>
+            </p:cNvPr>
+            <p:cNvSpPr/>
+            <p:nvPr/>
+          </p:nvSpPr>
+          <p:spPr>
+            <a:xfrm>
+              <a:off x="6704589" y="3726045"/>
+              <a:ext cx="182880" cy="1371600"/>
+            </a:xfrm>
+            <a:prstGeom prst="rect">
+              <a:avLst/>
+            </a:prstGeom>
+          </p:spPr>
+          <p:style>
+            <a:lnRef idx="2">
+              <a:schemeClr val="accent1">
+                <a:shade val="50000"/>
+              </a:schemeClr>
+            </a:lnRef>
+            <a:fillRef idx="1">
+              <a:schemeClr val="accent1"/>
+            </a:fillRef>
+            <a:effectRef idx="0">
+              <a:schemeClr val="accent1"/>
+            </a:effectRef>
+            <a:fontRef idx="minor">
+              <a:schemeClr val="lt1"/>
+            </a:fontRef>
+          </p:style>
+          <p:txBody>
+            <a:bodyPr rtlCol="0" anchor="ctr"/>
+            <a:lstStyle/>
+            <a:p>
+              <a:pPr algn="ctr"/>
+              <a:endParaRPr lang="en-US" sz="450"/>
+            </a:p>
+          </p:txBody>
+        </p:sp>
+        <p:sp>
+          <p:nvSpPr>
+            <p:cNvPr id="42" name="TextBox 41">
+              <a:extLst>
+                <a:ext uri="{FF2B5EF4-FFF2-40B4-BE49-F238E27FC236}">
+                  <a16:creationId xmlns:a16="http://schemas.microsoft.com/office/drawing/2014/main" id="{EB70C315-2E91-9288-C399-F3CFF9997984}"/>
+                </a:ext>
+              </a:extLst>
+            </p:cNvPr>
+            <p:cNvSpPr txBox="1"/>
+            <p:nvPr/>
+          </p:nvSpPr>
+          <p:spPr>
+            <a:xfrm>
+              <a:off x="6670856" y="6000738"/>
+              <a:ext cx="348172" cy="284693"/>
+            </a:xfrm>
+            <a:prstGeom prst="rect">
+              <a:avLst/>
+            </a:prstGeom>
+            <a:noFill/>
+          </p:spPr>
+          <p:txBody>
+            <a:bodyPr wrap="none" rtlCol="0">
+              <a:spAutoFit/>
+            </a:bodyPr>
+            <a:lstStyle/>
+            <a:p>
+              <a:r>
+                <a:rPr lang="en-US" sz="1250" dirty="0"/>
+                <a:t>64</a:t>
+              </a:r>
+            </a:p>
+          </p:txBody>
+        </p:sp>
+        <p:sp>
+          <p:nvSpPr>
+            <p:cNvPr id="43" name="TextBox 42">
+              <a:extLst>
+                <a:ext uri="{FF2B5EF4-FFF2-40B4-BE49-F238E27FC236}">
+                  <a16:creationId xmlns:a16="http://schemas.microsoft.com/office/drawing/2014/main" id="{FFA19413-BB82-C0B5-6522-CA05D9F243F2}"/>
+                </a:ext>
+              </a:extLst>
+            </p:cNvPr>
+            <p:cNvSpPr txBox="1"/>
+            <p:nvPr/>
+          </p:nvSpPr>
+          <p:spPr>
+            <a:xfrm flipH="1">
+              <a:off x="10592308" y="5201873"/>
+              <a:ext cx="348172" cy="284693"/>
+            </a:xfrm>
+            <a:prstGeom prst="rect">
+              <a:avLst/>
+            </a:prstGeom>
+            <a:noFill/>
+          </p:spPr>
+          <p:txBody>
+            <a:bodyPr wrap="none" rtlCol="0">
+              <a:spAutoFit/>
+            </a:bodyPr>
+            <a:lstStyle/>
+            <a:p>
+              <a:r>
+                <a:rPr lang="en-US" sz="1250" dirty="0"/>
+                <a:t>64</a:t>
+              </a:r>
+            </a:p>
+          </p:txBody>
+        </p:sp>
+        <p:sp>
+          <p:nvSpPr>
+            <p:cNvPr id="44" name="TextBox 43">
+              <a:extLst>
+                <a:ext uri="{FF2B5EF4-FFF2-40B4-BE49-F238E27FC236}">
+                  <a16:creationId xmlns:a16="http://schemas.microsoft.com/office/drawing/2014/main" id="{161636B3-C9AB-63CE-0297-A64EF1FEBD67}"/>
+                </a:ext>
+              </a:extLst>
+            </p:cNvPr>
+            <p:cNvSpPr txBox="1"/>
+            <p:nvPr/>
+          </p:nvSpPr>
+          <p:spPr>
+            <a:xfrm>
+              <a:off x="3881426" y="2253477"/>
+              <a:ext cx="1003095" cy="430887"/>
+            </a:xfrm>
+            <a:prstGeom prst="rect">
+              <a:avLst/>
+            </a:prstGeom>
+            <a:noFill/>
+          </p:spPr>
+          <p:txBody>
+            <a:bodyPr wrap="none" rtlCol="0">
+              <a:spAutoFit/>
+            </a:bodyPr>
+            <a:lstStyle/>
+            <a:p>
+              <a:r>
+                <a:rPr lang="en-US" sz="2200" dirty="0"/>
+                <a:t>Layer 0</a:t>
+              </a:r>
+            </a:p>
+          </p:txBody>
+        </p:sp>
+        <p:sp>
+          <p:nvSpPr>
+            <p:cNvPr id="45" name="TextBox 44">
+              <a:extLst>
+                <a:ext uri="{FF2B5EF4-FFF2-40B4-BE49-F238E27FC236}">
+                  <a16:creationId xmlns:a16="http://schemas.microsoft.com/office/drawing/2014/main" id="{603509EC-13E7-AE29-6854-80DA69CCC884}"/>
+                </a:ext>
+              </a:extLst>
+            </p:cNvPr>
+            <p:cNvSpPr txBox="1"/>
+            <p:nvPr/>
+          </p:nvSpPr>
+          <p:spPr>
+            <a:xfrm>
+              <a:off x="3881843" y="3951395"/>
+              <a:ext cx="1003095" cy="430887"/>
+            </a:xfrm>
+            <a:prstGeom prst="rect">
+              <a:avLst/>
+            </a:prstGeom>
+            <a:noFill/>
+          </p:spPr>
+          <p:txBody>
+            <a:bodyPr wrap="none" rtlCol="0">
+              <a:spAutoFit/>
+            </a:bodyPr>
+            <a:lstStyle/>
+            <a:p>
+              <a:r>
+                <a:rPr lang="en-US" sz="2200" dirty="0"/>
+                <a:t>Layer 1</a:t>
+              </a:r>
+            </a:p>
+          </p:txBody>
+        </p:sp>
+        <p:sp>
+          <p:nvSpPr>
+            <p:cNvPr id="46" name="TextBox 45">
+              <a:extLst>
+                <a:ext uri="{FF2B5EF4-FFF2-40B4-BE49-F238E27FC236}">
+                  <a16:creationId xmlns:a16="http://schemas.microsoft.com/office/drawing/2014/main" id="{C2F7D8E8-2467-2EDC-EE14-6BCC236DF3BC}"/>
+                </a:ext>
+              </a:extLst>
+            </p:cNvPr>
+            <p:cNvSpPr txBox="1"/>
+            <p:nvPr/>
+          </p:nvSpPr>
+          <p:spPr>
+            <a:xfrm>
+              <a:off x="3881426" y="5649312"/>
+              <a:ext cx="1003095" cy="430887"/>
+            </a:xfrm>
+            <a:prstGeom prst="rect">
+              <a:avLst/>
+            </a:prstGeom>
+            <a:noFill/>
+          </p:spPr>
+          <p:txBody>
+            <a:bodyPr wrap="none" rtlCol="0">
+              <a:spAutoFit/>
+            </a:bodyPr>
+            <a:lstStyle/>
+            <a:p>
+              <a:r>
+                <a:rPr lang="en-US" sz="2200" dirty="0"/>
+                <a:t>Layer 2</a:t>
+              </a:r>
+            </a:p>
+          </p:txBody>
+        </p:sp>
+        <p:sp>
+          <p:nvSpPr>
+            <p:cNvPr id="48" name="Rectangle 47">
+              <a:extLst>
+                <a:ext uri="{FF2B5EF4-FFF2-40B4-BE49-F238E27FC236}">
+                  <a16:creationId xmlns:a16="http://schemas.microsoft.com/office/drawing/2014/main" id="{F8011EB1-E690-0AD6-6C8F-9180627BAF62}"/>
+                </a:ext>
+              </a:extLst>
+            </p:cNvPr>
+            <p:cNvSpPr/>
+            <p:nvPr/>
+          </p:nvSpPr>
+          <p:spPr>
+            <a:xfrm>
+              <a:off x="3604928" y="1199782"/>
+              <a:ext cx="11385878" cy="5172543"/>
+            </a:xfrm>
+            <a:prstGeom prst="rect">
+              <a:avLst/>
+            </a:prstGeom>
+            <a:noFill/>
+            <a:ln>
+              <a:solidFill>
+                <a:schemeClr val="tx1"/>
+              </a:solidFill>
+            </a:ln>
+          </p:spPr>
+          <p:style>
+            <a:lnRef idx="2">
+              <a:schemeClr val="accent1">
+                <a:shade val="50000"/>
+              </a:schemeClr>
+            </a:lnRef>
+            <a:fillRef idx="1">
+              <a:schemeClr val="accent1"/>
+            </a:fillRef>
+            <a:effectRef idx="0">
+              <a:schemeClr val="accent1"/>
+            </a:effectRef>
+            <a:fontRef idx="minor">
+              <a:schemeClr val="lt1"/>
+            </a:fontRef>
+          </p:style>
+          <p:txBody>
+            <a:bodyPr rtlCol="0" anchor="ctr"/>
+            <a:lstStyle/>
+            <a:p>
+              <a:pPr algn="ctr"/>
+              <a:endParaRPr lang="en-US"/>
+            </a:p>
+          </p:txBody>
+        </p:sp>
+      </p:grpSp>
+      <p:grpSp>
+        <p:nvGrpSpPr>
+          <p:cNvPr id="115" name="Group 114">
+            <a:extLst>
+              <a:ext uri="{FF2B5EF4-FFF2-40B4-BE49-F238E27FC236}">
+                <a16:creationId xmlns:a16="http://schemas.microsoft.com/office/drawing/2014/main" id="{2BE183AC-BAE8-B4DF-FCC2-AD24B63EF2EE}"/>
+              </a:ext>
+            </a:extLst>
+          </p:cNvPr>
+          <p:cNvGrpSpPr/>
+          <p:nvPr/>
+        </p:nvGrpSpPr>
+        <p:grpSpPr>
+          <a:xfrm>
+            <a:off x="4272891" y="6905548"/>
+            <a:ext cx="8464534" cy="3657600"/>
+            <a:chOff x="4272891" y="6905548"/>
+            <a:chExt cx="8464534" cy="3657600"/>
+          </a:xfrm>
+        </p:grpSpPr>
+        <p:grpSp>
+          <p:nvGrpSpPr>
+            <p:cNvPr id="85" name="Group 84">
+              <a:extLst>
+                <a:ext uri="{FF2B5EF4-FFF2-40B4-BE49-F238E27FC236}">
+                  <a16:creationId xmlns:a16="http://schemas.microsoft.com/office/drawing/2014/main" id="{120A00D4-93D7-D2B7-13C0-3A12E28BE2DC}"/>
+                </a:ext>
+              </a:extLst>
+            </p:cNvPr>
+            <p:cNvGrpSpPr/>
+            <p:nvPr/>
+          </p:nvGrpSpPr>
+          <p:grpSpPr>
+            <a:xfrm>
+              <a:off x="4272891" y="6905548"/>
+              <a:ext cx="717273" cy="3657600"/>
+              <a:chOff x="4104437" y="7041997"/>
+              <a:chExt cx="717273" cy="3657600"/>
+            </a:xfrm>
+          </p:grpSpPr>
+          <p:sp>
+            <p:nvSpPr>
+              <p:cNvPr id="77" name="Rectangle 76">
+                <a:extLst>
+                  <a:ext uri="{FF2B5EF4-FFF2-40B4-BE49-F238E27FC236}">
+                    <a16:creationId xmlns:a16="http://schemas.microsoft.com/office/drawing/2014/main" id="{E75CDB23-67BD-B5FD-89C1-C2522FDE0B45}"/>
+                  </a:ext>
+                </a:extLst>
+              </p:cNvPr>
+              <p:cNvSpPr/>
+              <p:nvPr/>
+            </p:nvSpPr>
+            <p:spPr>
+              <a:xfrm>
+                <a:off x="4104437" y="7041997"/>
+                <a:ext cx="557072" cy="3657600"/>
+              </a:xfrm>
+              <a:prstGeom prst="rect">
+                <a:avLst/>
+              </a:prstGeom>
+              <a:solidFill>
+                <a:schemeClr val="accent1">
+                  <a:alpha val="66000"/>
+                </a:schemeClr>
+              </a:solidFill>
+              <a:scene3d>
+                <a:camera prst="isometricRightUp"/>
+                <a:lightRig rig="threePt" dir="t"/>
+              </a:scene3d>
+            </p:spPr>
+            <p:style>
+              <a:lnRef idx="2">
+                <a:schemeClr val="accent1">
+                  <a:shade val="50000"/>
+                </a:schemeClr>
+              </a:lnRef>
+              <a:fillRef idx="1">
+                <a:schemeClr val="accent1"/>
+              </a:fillRef>
+              <a:effectRef idx="0">
+                <a:schemeClr val="accent1"/>
+              </a:effectRef>
+              <a:fontRef idx="minor">
+                <a:schemeClr val="lt1"/>
+              </a:fontRef>
+            </p:style>
+            <p:txBody>
+              <a:bodyPr rtlCol="0" anchor="ctr"/>
+              <a:lstStyle/>
+              <a:p>
+                <a:pPr algn="ctr"/>
+                <a:endParaRPr lang="en-US" sz="450" dirty="0"/>
+              </a:p>
+            </p:txBody>
+          </p:sp>
+          <p:sp>
+            <p:nvSpPr>
+              <p:cNvPr id="78" name="Rectangle 77">
+                <a:extLst>
+                  <a:ext uri="{FF2B5EF4-FFF2-40B4-BE49-F238E27FC236}">
+                    <a16:creationId xmlns:a16="http://schemas.microsoft.com/office/drawing/2014/main" id="{0860D12C-B925-1EA2-ADAB-DB568D33F112}"/>
+                  </a:ext>
+                </a:extLst>
+              </p:cNvPr>
+              <p:cNvSpPr/>
+              <p:nvPr/>
+            </p:nvSpPr>
+            <p:spPr>
+              <a:xfrm>
+                <a:off x="4264638" y="7041997"/>
+                <a:ext cx="557072" cy="3657600"/>
+              </a:xfrm>
+              <a:prstGeom prst="rect">
+                <a:avLst/>
+              </a:prstGeom>
+              <a:solidFill>
+                <a:schemeClr val="accent1">
+                  <a:alpha val="66000"/>
+                </a:schemeClr>
+              </a:solidFill>
+              <a:scene3d>
+                <a:camera prst="isometricRightUp"/>
+                <a:lightRig rig="threePt" dir="t"/>
+              </a:scene3d>
+            </p:spPr>
+            <p:style>
+              <a:lnRef idx="2">
+                <a:schemeClr val="accent1">
+                  <a:shade val="50000"/>
+                </a:schemeClr>
+              </a:lnRef>
+              <a:fillRef idx="1">
+                <a:schemeClr val="accent1"/>
+              </a:fillRef>
+              <a:effectRef idx="0">
+                <a:schemeClr val="accent1"/>
+              </a:effectRef>
+              <a:fontRef idx="minor">
+                <a:schemeClr val="lt1"/>
+              </a:fontRef>
+            </p:style>
+            <p:txBody>
+              <a:bodyPr rtlCol="0" anchor="ctr"/>
+              <a:lstStyle/>
+              <a:p>
+                <a:pPr algn="ctr"/>
+                <a:endParaRPr lang="en-US" sz="450" dirty="0"/>
+              </a:p>
+            </p:txBody>
+          </p:sp>
+        </p:grpSp>
+        <p:sp>
+          <p:nvSpPr>
+            <p:cNvPr id="80" name="Down Arrow 218">
+              <a:extLst>
+                <a:ext uri="{FF2B5EF4-FFF2-40B4-BE49-F238E27FC236}">
+                  <a16:creationId xmlns:a16="http://schemas.microsoft.com/office/drawing/2014/main" id="{9DB743F8-5ED9-21C3-3EAF-75ABCAA32835}"/>
+                </a:ext>
+              </a:extLst>
+            </p:cNvPr>
+            <p:cNvSpPr/>
+            <p:nvPr/>
+          </p:nvSpPr>
+          <p:spPr>
+            <a:xfrm rot="16200000">
+              <a:off x="5016060" y="8479010"/>
+              <a:ext cx="422354" cy="510676"/>
+            </a:xfrm>
+            <a:prstGeom prst="downArrow">
+              <a:avLst/>
+            </a:prstGeom>
+            <a:solidFill>
+              <a:srgbClr val="C00000"/>
+            </a:solidFill>
+            <a:ln>
+              <a:solidFill>
+                <a:srgbClr val="C00000"/>
+              </a:solidFill>
+            </a:ln>
+          </p:spPr>
+          <p:style>
+            <a:lnRef idx="2">
+              <a:schemeClr val="accent1">
+                <a:shade val="50000"/>
+              </a:schemeClr>
+            </a:lnRef>
+            <a:fillRef idx="1">
+              <a:schemeClr val="accent1"/>
+            </a:fillRef>
+            <a:effectRef idx="0">
+              <a:schemeClr val="accent1"/>
+            </a:effectRef>
+            <a:fontRef idx="minor">
+              <a:schemeClr val="lt1"/>
+            </a:fontRef>
+          </p:style>
+          <p:txBody>
+            <a:bodyPr rtlCol="0" anchor="ctr"/>
+            <a:lstStyle/>
+            <a:p>
+              <a:pPr algn="ctr"/>
+              <a:endParaRPr lang="en-US" sz="450"/>
+            </a:p>
+          </p:txBody>
+        </p:sp>
+        <p:grpSp>
+          <p:nvGrpSpPr>
+            <p:cNvPr id="84" name="Group 83">
+              <a:extLst>
+                <a:ext uri="{FF2B5EF4-FFF2-40B4-BE49-F238E27FC236}">
+                  <a16:creationId xmlns:a16="http://schemas.microsoft.com/office/drawing/2014/main" id="{3F31D513-7CB9-26CA-EF8C-FBD37BC5C846}"/>
+                </a:ext>
+              </a:extLst>
+            </p:cNvPr>
+            <p:cNvGrpSpPr/>
+            <p:nvPr/>
+          </p:nvGrpSpPr>
+          <p:grpSpPr>
+            <a:xfrm>
+              <a:off x="5484667" y="7819948"/>
+              <a:ext cx="885884" cy="1828800"/>
+              <a:chOff x="5473680" y="7789645"/>
+              <a:chExt cx="885884" cy="1828800"/>
+            </a:xfrm>
+          </p:grpSpPr>
+          <p:sp>
+            <p:nvSpPr>
+              <p:cNvPr id="81" name="Rectangle 80">
+                <a:extLst>
+                  <a:ext uri="{FF2B5EF4-FFF2-40B4-BE49-F238E27FC236}">
+                    <a16:creationId xmlns:a16="http://schemas.microsoft.com/office/drawing/2014/main" id="{C7FED2EF-88BE-58F1-C31D-1E73E2396E93}"/>
+                  </a:ext>
+                </a:extLst>
+              </p:cNvPr>
+              <p:cNvSpPr/>
+              <p:nvPr/>
+            </p:nvSpPr>
+            <p:spPr>
+              <a:xfrm>
+                <a:off x="5473680" y="7789645"/>
+                <a:ext cx="557072" cy="1828800"/>
+              </a:xfrm>
+              <a:prstGeom prst="rect">
+                <a:avLst/>
+              </a:prstGeom>
+              <a:solidFill>
+                <a:schemeClr val="accent1">
+                  <a:alpha val="66000"/>
+                </a:schemeClr>
+              </a:solidFill>
+              <a:scene3d>
+                <a:camera prst="isometricRightUp"/>
+                <a:lightRig rig="threePt" dir="t"/>
+              </a:scene3d>
+            </p:spPr>
+            <p:style>
+              <a:lnRef idx="2">
+                <a:schemeClr val="accent1">
+                  <a:shade val="50000"/>
+                </a:schemeClr>
+              </a:lnRef>
+              <a:fillRef idx="1">
+                <a:schemeClr val="accent1"/>
+              </a:fillRef>
+              <a:effectRef idx="0">
+                <a:schemeClr val="accent1"/>
+              </a:effectRef>
+              <a:fontRef idx="minor">
+                <a:schemeClr val="lt1"/>
+              </a:fontRef>
+            </p:style>
+            <p:txBody>
+              <a:bodyPr rtlCol="0" anchor="ctr"/>
+              <a:lstStyle/>
+              <a:p>
+                <a:pPr algn="ctr"/>
+                <a:endParaRPr lang="en-US" sz="450" dirty="0"/>
+              </a:p>
+            </p:txBody>
+          </p:sp>
+          <p:sp>
+            <p:nvSpPr>
+              <p:cNvPr id="82" name="Rectangle 81">
+                <a:extLst>
+                  <a:ext uri="{FF2B5EF4-FFF2-40B4-BE49-F238E27FC236}">
+                    <a16:creationId xmlns:a16="http://schemas.microsoft.com/office/drawing/2014/main" id="{C78D93E9-33EF-23E6-8298-5A4DC752A6B6}"/>
+                  </a:ext>
+                </a:extLst>
+              </p:cNvPr>
+              <p:cNvSpPr/>
+              <p:nvPr/>
+            </p:nvSpPr>
+            <p:spPr>
+              <a:xfrm>
+                <a:off x="5633881" y="7789645"/>
+                <a:ext cx="557072" cy="1828800"/>
+              </a:xfrm>
+              <a:prstGeom prst="rect">
+                <a:avLst/>
+              </a:prstGeom>
+              <a:solidFill>
+                <a:schemeClr val="accent1">
+                  <a:alpha val="66000"/>
+                </a:schemeClr>
+              </a:solidFill>
+              <a:scene3d>
+                <a:camera prst="isometricRightUp"/>
+                <a:lightRig rig="threePt" dir="t"/>
+              </a:scene3d>
+            </p:spPr>
+            <p:style>
+              <a:lnRef idx="2">
+                <a:schemeClr val="accent1">
+                  <a:shade val="50000"/>
+                </a:schemeClr>
+              </a:lnRef>
+              <a:fillRef idx="1">
+                <a:schemeClr val="accent1"/>
+              </a:fillRef>
+              <a:effectRef idx="0">
+                <a:schemeClr val="accent1"/>
+              </a:effectRef>
+              <a:fontRef idx="minor">
+                <a:schemeClr val="lt1"/>
+              </a:fontRef>
+            </p:style>
+            <p:txBody>
+              <a:bodyPr rtlCol="0" anchor="ctr"/>
+              <a:lstStyle/>
+              <a:p>
+                <a:pPr algn="ctr"/>
+                <a:endParaRPr lang="en-US" sz="450" dirty="0"/>
+              </a:p>
+            </p:txBody>
+          </p:sp>
+          <p:sp>
+            <p:nvSpPr>
+              <p:cNvPr id="83" name="Rectangle 82">
+                <a:extLst>
+                  <a:ext uri="{FF2B5EF4-FFF2-40B4-BE49-F238E27FC236}">
+                    <a16:creationId xmlns:a16="http://schemas.microsoft.com/office/drawing/2014/main" id="{759FD32D-A7F5-A0EA-B86F-A3A94F98DE69}"/>
+                  </a:ext>
+                </a:extLst>
+              </p:cNvPr>
+              <p:cNvSpPr/>
+              <p:nvPr/>
+            </p:nvSpPr>
+            <p:spPr>
+              <a:xfrm>
+                <a:off x="5802492" y="7789645"/>
+                <a:ext cx="557072" cy="1828800"/>
+              </a:xfrm>
+              <a:prstGeom prst="rect">
+                <a:avLst/>
+              </a:prstGeom>
+              <a:solidFill>
+                <a:schemeClr val="accent1">
+                  <a:alpha val="66000"/>
+                </a:schemeClr>
+              </a:solidFill>
+              <a:scene3d>
+                <a:camera prst="isometricRightUp"/>
+                <a:lightRig rig="threePt" dir="t"/>
+              </a:scene3d>
+            </p:spPr>
+            <p:style>
+              <a:lnRef idx="2">
+                <a:schemeClr val="accent1">
+                  <a:shade val="50000"/>
+                </a:schemeClr>
+              </a:lnRef>
+              <a:fillRef idx="1">
+                <a:schemeClr val="accent1"/>
+              </a:fillRef>
+              <a:effectRef idx="0">
+                <a:schemeClr val="accent1"/>
+              </a:effectRef>
+              <a:fontRef idx="minor">
+                <a:schemeClr val="lt1"/>
+              </a:fontRef>
+            </p:style>
+            <p:txBody>
+              <a:bodyPr rtlCol="0" anchor="ctr"/>
+              <a:lstStyle/>
+              <a:p>
+                <a:pPr algn="ctr"/>
+                <a:endParaRPr lang="en-US" sz="450" dirty="0"/>
+              </a:p>
+            </p:txBody>
+          </p:sp>
+        </p:grpSp>
+        <p:grpSp>
+          <p:nvGrpSpPr>
+            <p:cNvPr id="94" name="Group 93">
+              <a:extLst>
+                <a:ext uri="{FF2B5EF4-FFF2-40B4-BE49-F238E27FC236}">
+                  <a16:creationId xmlns:a16="http://schemas.microsoft.com/office/drawing/2014/main" id="{DAA62898-ADFB-2E34-C507-66C6DE10708E}"/>
+                </a:ext>
+              </a:extLst>
+            </p:cNvPr>
+            <p:cNvGrpSpPr/>
+            <p:nvPr/>
+          </p:nvGrpSpPr>
+          <p:grpSpPr>
+            <a:xfrm>
+              <a:off x="6903927" y="8277148"/>
+              <a:ext cx="1365848" cy="914400"/>
+              <a:chOff x="6536085" y="7819948"/>
+              <a:chExt cx="1365848" cy="914400"/>
+            </a:xfrm>
+          </p:grpSpPr>
+          <p:sp>
+            <p:nvSpPr>
+              <p:cNvPr id="87" name="Rectangle 86">
+                <a:extLst>
+                  <a:ext uri="{FF2B5EF4-FFF2-40B4-BE49-F238E27FC236}">
+                    <a16:creationId xmlns:a16="http://schemas.microsoft.com/office/drawing/2014/main" id="{3E3006A8-B478-54E9-F678-B591CBFA0104}"/>
+                  </a:ext>
+                </a:extLst>
+              </p:cNvPr>
+              <p:cNvSpPr/>
+              <p:nvPr/>
+            </p:nvSpPr>
+            <p:spPr>
+              <a:xfrm>
+                <a:off x="6536085" y="7819948"/>
+                <a:ext cx="557072" cy="914400"/>
+              </a:xfrm>
+              <a:prstGeom prst="rect">
+                <a:avLst/>
+              </a:prstGeom>
+              <a:solidFill>
+                <a:schemeClr val="accent1">
+                  <a:alpha val="66000"/>
+                </a:schemeClr>
+              </a:solidFill>
+              <a:scene3d>
+                <a:camera prst="isometricRightUp"/>
+                <a:lightRig rig="threePt" dir="t"/>
+              </a:scene3d>
+            </p:spPr>
+            <p:style>
+              <a:lnRef idx="2">
+                <a:schemeClr val="accent1">
+                  <a:shade val="50000"/>
+                </a:schemeClr>
+              </a:lnRef>
+              <a:fillRef idx="1">
+                <a:schemeClr val="accent1"/>
+              </a:fillRef>
+              <a:effectRef idx="0">
+                <a:schemeClr val="accent1"/>
+              </a:effectRef>
+              <a:fontRef idx="minor">
+                <a:schemeClr val="lt1"/>
+              </a:fontRef>
+            </p:style>
+            <p:txBody>
+              <a:bodyPr rtlCol="0" anchor="ctr"/>
+              <a:lstStyle/>
+              <a:p>
+                <a:pPr algn="ctr"/>
+                <a:endParaRPr lang="en-US" sz="450" dirty="0"/>
+              </a:p>
+            </p:txBody>
+          </p:sp>
+          <p:sp>
+            <p:nvSpPr>
+              <p:cNvPr id="88" name="Rectangle 87">
+                <a:extLst>
+                  <a:ext uri="{FF2B5EF4-FFF2-40B4-BE49-F238E27FC236}">
+                    <a16:creationId xmlns:a16="http://schemas.microsoft.com/office/drawing/2014/main" id="{0859FADD-99C2-29A7-7FD6-F72149496223}"/>
+                  </a:ext>
+                </a:extLst>
+              </p:cNvPr>
+              <p:cNvSpPr/>
+              <p:nvPr/>
+            </p:nvSpPr>
+            <p:spPr>
+              <a:xfrm>
+                <a:off x="6696286" y="7819948"/>
+                <a:ext cx="557072" cy="914400"/>
+              </a:xfrm>
+              <a:prstGeom prst="rect">
+                <a:avLst/>
+              </a:prstGeom>
+              <a:solidFill>
+                <a:schemeClr val="accent1">
+                  <a:alpha val="66000"/>
+                </a:schemeClr>
+              </a:solidFill>
+              <a:scene3d>
+                <a:camera prst="isometricRightUp"/>
+                <a:lightRig rig="threePt" dir="t"/>
+              </a:scene3d>
+            </p:spPr>
+            <p:style>
+              <a:lnRef idx="2">
+                <a:schemeClr val="accent1">
+                  <a:shade val="50000"/>
+                </a:schemeClr>
+              </a:lnRef>
+              <a:fillRef idx="1">
+                <a:schemeClr val="accent1"/>
+              </a:fillRef>
+              <a:effectRef idx="0">
+                <a:schemeClr val="accent1"/>
+              </a:effectRef>
+              <a:fontRef idx="minor">
+                <a:schemeClr val="lt1"/>
+              </a:fontRef>
+            </p:style>
+            <p:txBody>
+              <a:bodyPr rtlCol="0" anchor="ctr"/>
+              <a:lstStyle/>
+              <a:p>
+                <a:pPr algn="ctr"/>
+                <a:endParaRPr lang="en-US" sz="450" dirty="0"/>
+              </a:p>
+            </p:txBody>
+          </p:sp>
+          <p:sp>
+            <p:nvSpPr>
+              <p:cNvPr id="89" name="Rectangle 88">
+                <a:extLst>
+                  <a:ext uri="{FF2B5EF4-FFF2-40B4-BE49-F238E27FC236}">
+                    <a16:creationId xmlns:a16="http://schemas.microsoft.com/office/drawing/2014/main" id="{803988AC-0E8A-7DFD-C149-96BFCBA8E398}"/>
+                  </a:ext>
+                </a:extLst>
+              </p:cNvPr>
+              <p:cNvSpPr/>
+              <p:nvPr/>
+            </p:nvSpPr>
+            <p:spPr>
+              <a:xfrm>
+                <a:off x="6864897" y="7819948"/>
+                <a:ext cx="557072" cy="914400"/>
+              </a:xfrm>
+              <a:prstGeom prst="rect">
+                <a:avLst/>
+              </a:prstGeom>
+              <a:solidFill>
+                <a:schemeClr val="accent1">
+                  <a:alpha val="66000"/>
+                </a:schemeClr>
+              </a:solidFill>
+              <a:scene3d>
+                <a:camera prst="isometricRightUp"/>
+                <a:lightRig rig="threePt" dir="t"/>
+              </a:scene3d>
+            </p:spPr>
+            <p:style>
+              <a:lnRef idx="2">
+                <a:schemeClr val="accent1">
+                  <a:shade val="50000"/>
+                </a:schemeClr>
+              </a:lnRef>
+              <a:fillRef idx="1">
+                <a:schemeClr val="accent1"/>
+              </a:fillRef>
+              <a:effectRef idx="0">
+                <a:schemeClr val="accent1"/>
+              </a:effectRef>
+              <a:fontRef idx="minor">
+                <a:schemeClr val="lt1"/>
+              </a:fontRef>
+            </p:style>
+            <p:txBody>
+              <a:bodyPr rtlCol="0" anchor="ctr"/>
+              <a:lstStyle/>
+              <a:p>
+                <a:pPr algn="ctr"/>
+                <a:endParaRPr lang="en-US" sz="450" dirty="0"/>
+              </a:p>
+            </p:txBody>
+          </p:sp>
+          <p:sp>
+            <p:nvSpPr>
+              <p:cNvPr id="91" name="Rectangle 90">
+                <a:extLst>
+                  <a:ext uri="{FF2B5EF4-FFF2-40B4-BE49-F238E27FC236}">
+                    <a16:creationId xmlns:a16="http://schemas.microsoft.com/office/drawing/2014/main" id="{70C02901-D7B9-0D99-25A3-F035C2A80012}"/>
+                  </a:ext>
+                </a:extLst>
+              </p:cNvPr>
+              <p:cNvSpPr/>
+              <p:nvPr/>
+            </p:nvSpPr>
+            <p:spPr>
+              <a:xfrm>
+                <a:off x="7016049" y="7819948"/>
+                <a:ext cx="557072" cy="914400"/>
+              </a:xfrm>
+              <a:prstGeom prst="rect">
+                <a:avLst/>
+              </a:prstGeom>
+              <a:solidFill>
+                <a:schemeClr val="accent1">
+                  <a:alpha val="66000"/>
+                </a:schemeClr>
+              </a:solidFill>
+              <a:scene3d>
+                <a:camera prst="isometricRightUp"/>
+                <a:lightRig rig="threePt" dir="t"/>
+              </a:scene3d>
+            </p:spPr>
+            <p:style>
+              <a:lnRef idx="2">
+                <a:schemeClr val="accent1">
+                  <a:shade val="50000"/>
+                </a:schemeClr>
+              </a:lnRef>
+              <a:fillRef idx="1">
+                <a:schemeClr val="accent1"/>
+              </a:fillRef>
+              <a:effectRef idx="0">
+                <a:schemeClr val="accent1"/>
+              </a:effectRef>
+              <a:fontRef idx="minor">
+                <a:schemeClr val="lt1"/>
+              </a:fontRef>
+            </p:style>
+            <p:txBody>
+              <a:bodyPr rtlCol="0" anchor="ctr"/>
+              <a:lstStyle/>
+              <a:p>
+                <a:pPr algn="ctr"/>
+                <a:endParaRPr lang="en-US" sz="450" dirty="0"/>
+              </a:p>
+            </p:txBody>
+          </p:sp>
+          <p:sp>
+            <p:nvSpPr>
+              <p:cNvPr id="92" name="Rectangle 91">
+                <a:extLst>
+                  <a:ext uri="{FF2B5EF4-FFF2-40B4-BE49-F238E27FC236}">
+                    <a16:creationId xmlns:a16="http://schemas.microsoft.com/office/drawing/2014/main" id="{BDBE4906-2D11-F123-9186-E4AF7BC48D7B}"/>
+                  </a:ext>
+                </a:extLst>
+              </p:cNvPr>
+              <p:cNvSpPr/>
+              <p:nvPr/>
+            </p:nvSpPr>
+            <p:spPr>
+              <a:xfrm>
+                <a:off x="7176250" y="7819948"/>
+                <a:ext cx="557072" cy="914400"/>
+              </a:xfrm>
+              <a:prstGeom prst="rect">
+                <a:avLst/>
+              </a:prstGeom>
+              <a:solidFill>
+                <a:schemeClr val="accent1">
+                  <a:alpha val="66000"/>
+                </a:schemeClr>
+              </a:solidFill>
+              <a:scene3d>
+                <a:camera prst="isometricRightUp"/>
+                <a:lightRig rig="threePt" dir="t"/>
+              </a:scene3d>
+            </p:spPr>
+            <p:style>
+              <a:lnRef idx="2">
+                <a:schemeClr val="accent1">
+                  <a:shade val="50000"/>
+                </a:schemeClr>
+              </a:lnRef>
+              <a:fillRef idx="1">
+                <a:schemeClr val="accent1"/>
+              </a:fillRef>
+              <a:effectRef idx="0">
+                <a:schemeClr val="accent1"/>
+              </a:effectRef>
+              <a:fontRef idx="minor">
+                <a:schemeClr val="lt1"/>
+              </a:fontRef>
+            </p:style>
+            <p:txBody>
+              <a:bodyPr rtlCol="0" anchor="ctr"/>
+              <a:lstStyle/>
+              <a:p>
+                <a:pPr algn="ctr"/>
+                <a:endParaRPr lang="en-US" sz="450" dirty="0"/>
+              </a:p>
+            </p:txBody>
+          </p:sp>
+          <p:sp>
+            <p:nvSpPr>
+              <p:cNvPr id="93" name="Rectangle 92">
+                <a:extLst>
+                  <a:ext uri="{FF2B5EF4-FFF2-40B4-BE49-F238E27FC236}">
+                    <a16:creationId xmlns:a16="http://schemas.microsoft.com/office/drawing/2014/main" id="{9A6A3F69-82BA-BA97-B5DB-3289EA538771}"/>
+                  </a:ext>
+                </a:extLst>
+              </p:cNvPr>
+              <p:cNvSpPr/>
+              <p:nvPr/>
+            </p:nvSpPr>
+            <p:spPr>
+              <a:xfrm>
+                <a:off x="7344861" y="7819948"/>
+                <a:ext cx="557072" cy="914400"/>
+              </a:xfrm>
+              <a:prstGeom prst="rect">
+                <a:avLst/>
+              </a:prstGeom>
+              <a:solidFill>
+                <a:schemeClr val="accent1">
+                  <a:alpha val="66000"/>
+                </a:schemeClr>
+              </a:solidFill>
+              <a:scene3d>
+                <a:camera prst="isometricRightUp"/>
+                <a:lightRig rig="threePt" dir="t"/>
+              </a:scene3d>
+            </p:spPr>
+            <p:style>
+              <a:lnRef idx="2">
+                <a:schemeClr val="accent1">
+                  <a:shade val="50000"/>
+                </a:schemeClr>
+              </a:lnRef>
+              <a:fillRef idx="1">
+                <a:schemeClr val="accent1"/>
+              </a:fillRef>
+              <a:effectRef idx="0">
+                <a:schemeClr val="accent1"/>
+              </a:effectRef>
+              <a:fontRef idx="minor">
+                <a:schemeClr val="lt1"/>
+              </a:fontRef>
+            </p:style>
+            <p:txBody>
+              <a:bodyPr rtlCol="0" anchor="ctr"/>
+              <a:lstStyle/>
+              <a:p>
+                <a:pPr algn="ctr"/>
+                <a:endParaRPr lang="en-US" sz="450" dirty="0"/>
+              </a:p>
+            </p:txBody>
+          </p:sp>
+        </p:grpSp>
+        <p:sp>
+          <p:nvSpPr>
+            <p:cNvPr id="95" name="Down Arrow 218">
+              <a:extLst>
+                <a:ext uri="{FF2B5EF4-FFF2-40B4-BE49-F238E27FC236}">
+                  <a16:creationId xmlns:a16="http://schemas.microsoft.com/office/drawing/2014/main" id="{7B3ED5C8-D499-EEDC-9CEE-4D4663DD1D83}"/>
+                </a:ext>
+              </a:extLst>
+            </p:cNvPr>
+            <p:cNvSpPr/>
+            <p:nvPr/>
+          </p:nvSpPr>
+          <p:spPr>
+            <a:xfrm rot="16200000">
+              <a:off x="6437412" y="8479010"/>
+              <a:ext cx="422354" cy="510676"/>
+            </a:xfrm>
+            <a:prstGeom prst="downArrow">
+              <a:avLst/>
+            </a:prstGeom>
+            <a:solidFill>
+              <a:srgbClr val="C00000"/>
+            </a:solidFill>
+            <a:ln>
+              <a:solidFill>
+                <a:srgbClr val="C00000"/>
+              </a:solidFill>
+            </a:ln>
+          </p:spPr>
+          <p:style>
+            <a:lnRef idx="2">
+              <a:schemeClr val="accent1">
+                <a:shade val="50000"/>
+              </a:schemeClr>
+            </a:lnRef>
+            <a:fillRef idx="1">
+              <a:schemeClr val="accent1"/>
+            </a:fillRef>
+            <a:effectRef idx="0">
+              <a:schemeClr val="accent1"/>
+            </a:effectRef>
+            <a:fontRef idx="minor">
+              <a:schemeClr val="lt1"/>
+            </a:fontRef>
+          </p:style>
+          <p:txBody>
+            <a:bodyPr rtlCol="0" anchor="ctr"/>
+            <a:lstStyle/>
+            <a:p>
+              <a:pPr algn="ctr"/>
+              <a:endParaRPr lang="en-US" sz="450"/>
+            </a:p>
+          </p:txBody>
+        </p:sp>
+        <p:grpSp>
+          <p:nvGrpSpPr>
+            <p:cNvPr id="109" name="Group 108">
+              <a:extLst>
+                <a:ext uri="{FF2B5EF4-FFF2-40B4-BE49-F238E27FC236}">
+                  <a16:creationId xmlns:a16="http://schemas.microsoft.com/office/drawing/2014/main" id="{5560C476-1589-9203-2311-B32DDFE5830E}"/>
+                </a:ext>
+              </a:extLst>
+            </p:cNvPr>
+            <p:cNvGrpSpPr/>
+            <p:nvPr/>
+          </p:nvGrpSpPr>
+          <p:grpSpPr>
+            <a:xfrm>
+              <a:off x="8811187" y="8480350"/>
+              <a:ext cx="2314465" cy="465175"/>
+              <a:chOff x="8601116" y="8455194"/>
+              <a:chExt cx="2314465" cy="465175"/>
+            </a:xfrm>
+          </p:grpSpPr>
+          <p:sp>
+            <p:nvSpPr>
+              <p:cNvPr id="97" name="Rectangle 96">
+                <a:extLst>
+                  <a:ext uri="{FF2B5EF4-FFF2-40B4-BE49-F238E27FC236}">
+                    <a16:creationId xmlns:a16="http://schemas.microsoft.com/office/drawing/2014/main" id="{E607565E-7CEE-8ECC-C752-6EA9099871DE}"/>
+                  </a:ext>
+                </a:extLst>
+              </p:cNvPr>
+              <p:cNvSpPr/>
+              <p:nvPr/>
+            </p:nvSpPr>
+            <p:spPr>
+              <a:xfrm>
+                <a:off x="8601116" y="8463169"/>
+                <a:ext cx="557072" cy="457200"/>
+              </a:xfrm>
+              <a:prstGeom prst="rect">
+                <a:avLst/>
+              </a:prstGeom>
+              <a:solidFill>
+                <a:schemeClr val="accent1">
+                  <a:alpha val="66000"/>
+                </a:schemeClr>
+              </a:solidFill>
+              <a:scene3d>
+                <a:camera prst="isometricRightUp"/>
+                <a:lightRig rig="threePt" dir="t"/>
+              </a:scene3d>
+            </p:spPr>
+            <p:style>
+              <a:lnRef idx="2">
+                <a:schemeClr val="accent1">
+                  <a:shade val="50000"/>
+                </a:schemeClr>
+              </a:lnRef>
+              <a:fillRef idx="1">
+                <a:schemeClr val="accent1"/>
+              </a:fillRef>
+              <a:effectRef idx="0">
+                <a:schemeClr val="accent1"/>
+              </a:effectRef>
+              <a:fontRef idx="minor">
+                <a:schemeClr val="lt1"/>
+              </a:fontRef>
+            </p:style>
+            <p:txBody>
+              <a:bodyPr rtlCol="0" anchor="ctr"/>
+              <a:lstStyle/>
+              <a:p>
+                <a:pPr algn="ctr"/>
+                <a:endParaRPr lang="en-US" sz="450" dirty="0"/>
+              </a:p>
+            </p:txBody>
+          </p:sp>
+          <p:sp>
+            <p:nvSpPr>
+              <p:cNvPr id="98" name="Rectangle 97">
+                <a:extLst>
+                  <a:ext uri="{FF2B5EF4-FFF2-40B4-BE49-F238E27FC236}">
+                    <a16:creationId xmlns:a16="http://schemas.microsoft.com/office/drawing/2014/main" id="{EC0A8D49-BE8C-F4F3-001E-857D93E36794}"/>
+                  </a:ext>
+                </a:extLst>
+              </p:cNvPr>
+              <p:cNvSpPr/>
+              <p:nvPr/>
+            </p:nvSpPr>
+            <p:spPr>
+              <a:xfrm>
+                <a:off x="8761317" y="8463169"/>
+                <a:ext cx="557072" cy="457200"/>
+              </a:xfrm>
+              <a:prstGeom prst="rect">
+                <a:avLst/>
+              </a:prstGeom>
+              <a:solidFill>
+                <a:schemeClr val="accent1">
+                  <a:alpha val="66000"/>
+                </a:schemeClr>
+              </a:solidFill>
+              <a:scene3d>
+                <a:camera prst="isometricRightUp"/>
+                <a:lightRig rig="threePt" dir="t"/>
+              </a:scene3d>
+            </p:spPr>
+            <p:style>
+              <a:lnRef idx="2">
+                <a:schemeClr val="accent1">
+                  <a:shade val="50000"/>
+                </a:schemeClr>
+              </a:lnRef>
+              <a:fillRef idx="1">
+                <a:schemeClr val="accent1"/>
+              </a:fillRef>
+              <a:effectRef idx="0">
+                <a:schemeClr val="accent1"/>
+              </a:effectRef>
+              <a:fontRef idx="minor">
+                <a:schemeClr val="lt1"/>
+              </a:fontRef>
+            </p:style>
+            <p:txBody>
+              <a:bodyPr rtlCol="0" anchor="ctr"/>
+              <a:lstStyle/>
+              <a:p>
+                <a:pPr algn="ctr"/>
+                <a:endParaRPr lang="en-US" sz="450" dirty="0"/>
+              </a:p>
+            </p:txBody>
+          </p:sp>
+          <p:sp>
+            <p:nvSpPr>
+              <p:cNvPr id="99" name="Rectangle 98">
+                <a:extLst>
+                  <a:ext uri="{FF2B5EF4-FFF2-40B4-BE49-F238E27FC236}">
+                    <a16:creationId xmlns:a16="http://schemas.microsoft.com/office/drawing/2014/main" id="{00DF76BC-1799-99C5-2946-FD534FB4F608}"/>
+                  </a:ext>
+                </a:extLst>
+              </p:cNvPr>
+              <p:cNvSpPr/>
+              <p:nvPr/>
+            </p:nvSpPr>
+            <p:spPr>
+              <a:xfrm>
+                <a:off x="8929928" y="8463169"/>
+                <a:ext cx="557072" cy="457200"/>
+              </a:xfrm>
+              <a:prstGeom prst="rect">
+                <a:avLst/>
+              </a:prstGeom>
+              <a:solidFill>
+                <a:schemeClr val="accent1">
+                  <a:alpha val="66000"/>
+                </a:schemeClr>
+              </a:solidFill>
+              <a:scene3d>
+                <a:camera prst="isometricRightUp"/>
+                <a:lightRig rig="threePt" dir="t"/>
+              </a:scene3d>
+            </p:spPr>
+            <p:style>
+              <a:lnRef idx="2">
+                <a:schemeClr val="accent1">
+                  <a:shade val="50000"/>
+                </a:schemeClr>
+              </a:lnRef>
+              <a:fillRef idx="1">
+                <a:schemeClr val="accent1"/>
+              </a:fillRef>
+              <a:effectRef idx="0">
+                <a:schemeClr val="accent1"/>
+              </a:effectRef>
+              <a:fontRef idx="minor">
+                <a:schemeClr val="lt1"/>
+              </a:fontRef>
+            </p:style>
+            <p:txBody>
+              <a:bodyPr rtlCol="0" anchor="ctr"/>
+              <a:lstStyle/>
+              <a:p>
+                <a:pPr algn="ctr"/>
+                <a:endParaRPr lang="en-US" sz="450" dirty="0"/>
+              </a:p>
+            </p:txBody>
+          </p:sp>
+          <p:sp>
+            <p:nvSpPr>
+              <p:cNvPr id="100" name="Rectangle 99">
+                <a:extLst>
+                  <a:ext uri="{FF2B5EF4-FFF2-40B4-BE49-F238E27FC236}">
+                    <a16:creationId xmlns:a16="http://schemas.microsoft.com/office/drawing/2014/main" id="{86B4F843-706D-9716-71C2-690FF30E904D}"/>
+                  </a:ext>
+                </a:extLst>
+              </p:cNvPr>
+              <p:cNvSpPr/>
+              <p:nvPr/>
+            </p:nvSpPr>
+            <p:spPr>
+              <a:xfrm>
+                <a:off x="9081080" y="8463169"/>
+                <a:ext cx="557072" cy="457200"/>
+              </a:xfrm>
+              <a:prstGeom prst="rect">
+                <a:avLst/>
+              </a:prstGeom>
+              <a:solidFill>
+                <a:schemeClr val="accent1">
+                  <a:alpha val="66000"/>
+                </a:schemeClr>
+              </a:solidFill>
+              <a:scene3d>
+                <a:camera prst="isometricRightUp"/>
+                <a:lightRig rig="threePt" dir="t"/>
+              </a:scene3d>
+            </p:spPr>
+            <p:style>
+              <a:lnRef idx="2">
+                <a:schemeClr val="accent1">
+                  <a:shade val="50000"/>
+                </a:schemeClr>
+              </a:lnRef>
+              <a:fillRef idx="1">
+                <a:schemeClr val="accent1"/>
+              </a:fillRef>
+              <a:effectRef idx="0">
+                <a:schemeClr val="accent1"/>
+              </a:effectRef>
+              <a:fontRef idx="minor">
+                <a:schemeClr val="lt1"/>
+              </a:fontRef>
+            </p:style>
+            <p:txBody>
+              <a:bodyPr rtlCol="0" anchor="ctr"/>
+              <a:lstStyle/>
+              <a:p>
+                <a:pPr algn="ctr"/>
+                <a:endParaRPr lang="en-US" sz="450" dirty="0"/>
+              </a:p>
+            </p:txBody>
+          </p:sp>
+          <p:sp>
+            <p:nvSpPr>
+              <p:cNvPr id="101" name="Rectangle 100">
+                <a:extLst>
+                  <a:ext uri="{FF2B5EF4-FFF2-40B4-BE49-F238E27FC236}">
+                    <a16:creationId xmlns:a16="http://schemas.microsoft.com/office/drawing/2014/main" id="{3C36BF1D-BB62-9237-A8B2-49886981F96A}"/>
+                  </a:ext>
+                </a:extLst>
+              </p:cNvPr>
+              <p:cNvSpPr/>
+              <p:nvPr/>
+            </p:nvSpPr>
+            <p:spPr>
+              <a:xfrm>
+                <a:off x="9241281" y="8463169"/>
+                <a:ext cx="557072" cy="457200"/>
+              </a:xfrm>
+              <a:prstGeom prst="rect">
+                <a:avLst/>
+              </a:prstGeom>
+              <a:solidFill>
+                <a:schemeClr val="accent1">
+                  <a:alpha val="66000"/>
+                </a:schemeClr>
+              </a:solidFill>
+              <a:scene3d>
+                <a:camera prst="isometricRightUp"/>
+                <a:lightRig rig="threePt" dir="t"/>
+              </a:scene3d>
+            </p:spPr>
+            <p:style>
+              <a:lnRef idx="2">
+                <a:schemeClr val="accent1">
+                  <a:shade val="50000"/>
+                </a:schemeClr>
+              </a:lnRef>
+              <a:fillRef idx="1">
+                <a:schemeClr val="accent1"/>
+              </a:fillRef>
+              <a:effectRef idx="0">
+                <a:schemeClr val="accent1"/>
+              </a:effectRef>
+              <a:fontRef idx="minor">
+                <a:schemeClr val="lt1"/>
+              </a:fontRef>
+            </p:style>
+            <p:txBody>
+              <a:bodyPr rtlCol="0" anchor="ctr"/>
+              <a:lstStyle/>
+              <a:p>
+                <a:pPr algn="ctr"/>
+                <a:endParaRPr lang="en-US" sz="450" dirty="0"/>
+              </a:p>
+            </p:txBody>
+          </p:sp>
+          <p:sp>
+            <p:nvSpPr>
+              <p:cNvPr id="102" name="Rectangle 101">
+                <a:extLst>
+                  <a:ext uri="{FF2B5EF4-FFF2-40B4-BE49-F238E27FC236}">
+                    <a16:creationId xmlns:a16="http://schemas.microsoft.com/office/drawing/2014/main" id="{65D8580A-C13E-CA99-45C2-B8AE509173CC}"/>
+                  </a:ext>
+                </a:extLst>
+              </p:cNvPr>
+              <p:cNvSpPr/>
+              <p:nvPr/>
+            </p:nvSpPr>
+            <p:spPr>
+              <a:xfrm>
+                <a:off x="9409892" y="8463169"/>
+                <a:ext cx="557072" cy="457200"/>
+              </a:xfrm>
+              <a:prstGeom prst="rect">
+                <a:avLst/>
+              </a:prstGeom>
+              <a:solidFill>
+                <a:schemeClr val="accent1">
+                  <a:alpha val="66000"/>
+                </a:schemeClr>
+              </a:solidFill>
+              <a:scene3d>
+                <a:camera prst="isometricRightUp"/>
+                <a:lightRig rig="threePt" dir="t"/>
+              </a:scene3d>
+            </p:spPr>
+            <p:style>
+              <a:lnRef idx="2">
+                <a:schemeClr val="accent1">
+                  <a:shade val="50000"/>
+                </a:schemeClr>
+              </a:lnRef>
+              <a:fillRef idx="1">
+                <a:schemeClr val="accent1"/>
+              </a:fillRef>
+              <a:effectRef idx="0">
+                <a:schemeClr val="accent1"/>
+              </a:effectRef>
+              <a:fontRef idx="minor">
+                <a:schemeClr val="lt1"/>
+              </a:fontRef>
+            </p:style>
+            <p:txBody>
+              <a:bodyPr rtlCol="0" anchor="ctr"/>
+              <a:lstStyle/>
+              <a:p>
+                <a:pPr algn="ctr"/>
+                <a:endParaRPr lang="en-US" sz="450" dirty="0"/>
+              </a:p>
+            </p:txBody>
+          </p:sp>
+          <p:sp>
+            <p:nvSpPr>
+              <p:cNvPr id="103" name="Rectangle 102">
+                <a:extLst>
+                  <a:ext uri="{FF2B5EF4-FFF2-40B4-BE49-F238E27FC236}">
+                    <a16:creationId xmlns:a16="http://schemas.microsoft.com/office/drawing/2014/main" id="{1F54FEDC-322C-2C18-1346-3054127B187B}"/>
+                  </a:ext>
+                </a:extLst>
+              </p:cNvPr>
+              <p:cNvSpPr/>
+              <p:nvPr/>
+            </p:nvSpPr>
+            <p:spPr>
+              <a:xfrm>
+                <a:off x="9549733" y="8455194"/>
+                <a:ext cx="557072" cy="457200"/>
+              </a:xfrm>
+              <a:prstGeom prst="rect">
+                <a:avLst/>
+              </a:prstGeom>
+              <a:solidFill>
+                <a:schemeClr val="accent1">
+                  <a:alpha val="66000"/>
+                </a:schemeClr>
+              </a:solidFill>
+              <a:scene3d>
+                <a:camera prst="isometricRightUp"/>
+                <a:lightRig rig="threePt" dir="t"/>
+              </a:scene3d>
+            </p:spPr>
+            <p:style>
+              <a:lnRef idx="2">
+                <a:schemeClr val="accent1">
+                  <a:shade val="50000"/>
+                </a:schemeClr>
+              </a:lnRef>
+              <a:fillRef idx="1">
+                <a:schemeClr val="accent1"/>
+              </a:fillRef>
+              <a:effectRef idx="0">
+                <a:schemeClr val="accent1"/>
+              </a:effectRef>
+              <a:fontRef idx="minor">
+                <a:schemeClr val="lt1"/>
+              </a:fontRef>
+            </p:style>
+            <p:txBody>
+              <a:bodyPr rtlCol="0" anchor="ctr"/>
+              <a:lstStyle/>
+              <a:p>
+                <a:pPr algn="ctr"/>
+                <a:endParaRPr lang="en-US" sz="450" dirty="0"/>
+              </a:p>
+            </p:txBody>
+          </p:sp>
+          <p:sp>
+            <p:nvSpPr>
+              <p:cNvPr id="104" name="Rectangle 103">
+                <a:extLst>
+                  <a:ext uri="{FF2B5EF4-FFF2-40B4-BE49-F238E27FC236}">
+                    <a16:creationId xmlns:a16="http://schemas.microsoft.com/office/drawing/2014/main" id="{846D4898-35F9-0549-2FF6-3FB0CBED4E4A}"/>
+                  </a:ext>
+                </a:extLst>
+              </p:cNvPr>
+              <p:cNvSpPr/>
+              <p:nvPr/>
+            </p:nvSpPr>
+            <p:spPr>
+              <a:xfrm>
+                <a:off x="9709934" y="8455194"/>
+                <a:ext cx="557072" cy="457200"/>
+              </a:xfrm>
+              <a:prstGeom prst="rect">
+                <a:avLst/>
+              </a:prstGeom>
+              <a:solidFill>
+                <a:schemeClr val="accent1">
+                  <a:alpha val="66000"/>
+                </a:schemeClr>
+              </a:solidFill>
+              <a:scene3d>
+                <a:camera prst="isometricRightUp"/>
+                <a:lightRig rig="threePt" dir="t"/>
+              </a:scene3d>
+            </p:spPr>
+            <p:style>
+              <a:lnRef idx="2">
+                <a:schemeClr val="accent1">
+                  <a:shade val="50000"/>
+                </a:schemeClr>
+              </a:lnRef>
+              <a:fillRef idx="1">
+                <a:schemeClr val="accent1"/>
+              </a:fillRef>
+              <a:effectRef idx="0">
+                <a:schemeClr val="accent1"/>
+              </a:effectRef>
+              <a:fontRef idx="minor">
+                <a:schemeClr val="lt1"/>
+              </a:fontRef>
+            </p:style>
+            <p:txBody>
+              <a:bodyPr rtlCol="0" anchor="ctr"/>
+              <a:lstStyle/>
+              <a:p>
+                <a:pPr algn="ctr"/>
+                <a:endParaRPr lang="en-US" sz="450" dirty="0"/>
+              </a:p>
+            </p:txBody>
+          </p:sp>
+          <p:sp>
+            <p:nvSpPr>
+              <p:cNvPr id="105" name="Rectangle 104">
+                <a:extLst>
+                  <a:ext uri="{FF2B5EF4-FFF2-40B4-BE49-F238E27FC236}">
+                    <a16:creationId xmlns:a16="http://schemas.microsoft.com/office/drawing/2014/main" id="{FC01FF3A-E749-6946-EFF3-9041C024B97D}"/>
+                  </a:ext>
+                </a:extLst>
+              </p:cNvPr>
+              <p:cNvSpPr/>
+              <p:nvPr/>
+            </p:nvSpPr>
+            <p:spPr>
+              <a:xfrm>
+                <a:off x="9878545" y="8455194"/>
+                <a:ext cx="557072" cy="457200"/>
+              </a:xfrm>
+              <a:prstGeom prst="rect">
+                <a:avLst/>
+              </a:prstGeom>
+              <a:solidFill>
+                <a:schemeClr val="accent1">
+                  <a:alpha val="66000"/>
+                </a:schemeClr>
+              </a:solidFill>
+              <a:scene3d>
+                <a:camera prst="isometricRightUp"/>
+                <a:lightRig rig="threePt" dir="t"/>
+              </a:scene3d>
+            </p:spPr>
+            <p:style>
+              <a:lnRef idx="2">
+                <a:schemeClr val="accent1">
+                  <a:shade val="50000"/>
+                </a:schemeClr>
+              </a:lnRef>
+              <a:fillRef idx="1">
+                <a:schemeClr val="accent1"/>
+              </a:fillRef>
+              <a:effectRef idx="0">
+                <a:schemeClr val="accent1"/>
+              </a:effectRef>
+              <a:fontRef idx="minor">
+                <a:schemeClr val="lt1"/>
+              </a:fontRef>
+            </p:style>
+            <p:txBody>
+              <a:bodyPr rtlCol="0" anchor="ctr"/>
+              <a:lstStyle/>
+              <a:p>
+                <a:pPr algn="ctr"/>
+                <a:endParaRPr lang="en-US" sz="450" dirty="0"/>
+              </a:p>
+            </p:txBody>
+          </p:sp>
+          <p:sp>
+            <p:nvSpPr>
+              <p:cNvPr id="106" name="Rectangle 105">
+                <a:extLst>
+                  <a:ext uri="{FF2B5EF4-FFF2-40B4-BE49-F238E27FC236}">
+                    <a16:creationId xmlns:a16="http://schemas.microsoft.com/office/drawing/2014/main" id="{6ECE7AE8-87CD-7620-17AD-3949BF2A08D7}"/>
+                  </a:ext>
+                </a:extLst>
+              </p:cNvPr>
+              <p:cNvSpPr/>
+              <p:nvPr/>
+            </p:nvSpPr>
+            <p:spPr>
+              <a:xfrm>
+                <a:off x="10029697" y="8455194"/>
+                <a:ext cx="557072" cy="457200"/>
+              </a:xfrm>
+              <a:prstGeom prst="rect">
+                <a:avLst/>
+              </a:prstGeom>
+              <a:solidFill>
+                <a:schemeClr val="accent1">
+                  <a:alpha val="66000"/>
+                </a:schemeClr>
+              </a:solidFill>
+              <a:scene3d>
+                <a:camera prst="isometricRightUp"/>
+                <a:lightRig rig="threePt" dir="t"/>
+              </a:scene3d>
+            </p:spPr>
+            <p:style>
+              <a:lnRef idx="2">
+                <a:schemeClr val="accent1">
+                  <a:shade val="50000"/>
+                </a:schemeClr>
+              </a:lnRef>
+              <a:fillRef idx="1">
+                <a:schemeClr val="accent1"/>
+              </a:fillRef>
+              <a:effectRef idx="0">
+                <a:schemeClr val="accent1"/>
+              </a:effectRef>
+              <a:fontRef idx="minor">
+                <a:schemeClr val="lt1"/>
+              </a:fontRef>
+            </p:style>
+            <p:txBody>
+              <a:bodyPr rtlCol="0" anchor="ctr"/>
+              <a:lstStyle/>
+              <a:p>
+                <a:pPr algn="ctr"/>
+                <a:endParaRPr lang="en-US" sz="450" dirty="0"/>
+              </a:p>
+            </p:txBody>
+          </p:sp>
+          <p:sp>
+            <p:nvSpPr>
+              <p:cNvPr id="107" name="Rectangle 106">
+                <a:extLst>
+                  <a:ext uri="{FF2B5EF4-FFF2-40B4-BE49-F238E27FC236}">
+                    <a16:creationId xmlns:a16="http://schemas.microsoft.com/office/drawing/2014/main" id="{B1C87431-2D5E-8924-2979-AA843F85FB76}"/>
+                  </a:ext>
+                </a:extLst>
+              </p:cNvPr>
+              <p:cNvSpPr/>
+              <p:nvPr/>
+            </p:nvSpPr>
+            <p:spPr>
+              <a:xfrm>
+                <a:off x="10189898" y="8455194"/>
+                <a:ext cx="557072" cy="457200"/>
+              </a:xfrm>
+              <a:prstGeom prst="rect">
+                <a:avLst/>
+              </a:prstGeom>
+              <a:solidFill>
+                <a:schemeClr val="accent1">
+                  <a:alpha val="66000"/>
+                </a:schemeClr>
+              </a:solidFill>
+              <a:scene3d>
+                <a:camera prst="isometricRightUp"/>
+                <a:lightRig rig="threePt" dir="t"/>
+              </a:scene3d>
+            </p:spPr>
+            <p:style>
+              <a:lnRef idx="2">
+                <a:schemeClr val="accent1">
+                  <a:shade val="50000"/>
+                </a:schemeClr>
+              </a:lnRef>
+              <a:fillRef idx="1">
+                <a:schemeClr val="accent1"/>
+              </a:fillRef>
+              <a:effectRef idx="0">
+                <a:schemeClr val="accent1"/>
+              </a:effectRef>
+              <a:fontRef idx="minor">
+                <a:schemeClr val="lt1"/>
+              </a:fontRef>
+            </p:style>
+            <p:txBody>
+              <a:bodyPr rtlCol="0" anchor="ctr"/>
+              <a:lstStyle/>
+              <a:p>
+                <a:pPr algn="ctr"/>
+                <a:endParaRPr lang="en-US" sz="450" dirty="0"/>
+              </a:p>
+            </p:txBody>
+          </p:sp>
+          <p:sp>
+            <p:nvSpPr>
+              <p:cNvPr id="108" name="Rectangle 107">
+                <a:extLst>
+                  <a:ext uri="{FF2B5EF4-FFF2-40B4-BE49-F238E27FC236}">
+                    <a16:creationId xmlns:a16="http://schemas.microsoft.com/office/drawing/2014/main" id="{AE994923-15D7-5175-9824-77CE9D4DB476}"/>
+                  </a:ext>
+                </a:extLst>
+              </p:cNvPr>
+              <p:cNvSpPr/>
+              <p:nvPr/>
+            </p:nvSpPr>
+            <p:spPr>
+              <a:xfrm>
+                <a:off x="10358509" y="8455194"/>
+                <a:ext cx="557072" cy="457200"/>
+              </a:xfrm>
+              <a:prstGeom prst="rect">
+                <a:avLst/>
+              </a:prstGeom>
+              <a:solidFill>
+                <a:schemeClr val="accent1">
+                  <a:alpha val="66000"/>
+                </a:schemeClr>
+              </a:solidFill>
+              <a:scene3d>
+                <a:camera prst="isometricRightUp"/>
+                <a:lightRig rig="threePt" dir="t"/>
+              </a:scene3d>
+            </p:spPr>
+            <p:style>
+              <a:lnRef idx="2">
+                <a:schemeClr val="accent1">
+                  <a:shade val="50000"/>
+                </a:schemeClr>
+              </a:lnRef>
+              <a:fillRef idx="1">
+                <a:schemeClr val="accent1"/>
+              </a:fillRef>
+              <a:effectRef idx="0">
+                <a:schemeClr val="accent1"/>
+              </a:effectRef>
+              <a:fontRef idx="minor">
+                <a:schemeClr val="lt1"/>
+              </a:fontRef>
+            </p:style>
+            <p:txBody>
+              <a:bodyPr rtlCol="0" anchor="ctr"/>
+              <a:lstStyle/>
+              <a:p>
+                <a:pPr algn="ctr"/>
+                <a:endParaRPr lang="en-US" sz="450" dirty="0"/>
+              </a:p>
+            </p:txBody>
+          </p:sp>
+        </p:grpSp>
+        <p:sp>
+          <p:nvSpPr>
+            <p:cNvPr id="110" name="Down Arrow 218">
+              <a:extLst>
+                <a:ext uri="{FF2B5EF4-FFF2-40B4-BE49-F238E27FC236}">
+                  <a16:creationId xmlns:a16="http://schemas.microsoft.com/office/drawing/2014/main" id="{73F72CB2-2833-7A78-8D34-09CFBAAA5BAF}"/>
+                </a:ext>
+              </a:extLst>
+            </p:cNvPr>
+            <p:cNvSpPr/>
+            <p:nvPr/>
+          </p:nvSpPr>
+          <p:spPr>
+            <a:xfrm rot="16200000">
+              <a:off x="8317095" y="8479010"/>
+              <a:ext cx="422354" cy="510676"/>
+            </a:xfrm>
+            <a:prstGeom prst="downArrow">
+              <a:avLst/>
+            </a:prstGeom>
+            <a:solidFill>
+              <a:srgbClr val="C00000"/>
+            </a:solidFill>
+            <a:ln>
+              <a:solidFill>
+                <a:srgbClr val="C00000"/>
+              </a:solidFill>
+            </a:ln>
+          </p:spPr>
+          <p:style>
+            <a:lnRef idx="2">
+              <a:schemeClr val="accent1">
+                <a:shade val="50000"/>
+              </a:schemeClr>
+            </a:lnRef>
+            <a:fillRef idx="1">
+              <a:schemeClr val="accent1"/>
+            </a:fillRef>
+            <a:effectRef idx="0">
+              <a:schemeClr val="accent1"/>
+            </a:effectRef>
+            <a:fontRef idx="minor">
+              <a:schemeClr val="lt1"/>
+            </a:fontRef>
+          </p:style>
+          <p:txBody>
+            <a:bodyPr rtlCol="0" anchor="ctr"/>
+            <a:lstStyle/>
+            <a:p>
+              <a:pPr algn="ctr"/>
+              <a:endParaRPr lang="en-US" sz="450"/>
+            </a:p>
+          </p:txBody>
+        </p:sp>
+        <p:sp>
+          <p:nvSpPr>
+            <p:cNvPr id="111" name="Rectangle 110">
+              <a:extLst>
+                <a:ext uri="{FF2B5EF4-FFF2-40B4-BE49-F238E27FC236}">
+                  <a16:creationId xmlns:a16="http://schemas.microsoft.com/office/drawing/2014/main" id="{D0308873-913F-BE91-BA0F-22F8C557191A}"/>
+                </a:ext>
+              </a:extLst>
+            </p:cNvPr>
+            <p:cNvSpPr/>
+            <p:nvPr/>
+          </p:nvSpPr>
+          <p:spPr>
+            <a:xfrm>
+              <a:off x="11823025" y="8163809"/>
+              <a:ext cx="914400" cy="457200"/>
+            </a:xfrm>
+            <a:prstGeom prst="rect">
+              <a:avLst/>
+            </a:prstGeom>
+            <a:solidFill>
+              <a:srgbClr val="00B050"/>
+            </a:solidFill>
+          </p:spPr>
+          <p:style>
+            <a:lnRef idx="2">
+              <a:schemeClr val="accent1">
+                <a:shade val="50000"/>
+              </a:schemeClr>
+            </a:lnRef>
+            <a:fillRef idx="1">
+              <a:schemeClr val="accent1"/>
+            </a:fillRef>
+            <a:effectRef idx="0">
+              <a:schemeClr val="accent1"/>
+            </a:effectRef>
+            <a:fontRef idx="minor">
+              <a:schemeClr val="lt1"/>
+            </a:fontRef>
+          </p:style>
+          <p:txBody>
+            <a:bodyPr rtlCol="0" anchor="ctr"/>
+            <a:lstStyle/>
+            <a:p>
+              <a:pPr algn="ctr"/>
+              <a:endParaRPr lang="en-US"/>
+            </a:p>
+          </p:txBody>
+        </p:sp>
+        <p:sp>
+          <p:nvSpPr>
+            <p:cNvPr id="112" name="Down Arrow 218">
+              <a:extLst>
+                <a:ext uri="{FF2B5EF4-FFF2-40B4-BE49-F238E27FC236}">
+                  <a16:creationId xmlns:a16="http://schemas.microsoft.com/office/drawing/2014/main" id="{C9EAB4DC-C2F6-8300-A2B0-4F51E67AE3E1}"/>
+                </a:ext>
+              </a:extLst>
+            </p:cNvPr>
+            <p:cNvSpPr/>
+            <p:nvPr/>
+          </p:nvSpPr>
+          <p:spPr>
+            <a:xfrm rot="16200000">
+              <a:off x="11185933" y="8415317"/>
+              <a:ext cx="422354" cy="510676"/>
+            </a:xfrm>
+            <a:prstGeom prst="downArrow">
+              <a:avLst/>
+            </a:prstGeom>
+            <a:solidFill>
+              <a:srgbClr val="C00000"/>
+            </a:solidFill>
+            <a:ln>
+              <a:solidFill>
+                <a:srgbClr val="C00000"/>
+              </a:solidFill>
+            </a:ln>
+          </p:spPr>
+          <p:style>
+            <a:lnRef idx="2">
+              <a:schemeClr val="accent1">
+                <a:shade val="50000"/>
+              </a:schemeClr>
+            </a:lnRef>
+            <a:fillRef idx="1">
+              <a:schemeClr val="accent1"/>
+            </a:fillRef>
+            <a:effectRef idx="0">
+              <a:schemeClr val="accent1"/>
+            </a:effectRef>
+            <a:fontRef idx="minor">
+              <a:schemeClr val="lt1"/>
+            </a:fontRef>
+          </p:style>
+          <p:txBody>
+            <a:bodyPr rtlCol="0" anchor="ctr"/>
+            <a:lstStyle/>
+            <a:p>
+              <a:pPr algn="ctr"/>
+              <a:endParaRPr lang="en-US" sz="450"/>
+            </a:p>
+          </p:txBody>
+        </p:sp>
+        <p:sp>
+          <p:nvSpPr>
+            <p:cNvPr id="113" name="Rectangle 112">
+              <a:extLst>
+                <a:ext uri="{FF2B5EF4-FFF2-40B4-BE49-F238E27FC236}">
+                  <a16:creationId xmlns:a16="http://schemas.microsoft.com/office/drawing/2014/main" id="{93D048BC-26EC-98F9-7C3D-817EF9169087}"/>
+                </a:ext>
+              </a:extLst>
+            </p:cNvPr>
+            <p:cNvSpPr/>
+            <p:nvPr/>
+          </p:nvSpPr>
+          <p:spPr>
+            <a:xfrm>
+              <a:off x="11823025" y="8621009"/>
+              <a:ext cx="914400" cy="457200"/>
+            </a:xfrm>
+            <a:prstGeom prst="rect">
+              <a:avLst/>
+            </a:prstGeom>
+            <a:solidFill>
+              <a:srgbClr val="FF0000"/>
+            </a:solidFill>
+          </p:spPr>
+          <p:style>
+            <a:lnRef idx="2">
+              <a:schemeClr val="accent1">
+                <a:shade val="50000"/>
+              </a:schemeClr>
+            </a:lnRef>
+            <a:fillRef idx="1">
+              <a:schemeClr val="accent1"/>
+            </a:fillRef>
+            <a:effectRef idx="0">
+              <a:schemeClr val="accent1"/>
+            </a:effectRef>
+            <a:fontRef idx="minor">
+              <a:schemeClr val="lt1"/>
+            </a:fontRef>
+          </p:style>
+          <p:txBody>
+            <a:bodyPr rtlCol="0" anchor="ctr"/>
+            <a:lstStyle/>
+            <a:p>
+              <a:pPr algn="ctr"/>
+              <a:endParaRPr lang="en-US"/>
+            </a:p>
+          </p:txBody>
+        </p:sp>
+      </p:grpSp>
+    </p:spTree>
+    <p:extLst>
+      <p:ext uri="{BB962C8B-B14F-4D97-AF65-F5344CB8AC3E}">
+        <p14:creationId xmlns:p14="http://schemas.microsoft.com/office/powerpoint/2010/main" val="3843656883"/>
+      </p:ext>
+    </p:extLst>
+  </p:cSld>
+  <p:clrMapOvr>
+    <a:masterClrMapping/>
+  </p:clrMapOvr>
+</p:sld>
+</file>
+
+<file path=ppt/slides/slide3.xml><?xml version="1.0" encoding="utf-8"?>
+<p:sld xmlns:a="http://schemas.openxmlformats.org/drawingml/2006/main" xmlns:r="http://schemas.openxmlformats.org/officeDocument/2006/relationships" xmlns:p="http://schemas.openxmlformats.org/presentationml/2006/main">
+  <p:cSld>
+    <p:spTree>
+      <p:nvGrpSpPr>
+        <p:cNvPr id="1" name=""/>
+        <p:cNvGrpSpPr/>
+        <p:nvPr/>
+      </p:nvGrpSpPr>
+      <p:grpSpPr>
+        <a:xfrm>
+          <a:off x="0" y="0"/>
+          <a:ext cx="0" cy="0"/>
+          <a:chOff x="0" y="0"/>
+          <a:chExt cx="0" cy="0"/>
+        </a:xfrm>
+      </p:grpSpPr>
+      <p:grpSp>
+        <p:nvGrpSpPr>
           <p:cNvPr id="12" name="Group 11"/>
           <p:cNvGrpSpPr/>
           <p:nvPr/>
@@ -20135,7 +24904,7 @@
 </p:sld>
 </file>
 
-<file path=ppt/slides/slide3.xml><?xml version="1.0" encoding="utf-8"?>
+<file path=ppt/slides/slide4.xml><?xml version="1.0" encoding="utf-8"?>
 <p:sld xmlns:a="http://schemas.openxmlformats.org/drawingml/2006/main" xmlns:r="http://schemas.openxmlformats.org/officeDocument/2006/relationships" xmlns:p="http://schemas.openxmlformats.org/presentationml/2006/main">
   <p:cSld>
     <p:spTree>
@@ -22715,10 +27484,9 @@
             <a:lstStyle/>
             <a:p>
               <a:r>
-                <a:rPr lang="en-US" sz="2400" dirty="0" smtClean="0"/>
+                <a:rPr lang="en-US" sz="2400" dirty="0"/>
                 <a:t>A</a:t>
               </a:r>
-              <a:endParaRPr lang="en-US" sz="2400" dirty="0"/>
             </a:p>
           </p:txBody>
         </p:sp>
@@ -22843,10 +27611,9 @@
           <a:lstStyle/>
           <a:p>
             <a:r>
-              <a:rPr lang="en-US" sz="2400" dirty="0" smtClean="0"/>
+              <a:rPr lang="en-US" sz="2400" dirty="0"/>
               <a:t>B</a:t>
             </a:r>
-            <a:endParaRPr lang="en-US" sz="2400" dirty="0"/>
           </a:p>
         </p:txBody>
       </p:sp>
@@ -23729,7 +28496,7 @@
             <a:lstStyle/>
             <a:p>
               <a:r>
-                <a:rPr lang="en-US" sz="2000" dirty="0" smtClean="0"/>
+                <a:rPr lang="en-US" sz="2000" dirty="0"/>
                 <a:t>Standard</a:t>
               </a:r>
               <a:endParaRPr lang="en-US" sz="1600" dirty="0"/>
@@ -25171,25 +29938,24 @@
             <a:p>
               <a:pPr algn="ctr"/>
               <a:r>
-                <a:rPr lang="en-US" sz="2000" dirty="0" smtClean="0"/>
+                <a:rPr lang="en-US" sz="2000" dirty="0"/>
                 <a:t>Bilinear </a:t>
               </a:r>
               <a:r>
-                <a:rPr lang="en-US" sz="2000" dirty="0" err="1" smtClean="0"/>
+                <a:rPr lang="en-US" sz="2000" dirty="0" err="1"/>
                 <a:t>Upsample</a:t>
               </a:r>
               <a:r>
-                <a:rPr lang="en-US" sz="2000" dirty="0" smtClean="0"/>
+                <a:rPr lang="en-US" sz="2000" dirty="0"/>
                 <a:t>,</a:t>
               </a:r>
             </a:p>
             <a:p>
               <a:pPr algn="ctr"/>
               <a:r>
-                <a:rPr lang="en-US" sz="2000" dirty="0" smtClean="0"/>
+                <a:rPr lang="en-US" sz="2000" dirty="0"/>
                 <a:t>Convolution 3x3x3</a:t>
               </a:r>
-              <a:endParaRPr lang="en-US" sz="2000" dirty="0"/>
             </a:p>
           </p:txBody>
         </p:sp>
@@ -25221,13 +29987,8 @@
               </a:r>
               <a:r>
                 <a:rPr lang="en-US" sz="2000" dirty="0"/>
-                <a:t> </a:t>
+                <a:t> Convolution 2x2x2</a:t>
               </a:r>
-              <a:r>
-                <a:rPr lang="en-US" sz="2000" dirty="0" smtClean="0"/>
-                <a:t>Convolution 2x2x2</a:t>
-              </a:r>
-              <a:endParaRPr lang="en-US" sz="2000" dirty="0"/>
             </a:p>
           </p:txBody>
         </p:sp>
@@ -25254,12 +30015,8 @@
             <a:lstStyle/>
             <a:p>
               <a:r>
-                <a:rPr lang="en-US" sz="2000" dirty="0" smtClean="0"/>
-                <a:t>Convolution </a:t>
-              </a:r>
-              <a:r>
                 <a:rPr lang="en-US" sz="2000" dirty="0"/>
-                <a:t>3x3x3</a:t>
+                <a:t>Convolution 3x3x3</a:t>
               </a:r>
             </a:p>
           </p:txBody>
@@ -25287,10 +30044,9 @@
             <a:lstStyle/>
             <a:p>
               <a:r>
-                <a:rPr lang="en-US" sz="2000" dirty="0" smtClean="0"/>
+                <a:rPr lang="en-US" sz="2000" dirty="0"/>
                 <a:t>Convolution 1x1x1</a:t>
               </a:r>
-              <a:endParaRPr lang="en-US" sz="2000" dirty="0"/>
             </a:p>
           </p:txBody>
         </p:sp>
@@ -28593,7 +33349,7 @@
             <a:p>
               <a:pPr algn="ctr"/>
               <a:r>
-                <a:rPr lang="en-US" sz="1200" dirty="0" err="1" smtClean="0">
+                <a:rPr lang="en-US" sz="1200" dirty="0" err="1">
                   <a:solidFill>
                     <a:schemeClr val="tx1"/>
                   </a:solidFill>
@@ -28685,10 +33441,9 @@
             <a:lstStyle/>
             <a:p>
               <a:r>
-                <a:rPr lang="en-US" sz="2000" dirty="0" smtClean="0"/>
+                <a:rPr lang="en-US" sz="2000" dirty="0"/>
                 <a:t>Concatenation</a:t>
               </a:r>
-              <a:endParaRPr lang="en-US" sz="2000" dirty="0"/>
             </a:p>
           </p:txBody>
         </p:sp>
@@ -29699,17 +34454,10 @@
   <p:clrMapOvr>
     <a:masterClrMapping/>
   </p:clrMapOvr>
-  <p:timing>
-    <p:tnLst>
-      <p:par>
-        <p:cTn id="1" dur="indefinite" restart="never" nodeType="tmRoot"/>
-      </p:par>
-    </p:tnLst>
-  </p:timing>
 </p:sld>
 </file>
 
-<file path=ppt/slides/slide4.xml><?xml version="1.0" encoding="utf-8"?>
+<file path=ppt/slides/slide5.xml><?xml version="1.0" encoding="utf-8"?>
 <p:sld xmlns:a="http://schemas.openxmlformats.org/drawingml/2006/main" xmlns:r="http://schemas.openxmlformats.org/officeDocument/2006/relationships" xmlns:p="http://schemas.openxmlformats.org/presentationml/2006/main">
   <p:cSld>
     <p:spTree>
@@ -30061,25 +34809,24 @@
           <a:p>
             <a:pPr algn="ctr"/>
             <a:r>
-              <a:rPr lang="en-US" sz="2000" dirty="0" smtClean="0"/>
+              <a:rPr lang="en-US" sz="2000" dirty="0"/>
               <a:t>Bilinear </a:t>
             </a:r>
             <a:r>
-              <a:rPr lang="en-US" sz="2000" dirty="0" err="1" smtClean="0"/>
+              <a:rPr lang="en-US" sz="2000" dirty="0" err="1"/>
               <a:t>Upsample</a:t>
             </a:r>
             <a:r>
-              <a:rPr lang="en-US" sz="2000" dirty="0" smtClean="0"/>
+              <a:rPr lang="en-US" sz="2000" dirty="0"/>
               <a:t>,</a:t>
             </a:r>
           </a:p>
           <a:p>
             <a:pPr algn="ctr"/>
             <a:r>
-              <a:rPr lang="en-US" sz="2000" dirty="0" smtClean="0"/>
+              <a:rPr lang="en-US" sz="2000" dirty="0"/>
               <a:t>Convolution 3x3x3</a:t>
             </a:r>
-            <a:endParaRPr lang="en-US" sz="2000" dirty="0"/>
           </a:p>
         </p:txBody>
       </p:sp>
@@ -30111,13 +34858,8 @@
             </a:r>
             <a:r>
               <a:rPr lang="en-US" sz="2000" dirty="0"/>
-              <a:t> </a:t>
+              <a:t> Convolution 2x2x2</a:t>
             </a:r>
-            <a:r>
-              <a:rPr lang="en-US" sz="2000" dirty="0" smtClean="0"/>
-              <a:t>Convolution 2x2x2</a:t>
-            </a:r>
-            <a:endParaRPr lang="en-US" sz="2000" dirty="0"/>
           </a:p>
         </p:txBody>
       </p:sp>
@@ -30144,12 +34886,8 @@
           <a:lstStyle/>
           <a:p>
             <a:r>
-              <a:rPr lang="en-US" sz="2000" dirty="0" smtClean="0"/>
-              <a:t>Convolution </a:t>
-            </a:r>
-            <a:r>
               <a:rPr lang="en-US" sz="2000" dirty="0"/>
-              <a:t>3x3x3</a:t>
+              <a:t>Convolution 3x3x3</a:t>
             </a:r>
           </a:p>
         </p:txBody>
@@ -30177,10 +34915,9 @@
           <a:lstStyle/>
           <a:p>
             <a:r>
-              <a:rPr lang="en-US" sz="2000" dirty="0" smtClean="0"/>
+              <a:rPr lang="en-US" sz="2000" dirty="0"/>
               <a:t>Convolution 1x1x1</a:t>
             </a:r>
-            <a:endParaRPr lang="en-US" sz="2000" dirty="0"/>
           </a:p>
         </p:txBody>
       </p:sp>
@@ -33483,7 +38220,7 @@
           <a:p>
             <a:pPr algn="ctr"/>
             <a:r>
-              <a:rPr lang="en-US" sz="1200" dirty="0" err="1" smtClean="0">
+              <a:rPr lang="en-US" sz="1200" dirty="0" err="1">
                 <a:solidFill>
                   <a:schemeClr val="tx1"/>
                 </a:solidFill>
@@ -33575,10 +38312,9 @@
           <a:lstStyle/>
           <a:p>
             <a:r>
-              <a:rPr lang="en-US" sz="2000" dirty="0" smtClean="0"/>
+              <a:rPr lang="en-US" sz="2000" dirty="0"/>
               <a:t>Concatenation</a:t>
             </a:r>
-            <a:endParaRPr lang="en-US" sz="2000" dirty="0"/>
           </a:p>
         </p:txBody>
       </p:sp>
@@ -34592,17 +39328,10 @@
   <p:clrMapOvr>
     <a:masterClrMapping/>
   </p:clrMapOvr>
-  <p:timing>
-    <p:tnLst>
-      <p:par>
-        <p:cTn id="1" dur="indefinite" restart="never" nodeType="tmRoot"/>
-      </p:par>
-    </p:tnLst>
-  </p:timing>
 </p:sld>
 </file>
 
-<file path=ppt/slides/slide5.xml><?xml version="1.0" encoding="utf-8"?>
+<file path=ppt/slides/slide6.xml><?xml version="1.0" encoding="utf-8"?>
 <p:sld xmlns:a="http://schemas.openxmlformats.org/drawingml/2006/main" xmlns:r="http://schemas.openxmlformats.org/officeDocument/2006/relationships" xmlns:p="http://schemas.openxmlformats.org/presentationml/2006/main">
   <p:cSld>
     <p:spTree>
@@ -34884,7 +39613,7 @@
           <a:p>
             <a:pPr algn="ctr"/>
             <a:r>
-              <a:rPr lang="en-US" sz="1200" dirty="0" err="1" smtClean="0">
+              <a:rPr lang="en-US" sz="1200" dirty="0" err="1">
                 <a:solidFill>
                   <a:schemeClr val="tx1"/>
                 </a:solidFill>
@@ -34892,18 +39621,13 @@
               <a:t>DenseNet</a:t>
             </a:r>
             <a:r>
-              <a:rPr lang="en-US" sz="1200" dirty="0" smtClean="0">
+              <a:rPr lang="en-US" sz="1200" dirty="0">
                 <a:solidFill>
                   <a:schemeClr val="tx1"/>
                 </a:solidFill>
               </a:rPr>
               <a:t> 0</a:t>
             </a:r>
-            <a:endParaRPr lang="en-US" sz="1200" dirty="0">
-              <a:solidFill>
-                <a:schemeClr val="tx1"/>
-              </a:solidFill>
-            </a:endParaRPr>
           </a:p>
         </p:txBody>
       </p:sp>
@@ -34949,18 +39673,13 @@
           <a:p>
             <a:pPr algn="ctr"/>
             <a:r>
-              <a:rPr lang="en-US" sz="1200" dirty="0" smtClean="0">
+              <a:rPr lang="en-US" sz="1200" dirty="0">
                 <a:solidFill>
                   <a:schemeClr val="tx1"/>
                 </a:solidFill>
               </a:rPr>
               <a:t>Dense Block 4</a:t>
             </a:r>
-            <a:endParaRPr lang="en-US" sz="1200" dirty="0">
-              <a:solidFill>
-                <a:schemeClr val="tx1"/>
-              </a:solidFill>
-            </a:endParaRPr>
           </a:p>
         </p:txBody>
       </p:sp>
@@ -35020,18 +39739,13 @@
             <a:p>
               <a:pPr algn="ctr"/>
               <a:r>
-                <a:rPr lang="en-US" sz="1200" dirty="0" smtClean="0">
+                <a:rPr lang="en-US" sz="1200" dirty="0">
                   <a:solidFill>
                     <a:schemeClr val="tx1"/>
                   </a:solidFill>
                 </a:rPr>
                 <a:t>Transition Block 3</a:t>
               </a:r>
-              <a:endParaRPr lang="en-US" sz="1200" dirty="0">
-                <a:solidFill>
-                  <a:schemeClr val="tx1"/>
-                </a:solidFill>
-              </a:endParaRPr>
             </a:p>
           </p:txBody>
         </p:sp>
@@ -35194,18 +39908,13 @@
             <a:p>
               <a:pPr algn="ctr"/>
               <a:r>
-                <a:rPr lang="en-US" sz="1200" dirty="0" smtClean="0">
+                <a:rPr lang="en-US" sz="1200" dirty="0">
                   <a:solidFill>
                     <a:schemeClr val="tx1"/>
                   </a:solidFill>
                 </a:rPr>
                 <a:t>Transition Block 2</a:t>
               </a:r>
-              <a:endParaRPr lang="en-US" sz="1200" dirty="0">
-                <a:solidFill>
-                  <a:schemeClr val="tx1"/>
-                </a:solidFill>
-              </a:endParaRPr>
             </a:p>
           </p:txBody>
         </p:sp>
@@ -35368,18 +40077,13 @@
             <a:p>
               <a:pPr algn="ctr"/>
               <a:r>
-                <a:rPr lang="en-US" sz="1200" dirty="0" smtClean="0">
+                <a:rPr lang="en-US" sz="1200" dirty="0">
                   <a:solidFill>
                     <a:schemeClr val="tx1"/>
                   </a:solidFill>
                 </a:rPr>
                 <a:t>Transition Block 1</a:t>
               </a:r>
-              <a:endParaRPr lang="en-US" sz="1200" dirty="0">
-                <a:solidFill>
-                  <a:schemeClr val="tx1"/>
-                </a:solidFill>
-              </a:endParaRPr>
             </a:p>
           </p:txBody>
         </p:sp>
@@ -35528,18 +40232,13 @@
           <a:p>
             <a:pPr algn="ctr"/>
             <a:r>
-              <a:rPr lang="en-US" sz="1200" dirty="0" smtClean="0">
+              <a:rPr lang="en-US" sz="1200" dirty="0">
                 <a:solidFill>
                   <a:schemeClr val="tx1"/>
                 </a:solidFill>
               </a:rPr>
               <a:t>2D Features</a:t>
             </a:r>
-            <a:endParaRPr lang="en-US" sz="1200" dirty="0">
-              <a:solidFill>
-                <a:schemeClr val="tx1"/>
-              </a:solidFill>
-            </a:endParaRPr>
           </a:p>
         </p:txBody>
       </p:sp>
@@ -35585,18 +40284,13 @@
           <a:p>
             <a:pPr algn="ctr"/>
             <a:r>
-              <a:rPr lang="en-US" sz="1200" dirty="0" smtClean="0">
+              <a:rPr lang="en-US" sz="1200" dirty="0">
                 <a:solidFill>
                   <a:schemeClr val="tx1"/>
                 </a:solidFill>
               </a:rPr>
               <a:t>Final Prediction</a:t>
             </a:r>
-            <a:endParaRPr lang="en-US" sz="1200" dirty="0">
-              <a:solidFill>
-                <a:schemeClr val="tx1"/>
-              </a:solidFill>
-            </a:endParaRPr>
           </a:p>
         </p:txBody>
       </p:sp>
@@ -35645,7 +40339,7 @@
           <a:p>
             <a:pPr algn="ctr"/>
             <a:r>
-              <a:rPr lang="en-US" sz="1200" dirty="0" err="1" smtClean="0">
+              <a:rPr lang="en-US" sz="1200" dirty="0" err="1">
                 <a:solidFill>
                   <a:schemeClr val="tx1"/>
                 </a:solidFill>
@@ -35894,18 +40588,17 @@
             <a:p>
               <a:pPr algn="ctr"/>
               <a:r>
-                <a:rPr lang="en-US" sz="2000" dirty="0" smtClean="0"/>
+                <a:rPr lang="en-US" sz="2000" dirty="0"/>
                 <a:t>Bilinear </a:t>
               </a:r>
               <a:r>
-                <a:rPr lang="en-US" sz="2000" dirty="0" err="1" smtClean="0"/>
+                <a:rPr lang="en-US" sz="2000" dirty="0" err="1"/>
                 <a:t>Upsample</a:t>
               </a:r>
               <a:r>
-                <a:rPr lang="en-US" sz="2000" dirty="0" smtClean="0"/>
+                <a:rPr lang="en-US" sz="2000" dirty="0"/>
                 <a:t> 2x2</a:t>
               </a:r>
-              <a:endParaRPr lang="en-US" sz="2000" dirty="0"/>
             </a:p>
           </p:txBody>
         </p:sp>
@@ -35932,10 +40625,9 @@
             <a:lstStyle/>
             <a:p>
               <a:r>
-                <a:rPr lang="en-US" sz="2000" dirty="0" smtClean="0"/>
+                <a:rPr lang="en-US" sz="2000" dirty="0"/>
                 <a:t>Average Pooling 2x2</a:t>
               </a:r>
-              <a:endParaRPr lang="en-US" sz="2000" dirty="0"/>
             </a:p>
           </p:txBody>
         </p:sp>
@@ -35962,10 +40654,9 @@
             <a:lstStyle/>
             <a:p>
               <a:r>
-                <a:rPr lang="en-US" sz="2000" dirty="0" smtClean="0"/>
+                <a:rPr lang="en-US" sz="2000" dirty="0"/>
                 <a:t>Add</a:t>
               </a:r>
-              <a:endParaRPr lang="en-US" sz="2000" dirty="0"/>
             </a:p>
           </p:txBody>
         </p:sp>
@@ -36090,21 +40781,20 @@
             <a:lstStyle/>
             <a:p>
               <a:r>
-                <a:rPr lang="en-US" sz="2000" dirty="0" smtClean="0"/>
+                <a:rPr lang="en-US" sz="2000" dirty="0"/>
                 <a:t>Convolution 3x3, BN</a:t>
               </a:r>
               <a:br>
-                <a:rPr lang="en-US" sz="2000" dirty="0" smtClean="0"/>
+                <a:rPr lang="en-US" sz="2000" dirty="0"/>
               </a:br>
               <a:r>
-                <a:rPr lang="en-US" sz="2000" dirty="0" err="1" smtClean="0"/>
+                <a:rPr lang="en-US" sz="2000" dirty="0" err="1"/>
                 <a:t>relu</a:t>
               </a:r>
               <a:r>
-                <a:rPr lang="en-US" sz="2000" dirty="0" smtClean="0"/>
+                <a:rPr lang="en-US" sz="2000" dirty="0"/>
                 <a:t> activation</a:t>
               </a:r>
-              <a:endParaRPr lang="en-US" sz="2000" dirty="0"/>
             </a:p>
           </p:txBody>
         </p:sp>
@@ -36564,7 +41254,7 @@
                     <a:p>
                       <a:pPr algn="ctr" fontAlgn="ctr"/>
                       <a:r>
-                        <a:rPr lang="en-US" sz="2000" b="0" i="0" u="none" strike="noStrike" dirty="0" smtClean="0">
+                        <a:rPr lang="en-US" sz="2000" b="0" i="0" u="none" strike="noStrike" dirty="0">
                           <a:solidFill>
                             <a:srgbClr val="000000"/>
                           </a:solidFill>
@@ -36574,7 +41264,7 @@
                         <a:t>3D </a:t>
                       </a:r>
                       <a:r>
-                        <a:rPr lang="en-US" sz="2000" b="0" i="0" u="none" strike="noStrike" dirty="0" err="1" smtClean="0">
+                        <a:rPr lang="en-US" sz="2000" b="0" i="0" u="none" strike="noStrike" dirty="0" err="1">
                           <a:solidFill>
                             <a:srgbClr val="000000"/>
                           </a:solidFill>
@@ -36658,7 +41348,7 @@
                     <a:p>
                       <a:pPr algn="ctr" fontAlgn="ctr"/>
                       <a:r>
-                        <a:rPr lang="en-US" sz="2000" b="0" i="0" u="none" strike="noStrike" dirty="0" smtClean="0">
+                        <a:rPr lang="en-US" sz="2000" b="0" i="0" u="none" strike="noStrike" dirty="0">
                           <a:solidFill>
                             <a:srgbClr val="000000"/>
                           </a:solidFill>
@@ -36667,13 +41357,6 @@
                         </a:rPr>
                         <a:t>2D DenseUNet-121</a:t>
                       </a:r>
-                      <a:endParaRPr lang="en-US" sz="2000" b="0" i="0" u="none" strike="noStrike" dirty="0">
-                        <a:solidFill>
-                          <a:srgbClr val="000000"/>
-                        </a:solidFill>
-                        <a:effectLst/>
-                        <a:latin typeface="Calibri" panose="020F0502020204030204" pitchFamily="34" charset="0"/>
-                      </a:endParaRPr>
                     </a:p>
                   </a:txBody>
                   <a:tcPr marL="9525" marR="9525" marT="9525" marB="0" anchor="ctr">
@@ -36742,7 +41425,7 @@
                         <a:t>Hybrid </a:t>
                       </a:r>
                       <a:r>
-                        <a:rPr lang="en-US" sz="2000" b="0" i="0" u="none" strike="noStrike" dirty="0" err="1" smtClean="0">
+                        <a:rPr lang="en-US" sz="2000" b="0" i="0" u="none" strike="noStrike" dirty="0" err="1">
                           <a:solidFill>
                             <a:srgbClr val="000000"/>
                           </a:solidFill>
@@ -37048,7 +41731,7 @@
                     <a:p>
                       <a:pPr algn="ctr" fontAlgn="ctr"/>
                       <a:r>
-                        <a:rPr lang="en-US" sz="2000" b="0" i="0" u="none" strike="noStrike" dirty="0" smtClean="0">
+                        <a:rPr lang="en-US" sz="2000" b="0" i="0" u="none" strike="noStrike" dirty="0">
                           <a:solidFill>
                             <a:srgbClr val="000000"/>
                           </a:solidFill>
@@ -37061,7 +41744,7 @@
                     <a:p>
                       <a:pPr algn="ctr" fontAlgn="ctr"/>
                       <a:r>
-                        <a:rPr lang="en-US" sz="2000" b="0" i="0" u="none" strike="noStrike" dirty="0" smtClean="0">
+                        <a:rPr lang="en-US" sz="2000" b="0" i="0" u="none" strike="noStrike" dirty="0">
                           <a:solidFill>
                             <a:srgbClr val="000000"/>
                           </a:solidFill>
@@ -37070,13 +41753,6 @@
                         </a:rPr>
                         <a:t>Frozen</a:t>
                       </a:r>
-                      <a:endParaRPr lang="en-US" sz="2000" b="0" i="0" u="none" strike="noStrike" dirty="0">
-                        <a:solidFill>
-                          <a:srgbClr val="000000"/>
-                        </a:solidFill>
-                        <a:effectLst/>
-                        <a:latin typeface="Calibri" panose="020F0502020204030204" pitchFamily="34" charset="0"/>
-                      </a:endParaRPr>
                     </a:p>
                   </a:txBody>
                   <a:tcPr marL="9525" marR="9525" marT="9525" marB="0" anchor="ctr">
@@ -37125,7 +41801,7 @@
                     <a:p>
                       <a:pPr algn="ctr" fontAlgn="ctr"/>
                       <a:r>
-                        <a:rPr lang="en-US" sz="2000" b="0" i="0" u="none" strike="noStrike" dirty="0" smtClean="0">
+                        <a:rPr lang="en-US" sz="2000" b="0" i="0" u="none" strike="noStrike" dirty="0">
                           <a:solidFill>
                             <a:srgbClr val="000000"/>
                           </a:solidFill>
@@ -37138,7 +41814,7 @@
                     <a:p>
                       <a:pPr algn="ctr" fontAlgn="ctr"/>
                       <a:r>
-                        <a:rPr lang="en-US" sz="2000" b="0" i="0" u="none" strike="noStrike" dirty="0" smtClean="0">
+                        <a:rPr lang="en-US" sz="2000" b="0" i="0" u="none" strike="noStrike" dirty="0">
                           <a:solidFill>
                             <a:srgbClr val="000000"/>
                           </a:solidFill>
@@ -37147,13 +41823,6 @@
                         </a:rPr>
                         <a:t>Trainable</a:t>
                       </a:r>
-                      <a:endParaRPr lang="en-US" sz="2000" b="0" i="0" u="none" strike="noStrike" dirty="0">
-                        <a:solidFill>
-                          <a:srgbClr val="000000"/>
-                        </a:solidFill>
-                        <a:effectLst/>
-                        <a:latin typeface="Calibri" panose="020F0502020204030204" pitchFamily="34" charset="0"/>
-                      </a:endParaRPr>
                     </a:p>
                   </a:txBody>
                   <a:tcPr marL="9525" marR="9525" marT="9525" marB="0" anchor="ctr">
@@ -37202,7 +41871,7 @@
                     <a:p>
                       <a:pPr algn="ctr" fontAlgn="ctr"/>
                       <a:r>
-                        <a:rPr lang="en-US" sz="2000" b="0" i="0" u="none" strike="noStrike" dirty="0" smtClean="0">
+                        <a:rPr lang="en-US" sz="2000" b="0" i="0" u="none" strike="noStrike" dirty="0">
                           <a:solidFill>
                             <a:srgbClr val="000000"/>
                           </a:solidFill>
@@ -37215,7 +41884,7 @@
                     <a:p>
                       <a:pPr algn="ctr" fontAlgn="ctr"/>
                       <a:r>
-                        <a:rPr lang="en-US" sz="2000" b="0" i="0" u="none" strike="noStrike" dirty="0" smtClean="0">
+                        <a:rPr lang="en-US" sz="2000" b="0" i="0" u="none" strike="noStrike" dirty="0">
                           <a:solidFill>
                             <a:srgbClr val="000000"/>
                           </a:solidFill>
@@ -37224,13 +41893,6 @@
                         </a:rPr>
                         <a:t>Frozen</a:t>
                       </a:r>
-                      <a:endParaRPr lang="en-US" sz="2000" b="0" i="0" u="none" strike="noStrike" dirty="0">
-                        <a:solidFill>
-                          <a:srgbClr val="000000"/>
-                        </a:solidFill>
-                        <a:effectLst/>
-                        <a:latin typeface="Calibri" panose="020F0502020204030204" pitchFamily="34" charset="0"/>
-                      </a:endParaRPr>
                     </a:p>
                   </a:txBody>
                   <a:tcPr marL="9525" marR="9525" marT="9525" marB="0" anchor="ctr">
@@ -37279,7 +41941,7 @@
                     <a:p>
                       <a:pPr algn="ctr" fontAlgn="ctr"/>
                       <a:r>
-                        <a:rPr lang="en-US" sz="2000" b="0" i="0" u="none" strike="noStrike" dirty="0" smtClean="0">
+                        <a:rPr lang="en-US" sz="2000" b="0" i="0" u="none" strike="noStrike" dirty="0">
                           <a:solidFill>
                             <a:srgbClr val="000000"/>
                           </a:solidFill>
@@ -37292,7 +41954,7 @@
                     <a:p>
                       <a:pPr algn="ctr" fontAlgn="ctr"/>
                       <a:r>
-                        <a:rPr lang="en-US" sz="2000" b="0" i="0" u="none" strike="noStrike" dirty="0" smtClean="0">
+                        <a:rPr lang="en-US" sz="2000" b="0" i="0" u="none" strike="noStrike" dirty="0">
                           <a:solidFill>
                             <a:srgbClr val="000000"/>
                           </a:solidFill>
@@ -37301,13 +41963,6 @@
                         </a:rPr>
                         <a:t>Trainable</a:t>
                       </a:r>
-                      <a:endParaRPr lang="en-US" sz="2000" b="0" i="0" u="none" strike="noStrike" dirty="0">
-                        <a:solidFill>
-                          <a:srgbClr val="000000"/>
-                        </a:solidFill>
-                        <a:effectLst/>
-                        <a:latin typeface="Calibri" panose="020F0502020204030204" pitchFamily="34" charset="0"/>
-                      </a:endParaRPr>
                     </a:p>
                   </a:txBody>
                   <a:tcPr marL="9525" marR="9525" marT="9525" marB="0" anchor="ctr">
@@ -37363,7 +42018,7 @@
                     <a:p>
                       <a:pPr algn="ctr" fontAlgn="ctr"/>
                       <a:r>
-                        <a:rPr lang="en-US" sz="2000" b="0" i="0" u="none" strike="noStrike" dirty="0" smtClean="0">
+                        <a:rPr lang="en-US" sz="2000" b="0" i="0" u="none" strike="noStrike" dirty="0">
                           <a:solidFill>
                             <a:srgbClr val="000000"/>
                           </a:solidFill>
@@ -37373,7 +42028,7 @@
                         <a:t>Val</a:t>
                       </a:r>
                       <a:r>
-                        <a:rPr lang="en-US" sz="2000" b="0" i="0" u="none" strike="noStrike" baseline="0" dirty="0" smtClean="0">
+                        <a:rPr lang="en-US" sz="2000" b="0" i="0" u="none" strike="noStrike" baseline="0" dirty="0">
                           <a:solidFill>
                             <a:srgbClr val="000000"/>
                           </a:solidFill>
@@ -37871,17 +42526,10 @@
   <p:clrMapOvr>
     <a:masterClrMapping/>
   </p:clrMapOvr>
-  <p:timing>
-    <p:tnLst>
-      <p:par>
-        <p:cTn id="1" dur="indefinite" restart="never" nodeType="tmRoot"/>
-      </p:par>
-    </p:tnLst>
-  </p:timing>
 </p:sld>
 </file>
 
-<file path=ppt/slides/slide6.xml><?xml version="1.0" encoding="utf-8"?>
+<file path=ppt/slides/slide7.xml><?xml version="1.0" encoding="utf-8"?>
 <p:sld xmlns:a="http://schemas.openxmlformats.org/drawingml/2006/main" xmlns:r="http://schemas.openxmlformats.org/officeDocument/2006/relationships" xmlns:p="http://schemas.openxmlformats.org/presentationml/2006/main">
   <p:cSld>
     <p:spTree>
@@ -37988,18 +42636,13 @@
           <a:p>
             <a:pPr algn="ctr"/>
             <a:r>
-              <a:rPr lang="en-US" sz="1200" dirty="0" smtClean="0">
+              <a:rPr lang="en-US" sz="1200" dirty="0">
                 <a:solidFill>
                   <a:schemeClr val="tx1"/>
                 </a:solidFill>
               </a:rPr>
               <a:t>2D Features</a:t>
             </a:r>
-            <a:endParaRPr lang="en-US" sz="1200" dirty="0">
-              <a:solidFill>
-                <a:schemeClr val="tx1"/>
-              </a:solidFill>
-            </a:endParaRPr>
           </a:p>
         </p:txBody>
       </p:sp>
@@ -38219,25 +42862,24 @@
           <a:p>
             <a:pPr algn="ctr"/>
             <a:r>
-              <a:rPr lang="en-US" sz="2000" dirty="0" smtClean="0"/>
+              <a:rPr lang="en-US" sz="2000" dirty="0"/>
               <a:t>Bilinear </a:t>
             </a:r>
             <a:r>
-              <a:rPr lang="en-US" sz="2000" dirty="0" err="1" smtClean="0"/>
+              <a:rPr lang="en-US" sz="2000" dirty="0" err="1"/>
               <a:t>Upsample</a:t>
             </a:r>
             <a:r>
-              <a:rPr lang="en-US" sz="2000" dirty="0" smtClean="0"/>
+              <a:rPr lang="en-US" sz="2000" dirty="0"/>
               <a:t>,</a:t>
             </a:r>
           </a:p>
           <a:p>
             <a:pPr algn="ctr"/>
             <a:r>
-              <a:rPr lang="en-US" sz="2000" dirty="0" smtClean="0"/>
+              <a:rPr lang="en-US" sz="2000" dirty="0"/>
               <a:t>Convolution 3x3x3</a:t>
             </a:r>
-            <a:endParaRPr lang="en-US" sz="2000" dirty="0"/>
           </a:p>
         </p:txBody>
       </p:sp>
@@ -38269,13 +42911,8 @@
             </a:r>
             <a:r>
               <a:rPr lang="en-US" sz="2000" dirty="0"/>
-              <a:t> </a:t>
+              <a:t> Convolution 2x2x2</a:t>
             </a:r>
-            <a:r>
-              <a:rPr lang="en-US" sz="2000" dirty="0" smtClean="0"/>
-              <a:t>Convolution 2x2x2</a:t>
-            </a:r>
-            <a:endParaRPr lang="en-US" sz="2000" dirty="0"/>
           </a:p>
         </p:txBody>
       </p:sp>
@@ -38302,12 +42939,8 @@
           <a:lstStyle/>
           <a:p>
             <a:r>
-              <a:rPr lang="en-US" sz="2000" dirty="0" smtClean="0"/>
-              <a:t>Convolution </a:t>
-            </a:r>
-            <a:r>
               <a:rPr lang="en-US" sz="2000" dirty="0"/>
-              <a:t>3x3x3</a:t>
+              <a:t>Convolution 3x3x3</a:t>
             </a:r>
           </a:p>
         </p:txBody>
@@ -38335,10 +42968,9 @@
           <a:lstStyle/>
           <a:p>
             <a:r>
-              <a:rPr lang="en-US" sz="2000" dirty="0" smtClean="0"/>
+              <a:rPr lang="en-US" sz="2000" dirty="0"/>
               <a:t>Convolution 1x1x1</a:t>
             </a:r>
-            <a:endParaRPr lang="en-US" sz="2000" dirty="0"/>
           </a:p>
         </p:txBody>
       </p:sp>
@@ -41583,7 +46215,7 @@
           <a:p>
             <a:pPr algn="ctr"/>
             <a:r>
-              <a:rPr lang="en-US" sz="1200" dirty="0" err="1" smtClean="0">
+              <a:rPr lang="en-US" sz="1200" dirty="0" err="1">
                 <a:solidFill>
                   <a:schemeClr val="tx1"/>
                 </a:solidFill>
@@ -41675,10 +46307,9 @@
           <a:lstStyle/>
           <a:p>
             <a:r>
-              <a:rPr lang="en-US" sz="2000" dirty="0" smtClean="0"/>
+              <a:rPr lang="en-US" sz="2000" dirty="0"/>
               <a:t>Concatenation</a:t>
             </a:r>
-            <a:endParaRPr lang="en-US" sz="2000" dirty="0"/>
           </a:p>
         </p:txBody>
       </p:sp>
@@ -42985,10 +47616,9 @@
           <a:lstStyle/>
           <a:p>
             <a:r>
-              <a:rPr lang="en-US" sz="2400" dirty="0" smtClean="0"/>
+              <a:rPr lang="en-US" sz="2400" dirty="0"/>
               <a:t>2D Pre-Trained Feature Extractor</a:t>
             </a:r>
-            <a:endParaRPr lang="en-US" sz="2400" dirty="0"/>
           </a:p>
         </p:txBody>
       </p:sp>
@@ -43016,14 +47646,10 @@
           <a:p>
             <a:r>
               <a:rPr lang="en-US" sz="2400" dirty="0"/>
-              <a:t>3</a:t>
+              <a:t>3D </a:t>
             </a:r>
             <a:r>
-              <a:rPr lang="en-US" sz="2400" dirty="0" smtClean="0"/>
-              <a:t>D </a:t>
-            </a:r>
-            <a:r>
-              <a:rPr lang="en-US" sz="2400" dirty="0" err="1" smtClean="0"/>
+              <a:rPr lang="en-US" sz="2400" dirty="0" err="1"/>
               <a:t>DenseNet</a:t>
             </a:r>
             <a:endParaRPr lang="en-US" sz="2400" dirty="0"/>
@@ -43053,14 +47679,13 @@
           <a:lstStyle/>
           <a:p>
             <a:r>
-              <a:rPr lang="en-US" sz="2000" dirty="0" err="1" smtClean="0"/>
+              <a:rPr lang="en-US" sz="2000" dirty="0" err="1"/>
               <a:t>DenseNet</a:t>
             </a:r>
             <a:r>
-              <a:rPr lang="en-US" sz="2000" dirty="0" smtClean="0"/>
+              <a:rPr lang="en-US" sz="2000" dirty="0"/>
               <a:t> 121</a:t>
             </a:r>
-            <a:endParaRPr lang="en-US" sz="2000" dirty="0"/>
           </a:p>
         </p:txBody>
       </p:sp>
@@ -43301,7 +47926,7 @@
           <a:p>
             <a:pPr algn="ctr"/>
             <a:r>
-              <a:rPr lang="en-US" sz="1200" dirty="0" err="1" smtClean="0">
+              <a:rPr lang="en-US" sz="1200" dirty="0" err="1">
                 <a:solidFill>
                   <a:schemeClr val="tx1"/>
                 </a:solidFill>
@@ -43309,18 +47934,13 @@
               <a:t>DenseNet</a:t>
             </a:r>
             <a:r>
-              <a:rPr lang="en-US" sz="1200" dirty="0" smtClean="0">
+              <a:rPr lang="en-US" sz="1200" dirty="0">
                 <a:solidFill>
                   <a:schemeClr val="tx1"/>
                 </a:solidFill>
               </a:rPr>
               <a:t> 0</a:t>
             </a:r>
-            <a:endParaRPr lang="en-US" sz="1200" dirty="0">
-              <a:solidFill>
-                <a:schemeClr val="tx1"/>
-              </a:solidFill>
-            </a:endParaRPr>
           </a:p>
         </p:txBody>
       </p:sp>
@@ -43366,18 +47986,13 @@
           <a:p>
             <a:pPr algn="ctr"/>
             <a:r>
-              <a:rPr lang="en-US" sz="1200" dirty="0" smtClean="0">
+              <a:rPr lang="en-US" sz="1200" dirty="0">
                 <a:solidFill>
                   <a:schemeClr val="tx1"/>
                 </a:solidFill>
               </a:rPr>
               <a:t>Dense Block 4</a:t>
             </a:r>
-            <a:endParaRPr lang="en-US" sz="1200" dirty="0">
-              <a:solidFill>
-                <a:schemeClr val="tx1"/>
-              </a:solidFill>
-            </a:endParaRPr>
           </a:p>
         </p:txBody>
       </p:sp>
@@ -43437,18 +48052,13 @@
             <a:p>
               <a:pPr algn="ctr"/>
               <a:r>
-                <a:rPr lang="en-US" sz="1200" dirty="0" smtClean="0">
+                <a:rPr lang="en-US" sz="1200" dirty="0">
                   <a:solidFill>
                     <a:schemeClr val="tx1"/>
                   </a:solidFill>
                 </a:rPr>
                 <a:t>Transition Block 3</a:t>
               </a:r>
-              <a:endParaRPr lang="en-US" sz="1200" dirty="0">
-                <a:solidFill>
-                  <a:schemeClr val="tx1"/>
-                </a:solidFill>
-              </a:endParaRPr>
             </a:p>
           </p:txBody>
         </p:sp>
@@ -43611,18 +48221,13 @@
             <a:p>
               <a:pPr algn="ctr"/>
               <a:r>
-                <a:rPr lang="en-US" sz="1200" dirty="0" smtClean="0">
+                <a:rPr lang="en-US" sz="1200" dirty="0">
                   <a:solidFill>
                     <a:schemeClr val="tx1"/>
                   </a:solidFill>
                 </a:rPr>
                 <a:t>Transition Block 2</a:t>
               </a:r>
-              <a:endParaRPr lang="en-US" sz="1200" dirty="0">
-                <a:solidFill>
-                  <a:schemeClr val="tx1"/>
-                </a:solidFill>
-              </a:endParaRPr>
             </a:p>
           </p:txBody>
         </p:sp>
@@ -43785,18 +48390,13 @@
             <a:p>
               <a:pPr algn="ctr"/>
               <a:r>
-                <a:rPr lang="en-US" sz="1200" dirty="0" smtClean="0">
+                <a:rPr lang="en-US" sz="1200" dirty="0">
                   <a:solidFill>
                     <a:schemeClr val="tx1"/>
                   </a:solidFill>
                 </a:rPr>
                 <a:t>Transition Block 1</a:t>
               </a:r>
-              <a:endParaRPr lang="en-US" sz="1200" dirty="0">
-                <a:solidFill>
-                  <a:schemeClr val="tx1"/>
-                </a:solidFill>
-              </a:endParaRPr>
             </a:p>
           </p:txBody>
         </p:sp>
@@ -43945,18 +48545,13 @@
           <a:p>
             <a:pPr algn="ctr"/>
             <a:r>
-              <a:rPr lang="en-US" sz="1200" dirty="0" smtClean="0">
+              <a:rPr lang="en-US" sz="1200" dirty="0">
                 <a:solidFill>
                   <a:schemeClr val="tx1"/>
                 </a:solidFill>
               </a:rPr>
               <a:t>2D Features</a:t>
             </a:r>
-            <a:endParaRPr lang="en-US" sz="1200" dirty="0">
-              <a:solidFill>
-                <a:schemeClr val="tx1"/>
-              </a:solidFill>
-            </a:endParaRPr>
           </a:p>
         </p:txBody>
       </p:sp>
@@ -44492,18 +49087,17 @@
           <a:p>
             <a:pPr algn="ctr"/>
             <a:r>
-              <a:rPr lang="en-US" sz="2000" dirty="0" smtClean="0"/>
+              <a:rPr lang="en-US" sz="2000" dirty="0"/>
               <a:t>Bilinear </a:t>
             </a:r>
             <a:r>
-              <a:rPr lang="en-US" sz="2000" dirty="0" err="1" smtClean="0"/>
+              <a:rPr lang="en-US" sz="2000" dirty="0" err="1"/>
               <a:t>Upsample</a:t>
             </a:r>
             <a:r>
-              <a:rPr lang="en-US" sz="2000" dirty="0" smtClean="0"/>
+              <a:rPr lang="en-US" sz="2000" dirty="0"/>
               <a:t> 2x2</a:t>
             </a:r>
-            <a:endParaRPr lang="en-US" sz="2000" dirty="0"/>
           </a:p>
         </p:txBody>
       </p:sp>
@@ -44530,10 +49124,9 @@
           <a:lstStyle/>
           <a:p>
             <a:r>
-              <a:rPr lang="en-US" sz="2000" dirty="0" smtClean="0"/>
+              <a:rPr lang="en-US" sz="2000" dirty="0"/>
               <a:t>Average Pooling 2x2</a:t>
             </a:r>
-            <a:endParaRPr lang="en-US" sz="2000" dirty="0"/>
           </a:p>
         </p:txBody>
       </p:sp>
@@ -44560,10 +49153,9 @@
           <a:lstStyle/>
           <a:p>
             <a:r>
-              <a:rPr lang="en-US" sz="2000" dirty="0" smtClean="0"/>
+              <a:rPr lang="en-US" sz="2000" dirty="0"/>
               <a:t>Add</a:t>
             </a:r>
-            <a:endParaRPr lang="en-US" sz="2000" dirty="0"/>
           </a:p>
         </p:txBody>
       </p:sp>
@@ -44688,21 +49280,20 @@
           <a:lstStyle/>
           <a:p>
             <a:r>
-              <a:rPr lang="en-US" sz="2000" dirty="0" smtClean="0"/>
+              <a:rPr lang="en-US" sz="2000" dirty="0"/>
               <a:t>Convolution 3x3, BN</a:t>
             </a:r>
             <a:br>
-              <a:rPr lang="en-US" sz="2000" dirty="0" smtClean="0"/>
+              <a:rPr lang="en-US" sz="2000" dirty="0"/>
             </a:br>
             <a:r>
-              <a:rPr lang="en-US" sz="2000" dirty="0" err="1" smtClean="0"/>
+              <a:rPr lang="en-US" sz="2000" dirty="0" err="1"/>
               <a:t>relu</a:t>
             </a:r>
             <a:r>
-              <a:rPr lang="en-US" sz="2000" dirty="0" smtClean="0"/>
+              <a:rPr lang="en-US" sz="2000" dirty="0"/>
               <a:t> activation</a:t>
             </a:r>
-            <a:endParaRPr lang="en-US" sz="2000" dirty="0"/>
           </a:p>
         </p:txBody>
       </p:sp>
@@ -44730,10 +49321,9 @@
           <a:p>
             <a:pPr algn="ctr"/>
             <a:r>
-              <a:rPr lang="en-US" sz="1100" dirty="0" smtClean="0"/>
+              <a:rPr lang="en-US" sz="1100" dirty="0"/>
               <a:t>b*16*128*128*3</a:t>
             </a:r>
-            <a:endParaRPr lang="en-US" sz="1100" dirty="0"/>
           </a:p>
         </p:txBody>
       </p:sp>
@@ -44861,18 +49451,13 @@
           <a:p>
             <a:pPr algn="ctr"/>
             <a:r>
-              <a:rPr lang="en-US" sz="1200" dirty="0" smtClean="0">
+              <a:rPr lang="en-US" sz="1200" dirty="0">
                 <a:solidFill>
                   <a:schemeClr val="tx1"/>
                 </a:solidFill>
               </a:rPr>
               <a:t>Prediction</a:t>
             </a:r>
-            <a:endParaRPr lang="en-US" sz="1200" dirty="0">
-              <a:solidFill>
-                <a:schemeClr val="tx1"/>
-              </a:solidFill>
-            </a:endParaRPr>
           </a:p>
         </p:txBody>
       </p:sp>
@@ -44951,29 +49536,20 @@
           <a:lstStyle/>
           <a:p>
             <a:r>
-              <a:rPr lang="en-US" sz="2000" dirty="0" smtClean="0"/>
-              <a:t>Convolution </a:t>
-            </a:r>
-            <a:r>
-              <a:rPr lang="en-US" sz="2000" dirty="0" smtClean="0"/>
-              <a:t>3x3x3, </a:t>
-            </a:r>
-            <a:r>
-              <a:rPr lang="en-US" sz="2000" dirty="0" smtClean="0"/>
-              <a:t>BN</a:t>
+              <a:rPr lang="en-US" sz="2000" dirty="0"/>
+              <a:t>Convolution 3x3x3, BN</a:t>
             </a:r>
             <a:br>
-              <a:rPr lang="en-US" sz="2000" dirty="0" smtClean="0"/>
+              <a:rPr lang="en-US" sz="2000" dirty="0"/>
             </a:br>
             <a:r>
-              <a:rPr lang="en-US" sz="2000" dirty="0" err="1" smtClean="0"/>
+              <a:rPr lang="en-US" sz="2000" dirty="0" err="1"/>
               <a:t>relu</a:t>
             </a:r>
             <a:r>
-              <a:rPr lang="en-US" sz="2000" dirty="0" smtClean="0"/>
+              <a:rPr lang="en-US" sz="2000" dirty="0"/>
               <a:t> activation</a:t>
             </a:r>
-            <a:endParaRPr lang="en-US" sz="2000" dirty="0"/>
           </a:p>
         </p:txBody>
       </p:sp>
@@ -44990,7 +49566,7 @@
 </p:sld>
 </file>
 
-<file path=ppt/slides/slide7.xml><?xml version="1.0" encoding="utf-8"?>
+<file path=ppt/slides/slide8.xml><?xml version="1.0" encoding="utf-8"?>
 <p:sld xmlns:a="http://schemas.openxmlformats.org/drawingml/2006/main" xmlns:r="http://schemas.openxmlformats.org/officeDocument/2006/relationships" xmlns:p="http://schemas.openxmlformats.org/presentationml/2006/main">
   <p:cSld>
     <p:spTree>
@@ -45023,10 +49599,9 @@
           <a:lstStyle/>
           <a:p>
             <a:r>
-              <a:rPr lang="en-US" dirty="0" smtClean="0"/>
+              <a:rPr lang="en-US" dirty="0"/>
               <a:t>3DCIR 18</a:t>
             </a:r>
-            <a:endParaRPr lang="en-US" dirty="0"/>
           </a:p>
         </p:txBody>
       </p:sp>
@@ -45134,7 +49709,7 @@
 </p:sld>
 </file>
 
-<file path=ppt/slides/slide8.xml><?xml version="1.0" encoding="utf-8"?>
+<file path=ppt/slides/slide9.xml><?xml version="1.0" encoding="utf-8"?>
 <p:sld xmlns:a="http://schemas.openxmlformats.org/drawingml/2006/main" xmlns:r="http://schemas.openxmlformats.org/officeDocument/2006/relationships" xmlns:p="http://schemas.openxmlformats.org/presentationml/2006/main">
   <p:cSld>
     <p:spTree>
@@ -45167,10 +49742,9 @@
           <a:lstStyle/>
           <a:p>
             <a:r>
-              <a:rPr lang="en-US" dirty="0" smtClean="0"/>
+              <a:rPr lang="en-US" dirty="0"/>
               <a:t>3DCIR 3</a:t>
             </a:r>
-            <a:endParaRPr lang="en-US" dirty="0"/>
           </a:p>
         </p:txBody>
       </p:sp>
@@ -45275,109 +49849,6 @@
   <p:clrMapOvr>
     <a:masterClrMapping/>
   </p:clrMapOvr>
-</p:sld>
-</file>
-
-<file path=ppt/slides/slide9.xml><?xml version="1.0" encoding="utf-8"?>
-<p:sld xmlns:a="http://schemas.openxmlformats.org/drawingml/2006/main" xmlns:r="http://schemas.openxmlformats.org/officeDocument/2006/relationships" xmlns:p="http://schemas.openxmlformats.org/presentationml/2006/main">
-  <p:cSld>
-    <p:spTree>
-      <p:nvGrpSpPr>
-        <p:cNvPr id="1" name=""/>
-        <p:cNvGrpSpPr/>
-        <p:nvPr/>
-      </p:nvGrpSpPr>
-      <p:grpSpPr>
-        <a:xfrm>
-          <a:off x="0" y="0"/>
-          <a:ext cx="0" cy="0"/>
-          <a:chOff x="0" y="0"/>
-          <a:chExt cx="0" cy="0"/>
-        </a:xfrm>
-      </p:grpSpPr>
-      <p:sp>
-        <p:nvSpPr>
-          <p:cNvPr id="2" name="Title 1"/>
-          <p:cNvSpPr>
-            <a:spLocks noGrp="1"/>
-          </p:cNvSpPr>
-          <p:nvPr>
-            <p:ph type="title"/>
-          </p:nvPr>
-        </p:nvSpPr>
-        <p:spPr/>
-        <p:txBody>
-          <a:bodyPr/>
-          <a:lstStyle/>
-          <a:p>
-            <a:r>
-              <a:rPr lang="en-US" dirty="0" smtClean="0"/>
-              <a:t>Quantitative Comparison of MDA</a:t>
-            </a:r>
-            <a:endParaRPr lang="en-US" dirty="0"/>
-          </a:p>
-        </p:txBody>
-      </p:sp>
-      <p:sp>
-        <p:nvSpPr>
-          <p:cNvPr id="3" name="Content Placeholder 2"/>
-          <p:cNvSpPr>
-            <a:spLocks noGrp="1"/>
-          </p:cNvSpPr>
-          <p:nvPr>
-            <p:ph idx="1"/>
-          </p:nvPr>
-        </p:nvSpPr>
-        <p:spPr/>
-        <p:txBody>
-          <a:bodyPr/>
-          <a:lstStyle/>
-          <a:p>
-            <a:endParaRPr lang="en-US" dirty="0"/>
-          </a:p>
-        </p:txBody>
-      </p:sp>
-      <p:pic>
-        <p:nvPicPr>
-          <p:cNvPr id="4" name="Picture 3"/>
-          <p:cNvPicPr>
-            <a:picLocks noChangeAspect="1"/>
-          </p:cNvPicPr>
-          <p:nvPr/>
-        </p:nvPicPr>
-        <p:blipFill>
-          <a:blip r:embed="rId2"/>
-          <a:stretch>
-            <a:fillRect/>
-          </a:stretch>
-        </p:blipFill>
-        <p:spPr>
-          <a:xfrm>
-            <a:off x="1690687" y="6929437"/>
-            <a:ext cx="4962525" cy="4162425"/>
-          </a:xfrm>
-          <a:prstGeom prst="rect">
-            <a:avLst/>
-          </a:prstGeom>
-        </p:spPr>
-      </p:pic>
-    </p:spTree>
-    <p:extLst>
-      <p:ext uri="{BB962C8B-B14F-4D97-AF65-F5344CB8AC3E}">
-        <p14:creationId xmlns:p14="http://schemas.microsoft.com/office/powerpoint/2010/main" val="1925429846"/>
-      </p:ext>
-    </p:extLst>
-  </p:cSld>
-  <p:clrMapOvr>
-    <a:masterClrMapping/>
-  </p:clrMapOvr>
-  <p:timing>
-    <p:tnLst>
-      <p:par>
-        <p:cTn id="1" dur="indefinite" restart="never" nodeType="tmRoot"/>
-      </p:par>
-    </p:tnLst>
-  </p:timing>
 </p:sld>
 </file>
 
